--- a/output/andpad_soukai_ai_deck.pptx
+++ b/output/andpad_soukai_ai_deck.pptx
@@ -11,6 +11,7 @@
     <p:sldId id="259" r:id="rId10"/>
     <p:sldId id="260" r:id="rId11"/>
     <p:sldId id="261" r:id="rId12"/>
+    <p:sldId id="262" r:id="rId13"/>
   </p:sldIdLst>
   <p:sldSz cx="12191695" cy="6858000" type="screen4x3"/>
   <p:notesSz cx="6858000" cy="9144000"/>
@@ -5132,7 +5133,7 @@
                 <a:latin typeface="Consolas"/>
                 <a:ea typeface="Consolas"/>
               </a:rPr>
-              <a:t>AI市場の盛り上がりは、どれくらいの規模か</a:t>
+              <a:t>① グローバル：AI市場の盛り上がりは、どれくらいの規模か</a:t>
             </a:r>
           </a:p>
         </p:txBody>
@@ -5590,7 +5591,7 @@
                 <a:latin typeface="Noto Sans JP"/>
                 <a:ea typeface="Noto Sans JP"/>
               </a:rPr>
-              <a:t>13倍</a:t>
+              <a:t>約780兆円</a:t>
             </a:r>
           </a:p>
         </p:txBody>
@@ -5636,7 +5637,7 @@
                 <a:latin typeface="Noto Sans JP"/>
                 <a:ea typeface="Noto Sans JP"/>
               </a:rPr>
-              <a:t>国内DC・半導体の最大電力（10年で）</a:t>
+              <a:t>世界のAI DC投資（2030年までの累計）</a:t>
             </a:r>
           </a:p>
         </p:txBody>
@@ -5682,7 +5683,7 @@
                 <a:latin typeface="Noto Sans JP"/>
                 <a:ea typeface="Noto Sans JP"/>
               </a:rPr>
-              <a:t>DC/半導体工場の新増設に伴う最大需要電力は 56万kW→715万kW（'25→'34年度・OCCTO見通し）。</a:t>
+              <a:t>生成AI対応DCへの設備投資は2030年までに約5.2兆ドル（総DC投資は約6.7兆ドル）に達する見込み（McKinsey）。</a:t>
             </a:r>
           </a:p>
         </p:txBody>
@@ -6166,7 +6167,7 @@
                 <a:latin typeface="Noto Sans JP"/>
                 <a:ea typeface="Noto Sans JP"/>
               </a:rPr>
-              <a:t>この“物理”を作るのは、</a:t>
+              <a:t>では、これは</a:t>
             </a:r>
             <a:r>
               <a:rPr sz="1500" b="1">
@@ -6176,7 +6177,7 @@
                 <a:latin typeface="Noto Sans JP"/>
                 <a:ea typeface="Noto Sans JP"/>
               </a:rPr>
-              <a:t>日本の製造業</a:t>
+              <a:t>日本</a:t>
             </a:r>
             <a:r>
               <a:rPr sz="1500" b="1">
@@ -6186,7 +6187,7 @@
                 <a:latin typeface="Noto Sans JP"/>
                 <a:ea typeface="Noto Sans JP"/>
               </a:rPr>
-              <a:t>。</a:t>
+              <a:t>にどう効くのか？</a:t>
             </a:r>
             <a:r>
               <a:rPr sz="1500" b="1">
@@ -6196,7 +6197,7 @@
                 <a:latin typeface="Noto Sans JP"/>
                 <a:ea typeface="Noto Sans JP"/>
               </a:rPr>
-              <a:t>世界のAIマネーが、国内の受注として現場に降ってくる。</a:t>
+              <a:t>——実は、国内市場も“桁”が変わっている。</a:t>
             </a:r>
           </a:p>
         </p:txBody>
@@ -6396,7 +6397,7 @@
                 <a:latin typeface="Consolas"/>
                 <a:ea typeface="Consolas"/>
               </a:rPr>
-              <a:t>AI需要は、バリューチェーンのどこに効くのか</a:t>
+              <a:t>② 日本ではどうか — 国内市場も、桁が変わった</a:t>
             </a:r>
           </a:p>
         </p:txBody>
@@ -6442,7 +6443,7 @@
                 <a:latin typeface="Noto Sans JP"/>
                 <a:ea typeface="Noto Sans JP"/>
               </a:rPr>
-              <a:t>世界のAIマネーは、日本の製造業のこの現場に着地している。</a:t>
+              <a:t>世界のAIマネーは、実額で日本にも流れ込んでいる。</a:t>
             </a:r>
           </a:p>
         </p:txBody>
@@ -6499,19 +6500,21 @@
         </p:nvSpPr>
         <p:spPr>
           <a:xfrm>
-            <a:off x="777240" y="1417320"/>
-            <a:ext cx="896112" cy="786384"/>
+            <a:off x="832103" y="1417320"/>
+            <a:ext cx="3435096" cy="2194560"/>
           </a:xfrm>
           <a:prstGeom prst="roundRect">
             <a:avLst>
-              <a:gd name="adj" fmla="val 9000"/>
+              <a:gd name="adj" fmla="val 5000"/>
             </a:avLst>
           </a:prstGeom>
           <a:solidFill>
-            <a:srgbClr val="454B54"/>
+            <a:srgbClr val="FFFFFF"/>
           </a:solidFill>
-          <a:ln>
-            <a:noFill/>
+          <a:ln w="16510">
+            <a:solidFill>
+              <a:srgbClr val="F3C7CD"/>
+            </a:solidFill>
           </a:ln>
           <a:effectLst/>
         </p:spPr>
@@ -6539,85 +6542,16 @@
       </p:sp>
       <p:sp>
         <p:nvSpPr>
-          <p:cNvPr id="9" name="TextBox 8"/>
-          <p:cNvSpPr txBox="1"/>
-          <p:nvPr/>
-        </p:nvSpPr>
-        <p:spPr>
-          <a:xfrm>
-            <a:off x="777240" y="1417320"/>
-            <a:ext cx="896112" cy="786384"/>
-          </a:xfrm>
-          <a:prstGeom prst="rect">
-            <a:avLst/>
-          </a:prstGeom>
-          <a:noFill/>
-        </p:spPr>
-        <p:txBody>
-          <a:bodyPr wrap="square" anchor="ctr" lIns="0" rIns="0" tIns="0" bIns="0">
-            <a:spAutoFit/>
-          </a:bodyPr>
-          <a:lstStyle/>
-          <a:p>
-            <a:pPr algn="ctr">
-              <a:lnSpc>
-                <a:spcPct val="100000"/>
-              </a:lnSpc>
-              <a:spcBef>
-                <a:spcPts val="0"/>
-              </a:spcBef>
-              <a:spcAft>
-                <a:spcPts val="0"/>
-              </a:spcAft>
-            </a:pPr>
-            <a:r>
-              <a:rPr sz="800" b="1" spc="100">
-                <a:solidFill>
-                  <a:srgbClr val="D7DBE0"/>
-                </a:solidFill>
-                <a:latin typeface="Consolas"/>
-                <a:ea typeface="Consolas"/>
-              </a:rPr>
-              <a:t>起点</a:t>
-            </a:r>
-          </a:p>
-          <a:p>
-            <a:pPr algn="ctr">
-              <a:lnSpc>
-                <a:spcPct val="100000"/>
-              </a:lnSpc>
-              <a:spcBef>
-                <a:spcPts val="0"/>
-              </a:spcBef>
-              <a:spcAft>
-                <a:spcPts val="0"/>
-              </a:spcAft>
-            </a:pPr>
-            <a:r>
-              <a:rPr sz="1200" b="1">
-                <a:solidFill>
-                  <a:srgbClr val="FFFFFF"/>
-                </a:solidFill>
-                <a:latin typeface="Noto Sans JP"/>
-                <a:ea typeface="Noto Sans JP"/>
-              </a:rPr>
-              <a:t>AI需要</a:t>
-            </a:r>
-          </a:p>
-        </p:txBody>
-      </p:sp>
-      <p:sp>
-        <p:nvSpPr>
-          <p:cNvPr id="10" name="Chevron 9"/>
+          <p:cNvPr id="9" name="Rectangle 8"/>
           <p:cNvSpPr/>
           <p:nvPr/>
         </p:nvSpPr>
         <p:spPr>
           <a:xfrm>
-            <a:off x="1764792" y="1417320"/>
-            <a:ext cx="2053742" cy="786384"/>
-          </a:xfrm>
-          <a:prstGeom prst="chevron">
+            <a:off x="832103" y="1417320"/>
+            <a:ext cx="3435096" cy="100584"/>
+          </a:xfrm>
+          <a:prstGeom prst="rect">
             <a:avLst/>
           </a:prstGeom>
           <a:solidFill>
@@ -6645,19 +6579,21 @@
         <p:txBody>
           <a:bodyPr rtlCol="0" anchor="ctr"/>
           <a:lstStyle/>
-          <a:p/>
-        </p:txBody>
-      </p:sp>
-      <p:sp>
-        <p:nvSpPr>
-          <p:cNvPr id="11" name="TextBox 10"/>
+          <a:p>
+            <a:pPr algn="ctr"/>
+          </a:p>
+        </p:txBody>
+      </p:sp>
+      <p:sp>
+        <p:nvSpPr>
+          <p:cNvPr id="10" name="TextBox 9"/>
           <p:cNvSpPr txBox="1"/>
           <p:nvPr/>
         </p:nvSpPr>
         <p:spPr>
           <a:xfrm>
-            <a:off x="1746504" y="1417320"/>
-            <a:ext cx="1980590" cy="786384"/>
+            <a:off x="1051560" y="1664208"/>
+            <a:ext cx="3032760" cy="777240"/>
           </a:xfrm>
           <a:prstGeom prst="rect">
             <a:avLst/>
@@ -6670,63 +6606,132 @@
           </a:bodyPr>
           <a:lstStyle/>
           <a:p>
-            <a:pPr algn="ctr">
+            <a:pPr algn="l">
               <a:lnSpc>
-                <a:spcPct val="100000"/>
+                <a:spcPct val="106000"/>
               </a:lnSpc>
               <a:spcBef>
                 <a:spcPts val="0"/>
               </a:spcBef>
               <a:spcAft>
-                <a:spcPts val="0"/>
+                <a:spcPts val="400"/>
               </a:spcAft>
             </a:pPr>
             <a:r>
-              <a:rPr sz="800" b="1" spc="100">
-                <a:solidFill>
-                  <a:srgbClr val="FFC9CE"/>
-                </a:solidFill>
-                <a:latin typeface="Consolas"/>
-                <a:ea typeface="Consolas"/>
-              </a:rPr>
-              <a:t>01</a:t>
-            </a:r>
-          </a:p>
-          <a:p>
-            <a:pPr algn="ctr">
+              <a:rPr sz="3300" b="1">
+                <a:solidFill>
+                  <a:srgbClr val="E60012"/>
+                </a:solidFill>
+                <a:latin typeface="Noto Sans JP"/>
+                <a:ea typeface="Noto Sans JP"/>
+              </a:rPr>
+              <a:t>4〜4.8兆円</a:t>
+            </a:r>
+          </a:p>
+        </p:txBody>
+      </p:sp>
+      <p:sp>
+        <p:nvSpPr>
+          <p:cNvPr id="11" name="TextBox 10"/>
+          <p:cNvSpPr txBox="1"/>
+          <p:nvPr/>
+        </p:nvSpPr>
+        <p:spPr>
+          <a:xfrm>
+            <a:off x="1051560" y="2487168"/>
+            <a:ext cx="3014472" cy="457200"/>
+          </a:xfrm>
+          <a:prstGeom prst="rect">
+            <a:avLst/>
+          </a:prstGeom>
+          <a:noFill/>
+        </p:spPr>
+        <p:txBody>
+          <a:bodyPr wrap="square" anchor="t" lIns="0" rIns="0" tIns="0" bIns="0">
+            <a:spAutoFit/>
+          </a:bodyPr>
+          <a:lstStyle/>
+          <a:p>
+            <a:pPr algn="l">
               <a:lnSpc>
-                <a:spcPct val="100000"/>
+                <a:spcPct val="110000"/>
               </a:lnSpc>
               <a:spcBef>
                 <a:spcPts val="0"/>
               </a:spcBef>
               <a:spcAft>
-                <a:spcPts val="0"/>
+                <a:spcPts val="400"/>
               </a:spcAft>
             </a:pPr>
             <a:r>
-              <a:rPr sz="1100" b="1">
-                <a:solidFill>
-                  <a:srgbClr val="FFFFFF"/>
+              <a:rPr sz="1200" b="1">
+                <a:solidFill>
+                  <a:srgbClr val="1A1D21"/>
                 </a:solidFill>
                 <a:latin typeface="Noto Sans JP"/>
                 <a:ea typeface="Noto Sans JP"/>
               </a:rPr>
-              <a:t>発電・電源</a:t>
-            </a:r>
-          </a:p>
-        </p:txBody>
-      </p:sp>
-      <p:sp>
-        <p:nvSpPr>
-          <p:cNvPr id="12" name="Rounded Rectangle 11"/>
+              <a:t>米クラウド大手の対日DC投資（〜2030年）</a:t>
+            </a:r>
+          </a:p>
+        </p:txBody>
+      </p:sp>
+      <p:sp>
+        <p:nvSpPr>
+          <p:cNvPr id="12" name="TextBox 11"/>
+          <p:cNvSpPr txBox="1"/>
+          <p:nvPr/>
+        </p:nvSpPr>
+        <p:spPr>
+          <a:xfrm>
+            <a:off x="1051560" y="2944368"/>
+            <a:ext cx="2996184" cy="640080"/>
+          </a:xfrm>
+          <a:prstGeom prst="rect">
+            <a:avLst/>
+          </a:prstGeom>
+          <a:noFill/>
+        </p:spPr>
+        <p:txBody>
+          <a:bodyPr wrap="square" anchor="t" lIns="0" rIns="0" tIns="0" bIns="0">
+            <a:spAutoFit/>
+          </a:bodyPr>
+          <a:lstStyle/>
+          <a:p>
+            <a:pPr algn="l">
+              <a:lnSpc>
+                <a:spcPct val="116000"/>
+              </a:lnSpc>
+              <a:spcBef>
+                <a:spcPts val="0"/>
+              </a:spcBef>
+              <a:spcAft>
+                <a:spcPts val="400"/>
+              </a:spcAft>
+            </a:pPr>
+            <a:r>
+              <a:rPr sz="960" b="0">
+                <a:solidFill>
+                  <a:srgbClr val="3C4148"/>
+                </a:solidFill>
+                <a:latin typeface="Noto Sans JP"/>
+                <a:ea typeface="Noto Sans JP"/>
+              </a:rPr>
+              <a:t>AWS 約2.26兆円('27迄)・MS 約1.6兆円('29迄)・Oracle 約1.2兆円。合計で2030年までに300億ドル超（日経）。</a:t>
+            </a:r>
+          </a:p>
+        </p:txBody>
+      </p:sp>
+      <p:sp>
+        <p:nvSpPr>
+          <p:cNvPr id="13" name="Rounded Rectangle 12"/>
           <p:cNvSpPr/>
           <p:nvPr/>
         </p:nvSpPr>
         <p:spPr>
           <a:xfrm>
-            <a:off x="1828800" y="2304288"/>
-            <a:ext cx="1834286" cy="2286000"/>
+            <a:off x="4376928" y="1417320"/>
+            <a:ext cx="3435096" cy="2194560"/>
           </a:xfrm>
           <a:prstGeom prst="roundRect">
             <a:avLst>
@@ -6736,9 +6741,9 @@
           <a:solidFill>
             <a:srgbClr val="FFFFFF"/>
           </a:solidFill>
-          <a:ln w="12700">
+          <a:ln w="16510">
             <a:solidFill>
-              <a:srgbClr val="E2E4E9"/>
+              <a:srgbClr val="F3C7CD"/>
             </a:solidFill>
           </a:ln>
           <a:effectLst/>
@@ -6767,244 +6772,16 @@
       </p:sp>
       <p:sp>
         <p:nvSpPr>
-          <p:cNvPr id="13" name="TextBox 12"/>
-          <p:cNvSpPr txBox="1"/>
-          <p:nvPr/>
-        </p:nvSpPr>
-        <p:spPr>
-          <a:xfrm>
-            <a:off x="1947672" y="2432304"/>
-            <a:ext cx="1596542" cy="274320"/>
-          </a:xfrm>
-          <a:prstGeom prst="rect">
-            <a:avLst/>
-          </a:prstGeom>
-          <a:noFill/>
-        </p:spPr>
-        <p:txBody>
-          <a:bodyPr wrap="square" anchor="t" lIns="0" rIns="0" tIns="0" bIns="0">
-            <a:spAutoFit/>
-          </a:bodyPr>
-          <a:lstStyle/>
-          <a:p>
-            <a:pPr algn="l">
-              <a:lnSpc>
-                <a:spcPct val="106000"/>
-              </a:lnSpc>
-              <a:spcBef>
-                <a:spcPts val="0"/>
-              </a:spcBef>
-              <a:spcAft>
-                <a:spcPts val="400"/>
-              </a:spcAft>
-            </a:pPr>
-            <a:r>
-              <a:rPr sz="1150" b="1">
-                <a:solidFill>
-                  <a:srgbClr val="1A1D21"/>
-                </a:solidFill>
-                <a:latin typeface="Noto Sans JP"/>
-                <a:ea typeface="Noto Sans JP"/>
-              </a:rPr>
-              <a:t>電気をつくる</a:t>
-            </a:r>
-          </a:p>
-        </p:txBody>
-      </p:sp>
-      <p:sp>
-        <p:nvSpPr>
           <p:cNvPr id="14" name="Rectangle 13"/>
           <p:cNvSpPr/>
           <p:nvPr/>
         </p:nvSpPr>
         <p:spPr>
           <a:xfrm>
-            <a:off x="1947672" y="2871216"/>
-            <a:ext cx="1596542" cy="9144"/>
-          </a:xfrm>
-          <a:prstGeom prst="rect">
-            <a:avLst/>
-          </a:prstGeom>
-          <a:solidFill>
-            <a:srgbClr val="F3C7CD"/>
-          </a:solidFill>
-          <a:ln>
-            <a:noFill/>
-          </a:ln>
-          <a:effectLst/>
-        </p:spPr>
-        <p:style>
-          <a:lnRef idx="1">
-            <a:schemeClr val="accent1"/>
-          </a:lnRef>
-          <a:fillRef idx="3">
-            <a:schemeClr val="accent1"/>
-          </a:fillRef>
-          <a:effectRef idx="2">
-            <a:schemeClr val="accent1"/>
-          </a:effectRef>
-          <a:fontRef idx="minor">
-            <a:schemeClr val="lt1"/>
-          </a:fontRef>
-        </p:style>
-        <p:txBody>
-          <a:bodyPr rtlCol="0" anchor="ctr"/>
-          <a:lstStyle/>
-          <a:p>
-            <a:pPr algn="ctr"/>
-          </a:p>
-        </p:txBody>
-      </p:sp>
-      <p:sp>
-        <p:nvSpPr>
-          <p:cNvPr id="15" name="TextBox 14"/>
-          <p:cNvSpPr txBox="1"/>
-          <p:nvPr/>
-        </p:nvSpPr>
-        <p:spPr>
-          <a:xfrm>
-            <a:off x="1947672" y="2980944"/>
-            <a:ext cx="1596542" cy="640080"/>
-          </a:xfrm>
-          <a:prstGeom prst="rect">
-            <a:avLst/>
-          </a:prstGeom>
-          <a:noFill/>
-        </p:spPr>
-        <p:txBody>
-          <a:bodyPr wrap="square" anchor="t" lIns="0" rIns="0" tIns="0" bIns="0">
-            <a:spAutoFit/>
-          </a:bodyPr>
-          <a:lstStyle/>
-          <a:p>
-            <a:pPr algn="l">
-              <a:lnSpc>
-                <a:spcPct val="104000"/>
-              </a:lnSpc>
-              <a:spcBef>
-                <a:spcPts val="0"/>
-              </a:spcBef>
-              <a:spcAft>
-                <a:spcPts val="400"/>
-              </a:spcAft>
-            </a:pPr>
-            <a:r>
-              <a:rPr sz="1350" b="1">
-                <a:solidFill>
-                  <a:srgbClr val="E60012"/>
-                </a:solidFill>
-                <a:latin typeface="Noto Sans JP"/>
-                <a:ea typeface="Noto Sans JP"/>
-              </a:rPr>
-              <a:t>受注残 5兆円超</a:t>
-            </a:r>
-          </a:p>
-        </p:txBody>
-      </p:sp>
-      <p:sp>
-        <p:nvSpPr>
-          <p:cNvPr id="16" name="TextBox 15"/>
-          <p:cNvSpPr txBox="1"/>
-          <p:nvPr/>
-        </p:nvSpPr>
-        <p:spPr>
-          <a:xfrm>
-            <a:off x="1947672" y="3785616"/>
-            <a:ext cx="1596542" cy="219456"/>
-          </a:xfrm>
-          <a:prstGeom prst="rect">
-            <a:avLst/>
-          </a:prstGeom>
-          <a:noFill/>
-        </p:spPr>
-        <p:txBody>
-          <a:bodyPr wrap="square" anchor="t" lIns="0" rIns="0" tIns="0" bIns="0">
-            <a:spAutoFit/>
-          </a:bodyPr>
-          <a:lstStyle/>
-          <a:p>
-            <a:pPr algn="l">
-              <a:lnSpc>
-                <a:spcPct val="106000"/>
-              </a:lnSpc>
-              <a:spcBef>
-                <a:spcPts val="0"/>
-              </a:spcBef>
-              <a:spcAft>
-                <a:spcPts val="400"/>
-              </a:spcAft>
-            </a:pPr>
-            <a:r>
-              <a:rPr sz="700" b="1">
-                <a:solidFill>
-                  <a:srgbClr val="8A9098"/>
-                </a:solidFill>
-                <a:latin typeface="Consolas"/>
-                <a:ea typeface="Consolas"/>
-              </a:rPr>
-              <a:t>代表企業</a:t>
-            </a:r>
-          </a:p>
-        </p:txBody>
-      </p:sp>
-      <p:sp>
-        <p:nvSpPr>
-          <p:cNvPr id="17" name="TextBox 16"/>
-          <p:cNvSpPr txBox="1"/>
-          <p:nvPr/>
-        </p:nvSpPr>
-        <p:spPr>
-          <a:xfrm>
-            <a:off x="1947672" y="3986784"/>
-            <a:ext cx="1596542" cy="548640"/>
-          </a:xfrm>
-          <a:prstGeom prst="rect">
-            <a:avLst/>
-          </a:prstGeom>
-          <a:noFill/>
-        </p:spPr>
-        <p:txBody>
-          <a:bodyPr wrap="square" anchor="t" lIns="0" rIns="0" tIns="0" bIns="0">
-            <a:spAutoFit/>
-          </a:bodyPr>
-          <a:lstStyle/>
-          <a:p>
-            <a:pPr algn="l">
-              <a:lnSpc>
-                <a:spcPct val="116000"/>
-              </a:lnSpc>
-              <a:spcBef>
-                <a:spcPts val="0"/>
-              </a:spcBef>
-              <a:spcAft>
-                <a:spcPts val="400"/>
-              </a:spcAft>
-            </a:pPr>
-            <a:r>
-              <a:rPr sz="919" b="1">
-                <a:solidFill>
-                  <a:srgbClr val="1A1D21"/>
-                </a:solidFill>
-                <a:latin typeface="Noto Sans JP"/>
-                <a:ea typeface="Noto Sans JP"/>
-              </a:rPr>
-              <a:t>三菱重工 ガスタービン</a:t>
-            </a:r>
-          </a:p>
-        </p:txBody>
-      </p:sp>
-      <p:sp>
-        <p:nvSpPr>
-          <p:cNvPr id="18" name="Chevron 17"/>
-          <p:cNvSpPr/>
-          <p:nvPr/>
-        </p:nvSpPr>
-        <p:spPr>
-          <a:xfrm>
-            <a:off x="3690518" y="1417320"/>
-            <a:ext cx="2053742" cy="786384"/>
-          </a:xfrm>
-          <a:prstGeom prst="chevron">
+            <a:off x="4376928" y="1417320"/>
+            <a:ext cx="3435096" cy="100584"/>
+          </a:xfrm>
+          <a:prstGeom prst="rect">
             <a:avLst/>
           </a:prstGeom>
           <a:solidFill>
@@ -7032,19 +6809,21 @@
         <p:txBody>
           <a:bodyPr rtlCol="0" anchor="ctr"/>
           <a:lstStyle/>
-          <a:p/>
-        </p:txBody>
-      </p:sp>
-      <p:sp>
-        <p:nvSpPr>
-          <p:cNvPr id="19" name="TextBox 18"/>
+          <a:p>
+            <a:pPr algn="ctr"/>
+          </a:p>
+        </p:txBody>
+      </p:sp>
+      <p:sp>
+        <p:nvSpPr>
+          <p:cNvPr id="15" name="TextBox 14"/>
           <p:cNvSpPr txBox="1"/>
           <p:nvPr/>
         </p:nvSpPr>
         <p:spPr>
           <a:xfrm>
-            <a:off x="3672230" y="1417320"/>
-            <a:ext cx="1980590" cy="786384"/>
+            <a:off x="4596384" y="1664208"/>
+            <a:ext cx="3032760" cy="777240"/>
           </a:xfrm>
           <a:prstGeom prst="rect">
             <a:avLst/>
@@ -7057,63 +6836,132 @@
           </a:bodyPr>
           <a:lstStyle/>
           <a:p>
-            <a:pPr algn="ctr">
+            <a:pPr algn="l">
               <a:lnSpc>
-                <a:spcPct val="100000"/>
+                <a:spcPct val="106000"/>
               </a:lnSpc>
               <a:spcBef>
                 <a:spcPts val="0"/>
               </a:spcBef>
               <a:spcAft>
-                <a:spcPts val="0"/>
+                <a:spcPts val="400"/>
               </a:spcAft>
             </a:pPr>
             <a:r>
-              <a:rPr sz="800" b="1" spc="100">
-                <a:solidFill>
-                  <a:srgbClr val="FFC9CE"/>
-                </a:solidFill>
-                <a:latin typeface="Consolas"/>
-                <a:ea typeface="Consolas"/>
-              </a:rPr>
-              <a:t>02</a:t>
-            </a:r>
-          </a:p>
-          <a:p>
-            <a:pPr algn="ctr">
+              <a:rPr sz="3300" b="1">
+                <a:solidFill>
+                  <a:srgbClr val="E60012"/>
+                </a:solidFill>
+                <a:latin typeface="Noto Sans JP"/>
+                <a:ea typeface="Noto Sans JP"/>
+              </a:rPr>
+              <a:t>2.7→5.6兆円</a:t>
+            </a:r>
+          </a:p>
+        </p:txBody>
+      </p:sp>
+      <p:sp>
+        <p:nvSpPr>
+          <p:cNvPr id="16" name="TextBox 15"/>
+          <p:cNvSpPr txBox="1"/>
+          <p:nvPr/>
+        </p:nvSpPr>
+        <p:spPr>
+          <a:xfrm>
+            <a:off x="4596384" y="2487168"/>
+            <a:ext cx="3014472" cy="457200"/>
+          </a:xfrm>
+          <a:prstGeom prst="rect">
+            <a:avLst/>
+          </a:prstGeom>
+          <a:noFill/>
+        </p:spPr>
+        <p:txBody>
+          <a:bodyPr wrap="square" anchor="t" lIns="0" rIns="0" tIns="0" bIns="0">
+            <a:spAutoFit/>
+          </a:bodyPr>
+          <a:lstStyle/>
+          <a:p>
+            <a:pPr algn="l">
               <a:lnSpc>
-                <a:spcPct val="100000"/>
+                <a:spcPct val="110000"/>
               </a:lnSpc>
               <a:spcBef>
                 <a:spcPts val="0"/>
               </a:spcBef>
               <a:spcAft>
-                <a:spcPts val="0"/>
+                <a:spcPts val="400"/>
               </a:spcAft>
             </a:pPr>
             <a:r>
-              <a:rPr sz="1100" b="1">
-                <a:solidFill>
-                  <a:srgbClr val="FFFFFF"/>
+              <a:rPr sz="1200" b="1">
+                <a:solidFill>
+                  <a:srgbClr val="1A1D21"/>
                 </a:solidFill>
                 <a:latin typeface="Noto Sans JP"/>
                 <a:ea typeface="Noto Sans JP"/>
               </a:rPr>
-              <a:t>送変電・電線</a:t>
-            </a:r>
-          </a:p>
-        </p:txBody>
-      </p:sp>
-      <p:sp>
-        <p:nvSpPr>
-          <p:cNvPr id="20" name="Rounded Rectangle 19"/>
+              <a:t>国内DCサービス市場（2023→2030年）</a:t>
+            </a:r>
+          </a:p>
+        </p:txBody>
+      </p:sp>
+      <p:sp>
+        <p:nvSpPr>
+          <p:cNvPr id="17" name="TextBox 16"/>
+          <p:cNvSpPr txBox="1"/>
+          <p:nvPr/>
+        </p:nvSpPr>
+        <p:spPr>
+          <a:xfrm>
+            <a:off x="4596384" y="2944368"/>
+            <a:ext cx="2996184" cy="640080"/>
+          </a:xfrm>
+          <a:prstGeom prst="rect">
+            <a:avLst/>
+          </a:prstGeom>
+          <a:noFill/>
+        </p:spPr>
+        <p:txBody>
+          <a:bodyPr wrap="square" anchor="t" lIns="0" rIns="0" tIns="0" bIns="0">
+            <a:spAutoFit/>
+          </a:bodyPr>
+          <a:lstStyle/>
+          <a:p>
+            <a:pPr algn="l">
+              <a:lnSpc>
+                <a:spcPct val="116000"/>
+              </a:lnSpc>
+              <a:spcBef>
+                <a:spcPts val="0"/>
+              </a:spcBef>
+              <a:spcAft>
+                <a:spcPts val="400"/>
+              </a:spcAft>
+            </a:pPr>
+            <a:r>
+              <a:rPr sz="960" b="0">
+                <a:solidFill>
+                  <a:srgbClr val="3C4148"/>
+                </a:solidFill>
+                <a:latin typeface="Noto Sans JP"/>
+                <a:ea typeface="Noto Sans JP"/>
+              </a:rPr>
+              <a:t>IDC/JEITA見通し。DC“建設投資”だけでも2028年に年1兆円超へ拡大する見込み（IDC）。</a:t>
+            </a:r>
+          </a:p>
+        </p:txBody>
+      </p:sp>
+      <p:sp>
+        <p:nvSpPr>
+          <p:cNvPr id="18" name="Rounded Rectangle 17"/>
           <p:cNvSpPr/>
           <p:nvPr/>
         </p:nvSpPr>
         <p:spPr>
           <a:xfrm>
-            <a:off x="3754526" y="2304288"/>
-            <a:ext cx="1834286" cy="2286000"/>
+            <a:off x="7921752" y="1417320"/>
+            <a:ext cx="3435096" cy="2194560"/>
           </a:xfrm>
           <a:prstGeom prst="roundRect">
             <a:avLst>
@@ -7123,9 +6971,9 @@
           <a:solidFill>
             <a:srgbClr val="FFFFFF"/>
           </a:solidFill>
-          <a:ln w="12700">
+          <a:ln w="16510">
             <a:solidFill>
-              <a:srgbClr val="E2E4E9"/>
+              <a:srgbClr val="F3C7CD"/>
             </a:solidFill>
           </a:ln>
           <a:effectLst/>
@@ -7154,244 +7002,16 @@
       </p:sp>
       <p:sp>
         <p:nvSpPr>
-          <p:cNvPr id="21" name="TextBox 20"/>
-          <p:cNvSpPr txBox="1"/>
-          <p:nvPr/>
-        </p:nvSpPr>
-        <p:spPr>
-          <a:xfrm>
-            <a:off x="3873398" y="2432304"/>
-            <a:ext cx="1596542" cy="274320"/>
-          </a:xfrm>
-          <a:prstGeom prst="rect">
-            <a:avLst/>
-          </a:prstGeom>
-          <a:noFill/>
-        </p:spPr>
-        <p:txBody>
-          <a:bodyPr wrap="square" anchor="t" lIns="0" rIns="0" tIns="0" bIns="0">
-            <a:spAutoFit/>
-          </a:bodyPr>
-          <a:lstStyle/>
-          <a:p>
-            <a:pPr algn="l">
-              <a:lnSpc>
-                <a:spcPct val="106000"/>
-              </a:lnSpc>
-              <a:spcBef>
-                <a:spcPts val="0"/>
-              </a:spcBef>
-              <a:spcAft>
-                <a:spcPts val="400"/>
-              </a:spcAft>
-            </a:pPr>
-            <a:r>
-              <a:rPr sz="1150" b="1">
-                <a:solidFill>
-                  <a:srgbClr val="1A1D21"/>
-                </a:solidFill>
-                <a:latin typeface="Noto Sans JP"/>
-                <a:ea typeface="Noto Sans JP"/>
-              </a:rPr>
-              <a:t>電気を送る・変える</a:t>
-            </a:r>
-          </a:p>
-        </p:txBody>
-      </p:sp>
-      <p:sp>
-        <p:nvSpPr>
-          <p:cNvPr id="22" name="Rectangle 21"/>
+          <p:cNvPr id="19" name="Rectangle 18"/>
           <p:cNvSpPr/>
           <p:nvPr/>
         </p:nvSpPr>
         <p:spPr>
           <a:xfrm>
-            <a:off x="3873398" y="2871216"/>
-            <a:ext cx="1596542" cy="9144"/>
-          </a:xfrm>
-          <a:prstGeom prst="rect">
-            <a:avLst/>
-          </a:prstGeom>
-          <a:solidFill>
-            <a:srgbClr val="F3C7CD"/>
-          </a:solidFill>
-          <a:ln>
-            <a:noFill/>
-          </a:ln>
-          <a:effectLst/>
-        </p:spPr>
-        <p:style>
-          <a:lnRef idx="1">
-            <a:schemeClr val="accent1"/>
-          </a:lnRef>
-          <a:fillRef idx="3">
-            <a:schemeClr val="accent1"/>
-          </a:fillRef>
-          <a:effectRef idx="2">
-            <a:schemeClr val="accent1"/>
-          </a:effectRef>
-          <a:fontRef idx="minor">
-            <a:schemeClr val="lt1"/>
-          </a:fontRef>
-        </p:style>
-        <p:txBody>
-          <a:bodyPr rtlCol="0" anchor="ctr"/>
-          <a:lstStyle/>
-          <a:p>
-            <a:pPr algn="ctr"/>
-          </a:p>
-        </p:txBody>
-      </p:sp>
-      <p:sp>
-        <p:nvSpPr>
-          <p:cNvPr id="23" name="TextBox 22"/>
-          <p:cNvSpPr txBox="1"/>
-          <p:nvPr/>
-        </p:nvSpPr>
-        <p:spPr>
-          <a:xfrm>
-            <a:off x="3873398" y="2980944"/>
-            <a:ext cx="1596542" cy="640080"/>
-          </a:xfrm>
-          <a:prstGeom prst="rect">
-            <a:avLst/>
-          </a:prstGeom>
-          <a:noFill/>
-        </p:spPr>
-        <p:txBody>
-          <a:bodyPr wrap="square" anchor="t" lIns="0" rIns="0" tIns="0" bIns="0">
-            <a:spAutoFit/>
-          </a:bodyPr>
-          <a:lstStyle/>
-          <a:p>
-            <a:pPr algn="l">
-              <a:lnSpc>
-                <a:spcPct val="104000"/>
-              </a:lnSpc>
-              <a:spcBef>
-                <a:spcPts val="0"/>
-              </a:spcBef>
-              <a:spcAft>
-                <a:spcPts val="400"/>
-              </a:spcAft>
-            </a:pPr>
-            <a:r>
-              <a:rPr sz="1350" b="1">
-                <a:solidFill>
-                  <a:srgbClr val="E60012"/>
-                </a:solidFill>
-                <a:latin typeface="Noto Sans JP"/>
-                <a:ea typeface="Noto Sans JP"/>
-              </a:rPr>
-              <a:t>生産能力2倍/予約数年先</a:t>
-            </a:r>
-          </a:p>
-        </p:txBody>
-      </p:sp>
-      <p:sp>
-        <p:nvSpPr>
-          <p:cNvPr id="24" name="TextBox 23"/>
-          <p:cNvSpPr txBox="1"/>
-          <p:nvPr/>
-        </p:nvSpPr>
-        <p:spPr>
-          <a:xfrm>
-            <a:off x="3873398" y="3785616"/>
-            <a:ext cx="1596542" cy="219456"/>
-          </a:xfrm>
-          <a:prstGeom prst="rect">
-            <a:avLst/>
-          </a:prstGeom>
-          <a:noFill/>
-        </p:spPr>
-        <p:txBody>
-          <a:bodyPr wrap="square" anchor="t" lIns="0" rIns="0" tIns="0" bIns="0">
-            <a:spAutoFit/>
-          </a:bodyPr>
-          <a:lstStyle/>
-          <a:p>
-            <a:pPr algn="l">
-              <a:lnSpc>
-                <a:spcPct val="106000"/>
-              </a:lnSpc>
-              <a:spcBef>
-                <a:spcPts val="0"/>
-              </a:spcBef>
-              <a:spcAft>
-                <a:spcPts val="400"/>
-              </a:spcAft>
-            </a:pPr>
-            <a:r>
-              <a:rPr sz="700" b="1">
-                <a:solidFill>
-                  <a:srgbClr val="8A9098"/>
-                </a:solidFill>
-                <a:latin typeface="Consolas"/>
-                <a:ea typeface="Consolas"/>
-              </a:rPr>
-              <a:t>代表企業</a:t>
-            </a:r>
-          </a:p>
-        </p:txBody>
-      </p:sp>
-      <p:sp>
-        <p:nvSpPr>
-          <p:cNvPr id="25" name="TextBox 24"/>
-          <p:cNvSpPr txBox="1"/>
-          <p:nvPr/>
-        </p:nvSpPr>
-        <p:spPr>
-          <a:xfrm>
-            <a:off x="3873398" y="3986784"/>
-            <a:ext cx="1596542" cy="548640"/>
-          </a:xfrm>
-          <a:prstGeom prst="rect">
-            <a:avLst/>
-          </a:prstGeom>
-          <a:noFill/>
-        </p:spPr>
-        <p:txBody>
-          <a:bodyPr wrap="square" anchor="t" lIns="0" rIns="0" tIns="0" bIns="0">
-            <a:spAutoFit/>
-          </a:bodyPr>
-          <a:lstStyle/>
-          <a:p>
-            <a:pPr algn="l">
-              <a:lnSpc>
-                <a:spcPct val="116000"/>
-              </a:lnSpc>
-              <a:spcBef>
-                <a:spcPts val="0"/>
-              </a:spcBef>
-              <a:spcAft>
-                <a:spcPts val="400"/>
-              </a:spcAft>
-            </a:pPr>
-            <a:r>
-              <a:rPr sz="919" b="1">
-                <a:solidFill>
-                  <a:srgbClr val="1A1D21"/>
-                </a:solidFill>
-                <a:latin typeface="Noto Sans JP"/>
-                <a:ea typeface="Noto Sans JP"/>
-              </a:rPr>
-              <a:t>変圧器 各社・フジクラ</a:t>
-            </a:r>
-          </a:p>
-        </p:txBody>
-      </p:sp>
-      <p:sp>
-        <p:nvSpPr>
-          <p:cNvPr id="26" name="Chevron 25"/>
-          <p:cNvSpPr/>
-          <p:nvPr/>
-        </p:nvSpPr>
-        <p:spPr>
-          <a:xfrm>
-            <a:off x="5616244" y="1417320"/>
-            <a:ext cx="2053742" cy="786384"/>
-          </a:xfrm>
-          <a:prstGeom prst="chevron">
+            <a:off x="7921752" y="1417320"/>
+            <a:ext cx="3435096" cy="100584"/>
+          </a:xfrm>
+          <a:prstGeom prst="rect">
             <a:avLst/>
           </a:prstGeom>
           <a:solidFill>
@@ -7419,19 +7039,21 @@
         <p:txBody>
           <a:bodyPr rtlCol="0" anchor="ctr"/>
           <a:lstStyle/>
-          <a:p/>
-        </p:txBody>
-      </p:sp>
-      <p:sp>
-        <p:nvSpPr>
-          <p:cNvPr id="27" name="TextBox 26"/>
+          <a:p>
+            <a:pPr algn="ctr"/>
+          </a:p>
+        </p:txBody>
+      </p:sp>
+      <p:sp>
+        <p:nvSpPr>
+          <p:cNvPr id="20" name="TextBox 19"/>
           <p:cNvSpPr txBox="1"/>
           <p:nvPr/>
         </p:nvSpPr>
         <p:spPr>
           <a:xfrm>
-            <a:off x="5597956" y="1417320"/>
-            <a:ext cx="1980590" cy="786384"/>
+            <a:off x="8141208" y="1664208"/>
+            <a:ext cx="3032760" cy="777240"/>
           </a:xfrm>
           <a:prstGeom prst="rect">
             <a:avLst/>
@@ -7444,63 +7066,132 @@
           </a:bodyPr>
           <a:lstStyle/>
           <a:p>
-            <a:pPr algn="ctr">
+            <a:pPr algn="l">
               <a:lnSpc>
-                <a:spcPct val="100000"/>
+                <a:spcPct val="106000"/>
               </a:lnSpc>
               <a:spcBef>
                 <a:spcPts val="0"/>
               </a:spcBef>
               <a:spcAft>
-                <a:spcPts val="0"/>
+                <a:spcPts val="400"/>
               </a:spcAft>
             </a:pPr>
             <a:r>
-              <a:rPr sz="800" b="1" spc="100">
-                <a:solidFill>
-                  <a:srgbClr val="FFC9CE"/>
-                </a:solidFill>
-                <a:latin typeface="Consolas"/>
-                <a:ea typeface="Consolas"/>
-              </a:rPr>
-              <a:t>03</a:t>
-            </a:r>
-          </a:p>
-          <a:p>
-            <a:pPr algn="ctr">
+              <a:rPr sz="3300" b="1">
+                <a:solidFill>
+                  <a:srgbClr val="E60012"/>
+                </a:solidFill>
+                <a:latin typeface="Noto Sans JP"/>
+                <a:ea typeface="Noto Sans JP"/>
+              </a:rPr>
+              <a:t>約3兆＋5兆円</a:t>
+            </a:r>
+          </a:p>
+        </p:txBody>
+      </p:sp>
+      <p:sp>
+        <p:nvSpPr>
+          <p:cNvPr id="21" name="TextBox 20"/>
+          <p:cNvSpPr txBox="1"/>
+          <p:nvPr/>
+        </p:nvSpPr>
+        <p:spPr>
+          <a:xfrm>
+            <a:off x="8141208" y="2487168"/>
+            <a:ext cx="3014472" cy="457200"/>
+          </a:xfrm>
+          <a:prstGeom prst="rect">
+            <a:avLst/>
+          </a:prstGeom>
+          <a:noFill/>
+        </p:spPr>
+        <p:txBody>
+          <a:bodyPr wrap="square" anchor="t" lIns="0" rIns="0" tIns="0" bIns="0">
+            <a:spAutoFit/>
+          </a:bodyPr>
+          <a:lstStyle/>
+          <a:p>
+            <a:pPr algn="l">
               <a:lnSpc>
-                <a:spcPct val="100000"/>
+                <a:spcPct val="110000"/>
               </a:lnSpc>
               <a:spcBef>
                 <a:spcPts val="0"/>
               </a:spcBef>
               <a:spcAft>
-                <a:spcPts val="0"/>
+                <a:spcPts val="400"/>
               </a:spcAft>
             </a:pPr>
             <a:r>
-              <a:rPr sz="1100" b="1">
-                <a:solidFill>
-                  <a:srgbClr val="FFFFFF"/>
+              <a:rPr sz="1200" b="1">
+                <a:solidFill>
+                  <a:srgbClr val="1A1D21"/>
                 </a:solidFill>
                 <a:latin typeface="Noto Sans JP"/>
                 <a:ea typeface="Noto Sans JP"/>
               </a:rPr>
-              <a:t>DC建設・設備工事</a:t>
-            </a:r>
-          </a:p>
-        </p:txBody>
-      </p:sp>
-      <p:sp>
-        <p:nvSpPr>
-          <p:cNvPr id="28" name="Rounded Rectangle 27"/>
+              <a:t>半導体：TSMC熊本＋ラピダス</a:t>
+            </a:r>
+          </a:p>
+        </p:txBody>
+      </p:sp>
+      <p:sp>
+        <p:nvSpPr>
+          <p:cNvPr id="22" name="TextBox 21"/>
+          <p:cNvSpPr txBox="1"/>
+          <p:nvPr/>
+        </p:nvSpPr>
+        <p:spPr>
+          <a:xfrm>
+            <a:off x="8141208" y="2944368"/>
+            <a:ext cx="2996184" cy="640080"/>
+          </a:xfrm>
+          <a:prstGeom prst="rect">
+            <a:avLst/>
+          </a:prstGeom>
+          <a:noFill/>
+        </p:spPr>
+        <p:txBody>
+          <a:bodyPr wrap="square" anchor="t" lIns="0" rIns="0" tIns="0" bIns="0">
+            <a:spAutoFit/>
+          </a:bodyPr>
+          <a:lstStyle/>
+          <a:p>
+            <a:pPr algn="l">
+              <a:lnSpc>
+                <a:spcPct val="116000"/>
+              </a:lnSpc>
+              <a:spcBef>
+                <a:spcPts val="0"/>
+              </a:spcBef>
+              <a:spcAft>
+                <a:spcPts val="400"/>
+              </a:spcAft>
+            </a:pPr>
+            <a:r>
+              <a:rPr sz="960" b="0">
+                <a:solidFill>
+                  <a:srgbClr val="3C4148"/>
+                </a:solidFill>
+                <a:latin typeface="Noto Sans JP"/>
+                <a:ea typeface="Noto Sans JP"/>
+              </a:rPr>
+              <a:t>TSMC熊本 第1+2で約3兆円、ラピダス総投資 約5兆円。関連投資を含め国内は9兆円規模（日経）。</a:t>
+            </a:r>
+          </a:p>
+        </p:txBody>
+      </p:sp>
+      <p:sp>
+        <p:nvSpPr>
+          <p:cNvPr id="23" name="Rounded Rectangle 22"/>
           <p:cNvSpPr/>
           <p:nvPr/>
         </p:nvSpPr>
         <p:spPr>
           <a:xfrm>
-            <a:off x="5680252" y="2304288"/>
-            <a:ext cx="1834286" cy="2286000"/>
+            <a:off x="777240" y="3886200"/>
+            <a:ext cx="10634472" cy="1143000"/>
           </a:xfrm>
           <a:prstGeom prst="roundRect">
             <a:avLst>
@@ -7508,11 +7199,11 @@
             </a:avLst>
           </a:prstGeom>
           <a:solidFill>
-            <a:srgbClr val="FFFFFF"/>
+            <a:srgbClr val="ECEEF1"/>
           </a:solidFill>
-          <a:ln w="12700">
+          <a:ln w="15240">
             <a:solidFill>
-              <a:srgbClr val="E2E4E9"/>
+              <a:srgbClr val="454B54"/>
             </a:solidFill>
           </a:ln>
           <a:effectLst/>
@@ -7541,14 +7232,14 @@
       </p:sp>
       <p:sp>
         <p:nvSpPr>
-          <p:cNvPr id="29" name="TextBox 28"/>
+          <p:cNvPr id="24" name="TextBox 23"/>
           <p:cNvSpPr txBox="1"/>
           <p:nvPr/>
         </p:nvSpPr>
         <p:spPr>
           <a:xfrm>
-            <a:off x="5799124" y="2432304"/>
-            <a:ext cx="1596542" cy="274320"/>
+            <a:off x="1051560" y="4069080"/>
+            <a:ext cx="10058400" cy="457200"/>
           </a:xfrm>
           <a:prstGeom prst="rect">
             <a:avLst/>
@@ -7573,72 +7264,48 @@
               </a:spcAft>
             </a:pPr>
             <a:r>
-              <a:rPr sz="1150" b="1">
+              <a:rPr sz="1550" b="1">
                 <a:solidFill>
                   <a:srgbClr val="1A1D21"/>
                 </a:solidFill>
                 <a:latin typeface="Noto Sans JP"/>
                 <a:ea typeface="Noto Sans JP"/>
               </a:rPr>
-              <a:t>箱を建てる</a:t>
-            </a:r>
-          </a:p>
-        </p:txBody>
-      </p:sp>
-      <p:sp>
-        <p:nvSpPr>
-          <p:cNvPr id="30" name="Rectangle 29"/>
-          <p:cNvSpPr/>
-          <p:nvPr/>
-        </p:nvSpPr>
-        <p:spPr>
-          <a:xfrm>
-            <a:off x="5799124" y="2871216"/>
-            <a:ext cx="1596542" cy="9144"/>
-          </a:xfrm>
-          <a:prstGeom prst="rect">
-            <a:avLst/>
-          </a:prstGeom>
-          <a:solidFill>
-            <a:srgbClr val="F3C7CD"/>
-          </a:solidFill>
-          <a:ln>
-            <a:noFill/>
-          </a:ln>
-          <a:effectLst/>
-        </p:spPr>
-        <p:style>
-          <a:lnRef idx="1">
-            <a:schemeClr val="accent1"/>
-          </a:lnRef>
-          <a:fillRef idx="3">
-            <a:schemeClr val="accent1"/>
-          </a:fillRef>
-          <a:effectRef idx="2">
-            <a:schemeClr val="accent1"/>
-          </a:effectRef>
-          <a:fontRef idx="minor">
-            <a:schemeClr val="lt1"/>
-          </a:fontRef>
-        </p:style>
-        <p:txBody>
-          <a:bodyPr rtlCol="0" anchor="ctr"/>
-          <a:lstStyle/>
-          <a:p>
-            <a:pPr algn="ctr"/>
-          </a:p>
-        </p:txBody>
-      </p:sp>
-      <p:sp>
-        <p:nvSpPr>
-          <p:cNvPr id="31" name="TextBox 30"/>
+              <a:t>そして電気が足りない：</a:t>
+            </a:r>
+            <a:r>
+              <a:rPr sz="1550" b="1">
+                <a:solidFill>
+                  <a:srgbClr val="E60012"/>
+                </a:solidFill>
+                <a:latin typeface="Noto Sans JP"/>
+                <a:ea typeface="Noto Sans JP"/>
+              </a:rPr>
+              <a:t>国内DC・半導体の新増設で、最大需要電力は10年で約13倍</a:t>
+            </a:r>
+            <a:r>
+              <a:rPr sz="1400" b="0">
+                <a:solidFill>
+                  <a:srgbClr val="3C4148"/>
+                </a:solidFill>
+                <a:latin typeface="Noto Sans JP"/>
+                <a:ea typeface="Noto Sans JP"/>
+              </a:rPr>
+              <a:t>（56万→715万kW／OCCTO）。</a:t>
+            </a:r>
+          </a:p>
+        </p:txBody>
+      </p:sp>
+      <p:sp>
+        <p:nvSpPr>
+          <p:cNvPr id="25" name="TextBox 24"/>
           <p:cNvSpPr txBox="1"/>
           <p:nvPr/>
         </p:nvSpPr>
         <p:spPr>
           <a:xfrm>
-            <a:off x="5799124" y="2980944"/>
-            <a:ext cx="1596542" cy="640080"/>
+            <a:off x="1051560" y="4572000"/>
+            <a:ext cx="10058400" cy="411480"/>
           </a:xfrm>
           <a:prstGeom prst="rect">
             <a:avLst/>
@@ -7653,7 +7320,7 @@
           <a:p>
             <a:pPr algn="l">
               <a:lnSpc>
-                <a:spcPct val="104000"/>
+                <a:spcPct val="106000"/>
               </a:lnSpc>
               <a:spcBef>
                 <a:spcPts val="0"/>
@@ -7663,894 +7330,28 @@
               </a:spcAft>
             </a:pPr>
             <a:r>
-              <a:rPr sz="1350" b="1">
-                <a:solidFill>
-                  <a:srgbClr val="E60012"/>
+              <a:rPr sz="1200" b="0">
+                <a:solidFill>
+                  <a:srgbClr val="3C4148"/>
                 </a:solidFill>
                 <a:latin typeface="Noto Sans JP"/>
                 <a:ea typeface="Noto Sans JP"/>
               </a:rPr>
-              <a:t>空調工事 受注 +25.5%</a:t>
-            </a:r>
-          </a:p>
-        </p:txBody>
-      </p:sp>
-      <p:sp>
-        <p:nvSpPr>
-          <p:cNvPr id="32" name="TextBox 31"/>
-          <p:cNvSpPr txBox="1"/>
-          <p:nvPr/>
-        </p:nvSpPr>
-        <p:spPr>
-          <a:xfrm>
-            <a:off x="5799124" y="3785616"/>
-            <a:ext cx="1596542" cy="219456"/>
-          </a:xfrm>
-          <a:prstGeom prst="rect">
-            <a:avLst/>
-          </a:prstGeom>
-          <a:noFill/>
-        </p:spPr>
-        <p:txBody>
-          <a:bodyPr wrap="square" anchor="t" lIns="0" rIns="0" tIns="0" bIns="0">
-            <a:spAutoFit/>
-          </a:bodyPr>
-          <a:lstStyle/>
-          <a:p>
-            <a:pPr algn="l">
-              <a:lnSpc>
-                <a:spcPct val="106000"/>
-              </a:lnSpc>
-              <a:spcBef>
-                <a:spcPts val="0"/>
-              </a:spcBef>
-              <a:spcAft>
-                <a:spcPts val="400"/>
-              </a:spcAft>
-            </a:pPr>
-            <a:r>
-              <a:rPr sz="700" b="1">
-                <a:solidFill>
-                  <a:srgbClr val="8A9098"/>
-                </a:solidFill>
-                <a:latin typeface="Consolas"/>
-                <a:ea typeface="Consolas"/>
-              </a:rPr>
-              <a:t>代表企業</a:t>
-            </a:r>
-          </a:p>
-        </p:txBody>
-      </p:sp>
-      <p:sp>
-        <p:nvSpPr>
-          <p:cNvPr id="33" name="TextBox 32"/>
-          <p:cNvSpPr txBox="1"/>
-          <p:nvPr/>
-        </p:nvSpPr>
-        <p:spPr>
-          <a:xfrm>
-            <a:off x="5799124" y="3986784"/>
-            <a:ext cx="1596542" cy="548640"/>
-          </a:xfrm>
-          <a:prstGeom prst="rect">
-            <a:avLst/>
-          </a:prstGeom>
-          <a:noFill/>
-        </p:spPr>
-        <p:txBody>
-          <a:bodyPr wrap="square" anchor="t" lIns="0" rIns="0" tIns="0" bIns="0">
-            <a:spAutoFit/>
-          </a:bodyPr>
-          <a:lstStyle/>
-          <a:p>
-            <a:pPr algn="l">
-              <a:lnSpc>
-                <a:spcPct val="116000"/>
-              </a:lnSpc>
-              <a:spcBef>
-                <a:spcPts val="0"/>
-              </a:spcBef>
-              <a:spcAft>
-                <a:spcPts val="400"/>
-              </a:spcAft>
-            </a:pPr>
-            <a:r>
-              <a:rPr sz="919" b="1">
-                <a:solidFill>
-                  <a:srgbClr val="1A1D21"/>
-                </a:solidFill>
-                <a:latin typeface="Noto Sans JP"/>
-                <a:ea typeface="Noto Sans JP"/>
-              </a:rPr>
-              <a:t>ダイダン・高砂熱学ほか</a:t>
-            </a:r>
-          </a:p>
-        </p:txBody>
-      </p:sp>
-      <p:sp>
-        <p:nvSpPr>
-          <p:cNvPr id="34" name="Chevron 33"/>
+              <a:t>→ 発電所・変電所・送配電網の増強も国内で同時進行（大阪の変電所群＋首都圏66kV網に1,500億円超）。</a:t>
+            </a:r>
+          </a:p>
+        </p:txBody>
+      </p:sp>
+      <p:sp>
+        <p:nvSpPr>
+          <p:cNvPr id="26" name="Rounded Rectangle 25"/>
           <p:cNvSpPr/>
           <p:nvPr/>
         </p:nvSpPr>
         <p:spPr>
           <a:xfrm>
-            <a:off x="7541971" y="1417320"/>
-            <a:ext cx="2053742" cy="786384"/>
-          </a:xfrm>
-          <a:prstGeom prst="chevron">
-            <a:avLst/>
-          </a:prstGeom>
-          <a:solidFill>
-            <a:srgbClr val="E60012"/>
-          </a:solidFill>
-          <a:ln>
-            <a:noFill/>
-          </a:ln>
-          <a:effectLst/>
-        </p:spPr>
-        <p:style>
-          <a:lnRef idx="1">
-            <a:schemeClr val="accent1"/>
-          </a:lnRef>
-          <a:fillRef idx="3">
-            <a:schemeClr val="accent1"/>
-          </a:fillRef>
-          <a:effectRef idx="2">
-            <a:schemeClr val="accent1"/>
-          </a:effectRef>
-          <a:fontRef idx="minor">
-            <a:schemeClr val="lt1"/>
-          </a:fontRef>
-        </p:style>
-        <p:txBody>
-          <a:bodyPr rtlCol="0" anchor="ctr"/>
-          <a:lstStyle/>
-          <a:p/>
-        </p:txBody>
-      </p:sp>
-      <p:sp>
-        <p:nvSpPr>
-          <p:cNvPr id="35" name="TextBox 34"/>
-          <p:cNvSpPr txBox="1"/>
-          <p:nvPr/>
-        </p:nvSpPr>
-        <p:spPr>
-          <a:xfrm>
-            <a:off x="7523683" y="1417320"/>
-            <a:ext cx="1980590" cy="786384"/>
-          </a:xfrm>
-          <a:prstGeom prst="rect">
-            <a:avLst/>
-          </a:prstGeom>
-          <a:noFill/>
-        </p:spPr>
-        <p:txBody>
-          <a:bodyPr wrap="square" anchor="ctr" lIns="0" rIns="0" tIns="0" bIns="0">
-            <a:spAutoFit/>
-          </a:bodyPr>
-          <a:lstStyle/>
-          <a:p>
-            <a:pPr algn="ctr">
-              <a:lnSpc>
-                <a:spcPct val="100000"/>
-              </a:lnSpc>
-              <a:spcBef>
-                <a:spcPts val="0"/>
-              </a:spcBef>
-              <a:spcAft>
-                <a:spcPts val="0"/>
-              </a:spcAft>
-            </a:pPr>
-            <a:r>
-              <a:rPr sz="800" b="1" spc="100">
-                <a:solidFill>
-                  <a:srgbClr val="FFC9CE"/>
-                </a:solidFill>
-                <a:latin typeface="Consolas"/>
-                <a:ea typeface="Consolas"/>
-              </a:rPr>
-              <a:t>04</a:t>
-            </a:r>
-          </a:p>
-          <a:p>
-            <a:pPr algn="ctr">
-              <a:lnSpc>
-                <a:spcPct val="100000"/>
-              </a:lnSpc>
-              <a:spcBef>
-                <a:spcPts val="0"/>
-              </a:spcBef>
-              <a:spcAft>
-                <a:spcPts val="0"/>
-              </a:spcAft>
-            </a:pPr>
-            <a:r>
-              <a:rPr sz="1100" b="1">
-                <a:solidFill>
-                  <a:srgbClr val="FFFFFF"/>
-                </a:solidFill>
-                <a:latin typeface="Noto Sans JP"/>
-                <a:ea typeface="Noto Sans JP"/>
-              </a:rPr>
-              <a:t>冷却・電源保護</a:t>
-            </a:r>
-          </a:p>
-        </p:txBody>
-      </p:sp>
-      <p:sp>
-        <p:nvSpPr>
-          <p:cNvPr id="36" name="Rounded Rectangle 35"/>
-          <p:cNvSpPr/>
-          <p:nvPr/>
-        </p:nvSpPr>
-        <p:spPr>
-          <a:xfrm>
-            <a:off x="7605979" y="2304288"/>
-            <a:ext cx="1834286" cy="2286000"/>
-          </a:xfrm>
-          <a:prstGeom prst="roundRect">
-            <a:avLst>
-              <a:gd name="adj" fmla="val 5000"/>
-            </a:avLst>
-          </a:prstGeom>
-          <a:solidFill>
-            <a:srgbClr val="FFFFFF"/>
-          </a:solidFill>
-          <a:ln w="12700">
-            <a:solidFill>
-              <a:srgbClr val="E2E4E9"/>
-            </a:solidFill>
-          </a:ln>
-          <a:effectLst/>
-        </p:spPr>
-        <p:style>
-          <a:lnRef idx="1">
-            <a:schemeClr val="accent1"/>
-          </a:lnRef>
-          <a:fillRef idx="3">
-            <a:schemeClr val="accent1"/>
-          </a:fillRef>
-          <a:effectRef idx="2">
-            <a:schemeClr val="accent1"/>
-          </a:effectRef>
-          <a:fontRef idx="minor">
-            <a:schemeClr val="lt1"/>
-          </a:fontRef>
-        </p:style>
-        <p:txBody>
-          <a:bodyPr rtlCol="0" anchor="ctr"/>
-          <a:lstStyle/>
-          <a:p>
-            <a:pPr algn="ctr"/>
-          </a:p>
-        </p:txBody>
-      </p:sp>
-      <p:sp>
-        <p:nvSpPr>
-          <p:cNvPr id="37" name="TextBox 36"/>
-          <p:cNvSpPr txBox="1"/>
-          <p:nvPr/>
-        </p:nvSpPr>
-        <p:spPr>
-          <a:xfrm>
-            <a:off x="7724851" y="2432304"/>
-            <a:ext cx="1596542" cy="274320"/>
-          </a:xfrm>
-          <a:prstGeom prst="rect">
-            <a:avLst/>
-          </a:prstGeom>
-          <a:noFill/>
-        </p:spPr>
-        <p:txBody>
-          <a:bodyPr wrap="square" anchor="t" lIns="0" rIns="0" tIns="0" bIns="0">
-            <a:spAutoFit/>
-          </a:bodyPr>
-          <a:lstStyle/>
-          <a:p>
-            <a:pPr algn="l">
-              <a:lnSpc>
-                <a:spcPct val="106000"/>
-              </a:lnSpc>
-              <a:spcBef>
-                <a:spcPts val="0"/>
-              </a:spcBef>
-              <a:spcAft>
-                <a:spcPts val="400"/>
-              </a:spcAft>
-            </a:pPr>
-            <a:r>
-              <a:rPr sz="1150" b="1">
-                <a:solidFill>
-                  <a:srgbClr val="1A1D21"/>
-                </a:solidFill>
-                <a:latin typeface="Noto Sans JP"/>
-                <a:ea typeface="Noto Sans JP"/>
-              </a:rPr>
-              <a:t>冷やす・止めない</a:t>
-            </a:r>
-          </a:p>
-        </p:txBody>
-      </p:sp>
-      <p:sp>
-        <p:nvSpPr>
-          <p:cNvPr id="38" name="Rectangle 37"/>
-          <p:cNvSpPr/>
-          <p:nvPr/>
-        </p:nvSpPr>
-        <p:spPr>
-          <a:xfrm>
-            <a:off x="7724851" y="2871216"/>
-            <a:ext cx="1596542" cy="9144"/>
-          </a:xfrm>
-          <a:prstGeom prst="rect">
-            <a:avLst/>
-          </a:prstGeom>
-          <a:solidFill>
-            <a:srgbClr val="F3C7CD"/>
-          </a:solidFill>
-          <a:ln>
-            <a:noFill/>
-          </a:ln>
-          <a:effectLst/>
-        </p:spPr>
-        <p:style>
-          <a:lnRef idx="1">
-            <a:schemeClr val="accent1"/>
-          </a:lnRef>
-          <a:fillRef idx="3">
-            <a:schemeClr val="accent1"/>
-          </a:fillRef>
-          <a:effectRef idx="2">
-            <a:schemeClr val="accent1"/>
-          </a:effectRef>
-          <a:fontRef idx="minor">
-            <a:schemeClr val="lt1"/>
-          </a:fontRef>
-        </p:style>
-        <p:txBody>
-          <a:bodyPr rtlCol="0" anchor="ctr"/>
-          <a:lstStyle/>
-          <a:p>
-            <a:pPr algn="ctr"/>
-          </a:p>
-        </p:txBody>
-      </p:sp>
-      <p:sp>
-        <p:nvSpPr>
-          <p:cNvPr id="39" name="TextBox 38"/>
-          <p:cNvSpPr txBox="1"/>
-          <p:nvPr/>
-        </p:nvSpPr>
-        <p:spPr>
-          <a:xfrm>
-            <a:off x="7724851" y="2980944"/>
-            <a:ext cx="1596542" cy="640080"/>
-          </a:xfrm>
-          <a:prstGeom prst="rect">
-            <a:avLst/>
-          </a:prstGeom>
-          <a:noFill/>
-        </p:spPr>
-        <p:txBody>
-          <a:bodyPr wrap="square" anchor="t" lIns="0" rIns="0" tIns="0" bIns="0">
-            <a:spAutoFit/>
-          </a:bodyPr>
-          <a:lstStyle/>
-          <a:p>
-            <a:pPr algn="l">
-              <a:lnSpc>
-                <a:spcPct val="104000"/>
-              </a:lnSpc>
-              <a:spcBef>
-                <a:spcPts val="0"/>
-              </a:spcBef>
-              <a:spcAft>
-                <a:spcPts val="400"/>
-              </a:spcAft>
-            </a:pPr>
-            <a:r>
-              <a:rPr sz="1350" b="1">
-                <a:solidFill>
-                  <a:srgbClr val="E60012"/>
-                </a:solidFill>
-                <a:latin typeface="Noto Sans JP"/>
-                <a:ea typeface="Noto Sans JP"/>
-              </a:rPr>
-              <a:t>北米DC冷却 約13倍</a:t>
-            </a:r>
-          </a:p>
-        </p:txBody>
-      </p:sp>
-      <p:sp>
-        <p:nvSpPr>
-          <p:cNvPr id="40" name="TextBox 39"/>
-          <p:cNvSpPr txBox="1"/>
-          <p:nvPr/>
-        </p:nvSpPr>
-        <p:spPr>
-          <a:xfrm>
-            <a:off x="7724851" y="3785616"/>
-            <a:ext cx="1596542" cy="219456"/>
-          </a:xfrm>
-          <a:prstGeom prst="rect">
-            <a:avLst/>
-          </a:prstGeom>
-          <a:noFill/>
-        </p:spPr>
-        <p:txBody>
-          <a:bodyPr wrap="square" anchor="t" lIns="0" rIns="0" tIns="0" bIns="0">
-            <a:spAutoFit/>
-          </a:bodyPr>
-          <a:lstStyle/>
-          <a:p>
-            <a:pPr algn="l">
-              <a:lnSpc>
-                <a:spcPct val="106000"/>
-              </a:lnSpc>
-              <a:spcBef>
-                <a:spcPts val="0"/>
-              </a:spcBef>
-              <a:spcAft>
-                <a:spcPts val="400"/>
-              </a:spcAft>
-            </a:pPr>
-            <a:r>
-              <a:rPr sz="700" b="1">
-                <a:solidFill>
-                  <a:srgbClr val="8A9098"/>
-                </a:solidFill>
-                <a:latin typeface="Consolas"/>
-                <a:ea typeface="Consolas"/>
-              </a:rPr>
-              <a:t>代表企業</a:t>
-            </a:r>
-          </a:p>
-        </p:txBody>
-      </p:sp>
-      <p:sp>
-        <p:nvSpPr>
-          <p:cNvPr id="41" name="TextBox 40"/>
-          <p:cNvSpPr txBox="1"/>
-          <p:nvPr/>
-        </p:nvSpPr>
-        <p:spPr>
-          <a:xfrm>
-            <a:off x="7724851" y="3986784"/>
-            <a:ext cx="1596542" cy="548640"/>
-          </a:xfrm>
-          <a:prstGeom prst="rect">
-            <a:avLst/>
-          </a:prstGeom>
-          <a:noFill/>
-        </p:spPr>
-        <p:txBody>
-          <a:bodyPr wrap="square" anchor="t" lIns="0" rIns="0" tIns="0" bIns="0">
-            <a:spAutoFit/>
-          </a:bodyPr>
-          <a:lstStyle/>
-          <a:p>
-            <a:pPr algn="l">
-              <a:lnSpc>
-                <a:spcPct val="116000"/>
-              </a:lnSpc>
-              <a:spcBef>
-                <a:spcPts val="0"/>
-              </a:spcBef>
-              <a:spcAft>
-                <a:spcPts val="400"/>
-              </a:spcAft>
-            </a:pPr>
-            <a:r>
-              <a:rPr sz="919" b="1">
-                <a:solidFill>
-                  <a:srgbClr val="1A1D21"/>
-                </a:solidFill>
-                <a:latin typeface="Noto Sans JP"/>
-                <a:ea typeface="Noto Sans JP"/>
-              </a:rPr>
-              <a:t>ダイキン 230→3,000億円</a:t>
-            </a:r>
-          </a:p>
-        </p:txBody>
-      </p:sp>
-      <p:sp>
-        <p:nvSpPr>
-          <p:cNvPr id="42" name="Chevron 41"/>
-          <p:cNvSpPr/>
-          <p:nvPr/>
-        </p:nvSpPr>
-        <p:spPr>
-          <a:xfrm>
-            <a:off x="9467697" y="1417320"/>
-            <a:ext cx="2053742" cy="786384"/>
-          </a:xfrm>
-          <a:prstGeom prst="chevron">
-            <a:avLst/>
-          </a:prstGeom>
-          <a:solidFill>
-            <a:srgbClr val="E60012"/>
-          </a:solidFill>
-          <a:ln>
-            <a:noFill/>
-          </a:ln>
-          <a:effectLst/>
-        </p:spPr>
-        <p:style>
-          <a:lnRef idx="1">
-            <a:schemeClr val="accent1"/>
-          </a:lnRef>
-          <a:fillRef idx="3">
-            <a:schemeClr val="accent1"/>
-          </a:fillRef>
-          <a:effectRef idx="2">
-            <a:schemeClr val="accent1"/>
-          </a:effectRef>
-          <a:fontRef idx="minor">
-            <a:schemeClr val="lt1"/>
-          </a:fontRef>
-        </p:style>
-        <p:txBody>
-          <a:bodyPr rtlCol="0" anchor="ctr"/>
-          <a:lstStyle/>
-          <a:p/>
-        </p:txBody>
-      </p:sp>
-      <p:sp>
-        <p:nvSpPr>
-          <p:cNvPr id="43" name="TextBox 42"/>
-          <p:cNvSpPr txBox="1"/>
-          <p:nvPr/>
-        </p:nvSpPr>
-        <p:spPr>
-          <a:xfrm>
-            <a:off x="9449409" y="1417320"/>
-            <a:ext cx="1980590" cy="786384"/>
-          </a:xfrm>
-          <a:prstGeom prst="rect">
-            <a:avLst/>
-          </a:prstGeom>
-          <a:noFill/>
-        </p:spPr>
-        <p:txBody>
-          <a:bodyPr wrap="square" anchor="ctr" lIns="0" rIns="0" tIns="0" bIns="0">
-            <a:spAutoFit/>
-          </a:bodyPr>
-          <a:lstStyle/>
-          <a:p>
-            <a:pPr algn="ctr">
-              <a:lnSpc>
-                <a:spcPct val="100000"/>
-              </a:lnSpc>
-              <a:spcBef>
-                <a:spcPts val="0"/>
-              </a:spcBef>
-              <a:spcAft>
-                <a:spcPts val="0"/>
-              </a:spcAft>
-            </a:pPr>
-            <a:r>
-              <a:rPr sz="800" b="1" spc="100">
-                <a:solidFill>
-                  <a:srgbClr val="FFC9CE"/>
-                </a:solidFill>
-                <a:latin typeface="Consolas"/>
-                <a:ea typeface="Consolas"/>
-              </a:rPr>
-              <a:t>05</a:t>
-            </a:r>
-          </a:p>
-          <a:p>
-            <a:pPr algn="ctr">
-              <a:lnSpc>
-                <a:spcPct val="100000"/>
-              </a:lnSpc>
-              <a:spcBef>
-                <a:spcPts val="0"/>
-              </a:spcBef>
-              <a:spcAft>
-                <a:spcPts val="0"/>
-              </a:spcAft>
-            </a:pPr>
-            <a:r>
-              <a:rPr sz="1100" b="1">
-                <a:solidFill>
-                  <a:srgbClr val="FFFFFF"/>
-                </a:solidFill>
-                <a:latin typeface="Noto Sans JP"/>
-                <a:ea typeface="Noto Sans JP"/>
-              </a:rPr>
-              <a:t>半導体</a:t>
-            </a:r>
-          </a:p>
-        </p:txBody>
-      </p:sp>
-      <p:sp>
-        <p:nvSpPr>
-          <p:cNvPr id="44" name="Rounded Rectangle 43"/>
-          <p:cNvSpPr/>
-          <p:nvPr/>
-        </p:nvSpPr>
-        <p:spPr>
-          <a:xfrm>
-            <a:off x="9531705" y="2304288"/>
-            <a:ext cx="1834286" cy="2286000"/>
-          </a:xfrm>
-          <a:prstGeom prst="roundRect">
-            <a:avLst>
-              <a:gd name="adj" fmla="val 5000"/>
-            </a:avLst>
-          </a:prstGeom>
-          <a:solidFill>
-            <a:srgbClr val="FFFFFF"/>
-          </a:solidFill>
-          <a:ln w="12700">
-            <a:solidFill>
-              <a:srgbClr val="E2E4E9"/>
-            </a:solidFill>
-          </a:ln>
-          <a:effectLst/>
-        </p:spPr>
-        <p:style>
-          <a:lnRef idx="1">
-            <a:schemeClr val="accent1"/>
-          </a:lnRef>
-          <a:fillRef idx="3">
-            <a:schemeClr val="accent1"/>
-          </a:fillRef>
-          <a:effectRef idx="2">
-            <a:schemeClr val="accent1"/>
-          </a:effectRef>
-          <a:fontRef idx="minor">
-            <a:schemeClr val="lt1"/>
-          </a:fontRef>
-        </p:style>
-        <p:txBody>
-          <a:bodyPr rtlCol="0" anchor="ctr"/>
-          <a:lstStyle/>
-          <a:p>
-            <a:pPr algn="ctr"/>
-          </a:p>
-        </p:txBody>
-      </p:sp>
-      <p:sp>
-        <p:nvSpPr>
-          <p:cNvPr id="45" name="TextBox 44"/>
-          <p:cNvSpPr txBox="1"/>
-          <p:nvPr/>
-        </p:nvSpPr>
-        <p:spPr>
-          <a:xfrm>
-            <a:off x="9650577" y="2432304"/>
-            <a:ext cx="1596542" cy="274320"/>
-          </a:xfrm>
-          <a:prstGeom prst="rect">
-            <a:avLst/>
-          </a:prstGeom>
-          <a:noFill/>
-        </p:spPr>
-        <p:txBody>
-          <a:bodyPr wrap="square" anchor="t" lIns="0" rIns="0" tIns="0" bIns="0">
-            <a:spAutoFit/>
-          </a:bodyPr>
-          <a:lstStyle/>
-          <a:p>
-            <a:pPr algn="l">
-              <a:lnSpc>
-                <a:spcPct val="106000"/>
-              </a:lnSpc>
-              <a:spcBef>
-                <a:spcPts val="0"/>
-              </a:spcBef>
-              <a:spcAft>
-                <a:spcPts val="400"/>
-              </a:spcAft>
-            </a:pPr>
-            <a:r>
-              <a:rPr sz="1150" b="1">
-                <a:solidFill>
-                  <a:srgbClr val="1A1D21"/>
-                </a:solidFill>
-                <a:latin typeface="Noto Sans JP"/>
-                <a:ea typeface="Noto Sans JP"/>
-              </a:rPr>
-              <a:t>計算する頭脳</a:t>
-            </a:r>
-          </a:p>
-        </p:txBody>
-      </p:sp>
-      <p:sp>
-        <p:nvSpPr>
-          <p:cNvPr id="46" name="Rectangle 45"/>
-          <p:cNvSpPr/>
-          <p:nvPr/>
-        </p:nvSpPr>
-        <p:spPr>
-          <a:xfrm>
-            <a:off x="9650577" y="2871216"/>
-            <a:ext cx="1596542" cy="9144"/>
-          </a:xfrm>
-          <a:prstGeom prst="rect">
-            <a:avLst/>
-          </a:prstGeom>
-          <a:solidFill>
-            <a:srgbClr val="F3C7CD"/>
-          </a:solidFill>
-          <a:ln>
-            <a:noFill/>
-          </a:ln>
-          <a:effectLst/>
-        </p:spPr>
-        <p:style>
-          <a:lnRef idx="1">
-            <a:schemeClr val="accent1"/>
-          </a:lnRef>
-          <a:fillRef idx="3">
-            <a:schemeClr val="accent1"/>
-          </a:fillRef>
-          <a:effectRef idx="2">
-            <a:schemeClr val="accent1"/>
-          </a:effectRef>
-          <a:fontRef idx="minor">
-            <a:schemeClr val="lt1"/>
-          </a:fontRef>
-        </p:style>
-        <p:txBody>
-          <a:bodyPr rtlCol="0" anchor="ctr"/>
-          <a:lstStyle/>
-          <a:p>
-            <a:pPr algn="ctr"/>
-          </a:p>
-        </p:txBody>
-      </p:sp>
-      <p:sp>
-        <p:nvSpPr>
-          <p:cNvPr id="47" name="TextBox 46"/>
-          <p:cNvSpPr txBox="1"/>
-          <p:nvPr/>
-        </p:nvSpPr>
-        <p:spPr>
-          <a:xfrm>
-            <a:off x="9650577" y="2980944"/>
-            <a:ext cx="1596542" cy="640080"/>
-          </a:xfrm>
-          <a:prstGeom prst="rect">
-            <a:avLst/>
-          </a:prstGeom>
-          <a:noFill/>
-        </p:spPr>
-        <p:txBody>
-          <a:bodyPr wrap="square" anchor="t" lIns="0" rIns="0" tIns="0" bIns="0">
-            <a:spAutoFit/>
-          </a:bodyPr>
-          <a:lstStyle/>
-          <a:p>
-            <a:pPr algn="l">
-              <a:lnSpc>
-                <a:spcPct val="104000"/>
-              </a:lnSpc>
-              <a:spcBef>
-                <a:spcPts val="0"/>
-              </a:spcBef>
-              <a:spcAft>
-                <a:spcPts val="400"/>
-              </a:spcAft>
-            </a:pPr>
-            <a:r>
-              <a:rPr sz="1350" b="1">
-                <a:solidFill>
-                  <a:srgbClr val="E60012"/>
-                </a:solidFill>
-                <a:latin typeface="Noto Sans JP"/>
-                <a:ea typeface="Noto Sans JP"/>
-              </a:rPr>
-              <a:t>設備投資 +66%</a:t>
-            </a:r>
-          </a:p>
-        </p:txBody>
-      </p:sp>
-      <p:sp>
-        <p:nvSpPr>
-          <p:cNvPr id="48" name="TextBox 47"/>
-          <p:cNvSpPr txBox="1"/>
-          <p:nvPr/>
-        </p:nvSpPr>
-        <p:spPr>
-          <a:xfrm>
-            <a:off x="9650577" y="3785616"/>
-            <a:ext cx="1596542" cy="219456"/>
-          </a:xfrm>
-          <a:prstGeom prst="rect">
-            <a:avLst/>
-          </a:prstGeom>
-          <a:noFill/>
-        </p:spPr>
-        <p:txBody>
-          <a:bodyPr wrap="square" anchor="t" lIns="0" rIns="0" tIns="0" bIns="0">
-            <a:spAutoFit/>
-          </a:bodyPr>
-          <a:lstStyle/>
-          <a:p>
-            <a:pPr algn="l">
-              <a:lnSpc>
-                <a:spcPct val="106000"/>
-              </a:lnSpc>
-              <a:spcBef>
-                <a:spcPts val="0"/>
-              </a:spcBef>
-              <a:spcAft>
-                <a:spcPts val="400"/>
-              </a:spcAft>
-            </a:pPr>
-            <a:r>
-              <a:rPr sz="700" b="1">
-                <a:solidFill>
-                  <a:srgbClr val="8A9098"/>
-                </a:solidFill>
-                <a:latin typeface="Consolas"/>
-                <a:ea typeface="Consolas"/>
-              </a:rPr>
-              <a:t>代表企業</a:t>
-            </a:r>
-          </a:p>
-        </p:txBody>
-      </p:sp>
-      <p:sp>
-        <p:nvSpPr>
-          <p:cNvPr id="49" name="TextBox 48"/>
-          <p:cNvSpPr txBox="1"/>
-          <p:nvPr/>
-        </p:nvSpPr>
-        <p:spPr>
-          <a:xfrm>
-            <a:off x="9650577" y="3986784"/>
-            <a:ext cx="1596542" cy="548640"/>
-          </a:xfrm>
-          <a:prstGeom prst="rect">
-            <a:avLst/>
-          </a:prstGeom>
-          <a:noFill/>
-        </p:spPr>
-        <p:txBody>
-          <a:bodyPr wrap="square" anchor="t" lIns="0" rIns="0" tIns="0" bIns="0">
-            <a:spAutoFit/>
-          </a:bodyPr>
-          <a:lstStyle/>
-          <a:p>
-            <a:pPr algn="l">
-              <a:lnSpc>
-                <a:spcPct val="116000"/>
-              </a:lnSpc>
-              <a:spcBef>
-                <a:spcPts val="0"/>
-              </a:spcBef>
-              <a:spcAft>
-                <a:spcPts val="400"/>
-              </a:spcAft>
-            </a:pPr>
-            <a:r>
-              <a:rPr sz="919" b="1">
-                <a:solidFill>
-                  <a:srgbClr val="1A1D21"/>
-                </a:solidFill>
-                <a:latin typeface="Noto Sans JP"/>
-                <a:ea typeface="Noto Sans JP"/>
-              </a:rPr>
-              <a:t>キオクシア・東京ｴﾚｸﾄﾛﾝ</a:t>
-            </a:r>
-          </a:p>
-        </p:txBody>
-      </p:sp>
-      <p:sp>
-        <p:nvSpPr>
-          <p:cNvPr id="50" name="Rounded Rectangle 49"/>
-          <p:cNvSpPr/>
-          <p:nvPr/>
-        </p:nvSpPr>
-        <p:spPr>
-          <a:xfrm>
-            <a:off x="777240" y="4754880"/>
-            <a:ext cx="10634472" cy="566928"/>
+            <a:off x="777240" y="5230368"/>
+            <a:ext cx="10634472" cy="1005840"/>
           </a:xfrm>
           <a:prstGeom prst="roundRect">
             <a:avLst>
@@ -8591,60 +7392,14 @@
       </p:sp>
       <p:sp>
         <p:nvSpPr>
-          <p:cNvPr id="51" name="Rounded Rectangle 50"/>
-          <p:cNvSpPr/>
-          <p:nvPr/>
-        </p:nvSpPr>
-        <p:spPr>
-          <a:xfrm>
-            <a:off x="777240" y="4754880"/>
-            <a:ext cx="2148840" cy="566928"/>
-          </a:xfrm>
-          <a:prstGeom prst="roundRect">
-            <a:avLst>
-              <a:gd name="adj" fmla="val 5000"/>
-            </a:avLst>
-          </a:prstGeom>
-          <a:solidFill>
-            <a:srgbClr val="E60012"/>
-          </a:solidFill>
-          <a:ln>
-            <a:noFill/>
-          </a:ln>
-          <a:effectLst/>
-        </p:spPr>
-        <p:style>
-          <a:lnRef idx="1">
-            <a:schemeClr val="accent1"/>
-          </a:lnRef>
-          <a:fillRef idx="3">
-            <a:schemeClr val="accent1"/>
-          </a:fillRef>
-          <a:effectRef idx="2">
-            <a:schemeClr val="accent1"/>
-          </a:effectRef>
-          <a:fontRef idx="minor">
-            <a:schemeClr val="lt1"/>
-          </a:fontRef>
-        </p:style>
-        <p:txBody>
-          <a:bodyPr rtlCol="0" anchor="ctr"/>
-          <a:lstStyle/>
-          <a:p>
-            <a:pPr algn="ctr"/>
-          </a:p>
-        </p:txBody>
-      </p:sp>
-      <p:sp>
-        <p:nvSpPr>
-          <p:cNvPr id="52" name="TextBox 51"/>
+          <p:cNvPr id="27" name="TextBox 26"/>
           <p:cNvSpPr txBox="1"/>
           <p:nvPr/>
         </p:nvSpPr>
         <p:spPr>
           <a:xfrm>
-            <a:off x="868680" y="4754880"/>
-            <a:ext cx="2011680" cy="566928"/>
+            <a:off x="1051560" y="5230368"/>
+            <a:ext cx="10058400" cy="1005840"/>
           </a:xfrm>
           <a:prstGeom prst="rect">
             <a:avLst/>
@@ -8657,199 +7412,69 @@
           </a:bodyPr>
           <a:lstStyle/>
           <a:p>
-            <a:pPr algn="ctr">
+            <a:pPr algn="l">
               <a:lnSpc>
-                <a:spcPct val="105000"/>
+                <a:spcPct val="120000"/>
               </a:lnSpc>
               <a:spcBef>
                 <a:spcPts val="0"/>
               </a:spcBef>
               <a:spcAft>
-                <a:spcPts val="0"/>
+                <a:spcPts val="600"/>
               </a:spcAft>
             </a:pPr>
             <a:r>
-              <a:rPr sz="850" b="0">
-                <a:solidFill>
-                  <a:srgbClr val="FFE2E5"/>
+              <a:rPr sz="1500" b="1">
+                <a:solidFill>
+                  <a:srgbClr val="1A1D21"/>
                 </a:solidFill>
                 <a:latin typeface="Noto Sans JP"/>
                 <a:ea typeface="Noto Sans JP"/>
               </a:rPr>
-              <a:t>さらに基盤層で</a:t>
-            </a:r>
-          </a:p>
-          <a:p>
-            <a:pPr algn="ctr">
+              <a:t>これらは全て、</a:t>
+            </a:r>
+            <a:r>
+              <a:rPr sz="1500" b="1">
+                <a:solidFill>
+                  <a:srgbClr val="E60012"/>
+                </a:solidFill>
+                <a:latin typeface="Noto Sans JP"/>
+                <a:ea typeface="Noto Sans JP"/>
+              </a:rPr>
+              <a:t>“国内での建設・据付・保守の現場”</a:t>
+            </a:r>
+            <a:r>
+              <a:rPr sz="1500" b="1">
+                <a:solidFill>
+                  <a:srgbClr val="1A1D21"/>
+                </a:solidFill>
+                <a:latin typeface="Noto Sans JP"/>
+                <a:ea typeface="Noto Sans JP"/>
+              </a:rPr>
+              <a:t>になる。</a:t>
+            </a:r>
+          </a:p>
+          <a:p>
+            <a:pPr algn="l">
               <a:lnSpc>
-                <a:spcPct val="105000"/>
+                <a:spcPct val="120000"/>
               </a:lnSpc>
               <a:spcBef>
                 <a:spcPts val="0"/>
               </a:spcBef>
               <a:spcAft>
-                <a:spcPts val="0"/>
+                <a:spcPts val="600"/>
               </a:spcAft>
             </a:pPr>
             <a:r>
-              <a:rPr sz="1100" b="1">
-                <a:solidFill>
-                  <a:srgbClr val="FFFFFF"/>
+              <a:rPr sz="1300" b="0">
+                <a:solidFill>
+                  <a:srgbClr val="3C4148"/>
                 </a:solidFill>
                 <a:latin typeface="Noto Sans JP"/>
                 <a:ea typeface="Noto Sans JP"/>
               </a:rPr>
-              <a:t>部品・材料・ガス</a:t>
-            </a:r>
-          </a:p>
-        </p:txBody>
-      </p:sp>
-      <p:sp>
-        <p:nvSpPr>
-          <p:cNvPr id="53" name="TextBox 52"/>
-          <p:cNvSpPr txBox="1"/>
-          <p:nvPr/>
-        </p:nvSpPr>
-        <p:spPr>
-          <a:xfrm>
-            <a:off x="3108960" y="4754880"/>
-            <a:ext cx="8138160" cy="566928"/>
-          </a:xfrm>
-          <a:prstGeom prst="rect">
-            <a:avLst/>
-          </a:prstGeom>
-          <a:noFill/>
-        </p:spPr>
-        <p:txBody>
-          <a:bodyPr wrap="square" anchor="ctr" lIns="0" rIns="0" tIns="0" bIns="0">
-            <a:spAutoFit/>
-          </a:bodyPr>
-          <a:lstStyle/>
-          <a:p>
-            <a:pPr algn="l">
-              <a:lnSpc>
-                <a:spcPct val="106000"/>
-              </a:lnSpc>
-              <a:spcBef>
-                <a:spcPts val="0"/>
-              </a:spcBef>
-              <a:spcAft>
-                <a:spcPts val="400"/>
-              </a:spcAft>
-            </a:pPr>
-            <a:r>
-              <a:rPr sz="1100" b="1">
-                <a:solidFill>
-                  <a:srgbClr val="1A1D21"/>
-                </a:solidFill>
-                <a:latin typeface="Noto Sans JP"/>
-                <a:ea typeface="Noto Sans JP"/>
-              </a:rPr>
-              <a:t>村田（MLCC・AIサーバ1台に約3万個）／SMC・アドバンテスト・イビデン・日本酸素 …</a:t>
-            </a:r>
-          </a:p>
-        </p:txBody>
-      </p:sp>
-      <p:sp>
-        <p:nvSpPr>
-          <p:cNvPr id="54" name="Rounded Rectangle 53"/>
-          <p:cNvSpPr/>
-          <p:nvPr/>
-        </p:nvSpPr>
-        <p:spPr>
-          <a:xfrm>
-            <a:off x="777240" y="5486400"/>
-            <a:ext cx="10634472" cy="777240"/>
-          </a:xfrm>
-          <a:prstGeom prst="roundRect">
-            <a:avLst>
-              <a:gd name="adj" fmla="val 5000"/>
-            </a:avLst>
-          </a:prstGeom>
-          <a:solidFill>
-            <a:srgbClr val="ECEEF1"/>
-          </a:solidFill>
-          <a:ln w="15240">
-            <a:solidFill>
-              <a:srgbClr val="454B54"/>
-            </a:solidFill>
-          </a:ln>
-          <a:effectLst/>
-        </p:spPr>
-        <p:style>
-          <a:lnRef idx="1">
-            <a:schemeClr val="accent1"/>
-          </a:lnRef>
-          <a:fillRef idx="3">
-            <a:schemeClr val="accent1"/>
-          </a:fillRef>
-          <a:effectRef idx="2">
-            <a:schemeClr val="accent1"/>
-          </a:effectRef>
-          <a:fontRef idx="minor">
-            <a:schemeClr val="lt1"/>
-          </a:fontRef>
-        </p:style>
-        <p:txBody>
-          <a:bodyPr rtlCol="0" anchor="ctr"/>
-          <a:lstStyle/>
-          <a:p>
-            <a:pPr algn="ctr"/>
-          </a:p>
-        </p:txBody>
-      </p:sp>
-      <p:sp>
-        <p:nvSpPr>
-          <p:cNvPr id="55" name="TextBox 54"/>
-          <p:cNvSpPr txBox="1"/>
-          <p:nvPr/>
-        </p:nvSpPr>
-        <p:spPr>
-          <a:xfrm>
-            <a:off x="1051560" y="5486400"/>
-            <a:ext cx="10058400" cy="777240"/>
-          </a:xfrm>
-          <a:prstGeom prst="rect">
-            <a:avLst/>
-          </a:prstGeom>
-          <a:noFill/>
-        </p:spPr>
-        <p:txBody>
-          <a:bodyPr wrap="square" anchor="ctr" lIns="0" rIns="0" tIns="0" bIns="0">
-            <a:spAutoFit/>
-          </a:bodyPr>
-          <a:lstStyle/>
-          <a:p>
-            <a:pPr algn="l">
-              <a:lnSpc>
-                <a:spcPct val="106000"/>
-              </a:lnSpc>
-              <a:spcBef>
-                <a:spcPts val="0"/>
-              </a:spcBef>
-              <a:spcAft>
-                <a:spcPts val="400"/>
-              </a:spcAft>
-            </a:pPr>
-            <a:r>
-              <a:rPr sz="1450" b="1">
-                <a:solidFill>
-                  <a:srgbClr val="1A1D21"/>
-                </a:solidFill>
-                <a:latin typeface="Noto Sans JP"/>
-                <a:ea typeface="Noto Sans JP"/>
-              </a:rPr>
-              <a:t>川上（発電）から川下（半導体）まで全段が同時に増収増益。</a:t>
-            </a:r>
-            <a:r>
-              <a:rPr sz="1450" b="1">
-                <a:solidFill>
-                  <a:srgbClr val="E60012"/>
-                </a:solidFill>
-                <a:latin typeface="Noto Sans JP"/>
-                <a:ea typeface="Noto Sans JP"/>
-              </a:rPr>
-              <a:t>＝ 攻めどころは1つではなく、チェーン全体にある。</a:t>
+              <a:t>＝ 我々の営業対象が、海外の話ではなく、日本国内で今まさに立ち上がっている。</a:t>
             </a:r>
           </a:p>
         </p:txBody>
@@ -9049,7 +7674,7 @@
                 <a:latin typeface="Consolas"/>
                 <a:ea typeface="Consolas"/>
               </a:rPr>
-              <a:t>我々は、どの業界に・どんな価値を提供するのか</a:t>
+              <a:t>AI需要は、バリューチェーンのどこに効くのか</a:t>
             </a:r>
           </a:p>
         </p:txBody>
@@ -9095,7 +7720,7 @@
                 <a:latin typeface="Noto Sans JP"/>
                 <a:ea typeface="Noto Sans JP"/>
               </a:rPr>
-              <a:t>建設で磨いた“現場管理”を、そのまま製造業のフィールドへ。</a:t>
+              <a:t>国内のAI投資は、製造業のこの現場に着地している。</a:t>
             </a:r>
           </a:p>
         </p:txBody>
@@ -9153,11 +7778,2270 @@
         <p:spPr>
           <a:xfrm>
             <a:off x="777240" y="1417320"/>
-            <a:ext cx="5257800" cy="1234440"/>
+            <a:ext cx="896112" cy="786384"/>
           </a:xfrm>
           <a:prstGeom prst="roundRect">
             <a:avLst>
-              <a:gd name="adj" fmla="val 8000"/>
+              <a:gd name="adj" fmla="val 9000"/>
+            </a:avLst>
+          </a:prstGeom>
+          <a:solidFill>
+            <a:srgbClr val="454B54"/>
+          </a:solidFill>
+          <a:ln>
+            <a:noFill/>
+          </a:ln>
+          <a:effectLst/>
+        </p:spPr>
+        <p:style>
+          <a:lnRef idx="1">
+            <a:schemeClr val="accent1"/>
+          </a:lnRef>
+          <a:fillRef idx="3">
+            <a:schemeClr val="accent1"/>
+          </a:fillRef>
+          <a:effectRef idx="2">
+            <a:schemeClr val="accent1"/>
+          </a:effectRef>
+          <a:fontRef idx="minor">
+            <a:schemeClr val="lt1"/>
+          </a:fontRef>
+        </p:style>
+        <p:txBody>
+          <a:bodyPr rtlCol="0" anchor="ctr"/>
+          <a:lstStyle/>
+          <a:p>
+            <a:pPr algn="ctr"/>
+          </a:p>
+        </p:txBody>
+      </p:sp>
+      <p:sp>
+        <p:nvSpPr>
+          <p:cNvPr id="9" name="TextBox 8"/>
+          <p:cNvSpPr txBox="1"/>
+          <p:nvPr/>
+        </p:nvSpPr>
+        <p:spPr>
+          <a:xfrm>
+            <a:off x="777240" y="1417320"/>
+            <a:ext cx="896112" cy="786384"/>
+          </a:xfrm>
+          <a:prstGeom prst="rect">
+            <a:avLst/>
+          </a:prstGeom>
+          <a:noFill/>
+        </p:spPr>
+        <p:txBody>
+          <a:bodyPr wrap="square" anchor="ctr" lIns="0" rIns="0" tIns="0" bIns="0">
+            <a:spAutoFit/>
+          </a:bodyPr>
+          <a:lstStyle/>
+          <a:p>
+            <a:pPr algn="ctr">
+              <a:lnSpc>
+                <a:spcPct val="100000"/>
+              </a:lnSpc>
+              <a:spcBef>
+                <a:spcPts val="0"/>
+              </a:spcBef>
+              <a:spcAft>
+                <a:spcPts val="0"/>
+              </a:spcAft>
+            </a:pPr>
+            <a:r>
+              <a:rPr sz="800" b="1" spc="100">
+                <a:solidFill>
+                  <a:srgbClr val="D7DBE0"/>
+                </a:solidFill>
+                <a:latin typeface="Consolas"/>
+                <a:ea typeface="Consolas"/>
+              </a:rPr>
+              <a:t>起点</a:t>
+            </a:r>
+          </a:p>
+          <a:p>
+            <a:pPr algn="ctr">
+              <a:lnSpc>
+                <a:spcPct val="100000"/>
+              </a:lnSpc>
+              <a:spcBef>
+                <a:spcPts val="0"/>
+              </a:spcBef>
+              <a:spcAft>
+                <a:spcPts val="0"/>
+              </a:spcAft>
+            </a:pPr>
+            <a:r>
+              <a:rPr sz="1200" b="1">
+                <a:solidFill>
+                  <a:srgbClr val="FFFFFF"/>
+                </a:solidFill>
+                <a:latin typeface="Noto Sans JP"/>
+                <a:ea typeface="Noto Sans JP"/>
+              </a:rPr>
+              <a:t>AI需要</a:t>
+            </a:r>
+          </a:p>
+        </p:txBody>
+      </p:sp>
+      <p:sp>
+        <p:nvSpPr>
+          <p:cNvPr id="10" name="Chevron 9"/>
+          <p:cNvSpPr/>
+          <p:nvPr/>
+        </p:nvSpPr>
+        <p:spPr>
+          <a:xfrm>
+            <a:off x="1764792" y="1417320"/>
+            <a:ext cx="2053742" cy="786384"/>
+          </a:xfrm>
+          <a:prstGeom prst="chevron">
+            <a:avLst/>
+          </a:prstGeom>
+          <a:solidFill>
+            <a:srgbClr val="E60012"/>
+          </a:solidFill>
+          <a:ln>
+            <a:noFill/>
+          </a:ln>
+          <a:effectLst/>
+        </p:spPr>
+        <p:style>
+          <a:lnRef idx="1">
+            <a:schemeClr val="accent1"/>
+          </a:lnRef>
+          <a:fillRef idx="3">
+            <a:schemeClr val="accent1"/>
+          </a:fillRef>
+          <a:effectRef idx="2">
+            <a:schemeClr val="accent1"/>
+          </a:effectRef>
+          <a:fontRef idx="minor">
+            <a:schemeClr val="lt1"/>
+          </a:fontRef>
+        </p:style>
+        <p:txBody>
+          <a:bodyPr rtlCol="0" anchor="ctr"/>
+          <a:lstStyle/>
+          <a:p/>
+        </p:txBody>
+      </p:sp>
+      <p:sp>
+        <p:nvSpPr>
+          <p:cNvPr id="11" name="TextBox 10"/>
+          <p:cNvSpPr txBox="1"/>
+          <p:nvPr/>
+        </p:nvSpPr>
+        <p:spPr>
+          <a:xfrm>
+            <a:off x="1746504" y="1417320"/>
+            <a:ext cx="1980590" cy="786384"/>
+          </a:xfrm>
+          <a:prstGeom prst="rect">
+            <a:avLst/>
+          </a:prstGeom>
+          <a:noFill/>
+        </p:spPr>
+        <p:txBody>
+          <a:bodyPr wrap="square" anchor="ctr" lIns="0" rIns="0" tIns="0" bIns="0">
+            <a:spAutoFit/>
+          </a:bodyPr>
+          <a:lstStyle/>
+          <a:p>
+            <a:pPr algn="ctr">
+              <a:lnSpc>
+                <a:spcPct val="100000"/>
+              </a:lnSpc>
+              <a:spcBef>
+                <a:spcPts val="0"/>
+              </a:spcBef>
+              <a:spcAft>
+                <a:spcPts val="0"/>
+              </a:spcAft>
+            </a:pPr>
+            <a:r>
+              <a:rPr sz="800" b="1" spc="100">
+                <a:solidFill>
+                  <a:srgbClr val="FFC9CE"/>
+                </a:solidFill>
+                <a:latin typeface="Consolas"/>
+                <a:ea typeface="Consolas"/>
+              </a:rPr>
+              <a:t>01</a:t>
+            </a:r>
+          </a:p>
+          <a:p>
+            <a:pPr algn="ctr">
+              <a:lnSpc>
+                <a:spcPct val="100000"/>
+              </a:lnSpc>
+              <a:spcBef>
+                <a:spcPts val="0"/>
+              </a:spcBef>
+              <a:spcAft>
+                <a:spcPts val="0"/>
+              </a:spcAft>
+            </a:pPr>
+            <a:r>
+              <a:rPr sz="1100" b="1">
+                <a:solidFill>
+                  <a:srgbClr val="FFFFFF"/>
+                </a:solidFill>
+                <a:latin typeface="Noto Sans JP"/>
+                <a:ea typeface="Noto Sans JP"/>
+              </a:rPr>
+              <a:t>発電・電源</a:t>
+            </a:r>
+          </a:p>
+        </p:txBody>
+      </p:sp>
+      <p:sp>
+        <p:nvSpPr>
+          <p:cNvPr id="12" name="Rounded Rectangle 11"/>
+          <p:cNvSpPr/>
+          <p:nvPr/>
+        </p:nvSpPr>
+        <p:spPr>
+          <a:xfrm>
+            <a:off x="1828800" y="2304288"/>
+            <a:ext cx="1834286" cy="2286000"/>
+          </a:xfrm>
+          <a:prstGeom prst="roundRect">
+            <a:avLst>
+              <a:gd name="adj" fmla="val 5000"/>
+            </a:avLst>
+          </a:prstGeom>
+          <a:solidFill>
+            <a:srgbClr val="FFFFFF"/>
+          </a:solidFill>
+          <a:ln w="12700">
+            <a:solidFill>
+              <a:srgbClr val="E2E4E9"/>
+            </a:solidFill>
+          </a:ln>
+          <a:effectLst/>
+        </p:spPr>
+        <p:style>
+          <a:lnRef idx="1">
+            <a:schemeClr val="accent1"/>
+          </a:lnRef>
+          <a:fillRef idx="3">
+            <a:schemeClr val="accent1"/>
+          </a:fillRef>
+          <a:effectRef idx="2">
+            <a:schemeClr val="accent1"/>
+          </a:effectRef>
+          <a:fontRef idx="minor">
+            <a:schemeClr val="lt1"/>
+          </a:fontRef>
+        </p:style>
+        <p:txBody>
+          <a:bodyPr rtlCol="0" anchor="ctr"/>
+          <a:lstStyle/>
+          <a:p>
+            <a:pPr algn="ctr"/>
+          </a:p>
+        </p:txBody>
+      </p:sp>
+      <p:sp>
+        <p:nvSpPr>
+          <p:cNvPr id="13" name="TextBox 12"/>
+          <p:cNvSpPr txBox="1"/>
+          <p:nvPr/>
+        </p:nvSpPr>
+        <p:spPr>
+          <a:xfrm>
+            <a:off x="1947672" y="2432304"/>
+            <a:ext cx="1596542" cy="274320"/>
+          </a:xfrm>
+          <a:prstGeom prst="rect">
+            <a:avLst/>
+          </a:prstGeom>
+          <a:noFill/>
+        </p:spPr>
+        <p:txBody>
+          <a:bodyPr wrap="square" anchor="t" lIns="0" rIns="0" tIns="0" bIns="0">
+            <a:spAutoFit/>
+          </a:bodyPr>
+          <a:lstStyle/>
+          <a:p>
+            <a:pPr algn="l">
+              <a:lnSpc>
+                <a:spcPct val="106000"/>
+              </a:lnSpc>
+              <a:spcBef>
+                <a:spcPts val="0"/>
+              </a:spcBef>
+              <a:spcAft>
+                <a:spcPts val="400"/>
+              </a:spcAft>
+            </a:pPr>
+            <a:r>
+              <a:rPr sz="1150" b="1">
+                <a:solidFill>
+                  <a:srgbClr val="1A1D21"/>
+                </a:solidFill>
+                <a:latin typeface="Noto Sans JP"/>
+                <a:ea typeface="Noto Sans JP"/>
+              </a:rPr>
+              <a:t>電気をつくる</a:t>
+            </a:r>
+          </a:p>
+        </p:txBody>
+      </p:sp>
+      <p:sp>
+        <p:nvSpPr>
+          <p:cNvPr id="14" name="Rectangle 13"/>
+          <p:cNvSpPr/>
+          <p:nvPr/>
+        </p:nvSpPr>
+        <p:spPr>
+          <a:xfrm>
+            <a:off x="1947672" y="2871216"/>
+            <a:ext cx="1596542" cy="9144"/>
+          </a:xfrm>
+          <a:prstGeom prst="rect">
+            <a:avLst/>
+          </a:prstGeom>
+          <a:solidFill>
+            <a:srgbClr val="F3C7CD"/>
+          </a:solidFill>
+          <a:ln>
+            <a:noFill/>
+          </a:ln>
+          <a:effectLst/>
+        </p:spPr>
+        <p:style>
+          <a:lnRef idx="1">
+            <a:schemeClr val="accent1"/>
+          </a:lnRef>
+          <a:fillRef idx="3">
+            <a:schemeClr val="accent1"/>
+          </a:fillRef>
+          <a:effectRef idx="2">
+            <a:schemeClr val="accent1"/>
+          </a:effectRef>
+          <a:fontRef idx="minor">
+            <a:schemeClr val="lt1"/>
+          </a:fontRef>
+        </p:style>
+        <p:txBody>
+          <a:bodyPr rtlCol="0" anchor="ctr"/>
+          <a:lstStyle/>
+          <a:p>
+            <a:pPr algn="ctr"/>
+          </a:p>
+        </p:txBody>
+      </p:sp>
+      <p:sp>
+        <p:nvSpPr>
+          <p:cNvPr id="15" name="TextBox 14"/>
+          <p:cNvSpPr txBox="1"/>
+          <p:nvPr/>
+        </p:nvSpPr>
+        <p:spPr>
+          <a:xfrm>
+            <a:off x="1947672" y="2980944"/>
+            <a:ext cx="1596542" cy="640080"/>
+          </a:xfrm>
+          <a:prstGeom prst="rect">
+            <a:avLst/>
+          </a:prstGeom>
+          <a:noFill/>
+        </p:spPr>
+        <p:txBody>
+          <a:bodyPr wrap="square" anchor="t" lIns="0" rIns="0" tIns="0" bIns="0">
+            <a:spAutoFit/>
+          </a:bodyPr>
+          <a:lstStyle/>
+          <a:p>
+            <a:pPr algn="l">
+              <a:lnSpc>
+                <a:spcPct val="104000"/>
+              </a:lnSpc>
+              <a:spcBef>
+                <a:spcPts val="0"/>
+              </a:spcBef>
+              <a:spcAft>
+                <a:spcPts val="400"/>
+              </a:spcAft>
+            </a:pPr>
+            <a:r>
+              <a:rPr sz="1350" b="1">
+                <a:solidFill>
+                  <a:srgbClr val="E60012"/>
+                </a:solidFill>
+                <a:latin typeface="Noto Sans JP"/>
+                <a:ea typeface="Noto Sans JP"/>
+              </a:rPr>
+              <a:t>受注残 5兆円超</a:t>
+            </a:r>
+          </a:p>
+        </p:txBody>
+      </p:sp>
+      <p:sp>
+        <p:nvSpPr>
+          <p:cNvPr id="16" name="TextBox 15"/>
+          <p:cNvSpPr txBox="1"/>
+          <p:nvPr/>
+        </p:nvSpPr>
+        <p:spPr>
+          <a:xfrm>
+            <a:off x="1947672" y="3785616"/>
+            <a:ext cx="1596542" cy="219456"/>
+          </a:xfrm>
+          <a:prstGeom prst="rect">
+            <a:avLst/>
+          </a:prstGeom>
+          <a:noFill/>
+        </p:spPr>
+        <p:txBody>
+          <a:bodyPr wrap="square" anchor="t" lIns="0" rIns="0" tIns="0" bIns="0">
+            <a:spAutoFit/>
+          </a:bodyPr>
+          <a:lstStyle/>
+          <a:p>
+            <a:pPr algn="l">
+              <a:lnSpc>
+                <a:spcPct val="106000"/>
+              </a:lnSpc>
+              <a:spcBef>
+                <a:spcPts val="0"/>
+              </a:spcBef>
+              <a:spcAft>
+                <a:spcPts val="400"/>
+              </a:spcAft>
+            </a:pPr>
+            <a:r>
+              <a:rPr sz="700" b="1">
+                <a:solidFill>
+                  <a:srgbClr val="8A9098"/>
+                </a:solidFill>
+                <a:latin typeface="Consolas"/>
+                <a:ea typeface="Consolas"/>
+              </a:rPr>
+              <a:t>代表企業</a:t>
+            </a:r>
+          </a:p>
+        </p:txBody>
+      </p:sp>
+      <p:sp>
+        <p:nvSpPr>
+          <p:cNvPr id="17" name="TextBox 16"/>
+          <p:cNvSpPr txBox="1"/>
+          <p:nvPr/>
+        </p:nvSpPr>
+        <p:spPr>
+          <a:xfrm>
+            <a:off x="1947672" y="3986784"/>
+            <a:ext cx="1596542" cy="548640"/>
+          </a:xfrm>
+          <a:prstGeom prst="rect">
+            <a:avLst/>
+          </a:prstGeom>
+          <a:noFill/>
+        </p:spPr>
+        <p:txBody>
+          <a:bodyPr wrap="square" anchor="t" lIns="0" rIns="0" tIns="0" bIns="0">
+            <a:spAutoFit/>
+          </a:bodyPr>
+          <a:lstStyle/>
+          <a:p>
+            <a:pPr algn="l">
+              <a:lnSpc>
+                <a:spcPct val="116000"/>
+              </a:lnSpc>
+              <a:spcBef>
+                <a:spcPts val="0"/>
+              </a:spcBef>
+              <a:spcAft>
+                <a:spcPts val="400"/>
+              </a:spcAft>
+            </a:pPr>
+            <a:r>
+              <a:rPr sz="919" b="1">
+                <a:solidFill>
+                  <a:srgbClr val="1A1D21"/>
+                </a:solidFill>
+                <a:latin typeface="Noto Sans JP"/>
+                <a:ea typeface="Noto Sans JP"/>
+              </a:rPr>
+              <a:t>三菱重工 ガスタービン</a:t>
+            </a:r>
+          </a:p>
+        </p:txBody>
+      </p:sp>
+      <p:sp>
+        <p:nvSpPr>
+          <p:cNvPr id="18" name="Chevron 17"/>
+          <p:cNvSpPr/>
+          <p:nvPr/>
+        </p:nvSpPr>
+        <p:spPr>
+          <a:xfrm>
+            <a:off x="3690518" y="1417320"/>
+            <a:ext cx="2053742" cy="786384"/>
+          </a:xfrm>
+          <a:prstGeom prst="chevron">
+            <a:avLst/>
+          </a:prstGeom>
+          <a:solidFill>
+            <a:srgbClr val="E60012"/>
+          </a:solidFill>
+          <a:ln>
+            <a:noFill/>
+          </a:ln>
+          <a:effectLst/>
+        </p:spPr>
+        <p:style>
+          <a:lnRef idx="1">
+            <a:schemeClr val="accent1"/>
+          </a:lnRef>
+          <a:fillRef idx="3">
+            <a:schemeClr val="accent1"/>
+          </a:fillRef>
+          <a:effectRef idx="2">
+            <a:schemeClr val="accent1"/>
+          </a:effectRef>
+          <a:fontRef idx="minor">
+            <a:schemeClr val="lt1"/>
+          </a:fontRef>
+        </p:style>
+        <p:txBody>
+          <a:bodyPr rtlCol="0" anchor="ctr"/>
+          <a:lstStyle/>
+          <a:p/>
+        </p:txBody>
+      </p:sp>
+      <p:sp>
+        <p:nvSpPr>
+          <p:cNvPr id="19" name="TextBox 18"/>
+          <p:cNvSpPr txBox="1"/>
+          <p:nvPr/>
+        </p:nvSpPr>
+        <p:spPr>
+          <a:xfrm>
+            <a:off x="3672230" y="1417320"/>
+            <a:ext cx="1980590" cy="786384"/>
+          </a:xfrm>
+          <a:prstGeom prst="rect">
+            <a:avLst/>
+          </a:prstGeom>
+          <a:noFill/>
+        </p:spPr>
+        <p:txBody>
+          <a:bodyPr wrap="square" anchor="ctr" lIns="0" rIns="0" tIns="0" bIns="0">
+            <a:spAutoFit/>
+          </a:bodyPr>
+          <a:lstStyle/>
+          <a:p>
+            <a:pPr algn="ctr">
+              <a:lnSpc>
+                <a:spcPct val="100000"/>
+              </a:lnSpc>
+              <a:spcBef>
+                <a:spcPts val="0"/>
+              </a:spcBef>
+              <a:spcAft>
+                <a:spcPts val="0"/>
+              </a:spcAft>
+            </a:pPr>
+            <a:r>
+              <a:rPr sz="800" b="1" spc="100">
+                <a:solidFill>
+                  <a:srgbClr val="FFC9CE"/>
+                </a:solidFill>
+                <a:latin typeface="Consolas"/>
+                <a:ea typeface="Consolas"/>
+              </a:rPr>
+              <a:t>02</a:t>
+            </a:r>
+          </a:p>
+          <a:p>
+            <a:pPr algn="ctr">
+              <a:lnSpc>
+                <a:spcPct val="100000"/>
+              </a:lnSpc>
+              <a:spcBef>
+                <a:spcPts val="0"/>
+              </a:spcBef>
+              <a:spcAft>
+                <a:spcPts val="0"/>
+              </a:spcAft>
+            </a:pPr>
+            <a:r>
+              <a:rPr sz="1100" b="1">
+                <a:solidFill>
+                  <a:srgbClr val="FFFFFF"/>
+                </a:solidFill>
+                <a:latin typeface="Noto Sans JP"/>
+                <a:ea typeface="Noto Sans JP"/>
+              </a:rPr>
+              <a:t>送変電・電線</a:t>
+            </a:r>
+          </a:p>
+        </p:txBody>
+      </p:sp>
+      <p:sp>
+        <p:nvSpPr>
+          <p:cNvPr id="20" name="Rounded Rectangle 19"/>
+          <p:cNvSpPr/>
+          <p:nvPr/>
+        </p:nvSpPr>
+        <p:spPr>
+          <a:xfrm>
+            <a:off x="3754526" y="2304288"/>
+            <a:ext cx="1834286" cy="2286000"/>
+          </a:xfrm>
+          <a:prstGeom prst="roundRect">
+            <a:avLst>
+              <a:gd name="adj" fmla="val 5000"/>
+            </a:avLst>
+          </a:prstGeom>
+          <a:solidFill>
+            <a:srgbClr val="FFFFFF"/>
+          </a:solidFill>
+          <a:ln w="12700">
+            <a:solidFill>
+              <a:srgbClr val="E2E4E9"/>
+            </a:solidFill>
+          </a:ln>
+          <a:effectLst/>
+        </p:spPr>
+        <p:style>
+          <a:lnRef idx="1">
+            <a:schemeClr val="accent1"/>
+          </a:lnRef>
+          <a:fillRef idx="3">
+            <a:schemeClr val="accent1"/>
+          </a:fillRef>
+          <a:effectRef idx="2">
+            <a:schemeClr val="accent1"/>
+          </a:effectRef>
+          <a:fontRef idx="minor">
+            <a:schemeClr val="lt1"/>
+          </a:fontRef>
+        </p:style>
+        <p:txBody>
+          <a:bodyPr rtlCol="0" anchor="ctr"/>
+          <a:lstStyle/>
+          <a:p>
+            <a:pPr algn="ctr"/>
+          </a:p>
+        </p:txBody>
+      </p:sp>
+      <p:sp>
+        <p:nvSpPr>
+          <p:cNvPr id="21" name="TextBox 20"/>
+          <p:cNvSpPr txBox="1"/>
+          <p:nvPr/>
+        </p:nvSpPr>
+        <p:spPr>
+          <a:xfrm>
+            <a:off x="3873398" y="2432304"/>
+            <a:ext cx="1596542" cy="274320"/>
+          </a:xfrm>
+          <a:prstGeom prst="rect">
+            <a:avLst/>
+          </a:prstGeom>
+          <a:noFill/>
+        </p:spPr>
+        <p:txBody>
+          <a:bodyPr wrap="square" anchor="t" lIns="0" rIns="0" tIns="0" bIns="0">
+            <a:spAutoFit/>
+          </a:bodyPr>
+          <a:lstStyle/>
+          <a:p>
+            <a:pPr algn="l">
+              <a:lnSpc>
+                <a:spcPct val="106000"/>
+              </a:lnSpc>
+              <a:spcBef>
+                <a:spcPts val="0"/>
+              </a:spcBef>
+              <a:spcAft>
+                <a:spcPts val="400"/>
+              </a:spcAft>
+            </a:pPr>
+            <a:r>
+              <a:rPr sz="1150" b="1">
+                <a:solidFill>
+                  <a:srgbClr val="1A1D21"/>
+                </a:solidFill>
+                <a:latin typeface="Noto Sans JP"/>
+                <a:ea typeface="Noto Sans JP"/>
+              </a:rPr>
+              <a:t>電気を送る・変える</a:t>
+            </a:r>
+          </a:p>
+        </p:txBody>
+      </p:sp>
+      <p:sp>
+        <p:nvSpPr>
+          <p:cNvPr id="22" name="Rectangle 21"/>
+          <p:cNvSpPr/>
+          <p:nvPr/>
+        </p:nvSpPr>
+        <p:spPr>
+          <a:xfrm>
+            <a:off x="3873398" y="2871216"/>
+            <a:ext cx="1596542" cy="9144"/>
+          </a:xfrm>
+          <a:prstGeom prst="rect">
+            <a:avLst/>
+          </a:prstGeom>
+          <a:solidFill>
+            <a:srgbClr val="F3C7CD"/>
+          </a:solidFill>
+          <a:ln>
+            <a:noFill/>
+          </a:ln>
+          <a:effectLst/>
+        </p:spPr>
+        <p:style>
+          <a:lnRef idx="1">
+            <a:schemeClr val="accent1"/>
+          </a:lnRef>
+          <a:fillRef idx="3">
+            <a:schemeClr val="accent1"/>
+          </a:fillRef>
+          <a:effectRef idx="2">
+            <a:schemeClr val="accent1"/>
+          </a:effectRef>
+          <a:fontRef idx="minor">
+            <a:schemeClr val="lt1"/>
+          </a:fontRef>
+        </p:style>
+        <p:txBody>
+          <a:bodyPr rtlCol="0" anchor="ctr"/>
+          <a:lstStyle/>
+          <a:p>
+            <a:pPr algn="ctr"/>
+          </a:p>
+        </p:txBody>
+      </p:sp>
+      <p:sp>
+        <p:nvSpPr>
+          <p:cNvPr id="23" name="TextBox 22"/>
+          <p:cNvSpPr txBox="1"/>
+          <p:nvPr/>
+        </p:nvSpPr>
+        <p:spPr>
+          <a:xfrm>
+            <a:off x="3873398" y="2980944"/>
+            <a:ext cx="1596542" cy="640080"/>
+          </a:xfrm>
+          <a:prstGeom prst="rect">
+            <a:avLst/>
+          </a:prstGeom>
+          <a:noFill/>
+        </p:spPr>
+        <p:txBody>
+          <a:bodyPr wrap="square" anchor="t" lIns="0" rIns="0" tIns="0" bIns="0">
+            <a:spAutoFit/>
+          </a:bodyPr>
+          <a:lstStyle/>
+          <a:p>
+            <a:pPr algn="l">
+              <a:lnSpc>
+                <a:spcPct val="104000"/>
+              </a:lnSpc>
+              <a:spcBef>
+                <a:spcPts val="0"/>
+              </a:spcBef>
+              <a:spcAft>
+                <a:spcPts val="400"/>
+              </a:spcAft>
+            </a:pPr>
+            <a:r>
+              <a:rPr sz="1350" b="1">
+                <a:solidFill>
+                  <a:srgbClr val="E60012"/>
+                </a:solidFill>
+                <a:latin typeface="Noto Sans JP"/>
+                <a:ea typeface="Noto Sans JP"/>
+              </a:rPr>
+              <a:t>生産能力2倍/予約数年先</a:t>
+            </a:r>
+          </a:p>
+        </p:txBody>
+      </p:sp>
+      <p:sp>
+        <p:nvSpPr>
+          <p:cNvPr id="24" name="TextBox 23"/>
+          <p:cNvSpPr txBox="1"/>
+          <p:nvPr/>
+        </p:nvSpPr>
+        <p:spPr>
+          <a:xfrm>
+            <a:off x="3873398" y="3785616"/>
+            <a:ext cx="1596542" cy="219456"/>
+          </a:xfrm>
+          <a:prstGeom prst="rect">
+            <a:avLst/>
+          </a:prstGeom>
+          <a:noFill/>
+        </p:spPr>
+        <p:txBody>
+          <a:bodyPr wrap="square" anchor="t" lIns="0" rIns="0" tIns="0" bIns="0">
+            <a:spAutoFit/>
+          </a:bodyPr>
+          <a:lstStyle/>
+          <a:p>
+            <a:pPr algn="l">
+              <a:lnSpc>
+                <a:spcPct val="106000"/>
+              </a:lnSpc>
+              <a:spcBef>
+                <a:spcPts val="0"/>
+              </a:spcBef>
+              <a:spcAft>
+                <a:spcPts val="400"/>
+              </a:spcAft>
+            </a:pPr>
+            <a:r>
+              <a:rPr sz="700" b="1">
+                <a:solidFill>
+                  <a:srgbClr val="8A9098"/>
+                </a:solidFill>
+                <a:latin typeface="Consolas"/>
+                <a:ea typeface="Consolas"/>
+              </a:rPr>
+              <a:t>代表企業</a:t>
+            </a:r>
+          </a:p>
+        </p:txBody>
+      </p:sp>
+      <p:sp>
+        <p:nvSpPr>
+          <p:cNvPr id="25" name="TextBox 24"/>
+          <p:cNvSpPr txBox="1"/>
+          <p:nvPr/>
+        </p:nvSpPr>
+        <p:spPr>
+          <a:xfrm>
+            <a:off x="3873398" y="3986784"/>
+            <a:ext cx="1596542" cy="548640"/>
+          </a:xfrm>
+          <a:prstGeom prst="rect">
+            <a:avLst/>
+          </a:prstGeom>
+          <a:noFill/>
+        </p:spPr>
+        <p:txBody>
+          <a:bodyPr wrap="square" anchor="t" lIns="0" rIns="0" tIns="0" bIns="0">
+            <a:spAutoFit/>
+          </a:bodyPr>
+          <a:lstStyle/>
+          <a:p>
+            <a:pPr algn="l">
+              <a:lnSpc>
+                <a:spcPct val="116000"/>
+              </a:lnSpc>
+              <a:spcBef>
+                <a:spcPts val="0"/>
+              </a:spcBef>
+              <a:spcAft>
+                <a:spcPts val="400"/>
+              </a:spcAft>
+            </a:pPr>
+            <a:r>
+              <a:rPr sz="919" b="1">
+                <a:solidFill>
+                  <a:srgbClr val="1A1D21"/>
+                </a:solidFill>
+                <a:latin typeface="Noto Sans JP"/>
+                <a:ea typeface="Noto Sans JP"/>
+              </a:rPr>
+              <a:t>変圧器 各社・フジクラ</a:t>
+            </a:r>
+          </a:p>
+        </p:txBody>
+      </p:sp>
+      <p:sp>
+        <p:nvSpPr>
+          <p:cNvPr id="26" name="Chevron 25"/>
+          <p:cNvSpPr/>
+          <p:nvPr/>
+        </p:nvSpPr>
+        <p:spPr>
+          <a:xfrm>
+            <a:off x="5616244" y="1417320"/>
+            <a:ext cx="2053742" cy="786384"/>
+          </a:xfrm>
+          <a:prstGeom prst="chevron">
+            <a:avLst/>
+          </a:prstGeom>
+          <a:solidFill>
+            <a:srgbClr val="E60012"/>
+          </a:solidFill>
+          <a:ln>
+            <a:noFill/>
+          </a:ln>
+          <a:effectLst/>
+        </p:spPr>
+        <p:style>
+          <a:lnRef idx="1">
+            <a:schemeClr val="accent1"/>
+          </a:lnRef>
+          <a:fillRef idx="3">
+            <a:schemeClr val="accent1"/>
+          </a:fillRef>
+          <a:effectRef idx="2">
+            <a:schemeClr val="accent1"/>
+          </a:effectRef>
+          <a:fontRef idx="minor">
+            <a:schemeClr val="lt1"/>
+          </a:fontRef>
+        </p:style>
+        <p:txBody>
+          <a:bodyPr rtlCol="0" anchor="ctr"/>
+          <a:lstStyle/>
+          <a:p/>
+        </p:txBody>
+      </p:sp>
+      <p:sp>
+        <p:nvSpPr>
+          <p:cNvPr id="27" name="TextBox 26"/>
+          <p:cNvSpPr txBox="1"/>
+          <p:nvPr/>
+        </p:nvSpPr>
+        <p:spPr>
+          <a:xfrm>
+            <a:off x="5597956" y="1417320"/>
+            <a:ext cx="1980590" cy="786384"/>
+          </a:xfrm>
+          <a:prstGeom prst="rect">
+            <a:avLst/>
+          </a:prstGeom>
+          <a:noFill/>
+        </p:spPr>
+        <p:txBody>
+          <a:bodyPr wrap="square" anchor="ctr" lIns="0" rIns="0" tIns="0" bIns="0">
+            <a:spAutoFit/>
+          </a:bodyPr>
+          <a:lstStyle/>
+          <a:p>
+            <a:pPr algn="ctr">
+              <a:lnSpc>
+                <a:spcPct val="100000"/>
+              </a:lnSpc>
+              <a:spcBef>
+                <a:spcPts val="0"/>
+              </a:spcBef>
+              <a:spcAft>
+                <a:spcPts val="0"/>
+              </a:spcAft>
+            </a:pPr>
+            <a:r>
+              <a:rPr sz="800" b="1" spc="100">
+                <a:solidFill>
+                  <a:srgbClr val="FFC9CE"/>
+                </a:solidFill>
+                <a:latin typeface="Consolas"/>
+                <a:ea typeface="Consolas"/>
+              </a:rPr>
+              <a:t>03</a:t>
+            </a:r>
+          </a:p>
+          <a:p>
+            <a:pPr algn="ctr">
+              <a:lnSpc>
+                <a:spcPct val="100000"/>
+              </a:lnSpc>
+              <a:spcBef>
+                <a:spcPts val="0"/>
+              </a:spcBef>
+              <a:spcAft>
+                <a:spcPts val="0"/>
+              </a:spcAft>
+            </a:pPr>
+            <a:r>
+              <a:rPr sz="1100" b="1">
+                <a:solidFill>
+                  <a:srgbClr val="FFFFFF"/>
+                </a:solidFill>
+                <a:latin typeface="Noto Sans JP"/>
+                <a:ea typeface="Noto Sans JP"/>
+              </a:rPr>
+              <a:t>DC建設・設備工事</a:t>
+            </a:r>
+          </a:p>
+        </p:txBody>
+      </p:sp>
+      <p:sp>
+        <p:nvSpPr>
+          <p:cNvPr id="28" name="Rounded Rectangle 27"/>
+          <p:cNvSpPr/>
+          <p:nvPr/>
+        </p:nvSpPr>
+        <p:spPr>
+          <a:xfrm>
+            <a:off x="5680252" y="2304288"/>
+            <a:ext cx="1834286" cy="2286000"/>
+          </a:xfrm>
+          <a:prstGeom prst="roundRect">
+            <a:avLst>
+              <a:gd name="adj" fmla="val 5000"/>
+            </a:avLst>
+          </a:prstGeom>
+          <a:solidFill>
+            <a:srgbClr val="FFFFFF"/>
+          </a:solidFill>
+          <a:ln w="12700">
+            <a:solidFill>
+              <a:srgbClr val="E2E4E9"/>
+            </a:solidFill>
+          </a:ln>
+          <a:effectLst/>
+        </p:spPr>
+        <p:style>
+          <a:lnRef idx="1">
+            <a:schemeClr val="accent1"/>
+          </a:lnRef>
+          <a:fillRef idx="3">
+            <a:schemeClr val="accent1"/>
+          </a:fillRef>
+          <a:effectRef idx="2">
+            <a:schemeClr val="accent1"/>
+          </a:effectRef>
+          <a:fontRef idx="minor">
+            <a:schemeClr val="lt1"/>
+          </a:fontRef>
+        </p:style>
+        <p:txBody>
+          <a:bodyPr rtlCol="0" anchor="ctr"/>
+          <a:lstStyle/>
+          <a:p>
+            <a:pPr algn="ctr"/>
+          </a:p>
+        </p:txBody>
+      </p:sp>
+      <p:sp>
+        <p:nvSpPr>
+          <p:cNvPr id="29" name="TextBox 28"/>
+          <p:cNvSpPr txBox="1"/>
+          <p:nvPr/>
+        </p:nvSpPr>
+        <p:spPr>
+          <a:xfrm>
+            <a:off x="5799124" y="2432304"/>
+            <a:ext cx="1596542" cy="274320"/>
+          </a:xfrm>
+          <a:prstGeom prst="rect">
+            <a:avLst/>
+          </a:prstGeom>
+          <a:noFill/>
+        </p:spPr>
+        <p:txBody>
+          <a:bodyPr wrap="square" anchor="t" lIns="0" rIns="0" tIns="0" bIns="0">
+            <a:spAutoFit/>
+          </a:bodyPr>
+          <a:lstStyle/>
+          <a:p>
+            <a:pPr algn="l">
+              <a:lnSpc>
+                <a:spcPct val="106000"/>
+              </a:lnSpc>
+              <a:spcBef>
+                <a:spcPts val="0"/>
+              </a:spcBef>
+              <a:spcAft>
+                <a:spcPts val="400"/>
+              </a:spcAft>
+            </a:pPr>
+            <a:r>
+              <a:rPr sz="1150" b="1">
+                <a:solidFill>
+                  <a:srgbClr val="1A1D21"/>
+                </a:solidFill>
+                <a:latin typeface="Noto Sans JP"/>
+                <a:ea typeface="Noto Sans JP"/>
+              </a:rPr>
+              <a:t>箱を建てる</a:t>
+            </a:r>
+          </a:p>
+        </p:txBody>
+      </p:sp>
+      <p:sp>
+        <p:nvSpPr>
+          <p:cNvPr id="30" name="Rectangle 29"/>
+          <p:cNvSpPr/>
+          <p:nvPr/>
+        </p:nvSpPr>
+        <p:spPr>
+          <a:xfrm>
+            <a:off x="5799124" y="2871216"/>
+            <a:ext cx="1596542" cy="9144"/>
+          </a:xfrm>
+          <a:prstGeom prst="rect">
+            <a:avLst/>
+          </a:prstGeom>
+          <a:solidFill>
+            <a:srgbClr val="F3C7CD"/>
+          </a:solidFill>
+          <a:ln>
+            <a:noFill/>
+          </a:ln>
+          <a:effectLst/>
+        </p:spPr>
+        <p:style>
+          <a:lnRef idx="1">
+            <a:schemeClr val="accent1"/>
+          </a:lnRef>
+          <a:fillRef idx="3">
+            <a:schemeClr val="accent1"/>
+          </a:fillRef>
+          <a:effectRef idx="2">
+            <a:schemeClr val="accent1"/>
+          </a:effectRef>
+          <a:fontRef idx="minor">
+            <a:schemeClr val="lt1"/>
+          </a:fontRef>
+        </p:style>
+        <p:txBody>
+          <a:bodyPr rtlCol="0" anchor="ctr"/>
+          <a:lstStyle/>
+          <a:p>
+            <a:pPr algn="ctr"/>
+          </a:p>
+        </p:txBody>
+      </p:sp>
+      <p:sp>
+        <p:nvSpPr>
+          <p:cNvPr id="31" name="TextBox 30"/>
+          <p:cNvSpPr txBox="1"/>
+          <p:nvPr/>
+        </p:nvSpPr>
+        <p:spPr>
+          <a:xfrm>
+            <a:off x="5799124" y="2980944"/>
+            <a:ext cx="1596542" cy="640080"/>
+          </a:xfrm>
+          <a:prstGeom prst="rect">
+            <a:avLst/>
+          </a:prstGeom>
+          <a:noFill/>
+        </p:spPr>
+        <p:txBody>
+          <a:bodyPr wrap="square" anchor="t" lIns="0" rIns="0" tIns="0" bIns="0">
+            <a:spAutoFit/>
+          </a:bodyPr>
+          <a:lstStyle/>
+          <a:p>
+            <a:pPr algn="l">
+              <a:lnSpc>
+                <a:spcPct val="104000"/>
+              </a:lnSpc>
+              <a:spcBef>
+                <a:spcPts val="0"/>
+              </a:spcBef>
+              <a:spcAft>
+                <a:spcPts val="400"/>
+              </a:spcAft>
+            </a:pPr>
+            <a:r>
+              <a:rPr sz="1350" b="1">
+                <a:solidFill>
+                  <a:srgbClr val="E60012"/>
+                </a:solidFill>
+                <a:latin typeface="Noto Sans JP"/>
+                <a:ea typeface="Noto Sans JP"/>
+              </a:rPr>
+              <a:t>空調工事 受注 +25.5%</a:t>
+            </a:r>
+          </a:p>
+        </p:txBody>
+      </p:sp>
+      <p:sp>
+        <p:nvSpPr>
+          <p:cNvPr id="32" name="TextBox 31"/>
+          <p:cNvSpPr txBox="1"/>
+          <p:nvPr/>
+        </p:nvSpPr>
+        <p:spPr>
+          <a:xfrm>
+            <a:off x="5799124" y="3785616"/>
+            <a:ext cx="1596542" cy="219456"/>
+          </a:xfrm>
+          <a:prstGeom prst="rect">
+            <a:avLst/>
+          </a:prstGeom>
+          <a:noFill/>
+        </p:spPr>
+        <p:txBody>
+          <a:bodyPr wrap="square" anchor="t" lIns="0" rIns="0" tIns="0" bIns="0">
+            <a:spAutoFit/>
+          </a:bodyPr>
+          <a:lstStyle/>
+          <a:p>
+            <a:pPr algn="l">
+              <a:lnSpc>
+                <a:spcPct val="106000"/>
+              </a:lnSpc>
+              <a:spcBef>
+                <a:spcPts val="0"/>
+              </a:spcBef>
+              <a:spcAft>
+                <a:spcPts val="400"/>
+              </a:spcAft>
+            </a:pPr>
+            <a:r>
+              <a:rPr sz="700" b="1">
+                <a:solidFill>
+                  <a:srgbClr val="8A9098"/>
+                </a:solidFill>
+                <a:latin typeface="Consolas"/>
+                <a:ea typeface="Consolas"/>
+              </a:rPr>
+              <a:t>代表企業</a:t>
+            </a:r>
+          </a:p>
+        </p:txBody>
+      </p:sp>
+      <p:sp>
+        <p:nvSpPr>
+          <p:cNvPr id="33" name="TextBox 32"/>
+          <p:cNvSpPr txBox="1"/>
+          <p:nvPr/>
+        </p:nvSpPr>
+        <p:spPr>
+          <a:xfrm>
+            <a:off x="5799124" y="3986784"/>
+            <a:ext cx="1596542" cy="548640"/>
+          </a:xfrm>
+          <a:prstGeom prst="rect">
+            <a:avLst/>
+          </a:prstGeom>
+          <a:noFill/>
+        </p:spPr>
+        <p:txBody>
+          <a:bodyPr wrap="square" anchor="t" lIns="0" rIns="0" tIns="0" bIns="0">
+            <a:spAutoFit/>
+          </a:bodyPr>
+          <a:lstStyle/>
+          <a:p>
+            <a:pPr algn="l">
+              <a:lnSpc>
+                <a:spcPct val="116000"/>
+              </a:lnSpc>
+              <a:spcBef>
+                <a:spcPts val="0"/>
+              </a:spcBef>
+              <a:spcAft>
+                <a:spcPts val="400"/>
+              </a:spcAft>
+            </a:pPr>
+            <a:r>
+              <a:rPr sz="919" b="1">
+                <a:solidFill>
+                  <a:srgbClr val="1A1D21"/>
+                </a:solidFill>
+                <a:latin typeface="Noto Sans JP"/>
+                <a:ea typeface="Noto Sans JP"/>
+              </a:rPr>
+              <a:t>ダイダン・高砂熱学ほか</a:t>
+            </a:r>
+          </a:p>
+        </p:txBody>
+      </p:sp>
+      <p:sp>
+        <p:nvSpPr>
+          <p:cNvPr id="34" name="Chevron 33"/>
+          <p:cNvSpPr/>
+          <p:nvPr/>
+        </p:nvSpPr>
+        <p:spPr>
+          <a:xfrm>
+            <a:off x="7541971" y="1417320"/>
+            <a:ext cx="2053742" cy="786384"/>
+          </a:xfrm>
+          <a:prstGeom prst="chevron">
+            <a:avLst/>
+          </a:prstGeom>
+          <a:solidFill>
+            <a:srgbClr val="E60012"/>
+          </a:solidFill>
+          <a:ln>
+            <a:noFill/>
+          </a:ln>
+          <a:effectLst/>
+        </p:spPr>
+        <p:style>
+          <a:lnRef idx="1">
+            <a:schemeClr val="accent1"/>
+          </a:lnRef>
+          <a:fillRef idx="3">
+            <a:schemeClr val="accent1"/>
+          </a:fillRef>
+          <a:effectRef idx="2">
+            <a:schemeClr val="accent1"/>
+          </a:effectRef>
+          <a:fontRef idx="minor">
+            <a:schemeClr val="lt1"/>
+          </a:fontRef>
+        </p:style>
+        <p:txBody>
+          <a:bodyPr rtlCol="0" anchor="ctr"/>
+          <a:lstStyle/>
+          <a:p/>
+        </p:txBody>
+      </p:sp>
+      <p:sp>
+        <p:nvSpPr>
+          <p:cNvPr id="35" name="TextBox 34"/>
+          <p:cNvSpPr txBox="1"/>
+          <p:nvPr/>
+        </p:nvSpPr>
+        <p:spPr>
+          <a:xfrm>
+            <a:off x="7523683" y="1417320"/>
+            <a:ext cx="1980590" cy="786384"/>
+          </a:xfrm>
+          <a:prstGeom prst="rect">
+            <a:avLst/>
+          </a:prstGeom>
+          <a:noFill/>
+        </p:spPr>
+        <p:txBody>
+          <a:bodyPr wrap="square" anchor="ctr" lIns="0" rIns="0" tIns="0" bIns="0">
+            <a:spAutoFit/>
+          </a:bodyPr>
+          <a:lstStyle/>
+          <a:p>
+            <a:pPr algn="ctr">
+              <a:lnSpc>
+                <a:spcPct val="100000"/>
+              </a:lnSpc>
+              <a:spcBef>
+                <a:spcPts val="0"/>
+              </a:spcBef>
+              <a:spcAft>
+                <a:spcPts val="0"/>
+              </a:spcAft>
+            </a:pPr>
+            <a:r>
+              <a:rPr sz="800" b="1" spc="100">
+                <a:solidFill>
+                  <a:srgbClr val="FFC9CE"/>
+                </a:solidFill>
+                <a:latin typeface="Consolas"/>
+                <a:ea typeface="Consolas"/>
+              </a:rPr>
+              <a:t>04</a:t>
+            </a:r>
+          </a:p>
+          <a:p>
+            <a:pPr algn="ctr">
+              <a:lnSpc>
+                <a:spcPct val="100000"/>
+              </a:lnSpc>
+              <a:spcBef>
+                <a:spcPts val="0"/>
+              </a:spcBef>
+              <a:spcAft>
+                <a:spcPts val="0"/>
+              </a:spcAft>
+            </a:pPr>
+            <a:r>
+              <a:rPr sz="1100" b="1">
+                <a:solidFill>
+                  <a:srgbClr val="FFFFFF"/>
+                </a:solidFill>
+                <a:latin typeface="Noto Sans JP"/>
+                <a:ea typeface="Noto Sans JP"/>
+              </a:rPr>
+              <a:t>冷却・電源保護</a:t>
+            </a:r>
+          </a:p>
+        </p:txBody>
+      </p:sp>
+      <p:sp>
+        <p:nvSpPr>
+          <p:cNvPr id="36" name="Rounded Rectangle 35"/>
+          <p:cNvSpPr/>
+          <p:nvPr/>
+        </p:nvSpPr>
+        <p:spPr>
+          <a:xfrm>
+            <a:off x="7605979" y="2304288"/>
+            <a:ext cx="1834286" cy="2286000"/>
+          </a:xfrm>
+          <a:prstGeom prst="roundRect">
+            <a:avLst>
+              <a:gd name="adj" fmla="val 5000"/>
+            </a:avLst>
+          </a:prstGeom>
+          <a:solidFill>
+            <a:srgbClr val="FFFFFF"/>
+          </a:solidFill>
+          <a:ln w="12700">
+            <a:solidFill>
+              <a:srgbClr val="E2E4E9"/>
+            </a:solidFill>
+          </a:ln>
+          <a:effectLst/>
+        </p:spPr>
+        <p:style>
+          <a:lnRef idx="1">
+            <a:schemeClr val="accent1"/>
+          </a:lnRef>
+          <a:fillRef idx="3">
+            <a:schemeClr val="accent1"/>
+          </a:fillRef>
+          <a:effectRef idx="2">
+            <a:schemeClr val="accent1"/>
+          </a:effectRef>
+          <a:fontRef idx="minor">
+            <a:schemeClr val="lt1"/>
+          </a:fontRef>
+        </p:style>
+        <p:txBody>
+          <a:bodyPr rtlCol="0" anchor="ctr"/>
+          <a:lstStyle/>
+          <a:p>
+            <a:pPr algn="ctr"/>
+          </a:p>
+        </p:txBody>
+      </p:sp>
+      <p:sp>
+        <p:nvSpPr>
+          <p:cNvPr id="37" name="TextBox 36"/>
+          <p:cNvSpPr txBox="1"/>
+          <p:nvPr/>
+        </p:nvSpPr>
+        <p:spPr>
+          <a:xfrm>
+            <a:off x="7724851" y="2432304"/>
+            <a:ext cx="1596542" cy="274320"/>
+          </a:xfrm>
+          <a:prstGeom prst="rect">
+            <a:avLst/>
+          </a:prstGeom>
+          <a:noFill/>
+        </p:spPr>
+        <p:txBody>
+          <a:bodyPr wrap="square" anchor="t" lIns="0" rIns="0" tIns="0" bIns="0">
+            <a:spAutoFit/>
+          </a:bodyPr>
+          <a:lstStyle/>
+          <a:p>
+            <a:pPr algn="l">
+              <a:lnSpc>
+                <a:spcPct val="106000"/>
+              </a:lnSpc>
+              <a:spcBef>
+                <a:spcPts val="0"/>
+              </a:spcBef>
+              <a:spcAft>
+                <a:spcPts val="400"/>
+              </a:spcAft>
+            </a:pPr>
+            <a:r>
+              <a:rPr sz="1150" b="1">
+                <a:solidFill>
+                  <a:srgbClr val="1A1D21"/>
+                </a:solidFill>
+                <a:latin typeface="Noto Sans JP"/>
+                <a:ea typeface="Noto Sans JP"/>
+              </a:rPr>
+              <a:t>冷やす・止めない</a:t>
+            </a:r>
+          </a:p>
+        </p:txBody>
+      </p:sp>
+      <p:sp>
+        <p:nvSpPr>
+          <p:cNvPr id="38" name="Rectangle 37"/>
+          <p:cNvSpPr/>
+          <p:nvPr/>
+        </p:nvSpPr>
+        <p:spPr>
+          <a:xfrm>
+            <a:off x="7724851" y="2871216"/>
+            <a:ext cx="1596542" cy="9144"/>
+          </a:xfrm>
+          <a:prstGeom prst="rect">
+            <a:avLst/>
+          </a:prstGeom>
+          <a:solidFill>
+            <a:srgbClr val="F3C7CD"/>
+          </a:solidFill>
+          <a:ln>
+            <a:noFill/>
+          </a:ln>
+          <a:effectLst/>
+        </p:spPr>
+        <p:style>
+          <a:lnRef idx="1">
+            <a:schemeClr val="accent1"/>
+          </a:lnRef>
+          <a:fillRef idx="3">
+            <a:schemeClr val="accent1"/>
+          </a:fillRef>
+          <a:effectRef idx="2">
+            <a:schemeClr val="accent1"/>
+          </a:effectRef>
+          <a:fontRef idx="minor">
+            <a:schemeClr val="lt1"/>
+          </a:fontRef>
+        </p:style>
+        <p:txBody>
+          <a:bodyPr rtlCol="0" anchor="ctr"/>
+          <a:lstStyle/>
+          <a:p>
+            <a:pPr algn="ctr"/>
+          </a:p>
+        </p:txBody>
+      </p:sp>
+      <p:sp>
+        <p:nvSpPr>
+          <p:cNvPr id="39" name="TextBox 38"/>
+          <p:cNvSpPr txBox="1"/>
+          <p:nvPr/>
+        </p:nvSpPr>
+        <p:spPr>
+          <a:xfrm>
+            <a:off x="7724851" y="2980944"/>
+            <a:ext cx="1596542" cy="640080"/>
+          </a:xfrm>
+          <a:prstGeom prst="rect">
+            <a:avLst/>
+          </a:prstGeom>
+          <a:noFill/>
+        </p:spPr>
+        <p:txBody>
+          <a:bodyPr wrap="square" anchor="t" lIns="0" rIns="0" tIns="0" bIns="0">
+            <a:spAutoFit/>
+          </a:bodyPr>
+          <a:lstStyle/>
+          <a:p>
+            <a:pPr algn="l">
+              <a:lnSpc>
+                <a:spcPct val="104000"/>
+              </a:lnSpc>
+              <a:spcBef>
+                <a:spcPts val="0"/>
+              </a:spcBef>
+              <a:spcAft>
+                <a:spcPts val="400"/>
+              </a:spcAft>
+            </a:pPr>
+            <a:r>
+              <a:rPr sz="1350" b="1">
+                <a:solidFill>
+                  <a:srgbClr val="E60012"/>
+                </a:solidFill>
+                <a:latin typeface="Noto Sans JP"/>
+                <a:ea typeface="Noto Sans JP"/>
+              </a:rPr>
+              <a:t>北米DC冷却 約13倍</a:t>
+            </a:r>
+          </a:p>
+        </p:txBody>
+      </p:sp>
+      <p:sp>
+        <p:nvSpPr>
+          <p:cNvPr id="40" name="TextBox 39"/>
+          <p:cNvSpPr txBox="1"/>
+          <p:nvPr/>
+        </p:nvSpPr>
+        <p:spPr>
+          <a:xfrm>
+            <a:off x="7724851" y="3785616"/>
+            <a:ext cx="1596542" cy="219456"/>
+          </a:xfrm>
+          <a:prstGeom prst="rect">
+            <a:avLst/>
+          </a:prstGeom>
+          <a:noFill/>
+        </p:spPr>
+        <p:txBody>
+          <a:bodyPr wrap="square" anchor="t" lIns="0" rIns="0" tIns="0" bIns="0">
+            <a:spAutoFit/>
+          </a:bodyPr>
+          <a:lstStyle/>
+          <a:p>
+            <a:pPr algn="l">
+              <a:lnSpc>
+                <a:spcPct val="106000"/>
+              </a:lnSpc>
+              <a:spcBef>
+                <a:spcPts val="0"/>
+              </a:spcBef>
+              <a:spcAft>
+                <a:spcPts val="400"/>
+              </a:spcAft>
+            </a:pPr>
+            <a:r>
+              <a:rPr sz="700" b="1">
+                <a:solidFill>
+                  <a:srgbClr val="8A9098"/>
+                </a:solidFill>
+                <a:latin typeface="Consolas"/>
+                <a:ea typeface="Consolas"/>
+              </a:rPr>
+              <a:t>代表企業</a:t>
+            </a:r>
+          </a:p>
+        </p:txBody>
+      </p:sp>
+      <p:sp>
+        <p:nvSpPr>
+          <p:cNvPr id="41" name="TextBox 40"/>
+          <p:cNvSpPr txBox="1"/>
+          <p:nvPr/>
+        </p:nvSpPr>
+        <p:spPr>
+          <a:xfrm>
+            <a:off x="7724851" y="3986784"/>
+            <a:ext cx="1596542" cy="548640"/>
+          </a:xfrm>
+          <a:prstGeom prst="rect">
+            <a:avLst/>
+          </a:prstGeom>
+          <a:noFill/>
+        </p:spPr>
+        <p:txBody>
+          <a:bodyPr wrap="square" anchor="t" lIns="0" rIns="0" tIns="0" bIns="0">
+            <a:spAutoFit/>
+          </a:bodyPr>
+          <a:lstStyle/>
+          <a:p>
+            <a:pPr algn="l">
+              <a:lnSpc>
+                <a:spcPct val="116000"/>
+              </a:lnSpc>
+              <a:spcBef>
+                <a:spcPts val="0"/>
+              </a:spcBef>
+              <a:spcAft>
+                <a:spcPts val="400"/>
+              </a:spcAft>
+            </a:pPr>
+            <a:r>
+              <a:rPr sz="919" b="1">
+                <a:solidFill>
+                  <a:srgbClr val="1A1D21"/>
+                </a:solidFill>
+                <a:latin typeface="Noto Sans JP"/>
+                <a:ea typeface="Noto Sans JP"/>
+              </a:rPr>
+              <a:t>ダイキン 230→3,000億円</a:t>
+            </a:r>
+          </a:p>
+        </p:txBody>
+      </p:sp>
+      <p:sp>
+        <p:nvSpPr>
+          <p:cNvPr id="42" name="Chevron 41"/>
+          <p:cNvSpPr/>
+          <p:nvPr/>
+        </p:nvSpPr>
+        <p:spPr>
+          <a:xfrm>
+            <a:off x="9467697" y="1417320"/>
+            <a:ext cx="2053742" cy="786384"/>
+          </a:xfrm>
+          <a:prstGeom prst="chevron">
+            <a:avLst/>
+          </a:prstGeom>
+          <a:solidFill>
+            <a:srgbClr val="E60012"/>
+          </a:solidFill>
+          <a:ln>
+            <a:noFill/>
+          </a:ln>
+          <a:effectLst/>
+        </p:spPr>
+        <p:style>
+          <a:lnRef idx="1">
+            <a:schemeClr val="accent1"/>
+          </a:lnRef>
+          <a:fillRef idx="3">
+            <a:schemeClr val="accent1"/>
+          </a:fillRef>
+          <a:effectRef idx="2">
+            <a:schemeClr val="accent1"/>
+          </a:effectRef>
+          <a:fontRef idx="minor">
+            <a:schemeClr val="lt1"/>
+          </a:fontRef>
+        </p:style>
+        <p:txBody>
+          <a:bodyPr rtlCol="0" anchor="ctr"/>
+          <a:lstStyle/>
+          <a:p/>
+        </p:txBody>
+      </p:sp>
+      <p:sp>
+        <p:nvSpPr>
+          <p:cNvPr id="43" name="TextBox 42"/>
+          <p:cNvSpPr txBox="1"/>
+          <p:nvPr/>
+        </p:nvSpPr>
+        <p:spPr>
+          <a:xfrm>
+            <a:off x="9449409" y="1417320"/>
+            <a:ext cx="1980590" cy="786384"/>
+          </a:xfrm>
+          <a:prstGeom prst="rect">
+            <a:avLst/>
+          </a:prstGeom>
+          <a:noFill/>
+        </p:spPr>
+        <p:txBody>
+          <a:bodyPr wrap="square" anchor="ctr" lIns="0" rIns="0" tIns="0" bIns="0">
+            <a:spAutoFit/>
+          </a:bodyPr>
+          <a:lstStyle/>
+          <a:p>
+            <a:pPr algn="ctr">
+              <a:lnSpc>
+                <a:spcPct val="100000"/>
+              </a:lnSpc>
+              <a:spcBef>
+                <a:spcPts val="0"/>
+              </a:spcBef>
+              <a:spcAft>
+                <a:spcPts val="0"/>
+              </a:spcAft>
+            </a:pPr>
+            <a:r>
+              <a:rPr sz="800" b="1" spc="100">
+                <a:solidFill>
+                  <a:srgbClr val="FFC9CE"/>
+                </a:solidFill>
+                <a:latin typeface="Consolas"/>
+                <a:ea typeface="Consolas"/>
+              </a:rPr>
+              <a:t>05</a:t>
+            </a:r>
+          </a:p>
+          <a:p>
+            <a:pPr algn="ctr">
+              <a:lnSpc>
+                <a:spcPct val="100000"/>
+              </a:lnSpc>
+              <a:spcBef>
+                <a:spcPts val="0"/>
+              </a:spcBef>
+              <a:spcAft>
+                <a:spcPts val="0"/>
+              </a:spcAft>
+            </a:pPr>
+            <a:r>
+              <a:rPr sz="1100" b="1">
+                <a:solidFill>
+                  <a:srgbClr val="FFFFFF"/>
+                </a:solidFill>
+                <a:latin typeface="Noto Sans JP"/>
+                <a:ea typeface="Noto Sans JP"/>
+              </a:rPr>
+              <a:t>半導体</a:t>
+            </a:r>
+          </a:p>
+        </p:txBody>
+      </p:sp>
+      <p:sp>
+        <p:nvSpPr>
+          <p:cNvPr id="44" name="Rounded Rectangle 43"/>
+          <p:cNvSpPr/>
+          <p:nvPr/>
+        </p:nvSpPr>
+        <p:spPr>
+          <a:xfrm>
+            <a:off x="9531705" y="2304288"/>
+            <a:ext cx="1834286" cy="2286000"/>
+          </a:xfrm>
+          <a:prstGeom prst="roundRect">
+            <a:avLst>
+              <a:gd name="adj" fmla="val 5000"/>
+            </a:avLst>
+          </a:prstGeom>
+          <a:solidFill>
+            <a:srgbClr val="FFFFFF"/>
+          </a:solidFill>
+          <a:ln w="12700">
+            <a:solidFill>
+              <a:srgbClr val="E2E4E9"/>
+            </a:solidFill>
+          </a:ln>
+          <a:effectLst/>
+        </p:spPr>
+        <p:style>
+          <a:lnRef idx="1">
+            <a:schemeClr val="accent1"/>
+          </a:lnRef>
+          <a:fillRef idx="3">
+            <a:schemeClr val="accent1"/>
+          </a:fillRef>
+          <a:effectRef idx="2">
+            <a:schemeClr val="accent1"/>
+          </a:effectRef>
+          <a:fontRef idx="minor">
+            <a:schemeClr val="lt1"/>
+          </a:fontRef>
+        </p:style>
+        <p:txBody>
+          <a:bodyPr rtlCol="0" anchor="ctr"/>
+          <a:lstStyle/>
+          <a:p>
+            <a:pPr algn="ctr"/>
+          </a:p>
+        </p:txBody>
+      </p:sp>
+      <p:sp>
+        <p:nvSpPr>
+          <p:cNvPr id="45" name="TextBox 44"/>
+          <p:cNvSpPr txBox="1"/>
+          <p:nvPr/>
+        </p:nvSpPr>
+        <p:spPr>
+          <a:xfrm>
+            <a:off x="9650577" y="2432304"/>
+            <a:ext cx="1596542" cy="274320"/>
+          </a:xfrm>
+          <a:prstGeom prst="rect">
+            <a:avLst/>
+          </a:prstGeom>
+          <a:noFill/>
+        </p:spPr>
+        <p:txBody>
+          <a:bodyPr wrap="square" anchor="t" lIns="0" rIns="0" tIns="0" bIns="0">
+            <a:spAutoFit/>
+          </a:bodyPr>
+          <a:lstStyle/>
+          <a:p>
+            <a:pPr algn="l">
+              <a:lnSpc>
+                <a:spcPct val="106000"/>
+              </a:lnSpc>
+              <a:spcBef>
+                <a:spcPts val="0"/>
+              </a:spcBef>
+              <a:spcAft>
+                <a:spcPts val="400"/>
+              </a:spcAft>
+            </a:pPr>
+            <a:r>
+              <a:rPr sz="1150" b="1">
+                <a:solidFill>
+                  <a:srgbClr val="1A1D21"/>
+                </a:solidFill>
+                <a:latin typeface="Noto Sans JP"/>
+                <a:ea typeface="Noto Sans JP"/>
+              </a:rPr>
+              <a:t>計算する頭脳</a:t>
+            </a:r>
+          </a:p>
+        </p:txBody>
+      </p:sp>
+      <p:sp>
+        <p:nvSpPr>
+          <p:cNvPr id="46" name="Rectangle 45"/>
+          <p:cNvSpPr/>
+          <p:nvPr/>
+        </p:nvSpPr>
+        <p:spPr>
+          <a:xfrm>
+            <a:off x="9650577" y="2871216"/>
+            <a:ext cx="1596542" cy="9144"/>
+          </a:xfrm>
+          <a:prstGeom prst="rect">
+            <a:avLst/>
+          </a:prstGeom>
+          <a:solidFill>
+            <a:srgbClr val="F3C7CD"/>
+          </a:solidFill>
+          <a:ln>
+            <a:noFill/>
+          </a:ln>
+          <a:effectLst/>
+        </p:spPr>
+        <p:style>
+          <a:lnRef idx="1">
+            <a:schemeClr val="accent1"/>
+          </a:lnRef>
+          <a:fillRef idx="3">
+            <a:schemeClr val="accent1"/>
+          </a:fillRef>
+          <a:effectRef idx="2">
+            <a:schemeClr val="accent1"/>
+          </a:effectRef>
+          <a:fontRef idx="minor">
+            <a:schemeClr val="lt1"/>
+          </a:fontRef>
+        </p:style>
+        <p:txBody>
+          <a:bodyPr rtlCol="0" anchor="ctr"/>
+          <a:lstStyle/>
+          <a:p>
+            <a:pPr algn="ctr"/>
+          </a:p>
+        </p:txBody>
+      </p:sp>
+      <p:sp>
+        <p:nvSpPr>
+          <p:cNvPr id="47" name="TextBox 46"/>
+          <p:cNvSpPr txBox="1"/>
+          <p:nvPr/>
+        </p:nvSpPr>
+        <p:spPr>
+          <a:xfrm>
+            <a:off x="9650577" y="2980944"/>
+            <a:ext cx="1596542" cy="640080"/>
+          </a:xfrm>
+          <a:prstGeom prst="rect">
+            <a:avLst/>
+          </a:prstGeom>
+          <a:noFill/>
+        </p:spPr>
+        <p:txBody>
+          <a:bodyPr wrap="square" anchor="t" lIns="0" rIns="0" tIns="0" bIns="0">
+            <a:spAutoFit/>
+          </a:bodyPr>
+          <a:lstStyle/>
+          <a:p>
+            <a:pPr algn="l">
+              <a:lnSpc>
+                <a:spcPct val="104000"/>
+              </a:lnSpc>
+              <a:spcBef>
+                <a:spcPts val="0"/>
+              </a:spcBef>
+              <a:spcAft>
+                <a:spcPts val="400"/>
+              </a:spcAft>
+            </a:pPr>
+            <a:r>
+              <a:rPr sz="1350" b="1">
+                <a:solidFill>
+                  <a:srgbClr val="E60012"/>
+                </a:solidFill>
+                <a:latin typeface="Noto Sans JP"/>
+                <a:ea typeface="Noto Sans JP"/>
+              </a:rPr>
+              <a:t>設備投資 +66%</a:t>
+            </a:r>
+          </a:p>
+        </p:txBody>
+      </p:sp>
+      <p:sp>
+        <p:nvSpPr>
+          <p:cNvPr id="48" name="TextBox 47"/>
+          <p:cNvSpPr txBox="1"/>
+          <p:nvPr/>
+        </p:nvSpPr>
+        <p:spPr>
+          <a:xfrm>
+            <a:off x="9650577" y="3785616"/>
+            <a:ext cx="1596542" cy="219456"/>
+          </a:xfrm>
+          <a:prstGeom prst="rect">
+            <a:avLst/>
+          </a:prstGeom>
+          <a:noFill/>
+        </p:spPr>
+        <p:txBody>
+          <a:bodyPr wrap="square" anchor="t" lIns="0" rIns="0" tIns="0" bIns="0">
+            <a:spAutoFit/>
+          </a:bodyPr>
+          <a:lstStyle/>
+          <a:p>
+            <a:pPr algn="l">
+              <a:lnSpc>
+                <a:spcPct val="106000"/>
+              </a:lnSpc>
+              <a:spcBef>
+                <a:spcPts val="0"/>
+              </a:spcBef>
+              <a:spcAft>
+                <a:spcPts val="400"/>
+              </a:spcAft>
+            </a:pPr>
+            <a:r>
+              <a:rPr sz="700" b="1">
+                <a:solidFill>
+                  <a:srgbClr val="8A9098"/>
+                </a:solidFill>
+                <a:latin typeface="Consolas"/>
+                <a:ea typeface="Consolas"/>
+              </a:rPr>
+              <a:t>代表企業</a:t>
+            </a:r>
+          </a:p>
+        </p:txBody>
+      </p:sp>
+      <p:sp>
+        <p:nvSpPr>
+          <p:cNvPr id="49" name="TextBox 48"/>
+          <p:cNvSpPr txBox="1"/>
+          <p:nvPr/>
+        </p:nvSpPr>
+        <p:spPr>
+          <a:xfrm>
+            <a:off x="9650577" y="3986784"/>
+            <a:ext cx="1596542" cy="548640"/>
+          </a:xfrm>
+          <a:prstGeom prst="rect">
+            <a:avLst/>
+          </a:prstGeom>
+          <a:noFill/>
+        </p:spPr>
+        <p:txBody>
+          <a:bodyPr wrap="square" anchor="t" lIns="0" rIns="0" tIns="0" bIns="0">
+            <a:spAutoFit/>
+          </a:bodyPr>
+          <a:lstStyle/>
+          <a:p>
+            <a:pPr algn="l">
+              <a:lnSpc>
+                <a:spcPct val="116000"/>
+              </a:lnSpc>
+              <a:spcBef>
+                <a:spcPts val="0"/>
+              </a:spcBef>
+              <a:spcAft>
+                <a:spcPts val="400"/>
+              </a:spcAft>
+            </a:pPr>
+            <a:r>
+              <a:rPr sz="919" b="1">
+                <a:solidFill>
+                  <a:srgbClr val="1A1D21"/>
+                </a:solidFill>
+                <a:latin typeface="Noto Sans JP"/>
+                <a:ea typeface="Noto Sans JP"/>
+              </a:rPr>
+              <a:t>キオクシア・東京ｴﾚｸﾄﾛﾝ</a:t>
+            </a:r>
+          </a:p>
+        </p:txBody>
+      </p:sp>
+      <p:sp>
+        <p:nvSpPr>
+          <p:cNvPr id="50" name="Rounded Rectangle 49"/>
+          <p:cNvSpPr/>
+          <p:nvPr/>
+        </p:nvSpPr>
+        <p:spPr>
+          <a:xfrm>
+            <a:off x="777240" y="4754880"/>
+            <a:ext cx="10634472" cy="566928"/>
+          </a:xfrm>
+          <a:prstGeom prst="roundRect">
+            <a:avLst>
+              <a:gd name="adj" fmla="val 5000"/>
+            </a:avLst>
+          </a:prstGeom>
+          <a:solidFill>
+            <a:srgbClr val="FDECEE"/>
+          </a:solidFill>
+          <a:ln w="12700">
+            <a:solidFill>
+              <a:srgbClr val="F3C7CD"/>
+            </a:solidFill>
+          </a:ln>
+          <a:effectLst/>
+        </p:spPr>
+        <p:style>
+          <a:lnRef idx="1">
+            <a:schemeClr val="accent1"/>
+          </a:lnRef>
+          <a:fillRef idx="3">
+            <a:schemeClr val="accent1"/>
+          </a:fillRef>
+          <a:effectRef idx="2">
+            <a:schemeClr val="accent1"/>
+          </a:effectRef>
+          <a:fontRef idx="minor">
+            <a:schemeClr val="lt1"/>
+          </a:fontRef>
+        </p:style>
+        <p:txBody>
+          <a:bodyPr rtlCol="0" anchor="ctr"/>
+          <a:lstStyle/>
+          <a:p>
+            <a:pPr algn="ctr"/>
+          </a:p>
+        </p:txBody>
+      </p:sp>
+      <p:sp>
+        <p:nvSpPr>
+          <p:cNvPr id="51" name="Rounded Rectangle 50"/>
+          <p:cNvSpPr/>
+          <p:nvPr/>
+        </p:nvSpPr>
+        <p:spPr>
+          <a:xfrm>
+            <a:off x="777240" y="4754880"/>
+            <a:ext cx="2148840" cy="566928"/>
+          </a:xfrm>
+          <a:prstGeom prst="roundRect">
+            <a:avLst>
+              <a:gd name="adj" fmla="val 5000"/>
+            </a:avLst>
+          </a:prstGeom>
+          <a:solidFill>
+            <a:srgbClr val="E60012"/>
+          </a:solidFill>
+          <a:ln>
+            <a:noFill/>
+          </a:ln>
+          <a:effectLst/>
+        </p:spPr>
+        <p:style>
+          <a:lnRef idx="1">
+            <a:schemeClr val="accent1"/>
+          </a:lnRef>
+          <a:fillRef idx="3">
+            <a:schemeClr val="accent1"/>
+          </a:fillRef>
+          <a:effectRef idx="2">
+            <a:schemeClr val="accent1"/>
+          </a:effectRef>
+          <a:fontRef idx="minor">
+            <a:schemeClr val="lt1"/>
+          </a:fontRef>
+        </p:style>
+        <p:txBody>
+          <a:bodyPr rtlCol="0" anchor="ctr"/>
+          <a:lstStyle/>
+          <a:p>
+            <a:pPr algn="ctr"/>
+          </a:p>
+        </p:txBody>
+      </p:sp>
+      <p:sp>
+        <p:nvSpPr>
+          <p:cNvPr id="52" name="TextBox 51"/>
+          <p:cNvSpPr txBox="1"/>
+          <p:nvPr/>
+        </p:nvSpPr>
+        <p:spPr>
+          <a:xfrm>
+            <a:off x="868680" y="4754880"/>
+            <a:ext cx="2011680" cy="566928"/>
+          </a:xfrm>
+          <a:prstGeom prst="rect">
+            <a:avLst/>
+          </a:prstGeom>
+          <a:noFill/>
+        </p:spPr>
+        <p:txBody>
+          <a:bodyPr wrap="square" anchor="ctr" lIns="0" rIns="0" tIns="0" bIns="0">
+            <a:spAutoFit/>
+          </a:bodyPr>
+          <a:lstStyle/>
+          <a:p>
+            <a:pPr algn="ctr">
+              <a:lnSpc>
+                <a:spcPct val="105000"/>
+              </a:lnSpc>
+              <a:spcBef>
+                <a:spcPts val="0"/>
+              </a:spcBef>
+              <a:spcAft>
+                <a:spcPts val="0"/>
+              </a:spcAft>
+            </a:pPr>
+            <a:r>
+              <a:rPr sz="850" b="0">
+                <a:solidFill>
+                  <a:srgbClr val="FFE2E5"/>
+                </a:solidFill>
+                <a:latin typeface="Noto Sans JP"/>
+                <a:ea typeface="Noto Sans JP"/>
+              </a:rPr>
+              <a:t>さらに基盤層で</a:t>
+            </a:r>
+          </a:p>
+          <a:p>
+            <a:pPr algn="ctr">
+              <a:lnSpc>
+                <a:spcPct val="105000"/>
+              </a:lnSpc>
+              <a:spcBef>
+                <a:spcPts val="0"/>
+              </a:spcBef>
+              <a:spcAft>
+                <a:spcPts val="0"/>
+              </a:spcAft>
+            </a:pPr>
+            <a:r>
+              <a:rPr sz="1100" b="1">
+                <a:solidFill>
+                  <a:srgbClr val="FFFFFF"/>
+                </a:solidFill>
+                <a:latin typeface="Noto Sans JP"/>
+                <a:ea typeface="Noto Sans JP"/>
+              </a:rPr>
+              <a:t>部品・材料・ガス</a:t>
+            </a:r>
+          </a:p>
+        </p:txBody>
+      </p:sp>
+      <p:sp>
+        <p:nvSpPr>
+          <p:cNvPr id="53" name="TextBox 52"/>
+          <p:cNvSpPr txBox="1"/>
+          <p:nvPr/>
+        </p:nvSpPr>
+        <p:spPr>
+          <a:xfrm>
+            <a:off x="3108960" y="4754880"/>
+            <a:ext cx="8138160" cy="566928"/>
+          </a:xfrm>
+          <a:prstGeom prst="rect">
+            <a:avLst/>
+          </a:prstGeom>
+          <a:noFill/>
+        </p:spPr>
+        <p:txBody>
+          <a:bodyPr wrap="square" anchor="ctr" lIns="0" rIns="0" tIns="0" bIns="0">
+            <a:spAutoFit/>
+          </a:bodyPr>
+          <a:lstStyle/>
+          <a:p>
+            <a:pPr algn="l">
+              <a:lnSpc>
+                <a:spcPct val="106000"/>
+              </a:lnSpc>
+              <a:spcBef>
+                <a:spcPts val="0"/>
+              </a:spcBef>
+              <a:spcAft>
+                <a:spcPts val="400"/>
+              </a:spcAft>
+            </a:pPr>
+            <a:r>
+              <a:rPr sz="1100" b="1">
+                <a:solidFill>
+                  <a:srgbClr val="1A1D21"/>
+                </a:solidFill>
+                <a:latin typeface="Noto Sans JP"/>
+                <a:ea typeface="Noto Sans JP"/>
+              </a:rPr>
+              <a:t>村田（MLCC・AIサーバ1台に約3万個）／SMC・アドバンテスト・イビデン・日本酸素 …</a:t>
+            </a:r>
+          </a:p>
+        </p:txBody>
+      </p:sp>
+      <p:sp>
+        <p:nvSpPr>
+          <p:cNvPr id="54" name="Rounded Rectangle 53"/>
+          <p:cNvSpPr/>
+          <p:nvPr/>
+        </p:nvSpPr>
+        <p:spPr>
+          <a:xfrm>
+            <a:off x="777240" y="5486400"/>
+            <a:ext cx="10634472" cy="777240"/>
+          </a:xfrm>
+          <a:prstGeom prst="roundRect">
+            <a:avLst>
+              <a:gd name="adj" fmla="val 5000"/>
             </a:avLst>
           </a:prstGeom>
           <a:solidFill>
@@ -9194,14 +10078,14 @@
       </p:sp>
       <p:sp>
         <p:nvSpPr>
-          <p:cNvPr id="9" name="TextBox 8"/>
+          <p:cNvPr id="55" name="TextBox 54"/>
           <p:cNvSpPr txBox="1"/>
           <p:nvPr/>
         </p:nvSpPr>
         <p:spPr>
           <a:xfrm>
-            <a:off x="987552" y="1581912"/>
-            <a:ext cx="4892040" cy="914400"/>
+            <a:off x="1051560" y="5486400"/>
+            <a:ext cx="10058400" cy="777240"/>
           </a:xfrm>
           <a:prstGeom prst="rect">
             <a:avLst/>
@@ -9209,14 +10093,14 @@
           <a:noFill/>
         </p:spPr>
         <p:txBody>
-          <a:bodyPr wrap="square" anchor="t" lIns="0" rIns="0" tIns="0" bIns="0">
+          <a:bodyPr wrap="square" anchor="ctr" lIns="0" rIns="0" tIns="0" bIns="0">
             <a:spAutoFit/>
           </a:bodyPr>
           <a:lstStyle/>
           <a:p>
             <a:pPr algn="l">
               <a:lnSpc>
-                <a:spcPct val="114000"/>
+                <a:spcPct val="106000"/>
               </a:lnSpc>
               <a:spcBef>
                 <a:spcPts val="0"/>
@@ -9226,930 +10110,24 @@
               </a:spcAft>
             </a:pPr>
             <a:r>
-              <a:rPr sz="1400" b="1">
-                <a:solidFill>
-                  <a:srgbClr val="454B54"/>
+              <a:rPr sz="1450" b="1">
+                <a:solidFill>
+                  <a:srgbClr val="1A1D21"/>
                 </a:solidFill>
                 <a:latin typeface="Noto Sans JP"/>
                 <a:ea typeface="Noto Sans JP"/>
               </a:rPr>
-              <a:t>A  発注者として</a:t>
-            </a:r>
-          </a:p>
-          <a:p>
-            <a:pPr algn="l">
-              <a:lnSpc>
-                <a:spcPct val="114000"/>
-              </a:lnSpc>
-              <a:spcBef>
-                <a:spcPts val="0"/>
-              </a:spcBef>
-              <a:spcAft>
-                <a:spcPts val="400"/>
-              </a:spcAft>
-            </a:pPr>
-            <a:r>
-              <a:rPr sz="1150" b="1">
-                <a:solidFill>
-                  <a:srgbClr val="1A1D21"/>
+              <a:t>川上（発電）から川下（半導体）まで全段が同時に増収増益。</a:t>
+            </a:r>
+            <a:r>
+              <a:rPr sz="1450" b="1">
+                <a:solidFill>
+                  <a:srgbClr val="E60012"/>
                 </a:solidFill>
                 <a:latin typeface="Noto Sans JP"/>
                 <a:ea typeface="Noto Sans JP"/>
               </a:rPr>
-              <a:t>設備投資を“建てる側”のプロジェクト管理</a:t>
-            </a:r>
-          </a:p>
-          <a:p>
-            <a:pPr algn="l">
-              <a:lnSpc>
-                <a:spcPct val="114000"/>
-              </a:lnSpc>
-              <a:spcBef>
-                <a:spcPts val="0"/>
-              </a:spcBef>
-              <a:spcAft>
-                <a:spcPts val="400"/>
-              </a:spcAft>
-            </a:pPr>
-            <a:r>
-              <a:rPr sz="1050" b="0">
-                <a:solidFill>
-                  <a:srgbClr val="3C4148"/>
-                </a:solidFill>
-                <a:latin typeface="Noto Sans JP"/>
-                <a:ea typeface="Noto Sans JP"/>
-              </a:rPr>
-              <a:t>工場の新増設・生産ライン更新・自社DC/電源・冷却設備の導入</a:t>
-            </a:r>
-          </a:p>
-        </p:txBody>
-      </p:sp>
-      <p:sp>
-        <p:nvSpPr>
-          <p:cNvPr id="10" name="Rounded Rectangle 9"/>
-          <p:cNvSpPr/>
-          <p:nvPr/>
-        </p:nvSpPr>
-        <p:spPr>
-          <a:xfrm>
-            <a:off x="6153912" y="1417320"/>
-            <a:ext cx="5257800" cy="1234440"/>
-          </a:xfrm>
-          <a:prstGeom prst="roundRect">
-            <a:avLst>
-              <a:gd name="adj" fmla="val 8000"/>
-            </a:avLst>
-          </a:prstGeom>
-          <a:solidFill>
-            <a:srgbClr val="FDECEE"/>
-          </a:solidFill>
-          <a:ln w="15240">
-            <a:solidFill>
-              <a:srgbClr val="E60012"/>
-            </a:solidFill>
-          </a:ln>
-          <a:effectLst/>
-        </p:spPr>
-        <p:style>
-          <a:lnRef idx="1">
-            <a:schemeClr val="accent1"/>
-          </a:lnRef>
-          <a:fillRef idx="3">
-            <a:schemeClr val="accent1"/>
-          </a:fillRef>
-          <a:effectRef idx="2">
-            <a:schemeClr val="accent1"/>
-          </a:effectRef>
-          <a:fontRef idx="minor">
-            <a:schemeClr val="lt1"/>
-          </a:fontRef>
-        </p:style>
-        <p:txBody>
-          <a:bodyPr rtlCol="0" anchor="ctr"/>
-          <a:lstStyle/>
-          <a:p>
-            <a:pPr algn="ctr"/>
-          </a:p>
-        </p:txBody>
-      </p:sp>
-      <p:sp>
-        <p:nvSpPr>
-          <p:cNvPr id="11" name="TextBox 10"/>
-          <p:cNvSpPr txBox="1"/>
-          <p:nvPr/>
-        </p:nvSpPr>
-        <p:spPr>
-          <a:xfrm>
-            <a:off x="6364224" y="1581912"/>
-            <a:ext cx="4892040" cy="914400"/>
-          </a:xfrm>
-          <a:prstGeom prst="rect">
-            <a:avLst/>
-          </a:prstGeom>
-          <a:noFill/>
-        </p:spPr>
-        <p:txBody>
-          <a:bodyPr wrap="square" anchor="t" lIns="0" rIns="0" tIns="0" bIns="0">
-            <a:spAutoFit/>
-          </a:bodyPr>
-          <a:lstStyle/>
-          <a:p>
-            <a:pPr algn="l">
-              <a:lnSpc>
-                <a:spcPct val="114000"/>
-              </a:lnSpc>
-              <a:spcBef>
-                <a:spcPts val="0"/>
-              </a:spcBef>
-              <a:spcAft>
-                <a:spcPts val="400"/>
-              </a:spcAft>
-            </a:pPr>
-            <a:r>
-              <a:rPr sz="1400" b="1">
-                <a:solidFill>
-                  <a:srgbClr val="E60012"/>
-                </a:solidFill>
-                <a:latin typeface="Noto Sans JP"/>
-                <a:ea typeface="Noto Sans JP"/>
-              </a:rPr>
-              <a:t>B  請負として</a:t>
-            </a:r>
-          </a:p>
-          <a:p>
-            <a:pPr algn="l">
-              <a:lnSpc>
-                <a:spcPct val="114000"/>
-              </a:lnSpc>
-              <a:spcBef>
-                <a:spcPts val="0"/>
-              </a:spcBef>
-              <a:spcAft>
-                <a:spcPts val="400"/>
-              </a:spcAft>
-            </a:pPr>
-            <a:r>
-              <a:rPr sz="1150" b="1">
-                <a:solidFill>
-                  <a:srgbClr val="1A1D21"/>
-                </a:solidFill>
-                <a:latin typeface="Noto Sans JP"/>
-                <a:ea typeface="Noto Sans JP"/>
-              </a:rPr>
-              <a:t>据付・試運転・保守を“納める側”の現場管理</a:t>
-            </a:r>
-          </a:p>
-          <a:p>
-            <a:pPr algn="l">
-              <a:lnSpc>
-                <a:spcPct val="114000"/>
-              </a:lnSpc>
-              <a:spcBef>
-                <a:spcPts val="0"/>
-              </a:spcBef>
-              <a:spcAft>
-                <a:spcPts val="400"/>
-              </a:spcAft>
-            </a:pPr>
-            <a:r>
-              <a:rPr sz="1050" b="0">
-                <a:solidFill>
-                  <a:srgbClr val="3C4148"/>
-                </a:solidFill>
-                <a:latin typeface="Noto Sans JP"/>
-                <a:ea typeface="Noto Sans JP"/>
-              </a:rPr>
-              <a:t>発電機・変圧器・空調・液冷・UPS・半導体装置のフィールド現場（本命）</a:t>
-            </a:r>
-          </a:p>
-        </p:txBody>
-      </p:sp>
-      <p:sp>
-        <p:nvSpPr>
-          <p:cNvPr id="12" name="Rounded Rectangle 11"/>
-          <p:cNvSpPr/>
-          <p:nvPr/>
-        </p:nvSpPr>
-        <p:spPr>
-          <a:xfrm>
-            <a:off x="777240" y="2880360"/>
-            <a:ext cx="10634472" cy="1234440"/>
-          </a:xfrm>
-          <a:prstGeom prst="roundRect">
-            <a:avLst>
-              <a:gd name="adj" fmla="val 5000"/>
-            </a:avLst>
-          </a:prstGeom>
-          <a:solidFill>
-            <a:srgbClr val="FFFFFF"/>
-          </a:solidFill>
-          <a:ln w="12700">
-            <a:solidFill>
-              <a:srgbClr val="E2E4E9"/>
-            </a:solidFill>
-          </a:ln>
-          <a:effectLst/>
-        </p:spPr>
-        <p:style>
-          <a:lnRef idx="1">
-            <a:schemeClr val="accent1"/>
-          </a:lnRef>
-          <a:fillRef idx="3">
-            <a:schemeClr val="accent1"/>
-          </a:fillRef>
-          <a:effectRef idx="2">
-            <a:schemeClr val="accent1"/>
-          </a:effectRef>
-          <a:fontRef idx="minor">
-            <a:schemeClr val="lt1"/>
-          </a:fontRef>
-        </p:style>
-        <p:txBody>
-          <a:bodyPr rtlCol="0" anchor="ctr"/>
-          <a:lstStyle/>
-          <a:p>
-            <a:pPr algn="ctr"/>
-          </a:p>
-        </p:txBody>
-      </p:sp>
-      <p:sp>
-        <p:nvSpPr>
-          <p:cNvPr id="13" name="TextBox 12"/>
-          <p:cNvSpPr txBox="1"/>
-          <p:nvPr/>
-        </p:nvSpPr>
-        <p:spPr>
-          <a:xfrm>
-            <a:off x="1005840" y="3017520"/>
-            <a:ext cx="10241280" cy="274320"/>
-          </a:xfrm>
-          <a:prstGeom prst="rect">
-            <a:avLst/>
-          </a:prstGeom>
-          <a:noFill/>
-        </p:spPr>
-        <p:txBody>
-          <a:bodyPr wrap="square" anchor="t" lIns="0" rIns="0" tIns="0" bIns="0">
-            <a:spAutoFit/>
-          </a:bodyPr>
-          <a:lstStyle/>
-          <a:p>
-            <a:pPr algn="l">
-              <a:lnSpc>
-                <a:spcPct val="106000"/>
-              </a:lnSpc>
-              <a:spcBef>
-                <a:spcPts val="0"/>
-              </a:spcBef>
-              <a:spcAft>
-                <a:spcPts val="400"/>
-              </a:spcAft>
-            </a:pPr>
-            <a:r>
-              <a:rPr sz="1050" b="1" spc="100">
-                <a:solidFill>
-                  <a:srgbClr val="E60012"/>
-                </a:solidFill>
-                <a:latin typeface="Consolas"/>
-                <a:ea typeface="Consolas"/>
-              </a:rPr>
-              <a:t>価値を届ける主要業界</a:t>
-            </a:r>
-            <a:r>
-              <a:rPr sz="850" b="0">
-                <a:solidFill>
-                  <a:srgbClr val="8A9098"/>
-                </a:solidFill>
-                <a:latin typeface="Consolas"/>
-                <a:ea typeface="Consolas"/>
-              </a:rPr>
-              <a:t>　★＝最優先</a:t>
-            </a:r>
-          </a:p>
-        </p:txBody>
-      </p:sp>
-      <p:sp>
-        <p:nvSpPr>
-          <p:cNvPr id="14" name="TextBox 13"/>
-          <p:cNvSpPr txBox="1"/>
-          <p:nvPr/>
-        </p:nvSpPr>
-        <p:spPr>
-          <a:xfrm>
-            <a:off x="996695" y="3346704"/>
-            <a:ext cx="2329434" cy="640080"/>
-          </a:xfrm>
-          <a:prstGeom prst="rect">
-            <a:avLst/>
-          </a:prstGeom>
-          <a:noFill/>
-        </p:spPr>
-        <p:txBody>
-          <a:bodyPr wrap="square" anchor="t" lIns="0" rIns="0" tIns="0" bIns="0">
-            <a:spAutoFit/>
-          </a:bodyPr>
-          <a:lstStyle/>
-          <a:p>
-            <a:pPr algn="l">
-              <a:lnSpc>
-                <a:spcPct val="112000"/>
-              </a:lnSpc>
-              <a:spcBef>
-                <a:spcPts val="0"/>
-              </a:spcBef>
-              <a:spcAft>
-                <a:spcPts val="300"/>
-              </a:spcAft>
-            </a:pPr>
-            <a:r>
-              <a:rPr sz="850" b="1">
-                <a:solidFill>
-                  <a:srgbClr val="E60012"/>
-                </a:solidFill>
-                <a:latin typeface="Consolas"/>
-                <a:ea typeface="Consolas"/>
-              </a:rPr>
-              <a:t>★ 最優先</a:t>
-            </a:r>
-          </a:p>
-          <a:p>
-            <a:pPr algn="l">
-              <a:lnSpc>
-                <a:spcPct val="112000"/>
-              </a:lnSpc>
-              <a:spcBef>
-                <a:spcPts val="0"/>
-              </a:spcBef>
-              <a:spcAft>
-                <a:spcPts val="300"/>
-              </a:spcAft>
-            </a:pPr>
-            <a:r>
-              <a:rPr sz="1200" b="1">
-                <a:solidFill>
-                  <a:srgbClr val="1A1D21"/>
-                </a:solidFill>
-                <a:latin typeface="Noto Sans JP"/>
-                <a:ea typeface="Noto Sans JP"/>
-              </a:rPr>
-              <a:t>重電（変圧器・発電機）</a:t>
-            </a:r>
-          </a:p>
-        </p:txBody>
-      </p:sp>
-      <p:sp>
-        <p:nvSpPr>
-          <p:cNvPr id="15" name="Rectangle 14"/>
-          <p:cNvSpPr/>
-          <p:nvPr/>
-        </p:nvSpPr>
-        <p:spPr>
-          <a:xfrm>
-            <a:off x="3435858" y="3383280"/>
-            <a:ext cx="10972" cy="594360"/>
-          </a:xfrm>
-          <a:prstGeom prst="rect">
-            <a:avLst/>
-          </a:prstGeom>
-          <a:solidFill>
-            <a:srgbClr val="E2E4E9"/>
-          </a:solidFill>
-          <a:ln>
-            <a:noFill/>
-          </a:ln>
-          <a:effectLst/>
-        </p:spPr>
-        <p:style>
-          <a:lnRef idx="1">
-            <a:schemeClr val="accent1"/>
-          </a:lnRef>
-          <a:fillRef idx="3">
-            <a:schemeClr val="accent1"/>
-          </a:fillRef>
-          <a:effectRef idx="2">
-            <a:schemeClr val="accent1"/>
-          </a:effectRef>
-          <a:fontRef idx="minor">
-            <a:schemeClr val="lt1"/>
-          </a:fontRef>
-        </p:style>
-        <p:txBody>
-          <a:bodyPr rtlCol="0" anchor="ctr"/>
-          <a:lstStyle/>
-          <a:p>
-            <a:pPr algn="ctr"/>
-          </a:p>
-        </p:txBody>
-      </p:sp>
-      <p:sp>
-        <p:nvSpPr>
-          <p:cNvPr id="16" name="TextBox 15"/>
-          <p:cNvSpPr txBox="1"/>
-          <p:nvPr/>
-        </p:nvSpPr>
-        <p:spPr>
-          <a:xfrm>
-            <a:off x="3655314" y="3346704"/>
-            <a:ext cx="2329434" cy="640080"/>
-          </a:xfrm>
-          <a:prstGeom prst="rect">
-            <a:avLst/>
-          </a:prstGeom>
-          <a:noFill/>
-        </p:spPr>
-        <p:txBody>
-          <a:bodyPr wrap="square" anchor="t" lIns="0" rIns="0" tIns="0" bIns="0">
-            <a:spAutoFit/>
-          </a:bodyPr>
-          <a:lstStyle/>
-          <a:p>
-            <a:pPr algn="l">
-              <a:lnSpc>
-                <a:spcPct val="112000"/>
-              </a:lnSpc>
-              <a:spcBef>
-                <a:spcPts val="0"/>
-              </a:spcBef>
-              <a:spcAft>
-                <a:spcPts val="300"/>
-              </a:spcAft>
-            </a:pPr>
-            <a:r>
-              <a:rPr sz="850" b="1">
-                <a:solidFill>
-                  <a:srgbClr val="E60012"/>
-                </a:solidFill>
-                <a:latin typeface="Consolas"/>
-                <a:ea typeface="Consolas"/>
-              </a:rPr>
-              <a:t>★ 最優先</a:t>
-            </a:r>
-          </a:p>
-          <a:p>
-            <a:pPr algn="l">
-              <a:lnSpc>
-                <a:spcPct val="112000"/>
-              </a:lnSpc>
-              <a:spcBef>
-                <a:spcPts val="0"/>
-              </a:spcBef>
-              <a:spcAft>
-                <a:spcPts val="300"/>
-              </a:spcAft>
-            </a:pPr>
-            <a:r>
-              <a:rPr sz="1200" b="1">
-                <a:solidFill>
-                  <a:srgbClr val="1A1D21"/>
-                </a:solidFill>
-                <a:latin typeface="Noto Sans JP"/>
-                <a:ea typeface="Noto Sans JP"/>
-              </a:rPr>
-              <a:t>DC建設サブコン（電気・空調）</a:t>
-            </a:r>
-          </a:p>
-        </p:txBody>
-      </p:sp>
-      <p:sp>
-        <p:nvSpPr>
-          <p:cNvPr id="17" name="Rectangle 16"/>
-          <p:cNvSpPr/>
-          <p:nvPr/>
-        </p:nvSpPr>
-        <p:spPr>
-          <a:xfrm>
-            <a:off x="6094476" y="3383280"/>
-            <a:ext cx="10972" cy="594360"/>
-          </a:xfrm>
-          <a:prstGeom prst="rect">
-            <a:avLst/>
-          </a:prstGeom>
-          <a:solidFill>
-            <a:srgbClr val="E2E4E9"/>
-          </a:solidFill>
-          <a:ln>
-            <a:noFill/>
-          </a:ln>
-          <a:effectLst/>
-        </p:spPr>
-        <p:style>
-          <a:lnRef idx="1">
-            <a:schemeClr val="accent1"/>
-          </a:lnRef>
-          <a:fillRef idx="3">
-            <a:schemeClr val="accent1"/>
-          </a:fillRef>
-          <a:effectRef idx="2">
-            <a:schemeClr val="accent1"/>
-          </a:effectRef>
-          <a:fontRef idx="minor">
-            <a:schemeClr val="lt1"/>
-          </a:fontRef>
-        </p:style>
-        <p:txBody>
-          <a:bodyPr rtlCol="0" anchor="ctr"/>
-          <a:lstStyle/>
-          <a:p>
-            <a:pPr algn="ctr"/>
-          </a:p>
-        </p:txBody>
-      </p:sp>
-      <p:sp>
-        <p:nvSpPr>
-          <p:cNvPr id="18" name="TextBox 17"/>
-          <p:cNvSpPr txBox="1"/>
-          <p:nvPr/>
-        </p:nvSpPr>
-        <p:spPr>
-          <a:xfrm>
-            <a:off x="6313932" y="3346704"/>
-            <a:ext cx="2329434" cy="640080"/>
-          </a:xfrm>
-          <a:prstGeom prst="rect">
-            <a:avLst/>
-          </a:prstGeom>
-          <a:noFill/>
-        </p:spPr>
-        <p:txBody>
-          <a:bodyPr wrap="square" anchor="t" lIns="0" rIns="0" tIns="0" bIns="0">
-            <a:spAutoFit/>
-          </a:bodyPr>
-          <a:lstStyle/>
-          <a:p>
-            <a:pPr algn="l">
-              <a:lnSpc>
-                <a:spcPct val="112000"/>
-              </a:lnSpc>
-              <a:spcBef>
-                <a:spcPts val="0"/>
-              </a:spcBef>
-              <a:spcAft>
-                <a:spcPts val="300"/>
-              </a:spcAft>
-            </a:pPr>
-            <a:r>
-              <a:rPr sz="850" b="1">
-                <a:solidFill>
-                  <a:srgbClr val="E60012"/>
-                </a:solidFill>
-                <a:latin typeface="Consolas"/>
-                <a:ea typeface="Consolas"/>
-              </a:rPr>
-              <a:t>★ 最優先</a:t>
-            </a:r>
-          </a:p>
-          <a:p>
-            <a:pPr algn="l">
-              <a:lnSpc>
-                <a:spcPct val="112000"/>
-              </a:lnSpc>
-              <a:spcBef>
-                <a:spcPts val="0"/>
-              </a:spcBef>
-              <a:spcAft>
-                <a:spcPts val="300"/>
-              </a:spcAft>
-            </a:pPr>
-            <a:r>
-              <a:rPr sz="1200" b="1">
-                <a:solidFill>
-                  <a:srgbClr val="1A1D21"/>
-                </a:solidFill>
-                <a:latin typeface="Noto Sans JP"/>
-                <a:ea typeface="Noto Sans JP"/>
-              </a:rPr>
-              <a:t>産業冷却・液冷・UPS</a:t>
-            </a:r>
-          </a:p>
-        </p:txBody>
-      </p:sp>
-      <p:sp>
-        <p:nvSpPr>
-          <p:cNvPr id="19" name="Rectangle 18"/>
-          <p:cNvSpPr/>
-          <p:nvPr/>
-        </p:nvSpPr>
-        <p:spPr>
-          <a:xfrm>
-            <a:off x="8753094" y="3383280"/>
-            <a:ext cx="10972" cy="594360"/>
-          </a:xfrm>
-          <a:prstGeom prst="rect">
-            <a:avLst/>
-          </a:prstGeom>
-          <a:solidFill>
-            <a:srgbClr val="E2E4E9"/>
-          </a:solidFill>
-          <a:ln>
-            <a:noFill/>
-          </a:ln>
-          <a:effectLst/>
-        </p:spPr>
-        <p:style>
-          <a:lnRef idx="1">
-            <a:schemeClr val="accent1"/>
-          </a:lnRef>
-          <a:fillRef idx="3">
-            <a:schemeClr val="accent1"/>
-          </a:fillRef>
-          <a:effectRef idx="2">
-            <a:schemeClr val="accent1"/>
-          </a:effectRef>
-          <a:fontRef idx="minor">
-            <a:schemeClr val="lt1"/>
-          </a:fontRef>
-        </p:style>
-        <p:txBody>
-          <a:bodyPr rtlCol="0" anchor="ctr"/>
-          <a:lstStyle/>
-          <a:p>
-            <a:pPr algn="ctr"/>
-          </a:p>
-        </p:txBody>
-      </p:sp>
-      <p:sp>
-        <p:nvSpPr>
-          <p:cNvPr id="20" name="TextBox 19"/>
-          <p:cNvSpPr txBox="1"/>
-          <p:nvPr/>
-        </p:nvSpPr>
-        <p:spPr>
-          <a:xfrm>
-            <a:off x="8972550" y="3346704"/>
-            <a:ext cx="2329434" cy="640080"/>
-          </a:xfrm>
-          <a:prstGeom prst="rect">
-            <a:avLst/>
-          </a:prstGeom>
-          <a:noFill/>
-        </p:spPr>
-        <p:txBody>
-          <a:bodyPr wrap="square" anchor="t" lIns="0" rIns="0" tIns="0" bIns="0">
-            <a:spAutoFit/>
-          </a:bodyPr>
-          <a:lstStyle/>
-          <a:p>
-            <a:pPr algn="l">
-              <a:lnSpc>
-                <a:spcPct val="112000"/>
-              </a:lnSpc>
-              <a:spcBef>
-                <a:spcPts val="0"/>
-              </a:spcBef>
-              <a:spcAft>
-                <a:spcPts val="300"/>
-              </a:spcAft>
-            </a:pPr>
-            <a:r>
-              <a:rPr sz="850" b="1">
-                <a:solidFill>
-                  <a:srgbClr val="454B54"/>
-                </a:solidFill>
-                <a:latin typeface="Consolas"/>
-                <a:ea typeface="Consolas"/>
-              </a:rPr>
-              <a:t>有望</a:t>
-            </a:r>
-          </a:p>
-          <a:p>
-            <a:pPr algn="l">
-              <a:lnSpc>
-                <a:spcPct val="112000"/>
-              </a:lnSpc>
-              <a:spcBef>
-                <a:spcPts val="0"/>
-              </a:spcBef>
-              <a:spcAft>
-                <a:spcPts val="300"/>
-              </a:spcAft>
-            </a:pPr>
-            <a:r>
-              <a:rPr sz="1200" b="1">
-                <a:solidFill>
-                  <a:srgbClr val="1A1D21"/>
-                </a:solidFill>
-                <a:latin typeface="Noto Sans JP"/>
-                <a:ea typeface="Noto Sans JP"/>
-              </a:rPr>
-              <a:t>半導体・製造装置</a:t>
-            </a:r>
-          </a:p>
-        </p:txBody>
-      </p:sp>
-      <p:sp>
-        <p:nvSpPr>
-          <p:cNvPr id="21" name="Rounded Rectangle 20"/>
-          <p:cNvSpPr/>
-          <p:nvPr/>
-        </p:nvSpPr>
-        <p:spPr>
-          <a:xfrm>
-            <a:off x="777240" y="4315968"/>
-            <a:ext cx="10634472" cy="914400"/>
-          </a:xfrm>
-          <a:prstGeom prst="roundRect">
-            <a:avLst>
-              <a:gd name="adj" fmla="val 5000"/>
-            </a:avLst>
-          </a:prstGeom>
-          <a:solidFill>
-            <a:srgbClr val="FDECEE"/>
-          </a:solidFill>
-          <a:ln w="12700">
-            <a:solidFill>
-              <a:srgbClr val="F3C7CD"/>
-            </a:solidFill>
-          </a:ln>
-          <a:effectLst/>
-        </p:spPr>
-        <p:style>
-          <a:lnRef idx="1">
-            <a:schemeClr val="accent1"/>
-          </a:lnRef>
-          <a:fillRef idx="3">
-            <a:schemeClr val="accent1"/>
-          </a:fillRef>
-          <a:effectRef idx="2">
-            <a:schemeClr val="accent1"/>
-          </a:effectRef>
-          <a:fontRef idx="minor">
-            <a:schemeClr val="lt1"/>
-          </a:fontRef>
-        </p:style>
-        <p:txBody>
-          <a:bodyPr rtlCol="0" anchor="ctr"/>
-          <a:lstStyle/>
-          <a:p>
-            <a:pPr algn="ctr"/>
-          </a:p>
-        </p:txBody>
-      </p:sp>
-      <p:sp>
-        <p:nvSpPr>
-          <p:cNvPr id="22" name="TextBox 21"/>
-          <p:cNvSpPr txBox="1"/>
-          <p:nvPr/>
-        </p:nvSpPr>
-        <p:spPr>
-          <a:xfrm>
-            <a:off x="1051560" y="4315968"/>
-            <a:ext cx="10058400" cy="914400"/>
-          </a:xfrm>
-          <a:prstGeom prst="rect">
-            <a:avLst/>
-          </a:prstGeom>
-          <a:noFill/>
-        </p:spPr>
-        <p:txBody>
-          <a:bodyPr wrap="square" anchor="ctr" lIns="0" rIns="0" tIns="0" bIns="0">
-            <a:spAutoFit/>
-          </a:bodyPr>
-          <a:lstStyle/>
-          <a:p>
-            <a:pPr algn="l">
-              <a:lnSpc>
-                <a:spcPct val="120000"/>
-              </a:lnSpc>
-              <a:spcBef>
-                <a:spcPts val="0"/>
-              </a:spcBef>
-              <a:spcAft>
-                <a:spcPts val="400"/>
-              </a:spcAft>
-            </a:pPr>
-            <a:r>
-              <a:rPr sz="1400" b="1">
-                <a:solidFill>
-                  <a:srgbClr val="E60012"/>
-                </a:solidFill>
-                <a:latin typeface="Noto Sans JP"/>
-                <a:ea typeface="Noto Sans JP"/>
-              </a:rPr>
-              <a:t>相手の痛み：</a:t>
-            </a:r>
-            <a:r>
-              <a:rPr sz="1400" b="1">
-                <a:solidFill>
-                  <a:srgbClr val="1A1D21"/>
-                </a:solidFill>
-                <a:latin typeface="Noto Sans JP"/>
-                <a:ea typeface="Noto Sans JP"/>
-              </a:rPr>
-              <a:t>案件は激増、でも人は増えない。紙・Excel・電話では、増えた据付／試運転／保守現場をさばけない。</a:t>
-            </a:r>
-          </a:p>
-        </p:txBody>
-      </p:sp>
-      <p:sp>
-        <p:nvSpPr>
-          <p:cNvPr id="23" name="Rounded Rectangle 22"/>
-          <p:cNvSpPr/>
-          <p:nvPr/>
-        </p:nvSpPr>
-        <p:spPr>
-          <a:xfrm>
-            <a:off x="777240" y="5394960"/>
-            <a:ext cx="10634472" cy="841248"/>
-          </a:xfrm>
-          <a:prstGeom prst="roundRect">
-            <a:avLst>
-              <a:gd name="adj" fmla="val 5000"/>
-            </a:avLst>
-          </a:prstGeom>
-          <a:solidFill>
-            <a:srgbClr val="ECEEF1"/>
-          </a:solidFill>
-          <a:ln w="15240">
-            <a:solidFill>
-              <a:srgbClr val="454B54"/>
-            </a:solidFill>
-          </a:ln>
-          <a:effectLst/>
-        </p:spPr>
-        <p:style>
-          <a:lnRef idx="1">
-            <a:schemeClr val="accent1"/>
-          </a:lnRef>
-          <a:fillRef idx="3">
-            <a:schemeClr val="accent1"/>
-          </a:fillRef>
-          <a:effectRef idx="2">
-            <a:schemeClr val="accent1"/>
-          </a:effectRef>
-          <a:fontRef idx="minor">
-            <a:schemeClr val="lt1"/>
-          </a:fontRef>
-        </p:style>
-        <p:txBody>
-          <a:bodyPr rtlCol="0" anchor="ctr"/>
-          <a:lstStyle/>
-          <a:p>
-            <a:pPr algn="ctr"/>
-          </a:p>
-        </p:txBody>
-      </p:sp>
-      <p:sp>
-        <p:nvSpPr>
-          <p:cNvPr id="24" name="TextBox 23"/>
-          <p:cNvSpPr txBox="1"/>
-          <p:nvPr/>
-        </p:nvSpPr>
-        <p:spPr>
-          <a:xfrm>
-            <a:off x="1051560" y="5394960"/>
-            <a:ext cx="10058400" cy="841248"/>
-          </a:xfrm>
-          <a:prstGeom prst="rect">
-            <a:avLst/>
-          </a:prstGeom>
-          <a:noFill/>
-        </p:spPr>
-        <p:txBody>
-          <a:bodyPr wrap="square" anchor="ctr" lIns="0" rIns="0" tIns="0" bIns="0">
-            <a:spAutoFit/>
-          </a:bodyPr>
-          <a:lstStyle/>
-          <a:p>
-            <a:pPr algn="l">
-              <a:lnSpc>
-                <a:spcPct val="120000"/>
-              </a:lnSpc>
-              <a:spcBef>
-                <a:spcPts val="0"/>
-              </a:spcBef>
-              <a:spcAft>
-                <a:spcPts val="400"/>
-              </a:spcAft>
-            </a:pPr>
-            <a:r>
-              <a:rPr sz="1400" b="1">
-                <a:solidFill>
-                  <a:srgbClr val="454B54"/>
-                </a:solidFill>
-                <a:latin typeface="Noto Sans JP"/>
-                <a:ea typeface="Noto Sans JP"/>
-              </a:rPr>
-              <a:t>提供価値：</a:t>
-            </a:r>
-            <a:r>
-              <a:rPr sz="1400" b="1">
-                <a:solidFill>
-                  <a:srgbClr val="1A1D21"/>
-                </a:solidFill>
-                <a:latin typeface="Noto Sans JP"/>
-                <a:ea typeface="Noto Sans JP"/>
-              </a:rPr>
-              <a:t>多拠点・多職種の現場を1つにつなぎ、進捗・図面・検査・写真・報告を可視化する。</a:t>
-            </a:r>
-            <a:r>
-              <a:rPr sz="1400" b="1">
-                <a:solidFill>
-                  <a:srgbClr val="E60012"/>
-                </a:solidFill>
-                <a:latin typeface="Noto Sans JP"/>
-                <a:ea typeface="Noto Sans JP"/>
-              </a:rPr>
-              <a:t>——建設で実証済みの我々の主戦力。</a:t>
+              <a:t>＝ 攻めどころは1つではなく、チェーン全体にある。</a:t>
             </a:r>
           </a:p>
         </p:txBody>
@@ -10218,6 +10196,1306 @@
       </p:sp>
       <p:sp>
         <p:nvSpPr>
+          <p:cNvPr id="3" name="Rounded Rectangle 2"/>
+          <p:cNvSpPr/>
+          <p:nvPr/>
+        </p:nvSpPr>
+        <p:spPr>
+          <a:xfrm>
+            <a:off x="777240" y="457200"/>
+            <a:ext cx="475488" cy="475488"/>
+          </a:xfrm>
+          <a:prstGeom prst="roundRect">
+            <a:avLst>
+              <a:gd name="adj" fmla="val 18000"/>
+            </a:avLst>
+          </a:prstGeom>
+          <a:solidFill>
+            <a:srgbClr val="E60012"/>
+          </a:solidFill>
+          <a:ln>
+            <a:noFill/>
+          </a:ln>
+          <a:effectLst/>
+        </p:spPr>
+        <p:style>
+          <a:lnRef idx="1">
+            <a:schemeClr val="accent1"/>
+          </a:lnRef>
+          <a:fillRef idx="3">
+            <a:schemeClr val="accent1"/>
+          </a:fillRef>
+          <a:effectRef idx="2">
+            <a:schemeClr val="accent1"/>
+          </a:effectRef>
+          <a:fontRef idx="minor">
+            <a:schemeClr val="lt1"/>
+          </a:fontRef>
+        </p:style>
+        <p:txBody>
+          <a:bodyPr rtlCol="0" anchor="ctr"/>
+          <a:lstStyle/>
+          <a:p>
+            <a:pPr algn="ctr"/>
+          </a:p>
+        </p:txBody>
+      </p:sp>
+      <p:sp>
+        <p:nvSpPr>
+          <p:cNvPr id="4" name="TextBox 3"/>
+          <p:cNvSpPr txBox="1"/>
+          <p:nvPr/>
+        </p:nvSpPr>
+        <p:spPr>
+          <a:xfrm>
+            <a:off x="777240" y="457200"/>
+            <a:ext cx="475488" cy="475488"/>
+          </a:xfrm>
+          <a:prstGeom prst="rect">
+            <a:avLst/>
+          </a:prstGeom>
+          <a:noFill/>
+        </p:spPr>
+        <p:txBody>
+          <a:bodyPr wrap="square" anchor="ctr" lIns="0" rIns="0" tIns="0" bIns="0">
+            <a:spAutoFit/>
+          </a:bodyPr>
+          <a:lstStyle/>
+          <a:p>
+            <a:pPr algn="ctr">
+              <a:lnSpc>
+                <a:spcPct val="106000"/>
+              </a:lnSpc>
+              <a:spcBef>
+                <a:spcPts val="0"/>
+              </a:spcBef>
+              <a:spcAft>
+                <a:spcPts val="400"/>
+              </a:spcAft>
+            </a:pPr>
+            <a:r>
+              <a:rPr sz="1500" b="1">
+                <a:solidFill>
+                  <a:srgbClr val="FFFFFF"/>
+                </a:solidFill>
+                <a:latin typeface="Consolas"/>
+                <a:ea typeface="Consolas"/>
+              </a:rPr>
+              <a:t>5</a:t>
+            </a:r>
+          </a:p>
+        </p:txBody>
+      </p:sp>
+      <p:sp>
+        <p:nvSpPr>
+          <p:cNvPr id="5" name="TextBox 4"/>
+          <p:cNvSpPr txBox="1"/>
+          <p:nvPr/>
+        </p:nvSpPr>
+        <p:spPr>
+          <a:xfrm>
+            <a:off x="1417320" y="457200"/>
+            <a:ext cx="10241280" cy="256032"/>
+          </a:xfrm>
+          <a:prstGeom prst="rect">
+            <a:avLst/>
+          </a:prstGeom>
+          <a:noFill/>
+        </p:spPr>
+        <p:txBody>
+          <a:bodyPr wrap="square" anchor="t" lIns="0" rIns="0" tIns="0" bIns="0">
+            <a:spAutoFit/>
+          </a:bodyPr>
+          <a:lstStyle/>
+          <a:p>
+            <a:pPr algn="l">
+              <a:lnSpc>
+                <a:spcPct val="106000"/>
+              </a:lnSpc>
+              <a:spcBef>
+                <a:spcPts val="0"/>
+              </a:spcBef>
+              <a:spcAft>
+                <a:spcPts val="400"/>
+              </a:spcAft>
+            </a:pPr>
+            <a:r>
+              <a:rPr sz="1100" b="1" spc="150">
+                <a:solidFill>
+                  <a:srgbClr val="E60012"/>
+                </a:solidFill>
+                <a:latin typeface="Consolas"/>
+                <a:ea typeface="Consolas"/>
+              </a:rPr>
+              <a:t>我々は、どの業界に・どんな価値を提供するのか</a:t>
+            </a:r>
+          </a:p>
+        </p:txBody>
+      </p:sp>
+      <p:sp>
+        <p:nvSpPr>
+          <p:cNvPr id="6" name="TextBox 5"/>
+          <p:cNvSpPr txBox="1"/>
+          <p:nvPr/>
+        </p:nvSpPr>
+        <p:spPr>
+          <a:xfrm>
+            <a:off x="1399032" y="676656"/>
+            <a:ext cx="10424160" cy="457200"/>
+          </a:xfrm>
+          <a:prstGeom prst="rect">
+            <a:avLst/>
+          </a:prstGeom>
+          <a:noFill/>
+        </p:spPr>
+        <p:txBody>
+          <a:bodyPr wrap="square" anchor="t" lIns="0" rIns="0" tIns="0" bIns="0">
+            <a:spAutoFit/>
+          </a:bodyPr>
+          <a:lstStyle/>
+          <a:p>
+            <a:pPr algn="l">
+              <a:lnSpc>
+                <a:spcPct val="106000"/>
+              </a:lnSpc>
+              <a:spcBef>
+                <a:spcPts val="0"/>
+              </a:spcBef>
+              <a:spcAft>
+                <a:spcPts val="400"/>
+              </a:spcAft>
+            </a:pPr>
+            <a:r>
+              <a:rPr sz="2100" b="1">
+                <a:solidFill>
+                  <a:srgbClr val="1A1D21"/>
+                </a:solidFill>
+                <a:latin typeface="Noto Sans JP"/>
+                <a:ea typeface="Noto Sans JP"/>
+              </a:rPr>
+              <a:t>建設で磨いた“現場管理”を、そのまま製造業のフィールドへ。</a:t>
+            </a:r>
+          </a:p>
+        </p:txBody>
+      </p:sp>
+      <p:sp>
+        <p:nvSpPr>
+          <p:cNvPr id="7" name="Rectangle 6"/>
+          <p:cNvSpPr/>
+          <p:nvPr/>
+        </p:nvSpPr>
+        <p:spPr>
+          <a:xfrm>
+            <a:off x="777240" y="1170432"/>
+            <a:ext cx="10634472" cy="18288"/>
+          </a:xfrm>
+          <a:prstGeom prst="rect">
+            <a:avLst/>
+          </a:prstGeom>
+          <a:solidFill>
+            <a:srgbClr val="E2E4E9"/>
+          </a:solidFill>
+          <a:ln>
+            <a:noFill/>
+          </a:ln>
+          <a:effectLst/>
+        </p:spPr>
+        <p:style>
+          <a:lnRef idx="1">
+            <a:schemeClr val="accent1"/>
+          </a:lnRef>
+          <a:fillRef idx="3">
+            <a:schemeClr val="accent1"/>
+          </a:fillRef>
+          <a:effectRef idx="2">
+            <a:schemeClr val="accent1"/>
+          </a:effectRef>
+          <a:fontRef idx="minor">
+            <a:schemeClr val="lt1"/>
+          </a:fontRef>
+        </p:style>
+        <p:txBody>
+          <a:bodyPr rtlCol="0" anchor="ctr"/>
+          <a:lstStyle/>
+          <a:p>
+            <a:pPr algn="ctr"/>
+          </a:p>
+        </p:txBody>
+      </p:sp>
+      <p:sp>
+        <p:nvSpPr>
+          <p:cNvPr id="8" name="Rounded Rectangle 7"/>
+          <p:cNvSpPr/>
+          <p:nvPr/>
+        </p:nvSpPr>
+        <p:spPr>
+          <a:xfrm>
+            <a:off x="777240" y="1417320"/>
+            <a:ext cx="5257800" cy="1234440"/>
+          </a:xfrm>
+          <a:prstGeom prst="roundRect">
+            <a:avLst>
+              <a:gd name="adj" fmla="val 8000"/>
+            </a:avLst>
+          </a:prstGeom>
+          <a:solidFill>
+            <a:srgbClr val="ECEEF1"/>
+          </a:solidFill>
+          <a:ln w="15240">
+            <a:solidFill>
+              <a:srgbClr val="454B54"/>
+            </a:solidFill>
+          </a:ln>
+          <a:effectLst/>
+        </p:spPr>
+        <p:style>
+          <a:lnRef idx="1">
+            <a:schemeClr val="accent1"/>
+          </a:lnRef>
+          <a:fillRef idx="3">
+            <a:schemeClr val="accent1"/>
+          </a:fillRef>
+          <a:effectRef idx="2">
+            <a:schemeClr val="accent1"/>
+          </a:effectRef>
+          <a:fontRef idx="minor">
+            <a:schemeClr val="lt1"/>
+          </a:fontRef>
+        </p:style>
+        <p:txBody>
+          <a:bodyPr rtlCol="0" anchor="ctr"/>
+          <a:lstStyle/>
+          <a:p>
+            <a:pPr algn="ctr"/>
+          </a:p>
+        </p:txBody>
+      </p:sp>
+      <p:sp>
+        <p:nvSpPr>
+          <p:cNvPr id="9" name="TextBox 8"/>
+          <p:cNvSpPr txBox="1"/>
+          <p:nvPr/>
+        </p:nvSpPr>
+        <p:spPr>
+          <a:xfrm>
+            <a:off x="987552" y="1581912"/>
+            <a:ext cx="4892040" cy="914400"/>
+          </a:xfrm>
+          <a:prstGeom prst="rect">
+            <a:avLst/>
+          </a:prstGeom>
+          <a:noFill/>
+        </p:spPr>
+        <p:txBody>
+          <a:bodyPr wrap="square" anchor="t" lIns="0" rIns="0" tIns="0" bIns="0">
+            <a:spAutoFit/>
+          </a:bodyPr>
+          <a:lstStyle/>
+          <a:p>
+            <a:pPr algn="l">
+              <a:lnSpc>
+                <a:spcPct val="114000"/>
+              </a:lnSpc>
+              <a:spcBef>
+                <a:spcPts val="0"/>
+              </a:spcBef>
+              <a:spcAft>
+                <a:spcPts val="400"/>
+              </a:spcAft>
+            </a:pPr>
+            <a:r>
+              <a:rPr sz="1400" b="1">
+                <a:solidFill>
+                  <a:srgbClr val="454B54"/>
+                </a:solidFill>
+                <a:latin typeface="Noto Sans JP"/>
+                <a:ea typeface="Noto Sans JP"/>
+              </a:rPr>
+              <a:t>A  発注者として</a:t>
+            </a:r>
+          </a:p>
+          <a:p>
+            <a:pPr algn="l">
+              <a:lnSpc>
+                <a:spcPct val="114000"/>
+              </a:lnSpc>
+              <a:spcBef>
+                <a:spcPts val="0"/>
+              </a:spcBef>
+              <a:spcAft>
+                <a:spcPts val="400"/>
+              </a:spcAft>
+            </a:pPr>
+            <a:r>
+              <a:rPr sz="1150" b="1">
+                <a:solidFill>
+                  <a:srgbClr val="1A1D21"/>
+                </a:solidFill>
+                <a:latin typeface="Noto Sans JP"/>
+                <a:ea typeface="Noto Sans JP"/>
+              </a:rPr>
+              <a:t>設備投資を“建てる側”のプロジェクト管理</a:t>
+            </a:r>
+          </a:p>
+          <a:p>
+            <a:pPr algn="l">
+              <a:lnSpc>
+                <a:spcPct val="114000"/>
+              </a:lnSpc>
+              <a:spcBef>
+                <a:spcPts val="0"/>
+              </a:spcBef>
+              <a:spcAft>
+                <a:spcPts val="400"/>
+              </a:spcAft>
+            </a:pPr>
+            <a:r>
+              <a:rPr sz="1050" b="0">
+                <a:solidFill>
+                  <a:srgbClr val="3C4148"/>
+                </a:solidFill>
+                <a:latin typeface="Noto Sans JP"/>
+                <a:ea typeface="Noto Sans JP"/>
+              </a:rPr>
+              <a:t>工場の新増設・生産ライン更新・自社DC/電源・冷却設備の導入</a:t>
+            </a:r>
+          </a:p>
+        </p:txBody>
+      </p:sp>
+      <p:sp>
+        <p:nvSpPr>
+          <p:cNvPr id="10" name="Rounded Rectangle 9"/>
+          <p:cNvSpPr/>
+          <p:nvPr/>
+        </p:nvSpPr>
+        <p:spPr>
+          <a:xfrm>
+            <a:off x="6153912" y="1417320"/>
+            <a:ext cx="5257800" cy="1234440"/>
+          </a:xfrm>
+          <a:prstGeom prst="roundRect">
+            <a:avLst>
+              <a:gd name="adj" fmla="val 8000"/>
+            </a:avLst>
+          </a:prstGeom>
+          <a:solidFill>
+            <a:srgbClr val="FDECEE"/>
+          </a:solidFill>
+          <a:ln w="15240">
+            <a:solidFill>
+              <a:srgbClr val="E60012"/>
+            </a:solidFill>
+          </a:ln>
+          <a:effectLst/>
+        </p:spPr>
+        <p:style>
+          <a:lnRef idx="1">
+            <a:schemeClr val="accent1"/>
+          </a:lnRef>
+          <a:fillRef idx="3">
+            <a:schemeClr val="accent1"/>
+          </a:fillRef>
+          <a:effectRef idx="2">
+            <a:schemeClr val="accent1"/>
+          </a:effectRef>
+          <a:fontRef idx="minor">
+            <a:schemeClr val="lt1"/>
+          </a:fontRef>
+        </p:style>
+        <p:txBody>
+          <a:bodyPr rtlCol="0" anchor="ctr"/>
+          <a:lstStyle/>
+          <a:p>
+            <a:pPr algn="ctr"/>
+          </a:p>
+        </p:txBody>
+      </p:sp>
+      <p:sp>
+        <p:nvSpPr>
+          <p:cNvPr id="11" name="TextBox 10"/>
+          <p:cNvSpPr txBox="1"/>
+          <p:nvPr/>
+        </p:nvSpPr>
+        <p:spPr>
+          <a:xfrm>
+            <a:off x="6364224" y="1581912"/>
+            <a:ext cx="4892040" cy="914400"/>
+          </a:xfrm>
+          <a:prstGeom prst="rect">
+            <a:avLst/>
+          </a:prstGeom>
+          <a:noFill/>
+        </p:spPr>
+        <p:txBody>
+          <a:bodyPr wrap="square" anchor="t" lIns="0" rIns="0" tIns="0" bIns="0">
+            <a:spAutoFit/>
+          </a:bodyPr>
+          <a:lstStyle/>
+          <a:p>
+            <a:pPr algn="l">
+              <a:lnSpc>
+                <a:spcPct val="114000"/>
+              </a:lnSpc>
+              <a:spcBef>
+                <a:spcPts val="0"/>
+              </a:spcBef>
+              <a:spcAft>
+                <a:spcPts val="400"/>
+              </a:spcAft>
+            </a:pPr>
+            <a:r>
+              <a:rPr sz="1400" b="1">
+                <a:solidFill>
+                  <a:srgbClr val="E60012"/>
+                </a:solidFill>
+                <a:latin typeface="Noto Sans JP"/>
+                <a:ea typeface="Noto Sans JP"/>
+              </a:rPr>
+              <a:t>B  請負として</a:t>
+            </a:r>
+          </a:p>
+          <a:p>
+            <a:pPr algn="l">
+              <a:lnSpc>
+                <a:spcPct val="114000"/>
+              </a:lnSpc>
+              <a:spcBef>
+                <a:spcPts val="0"/>
+              </a:spcBef>
+              <a:spcAft>
+                <a:spcPts val="400"/>
+              </a:spcAft>
+            </a:pPr>
+            <a:r>
+              <a:rPr sz="1150" b="1">
+                <a:solidFill>
+                  <a:srgbClr val="1A1D21"/>
+                </a:solidFill>
+                <a:latin typeface="Noto Sans JP"/>
+                <a:ea typeface="Noto Sans JP"/>
+              </a:rPr>
+              <a:t>据付・試運転・保守を“納める側”の現場管理</a:t>
+            </a:r>
+          </a:p>
+          <a:p>
+            <a:pPr algn="l">
+              <a:lnSpc>
+                <a:spcPct val="114000"/>
+              </a:lnSpc>
+              <a:spcBef>
+                <a:spcPts val="0"/>
+              </a:spcBef>
+              <a:spcAft>
+                <a:spcPts val="400"/>
+              </a:spcAft>
+            </a:pPr>
+            <a:r>
+              <a:rPr sz="1050" b="0">
+                <a:solidFill>
+                  <a:srgbClr val="3C4148"/>
+                </a:solidFill>
+                <a:latin typeface="Noto Sans JP"/>
+                <a:ea typeface="Noto Sans JP"/>
+              </a:rPr>
+              <a:t>発電機・変圧器・空調・液冷・UPS・半導体装置のフィールド現場（本命）</a:t>
+            </a:r>
+          </a:p>
+        </p:txBody>
+      </p:sp>
+      <p:sp>
+        <p:nvSpPr>
+          <p:cNvPr id="12" name="Rounded Rectangle 11"/>
+          <p:cNvSpPr/>
+          <p:nvPr/>
+        </p:nvSpPr>
+        <p:spPr>
+          <a:xfrm>
+            <a:off x="777240" y="2880360"/>
+            <a:ext cx="10634472" cy="1234440"/>
+          </a:xfrm>
+          <a:prstGeom prst="roundRect">
+            <a:avLst>
+              <a:gd name="adj" fmla="val 5000"/>
+            </a:avLst>
+          </a:prstGeom>
+          <a:solidFill>
+            <a:srgbClr val="FFFFFF"/>
+          </a:solidFill>
+          <a:ln w="12700">
+            <a:solidFill>
+              <a:srgbClr val="E2E4E9"/>
+            </a:solidFill>
+          </a:ln>
+          <a:effectLst/>
+        </p:spPr>
+        <p:style>
+          <a:lnRef idx="1">
+            <a:schemeClr val="accent1"/>
+          </a:lnRef>
+          <a:fillRef idx="3">
+            <a:schemeClr val="accent1"/>
+          </a:fillRef>
+          <a:effectRef idx="2">
+            <a:schemeClr val="accent1"/>
+          </a:effectRef>
+          <a:fontRef idx="minor">
+            <a:schemeClr val="lt1"/>
+          </a:fontRef>
+        </p:style>
+        <p:txBody>
+          <a:bodyPr rtlCol="0" anchor="ctr"/>
+          <a:lstStyle/>
+          <a:p>
+            <a:pPr algn="ctr"/>
+          </a:p>
+        </p:txBody>
+      </p:sp>
+      <p:sp>
+        <p:nvSpPr>
+          <p:cNvPr id="13" name="TextBox 12"/>
+          <p:cNvSpPr txBox="1"/>
+          <p:nvPr/>
+        </p:nvSpPr>
+        <p:spPr>
+          <a:xfrm>
+            <a:off x="1005840" y="3017520"/>
+            <a:ext cx="10241280" cy="274320"/>
+          </a:xfrm>
+          <a:prstGeom prst="rect">
+            <a:avLst/>
+          </a:prstGeom>
+          <a:noFill/>
+        </p:spPr>
+        <p:txBody>
+          <a:bodyPr wrap="square" anchor="t" lIns="0" rIns="0" tIns="0" bIns="0">
+            <a:spAutoFit/>
+          </a:bodyPr>
+          <a:lstStyle/>
+          <a:p>
+            <a:pPr algn="l">
+              <a:lnSpc>
+                <a:spcPct val="106000"/>
+              </a:lnSpc>
+              <a:spcBef>
+                <a:spcPts val="0"/>
+              </a:spcBef>
+              <a:spcAft>
+                <a:spcPts val="400"/>
+              </a:spcAft>
+            </a:pPr>
+            <a:r>
+              <a:rPr sz="1050" b="1" spc="100">
+                <a:solidFill>
+                  <a:srgbClr val="E60012"/>
+                </a:solidFill>
+                <a:latin typeface="Consolas"/>
+                <a:ea typeface="Consolas"/>
+              </a:rPr>
+              <a:t>価値を届ける主要業界</a:t>
+            </a:r>
+            <a:r>
+              <a:rPr sz="850" b="0">
+                <a:solidFill>
+                  <a:srgbClr val="8A9098"/>
+                </a:solidFill>
+                <a:latin typeface="Consolas"/>
+                <a:ea typeface="Consolas"/>
+              </a:rPr>
+              <a:t>　★＝最優先</a:t>
+            </a:r>
+          </a:p>
+        </p:txBody>
+      </p:sp>
+      <p:sp>
+        <p:nvSpPr>
+          <p:cNvPr id="14" name="TextBox 13"/>
+          <p:cNvSpPr txBox="1"/>
+          <p:nvPr/>
+        </p:nvSpPr>
+        <p:spPr>
+          <a:xfrm>
+            <a:off x="996695" y="3346704"/>
+            <a:ext cx="2329434" cy="640080"/>
+          </a:xfrm>
+          <a:prstGeom prst="rect">
+            <a:avLst/>
+          </a:prstGeom>
+          <a:noFill/>
+        </p:spPr>
+        <p:txBody>
+          <a:bodyPr wrap="square" anchor="t" lIns="0" rIns="0" tIns="0" bIns="0">
+            <a:spAutoFit/>
+          </a:bodyPr>
+          <a:lstStyle/>
+          <a:p>
+            <a:pPr algn="l">
+              <a:lnSpc>
+                <a:spcPct val="112000"/>
+              </a:lnSpc>
+              <a:spcBef>
+                <a:spcPts val="0"/>
+              </a:spcBef>
+              <a:spcAft>
+                <a:spcPts val="300"/>
+              </a:spcAft>
+            </a:pPr>
+            <a:r>
+              <a:rPr sz="850" b="1">
+                <a:solidFill>
+                  <a:srgbClr val="E60012"/>
+                </a:solidFill>
+                <a:latin typeface="Consolas"/>
+                <a:ea typeface="Consolas"/>
+              </a:rPr>
+              <a:t>★ 最優先</a:t>
+            </a:r>
+          </a:p>
+          <a:p>
+            <a:pPr algn="l">
+              <a:lnSpc>
+                <a:spcPct val="112000"/>
+              </a:lnSpc>
+              <a:spcBef>
+                <a:spcPts val="0"/>
+              </a:spcBef>
+              <a:spcAft>
+                <a:spcPts val="300"/>
+              </a:spcAft>
+            </a:pPr>
+            <a:r>
+              <a:rPr sz="1200" b="1">
+                <a:solidFill>
+                  <a:srgbClr val="1A1D21"/>
+                </a:solidFill>
+                <a:latin typeface="Noto Sans JP"/>
+                <a:ea typeface="Noto Sans JP"/>
+              </a:rPr>
+              <a:t>重電（変圧器・発電機）</a:t>
+            </a:r>
+          </a:p>
+        </p:txBody>
+      </p:sp>
+      <p:sp>
+        <p:nvSpPr>
+          <p:cNvPr id="15" name="Rectangle 14"/>
+          <p:cNvSpPr/>
+          <p:nvPr/>
+        </p:nvSpPr>
+        <p:spPr>
+          <a:xfrm>
+            <a:off x="3435858" y="3383280"/>
+            <a:ext cx="10972" cy="594360"/>
+          </a:xfrm>
+          <a:prstGeom prst="rect">
+            <a:avLst/>
+          </a:prstGeom>
+          <a:solidFill>
+            <a:srgbClr val="E2E4E9"/>
+          </a:solidFill>
+          <a:ln>
+            <a:noFill/>
+          </a:ln>
+          <a:effectLst/>
+        </p:spPr>
+        <p:style>
+          <a:lnRef idx="1">
+            <a:schemeClr val="accent1"/>
+          </a:lnRef>
+          <a:fillRef idx="3">
+            <a:schemeClr val="accent1"/>
+          </a:fillRef>
+          <a:effectRef idx="2">
+            <a:schemeClr val="accent1"/>
+          </a:effectRef>
+          <a:fontRef idx="minor">
+            <a:schemeClr val="lt1"/>
+          </a:fontRef>
+        </p:style>
+        <p:txBody>
+          <a:bodyPr rtlCol="0" anchor="ctr"/>
+          <a:lstStyle/>
+          <a:p>
+            <a:pPr algn="ctr"/>
+          </a:p>
+        </p:txBody>
+      </p:sp>
+      <p:sp>
+        <p:nvSpPr>
+          <p:cNvPr id="16" name="TextBox 15"/>
+          <p:cNvSpPr txBox="1"/>
+          <p:nvPr/>
+        </p:nvSpPr>
+        <p:spPr>
+          <a:xfrm>
+            <a:off x="3655314" y="3346704"/>
+            <a:ext cx="2329434" cy="640080"/>
+          </a:xfrm>
+          <a:prstGeom prst="rect">
+            <a:avLst/>
+          </a:prstGeom>
+          <a:noFill/>
+        </p:spPr>
+        <p:txBody>
+          <a:bodyPr wrap="square" anchor="t" lIns="0" rIns="0" tIns="0" bIns="0">
+            <a:spAutoFit/>
+          </a:bodyPr>
+          <a:lstStyle/>
+          <a:p>
+            <a:pPr algn="l">
+              <a:lnSpc>
+                <a:spcPct val="112000"/>
+              </a:lnSpc>
+              <a:spcBef>
+                <a:spcPts val="0"/>
+              </a:spcBef>
+              <a:spcAft>
+                <a:spcPts val="300"/>
+              </a:spcAft>
+            </a:pPr>
+            <a:r>
+              <a:rPr sz="850" b="1">
+                <a:solidFill>
+                  <a:srgbClr val="E60012"/>
+                </a:solidFill>
+                <a:latin typeface="Consolas"/>
+                <a:ea typeface="Consolas"/>
+              </a:rPr>
+              <a:t>★ 最優先</a:t>
+            </a:r>
+          </a:p>
+          <a:p>
+            <a:pPr algn="l">
+              <a:lnSpc>
+                <a:spcPct val="112000"/>
+              </a:lnSpc>
+              <a:spcBef>
+                <a:spcPts val="0"/>
+              </a:spcBef>
+              <a:spcAft>
+                <a:spcPts val="300"/>
+              </a:spcAft>
+            </a:pPr>
+            <a:r>
+              <a:rPr sz="1200" b="1">
+                <a:solidFill>
+                  <a:srgbClr val="1A1D21"/>
+                </a:solidFill>
+                <a:latin typeface="Noto Sans JP"/>
+                <a:ea typeface="Noto Sans JP"/>
+              </a:rPr>
+              <a:t>DC建設サブコン（電気・空調）</a:t>
+            </a:r>
+          </a:p>
+        </p:txBody>
+      </p:sp>
+      <p:sp>
+        <p:nvSpPr>
+          <p:cNvPr id="17" name="Rectangle 16"/>
+          <p:cNvSpPr/>
+          <p:nvPr/>
+        </p:nvSpPr>
+        <p:spPr>
+          <a:xfrm>
+            <a:off x="6094476" y="3383280"/>
+            <a:ext cx="10972" cy="594360"/>
+          </a:xfrm>
+          <a:prstGeom prst="rect">
+            <a:avLst/>
+          </a:prstGeom>
+          <a:solidFill>
+            <a:srgbClr val="E2E4E9"/>
+          </a:solidFill>
+          <a:ln>
+            <a:noFill/>
+          </a:ln>
+          <a:effectLst/>
+        </p:spPr>
+        <p:style>
+          <a:lnRef idx="1">
+            <a:schemeClr val="accent1"/>
+          </a:lnRef>
+          <a:fillRef idx="3">
+            <a:schemeClr val="accent1"/>
+          </a:fillRef>
+          <a:effectRef idx="2">
+            <a:schemeClr val="accent1"/>
+          </a:effectRef>
+          <a:fontRef idx="minor">
+            <a:schemeClr val="lt1"/>
+          </a:fontRef>
+        </p:style>
+        <p:txBody>
+          <a:bodyPr rtlCol="0" anchor="ctr"/>
+          <a:lstStyle/>
+          <a:p>
+            <a:pPr algn="ctr"/>
+          </a:p>
+        </p:txBody>
+      </p:sp>
+      <p:sp>
+        <p:nvSpPr>
+          <p:cNvPr id="18" name="TextBox 17"/>
+          <p:cNvSpPr txBox="1"/>
+          <p:nvPr/>
+        </p:nvSpPr>
+        <p:spPr>
+          <a:xfrm>
+            <a:off x="6313932" y="3346704"/>
+            <a:ext cx="2329434" cy="640080"/>
+          </a:xfrm>
+          <a:prstGeom prst="rect">
+            <a:avLst/>
+          </a:prstGeom>
+          <a:noFill/>
+        </p:spPr>
+        <p:txBody>
+          <a:bodyPr wrap="square" anchor="t" lIns="0" rIns="0" tIns="0" bIns="0">
+            <a:spAutoFit/>
+          </a:bodyPr>
+          <a:lstStyle/>
+          <a:p>
+            <a:pPr algn="l">
+              <a:lnSpc>
+                <a:spcPct val="112000"/>
+              </a:lnSpc>
+              <a:spcBef>
+                <a:spcPts val="0"/>
+              </a:spcBef>
+              <a:spcAft>
+                <a:spcPts val="300"/>
+              </a:spcAft>
+            </a:pPr>
+            <a:r>
+              <a:rPr sz="850" b="1">
+                <a:solidFill>
+                  <a:srgbClr val="E60012"/>
+                </a:solidFill>
+                <a:latin typeface="Consolas"/>
+                <a:ea typeface="Consolas"/>
+              </a:rPr>
+              <a:t>★ 最優先</a:t>
+            </a:r>
+          </a:p>
+          <a:p>
+            <a:pPr algn="l">
+              <a:lnSpc>
+                <a:spcPct val="112000"/>
+              </a:lnSpc>
+              <a:spcBef>
+                <a:spcPts val="0"/>
+              </a:spcBef>
+              <a:spcAft>
+                <a:spcPts val="300"/>
+              </a:spcAft>
+            </a:pPr>
+            <a:r>
+              <a:rPr sz="1200" b="1">
+                <a:solidFill>
+                  <a:srgbClr val="1A1D21"/>
+                </a:solidFill>
+                <a:latin typeface="Noto Sans JP"/>
+                <a:ea typeface="Noto Sans JP"/>
+              </a:rPr>
+              <a:t>産業冷却・液冷・UPS</a:t>
+            </a:r>
+          </a:p>
+        </p:txBody>
+      </p:sp>
+      <p:sp>
+        <p:nvSpPr>
+          <p:cNvPr id="19" name="Rectangle 18"/>
+          <p:cNvSpPr/>
+          <p:nvPr/>
+        </p:nvSpPr>
+        <p:spPr>
+          <a:xfrm>
+            <a:off x="8753094" y="3383280"/>
+            <a:ext cx="10972" cy="594360"/>
+          </a:xfrm>
+          <a:prstGeom prst="rect">
+            <a:avLst/>
+          </a:prstGeom>
+          <a:solidFill>
+            <a:srgbClr val="E2E4E9"/>
+          </a:solidFill>
+          <a:ln>
+            <a:noFill/>
+          </a:ln>
+          <a:effectLst/>
+        </p:spPr>
+        <p:style>
+          <a:lnRef idx="1">
+            <a:schemeClr val="accent1"/>
+          </a:lnRef>
+          <a:fillRef idx="3">
+            <a:schemeClr val="accent1"/>
+          </a:fillRef>
+          <a:effectRef idx="2">
+            <a:schemeClr val="accent1"/>
+          </a:effectRef>
+          <a:fontRef idx="minor">
+            <a:schemeClr val="lt1"/>
+          </a:fontRef>
+        </p:style>
+        <p:txBody>
+          <a:bodyPr rtlCol="0" anchor="ctr"/>
+          <a:lstStyle/>
+          <a:p>
+            <a:pPr algn="ctr"/>
+          </a:p>
+        </p:txBody>
+      </p:sp>
+      <p:sp>
+        <p:nvSpPr>
+          <p:cNvPr id="20" name="TextBox 19"/>
+          <p:cNvSpPr txBox="1"/>
+          <p:nvPr/>
+        </p:nvSpPr>
+        <p:spPr>
+          <a:xfrm>
+            <a:off x="8972550" y="3346704"/>
+            <a:ext cx="2329434" cy="640080"/>
+          </a:xfrm>
+          <a:prstGeom prst="rect">
+            <a:avLst/>
+          </a:prstGeom>
+          <a:noFill/>
+        </p:spPr>
+        <p:txBody>
+          <a:bodyPr wrap="square" anchor="t" lIns="0" rIns="0" tIns="0" bIns="0">
+            <a:spAutoFit/>
+          </a:bodyPr>
+          <a:lstStyle/>
+          <a:p>
+            <a:pPr algn="l">
+              <a:lnSpc>
+                <a:spcPct val="112000"/>
+              </a:lnSpc>
+              <a:spcBef>
+                <a:spcPts val="0"/>
+              </a:spcBef>
+              <a:spcAft>
+                <a:spcPts val="300"/>
+              </a:spcAft>
+            </a:pPr>
+            <a:r>
+              <a:rPr sz="850" b="1">
+                <a:solidFill>
+                  <a:srgbClr val="454B54"/>
+                </a:solidFill>
+                <a:latin typeface="Consolas"/>
+                <a:ea typeface="Consolas"/>
+              </a:rPr>
+              <a:t>有望</a:t>
+            </a:r>
+          </a:p>
+          <a:p>
+            <a:pPr algn="l">
+              <a:lnSpc>
+                <a:spcPct val="112000"/>
+              </a:lnSpc>
+              <a:spcBef>
+                <a:spcPts val="0"/>
+              </a:spcBef>
+              <a:spcAft>
+                <a:spcPts val="300"/>
+              </a:spcAft>
+            </a:pPr>
+            <a:r>
+              <a:rPr sz="1200" b="1">
+                <a:solidFill>
+                  <a:srgbClr val="1A1D21"/>
+                </a:solidFill>
+                <a:latin typeface="Noto Sans JP"/>
+                <a:ea typeface="Noto Sans JP"/>
+              </a:rPr>
+              <a:t>半導体・製造装置</a:t>
+            </a:r>
+          </a:p>
+        </p:txBody>
+      </p:sp>
+      <p:sp>
+        <p:nvSpPr>
+          <p:cNvPr id="21" name="Rounded Rectangle 20"/>
+          <p:cNvSpPr/>
+          <p:nvPr/>
+        </p:nvSpPr>
+        <p:spPr>
+          <a:xfrm>
+            <a:off x="777240" y="4315968"/>
+            <a:ext cx="10634472" cy="914400"/>
+          </a:xfrm>
+          <a:prstGeom prst="roundRect">
+            <a:avLst>
+              <a:gd name="adj" fmla="val 5000"/>
+            </a:avLst>
+          </a:prstGeom>
+          <a:solidFill>
+            <a:srgbClr val="FDECEE"/>
+          </a:solidFill>
+          <a:ln w="12700">
+            <a:solidFill>
+              <a:srgbClr val="F3C7CD"/>
+            </a:solidFill>
+          </a:ln>
+          <a:effectLst/>
+        </p:spPr>
+        <p:style>
+          <a:lnRef idx="1">
+            <a:schemeClr val="accent1"/>
+          </a:lnRef>
+          <a:fillRef idx="3">
+            <a:schemeClr val="accent1"/>
+          </a:fillRef>
+          <a:effectRef idx="2">
+            <a:schemeClr val="accent1"/>
+          </a:effectRef>
+          <a:fontRef idx="minor">
+            <a:schemeClr val="lt1"/>
+          </a:fontRef>
+        </p:style>
+        <p:txBody>
+          <a:bodyPr rtlCol="0" anchor="ctr"/>
+          <a:lstStyle/>
+          <a:p>
+            <a:pPr algn="ctr"/>
+          </a:p>
+        </p:txBody>
+      </p:sp>
+      <p:sp>
+        <p:nvSpPr>
+          <p:cNvPr id="22" name="TextBox 21"/>
+          <p:cNvSpPr txBox="1"/>
+          <p:nvPr/>
+        </p:nvSpPr>
+        <p:spPr>
+          <a:xfrm>
+            <a:off x="1051560" y="4315968"/>
+            <a:ext cx="10058400" cy="914400"/>
+          </a:xfrm>
+          <a:prstGeom prst="rect">
+            <a:avLst/>
+          </a:prstGeom>
+          <a:noFill/>
+        </p:spPr>
+        <p:txBody>
+          <a:bodyPr wrap="square" anchor="ctr" lIns="0" rIns="0" tIns="0" bIns="0">
+            <a:spAutoFit/>
+          </a:bodyPr>
+          <a:lstStyle/>
+          <a:p>
+            <a:pPr algn="l">
+              <a:lnSpc>
+                <a:spcPct val="120000"/>
+              </a:lnSpc>
+              <a:spcBef>
+                <a:spcPts val="0"/>
+              </a:spcBef>
+              <a:spcAft>
+                <a:spcPts val="400"/>
+              </a:spcAft>
+            </a:pPr>
+            <a:r>
+              <a:rPr sz="1400" b="1">
+                <a:solidFill>
+                  <a:srgbClr val="E60012"/>
+                </a:solidFill>
+                <a:latin typeface="Noto Sans JP"/>
+                <a:ea typeface="Noto Sans JP"/>
+              </a:rPr>
+              <a:t>相手の痛み：</a:t>
+            </a:r>
+            <a:r>
+              <a:rPr sz="1400" b="1">
+                <a:solidFill>
+                  <a:srgbClr val="1A1D21"/>
+                </a:solidFill>
+                <a:latin typeface="Noto Sans JP"/>
+                <a:ea typeface="Noto Sans JP"/>
+              </a:rPr>
+              <a:t>案件は激増、でも人は増えない。紙・Excel・電話では、増えた据付／試運転／保守現場をさばけない。</a:t>
+            </a:r>
+          </a:p>
+        </p:txBody>
+      </p:sp>
+      <p:sp>
+        <p:nvSpPr>
+          <p:cNvPr id="23" name="Rounded Rectangle 22"/>
+          <p:cNvSpPr/>
+          <p:nvPr/>
+        </p:nvSpPr>
+        <p:spPr>
+          <a:xfrm>
+            <a:off x="777240" y="5394960"/>
+            <a:ext cx="10634472" cy="841248"/>
+          </a:xfrm>
+          <a:prstGeom prst="roundRect">
+            <a:avLst>
+              <a:gd name="adj" fmla="val 5000"/>
+            </a:avLst>
+          </a:prstGeom>
+          <a:solidFill>
+            <a:srgbClr val="ECEEF1"/>
+          </a:solidFill>
+          <a:ln w="15240">
+            <a:solidFill>
+              <a:srgbClr val="454B54"/>
+            </a:solidFill>
+          </a:ln>
+          <a:effectLst/>
+        </p:spPr>
+        <p:style>
+          <a:lnRef idx="1">
+            <a:schemeClr val="accent1"/>
+          </a:lnRef>
+          <a:fillRef idx="3">
+            <a:schemeClr val="accent1"/>
+          </a:fillRef>
+          <a:effectRef idx="2">
+            <a:schemeClr val="accent1"/>
+          </a:effectRef>
+          <a:fontRef idx="minor">
+            <a:schemeClr val="lt1"/>
+          </a:fontRef>
+        </p:style>
+        <p:txBody>
+          <a:bodyPr rtlCol="0" anchor="ctr"/>
+          <a:lstStyle/>
+          <a:p>
+            <a:pPr algn="ctr"/>
+          </a:p>
+        </p:txBody>
+      </p:sp>
+      <p:sp>
+        <p:nvSpPr>
+          <p:cNvPr id="24" name="TextBox 23"/>
+          <p:cNvSpPr txBox="1"/>
+          <p:nvPr/>
+        </p:nvSpPr>
+        <p:spPr>
+          <a:xfrm>
+            <a:off x="1051560" y="5394960"/>
+            <a:ext cx="10058400" cy="841248"/>
+          </a:xfrm>
+          <a:prstGeom prst="rect">
+            <a:avLst/>
+          </a:prstGeom>
+          <a:noFill/>
+        </p:spPr>
+        <p:txBody>
+          <a:bodyPr wrap="square" anchor="ctr" lIns="0" rIns="0" tIns="0" bIns="0">
+            <a:spAutoFit/>
+          </a:bodyPr>
+          <a:lstStyle/>
+          <a:p>
+            <a:pPr algn="l">
+              <a:lnSpc>
+                <a:spcPct val="120000"/>
+              </a:lnSpc>
+              <a:spcBef>
+                <a:spcPts val="0"/>
+              </a:spcBef>
+              <a:spcAft>
+                <a:spcPts val="400"/>
+              </a:spcAft>
+            </a:pPr>
+            <a:r>
+              <a:rPr sz="1400" b="1">
+                <a:solidFill>
+                  <a:srgbClr val="454B54"/>
+                </a:solidFill>
+                <a:latin typeface="Noto Sans JP"/>
+                <a:ea typeface="Noto Sans JP"/>
+              </a:rPr>
+              <a:t>提供価値：</a:t>
+            </a:r>
+            <a:r>
+              <a:rPr sz="1400" b="1">
+                <a:solidFill>
+                  <a:srgbClr val="1A1D21"/>
+                </a:solidFill>
+                <a:latin typeface="Noto Sans JP"/>
+                <a:ea typeface="Noto Sans JP"/>
+              </a:rPr>
+              <a:t>多拠点・多職種の現場を1つにつなぎ、進捗・図面・検査・写真・報告を可視化する。</a:t>
+            </a:r>
+            <a:r>
+              <a:rPr sz="1400" b="1">
+                <a:solidFill>
+                  <a:srgbClr val="E60012"/>
+                </a:solidFill>
+                <a:latin typeface="Noto Sans JP"/>
+                <a:ea typeface="Noto Sans JP"/>
+              </a:rPr>
+              <a:t>——建設で実証済みの我々の主戦力。</a:t>
+            </a:r>
+          </a:p>
+        </p:txBody>
+      </p:sp>
+    </p:spTree>
+  </p:cSld>
+  <p:clrMapOvr>
+    <a:masterClrMapping/>
+  </p:clrMapOvr>
+</p:sld>
+</file>
+
+<file path=ppt/slides/slide7.xml><?xml version="1.0" encoding="utf-8"?>
+<p:sld xmlns:a="http://schemas.openxmlformats.org/drawingml/2006/main" xmlns:p="http://schemas.openxmlformats.org/presentationml/2006/main" xmlns:r="http://schemas.openxmlformats.org/officeDocument/2006/relationships">
+  <p:cSld>
+    <p:spTree>
+      <p:nvGrpSpPr>
+        <p:cNvPr id="1" name=""/>
+        <p:cNvGrpSpPr/>
+        <p:nvPr/>
+      </p:nvGrpSpPr>
+      <p:grpSpPr/>
+      <p:sp>
+        <p:nvSpPr>
+          <p:cNvPr id="2" name="Rectangle 1"/>
+          <p:cNvSpPr/>
+          <p:nvPr/>
+        </p:nvSpPr>
+        <p:spPr>
+          <a:xfrm>
+            <a:off x="0" y="0"/>
+            <a:ext cx="12191695" cy="6858000"/>
+          </a:xfrm>
+          <a:prstGeom prst="rect">
+            <a:avLst/>
+          </a:prstGeom>
+          <a:solidFill>
+            <a:srgbClr val="FFFFFF"/>
+          </a:solidFill>
+          <a:ln>
+            <a:noFill/>
+          </a:ln>
+          <a:effectLst/>
+        </p:spPr>
+        <p:style>
+          <a:lnRef idx="1">
+            <a:schemeClr val="accent1"/>
+          </a:lnRef>
+          <a:fillRef idx="3">
+            <a:schemeClr val="accent1"/>
+          </a:fillRef>
+          <a:effectRef idx="2">
+            <a:schemeClr val="accent1"/>
+          </a:effectRef>
+          <a:fontRef idx="minor">
+            <a:schemeClr val="lt1"/>
+          </a:fontRef>
+        </p:style>
+        <p:txBody>
+          <a:bodyPr rtlCol="0" anchor="ctr"/>
+          <a:lstStyle/>
+          <a:p>
+            <a:pPr algn="ctr"/>
+          </a:p>
+        </p:txBody>
+      </p:sp>
+      <p:sp>
+        <p:nvSpPr>
           <p:cNvPr id="3" name="Rectangle 2"/>
           <p:cNvSpPr/>
           <p:nvPr/>
@@ -10391,7 +11669,7 @@
                 <a:latin typeface="Consolas"/>
                 <a:ea typeface="Consolas"/>
               </a:rPr>
-              <a:t>5</a:t>
+              <a:t>6</a:t>
             </a:r>
           </a:p>
         </p:txBody>

--- a/output/andpad_soukai_ai_deck.pptx
+++ b/output/andpad_soukai_ai_deck.pptx
@@ -5133,7 +5133,7 @@
                 <a:latin typeface="Consolas"/>
                 <a:ea typeface="Consolas"/>
               </a:rPr>
-              <a:t>AI投資の規模を、体感する</a:t>
+              <a:t>規模より“勢い”——トレンドとして、どれだけ急か</a:t>
             </a:r>
           </a:p>
         </p:txBody>
@@ -5179,7 +5179,7 @@
                 <a:latin typeface="Noto Sans JP"/>
                 <a:ea typeface="Noto Sans JP"/>
               </a:rPr>
-              <a:t>その金額、ピンとこない。だから“身近なもの”に換算する。</a:t>
+              <a:t>AI投資は“大きい”だけじゃない。数年で“何倍”に跳ねている。</a:t>
             </a:r>
           </a:p>
         </p:txBody>
@@ -5230,18 +5230,269 @@
       </p:sp>
       <p:sp>
         <p:nvSpPr>
-          <p:cNvPr id="8" name="Rounded Rectangle 7"/>
+          <p:cNvPr id="8" name="TextBox 7"/>
+          <p:cNvSpPr txBox="1"/>
+          <p:nvPr/>
+        </p:nvSpPr>
+        <p:spPr>
+          <a:xfrm>
+            <a:off x="960120" y="1554480"/>
+            <a:ext cx="2788920" cy="868680"/>
+          </a:xfrm>
+          <a:prstGeom prst="rect">
+            <a:avLst/>
+          </a:prstGeom>
+          <a:noFill/>
+        </p:spPr>
+        <p:txBody>
+          <a:bodyPr wrap="square" anchor="t" lIns="0" rIns="0" tIns="0" bIns="0">
+            <a:spAutoFit/>
+          </a:bodyPr>
+          <a:lstStyle/>
+          <a:p>
+            <a:pPr algn="l">
+              <a:lnSpc>
+                <a:spcPct val="112000"/>
+              </a:lnSpc>
+              <a:spcBef>
+                <a:spcPts val="0"/>
+              </a:spcBef>
+              <a:spcAft>
+                <a:spcPts val="300"/>
+              </a:spcAft>
+            </a:pPr>
+            <a:r>
+              <a:rPr sz="1500" b="1">
+                <a:solidFill>
+                  <a:srgbClr val="1A1D21"/>
+                </a:solidFill>
+                <a:latin typeface="Noto Sans JP"/>
+                <a:ea typeface="Noto Sans JP"/>
+              </a:rPr>
+              <a:t>AIチップの需要</a:t>
+            </a:r>
+          </a:p>
+          <a:p>
+            <a:pPr algn="l">
+              <a:lnSpc>
+                <a:spcPct val="112000"/>
+              </a:lnSpc>
+              <a:spcBef>
+                <a:spcPts val="0"/>
+              </a:spcBef>
+              <a:spcAft>
+                <a:spcPts val="300"/>
+              </a:spcAft>
+            </a:pPr>
+            <a:r>
+              <a:rPr sz="950" b="1">
+                <a:solidFill>
+                  <a:srgbClr val="8A9098"/>
+                </a:solidFill>
+                <a:latin typeface="Consolas"/>
+                <a:ea typeface="Consolas"/>
+              </a:rPr>
+              <a:t>NVIDIA データセンター売上</a:t>
+            </a:r>
+          </a:p>
+        </p:txBody>
+      </p:sp>
+      <p:sp>
+        <p:nvSpPr>
+          <p:cNvPr id="9" name="Rectangle 8"/>
           <p:cNvSpPr/>
           <p:nvPr/>
         </p:nvSpPr>
         <p:spPr>
           <a:xfrm>
-            <a:off x="868680" y="1527048"/>
-            <a:ext cx="566928" cy="548640"/>
+            <a:off x="3886200" y="2414015"/>
+            <a:ext cx="3383280" cy="12801"/>
+          </a:xfrm>
+          <a:prstGeom prst="rect">
+            <a:avLst/>
+          </a:prstGeom>
+          <a:solidFill>
+            <a:srgbClr val="E2E4E9"/>
+          </a:solidFill>
+          <a:ln>
+            <a:noFill/>
+          </a:ln>
+          <a:effectLst/>
+        </p:spPr>
+        <p:style>
+          <a:lnRef idx="1">
+            <a:schemeClr val="accent1"/>
+          </a:lnRef>
+          <a:fillRef idx="3">
+            <a:schemeClr val="accent1"/>
+          </a:fillRef>
+          <a:effectRef idx="2">
+            <a:schemeClr val="accent1"/>
+          </a:effectRef>
+          <a:fontRef idx="minor">
+            <a:schemeClr val="lt1"/>
+          </a:fontRef>
+        </p:style>
+        <p:txBody>
+          <a:bodyPr rtlCol="0" anchor="ctr"/>
+          <a:lstStyle/>
+          <a:p>
+            <a:pPr algn="ctr"/>
+          </a:p>
+        </p:txBody>
+      </p:sp>
+      <p:sp>
+        <p:nvSpPr>
+          <p:cNvPr id="10" name="Rounded Rectangle 9"/>
+          <p:cNvSpPr/>
+          <p:nvPr/>
+        </p:nvSpPr>
+        <p:spPr>
+          <a:xfrm>
+            <a:off x="4098798" y="2356632"/>
+            <a:ext cx="420624" cy="57383"/>
           </a:xfrm>
           <a:prstGeom prst="roundRect">
             <a:avLst>
-              <a:gd name="adj" fmla="val 14000"/>
+              <a:gd name="adj" fmla="val 12000"/>
+            </a:avLst>
+          </a:prstGeom>
+          <a:solidFill>
+            <a:srgbClr val="F4B4BD"/>
+          </a:solidFill>
+          <a:ln>
+            <a:noFill/>
+          </a:ln>
+          <a:effectLst/>
+        </p:spPr>
+        <p:style>
+          <a:lnRef idx="1">
+            <a:schemeClr val="accent1"/>
+          </a:lnRef>
+          <a:fillRef idx="3">
+            <a:schemeClr val="accent1"/>
+          </a:fillRef>
+          <a:effectRef idx="2">
+            <a:schemeClr val="accent1"/>
+          </a:effectRef>
+          <a:fontRef idx="minor">
+            <a:schemeClr val="lt1"/>
+          </a:fontRef>
+        </p:style>
+        <p:txBody>
+          <a:bodyPr rtlCol="0" anchor="ctr"/>
+          <a:lstStyle/>
+          <a:p>
+            <a:pPr algn="ctr"/>
+          </a:p>
+        </p:txBody>
+      </p:sp>
+      <p:sp>
+        <p:nvSpPr>
+          <p:cNvPr id="11" name="Rounded Rectangle 10"/>
+          <p:cNvSpPr/>
+          <p:nvPr/>
+        </p:nvSpPr>
+        <p:spPr>
+          <a:xfrm>
+            <a:off x="4944618" y="2230389"/>
+            <a:ext cx="420624" cy="183626"/>
+          </a:xfrm>
+          <a:prstGeom prst="roundRect">
+            <a:avLst>
+              <a:gd name="adj" fmla="val 12000"/>
+            </a:avLst>
+          </a:prstGeom>
+          <a:solidFill>
+            <a:srgbClr val="F4B4BD"/>
+          </a:solidFill>
+          <a:ln>
+            <a:noFill/>
+          </a:ln>
+          <a:effectLst/>
+        </p:spPr>
+        <p:style>
+          <a:lnRef idx="1">
+            <a:schemeClr val="accent1"/>
+          </a:lnRef>
+          <a:fillRef idx="3">
+            <a:schemeClr val="accent1"/>
+          </a:fillRef>
+          <a:effectRef idx="2">
+            <a:schemeClr val="accent1"/>
+          </a:effectRef>
+          <a:fontRef idx="minor">
+            <a:schemeClr val="lt1"/>
+          </a:fontRef>
+        </p:style>
+        <p:txBody>
+          <a:bodyPr rtlCol="0" anchor="ctr"/>
+          <a:lstStyle/>
+          <a:p>
+            <a:pPr algn="ctr"/>
+          </a:p>
+        </p:txBody>
+      </p:sp>
+      <p:sp>
+        <p:nvSpPr>
+          <p:cNvPr id="12" name="Rounded Rectangle 11"/>
+          <p:cNvSpPr/>
+          <p:nvPr/>
+        </p:nvSpPr>
+        <p:spPr>
+          <a:xfrm>
+            <a:off x="5790438" y="1974077"/>
+            <a:ext cx="420624" cy="439938"/>
+          </a:xfrm>
+          <a:prstGeom prst="roundRect">
+            <a:avLst>
+              <a:gd name="adj" fmla="val 12000"/>
+            </a:avLst>
+          </a:prstGeom>
+          <a:solidFill>
+            <a:srgbClr val="F4B4BD"/>
+          </a:solidFill>
+          <a:ln>
+            <a:noFill/>
+          </a:ln>
+          <a:effectLst/>
+        </p:spPr>
+        <p:style>
+          <a:lnRef idx="1">
+            <a:schemeClr val="accent1"/>
+          </a:lnRef>
+          <a:fillRef idx="3">
+            <a:schemeClr val="accent1"/>
+          </a:fillRef>
+          <a:effectRef idx="2">
+            <a:schemeClr val="accent1"/>
+          </a:effectRef>
+          <a:fontRef idx="minor">
+            <a:schemeClr val="lt1"/>
+          </a:fontRef>
+        </p:style>
+        <p:txBody>
+          <a:bodyPr rtlCol="0" anchor="ctr"/>
+          <a:lstStyle/>
+          <a:p>
+            <a:pPr algn="ctr"/>
+          </a:p>
+        </p:txBody>
+      </p:sp>
+      <p:sp>
+        <p:nvSpPr>
+          <p:cNvPr id="13" name="Rounded Rectangle 12"/>
+          <p:cNvSpPr/>
+          <p:nvPr/>
+        </p:nvSpPr>
+        <p:spPr>
+          <a:xfrm>
+            <a:off x="6636258" y="1664207"/>
+            <a:ext cx="420624" cy="749808"/>
+          </a:xfrm>
+          <a:prstGeom prst="roundRect">
+            <a:avLst>
+              <a:gd name="adj" fmla="val 12000"/>
             </a:avLst>
           </a:prstGeom>
           <a:solidFill>
@@ -5276,14 +5527,60 @@
       </p:sp>
       <p:sp>
         <p:nvSpPr>
-          <p:cNvPr id="9" name="TextBox 8"/>
+          <p:cNvPr id="14" name="TextBox 13"/>
           <p:cNvSpPr txBox="1"/>
           <p:nvPr/>
         </p:nvSpPr>
         <p:spPr>
           <a:xfrm>
-            <a:off x="868680" y="1527048"/>
-            <a:ext cx="566928" cy="548640"/>
+            <a:off x="6179058" y="1408175"/>
+            <a:ext cx="1335024" cy="237744"/>
+          </a:xfrm>
+          <a:prstGeom prst="rect">
+            <a:avLst/>
+          </a:prstGeom>
+          <a:noFill/>
+        </p:spPr>
+        <p:txBody>
+          <a:bodyPr wrap="square" anchor="t" lIns="0" rIns="0" tIns="0" bIns="0">
+            <a:spAutoFit/>
+          </a:bodyPr>
+          <a:lstStyle/>
+          <a:p>
+            <a:pPr algn="ctr">
+              <a:lnSpc>
+                <a:spcPct val="106000"/>
+              </a:lnSpc>
+              <a:spcBef>
+                <a:spcPts val="0"/>
+              </a:spcBef>
+              <a:spcAft>
+                <a:spcPts val="400"/>
+              </a:spcAft>
+            </a:pPr>
+            <a:r>
+              <a:rPr sz="1000" b="1">
+                <a:solidFill>
+                  <a:srgbClr val="E60012"/>
+                </a:solidFill>
+                <a:latin typeface="Consolas"/>
+                <a:ea typeface="Consolas"/>
+              </a:rPr>
+              <a:t>約2,000億ドル</a:t>
+            </a:r>
+          </a:p>
+        </p:txBody>
+      </p:sp>
+      <p:sp>
+        <p:nvSpPr>
+          <p:cNvPr id="15" name="TextBox 14"/>
+          <p:cNvSpPr txBox="1"/>
+          <p:nvPr/>
+        </p:nvSpPr>
+        <p:spPr>
+          <a:xfrm>
+            <a:off x="7635240" y="1517904"/>
+            <a:ext cx="2286000" cy="658368"/>
           </a:xfrm>
           <a:prstGeom prst="rect">
             <a:avLst/>
@@ -5296,7 +5593,7 @@
           </a:bodyPr>
           <a:lstStyle/>
           <a:p>
-            <a:pPr algn="ctr">
+            <a:pPr algn="l">
               <a:lnSpc>
                 <a:spcPct val="106000"/>
               </a:lnSpc>
@@ -5308,28 +5605,28 @@
               </a:spcAft>
             </a:pPr>
             <a:r>
-              <a:rPr sz="900" b="1">
-                <a:solidFill>
-                  <a:srgbClr val="FFFFFF"/>
-                </a:solidFill>
-                <a:latin typeface="Consolas"/>
-                <a:ea typeface="Consolas"/>
-              </a:rPr>
-              <a:t>／年</a:t>
-            </a:r>
-          </a:p>
-        </p:txBody>
-      </p:sp>
-      <p:sp>
-        <p:nvSpPr>
-          <p:cNvPr id="10" name="TextBox 9"/>
+              <a:rPr sz="3300" b="1">
+                <a:solidFill>
+                  <a:srgbClr val="E60012"/>
+                </a:solidFill>
+                <a:latin typeface="Noto Sans JP"/>
+                <a:ea typeface="Noto Sans JP"/>
+              </a:rPr>
+              <a:t>約13倍</a:t>
+            </a:r>
+          </a:p>
+        </p:txBody>
+      </p:sp>
+      <p:sp>
+        <p:nvSpPr>
+          <p:cNvPr id="16" name="TextBox 15"/>
           <p:cNvSpPr txBox="1"/>
           <p:nvPr/>
         </p:nvSpPr>
         <p:spPr>
           <a:xfrm>
-            <a:off x="1600200" y="1472184"/>
-            <a:ext cx="3017520" cy="713232"/>
+            <a:off x="9921240" y="1627632"/>
+            <a:ext cx="1463040" cy="822960"/>
           </a:xfrm>
           <a:prstGeom prst="rect">
             <a:avLst/>
@@ -5344,176 +5641,61 @@
           <a:p>
             <a:pPr algn="l">
               <a:lnSpc>
-                <a:spcPct val="106000"/>
-              </a:lnSpc>
-              <a:spcBef>
-                <a:spcPts val="0"/>
-              </a:spcBef>
-              <a:spcAft>
-                <a:spcPts val="400"/>
-              </a:spcAft>
-            </a:pPr>
-            <a:r>
-              <a:rPr sz="3400" b="1">
-                <a:solidFill>
-                  <a:srgbClr val="E60012"/>
+                <a:spcPct val="112000"/>
+              </a:lnSpc>
+              <a:spcBef>
+                <a:spcPts val="0"/>
+              </a:spcBef>
+              <a:spcAft>
+                <a:spcPts val="200"/>
+              </a:spcAft>
+            </a:pPr>
+            <a:r>
+              <a:rPr sz="950" b="1">
+                <a:solidFill>
+                  <a:srgbClr val="3C4148"/>
                 </a:solidFill>
                 <a:latin typeface="Noto Sans JP"/>
                 <a:ea typeface="Noto Sans JP"/>
               </a:rPr>
-              <a:t>110兆円</a:t>
-            </a:r>
-          </a:p>
-        </p:txBody>
-      </p:sp>
-      <p:sp>
-        <p:nvSpPr>
-          <p:cNvPr id="11" name="TextBox 10"/>
-          <p:cNvSpPr txBox="1"/>
-          <p:nvPr/>
-        </p:nvSpPr>
-        <p:spPr>
-          <a:xfrm>
-            <a:off x="1627632" y="2167128"/>
-            <a:ext cx="3017520" cy="219456"/>
-          </a:xfrm>
-          <a:prstGeom prst="rect">
-            <a:avLst/>
-          </a:prstGeom>
-          <a:noFill/>
-        </p:spPr>
-        <p:txBody>
-          <a:bodyPr wrap="square" anchor="t" lIns="0" rIns="0" tIns="0" bIns="0">
-            <a:spAutoFit/>
-          </a:bodyPr>
-          <a:lstStyle/>
+              <a:t>3年（FY23→FY26）</a:t>
+            </a:r>
+          </a:p>
           <a:p>
             <a:pPr algn="l">
               <a:lnSpc>
-                <a:spcPct val="106000"/>
-              </a:lnSpc>
-              <a:spcBef>
-                <a:spcPts val="0"/>
-              </a:spcBef>
-              <a:spcAft>
-                <a:spcPts val="400"/>
-              </a:spcAft>
-            </a:pPr>
-            <a:r>
-              <a:rPr sz="950" b="1">
+                <a:spcPct val="112000"/>
+              </a:lnSpc>
+              <a:spcBef>
+                <a:spcPts val="0"/>
+              </a:spcBef>
+              <a:spcAft>
+                <a:spcPts val="200"/>
+              </a:spcAft>
+            </a:pPr>
+            <a:r>
+              <a:rPr sz="800" b="0">
                 <a:solidFill>
                   <a:srgbClr val="8A9098"/>
                 </a:solidFill>
                 <a:latin typeface="Consolas"/>
                 <a:ea typeface="Consolas"/>
               </a:rPr>
-              <a:t>Big Tech 4社のAI投資（'26）</a:t>
-            </a:r>
-          </a:p>
-        </p:txBody>
-      </p:sp>
-      <p:sp>
-        <p:nvSpPr>
-          <p:cNvPr id="12" name="TextBox 11"/>
-          <p:cNvSpPr txBox="1"/>
-          <p:nvPr/>
-        </p:nvSpPr>
-        <p:spPr>
-          <a:xfrm>
-            <a:off x="4754880" y="1472184"/>
-            <a:ext cx="457200" cy="859536"/>
-          </a:xfrm>
-          <a:prstGeom prst="rect">
-            <a:avLst/>
-          </a:prstGeom>
-          <a:noFill/>
-        </p:spPr>
-        <p:txBody>
-          <a:bodyPr wrap="square" anchor="ctr" lIns="0" rIns="0" tIns="0" bIns="0">
-            <a:spAutoFit/>
-          </a:bodyPr>
-          <a:lstStyle/>
-          <a:p>
-            <a:pPr algn="ctr">
-              <a:lnSpc>
-                <a:spcPct val="106000"/>
-              </a:lnSpc>
-              <a:spcBef>
-                <a:spcPts val="0"/>
-              </a:spcBef>
-              <a:spcAft>
-                <a:spcPts val="400"/>
-              </a:spcAft>
-            </a:pPr>
-            <a:r>
-              <a:rPr sz="2200" b="1">
-                <a:solidFill>
-                  <a:srgbClr val="454B54"/>
-                </a:solidFill>
-                <a:latin typeface="Consolas"/>
-                <a:ea typeface="Consolas"/>
-              </a:rPr>
-              <a:t>≒</a:t>
-            </a:r>
-          </a:p>
-        </p:txBody>
-      </p:sp>
-      <p:sp>
-        <p:nvSpPr>
-          <p:cNvPr id="13" name="TextBox 12"/>
-          <p:cNvSpPr txBox="1"/>
-          <p:nvPr/>
-        </p:nvSpPr>
-        <p:spPr>
-          <a:xfrm>
-            <a:off x="5349240" y="1417320"/>
-            <a:ext cx="5989320" cy="987551"/>
-          </a:xfrm>
-          <a:prstGeom prst="rect">
-            <a:avLst/>
-          </a:prstGeom>
-          <a:noFill/>
-        </p:spPr>
-        <p:txBody>
-          <a:bodyPr wrap="square" anchor="ctr" lIns="0" rIns="0" tIns="0" bIns="0">
-            <a:spAutoFit/>
-          </a:bodyPr>
-          <a:lstStyle/>
-          <a:p>
-            <a:pPr algn="l">
-              <a:lnSpc>
-                <a:spcPct val="118000"/>
-              </a:lnSpc>
-              <a:spcBef>
-                <a:spcPts val="0"/>
-              </a:spcBef>
-              <a:spcAft>
-                <a:spcPts val="400"/>
-              </a:spcAft>
-            </a:pPr>
-            <a:r>
-              <a:rPr sz="1500" b="1">
-                <a:solidFill>
-                  <a:srgbClr val="1A1D21"/>
-                </a:solidFill>
-                <a:latin typeface="Noto Sans JP"/>
-                <a:ea typeface="Noto Sans JP"/>
-              </a:rPr>
-              <a:t>日本の国家予算（115兆円）まるごと1年分。それを“毎年”、たった4社が。</a:t>
-            </a:r>
-          </a:p>
-        </p:txBody>
-      </p:sp>
-      <p:sp>
-        <p:nvSpPr>
-          <p:cNvPr id="14" name="Rounded Rectangle 13"/>
+              <a:t>NVIDIA IR</a:t>
+            </a:r>
+          </a:p>
+        </p:txBody>
+      </p:sp>
+      <p:sp>
+        <p:nvSpPr>
+          <p:cNvPr id="17" name="Rounded Rectangle 16"/>
           <p:cNvSpPr/>
           <p:nvPr/>
         </p:nvSpPr>
         <p:spPr>
           <a:xfrm>
-            <a:off x="777240" y="2459736"/>
-            <a:ext cx="10634472" cy="987551"/>
+            <a:off x="777240" y="2670048"/>
+            <a:ext cx="10634472" cy="1225295"/>
           </a:xfrm>
           <a:prstGeom prst="roundRect">
             <a:avLst>
@@ -5552,18 +5734,269 @@
       </p:sp>
       <p:sp>
         <p:nvSpPr>
-          <p:cNvPr id="15" name="Rounded Rectangle 14"/>
+          <p:cNvPr id="18" name="TextBox 17"/>
+          <p:cNvSpPr txBox="1"/>
+          <p:nvPr/>
+        </p:nvSpPr>
+        <p:spPr>
+          <a:xfrm>
+            <a:off x="960120" y="2852928"/>
+            <a:ext cx="2788920" cy="868680"/>
+          </a:xfrm>
+          <a:prstGeom prst="rect">
+            <a:avLst/>
+          </a:prstGeom>
+          <a:noFill/>
+        </p:spPr>
+        <p:txBody>
+          <a:bodyPr wrap="square" anchor="t" lIns="0" rIns="0" tIns="0" bIns="0">
+            <a:spAutoFit/>
+          </a:bodyPr>
+          <a:lstStyle/>
+          <a:p>
+            <a:pPr algn="l">
+              <a:lnSpc>
+                <a:spcPct val="112000"/>
+              </a:lnSpc>
+              <a:spcBef>
+                <a:spcPts val="0"/>
+              </a:spcBef>
+              <a:spcAft>
+                <a:spcPts val="300"/>
+              </a:spcAft>
+            </a:pPr>
+            <a:r>
+              <a:rPr sz="1500" b="1">
+                <a:solidFill>
+                  <a:srgbClr val="1A1D21"/>
+                </a:solidFill>
+                <a:latin typeface="Noto Sans JP"/>
+                <a:ea typeface="Noto Sans JP"/>
+              </a:rPr>
+              <a:t>AIインフラ投資</a:t>
+            </a:r>
+          </a:p>
+          <a:p>
+            <a:pPr algn="l">
+              <a:lnSpc>
+                <a:spcPct val="112000"/>
+              </a:lnSpc>
+              <a:spcBef>
+                <a:spcPts val="0"/>
+              </a:spcBef>
+              <a:spcAft>
+                <a:spcPts val="300"/>
+              </a:spcAft>
+            </a:pPr>
+            <a:r>
+              <a:rPr sz="950" b="1">
+                <a:solidFill>
+                  <a:srgbClr val="8A9098"/>
+                </a:solidFill>
+                <a:latin typeface="Consolas"/>
+                <a:ea typeface="Consolas"/>
+              </a:rPr>
+              <a:t>Big Tech 4社の設備投資（年間）</a:t>
+            </a:r>
+          </a:p>
+        </p:txBody>
+      </p:sp>
+      <p:sp>
+        <p:nvSpPr>
+          <p:cNvPr id="19" name="Rectangle 18"/>
           <p:cNvSpPr/>
           <p:nvPr/>
         </p:nvSpPr>
         <p:spPr>
           <a:xfrm>
-            <a:off x="868680" y="2569464"/>
-            <a:ext cx="566928" cy="548640"/>
+            <a:off x="3886200" y="3712463"/>
+            <a:ext cx="3383280" cy="12801"/>
+          </a:xfrm>
+          <a:prstGeom prst="rect">
+            <a:avLst/>
+          </a:prstGeom>
+          <a:solidFill>
+            <a:srgbClr val="E2E4E9"/>
+          </a:solidFill>
+          <a:ln>
+            <a:noFill/>
+          </a:ln>
+          <a:effectLst/>
+        </p:spPr>
+        <p:style>
+          <a:lnRef idx="1">
+            <a:schemeClr val="accent1"/>
+          </a:lnRef>
+          <a:fillRef idx="3">
+            <a:schemeClr val="accent1"/>
+          </a:fillRef>
+          <a:effectRef idx="2">
+            <a:schemeClr val="accent1"/>
+          </a:effectRef>
+          <a:fontRef idx="minor">
+            <a:schemeClr val="lt1"/>
+          </a:fontRef>
+        </p:style>
+        <p:txBody>
+          <a:bodyPr rtlCol="0" anchor="ctr"/>
+          <a:lstStyle/>
+          <a:p>
+            <a:pPr algn="ctr"/>
+          </a:p>
+        </p:txBody>
+      </p:sp>
+      <p:sp>
+        <p:nvSpPr>
+          <p:cNvPr id="20" name="Rounded Rectangle 19"/>
+          <p:cNvSpPr/>
+          <p:nvPr/>
+        </p:nvSpPr>
+        <p:spPr>
+          <a:xfrm>
+            <a:off x="4098798" y="3526304"/>
+            <a:ext cx="420624" cy="186159"/>
           </a:xfrm>
           <a:prstGeom prst="roundRect">
             <a:avLst>
-              <a:gd name="adj" fmla="val 14000"/>
+              <a:gd name="adj" fmla="val 12000"/>
+            </a:avLst>
+          </a:prstGeom>
+          <a:solidFill>
+            <a:srgbClr val="F4B4BD"/>
+          </a:solidFill>
+          <a:ln>
+            <a:noFill/>
+          </a:ln>
+          <a:effectLst/>
+        </p:spPr>
+        <p:style>
+          <a:lnRef idx="1">
+            <a:schemeClr val="accent1"/>
+          </a:lnRef>
+          <a:fillRef idx="3">
+            <a:schemeClr val="accent1"/>
+          </a:fillRef>
+          <a:effectRef idx="2">
+            <a:schemeClr val="accent1"/>
+          </a:effectRef>
+          <a:fontRef idx="minor">
+            <a:schemeClr val="lt1"/>
+          </a:fontRef>
+        </p:style>
+        <p:txBody>
+          <a:bodyPr rtlCol="0" anchor="ctr"/>
+          <a:lstStyle/>
+          <a:p>
+            <a:pPr algn="ctr"/>
+          </a:p>
+        </p:txBody>
+      </p:sp>
+      <p:sp>
+        <p:nvSpPr>
+          <p:cNvPr id="21" name="Rounded Rectangle 20"/>
+          <p:cNvSpPr/>
+          <p:nvPr/>
+        </p:nvSpPr>
+        <p:spPr>
+          <a:xfrm>
+            <a:off x="4944618" y="3474593"/>
+            <a:ext cx="420624" cy="237870"/>
+          </a:xfrm>
+          <a:prstGeom prst="roundRect">
+            <a:avLst>
+              <a:gd name="adj" fmla="val 12000"/>
+            </a:avLst>
+          </a:prstGeom>
+          <a:solidFill>
+            <a:srgbClr val="F4B4BD"/>
+          </a:solidFill>
+          <a:ln>
+            <a:noFill/>
+          </a:ln>
+          <a:effectLst/>
+        </p:spPr>
+        <p:style>
+          <a:lnRef idx="1">
+            <a:schemeClr val="accent1"/>
+          </a:lnRef>
+          <a:fillRef idx="3">
+            <a:schemeClr val="accent1"/>
+          </a:fillRef>
+          <a:effectRef idx="2">
+            <a:schemeClr val="accent1"/>
+          </a:effectRef>
+          <a:fontRef idx="minor">
+            <a:schemeClr val="lt1"/>
+          </a:fontRef>
+        </p:style>
+        <p:txBody>
+          <a:bodyPr rtlCol="0" anchor="ctr"/>
+          <a:lstStyle/>
+          <a:p>
+            <a:pPr algn="ctr"/>
+          </a:p>
+        </p:txBody>
+      </p:sp>
+      <p:sp>
+        <p:nvSpPr>
+          <p:cNvPr id="22" name="Rounded Rectangle 21"/>
+          <p:cNvSpPr/>
+          <p:nvPr/>
+        </p:nvSpPr>
+        <p:spPr>
+          <a:xfrm>
+            <a:off x="5790438" y="3288434"/>
+            <a:ext cx="420624" cy="424029"/>
+          </a:xfrm>
+          <a:prstGeom prst="roundRect">
+            <a:avLst>
+              <a:gd name="adj" fmla="val 12000"/>
+            </a:avLst>
+          </a:prstGeom>
+          <a:solidFill>
+            <a:srgbClr val="F4B4BD"/>
+          </a:solidFill>
+          <a:ln>
+            <a:noFill/>
+          </a:ln>
+          <a:effectLst/>
+        </p:spPr>
+        <p:style>
+          <a:lnRef idx="1">
+            <a:schemeClr val="accent1"/>
+          </a:lnRef>
+          <a:fillRef idx="3">
+            <a:schemeClr val="accent1"/>
+          </a:fillRef>
+          <a:effectRef idx="2">
+            <a:schemeClr val="accent1"/>
+          </a:effectRef>
+          <a:fontRef idx="minor">
+            <a:schemeClr val="lt1"/>
+          </a:fontRef>
+        </p:style>
+        <p:txBody>
+          <a:bodyPr rtlCol="0" anchor="ctr"/>
+          <a:lstStyle/>
+          <a:p>
+            <a:pPr algn="ctr"/>
+          </a:p>
+        </p:txBody>
+      </p:sp>
+      <p:sp>
+        <p:nvSpPr>
+          <p:cNvPr id="23" name="Rounded Rectangle 22"/>
+          <p:cNvSpPr/>
+          <p:nvPr/>
+        </p:nvSpPr>
+        <p:spPr>
+          <a:xfrm>
+            <a:off x="6636258" y="2962656"/>
+            <a:ext cx="420624" cy="749808"/>
+          </a:xfrm>
+          <a:prstGeom prst="roundRect">
+            <a:avLst>
+              <a:gd name="adj" fmla="val 12000"/>
             </a:avLst>
           </a:prstGeom>
           <a:solidFill>
@@ -5598,14 +6031,60 @@
       </p:sp>
       <p:sp>
         <p:nvSpPr>
-          <p:cNvPr id="16" name="TextBox 15"/>
+          <p:cNvPr id="24" name="TextBox 23"/>
           <p:cNvSpPr txBox="1"/>
           <p:nvPr/>
         </p:nvSpPr>
         <p:spPr>
           <a:xfrm>
-            <a:off x="868680" y="2569464"/>
-            <a:ext cx="566928" cy="548640"/>
+            <a:off x="6179058" y="2706624"/>
+            <a:ext cx="1335024" cy="237744"/>
+          </a:xfrm>
+          <a:prstGeom prst="rect">
+            <a:avLst/>
+          </a:prstGeom>
+          <a:noFill/>
+        </p:spPr>
+        <p:txBody>
+          <a:bodyPr wrap="square" anchor="t" lIns="0" rIns="0" tIns="0" bIns="0">
+            <a:spAutoFit/>
+          </a:bodyPr>
+          <a:lstStyle/>
+          <a:p>
+            <a:pPr algn="ctr">
+              <a:lnSpc>
+                <a:spcPct val="106000"/>
+              </a:lnSpc>
+              <a:spcBef>
+                <a:spcPts val="0"/>
+              </a:spcBef>
+              <a:spcAft>
+                <a:spcPts val="400"/>
+              </a:spcAft>
+            </a:pPr>
+            <a:r>
+              <a:rPr sz="1000" b="1">
+                <a:solidFill>
+                  <a:srgbClr val="E60012"/>
+                </a:solidFill>
+                <a:latin typeface="Consolas"/>
+                <a:ea typeface="Consolas"/>
+              </a:rPr>
+              <a:t>7,250億ドル</a:t>
+            </a:r>
+          </a:p>
+        </p:txBody>
+      </p:sp>
+      <p:sp>
+        <p:nvSpPr>
+          <p:cNvPr id="25" name="TextBox 24"/>
+          <p:cNvSpPr txBox="1"/>
+          <p:nvPr/>
+        </p:nvSpPr>
+        <p:spPr>
+          <a:xfrm>
+            <a:off x="7635240" y="2816352"/>
+            <a:ext cx="2286000" cy="658368"/>
           </a:xfrm>
           <a:prstGeom prst="rect">
             <a:avLst/>
@@ -5618,7 +6097,7 @@
           </a:bodyPr>
           <a:lstStyle/>
           <a:p>
-            <a:pPr algn="ctr">
+            <a:pPr algn="l">
               <a:lnSpc>
                 <a:spcPct val="106000"/>
               </a:lnSpc>
@@ -5630,28 +6109,28 @@
               </a:spcAft>
             </a:pPr>
             <a:r>
-              <a:rPr sz="900" b="1">
-                <a:solidFill>
-                  <a:srgbClr val="FFFFFF"/>
-                </a:solidFill>
-                <a:latin typeface="Consolas"/>
-                <a:ea typeface="Consolas"/>
-              </a:rPr>
-              <a:t>累計</a:t>
-            </a:r>
-          </a:p>
-        </p:txBody>
-      </p:sp>
-      <p:sp>
-        <p:nvSpPr>
-          <p:cNvPr id="17" name="TextBox 16"/>
+              <a:rPr sz="3300" b="1">
+                <a:solidFill>
+                  <a:srgbClr val="E60012"/>
+                </a:solidFill>
+                <a:latin typeface="Noto Sans JP"/>
+                <a:ea typeface="Noto Sans JP"/>
+              </a:rPr>
+              <a:t>約4倍</a:t>
+            </a:r>
+          </a:p>
+        </p:txBody>
+      </p:sp>
+      <p:sp>
+        <p:nvSpPr>
+          <p:cNvPr id="26" name="TextBox 25"/>
           <p:cNvSpPr txBox="1"/>
           <p:nvPr/>
         </p:nvSpPr>
         <p:spPr>
           <a:xfrm>
-            <a:off x="1600200" y="2514600"/>
-            <a:ext cx="3017520" cy="713232"/>
+            <a:off x="9921240" y="2926080"/>
+            <a:ext cx="1463040" cy="822960"/>
           </a:xfrm>
           <a:prstGeom prst="rect">
             <a:avLst/>
@@ -5666,38 +6145,61 @@
           <a:p>
             <a:pPr algn="l">
               <a:lnSpc>
-                <a:spcPct val="106000"/>
-              </a:lnSpc>
-              <a:spcBef>
-                <a:spcPts val="0"/>
-              </a:spcBef>
-              <a:spcAft>
-                <a:spcPts val="400"/>
-              </a:spcAft>
-            </a:pPr>
-            <a:r>
-              <a:rPr sz="3400" b="1">
-                <a:solidFill>
-                  <a:srgbClr val="E60012"/>
+                <a:spcPct val="112000"/>
+              </a:lnSpc>
+              <a:spcBef>
+                <a:spcPts val="0"/>
+              </a:spcBef>
+              <a:spcAft>
+                <a:spcPts val="200"/>
+              </a:spcAft>
+            </a:pPr>
+            <a:r>
+              <a:rPr sz="950" b="1">
+                <a:solidFill>
+                  <a:srgbClr val="3C4148"/>
                 </a:solidFill>
                 <a:latin typeface="Noto Sans JP"/>
                 <a:ea typeface="Noto Sans JP"/>
               </a:rPr>
-              <a:t>780兆円</a:t>
-            </a:r>
-          </a:p>
-        </p:txBody>
-      </p:sp>
-      <p:sp>
-        <p:nvSpPr>
-          <p:cNvPr id="18" name="TextBox 17"/>
+              <a:t>3年（'23→'26）</a:t>
+            </a:r>
+          </a:p>
+          <a:p>
+            <a:pPr algn="l">
+              <a:lnSpc>
+                <a:spcPct val="112000"/>
+              </a:lnSpc>
+              <a:spcBef>
+                <a:spcPts val="0"/>
+              </a:spcBef>
+              <a:spcAft>
+                <a:spcPts val="200"/>
+              </a:spcAft>
+            </a:pPr>
+            <a:r>
+              <a:rPr sz="800" b="0">
+                <a:solidFill>
+                  <a:srgbClr val="8A9098"/>
+                </a:solidFill>
+                <a:latin typeface="Consolas"/>
+                <a:ea typeface="Consolas"/>
+              </a:rPr>
+              <a:t>各社IR/報道</a:t>
+            </a:r>
+          </a:p>
+        </p:txBody>
+      </p:sp>
+      <p:sp>
+        <p:nvSpPr>
+          <p:cNvPr id="27" name="TextBox 26"/>
           <p:cNvSpPr txBox="1"/>
           <p:nvPr/>
         </p:nvSpPr>
         <p:spPr>
           <a:xfrm>
-            <a:off x="1627632" y="3209544"/>
-            <a:ext cx="3017520" cy="219456"/>
+            <a:off x="960120" y="4151376"/>
+            <a:ext cx="2788920" cy="868680"/>
           </a:xfrm>
           <a:prstGeom prst="rect">
             <a:avLst/>
@@ -5712,13 +6214,36 @@
           <a:p>
             <a:pPr algn="l">
               <a:lnSpc>
-                <a:spcPct val="106000"/>
-              </a:lnSpc>
-              <a:spcBef>
-                <a:spcPts val="0"/>
-              </a:spcBef>
-              <a:spcAft>
-                <a:spcPts val="400"/>
+                <a:spcPct val="112000"/>
+              </a:lnSpc>
+              <a:spcBef>
+                <a:spcPts val="0"/>
+              </a:spcBef>
+              <a:spcAft>
+                <a:spcPts val="300"/>
+              </a:spcAft>
+            </a:pPr>
+            <a:r>
+              <a:rPr sz="1500" b="1">
+                <a:solidFill>
+                  <a:srgbClr val="1A1D21"/>
+                </a:solidFill>
+                <a:latin typeface="Noto Sans JP"/>
+                <a:ea typeface="Noto Sans JP"/>
+              </a:rPr>
+              <a:t>国内DC建設投資</a:t>
+            </a:r>
+          </a:p>
+          <a:p>
+            <a:pPr algn="l">
+              <a:lnSpc>
+                <a:spcPct val="112000"/>
+              </a:lnSpc>
+              <a:spcBef>
+                <a:spcPts val="0"/>
+              </a:spcBef>
+              <a:spcAft>
+                <a:spcPts val="300"/>
               </a:spcAft>
             </a:pPr>
             <a:r>
@@ -5729,117 +6254,161 @@
                 <a:latin typeface="Consolas"/>
                 <a:ea typeface="Consolas"/>
               </a:rPr>
-              <a:t>世界のAI DC投資（〜'30・McKinsey）</a:t>
-            </a:r>
-          </a:p>
-        </p:txBody>
-      </p:sp>
-      <p:sp>
-        <p:nvSpPr>
-          <p:cNvPr id="19" name="TextBox 18"/>
-          <p:cNvSpPr txBox="1"/>
-          <p:nvPr/>
-        </p:nvSpPr>
-        <p:spPr>
-          <a:xfrm>
-            <a:off x="4754880" y="2514600"/>
-            <a:ext cx="457200" cy="859536"/>
-          </a:xfrm>
-          <a:prstGeom prst="rect">
-            <a:avLst/>
-          </a:prstGeom>
-          <a:noFill/>
-        </p:spPr>
-        <p:txBody>
-          <a:bodyPr wrap="square" anchor="ctr" lIns="0" rIns="0" tIns="0" bIns="0">
-            <a:spAutoFit/>
-          </a:bodyPr>
-          <a:lstStyle/>
-          <a:p>
-            <a:pPr algn="ctr">
-              <a:lnSpc>
-                <a:spcPct val="106000"/>
-              </a:lnSpc>
-              <a:spcBef>
-                <a:spcPts val="0"/>
-              </a:spcBef>
-              <a:spcAft>
-                <a:spcPts val="400"/>
-              </a:spcAft>
-            </a:pPr>
-            <a:r>
-              <a:rPr sz="2200" b="1">
-                <a:solidFill>
-                  <a:srgbClr val="454B54"/>
-                </a:solidFill>
-                <a:latin typeface="Consolas"/>
-                <a:ea typeface="Consolas"/>
-              </a:rPr>
-              <a:t>≒</a:t>
-            </a:r>
-          </a:p>
-        </p:txBody>
-      </p:sp>
-      <p:sp>
-        <p:nvSpPr>
-          <p:cNvPr id="20" name="TextBox 19"/>
-          <p:cNvSpPr txBox="1"/>
-          <p:nvPr/>
-        </p:nvSpPr>
-        <p:spPr>
-          <a:xfrm>
-            <a:off x="5349240" y="2459736"/>
-            <a:ext cx="5989320" cy="987551"/>
-          </a:xfrm>
-          <a:prstGeom prst="rect">
-            <a:avLst/>
-          </a:prstGeom>
-          <a:noFill/>
-        </p:spPr>
-        <p:txBody>
-          <a:bodyPr wrap="square" anchor="ctr" lIns="0" rIns="0" tIns="0" bIns="0">
-            <a:spAutoFit/>
-          </a:bodyPr>
-          <a:lstStyle/>
-          <a:p>
-            <a:pPr algn="l">
-              <a:lnSpc>
-                <a:spcPct val="118000"/>
-              </a:lnSpc>
-              <a:spcBef>
-                <a:spcPts val="0"/>
-              </a:spcBef>
-              <a:spcAft>
-                <a:spcPts val="400"/>
-              </a:spcAft>
-            </a:pPr>
-            <a:r>
-              <a:rPr sz="1500" b="1">
-                <a:solidFill>
-                  <a:srgbClr val="1A1D21"/>
-                </a:solidFill>
-                <a:latin typeface="Noto Sans JP"/>
-                <a:ea typeface="Noto Sans JP"/>
-              </a:rPr>
-              <a:t>日本のGDP（約600兆円）を超える規模。国家予算に換算すると 約7年分。</a:t>
-            </a:r>
-          </a:p>
-        </p:txBody>
-      </p:sp>
-      <p:sp>
-        <p:nvSpPr>
-          <p:cNvPr id="21" name="Rounded Rectangle 20"/>
+              <a:t>日本のデータセンター建設（年間）</a:t>
+            </a:r>
+          </a:p>
+        </p:txBody>
+      </p:sp>
+      <p:sp>
+        <p:nvSpPr>
+          <p:cNvPr id="28" name="Rectangle 27"/>
           <p:cNvSpPr/>
           <p:nvPr/>
         </p:nvSpPr>
         <p:spPr>
           <a:xfrm>
-            <a:off x="868680" y="3611880"/>
-            <a:ext cx="566928" cy="548640"/>
+            <a:off x="3886200" y="5010912"/>
+            <a:ext cx="3383280" cy="12801"/>
+          </a:xfrm>
+          <a:prstGeom prst="rect">
+            <a:avLst/>
+          </a:prstGeom>
+          <a:solidFill>
+            <a:srgbClr val="E2E4E9"/>
+          </a:solidFill>
+          <a:ln>
+            <a:noFill/>
+          </a:ln>
+          <a:effectLst/>
+        </p:spPr>
+        <p:style>
+          <a:lnRef idx="1">
+            <a:schemeClr val="accent1"/>
+          </a:lnRef>
+          <a:fillRef idx="3">
+            <a:schemeClr val="accent1"/>
+          </a:fillRef>
+          <a:effectRef idx="2">
+            <a:schemeClr val="accent1"/>
+          </a:effectRef>
+          <a:fontRef idx="minor">
+            <a:schemeClr val="lt1"/>
+          </a:fontRef>
+        </p:style>
+        <p:txBody>
+          <a:bodyPr rtlCol="0" anchor="ctr"/>
+          <a:lstStyle/>
+          <a:p>
+            <a:pPr algn="ctr"/>
+          </a:p>
+        </p:txBody>
+      </p:sp>
+      <p:sp>
+        <p:nvSpPr>
+          <p:cNvPr id="29" name="Rounded Rectangle 28"/>
+          <p:cNvSpPr/>
+          <p:nvPr/>
+        </p:nvSpPr>
+        <p:spPr>
+          <a:xfrm>
+            <a:off x="4239768" y="4780828"/>
+            <a:ext cx="420624" cy="230083"/>
           </a:xfrm>
           <a:prstGeom prst="roundRect">
             <a:avLst>
-              <a:gd name="adj" fmla="val 14000"/>
+              <a:gd name="adj" fmla="val 12000"/>
+            </a:avLst>
+          </a:prstGeom>
+          <a:solidFill>
+            <a:srgbClr val="F4B4BD"/>
+          </a:solidFill>
+          <a:ln>
+            <a:noFill/>
+          </a:ln>
+          <a:effectLst/>
+        </p:spPr>
+        <p:style>
+          <a:lnRef idx="1">
+            <a:schemeClr val="accent1"/>
+          </a:lnRef>
+          <a:fillRef idx="3">
+            <a:schemeClr val="accent1"/>
+          </a:fillRef>
+          <a:effectRef idx="2">
+            <a:schemeClr val="accent1"/>
+          </a:effectRef>
+          <a:fontRef idx="minor">
+            <a:schemeClr val="lt1"/>
+          </a:fontRef>
+        </p:style>
+        <p:txBody>
+          <a:bodyPr rtlCol="0" anchor="ctr"/>
+          <a:lstStyle/>
+          <a:p>
+            <a:pPr algn="ctr"/>
+          </a:p>
+        </p:txBody>
+      </p:sp>
+      <p:sp>
+        <p:nvSpPr>
+          <p:cNvPr id="30" name="Rounded Rectangle 29"/>
+          <p:cNvSpPr/>
+          <p:nvPr/>
+        </p:nvSpPr>
+        <p:spPr>
+          <a:xfrm>
+            <a:off x="5367528" y="4582450"/>
+            <a:ext cx="420624" cy="428461"/>
+          </a:xfrm>
+          <a:prstGeom prst="roundRect">
+            <a:avLst>
+              <a:gd name="adj" fmla="val 12000"/>
+            </a:avLst>
+          </a:prstGeom>
+          <a:solidFill>
+            <a:srgbClr val="F4B4BD"/>
+          </a:solidFill>
+          <a:ln>
+            <a:noFill/>
+          </a:ln>
+          <a:effectLst/>
+        </p:spPr>
+        <p:style>
+          <a:lnRef idx="1">
+            <a:schemeClr val="accent1"/>
+          </a:lnRef>
+          <a:fillRef idx="3">
+            <a:schemeClr val="accent1"/>
+          </a:fillRef>
+          <a:effectRef idx="2">
+            <a:schemeClr val="accent1"/>
+          </a:effectRef>
+          <a:fontRef idx="minor">
+            <a:schemeClr val="lt1"/>
+          </a:fontRef>
+        </p:style>
+        <p:txBody>
+          <a:bodyPr rtlCol="0" anchor="ctr"/>
+          <a:lstStyle/>
+          <a:p>
+            <a:pPr algn="ctr"/>
+          </a:p>
+        </p:txBody>
+      </p:sp>
+      <p:sp>
+        <p:nvSpPr>
+          <p:cNvPr id="31" name="Rounded Rectangle 30"/>
+          <p:cNvSpPr/>
+          <p:nvPr/>
+        </p:nvSpPr>
+        <p:spPr>
+          <a:xfrm>
+            <a:off x="6495288" y="4261103"/>
+            <a:ext cx="420624" cy="749808"/>
+          </a:xfrm>
+          <a:prstGeom prst="roundRect">
+            <a:avLst>
+              <a:gd name="adj" fmla="val 12000"/>
             </a:avLst>
           </a:prstGeom>
           <a:solidFill>
@@ -5874,14 +6443,60 @@
       </p:sp>
       <p:sp>
         <p:nvSpPr>
-          <p:cNvPr id="22" name="TextBox 21"/>
+          <p:cNvPr id="32" name="TextBox 31"/>
           <p:cNvSpPr txBox="1"/>
           <p:nvPr/>
         </p:nvSpPr>
         <p:spPr>
           <a:xfrm>
-            <a:off x="868680" y="3611880"/>
-            <a:ext cx="566928" cy="548640"/>
+            <a:off x="6038088" y="4005071"/>
+            <a:ext cx="1335024" cy="237744"/>
+          </a:xfrm>
+          <a:prstGeom prst="rect">
+            <a:avLst/>
+          </a:prstGeom>
+          <a:noFill/>
+        </p:spPr>
+        <p:txBody>
+          <a:bodyPr wrap="square" anchor="t" lIns="0" rIns="0" tIns="0" bIns="0">
+            <a:spAutoFit/>
+          </a:bodyPr>
+          <a:lstStyle/>
+          <a:p>
+            <a:pPr algn="ctr">
+              <a:lnSpc>
+                <a:spcPct val="106000"/>
+              </a:lnSpc>
+              <a:spcBef>
+                <a:spcPts val="0"/>
+              </a:spcBef>
+              <a:spcAft>
+                <a:spcPts val="400"/>
+              </a:spcAft>
+            </a:pPr>
+            <a:r>
+              <a:rPr sz="1000" b="1">
+                <a:solidFill>
+                  <a:srgbClr val="E60012"/>
+                </a:solidFill>
+                <a:latin typeface="Consolas"/>
+                <a:ea typeface="Consolas"/>
+              </a:rPr>
+              <a:t>1兆円超</a:t>
+            </a:r>
+          </a:p>
+        </p:txBody>
+      </p:sp>
+      <p:sp>
+        <p:nvSpPr>
+          <p:cNvPr id="33" name="TextBox 32"/>
+          <p:cNvSpPr txBox="1"/>
+          <p:nvPr/>
+        </p:nvSpPr>
+        <p:spPr>
+          <a:xfrm>
+            <a:off x="7635240" y="4114800"/>
+            <a:ext cx="2286000" cy="658368"/>
           </a:xfrm>
           <a:prstGeom prst="rect">
             <a:avLst/>
@@ -5894,7 +6509,7 @@
           </a:bodyPr>
           <a:lstStyle/>
           <a:p>
-            <a:pPr algn="ctr">
+            <a:pPr algn="l">
               <a:lnSpc>
                 <a:spcPct val="106000"/>
               </a:lnSpc>
@@ -5906,28 +6521,28 @@
               </a:spcAft>
             </a:pPr>
             <a:r>
-              <a:rPr sz="900" b="1">
-                <a:solidFill>
-                  <a:srgbClr val="FFFFFF"/>
-                </a:solidFill>
-                <a:latin typeface="Consolas"/>
-                <a:ea typeface="Consolas"/>
-              </a:rPr>
-              <a:t>対日</a:t>
-            </a:r>
-          </a:p>
-        </p:txBody>
-      </p:sp>
-      <p:sp>
-        <p:nvSpPr>
-          <p:cNvPr id="23" name="TextBox 22"/>
+              <a:rPr sz="3300" b="1">
+                <a:solidFill>
+                  <a:srgbClr val="E60012"/>
+                </a:solidFill>
+                <a:latin typeface="Noto Sans JP"/>
+                <a:ea typeface="Noto Sans JP"/>
+              </a:rPr>
+              <a:t>約3倍</a:t>
+            </a:r>
+          </a:p>
+        </p:txBody>
+      </p:sp>
+      <p:sp>
+        <p:nvSpPr>
+          <p:cNvPr id="34" name="TextBox 33"/>
           <p:cNvSpPr txBox="1"/>
           <p:nvPr/>
         </p:nvSpPr>
         <p:spPr>
           <a:xfrm>
-            <a:off x="1600200" y="3557016"/>
-            <a:ext cx="3017520" cy="713232"/>
+            <a:off x="9921240" y="4224528"/>
+            <a:ext cx="1463040" cy="822960"/>
           </a:xfrm>
           <a:prstGeom prst="rect">
             <a:avLst/>
@@ -5942,226 +6557,65 @@
           <a:p>
             <a:pPr algn="l">
               <a:lnSpc>
-                <a:spcPct val="106000"/>
-              </a:lnSpc>
-              <a:spcBef>
-                <a:spcPts val="0"/>
-              </a:spcBef>
-              <a:spcAft>
-                <a:spcPts val="400"/>
-              </a:spcAft>
-            </a:pPr>
-            <a:r>
-              <a:rPr sz="3400" b="1">
-                <a:solidFill>
-                  <a:srgbClr val="E60012"/>
+                <a:spcPct val="112000"/>
+              </a:lnSpc>
+              <a:spcBef>
+                <a:spcPts val="0"/>
+              </a:spcBef>
+              <a:spcAft>
+                <a:spcPts val="200"/>
+              </a:spcAft>
+            </a:pPr>
+            <a:r>
+              <a:rPr sz="950" b="1">
+                <a:solidFill>
+                  <a:srgbClr val="3C4148"/>
                 </a:solidFill>
                 <a:latin typeface="Noto Sans JP"/>
                 <a:ea typeface="Noto Sans JP"/>
               </a:rPr>
-              <a:t>4.8兆円</a:t>
-            </a:r>
-          </a:p>
-        </p:txBody>
-      </p:sp>
-      <p:sp>
-        <p:nvSpPr>
-          <p:cNvPr id="24" name="TextBox 23"/>
-          <p:cNvSpPr txBox="1"/>
-          <p:nvPr/>
-        </p:nvSpPr>
-        <p:spPr>
-          <a:xfrm>
-            <a:off x="1627632" y="4251960"/>
-            <a:ext cx="3017520" cy="219456"/>
-          </a:xfrm>
-          <a:prstGeom prst="rect">
-            <a:avLst/>
-          </a:prstGeom>
-          <a:noFill/>
-        </p:spPr>
-        <p:txBody>
-          <a:bodyPr wrap="square" anchor="t" lIns="0" rIns="0" tIns="0" bIns="0">
-            <a:spAutoFit/>
-          </a:bodyPr>
-          <a:lstStyle/>
+              <a:t>5年（'23→'28）</a:t>
+            </a:r>
+          </a:p>
           <a:p>
             <a:pPr algn="l">
               <a:lnSpc>
-                <a:spcPct val="106000"/>
-              </a:lnSpc>
-              <a:spcBef>
-                <a:spcPts val="0"/>
-              </a:spcBef>
-              <a:spcAft>
-                <a:spcPts val="400"/>
-              </a:spcAft>
-            </a:pPr>
-            <a:r>
-              <a:rPr sz="950" b="1">
+                <a:spcPct val="112000"/>
+              </a:lnSpc>
+              <a:spcBef>
+                <a:spcPts val="0"/>
+              </a:spcBef>
+              <a:spcAft>
+                <a:spcPts val="200"/>
+              </a:spcAft>
+            </a:pPr>
+            <a:r>
+              <a:rPr sz="800" b="0">
                 <a:solidFill>
                   <a:srgbClr val="8A9098"/>
                 </a:solidFill>
                 <a:latin typeface="Consolas"/>
                 <a:ea typeface="Consolas"/>
               </a:rPr>
-              <a:t>米クラウド大手の対日DC投資（〜'30）</a:t>
-            </a:r>
-          </a:p>
-        </p:txBody>
-      </p:sp>
-      <p:sp>
-        <p:nvSpPr>
-          <p:cNvPr id="25" name="TextBox 24"/>
-          <p:cNvSpPr txBox="1"/>
-          <p:nvPr/>
-        </p:nvSpPr>
-        <p:spPr>
-          <a:xfrm>
-            <a:off x="4754880" y="3557016"/>
-            <a:ext cx="457200" cy="859536"/>
-          </a:xfrm>
-          <a:prstGeom prst="rect">
-            <a:avLst/>
-          </a:prstGeom>
-          <a:noFill/>
-        </p:spPr>
-        <p:txBody>
-          <a:bodyPr wrap="square" anchor="ctr" lIns="0" rIns="0" tIns="0" bIns="0">
-            <a:spAutoFit/>
-          </a:bodyPr>
-          <a:lstStyle/>
-          <a:p>
-            <a:pPr algn="ctr">
-              <a:lnSpc>
-                <a:spcPct val="106000"/>
-              </a:lnSpc>
-              <a:spcBef>
-                <a:spcPts val="0"/>
-              </a:spcBef>
-              <a:spcAft>
-                <a:spcPts val="400"/>
-              </a:spcAft>
-            </a:pPr>
-            <a:r>
-              <a:rPr sz="2200" b="1">
-                <a:solidFill>
-                  <a:srgbClr val="454B54"/>
-                </a:solidFill>
-                <a:latin typeface="Consolas"/>
-                <a:ea typeface="Consolas"/>
-              </a:rPr>
-              <a:t>≒</a:t>
-            </a:r>
-          </a:p>
-        </p:txBody>
-      </p:sp>
-      <p:sp>
-        <p:nvSpPr>
-          <p:cNvPr id="26" name="TextBox 25"/>
-          <p:cNvSpPr txBox="1"/>
-          <p:nvPr/>
-        </p:nvSpPr>
-        <p:spPr>
-          <a:xfrm>
-            <a:off x="5349240" y="3502152"/>
-            <a:ext cx="5989320" cy="987551"/>
-          </a:xfrm>
-          <a:prstGeom prst="rect">
-            <a:avLst/>
-          </a:prstGeom>
-          <a:noFill/>
-        </p:spPr>
-        <p:txBody>
-          <a:bodyPr wrap="square" anchor="ctr" lIns="0" rIns="0" tIns="0" bIns="0">
-            <a:spAutoFit/>
-          </a:bodyPr>
-          <a:lstStyle/>
-          <a:p>
-            <a:pPr algn="l">
-              <a:lnSpc>
-                <a:spcPct val="118000"/>
-              </a:lnSpc>
-              <a:spcBef>
-                <a:spcPts val="0"/>
-              </a:spcBef>
-              <a:spcAft>
-                <a:spcPts val="400"/>
-              </a:spcAft>
-            </a:pPr>
-            <a:r>
-              <a:rPr sz="1500" b="1">
-                <a:solidFill>
-                  <a:srgbClr val="1A1D21"/>
-                </a:solidFill>
-                <a:latin typeface="Noto Sans JP"/>
-                <a:ea typeface="Noto Sans JP"/>
-              </a:rPr>
-              <a:t>大型DC（1棟 約300億円）を 150棟以上 建てられる額が、日本に落ちる。</a:t>
-            </a:r>
-          </a:p>
-        </p:txBody>
-      </p:sp>
-      <p:sp>
-        <p:nvSpPr>
-          <p:cNvPr id="27" name="Rounded Rectangle 26"/>
+              <a:t>IDC Japan</a:t>
+            </a:r>
+          </a:p>
+        </p:txBody>
+      </p:sp>
+      <p:sp>
+        <p:nvSpPr>
+          <p:cNvPr id="35" name="Rounded Rectangle 34"/>
           <p:cNvSpPr/>
           <p:nvPr/>
         </p:nvSpPr>
         <p:spPr>
           <a:xfrm>
-            <a:off x="777240" y="4544568"/>
-            <a:ext cx="10634472" cy="987551"/>
+            <a:off x="777240" y="5349240"/>
+            <a:ext cx="10634472" cy="841248"/>
           </a:xfrm>
           <a:prstGeom prst="roundRect">
             <a:avLst>
-              <a:gd name="adj" fmla="val 4000"/>
-            </a:avLst>
-          </a:prstGeom>
-          <a:solidFill>
-            <a:srgbClr val="F3F4F6"/>
-          </a:solidFill>
-          <a:ln>
-            <a:noFill/>
-          </a:ln>
-          <a:effectLst/>
-        </p:spPr>
-        <p:style>
-          <a:lnRef idx="1">
-            <a:schemeClr val="accent1"/>
-          </a:lnRef>
-          <a:fillRef idx="3">
-            <a:schemeClr val="accent1"/>
-          </a:fillRef>
-          <a:effectRef idx="2">
-            <a:schemeClr val="accent1"/>
-          </a:effectRef>
-          <a:fontRef idx="minor">
-            <a:schemeClr val="lt1"/>
-          </a:fontRef>
-        </p:style>
-        <p:txBody>
-          <a:bodyPr rtlCol="0" anchor="ctr"/>
-          <a:lstStyle/>
-          <a:p>
-            <a:pPr algn="ctr"/>
-          </a:p>
-        </p:txBody>
-      </p:sp>
-      <p:sp>
-        <p:nvSpPr>
-          <p:cNvPr id="28" name="Rounded Rectangle 27"/>
-          <p:cNvSpPr/>
-          <p:nvPr/>
-        </p:nvSpPr>
-        <p:spPr>
-          <a:xfrm>
-            <a:off x="868680" y="4654296"/>
-            <a:ext cx="566928" cy="548640"/>
-          </a:xfrm>
-          <a:prstGeom prst="roundRect">
-            <a:avLst>
-              <a:gd name="adj" fmla="val 14000"/>
+              <a:gd name="adj" fmla="val 5000"/>
             </a:avLst>
           </a:prstGeom>
           <a:solidFill>
@@ -6196,14 +6650,14 @@
       </p:sp>
       <p:sp>
         <p:nvSpPr>
-          <p:cNvPr id="29" name="TextBox 28"/>
+          <p:cNvPr id="36" name="TextBox 35"/>
           <p:cNvSpPr txBox="1"/>
           <p:nvPr/>
         </p:nvSpPr>
         <p:spPr>
           <a:xfrm>
-            <a:off x="868680" y="4654296"/>
-            <a:ext cx="566928" cy="548640"/>
+            <a:off x="1005840" y="5349240"/>
+            <a:ext cx="10241280" cy="841248"/>
           </a:xfrm>
           <a:prstGeom prst="rect">
             <a:avLst/>
@@ -6216,7 +6670,7 @@
           </a:bodyPr>
           <a:lstStyle/>
           <a:p>
-            <a:pPr algn="ctr">
+            <a:pPr algn="l">
               <a:lnSpc>
                 <a:spcPct val="106000"/>
               </a:lnSpc>
@@ -6228,300 +6682,24 @@
               </a:spcAft>
             </a:pPr>
             <a:r>
-              <a:rPr sz="900" b="1">
+              <a:rPr sz="1650" b="1">
                 <a:solidFill>
                   <a:srgbClr val="FFFFFF"/>
-                </a:solidFill>
-                <a:latin typeface="Consolas"/>
-                <a:ea typeface="Consolas"/>
-              </a:rPr>
-              <a:t>電力</a:t>
-            </a:r>
-          </a:p>
-        </p:txBody>
-      </p:sp>
-      <p:sp>
-        <p:nvSpPr>
-          <p:cNvPr id="30" name="TextBox 29"/>
-          <p:cNvSpPr txBox="1"/>
-          <p:nvPr/>
-        </p:nvSpPr>
-        <p:spPr>
-          <a:xfrm>
-            <a:off x="1600200" y="4599431"/>
-            <a:ext cx="3017520" cy="713232"/>
-          </a:xfrm>
-          <a:prstGeom prst="rect">
-            <a:avLst/>
-          </a:prstGeom>
-          <a:noFill/>
-        </p:spPr>
-        <p:txBody>
-          <a:bodyPr wrap="square" anchor="ctr" lIns="0" rIns="0" tIns="0" bIns="0">
-            <a:spAutoFit/>
-          </a:bodyPr>
-          <a:lstStyle/>
-          <a:p>
-            <a:pPr algn="l">
-              <a:lnSpc>
-                <a:spcPct val="106000"/>
-              </a:lnSpc>
-              <a:spcBef>
-                <a:spcPts val="0"/>
-              </a:spcBef>
-              <a:spcAft>
-                <a:spcPts val="400"/>
-              </a:spcAft>
-            </a:pPr>
-            <a:r>
-              <a:rPr sz="3400" b="1">
-                <a:solidFill>
-                  <a:srgbClr val="E60012"/>
                 </a:solidFill>
                 <a:latin typeface="Noto Sans JP"/>
                 <a:ea typeface="Noto Sans JP"/>
               </a:rPr>
-              <a:t>13倍</a:t>
-            </a:r>
-          </a:p>
-        </p:txBody>
-      </p:sp>
-      <p:sp>
-        <p:nvSpPr>
-          <p:cNvPr id="31" name="TextBox 30"/>
-          <p:cNvSpPr txBox="1"/>
-          <p:nvPr/>
-        </p:nvSpPr>
-        <p:spPr>
-          <a:xfrm>
-            <a:off x="1627632" y="5294376"/>
-            <a:ext cx="3017520" cy="219456"/>
-          </a:xfrm>
-          <a:prstGeom prst="rect">
-            <a:avLst/>
-          </a:prstGeom>
-          <a:noFill/>
-        </p:spPr>
-        <p:txBody>
-          <a:bodyPr wrap="square" anchor="t" lIns="0" rIns="0" tIns="0" bIns="0">
-            <a:spAutoFit/>
-          </a:bodyPr>
-          <a:lstStyle/>
-          <a:p>
-            <a:pPr algn="l">
-              <a:lnSpc>
-                <a:spcPct val="106000"/>
-              </a:lnSpc>
-              <a:spcBef>
-                <a:spcPts val="0"/>
-              </a:spcBef>
-              <a:spcAft>
-                <a:spcPts val="400"/>
-              </a:spcAft>
-            </a:pPr>
-            <a:r>
-              <a:rPr sz="950" b="1">
-                <a:solidFill>
-                  <a:srgbClr val="8A9098"/>
-                </a:solidFill>
-                <a:latin typeface="Consolas"/>
-                <a:ea typeface="Consolas"/>
-              </a:rPr>
-              <a:t>国内DC・半導体の最大電力（10年で）</a:t>
-            </a:r>
-          </a:p>
-        </p:txBody>
-      </p:sp>
-      <p:sp>
-        <p:nvSpPr>
-          <p:cNvPr id="32" name="TextBox 31"/>
-          <p:cNvSpPr txBox="1"/>
-          <p:nvPr/>
-        </p:nvSpPr>
-        <p:spPr>
-          <a:xfrm>
-            <a:off x="4754880" y="4599431"/>
-            <a:ext cx="457200" cy="859536"/>
-          </a:xfrm>
-          <a:prstGeom prst="rect">
-            <a:avLst/>
-          </a:prstGeom>
-          <a:noFill/>
-        </p:spPr>
-        <p:txBody>
-          <a:bodyPr wrap="square" anchor="ctr" lIns="0" rIns="0" tIns="0" bIns="0">
-            <a:spAutoFit/>
-          </a:bodyPr>
-          <a:lstStyle/>
-          <a:p>
-            <a:pPr algn="ctr">
-              <a:lnSpc>
-                <a:spcPct val="106000"/>
-              </a:lnSpc>
-              <a:spcBef>
-                <a:spcPts val="0"/>
-              </a:spcBef>
-              <a:spcAft>
-                <a:spcPts val="400"/>
-              </a:spcAft>
-            </a:pPr>
-            <a:r>
-              <a:rPr sz="2200" b="1">
-                <a:solidFill>
-                  <a:srgbClr val="454B54"/>
-                </a:solidFill>
-                <a:latin typeface="Consolas"/>
-                <a:ea typeface="Consolas"/>
-              </a:rPr>
-              <a:t>≒</a:t>
-            </a:r>
-          </a:p>
-        </p:txBody>
-      </p:sp>
-      <p:sp>
-        <p:nvSpPr>
-          <p:cNvPr id="33" name="TextBox 32"/>
-          <p:cNvSpPr txBox="1"/>
-          <p:nvPr/>
-        </p:nvSpPr>
-        <p:spPr>
-          <a:xfrm>
-            <a:off x="5349240" y="4544568"/>
-            <a:ext cx="5989320" cy="987551"/>
-          </a:xfrm>
-          <a:prstGeom prst="rect">
-            <a:avLst/>
-          </a:prstGeom>
-          <a:noFill/>
-        </p:spPr>
-        <p:txBody>
-          <a:bodyPr wrap="square" anchor="ctr" lIns="0" rIns="0" tIns="0" bIns="0">
-            <a:spAutoFit/>
-          </a:bodyPr>
-          <a:lstStyle/>
-          <a:p>
-            <a:pPr algn="l">
-              <a:lnSpc>
-                <a:spcPct val="118000"/>
-              </a:lnSpc>
-              <a:spcBef>
-                <a:spcPts val="0"/>
-              </a:spcBef>
-              <a:spcAft>
-                <a:spcPts val="400"/>
-              </a:spcAft>
-            </a:pPr>
-            <a:r>
-              <a:rPr sz="1500" b="1">
-                <a:solidFill>
-                  <a:srgbClr val="1A1D21"/>
+              <a:t>しかも投資のピークは2027〜2028年。</a:t>
+            </a:r>
+            <a:r>
+              <a:rPr sz="1650" b="1">
+                <a:solidFill>
+                  <a:srgbClr val="FFD2D7"/>
                 </a:solidFill>
                 <a:latin typeface="Noto Sans JP"/>
                 <a:ea typeface="Noto Sans JP"/>
               </a:rPr>
-              <a:t>56万→715万kW。増える分だけで 原発 約7基分 の新しい電気が要る（OCCTO）。</a:t>
-            </a:r>
-          </a:p>
-        </p:txBody>
-      </p:sp>
-      <p:sp>
-        <p:nvSpPr>
-          <p:cNvPr id="34" name="Rounded Rectangle 33"/>
-          <p:cNvSpPr/>
-          <p:nvPr/>
-        </p:nvSpPr>
-        <p:spPr>
-          <a:xfrm>
-            <a:off x="777240" y="5742432"/>
-            <a:ext cx="10634472" cy="548640"/>
-          </a:xfrm>
-          <a:prstGeom prst="roundRect">
-            <a:avLst>
-              <a:gd name="adj" fmla="val 5000"/>
-            </a:avLst>
-          </a:prstGeom>
-          <a:solidFill>
-            <a:srgbClr val="E60012"/>
-          </a:solidFill>
-          <a:ln>
-            <a:noFill/>
-          </a:ln>
-          <a:effectLst/>
-        </p:spPr>
-        <p:style>
-          <a:lnRef idx="1">
-            <a:schemeClr val="accent1"/>
-          </a:lnRef>
-          <a:fillRef idx="3">
-            <a:schemeClr val="accent1"/>
-          </a:fillRef>
-          <a:effectRef idx="2">
-            <a:schemeClr val="accent1"/>
-          </a:effectRef>
-          <a:fontRef idx="minor">
-            <a:schemeClr val="lt1"/>
-          </a:fontRef>
-        </p:style>
-        <p:txBody>
-          <a:bodyPr rtlCol="0" anchor="ctr"/>
-          <a:lstStyle/>
-          <a:p>
-            <a:pPr algn="ctr"/>
-          </a:p>
-        </p:txBody>
-      </p:sp>
-      <p:sp>
-        <p:nvSpPr>
-          <p:cNvPr id="35" name="TextBox 34"/>
-          <p:cNvSpPr txBox="1"/>
-          <p:nvPr/>
-        </p:nvSpPr>
-        <p:spPr>
-          <a:xfrm>
-            <a:off x="777240" y="5742432"/>
-            <a:ext cx="10634472" cy="548640"/>
-          </a:xfrm>
-          <a:prstGeom prst="rect">
-            <a:avLst/>
-          </a:prstGeom>
-          <a:noFill/>
-        </p:spPr>
-        <p:txBody>
-          <a:bodyPr wrap="square" anchor="ctr" lIns="0" rIns="0" tIns="0" bIns="0">
-            <a:spAutoFit/>
-          </a:bodyPr>
-          <a:lstStyle/>
-          <a:p>
-            <a:pPr algn="ctr">
-              <a:lnSpc>
-                <a:spcPct val="106000"/>
-              </a:lnSpc>
-              <a:spcBef>
-                <a:spcPts val="0"/>
-              </a:spcBef>
-              <a:spcAft>
-                <a:spcPts val="400"/>
-              </a:spcAft>
-            </a:pPr>
-            <a:r>
-              <a:rPr sz="1400" b="1">
-                <a:solidFill>
-                  <a:srgbClr val="FFCFD4"/>
-                </a:solidFill>
-                <a:latin typeface="Noto Sans JP"/>
-                <a:ea typeface="Noto Sans JP"/>
-              </a:rPr>
-              <a:t>要するに——</a:t>
-            </a:r>
-            <a:r>
-              <a:rPr sz="1550" b="1">
-                <a:solidFill>
-                  <a:srgbClr val="FFFFFF"/>
-                </a:solidFill>
-                <a:latin typeface="Noto Sans JP"/>
-                <a:ea typeface="Noto Sans JP"/>
-              </a:rPr>
-              <a:t>国家予算級のお金が、日本の“建設と設備の現場”に流れ込んでくる。</a:t>
+              <a:t>この波は、まだ“序盤”だ。</a:t>
             </a:r>
           </a:p>
         </p:txBody>
@@ -6721,7 +6899,7 @@
                 <a:latin typeface="Consolas"/>
                 <a:ea typeface="Consolas"/>
               </a:rPr>
-              <a:t>DC建設費の中身：建設（ゼネコン）と、電気・機械設備（製造業）の比率</a:t>
+              <a:t>DC建設費の中身：建設 vs 設備、そして 材（機器）vs 工（作業）</a:t>
             </a:r>
           </a:p>
         </p:txBody>
@@ -6767,7 +6945,7 @@
                 <a:latin typeface="Noto Sans JP"/>
                 <a:ea typeface="Noto Sans JP"/>
               </a:rPr>
-              <a:t>データセンターは“建物”より“設備”。お金の3/4は製造業側へ。</a:t>
+              <a:t>お金の3/4は設備（製造業）。しかも効くのは機器代ではなく“工”。</a:t>
             </a:r>
           </a:p>
         </p:txBody>
@@ -6824,8 +7002,8 @@
         </p:nvSpPr>
         <p:spPr>
           <a:xfrm>
-            <a:off x="777240" y="1783080"/>
-            <a:ext cx="2658618" cy="1143000"/>
+            <a:off x="777240" y="1755648"/>
+            <a:ext cx="2658618" cy="914400"/>
           </a:xfrm>
           <a:prstGeom prst="rect">
             <a:avLst/>
@@ -6868,8 +7046,8 @@
         </p:nvSpPr>
         <p:spPr>
           <a:xfrm>
-            <a:off x="3435858" y="1783080"/>
-            <a:ext cx="5317236" cy="1143000"/>
+            <a:off x="3435858" y="1755648"/>
+            <a:ext cx="5317236" cy="914400"/>
           </a:xfrm>
           <a:prstGeom prst="rect">
             <a:avLst/>
@@ -6912,8 +7090,8 @@
         </p:nvSpPr>
         <p:spPr>
           <a:xfrm>
-            <a:off x="8753094" y="1783080"/>
-            <a:ext cx="2658618" cy="1143000"/>
+            <a:off x="8753094" y="1755648"/>
+            <a:ext cx="2658618" cy="914400"/>
           </a:xfrm>
           <a:prstGeom prst="rect">
             <a:avLst/>
@@ -6956,8 +7134,8 @@
         </p:nvSpPr>
         <p:spPr>
           <a:xfrm>
-            <a:off x="3424885" y="1783080"/>
-            <a:ext cx="21945" cy="1143000"/>
+            <a:off x="3424885" y="1755648"/>
+            <a:ext cx="21945" cy="914400"/>
           </a:xfrm>
           <a:prstGeom prst="rect">
             <a:avLst/>
@@ -7000,8 +7178,8 @@
         </p:nvSpPr>
         <p:spPr>
           <a:xfrm>
-            <a:off x="8742121" y="1783080"/>
-            <a:ext cx="21945" cy="1143000"/>
+            <a:off x="8742121" y="1755648"/>
+            <a:ext cx="21945" cy="914400"/>
           </a:xfrm>
           <a:prstGeom prst="rect">
             <a:avLst/>
@@ -7044,8 +7222,8 @@
         </p:nvSpPr>
         <p:spPr>
           <a:xfrm>
-            <a:off x="777240" y="1783080"/>
-            <a:ext cx="2658618" cy="1143000"/>
+            <a:off x="777240" y="1755648"/>
+            <a:ext cx="2658618" cy="914400"/>
           </a:xfrm>
           <a:prstGeom prst="rect">
             <a:avLst/>
@@ -7070,7 +7248,7 @@
               </a:spcAft>
             </a:pPr>
             <a:r>
-              <a:rPr sz="1100" b="1">
+              <a:rPr sz="1050" b="1">
                 <a:solidFill>
                   <a:srgbClr val="FFFFFF"/>
                 </a:solidFill>
@@ -7093,7 +7271,7 @@
               </a:spcAft>
             </a:pPr>
             <a:r>
-              <a:rPr sz="2000" b="1">
+              <a:rPr sz="1800" b="1">
                 <a:solidFill>
                   <a:srgbClr val="FFFFFF"/>
                 </a:solidFill>
@@ -7113,8 +7291,8 @@
         </p:nvSpPr>
         <p:spPr>
           <a:xfrm>
-            <a:off x="3435858" y="1783080"/>
-            <a:ext cx="5317236" cy="1143000"/>
+            <a:off x="3435858" y="1755648"/>
+            <a:ext cx="5317236" cy="914400"/>
           </a:xfrm>
           <a:prstGeom prst="rect">
             <a:avLst/>
@@ -7139,7 +7317,7 @@
               </a:spcAft>
             </a:pPr>
             <a:r>
-              <a:rPr sz="1150" b="1">
+              <a:rPr sz="1100" b="1">
                 <a:solidFill>
                   <a:srgbClr val="FFFFFF"/>
                 </a:solidFill>
@@ -7162,7 +7340,7 @@
               </a:spcAft>
             </a:pPr>
             <a:r>
-              <a:rPr sz="2200" b="1">
+              <a:rPr sz="2000" b="1">
                 <a:solidFill>
                   <a:srgbClr val="FFFFFF"/>
                 </a:solidFill>
@@ -7182,8 +7360,8 @@
         </p:nvSpPr>
         <p:spPr>
           <a:xfrm>
-            <a:off x="8753094" y="1783080"/>
-            <a:ext cx="2658618" cy="1143000"/>
+            <a:off x="8753094" y="1755648"/>
+            <a:ext cx="2658618" cy="914400"/>
           </a:xfrm>
           <a:prstGeom prst="rect">
             <a:avLst/>
@@ -7215,7 +7393,7 @@
                 <a:latin typeface="Noto Sans JP"/>
                 <a:ea typeface="Noto Sans JP"/>
               </a:rPr>
-              <a:t>空調・機械ほか</a:t>
+              <a:t>空調・機械</a:t>
             </a:r>
           </a:p>
           <a:p>
@@ -7231,7 +7409,7 @@
               </a:spcAft>
             </a:pPr>
             <a:r>
-              <a:rPr sz="2000" b="1">
+              <a:rPr sz="1800" b="1">
                 <a:solidFill>
                   <a:srgbClr val="FFFFFF"/>
                 </a:solidFill>
@@ -7251,8 +7429,8 @@
         </p:nvSpPr>
         <p:spPr>
           <a:xfrm>
-            <a:off x="777240" y="1472184"/>
-            <a:ext cx="2658618" cy="237744"/>
+            <a:off x="777240" y="1463039"/>
+            <a:ext cx="2658618" cy="228600"/>
           </a:xfrm>
           <a:prstGeom prst="roundRect">
             <a:avLst>
@@ -7299,8 +7477,8 @@
         </p:nvSpPr>
         <p:spPr>
           <a:xfrm>
-            <a:off x="777240" y="1472184"/>
-            <a:ext cx="2658618" cy="237744"/>
+            <a:off x="777240" y="1463039"/>
+            <a:ext cx="2658618" cy="228600"/>
           </a:xfrm>
           <a:prstGeom prst="rect">
             <a:avLst/>
@@ -7325,7 +7503,7 @@
               </a:spcAft>
             </a:pPr>
             <a:r>
-              <a:rPr sz="1000" b="1">
+              <a:rPr sz="950" b="1">
                 <a:solidFill>
                   <a:srgbClr val="454B54"/>
                 </a:solidFill>
@@ -7345,8 +7523,8 @@
         </p:nvSpPr>
         <p:spPr>
           <a:xfrm>
-            <a:off x="3435858" y="1472184"/>
-            <a:ext cx="7975854" cy="237744"/>
+            <a:off x="3435858" y="1463039"/>
+            <a:ext cx="7975854" cy="228600"/>
           </a:xfrm>
           <a:prstGeom prst="roundRect">
             <a:avLst>
@@ -7393,8 +7571,8 @@
         </p:nvSpPr>
         <p:spPr>
           <a:xfrm>
-            <a:off x="3435858" y="1472184"/>
-            <a:ext cx="7975854" cy="237744"/>
+            <a:off x="3435858" y="1463039"/>
+            <a:ext cx="7975854" cy="228600"/>
           </a:xfrm>
           <a:prstGeom prst="rect">
             <a:avLst/>
@@ -7419,76 +7597,28 @@
               </a:spcAft>
             </a:pPr>
             <a:r>
-              <a:rPr sz="1050" b="1">
+              <a:rPr sz="1000" b="1">
                 <a:solidFill>
                   <a:srgbClr val="E60012"/>
                 </a:solidFill>
                 <a:latin typeface="Consolas"/>
                 <a:ea typeface="Consolas"/>
               </a:rPr>
-              <a:t>設備＝製造業（電気・機械メーカー＋設備工事）  約75%</a:t>
-            </a:r>
-          </a:p>
-        </p:txBody>
-      </p:sp>
-      <p:sp>
-        <p:nvSpPr>
-          <p:cNvPr id="20" name="Rounded Rectangle 19"/>
-          <p:cNvSpPr/>
-          <p:nvPr/>
-        </p:nvSpPr>
-        <p:spPr>
-          <a:xfrm>
-            <a:off x="777240" y="3246120"/>
-            <a:ext cx="5120640" cy="1234440"/>
-          </a:xfrm>
-          <a:prstGeom prst="roundRect">
-            <a:avLst>
-              <a:gd name="adj" fmla="val 5000"/>
-            </a:avLst>
-          </a:prstGeom>
-          <a:solidFill>
-            <a:srgbClr val="FFFFFF"/>
-          </a:solidFill>
-          <a:ln w="12700">
-            <a:solidFill>
-              <a:srgbClr val="E2E4E9"/>
-            </a:solidFill>
-          </a:ln>
-          <a:effectLst/>
-        </p:spPr>
-        <p:style>
-          <a:lnRef idx="1">
-            <a:schemeClr val="accent1"/>
-          </a:lnRef>
-          <a:fillRef idx="3">
-            <a:schemeClr val="accent1"/>
-          </a:fillRef>
-          <a:effectRef idx="2">
-            <a:schemeClr val="accent1"/>
-          </a:effectRef>
-          <a:fontRef idx="minor">
-            <a:schemeClr val="lt1"/>
-          </a:fontRef>
-        </p:style>
-        <p:txBody>
-          <a:bodyPr rtlCol="0" anchor="ctr"/>
-          <a:lstStyle/>
-          <a:p>
-            <a:pPr algn="ctr"/>
-          </a:p>
-        </p:txBody>
-      </p:sp>
-      <p:sp>
-        <p:nvSpPr>
-          <p:cNvPr id="21" name="TextBox 20"/>
+              <a:t>設備＝製造業（電気・機械）  約75%</a:t>
+            </a:r>
+          </a:p>
+        </p:txBody>
+      </p:sp>
+      <p:sp>
+        <p:nvSpPr>
+          <p:cNvPr id="20" name="TextBox 19"/>
           <p:cNvSpPr txBox="1"/>
           <p:nvPr/>
         </p:nvSpPr>
         <p:spPr>
           <a:xfrm>
-            <a:off x="1005840" y="3401568"/>
-            <a:ext cx="4754880" cy="274320"/>
+            <a:off x="777240" y="2852928"/>
+            <a:ext cx="10634472" cy="274320"/>
           </a:xfrm>
           <a:prstGeom prst="rect">
             <a:avLst/>
@@ -7513,125 +7643,71 @@
               </a:spcAft>
             </a:pPr>
             <a:r>
-              <a:rPr sz="1050" b="1">
-                <a:solidFill>
-                  <a:srgbClr val="E60012"/>
-                </a:solidFill>
-                <a:latin typeface="Consolas"/>
-                <a:ea typeface="Consolas"/>
-              </a:rPr>
-              <a:t>設備工事の比率は、用途で全く違う</a:t>
-            </a:r>
-          </a:p>
-        </p:txBody>
-      </p:sp>
-      <p:sp>
-        <p:nvSpPr>
-          <p:cNvPr id="22" name="TextBox 21"/>
-          <p:cNvSpPr txBox="1"/>
-          <p:nvPr/>
-        </p:nvSpPr>
-        <p:spPr>
-          <a:xfrm>
-            <a:off x="1005840" y="3657599"/>
-            <a:ext cx="1965960" cy="237744"/>
-          </a:xfrm>
-          <a:prstGeom prst="rect">
-            <a:avLst/>
-          </a:prstGeom>
-          <a:noFill/>
-        </p:spPr>
-        <p:txBody>
-          <a:bodyPr wrap="square" anchor="ctr" lIns="0" rIns="0" tIns="0" bIns="0">
-            <a:spAutoFit/>
-          </a:bodyPr>
-          <a:lstStyle/>
-          <a:p>
-            <a:pPr algn="l">
-              <a:lnSpc>
-                <a:spcPct val="106000"/>
-              </a:lnSpc>
-              <a:spcBef>
-                <a:spcPts val="0"/>
-              </a:spcBef>
-              <a:spcAft>
-                <a:spcPts val="400"/>
-              </a:spcAft>
-            </a:pPr>
-            <a:r>
-              <a:rPr sz="1000" b="0">
+              <a:rPr sz="1100" b="1">
                 <a:solidFill>
                   <a:srgbClr val="3C4148"/>
                 </a:solidFill>
                 <a:latin typeface="Noto Sans JP"/>
                 <a:ea typeface="Noto Sans JP"/>
               </a:rPr>
-              <a:t>オフィス</a:t>
-            </a:r>
-          </a:p>
-        </p:txBody>
-      </p:sp>
-      <p:sp>
-        <p:nvSpPr>
-          <p:cNvPr id="23" name="Rounded Rectangle 22"/>
+              <a:t>↓ その「設備 約75%」の中身を、</a:t>
+            </a:r>
+            <a:r>
+              <a:rPr sz="1100" b="1">
+                <a:solidFill>
+                  <a:srgbClr val="8A9098"/>
+                </a:solidFill>
+                <a:latin typeface="Noto Sans JP"/>
+                <a:ea typeface="Noto Sans JP"/>
+              </a:rPr>
+              <a:t>材（機器・材料）</a:t>
+            </a:r>
+            <a:r>
+              <a:rPr sz="1100" b="0">
+                <a:solidFill>
+                  <a:srgbClr val="3C4148"/>
+                </a:solidFill>
+                <a:latin typeface="Noto Sans JP"/>
+                <a:ea typeface="Noto Sans JP"/>
+              </a:rPr>
+              <a:t> と </a:t>
+            </a:r>
+            <a:r>
+              <a:rPr sz="1100" b="1">
+                <a:solidFill>
+                  <a:srgbClr val="E60012"/>
+                </a:solidFill>
+                <a:latin typeface="Noto Sans JP"/>
+                <a:ea typeface="Noto Sans JP"/>
+              </a:rPr>
+              <a:t>工（据付・施工＝人が動く）</a:t>
+            </a:r>
+            <a:r>
+              <a:rPr sz="1100" b="1">
+                <a:solidFill>
+                  <a:srgbClr val="3C4148"/>
+                </a:solidFill>
+                <a:latin typeface="Noto Sans JP"/>
+                <a:ea typeface="Noto Sans JP"/>
+              </a:rPr>
+              <a:t> に分けると</a:t>
+            </a:r>
+          </a:p>
+        </p:txBody>
+      </p:sp>
+      <p:sp>
+        <p:nvSpPr>
+          <p:cNvPr id="21" name="Rectangle 20"/>
           <p:cNvSpPr/>
           <p:nvPr/>
         </p:nvSpPr>
         <p:spPr>
           <a:xfrm>
-            <a:off x="3063240" y="3694175"/>
-            <a:ext cx="2606040" cy="164592"/>
-          </a:xfrm>
-          <a:prstGeom prst="roundRect">
-            <a:avLst>
-              <a:gd name="adj" fmla="val 30000"/>
-            </a:avLst>
-          </a:prstGeom>
-          <a:solidFill>
-            <a:srgbClr val="F3F4F6"/>
-          </a:solidFill>
-          <a:ln>
-            <a:noFill/>
-          </a:ln>
-          <a:effectLst/>
-        </p:spPr>
-        <p:style>
-          <a:lnRef idx="1">
-            <a:schemeClr val="accent1"/>
-          </a:lnRef>
-          <a:fillRef idx="3">
-            <a:schemeClr val="accent1"/>
-          </a:fillRef>
-          <a:effectRef idx="2">
-            <a:schemeClr val="accent1"/>
-          </a:effectRef>
-          <a:fontRef idx="minor">
-            <a:schemeClr val="lt1"/>
-          </a:fontRef>
-        </p:style>
-        <p:txBody>
-          <a:bodyPr rtlCol="0" anchor="ctr"/>
-          <a:lstStyle/>
-          <a:p>
-            <a:pPr algn="ctr"/>
-          </a:p>
-        </p:txBody>
-      </p:sp>
-      <p:sp>
-        <p:nvSpPr>
-          <p:cNvPr id="24" name="Rounded Rectangle 23"/>
-          <p:cNvSpPr/>
-          <p:nvPr/>
-        </p:nvSpPr>
-        <p:spPr>
-          <a:xfrm>
-            <a:off x="3063240" y="3694175"/>
-            <a:ext cx="781812" cy="164592"/>
-          </a:xfrm>
-          <a:prstGeom prst="roundRect">
-            <a:avLst>
-              <a:gd name="adj" fmla="val 30000"/>
-            </a:avLst>
+            <a:off x="777240" y="3200400"/>
+            <a:ext cx="6380683" cy="841248"/>
+          </a:xfrm>
+          <a:prstGeom prst="rect">
+            <a:avLst/>
           </a:prstGeom>
           <a:solidFill>
             <a:srgbClr val="8A9098"/>
@@ -7665,341 +7741,17 @@
       </p:sp>
       <p:sp>
         <p:nvSpPr>
-          <p:cNvPr id="25" name="TextBox 24"/>
-          <p:cNvSpPr txBox="1"/>
-          <p:nvPr/>
-        </p:nvSpPr>
-        <p:spPr>
-          <a:xfrm>
-            <a:off x="5724144" y="3657599"/>
-            <a:ext cx="640080" cy="237744"/>
-          </a:xfrm>
-          <a:prstGeom prst="rect">
-            <a:avLst/>
-          </a:prstGeom>
-          <a:noFill/>
-        </p:spPr>
-        <p:txBody>
-          <a:bodyPr wrap="square" anchor="ctr" lIns="0" rIns="0" tIns="0" bIns="0">
-            <a:spAutoFit/>
-          </a:bodyPr>
-          <a:lstStyle/>
-          <a:p>
-            <a:pPr algn="l">
-              <a:lnSpc>
-                <a:spcPct val="106000"/>
-              </a:lnSpc>
-              <a:spcBef>
-                <a:spcPts val="0"/>
-              </a:spcBef>
-              <a:spcAft>
-                <a:spcPts val="400"/>
-              </a:spcAft>
-            </a:pPr>
-            <a:r>
-              <a:rPr sz="1000" b="0">
-                <a:solidFill>
-                  <a:srgbClr val="8A9098"/>
-                </a:solidFill>
-                <a:latin typeface="Consolas"/>
-                <a:ea typeface="Consolas"/>
-              </a:rPr>
-              <a:t>30%</a:t>
-            </a:r>
-          </a:p>
-        </p:txBody>
-      </p:sp>
-      <p:sp>
-        <p:nvSpPr>
-          <p:cNvPr id="26" name="TextBox 25"/>
-          <p:cNvSpPr txBox="1"/>
-          <p:nvPr/>
-        </p:nvSpPr>
-        <p:spPr>
-          <a:xfrm>
-            <a:off x="1005840" y="3913632"/>
-            <a:ext cx="1965960" cy="237744"/>
-          </a:xfrm>
-          <a:prstGeom prst="rect">
-            <a:avLst/>
-          </a:prstGeom>
-          <a:noFill/>
-        </p:spPr>
-        <p:txBody>
-          <a:bodyPr wrap="square" anchor="ctr" lIns="0" rIns="0" tIns="0" bIns="0">
-            <a:spAutoFit/>
-          </a:bodyPr>
-          <a:lstStyle/>
-          <a:p>
-            <a:pPr algn="l">
-              <a:lnSpc>
-                <a:spcPct val="106000"/>
-              </a:lnSpc>
-              <a:spcBef>
-                <a:spcPts val="0"/>
-              </a:spcBef>
-              <a:spcAft>
-                <a:spcPts val="400"/>
-              </a:spcAft>
-            </a:pPr>
-            <a:r>
-              <a:rPr sz="1000" b="0">
-                <a:solidFill>
-                  <a:srgbClr val="3C4148"/>
-                </a:solidFill>
-                <a:latin typeface="Noto Sans JP"/>
-                <a:ea typeface="Noto Sans JP"/>
-              </a:rPr>
-              <a:t>マンション</a:t>
-            </a:r>
-          </a:p>
-        </p:txBody>
-      </p:sp>
-      <p:sp>
-        <p:nvSpPr>
-          <p:cNvPr id="27" name="Rounded Rectangle 26"/>
+          <p:cNvPr id="22" name="Rectangle 21"/>
           <p:cNvSpPr/>
           <p:nvPr/>
         </p:nvSpPr>
         <p:spPr>
           <a:xfrm>
-            <a:off x="3063240" y="3950207"/>
-            <a:ext cx="2606040" cy="164592"/>
-          </a:xfrm>
-          <a:prstGeom prst="roundRect">
-            <a:avLst>
-              <a:gd name="adj" fmla="val 30000"/>
-            </a:avLst>
-          </a:prstGeom>
-          <a:solidFill>
-            <a:srgbClr val="F3F4F6"/>
-          </a:solidFill>
-          <a:ln>
-            <a:noFill/>
-          </a:ln>
-          <a:effectLst/>
-        </p:spPr>
-        <p:style>
-          <a:lnRef idx="1">
-            <a:schemeClr val="accent1"/>
-          </a:lnRef>
-          <a:fillRef idx="3">
-            <a:schemeClr val="accent1"/>
-          </a:fillRef>
-          <a:effectRef idx="2">
-            <a:schemeClr val="accent1"/>
-          </a:effectRef>
-          <a:fontRef idx="minor">
-            <a:schemeClr val="lt1"/>
-          </a:fontRef>
-        </p:style>
-        <p:txBody>
-          <a:bodyPr rtlCol="0" anchor="ctr"/>
-          <a:lstStyle/>
-          <a:p>
-            <a:pPr algn="ctr"/>
-          </a:p>
-        </p:txBody>
-      </p:sp>
-      <p:sp>
-        <p:nvSpPr>
-          <p:cNvPr id="28" name="Rounded Rectangle 27"/>
-          <p:cNvSpPr/>
-          <p:nvPr/>
-        </p:nvSpPr>
-        <p:spPr>
-          <a:xfrm>
-            <a:off x="3063240" y="3950207"/>
-            <a:ext cx="651510" cy="164592"/>
-          </a:xfrm>
-          <a:prstGeom prst="roundRect">
-            <a:avLst>
-              <a:gd name="adj" fmla="val 30000"/>
-            </a:avLst>
-          </a:prstGeom>
-          <a:solidFill>
-            <a:srgbClr val="8A9098"/>
-          </a:solidFill>
-          <a:ln>
-            <a:noFill/>
-          </a:ln>
-          <a:effectLst/>
-        </p:spPr>
-        <p:style>
-          <a:lnRef idx="1">
-            <a:schemeClr val="accent1"/>
-          </a:lnRef>
-          <a:fillRef idx="3">
-            <a:schemeClr val="accent1"/>
-          </a:fillRef>
-          <a:effectRef idx="2">
-            <a:schemeClr val="accent1"/>
-          </a:effectRef>
-          <a:fontRef idx="minor">
-            <a:schemeClr val="lt1"/>
-          </a:fontRef>
-        </p:style>
-        <p:txBody>
-          <a:bodyPr rtlCol="0" anchor="ctr"/>
-          <a:lstStyle/>
-          <a:p>
-            <a:pPr algn="ctr"/>
-          </a:p>
-        </p:txBody>
-      </p:sp>
-      <p:sp>
-        <p:nvSpPr>
-          <p:cNvPr id="29" name="TextBox 28"/>
-          <p:cNvSpPr txBox="1"/>
-          <p:nvPr/>
-        </p:nvSpPr>
-        <p:spPr>
-          <a:xfrm>
-            <a:off x="5724144" y="3913632"/>
-            <a:ext cx="640080" cy="237744"/>
-          </a:xfrm>
-          <a:prstGeom prst="rect">
-            <a:avLst/>
-          </a:prstGeom>
-          <a:noFill/>
-        </p:spPr>
-        <p:txBody>
-          <a:bodyPr wrap="square" anchor="ctr" lIns="0" rIns="0" tIns="0" bIns="0">
-            <a:spAutoFit/>
-          </a:bodyPr>
-          <a:lstStyle/>
-          <a:p>
-            <a:pPr algn="l">
-              <a:lnSpc>
-                <a:spcPct val="106000"/>
-              </a:lnSpc>
-              <a:spcBef>
-                <a:spcPts val="0"/>
-              </a:spcBef>
-              <a:spcAft>
-                <a:spcPts val="400"/>
-              </a:spcAft>
-            </a:pPr>
-            <a:r>
-              <a:rPr sz="1000" b="0">
-                <a:solidFill>
-                  <a:srgbClr val="8A9098"/>
-                </a:solidFill>
-                <a:latin typeface="Consolas"/>
-                <a:ea typeface="Consolas"/>
-              </a:rPr>
-              <a:t>25%</a:t>
-            </a:r>
-          </a:p>
-        </p:txBody>
-      </p:sp>
-      <p:sp>
-        <p:nvSpPr>
-          <p:cNvPr id="30" name="TextBox 29"/>
-          <p:cNvSpPr txBox="1"/>
-          <p:nvPr/>
-        </p:nvSpPr>
-        <p:spPr>
-          <a:xfrm>
-            <a:off x="1005840" y="4169664"/>
-            <a:ext cx="1965960" cy="237744"/>
-          </a:xfrm>
-          <a:prstGeom prst="rect">
-            <a:avLst/>
-          </a:prstGeom>
-          <a:noFill/>
-        </p:spPr>
-        <p:txBody>
-          <a:bodyPr wrap="square" anchor="ctr" lIns="0" rIns="0" tIns="0" bIns="0">
-            <a:spAutoFit/>
-          </a:bodyPr>
-          <a:lstStyle/>
-          <a:p>
-            <a:pPr algn="l">
-              <a:lnSpc>
-                <a:spcPct val="106000"/>
-              </a:lnSpc>
-              <a:spcBef>
-                <a:spcPts val="0"/>
-              </a:spcBef>
-              <a:spcAft>
-                <a:spcPts val="400"/>
-              </a:spcAft>
-            </a:pPr>
-            <a:r>
-              <a:rPr sz="1000" b="1">
-                <a:solidFill>
-                  <a:srgbClr val="E60012"/>
-                </a:solidFill>
-                <a:latin typeface="Noto Sans JP"/>
-                <a:ea typeface="Noto Sans JP"/>
-              </a:rPr>
-              <a:t>データセンター</a:t>
-            </a:r>
-          </a:p>
-        </p:txBody>
-      </p:sp>
-      <p:sp>
-        <p:nvSpPr>
-          <p:cNvPr id="31" name="Rounded Rectangle 30"/>
-          <p:cNvSpPr/>
-          <p:nvPr/>
-        </p:nvSpPr>
-        <p:spPr>
-          <a:xfrm>
-            <a:off x="3063240" y="4206240"/>
-            <a:ext cx="2606040" cy="164592"/>
-          </a:xfrm>
-          <a:prstGeom prst="roundRect">
-            <a:avLst>
-              <a:gd name="adj" fmla="val 30000"/>
-            </a:avLst>
-          </a:prstGeom>
-          <a:solidFill>
-            <a:srgbClr val="F3F4F6"/>
-          </a:solidFill>
-          <a:ln>
-            <a:noFill/>
-          </a:ln>
-          <a:effectLst/>
-        </p:spPr>
-        <p:style>
-          <a:lnRef idx="1">
-            <a:schemeClr val="accent1"/>
-          </a:lnRef>
-          <a:fillRef idx="3">
-            <a:schemeClr val="accent1"/>
-          </a:fillRef>
-          <a:effectRef idx="2">
-            <a:schemeClr val="accent1"/>
-          </a:effectRef>
-          <a:fontRef idx="minor">
-            <a:schemeClr val="lt1"/>
-          </a:fontRef>
-        </p:style>
-        <p:txBody>
-          <a:bodyPr rtlCol="0" anchor="ctr"/>
-          <a:lstStyle/>
-          <a:p>
-            <a:pPr algn="ctr"/>
-          </a:p>
-        </p:txBody>
-      </p:sp>
-      <p:sp>
-        <p:nvSpPr>
-          <p:cNvPr id="32" name="Rounded Rectangle 31"/>
-          <p:cNvSpPr/>
-          <p:nvPr/>
-        </p:nvSpPr>
-        <p:spPr>
-          <a:xfrm>
-            <a:off x="3063240" y="4206240"/>
-            <a:ext cx="1954530" cy="164592"/>
-          </a:xfrm>
-          <a:prstGeom prst="roundRect">
-            <a:avLst>
-              <a:gd name="adj" fmla="val 30000"/>
-            </a:avLst>
+            <a:off x="7157923" y="3200400"/>
+            <a:ext cx="4253788" cy="841248"/>
+          </a:xfrm>
+          <a:prstGeom prst="rect">
+            <a:avLst/>
           </a:prstGeom>
           <a:solidFill>
             <a:srgbClr val="E60012"/>
@@ -8033,73 +7785,23 @@
       </p:sp>
       <p:sp>
         <p:nvSpPr>
-          <p:cNvPr id="33" name="TextBox 32"/>
-          <p:cNvSpPr txBox="1"/>
-          <p:nvPr/>
-        </p:nvSpPr>
-        <p:spPr>
-          <a:xfrm>
-            <a:off x="5724144" y="4169664"/>
-            <a:ext cx="640080" cy="237744"/>
-          </a:xfrm>
-          <a:prstGeom prst="rect">
-            <a:avLst/>
-          </a:prstGeom>
-          <a:noFill/>
-        </p:spPr>
-        <p:txBody>
-          <a:bodyPr wrap="square" anchor="ctr" lIns="0" rIns="0" tIns="0" bIns="0">
-            <a:spAutoFit/>
-          </a:bodyPr>
-          <a:lstStyle/>
-          <a:p>
-            <a:pPr algn="l">
-              <a:lnSpc>
-                <a:spcPct val="106000"/>
-              </a:lnSpc>
-              <a:spcBef>
-                <a:spcPts val="0"/>
-              </a:spcBef>
-              <a:spcAft>
-                <a:spcPts val="400"/>
-              </a:spcAft>
-            </a:pPr>
-            <a:r>
-              <a:rPr sz="1000" b="1">
-                <a:solidFill>
-                  <a:srgbClr val="E60012"/>
-                </a:solidFill>
-                <a:latin typeface="Consolas"/>
-                <a:ea typeface="Consolas"/>
-              </a:rPr>
-              <a:t>75%</a:t>
-            </a:r>
-          </a:p>
-        </p:txBody>
-      </p:sp>
-      <p:sp>
-        <p:nvSpPr>
-          <p:cNvPr id="34" name="Rounded Rectangle 33"/>
+          <p:cNvPr id="23" name="Rectangle 22"/>
           <p:cNvSpPr/>
           <p:nvPr/>
         </p:nvSpPr>
         <p:spPr>
           <a:xfrm>
-            <a:off x="6080760" y="3246120"/>
-            <a:ext cx="5330952" cy="1234440"/>
-          </a:xfrm>
-          <a:prstGeom prst="roundRect">
-            <a:avLst>
-              <a:gd name="adj" fmla="val 5000"/>
-            </a:avLst>
+            <a:off x="7146950" y="3200400"/>
+            <a:ext cx="21945" cy="841248"/>
+          </a:xfrm>
+          <a:prstGeom prst="rect">
+            <a:avLst/>
           </a:prstGeom>
           <a:solidFill>
-            <a:srgbClr val="ECEEF1"/>
+            <a:srgbClr val="FFFFFF"/>
           </a:solidFill>
-          <a:ln w="15240">
-            <a:solidFill>
-              <a:srgbClr val="454B54"/>
-            </a:solidFill>
+          <a:ln>
+            <a:noFill/>
           </a:ln>
           <a:effectLst/>
         </p:spPr>
@@ -8127,14 +7829,152 @@
       </p:sp>
       <p:sp>
         <p:nvSpPr>
-          <p:cNvPr id="35" name="TextBox 34"/>
+          <p:cNvPr id="24" name="TextBox 23"/>
           <p:cNvSpPr txBox="1"/>
           <p:nvPr/>
         </p:nvSpPr>
         <p:spPr>
           <a:xfrm>
-            <a:off x="6309360" y="3401568"/>
-            <a:ext cx="4937760" cy="1005840"/>
+            <a:off x="777240" y="3200400"/>
+            <a:ext cx="6380683" cy="841248"/>
+          </a:xfrm>
+          <a:prstGeom prst="rect">
+            <a:avLst/>
+          </a:prstGeom>
+          <a:noFill/>
+        </p:spPr>
+        <p:txBody>
+          <a:bodyPr wrap="square" anchor="ctr" lIns="0" rIns="0" tIns="0" bIns="0">
+            <a:spAutoFit/>
+          </a:bodyPr>
+          <a:lstStyle/>
+          <a:p>
+            <a:pPr algn="ctr">
+              <a:lnSpc>
+                <a:spcPct val="100000"/>
+              </a:lnSpc>
+              <a:spcBef>
+                <a:spcPts val="0"/>
+              </a:spcBef>
+              <a:spcAft>
+                <a:spcPts val="100"/>
+              </a:spcAft>
+            </a:pPr>
+            <a:r>
+              <a:rPr sz="1050" b="1">
+                <a:solidFill>
+                  <a:srgbClr val="FFFFFF"/>
+                </a:solidFill>
+                <a:latin typeface="Noto Sans JP"/>
+                <a:ea typeface="Noto Sans JP"/>
+              </a:rPr>
+              <a:t>材：機器・材料（変圧器・冷凍機・UPS等）</a:t>
+            </a:r>
+          </a:p>
+          <a:p>
+            <a:pPr algn="ctr">
+              <a:lnSpc>
+                <a:spcPct val="100000"/>
+              </a:lnSpc>
+              <a:spcBef>
+                <a:spcPts val="0"/>
+              </a:spcBef>
+              <a:spcAft>
+                <a:spcPts val="100"/>
+              </a:spcAft>
+            </a:pPr>
+            <a:r>
+              <a:rPr sz="1700" b="1">
+                <a:solidFill>
+                  <a:srgbClr val="FFFFFF"/>
+                </a:solidFill>
+                <a:latin typeface="Noto Sans JP"/>
+                <a:ea typeface="Noto Sans JP"/>
+              </a:rPr>
+              <a:t>約6割</a:t>
+            </a:r>
+          </a:p>
+        </p:txBody>
+      </p:sp>
+      <p:sp>
+        <p:nvSpPr>
+          <p:cNvPr id="25" name="TextBox 24"/>
+          <p:cNvSpPr txBox="1"/>
+          <p:nvPr/>
+        </p:nvSpPr>
+        <p:spPr>
+          <a:xfrm>
+            <a:off x="7157923" y="3200400"/>
+            <a:ext cx="4253788" cy="841248"/>
+          </a:xfrm>
+          <a:prstGeom prst="rect">
+            <a:avLst/>
+          </a:prstGeom>
+          <a:noFill/>
+        </p:spPr>
+        <p:txBody>
+          <a:bodyPr wrap="square" anchor="ctr" lIns="0" rIns="0" tIns="0" bIns="0">
+            <a:spAutoFit/>
+          </a:bodyPr>
+          <a:lstStyle/>
+          <a:p>
+            <a:pPr algn="ctr">
+              <a:lnSpc>
+                <a:spcPct val="100000"/>
+              </a:lnSpc>
+              <a:spcBef>
+                <a:spcPts val="0"/>
+              </a:spcBef>
+              <a:spcAft>
+                <a:spcPts val="100"/>
+              </a:spcAft>
+            </a:pPr>
+            <a:r>
+              <a:rPr sz="1050" b="1">
+                <a:solidFill>
+                  <a:srgbClr val="FFFFFF"/>
+                </a:solidFill>
+                <a:latin typeface="Noto Sans JP"/>
+                <a:ea typeface="Noto Sans JP"/>
+              </a:rPr>
+              <a:t>工：据付・施工（人が動く）</a:t>
+            </a:r>
+          </a:p>
+          <a:p>
+            <a:pPr algn="ctr">
+              <a:lnSpc>
+                <a:spcPct val="100000"/>
+              </a:lnSpc>
+              <a:spcBef>
+                <a:spcPts val="0"/>
+              </a:spcBef>
+              <a:spcAft>
+                <a:spcPts val="100"/>
+              </a:spcAft>
+            </a:pPr>
+            <a:r>
+              <a:rPr sz="1700" b="1">
+                <a:solidFill>
+                  <a:srgbClr val="FFFFFF"/>
+                </a:solidFill>
+                <a:latin typeface="Noto Sans JP"/>
+                <a:ea typeface="Noto Sans JP"/>
+              </a:rPr>
+              <a:t>約4割</a:t>
+            </a:r>
+          </a:p>
+        </p:txBody>
+      </p:sp>
+      <p:sp>
+        <p:nvSpPr>
+          <p:cNvPr id="26" name="TextBox 25"/>
+          <p:cNvSpPr txBox="1"/>
+          <p:nvPr/>
+        </p:nvSpPr>
+        <p:spPr>
+          <a:xfrm>
+            <a:off x="7157923" y="4078224"/>
+            <a:ext cx="4253788" cy="219456"/>
           </a:xfrm>
           <a:prstGeom prst="rect">
             <a:avLst/>
@@ -8147,73 +7987,40 @@
           </a:bodyPr>
           <a:lstStyle/>
           <a:p>
-            <a:pPr algn="l">
-              <a:lnSpc>
-                <a:spcPct val="116000"/>
-              </a:lnSpc>
-              <a:spcBef>
-                <a:spcPts val="0"/>
-              </a:spcBef>
-              <a:spcAft>
-                <a:spcPts val="600"/>
-              </a:spcAft>
-            </a:pPr>
-            <a:r>
-              <a:rPr sz="1550" b="1">
-                <a:solidFill>
-                  <a:srgbClr val="1A1D21"/>
-                </a:solidFill>
-                <a:latin typeface="Noto Sans JP"/>
-                <a:ea typeface="Noto Sans JP"/>
-              </a:rPr>
-              <a:t>建設業だけを見るのは、</a:t>
-            </a:r>
-            <a:r>
-              <a:rPr sz="1550" b="1">
+            <a:pPr algn="ctr">
+              <a:lnSpc>
+                <a:spcPct val="106000"/>
+              </a:lnSpc>
+              <a:spcBef>
+                <a:spcPts val="0"/>
+              </a:spcBef>
+              <a:spcAft>
+                <a:spcPts val="400"/>
+              </a:spcAft>
+            </a:pPr>
+            <a:r>
+              <a:rPr sz="950" b="1">
                 <a:solidFill>
                   <a:srgbClr val="E60012"/>
                 </a:solidFill>
-                <a:latin typeface="Noto Sans JP"/>
-                <a:ea typeface="Noto Sans JP"/>
-              </a:rPr>
-              <a:t>氷山の一角。</a:t>
-            </a:r>
-          </a:p>
-          <a:p>
-            <a:pPr algn="l">
-              <a:lnSpc>
-                <a:spcPct val="116000"/>
-              </a:lnSpc>
-              <a:spcBef>
-                <a:spcPts val="0"/>
-              </a:spcBef>
-              <a:spcAft>
-                <a:spcPts val="600"/>
-              </a:spcAft>
-            </a:pPr>
-            <a:r>
-              <a:rPr sz="1250" b="0">
-                <a:solidFill>
-                  <a:srgbClr val="3C4148"/>
-                </a:solidFill>
-                <a:latin typeface="Noto Sans JP"/>
-                <a:ea typeface="Noto Sans JP"/>
-              </a:rPr>
-              <a:t>お金の“3/4”は、電気・機械設備＝製造業の世界にある。</a:t>
-            </a:r>
-          </a:p>
-        </p:txBody>
-      </p:sp>
-      <p:sp>
-        <p:nvSpPr>
-          <p:cNvPr id="36" name="Rounded Rectangle 35"/>
+                <a:latin typeface="Consolas"/>
+                <a:ea typeface="Consolas"/>
+              </a:rPr>
+              <a:t>↑ ここがANDPADの市場（工）</a:t>
+            </a:r>
+          </a:p>
+        </p:txBody>
+      </p:sp>
+      <p:sp>
+        <p:nvSpPr>
+          <p:cNvPr id="27" name="Rounded Rectangle 26"/>
           <p:cNvSpPr/>
           <p:nvPr/>
         </p:nvSpPr>
         <p:spPr>
           <a:xfrm>
-            <a:off x="777240" y="4709160"/>
-            <a:ext cx="10634472" cy="914400"/>
+            <a:off x="777240" y="4590288"/>
+            <a:ext cx="10634472" cy="1170432"/>
           </a:xfrm>
           <a:prstGeom prst="roundRect">
             <a:avLst>
@@ -8223,7 +8030,7 @@
           <a:solidFill>
             <a:srgbClr val="FDECEE"/>
           </a:solidFill>
-          <a:ln w="12700">
+          <a:ln w="15240">
             <a:solidFill>
               <a:srgbClr val="F3C7CD"/>
             </a:solidFill>
@@ -8254,70 +8061,14 @@
       </p:sp>
       <p:sp>
         <p:nvSpPr>
-          <p:cNvPr id="37" name="TextBox 36"/>
+          <p:cNvPr id="28" name="TextBox 27"/>
           <p:cNvSpPr txBox="1"/>
           <p:nvPr/>
         </p:nvSpPr>
         <p:spPr>
           <a:xfrm>
-            <a:off x="1051560" y="4709160"/>
-            <a:ext cx="10058400" cy="914400"/>
-          </a:xfrm>
-          <a:prstGeom prst="rect">
-            <a:avLst/>
-          </a:prstGeom>
-          <a:noFill/>
-        </p:spPr>
-        <p:txBody>
-          <a:bodyPr wrap="square" anchor="ctr" lIns="0" rIns="0" tIns="0" bIns="0">
-            <a:spAutoFit/>
-          </a:bodyPr>
-          <a:lstStyle/>
-          <a:p>
-            <a:pPr algn="l">
-              <a:lnSpc>
-                <a:spcPct val="120000"/>
-              </a:lnSpc>
-              <a:spcBef>
-                <a:spcPts val="0"/>
-              </a:spcBef>
-              <a:spcAft>
-                <a:spcPts val="400"/>
-              </a:spcAft>
-            </a:pPr>
-            <a:r>
-              <a:rPr sz="1400" b="1">
-                <a:solidFill>
-                  <a:srgbClr val="1A1D21"/>
-                </a:solidFill>
-                <a:latin typeface="Noto Sans JP"/>
-                <a:ea typeface="Noto Sans JP"/>
-              </a:rPr>
-              <a:t>大型DC1棟＝数百億〜1,000億円級（IT機器は別）。</a:t>
-            </a:r>
-            <a:r>
-              <a:rPr sz="1400" b="1">
-                <a:solidFill>
-                  <a:srgbClr val="E60012"/>
-                </a:solidFill>
-                <a:latin typeface="Noto Sans JP"/>
-                <a:ea typeface="Noto Sans JP"/>
-              </a:rPr>
-              <a:t>その約3/4、1棟あたり数百億円が、製造業側の“設備”に向かう。</a:t>
-            </a:r>
-          </a:p>
-        </p:txBody>
-      </p:sp>
-      <p:sp>
-        <p:nvSpPr>
-          <p:cNvPr id="38" name="TextBox 37"/>
-          <p:cNvSpPr txBox="1"/>
-          <p:nvPr/>
-        </p:nvSpPr>
-        <p:spPr>
-          <a:xfrm>
-            <a:off x="822960" y="5760720"/>
-            <a:ext cx="10515600" cy="365760"/>
+            <a:off x="1051560" y="4754880"/>
+            <a:ext cx="10058400" cy="457200"/>
           </a:xfrm>
           <a:prstGeom prst="rect">
             <a:avLst/>
@@ -8342,14 +8093,106 @@
               </a:spcAft>
             </a:pPr>
             <a:r>
-              <a:rPr sz="900" b="0">
+              <a:rPr sz="1450" b="1">
+                <a:solidFill>
+                  <a:srgbClr val="1A1D21"/>
+                </a:solidFill>
+                <a:latin typeface="Noto Sans JP"/>
+                <a:ea typeface="Noto Sans JP"/>
+              </a:rPr>
+              <a:t>機器そのものの価格（材）は、正直ANDPADには関係ない。</a:t>
+            </a:r>
+          </a:p>
+        </p:txBody>
+      </p:sp>
+      <p:sp>
+        <p:nvSpPr>
+          <p:cNvPr id="29" name="TextBox 28"/>
+          <p:cNvSpPr txBox="1"/>
+          <p:nvPr/>
+        </p:nvSpPr>
+        <p:spPr>
+          <a:xfrm>
+            <a:off x="1051560" y="5230368"/>
+            <a:ext cx="10058400" cy="457200"/>
+          </a:xfrm>
+          <a:prstGeom prst="rect">
+            <a:avLst/>
+          </a:prstGeom>
+          <a:noFill/>
+        </p:spPr>
+        <p:txBody>
+          <a:bodyPr wrap="square" anchor="t" lIns="0" rIns="0" tIns="0" bIns="0">
+            <a:spAutoFit/>
+          </a:bodyPr>
+          <a:lstStyle/>
+          <a:p>
+            <a:pPr algn="l">
+              <a:lnSpc>
+                <a:spcPct val="115000"/>
+              </a:lnSpc>
+              <a:spcBef>
+                <a:spcPts val="0"/>
+              </a:spcBef>
+              <a:spcAft>
+                <a:spcPts val="400"/>
+              </a:spcAft>
+            </a:pPr>
+            <a:r>
+              <a:rPr sz="1450" b="1">
+                <a:solidFill>
+                  <a:srgbClr val="E60012"/>
+                </a:solidFill>
+                <a:latin typeface="Noto Sans JP"/>
+                <a:ea typeface="Noto Sans JP"/>
+              </a:rPr>
+              <a:t>効くのは“工”＝据付・施工。それでも建設費の約3割。大型DC1棟で数十〜百億円級が、現場作業に向かう。</a:t>
+            </a:r>
+          </a:p>
+        </p:txBody>
+      </p:sp>
+      <p:sp>
+        <p:nvSpPr>
+          <p:cNvPr id="30" name="TextBox 29"/>
+          <p:cNvSpPr txBox="1"/>
+          <p:nvPr/>
+        </p:nvSpPr>
+        <p:spPr>
+          <a:xfrm>
+            <a:off x="822960" y="5870448"/>
+            <a:ext cx="10515600" cy="320040"/>
+          </a:xfrm>
+          <a:prstGeom prst="rect">
+            <a:avLst/>
+          </a:prstGeom>
+          <a:noFill/>
+        </p:spPr>
+        <p:txBody>
+          <a:bodyPr wrap="square" anchor="t" lIns="0" rIns="0" tIns="0" bIns="0">
+            <a:spAutoFit/>
+          </a:bodyPr>
+          <a:lstStyle/>
+          <a:p>
+            <a:pPr algn="l">
+              <a:lnSpc>
+                <a:spcPct val="106000"/>
+              </a:lnSpc>
+              <a:spcBef>
+                <a:spcPts val="0"/>
+              </a:spcBef>
+              <a:spcAft>
+                <a:spcPts val="400"/>
+              </a:spcAft>
+            </a:pPr>
+            <a:r>
+              <a:rPr sz="850" b="0">
                 <a:solidFill>
                   <a:srgbClr val="8A9098"/>
                 </a:solidFill>
                 <a:latin typeface="Consolas"/>
                 <a:ea typeface="Consolas"/>
               </a:rPr>
-              <a:t>出典：日経xTECH（DC建設費は電気設備 約50%＋空調等 約25%＋建築 約25%）／建設費/MW：Cushman &amp; Wakefield・Turner &amp; Townsend。</a:t>
+              <a:t>出典：日経xTECH（設備工事＝電気50%＋空調等25%）／材工比は積算の一般構成（直接工事費＝材料費＋労務費＋経費）にもとづく目安・物件で変動。</a:t>
             </a:r>
           </a:p>
         </p:txBody>
@@ -8549,7 +8392,7 @@
                 <a:latin typeface="Consolas"/>
                 <a:ea typeface="Consolas"/>
               </a:rPr>
-              <a:t>周辺市場の正体：モノ売りではなく、“現場”がずっと続く</a:t>
+              <a:t>“工”の3工程：据付・試運転・保守——割合と市場を同じ物差しで</a:t>
             </a:r>
           </a:p>
         </p:txBody>
@@ -8595,7 +8438,7 @@
                 <a:latin typeface="Noto Sans JP"/>
                 <a:ea typeface="Noto Sans JP"/>
               </a:rPr>
-              <a:t>しかも設備は、作って終わりじゃない。据付・試運転・保守で人が動く。</a:t>
+              <a:t>「作って終わり」じゃない。建てる時も、建てた後も、現場が続く。</a:t>
             </a:r>
           </a:p>
         </p:txBody>
@@ -8646,292 +8489,14 @@
       </p:sp>
       <p:sp>
         <p:nvSpPr>
-          <p:cNvPr id="8" name="Rounded Rectangle 7"/>
+          <p:cNvPr id="8" name="Rectangle 7"/>
           <p:cNvSpPr/>
           <p:nvPr/>
         </p:nvSpPr>
         <p:spPr>
           <a:xfrm>
-            <a:off x="777240" y="1463040"/>
-            <a:ext cx="2530602" cy="1691640"/>
-          </a:xfrm>
-          <a:prstGeom prst="roundRect">
-            <a:avLst>
-              <a:gd name="adj" fmla="val 6000"/>
-            </a:avLst>
-          </a:prstGeom>
-          <a:solidFill>
-            <a:srgbClr val="FFFFFF"/>
-          </a:solidFill>
-          <a:ln w="15240">
-            <a:solidFill>
-              <a:srgbClr val="454B54"/>
-            </a:solidFill>
-          </a:ln>
-          <a:effectLst/>
-        </p:spPr>
-        <p:style>
-          <a:lnRef idx="1">
-            <a:schemeClr val="accent1"/>
-          </a:lnRef>
-          <a:fillRef idx="3">
-            <a:schemeClr val="accent1"/>
-          </a:fillRef>
-          <a:effectRef idx="2">
-            <a:schemeClr val="accent1"/>
-          </a:effectRef>
-          <a:fontRef idx="minor">
-            <a:schemeClr val="lt1"/>
-          </a:fontRef>
-        </p:style>
-        <p:txBody>
-          <a:bodyPr rtlCol="0" anchor="ctr"/>
-          <a:lstStyle/>
-          <a:p>
-            <a:pPr algn="ctr"/>
-          </a:p>
-        </p:txBody>
-      </p:sp>
-      <p:sp>
-        <p:nvSpPr>
-          <p:cNvPr id="9" name="Rectangle 8"/>
-          <p:cNvSpPr/>
-          <p:nvPr/>
-        </p:nvSpPr>
-        <p:spPr>
-          <a:xfrm>
-            <a:off x="777240" y="1463040"/>
-            <a:ext cx="2530602" cy="91440"/>
-          </a:xfrm>
-          <a:prstGeom prst="rect">
-            <a:avLst/>
-          </a:prstGeom>
-          <a:solidFill>
-            <a:srgbClr val="454B54"/>
-          </a:solidFill>
-          <a:ln>
-            <a:noFill/>
-          </a:ln>
-          <a:effectLst/>
-        </p:spPr>
-        <p:style>
-          <a:lnRef idx="1">
-            <a:schemeClr val="accent1"/>
-          </a:lnRef>
-          <a:fillRef idx="3">
-            <a:schemeClr val="accent1"/>
-          </a:fillRef>
-          <a:effectRef idx="2">
-            <a:schemeClr val="accent1"/>
-          </a:effectRef>
-          <a:fontRef idx="minor">
-            <a:schemeClr val="lt1"/>
-          </a:fontRef>
-        </p:style>
-        <p:txBody>
-          <a:bodyPr rtlCol="0" anchor="ctr"/>
-          <a:lstStyle/>
-          <a:p>
-            <a:pPr algn="ctr"/>
-          </a:p>
-        </p:txBody>
-      </p:sp>
-      <p:sp>
-        <p:nvSpPr>
-          <p:cNvPr id="10" name="TextBox 9"/>
-          <p:cNvSpPr txBox="1"/>
-          <p:nvPr/>
-        </p:nvSpPr>
-        <p:spPr>
-          <a:xfrm>
-            <a:off x="960120" y="1682496"/>
-            <a:ext cx="2164842" cy="822960"/>
-          </a:xfrm>
-          <a:prstGeom prst="rect">
-            <a:avLst/>
-          </a:prstGeom>
-          <a:noFill/>
-        </p:spPr>
-        <p:txBody>
-          <a:bodyPr wrap="square" anchor="t" lIns="0" rIns="0" tIns="0" bIns="0">
-            <a:spAutoFit/>
-          </a:bodyPr>
-          <a:lstStyle/>
-          <a:p>
-            <a:pPr algn="l">
-              <a:lnSpc>
-                <a:spcPct val="116000"/>
-              </a:lnSpc>
-              <a:spcBef>
-                <a:spcPts val="0"/>
-              </a:spcBef>
-              <a:spcAft>
-                <a:spcPts val="500"/>
-              </a:spcAft>
-            </a:pPr>
-            <a:r>
-              <a:rPr sz="1400" b="1">
-                <a:solidFill>
-                  <a:srgbClr val="1A1D21"/>
-                </a:solidFill>
-                <a:latin typeface="Noto Sans JP"/>
-                <a:ea typeface="Noto Sans JP"/>
-              </a:rPr>
-              <a:t>①  製造</a:t>
-            </a:r>
-          </a:p>
-          <a:p>
-            <a:pPr algn="l">
-              <a:lnSpc>
-                <a:spcPct val="116000"/>
-              </a:lnSpc>
-              <a:spcBef>
-                <a:spcPts val="0"/>
-              </a:spcBef>
-              <a:spcAft>
-                <a:spcPts val="500"/>
-              </a:spcAft>
-            </a:pPr>
-            <a:r>
-              <a:rPr sz="950" b="1">
-                <a:solidFill>
-                  <a:srgbClr val="8A9098"/>
-                </a:solidFill>
-                <a:latin typeface="Consolas"/>
-                <a:ea typeface="Consolas"/>
-              </a:rPr>
-              <a:t>○ 工場のなか</a:t>
-            </a:r>
-          </a:p>
-          <a:p>
-            <a:pPr algn="l">
-              <a:lnSpc>
-                <a:spcPct val="116000"/>
-              </a:lnSpc>
-              <a:spcBef>
-                <a:spcPts val="0"/>
-              </a:spcBef>
-              <a:spcAft>
-                <a:spcPts val="500"/>
-              </a:spcAft>
-            </a:pPr>
-            <a:r>
-              <a:rPr sz="1000" b="0">
-                <a:solidFill>
-                  <a:srgbClr val="3C4148"/>
-                </a:solidFill>
-                <a:latin typeface="Noto Sans JP"/>
-                <a:ea typeface="Noto Sans JP"/>
-              </a:rPr>
-              <a:t>機器をつくる。ここはメーカーの工場の中。</a:t>
-            </a:r>
-          </a:p>
-        </p:txBody>
-      </p:sp>
-      <p:sp>
-        <p:nvSpPr>
-          <p:cNvPr id="11" name="TextBox 10"/>
-          <p:cNvSpPr txBox="1"/>
-          <p:nvPr/>
-        </p:nvSpPr>
-        <p:spPr>
-          <a:xfrm>
-            <a:off x="3289554" y="1920240"/>
-            <a:ext cx="256032" cy="548640"/>
-          </a:xfrm>
-          <a:prstGeom prst="rect">
-            <a:avLst/>
-          </a:prstGeom>
-          <a:noFill/>
-        </p:spPr>
-        <p:txBody>
-          <a:bodyPr wrap="square" anchor="t" lIns="0" rIns="0" tIns="0" bIns="0">
-            <a:spAutoFit/>
-          </a:bodyPr>
-          <a:lstStyle/>
-          <a:p>
-            <a:pPr algn="ctr">
-              <a:lnSpc>
-                <a:spcPct val="106000"/>
-              </a:lnSpc>
-              <a:spcBef>
-                <a:spcPts val="0"/>
-              </a:spcBef>
-              <a:spcAft>
-                <a:spcPts val="400"/>
-              </a:spcAft>
-            </a:pPr>
-            <a:r>
-              <a:rPr sz="1800" b="1">
-                <a:solidFill>
-                  <a:srgbClr val="E60012"/>
-                </a:solidFill>
-                <a:latin typeface="Consolas"/>
-                <a:ea typeface="Consolas"/>
-              </a:rPr>
-              <a:t>→</a:t>
-            </a:r>
-          </a:p>
-        </p:txBody>
-      </p:sp>
-      <p:sp>
-        <p:nvSpPr>
-          <p:cNvPr id="12" name="Rounded Rectangle 11"/>
-          <p:cNvSpPr/>
-          <p:nvPr/>
-        </p:nvSpPr>
-        <p:spPr>
-          <a:xfrm>
-            <a:off x="3435858" y="1463040"/>
-            <a:ext cx="2530602" cy="1691640"/>
-          </a:xfrm>
-          <a:prstGeom prst="roundRect">
-            <a:avLst>
-              <a:gd name="adj" fmla="val 6000"/>
-            </a:avLst>
-          </a:prstGeom>
-          <a:solidFill>
-            <a:srgbClr val="FFFFFF"/>
-          </a:solidFill>
-          <a:ln w="15240">
-            <a:solidFill>
-              <a:srgbClr val="F3C7CD"/>
-            </a:solidFill>
-          </a:ln>
-          <a:effectLst/>
-        </p:spPr>
-        <p:style>
-          <a:lnRef idx="1">
-            <a:schemeClr val="accent1"/>
-          </a:lnRef>
-          <a:fillRef idx="3">
-            <a:schemeClr val="accent1"/>
-          </a:fillRef>
-          <a:effectRef idx="2">
-            <a:schemeClr val="accent1"/>
-          </a:effectRef>
-          <a:fontRef idx="minor">
-            <a:schemeClr val="lt1"/>
-          </a:fontRef>
-        </p:style>
-        <p:txBody>
-          <a:bodyPr rtlCol="0" anchor="ctr"/>
-          <a:lstStyle/>
-          <a:p>
-            <a:pPr algn="ctr"/>
-          </a:p>
-        </p:txBody>
-      </p:sp>
-      <p:sp>
-        <p:nvSpPr>
-          <p:cNvPr id="13" name="Rectangle 12"/>
-          <p:cNvSpPr/>
-          <p:nvPr/>
-        </p:nvSpPr>
-        <p:spPr>
-          <a:xfrm>
-            <a:off x="3435858" y="1463040"/>
-            <a:ext cx="2530602" cy="91440"/>
+            <a:off x="777240" y="1417320"/>
+            <a:ext cx="10634472" cy="420624"/>
           </a:xfrm>
           <a:prstGeom prst="rect">
             <a:avLst/>
@@ -8968,14 +8533,198 @@
       </p:sp>
       <p:sp>
         <p:nvSpPr>
-          <p:cNvPr id="14" name="TextBox 13"/>
+          <p:cNvPr id="9" name="TextBox 8"/>
           <p:cNvSpPr txBox="1"/>
           <p:nvPr/>
         </p:nvSpPr>
         <p:spPr>
           <a:xfrm>
-            <a:off x="3618738" y="1682496"/>
-            <a:ext cx="2164842" cy="822960"/>
+            <a:off x="905256" y="1417320"/>
+            <a:ext cx="1828800" cy="420624"/>
+          </a:xfrm>
+          <a:prstGeom prst="rect">
+            <a:avLst/>
+          </a:prstGeom>
+          <a:noFill/>
+        </p:spPr>
+        <p:txBody>
+          <a:bodyPr wrap="square" anchor="ctr" lIns="0" rIns="0" tIns="0" bIns="0">
+            <a:spAutoFit/>
+          </a:bodyPr>
+          <a:lstStyle/>
+          <a:p>
+            <a:pPr algn="l">
+              <a:lnSpc>
+                <a:spcPct val="106000"/>
+              </a:lnSpc>
+              <a:spcBef>
+                <a:spcPts val="0"/>
+              </a:spcBef>
+              <a:spcAft>
+                <a:spcPts val="400"/>
+              </a:spcAft>
+            </a:pPr>
+            <a:r>
+              <a:rPr sz="1050" b="1">
+                <a:solidFill>
+                  <a:srgbClr val="FFFFFF"/>
+                </a:solidFill>
+                <a:latin typeface="Consolas"/>
+                <a:ea typeface="Consolas"/>
+              </a:rPr>
+              <a:t>工程</a:t>
+            </a:r>
+          </a:p>
+        </p:txBody>
+      </p:sp>
+      <p:sp>
+        <p:nvSpPr>
+          <p:cNvPr id="10" name="TextBox 9"/>
+          <p:cNvSpPr txBox="1"/>
+          <p:nvPr/>
+        </p:nvSpPr>
+        <p:spPr>
+          <a:xfrm>
+            <a:off x="2916936" y="1417320"/>
+            <a:ext cx="2834639" cy="420624"/>
+          </a:xfrm>
+          <a:prstGeom prst="rect">
+            <a:avLst/>
+          </a:prstGeom>
+          <a:noFill/>
+        </p:spPr>
+        <p:txBody>
+          <a:bodyPr wrap="square" anchor="ctr" lIns="0" rIns="0" tIns="0" bIns="0">
+            <a:spAutoFit/>
+          </a:bodyPr>
+          <a:lstStyle/>
+          <a:p>
+            <a:pPr algn="l">
+              <a:lnSpc>
+                <a:spcPct val="106000"/>
+              </a:lnSpc>
+              <a:spcBef>
+                <a:spcPts val="0"/>
+              </a:spcBef>
+              <a:spcAft>
+                <a:spcPts val="400"/>
+              </a:spcAft>
+            </a:pPr>
+            <a:r>
+              <a:rPr sz="1050" b="1">
+                <a:solidFill>
+                  <a:srgbClr val="FFFFFF"/>
+                </a:solidFill>
+                <a:latin typeface="Consolas"/>
+                <a:ea typeface="Consolas"/>
+              </a:rPr>
+              <a:t>やること</a:t>
+            </a:r>
+          </a:p>
+        </p:txBody>
+      </p:sp>
+      <p:sp>
+        <p:nvSpPr>
+          <p:cNvPr id="11" name="TextBox 10"/>
+          <p:cNvSpPr txBox="1"/>
+          <p:nvPr/>
+        </p:nvSpPr>
+        <p:spPr>
+          <a:xfrm>
+            <a:off x="5934455" y="1417320"/>
+            <a:ext cx="1965960" cy="420624"/>
+          </a:xfrm>
+          <a:prstGeom prst="rect">
+            <a:avLst/>
+          </a:prstGeom>
+          <a:noFill/>
+        </p:spPr>
+        <p:txBody>
+          <a:bodyPr wrap="square" anchor="ctr" lIns="0" rIns="0" tIns="0" bIns="0">
+            <a:spAutoFit/>
+          </a:bodyPr>
+          <a:lstStyle/>
+          <a:p>
+            <a:pPr algn="l">
+              <a:lnSpc>
+                <a:spcPct val="106000"/>
+              </a:lnSpc>
+              <a:spcBef>
+                <a:spcPts val="0"/>
+              </a:spcBef>
+              <a:spcAft>
+                <a:spcPts val="400"/>
+              </a:spcAft>
+            </a:pPr>
+            <a:r>
+              <a:rPr sz="1050" b="1">
+                <a:solidFill>
+                  <a:srgbClr val="FFFFFF"/>
+                </a:solidFill>
+                <a:latin typeface="Consolas"/>
+                <a:ea typeface="Consolas"/>
+              </a:rPr>
+              <a:t>建設費に対する割合</a:t>
+            </a:r>
+          </a:p>
+        </p:txBody>
+      </p:sp>
+      <p:sp>
+        <p:nvSpPr>
+          <p:cNvPr id="12" name="TextBox 11"/>
+          <p:cNvSpPr txBox="1"/>
+          <p:nvPr/>
+        </p:nvSpPr>
+        <p:spPr>
+          <a:xfrm>
+            <a:off x="8083296" y="1417320"/>
+            <a:ext cx="3273551" cy="420624"/>
+          </a:xfrm>
+          <a:prstGeom prst="rect">
+            <a:avLst/>
+          </a:prstGeom>
+          <a:noFill/>
+        </p:spPr>
+        <p:txBody>
+          <a:bodyPr wrap="square" anchor="ctr" lIns="0" rIns="0" tIns="0" bIns="0">
+            <a:spAutoFit/>
+          </a:bodyPr>
+          <a:lstStyle/>
+          <a:p>
+            <a:pPr algn="l">
+              <a:lnSpc>
+                <a:spcPct val="106000"/>
+              </a:lnSpc>
+              <a:spcBef>
+                <a:spcPts val="0"/>
+              </a:spcBef>
+              <a:spcAft>
+                <a:spcPts val="400"/>
+              </a:spcAft>
+            </a:pPr>
+            <a:r>
+              <a:rPr sz="1050" b="1">
+                <a:solidFill>
+                  <a:srgbClr val="FFFFFF"/>
+                </a:solidFill>
+                <a:latin typeface="Consolas"/>
+                <a:ea typeface="Consolas"/>
+              </a:rPr>
+              <a:t>市場の広がり（世界）</a:t>
+            </a:r>
+          </a:p>
+        </p:txBody>
+      </p:sp>
+      <p:sp>
+        <p:nvSpPr>
+          <p:cNvPr id="13" name="TextBox 12"/>
+          <p:cNvSpPr txBox="1"/>
+          <p:nvPr/>
+        </p:nvSpPr>
+        <p:spPr>
+          <a:xfrm>
+            <a:off x="905256" y="1965960"/>
+            <a:ext cx="1810512" cy="749808"/>
           </a:xfrm>
           <a:prstGeom prst="rect">
             <a:avLst/>
@@ -8990,49 +8739,72 @@
           <a:p>
             <a:pPr algn="l">
               <a:lnSpc>
-                <a:spcPct val="116000"/>
-              </a:lnSpc>
-              <a:spcBef>
-                <a:spcPts val="0"/>
-              </a:spcBef>
-              <a:spcAft>
-                <a:spcPts val="500"/>
-              </a:spcAft>
-            </a:pPr>
-            <a:r>
-              <a:rPr sz="1400" b="1">
+                <a:spcPct val="110000"/>
+              </a:lnSpc>
+              <a:spcBef>
+                <a:spcPts val="0"/>
+              </a:spcBef>
+              <a:spcAft>
+                <a:spcPts val="300"/>
+              </a:spcAft>
+            </a:pPr>
+            <a:r>
+              <a:rPr sz="1300" b="1">
                 <a:solidFill>
                   <a:srgbClr val="1A1D21"/>
                 </a:solidFill>
                 <a:latin typeface="Noto Sans JP"/>
                 <a:ea typeface="Noto Sans JP"/>
               </a:rPr>
-              <a:t>②  据付・施工</a:t>
+              <a:t>① 据付・施工</a:t>
             </a:r>
           </a:p>
           <a:p>
             <a:pPr algn="l">
               <a:lnSpc>
-                <a:spcPct val="116000"/>
-              </a:lnSpc>
-              <a:spcBef>
-                <a:spcPts val="0"/>
-              </a:spcBef>
-              <a:spcAft>
-                <a:spcPts val="500"/>
-              </a:spcAft>
-            </a:pPr>
-            <a:r>
-              <a:rPr sz="950" b="1">
+                <a:spcPct val="110000"/>
+              </a:lnSpc>
+              <a:spcBef>
+                <a:spcPts val="0"/>
+              </a:spcBef>
+              <a:spcAft>
+                <a:spcPts val="300"/>
+              </a:spcAft>
+            </a:pPr>
+            <a:r>
+              <a:rPr sz="850" b="1">
                 <a:solidFill>
                   <a:srgbClr val="E60012"/>
                 </a:solidFill>
                 <a:latin typeface="Consolas"/>
                 <a:ea typeface="Consolas"/>
               </a:rPr>
-              <a:t>● 現場ではじまる</a:t>
-            </a:r>
-          </a:p>
+              <a:t>建てる時</a:t>
+            </a:r>
+          </a:p>
+        </p:txBody>
+      </p:sp>
+      <p:sp>
+        <p:nvSpPr>
+          <p:cNvPr id="14" name="TextBox 13"/>
+          <p:cNvSpPr txBox="1"/>
+          <p:nvPr/>
+        </p:nvSpPr>
+        <p:spPr>
+          <a:xfrm>
+            <a:off x="2916936" y="1837944"/>
+            <a:ext cx="2798063" cy="932688"/>
+          </a:xfrm>
+          <a:prstGeom prst="rect">
+            <a:avLst/>
+          </a:prstGeom>
+          <a:noFill/>
+        </p:spPr>
+        <p:txBody>
+          <a:bodyPr wrap="square" anchor="ctr" lIns="0" rIns="0" tIns="0" bIns="0">
+            <a:spAutoFit/>
+          </a:bodyPr>
+          <a:lstStyle/>
           <a:p>
             <a:pPr algn="l">
               <a:lnSpc>
@@ -9042,18 +8814,18 @@
                 <a:spcPts val="0"/>
               </a:spcBef>
               <a:spcAft>
-                <a:spcPts val="500"/>
-              </a:spcAft>
-            </a:pPr>
-            <a:r>
-              <a:rPr sz="1000" b="0">
+                <a:spcPts val="400"/>
+              </a:spcAft>
+            </a:pPr>
+            <a:r>
+              <a:rPr sz="1100" b="0">
                 <a:solidFill>
                   <a:srgbClr val="3C4148"/>
                 </a:solidFill>
                 <a:latin typeface="Noto Sans JP"/>
                 <a:ea typeface="Noto Sans JP"/>
               </a:rPr>
-              <a:t>搬入・配線・配管・据付。ここから“現場”が始まる。</a:t>
+              <a:t>機器を搬入し、据付・配線・配管する</a:t>
             </a:r>
           </a:p>
         </p:txBody>
@@ -9066,8 +8838,8 @@
         </p:nvSpPr>
         <p:spPr>
           <a:xfrm>
-            <a:off x="5948172" y="1920240"/>
-            <a:ext cx="256032" cy="548640"/>
+            <a:off x="5934455" y="1984248"/>
+            <a:ext cx="1929384" cy="457200"/>
           </a:xfrm>
           <a:prstGeom prst="rect">
             <a:avLst/>
@@ -9080,7 +8852,7 @@
           </a:bodyPr>
           <a:lstStyle/>
           <a:p>
-            <a:pPr algn="ctr">
+            <a:pPr algn="l">
               <a:lnSpc>
                 <a:spcPct val="106000"/>
               </a:lnSpc>
@@ -9092,41 +8864,129 @@
               </a:spcAft>
             </a:pPr>
             <a:r>
-              <a:rPr sz="1800" b="1">
+              <a:rPr sz="2000" b="1">
                 <a:solidFill>
                   <a:srgbClr val="E60012"/>
+                </a:solidFill>
+                <a:latin typeface="Noto Sans JP"/>
+                <a:ea typeface="Noto Sans JP"/>
+              </a:rPr>
+              <a:t>約3割</a:t>
+            </a:r>
+          </a:p>
+        </p:txBody>
+      </p:sp>
+      <p:sp>
+        <p:nvSpPr>
+          <p:cNvPr id="16" name="TextBox 15"/>
+          <p:cNvSpPr txBox="1"/>
+          <p:nvPr/>
+        </p:nvSpPr>
+        <p:spPr>
+          <a:xfrm>
+            <a:off x="5934455" y="2404872"/>
+            <a:ext cx="1929384" cy="292608"/>
+          </a:xfrm>
+          <a:prstGeom prst="rect">
+            <a:avLst/>
+          </a:prstGeom>
+          <a:noFill/>
+        </p:spPr>
+        <p:txBody>
+          <a:bodyPr wrap="square" anchor="t" lIns="0" rIns="0" tIns="0" bIns="0">
+            <a:spAutoFit/>
+          </a:bodyPr>
+          <a:lstStyle/>
+          <a:p>
+            <a:pPr algn="l">
+              <a:lnSpc>
+                <a:spcPct val="105000"/>
+              </a:lnSpc>
+              <a:spcBef>
+                <a:spcPts val="0"/>
+              </a:spcBef>
+              <a:spcAft>
+                <a:spcPts val="400"/>
+              </a:spcAft>
+            </a:pPr>
+            <a:r>
+              <a:rPr sz="850" b="1">
+                <a:solidFill>
+                  <a:srgbClr val="8A9098"/>
                 </a:solidFill>
                 <a:latin typeface="Consolas"/>
                 <a:ea typeface="Consolas"/>
               </a:rPr>
-              <a:t>→</a:t>
-            </a:r>
-          </a:p>
-        </p:txBody>
-      </p:sp>
-      <p:sp>
-        <p:nvSpPr>
-          <p:cNvPr id="16" name="Rounded Rectangle 15"/>
+              <a:t>設備の“工”＝ 建設費の約30%</a:t>
+            </a:r>
+          </a:p>
+        </p:txBody>
+      </p:sp>
+      <p:sp>
+        <p:nvSpPr>
+          <p:cNvPr id="17" name="TextBox 16"/>
+          <p:cNvSpPr txBox="1"/>
+          <p:nvPr/>
+        </p:nvSpPr>
+        <p:spPr>
+          <a:xfrm>
+            <a:off x="8083296" y="1837944"/>
+            <a:ext cx="3218687" cy="932688"/>
+          </a:xfrm>
+          <a:prstGeom prst="rect">
+            <a:avLst/>
+          </a:prstGeom>
+          <a:noFill/>
+        </p:spPr>
+        <p:txBody>
+          <a:bodyPr wrap="square" anchor="ctr" lIns="0" rIns="0" tIns="0" bIns="0">
+            <a:spAutoFit/>
+          </a:bodyPr>
+          <a:lstStyle/>
+          <a:p>
+            <a:pPr algn="l">
+              <a:lnSpc>
+                <a:spcPct val="116000"/>
+              </a:lnSpc>
+              <a:spcBef>
+                <a:spcPts val="0"/>
+              </a:spcBef>
+              <a:spcAft>
+                <a:spcPts val="400"/>
+              </a:spcAft>
+            </a:pPr>
+            <a:r>
+              <a:rPr sz="1050" b="1">
+                <a:solidFill>
+                  <a:srgbClr val="1A1D21"/>
+                </a:solidFill>
+                <a:latin typeface="Noto Sans JP"/>
+                <a:ea typeface="Noto Sans JP"/>
+              </a:rPr>
+              <a:t>国内の設備工事そのもの。ANDPADの中核市場</a:t>
+            </a:r>
+          </a:p>
+        </p:txBody>
+      </p:sp>
+      <p:sp>
+        <p:nvSpPr>
+          <p:cNvPr id="18" name="Rectangle 17"/>
           <p:cNvSpPr/>
           <p:nvPr/>
         </p:nvSpPr>
         <p:spPr>
           <a:xfrm>
-            <a:off x="6094476" y="1463040"/>
-            <a:ext cx="2530602" cy="1691640"/>
-          </a:xfrm>
-          <a:prstGeom prst="roundRect">
-            <a:avLst>
-              <a:gd name="adj" fmla="val 6000"/>
-            </a:avLst>
+            <a:off x="777240" y="2770632"/>
+            <a:ext cx="10634472" cy="932688"/>
+          </a:xfrm>
+          <a:prstGeom prst="rect">
+            <a:avLst/>
           </a:prstGeom>
           <a:solidFill>
-            <a:srgbClr val="FFFFFF"/>
+            <a:srgbClr val="F3F4F6"/>
           </a:solidFill>
-          <a:ln w="15240">
-            <a:solidFill>
-              <a:srgbClr val="F3C7CD"/>
-            </a:solidFill>
+          <a:ln>
+            <a:noFill/>
           </a:ln>
           <a:effectLst/>
         </p:spPr>
@@ -9154,20 +9014,526 @@
       </p:sp>
       <p:sp>
         <p:nvSpPr>
-          <p:cNvPr id="17" name="Rectangle 16"/>
+          <p:cNvPr id="19" name="TextBox 18"/>
+          <p:cNvSpPr txBox="1"/>
+          <p:nvPr/>
+        </p:nvSpPr>
+        <p:spPr>
+          <a:xfrm>
+            <a:off x="905256" y="2898648"/>
+            <a:ext cx="1810512" cy="749808"/>
+          </a:xfrm>
+          <a:prstGeom prst="rect">
+            <a:avLst/>
+          </a:prstGeom>
+          <a:noFill/>
+        </p:spPr>
+        <p:txBody>
+          <a:bodyPr wrap="square" anchor="t" lIns="0" rIns="0" tIns="0" bIns="0">
+            <a:spAutoFit/>
+          </a:bodyPr>
+          <a:lstStyle/>
+          <a:p>
+            <a:pPr algn="l">
+              <a:lnSpc>
+                <a:spcPct val="110000"/>
+              </a:lnSpc>
+              <a:spcBef>
+                <a:spcPts val="0"/>
+              </a:spcBef>
+              <a:spcAft>
+                <a:spcPts val="300"/>
+              </a:spcAft>
+            </a:pPr>
+            <a:r>
+              <a:rPr sz="1300" b="1">
+                <a:solidFill>
+                  <a:srgbClr val="1A1D21"/>
+                </a:solidFill>
+                <a:latin typeface="Noto Sans JP"/>
+                <a:ea typeface="Noto Sans JP"/>
+              </a:rPr>
+              <a:t>② 試運転</a:t>
+            </a:r>
+          </a:p>
+          <a:p>
+            <a:pPr algn="l">
+              <a:lnSpc>
+                <a:spcPct val="110000"/>
+              </a:lnSpc>
+              <a:spcBef>
+                <a:spcPts val="0"/>
+              </a:spcBef>
+              <a:spcAft>
+                <a:spcPts val="300"/>
+              </a:spcAft>
+            </a:pPr>
+            <a:r>
+              <a:rPr sz="850" b="1">
+                <a:solidFill>
+                  <a:srgbClr val="E60012"/>
+                </a:solidFill>
+                <a:latin typeface="Consolas"/>
+                <a:ea typeface="Consolas"/>
+              </a:rPr>
+              <a:t>建てる時</a:t>
+            </a:r>
+          </a:p>
+        </p:txBody>
+      </p:sp>
+      <p:sp>
+        <p:nvSpPr>
+          <p:cNvPr id="20" name="TextBox 19"/>
+          <p:cNvSpPr txBox="1"/>
+          <p:nvPr/>
+        </p:nvSpPr>
+        <p:spPr>
+          <a:xfrm>
+            <a:off x="2916936" y="2770632"/>
+            <a:ext cx="2798063" cy="932688"/>
+          </a:xfrm>
+          <a:prstGeom prst="rect">
+            <a:avLst/>
+          </a:prstGeom>
+          <a:noFill/>
+        </p:spPr>
+        <p:txBody>
+          <a:bodyPr wrap="square" anchor="ctr" lIns="0" rIns="0" tIns="0" bIns="0">
+            <a:spAutoFit/>
+          </a:bodyPr>
+          <a:lstStyle/>
+          <a:p>
+            <a:pPr algn="l">
+              <a:lnSpc>
+                <a:spcPct val="116000"/>
+              </a:lnSpc>
+              <a:spcBef>
+                <a:spcPts val="0"/>
+              </a:spcBef>
+              <a:spcAft>
+                <a:spcPts val="400"/>
+              </a:spcAft>
+            </a:pPr>
+            <a:r>
+              <a:rPr sz="1100" b="0">
+                <a:solidFill>
+                  <a:srgbClr val="3C4148"/>
+                </a:solidFill>
+                <a:latin typeface="Noto Sans JP"/>
+                <a:ea typeface="Noto Sans JP"/>
+              </a:rPr>
+              <a:t>通電・調整・性能検証で“動かす”</a:t>
+            </a:r>
+          </a:p>
+        </p:txBody>
+      </p:sp>
+      <p:sp>
+        <p:nvSpPr>
+          <p:cNvPr id="21" name="TextBox 20"/>
+          <p:cNvSpPr txBox="1"/>
+          <p:nvPr/>
+        </p:nvSpPr>
+        <p:spPr>
+          <a:xfrm>
+            <a:off x="5934455" y="2916936"/>
+            <a:ext cx="1929384" cy="457200"/>
+          </a:xfrm>
+          <a:prstGeom prst="rect">
+            <a:avLst/>
+          </a:prstGeom>
+          <a:noFill/>
+        </p:spPr>
+        <p:txBody>
+          <a:bodyPr wrap="square" anchor="t" lIns="0" rIns="0" tIns="0" bIns="0">
+            <a:spAutoFit/>
+          </a:bodyPr>
+          <a:lstStyle/>
+          <a:p>
+            <a:pPr algn="l">
+              <a:lnSpc>
+                <a:spcPct val="106000"/>
+              </a:lnSpc>
+              <a:spcBef>
+                <a:spcPts val="0"/>
+              </a:spcBef>
+              <a:spcAft>
+                <a:spcPts val="400"/>
+              </a:spcAft>
+            </a:pPr>
+            <a:r>
+              <a:rPr sz="2000" b="1">
+                <a:solidFill>
+                  <a:srgbClr val="E60012"/>
+                </a:solidFill>
+                <a:latin typeface="Noto Sans JP"/>
+                <a:ea typeface="Noto Sans JP"/>
+              </a:rPr>
+              <a:t>約1〜3%</a:t>
+            </a:r>
+          </a:p>
+        </p:txBody>
+      </p:sp>
+      <p:sp>
+        <p:nvSpPr>
+          <p:cNvPr id="22" name="TextBox 21"/>
+          <p:cNvSpPr txBox="1"/>
+          <p:nvPr/>
+        </p:nvSpPr>
+        <p:spPr>
+          <a:xfrm>
+            <a:off x="5934455" y="3337560"/>
+            <a:ext cx="1929384" cy="292608"/>
+          </a:xfrm>
+          <a:prstGeom prst="rect">
+            <a:avLst/>
+          </a:prstGeom>
+          <a:noFill/>
+        </p:spPr>
+        <p:txBody>
+          <a:bodyPr wrap="square" anchor="t" lIns="0" rIns="0" tIns="0" bIns="0">
+            <a:spAutoFit/>
+          </a:bodyPr>
+          <a:lstStyle/>
+          <a:p>
+            <a:pPr algn="l">
+              <a:lnSpc>
+                <a:spcPct val="105000"/>
+              </a:lnSpc>
+              <a:spcBef>
+                <a:spcPts val="0"/>
+              </a:spcBef>
+              <a:spcAft>
+                <a:spcPts val="400"/>
+              </a:spcAft>
+            </a:pPr>
+            <a:r>
+              <a:rPr sz="850" b="1">
+                <a:solidFill>
+                  <a:srgbClr val="8A9098"/>
+                </a:solidFill>
+                <a:latin typeface="Consolas"/>
+                <a:ea typeface="Consolas"/>
+              </a:rPr>
+              <a:t>＋ 建設費の1〜3%</a:t>
+            </a:r>
+          </a:p>
+        </p:txBody>
+      </p:sp>
+      <p:sp>
+        <p:nvSpPr>
+          <p:cNvPr id="23" name="TextBox 22"/>
+          <p:cNvSpPr txBox="1"/>
+          <p:nvPr/>
+        </p:nvSpPr>
+        <p:spPr>
+          <a:xfrm>
+            <a:off x="8083296" y="2770632"/>
+            <a:ext cx="3218687" cy="932688"/>
+          </a:xfrm>
+          <a:prstGeom prst="rect">
+            <a:avLst/>
+          </a:prstGeom>
+          <a:noFill/>
+        </p:spPr>
+        <p:txBody>
+          <a:bodyPr wrap="square" anchor="ctr" lIns="0" rIns="0" tIns="0" bIns="0">
+            <a:spAutoFit/>
+          </a:bodyPr>
+          <a:lstStyle/>
+          <a:p>
+            <a:pPr algn="l">
+              <a:lnSpc>
+                <a:spcPct val="116000"/>
+              </a:lnSpc>
+              <a:spcBef>
+                <a:spcPts val="0"/>
+              </a:spcBef>
+              <a:spcAft>
+                <a:spcPts val="400"/>
+              </a:spcAft>
+            </a:pPr>
+            <a:r>
+              <a:rPr sz="1050" b="1">
+                <a:solidFill>
+                  <a:srgbClr val="1A1D21"/>
+                </a:solidFill>
+                <a:latin typeface="Noto Sans JP"/>
+                <a:ea typeface="Noto Sans JP"/>
+              </a:rPr>
+              <a:t>試運転サービス市場 $2.15B→$4.25B（'24→'33）</a:t>
+            </a:r>
+          </a:p>
+        </p:txBody>
+      </p:sp>
+      <p:sp>
+        <p:nvSpPr>
+          <p:cNvPr id="24" name="TextBox 23"/>
+          <p:cNvSpPr txBox="1"/>
+          <p:nvPr/>
+        </p:nvSpPr>
+        <p:spPr>
+          <a:xfrm>
+            <a:off x="905256" y="3831336"/>
+            <a:ext cx="1810512" cy="749808"/>
+          </a:xfrm>
+          <a:prstGeom prst="rect">
+            <a:avLst/>
+          </a:prstGeom>
+          <a:noFill/>
+        </p:spPr>
+        <p:txBody>
+          <a:bodyPr wrap="square" anchor="t" lIns="0" rIns="0" tIns="0" bIns="0">
+            <a:spAutoFit/>
+          </a:bodyPr>
+          <a:lstStyle/>
+          <a:p>
+            <a:pPr algn="l">
+              <a:lnSpc>
+                <a:spcPct val="110000"/>
+              </a:lnSpc>
+              <a:spcBef>
+                <a:spcPts val="0"/>
+              </a:spcBef>
+              <a:spcAft>
+                <a:spcPts val="300"/>
+              </a:spcAft>
+            </a:pPr>
+            <a:r>
+              <a:rPr sz="1300" b="1">
+                <a:solidFill>
+                  <a:srgbClr val="1A1D21"/>
+                </a:solidFill>
+                <a:latin typeface="Noto Sans JP"/>
+                <a:ea typeface="Noto Sans JP"/>
+              </a:rPr>
+              <a:t>③ 保守・運用</a:t>
+            </a:r>
+          </a:p>
+          <a:p>
+            <a:pPr algn="l">
+              <a:lnSpc>
+                <a:spcPct val="110000"/>
+              </a:lnSpc>
+              <a:spcBef>
+                <a:spcPts val="0"/>
+              </a:spcBef>
+              <a:spcAft>
+                <a:spcPts val="300"/>
+              </a:spcAft>
+            </a:pPr>
+            <a:r>
+              <a:rPr sz="850" b="1">
+                <a:solidFill>
+                  <a:srgbClr val="454B54"/>
+                </a:solidFill>
+                <a:latin typeface="Consolas"/>
+                <a:ea typeface="Consolas"/>
+              </a:rPr>
+              <a:t>建てた後ずっと</a:t>
+            </a:r>
+          </a:p>
+        </p:txBody>
+      </p:sp>
+      <p:sp>
+        <p:nvSpPr>
+          <p:cNvPr id="25" name="TextBox 24"/>
+          <p:cNvSpPr txBox="1"/>
+          <p:nvPr/>
+        </p:nvSpPr>
+        <p:spPr>
+          <a:xfrm>
+            <a:off x="2916936" y="3703320"/>
+            <a:ext cx="2798063" cy="932688"/>
+          </a:xfrm>
+          <a:prstGeom prst="rect">
+            <a:avLst/>
+          </a:prstGeom>
+          <a:noFill/>
+        </p:spPr>
+        <p:txBody>
+          <a:bodyPr wrap="square" anchor="ctr" lIns="0" rIns="0" tIns="0" bIns="0">
+            <a:spAutoFit/>
+          </a:bodyPr>
+          <a:lstStyle/>
+          <a:p>
+            <a:pPr algn="l">
+              <a:lnSpc>
+                <a:spcPct val="116000"/>
+              </a:lnSpc>
+              <a:spcBef>
+                <a:spcPts val="0"/>
+              </a:spcBef>
+              <a:spcAft>
+                <a:spcPts val="400"/>
+              </a:spcAft>
+            </a:pPr>
+            <a:r>
+              <a:rPr sz="1100" b="0">
+                <a:solidFill>
+                  <a:srgbClr val="3C4148"/>
+                </a:solidFill>
+                <a:latin typeface="Noto Sans JP"/>
+                <a:ea typeface="Noto Sans JP"/>
+              </a:rPr>
+              <a:t>点検・更新・障害対応（稼働中ずっと）</a:t>
+            </a:r>
+          </a:p>
+        </p:txBody>
+      </p:sp>
+      <p:sp>
+        <p:nvSpPr>
+          <p:cNvPr id="26" name="TextBox 25"/>
+          <p:cNvSpPr txBox="1"/>
+          <p:nvPr/>
+        </p:nvSpPr>
+        <p:spPr>
+          <a:xfrm>
+            <a:off x="5934455" y="3849624"/>
+            <a:ext cx="1929384" cy="457200"/>
+          </a:xfrm>
+          <a:prstGeom prst="rect">
+            <a:avLst/>
+          </a:prstGeom>
+          <a:noFill/>
+        </p:spPr>
+        <p:txBody>
+          <a:bodyPr wrap="square" anchor="t" lIns="0" rIns="0" tIns="0" bIns="0">
+            <a:spAutoFit/>
+          </a:bodyPr>
+          <a:lstStyle/>
+          <a:p>
+            <a:pPr algn="l">
+              <a:lnSpc>
+                <a:spcPct val="106000"/>
+              </a:lnSpc>
+              <a:spcBef>
+                <a:spcPts val="0"/>
+              </a:spcBef>
+              <a:spcAft>
+                <a:spcPts val="400"/>
+              </a:spcAft>
+            </a:pPr>
+            <a:r>
+              <a:rPr sz="2000" b="1">
+                <a:solidFill>
+                  <a:srgbClr val="E60012"/>
+                </a:solidFill>
+                <a:latin typeface="Noto Sans JP"/>
+                <a:ea typeface="Noto Sans JP"/>
+              </a:rPr>
+              <a:t>毎年発生</a:t>
+            </a:r>
+          </a:p>
+        </p:txBody>
+      </p:sp>
+      <p:sp>
+        <p:nvSpPr>
+          <p:cNvPr id="27" name="TextBox 26"/>
+          <p:cNvSpPr txBox="1"/>
+          <p:nvPr/>
+        </p:nvSpPr>
+        <p:spPr>
+          <a:xfrm>
+            <a:off x="5934455" y="4270248"/>
+            <a:ext cx="1929384" cy="292608"/>
+          </a:xfrm>
+          <a:prstGeom prst="rect">
+            <a:avLst/>
+          </a:prstGeom>
+          <a:noFill/>
+        </p:spPr>
+        <p:txBody>
+          <a:bodyPr wrap="square" anchor="t" lIns="0" rIns="0" tIns="0" bIns="0">
+            <a:spAutoFit/>
+          </a:bodyPr>
+          <a:lstStyle/>
+          <a:p>
+            <a:pPr algn="l">
+              <a:lnSpc>
+                <a:spcPct val="105000"/>
+              </a:lnSpc>
+              <a:spcBef>
+                <a:spcPts val="0"/>
+              </a:spcBef>
+              <a:spcAft>
+                <a:spcPts val="400"/>
+              </a:spcAft>
+            </a:pPr>
+            <a:r>
+              <a:rPr sz="850" b="1">
+                <a:solidFill>
+                  <a:srgbClr val="8A9098"/>
+                </a:solidFill>
+                <a:latin typeface="Consolas"/>
+                <a:ea typeface="Consolas"/>
+              </a:rPr>
+              <a:t>運用費の約4割（毎年）</a:t>
+            </a:r>
+          </a:p>
+        </p:txBody>
+      </p:sp>
+      <p:sp>
+        <p:nvSpPr>
+          <p:cNvPr id="28" name="TextBox 27"/>
+          <p:cNvSpPr txBox="1"/>
+          <p:nvPr/>
+        </p:nvSpPr>
+        <p:spPr>
+          <a:xfrm>
+            <a:off x="8083296" y="3703320"/>
+            <a:ext cx="3218687" cy="932688"/>
+          </a:xfrm>
+          <a:prstGeom prst="rect">
+            <a:avLst/>
+          </a:prstGeom>
+          <a:noFill/>
+        </p:spPr>
+        <p:txBody>
+          <a:bodyPr wrap="square" anchor="ctr" lIns="0" rIns="0" tIns="0" bIns="0">
+            <a:spAutoFit/>
+          </a:bodyPr>
+          <a:lstStyle/>
+          <a:p>
+            <a:pPr algn="l">
+              <a:lnSpc>
+                <a:spcPct val="116000"/>
+              </a:lnSpc>
+              <a:spcBef>
+                <a:spcPts val="0"/>
+              </a:spcBef>
+              <a:spcAft>
+                <a:spcPts val="400"/>
+              </a:spcAft>
+            </a:pPr>
+            <a:r>
+              <a:rPr sz="1050" b="1">
+                <a:solidFill>
+                  <a:srgbClr val="1A1D21"/>
+                </a:solidFill>
+                <a:latin typeface="Noto Sans JP"/>
+                <a:ea typeface="Noto Sans JP"/>
+              </a:rPr>
+              <a:t>DC運用保守市場 $15.8B→$45.6B（'24→'33）</a:t>
+            </a:r>
+          </a:p>
+        </p:txBody>
+      </p:sp>
+      <p:sp>
+        <p:nvSpPr>
+          <p:cNvPr id="29" name="Rectangle 28"/>
           <p:cNvSpPr/>
           <p:nvPr/>
         </p:nvSpPr>
         <p:spPr>
           <a:xfrm>
-            <a:off x="6094476" y="1463040"/>
-            <a:ext cx="2530602" cy="91440"/>
+            <a:off x="777240" y="1837944"/>
+            <a:ext cx="10634472" cy="9144"/>
           </a:xfrm>
           <a:prstGeom prst="rect">
             <a:avLst/>
           </a:prstGeom>
           <a:solidFill>
-            <a:srgbClr val="E60012"/>
+            <a:srgbClr val="E2E4E9"/>
           </a:solidFill>
           <a:ln>
             <a:noFill/>
@@ -9198,165 +9564,23 @@
       </p:sp>
       <p:sp>
         <p:nvSpPr>
-          <p:cNvPr id="18" name="TextBox 17"/>
-          <p:cNvSpPr txBox="1"/>
-          <p:nvPr/>
-        </p:nvSpPr>
-        <p:spPr>
-          <a:xfrm>
-            <a:off x="6277356" y="1682496"/>
-            <a:ext cx="2164842" cy="822960"/>
-          </a:xfrm>
-          <a:prstGeom prst="rect">
-            <a:avLst/>
-          </a:prstGeom>
-          <a:noFill/>
-        </p:spPr>
-        <p:txBody>
-          <a:bodyPr wrap="square" anchor="t" lIns="0" rIns="0" tIns="0" bIns="0">
-            <a:spAutoFit/>
-          </a:bodyPr>
-          <a:lstStyle/>
-          <a:p>
-            <a:pPr algn="l">
-              <a:lnSpc>
-                <a:spcPct val="116000"/>
-              </a:lnSpc>
-              <a:spcBef>
-                <a:spcPts val="0"/>
-              </a:spcBef>
-              <a:spcAft>
-                <a:spcPts val="500"/>
-              </a:spcAft>
-            </a:pPr>
-            <a:r>
-              <a:rPr sz="1400" b="1">
-                <a:solidFill>
-                  <a:srgbClr val="1A1D21"/>
-                </a:solidFill>
-                <a:latin typeface="Noto Sans JP"/>
-                <a:ea typeface="Noto Sans JP"/>
-              </a:rPr>
-              <a:t>③  試運転・調整</a:t>
-            </a:r>
-          </a:p>
-          <a:p>
-            <a:pPr algn="l">
-              <a:lnSpc>
-                <a:spcPct val="116000"/>
-              </a:lnSpc>
-              <a:spcBef>
-                <a:spcPts val="0"/>
-              </a:spcBef>
-              <a:spcAft>
-                <a:spcPts val="500"/>
-              </a:spcAft>
-            </a:pPr>
-            <a:r>
-              <a:rPr sz="950" b="1">
-                <a:solidFill>
-                  <a:srgbClr val="E60012"/>
-                </a:solidFill>
-                <a:latin typeface="Consolas"/>
-                <a:ea typeface="Consolas"/>
-              </a:rPr>
-              <a:t>● 現場でつづく</a:t>
-            </a:r>
-          </a:p>
-          <a:p>
-            <a:pPr algn="l">
-              <a:lnSpc>
-                <a:spcPct val="116000"/>
-              </a:lnSpc>
-              <a:spcBef>
-                <a:spcPts val="0"/>
-              </a:spcBef>
-              <a:spcAft>
-                <a:spcPts val="500"/>
-              </a:spcAft>
-            </a:pPr>
-            <a:r>
-              <a:rPr sz="1000" b="0">
-                <a:solidFill>
-                  <a:srgbClr val="3C4148"/>
-                </a:solidFill>
-                <a:latin typeface="Noto Sans JP"/>
-                <a:ea typeface="Noto Sans JP"/>
-              </a:rPr>
-              <a:t>コミッショニング。建設費の1〜3%が試運転に。</a:t>
-            </a:r>
-          </a:p>
-        </p:txBody>
-      </p:sp>
-      <p:sp>
-        <p:nvSpPr>
-          <p:cNvPr id="19" name="TextBox 18"/>
-          <p:cNvSpPr txBox="1"/>
-          <p:nvPr/>
-        </p:nvSpPr>
-        <p:spPr>
-          <a:xfrm>
-            <a:off x="8606790" y="1920240"/>
-            <a:ext cx="256032" cy="548640"/>
-          </a:xfrm>
-          <a:prstGeom prst="rect">
-            <a:avLst/>
-          </a:prstGeom>
-          <a:noFill/>
-        </p:spPr>
-        <p:txBody>
-          <a:bodyPr wrap="square" anchor="t" lIns="0" rIns="0" tIns="0" bIns="0">
-            <a:spAutoFit/>
-          </a:bodyPr>
-          <a:lstStyle/>
-          <a:p>
-            <a:pPr algn="ctr">
-              <a:lnSpc>
-                <a:spcPct val="106000"/>
-              </a:lnSpc>
-              <a:spcBef>
-                <a:spcPts val="0"/>
-              </a:spcBef>
-              <a:spcAft>
-                <a:spcPts val="400"/>
-              </a:spcAft>
-            </a:pPr>
-            <a:r>
-              <a:rPr sz="1800" b="1">
-                <a:solidFill>
-                  <a:srgbClr val="E60012"/>
-                </a:solidFill>
-                <a:latin typeface="Consolas"/>
-                <a:ea typeface="Consolas"/>
-              </a:rPr>
-              <a:t>→</a:t>
-            </a:r>
-          </a:p>
-        </p:txBody>
-      </p:sp>
-      <p:sp>
-        <p:nvSpPr>
-          <p:cNvPr id="20" name="Rounded Rectangle 19"/>
+          <p:cNvPr id="30" name="Rectangle 29"/>
           <p:cNvSpPr/>
           <p:nvPr/>
         </p:nvSpPr>
         <p:spPr>
           <a:xfrm>
-            <a:off x="8753094" y="1463040"/>
-            <a:ext cx="2530602" cy="1691640"/>
-          </a:xfrm>
-          <a:prstGeom prst="roundRect">
-            <a:avLst>
-              <a:gd name="adj" fmla="val 6000"/>
-            </a:avLst>
+            <a:off x="777240" y="2770632"/>
+            <a:ext cx="10634472" cy="9144"/>
+          </a:xfrm>
+          <a:prstGeom prst="rect">
+            <a:avLst/>
           </a:prstGeom>
           <a:solidFill>
-            <a:srgbClr val="FFFFFF"/>
+            <a:srgbClr val="E2E4E9"/>
           </a:solidFill>
-          <a:ln w="15240">
-            <a:solidFill>
-              <a:srgbClr val="F3C7CD"/>
-            </a:solidFill>
+          <a:ln>
+            <a:noFill/>
           </a:ln>
           <a:effectLst/>
         </p:spPr>
@@ -9384,20 +9608,20 @@
       </p:sp>
       <p:sp>
         <p:nvSpPr>
-          <p:cNvPr id="21" name="Rectangle 20"/>
+          <p:cNvPr id="31" name="Rectangle 30"/>
           <p:cNvSpPr/>
           <p:nvPr/>
         </p:nvSpPr>
         <p:spPr>
           <a:xfrm>
-            <a:off x="8753094" y="1463040"/>
-            <a:ext cx="2530602" cy="91440"/>
+            <a:off x="777240" y="3703320"/>
+            <a:ext cx="10634472" cy="9144"/>
           </a:xfrm>
           <a:prstGeom prst="rect">
             <a:avLst/>
           </a:prstGeom>
           <a:solidFill>
-            <a:srgbClr val="E60012"/>
+            <a:srgbClr val="E2E4E9"/>
           </a:solidFill>
           <a:ln>
             <a:noFill/>
@@ -9428,119 +9652,23 @@
       </p:sp>
       <p:sp>
         <p:nvSpPr>
-          <p:cNvPr id="22" name="TextBox 21"/>
-          <p:cNvSpPr txBox="1"/>
-          <p:nvPr/>
-        </p:nvSpPr>
-        <p:spPr>
-          <a:xfrm>
-            <a:off x="8935974" y="1682496"/>
-            <a:ext cx="2164842" cy="822960"/>
-          </a:xfrm>
-          <a:prstGeom prst="rect">
-            <a:avLst/>
-          </a:prstGeom>
-          <a:noFill/>
-        </p:spPr>
-        <p:txBody>
-          <a:bodyPr wrap="square" anchor="t" lIns="0" rIns="0" tIns="0" bIns="0">
-            <a:spAutoFit/>
-          </a:bodyPr>
-          <a:lstStyle/>
-          <a:p>
-            <a:pPr algn="l">
-              <a:lnSpc>
-                <a:spcPct val="116000"/>
-              </a:lnSpc>
-              <a:spcBef>
-                <a:spcPts val="0"/>
-              </a:spcBef>
-              <a:spcAft>
-                <a:spcPts val="500"/>
-              </a:spcAft>
-            </a:pPr>
-            <a:r>
-              <a:rPr sz="1400" b="1">
-                <a:solidFill>
-                  <a:srgbClr val="1A1D21"/>
-                </a:solidFill>
-                <a:latin typeface="Noto Sans JP"/>
-                <a:ea typeface="Noto Sans JP"/>
-              </a:rPr>
-              <a:t>④  アフター保守・運用</a:t>
-            </a:r>
-          </a:p>
-          <a:p>
-            <a:pPr algn="l">
-              <a:lnSpc>
-                <a:spcPct val="116000"/>
-              </a:lnSpc>
-              <a:spcBef>
-                <a:spcPts val="0"/>
-              </a:spcBef>
-              <a:spcAft>
-                <a:spcPts val="500"/>
-              </a:spcAft>
-            </a:pPr>
-            <a:r>
-              <a:rPr sz="950" b="1">
-                <a:solidFill>
-                  <a:srgbClr val="E60012"/>
-                </a:solidFill>
-                <a:latin typeface="Consolas"/>
-                <a:ea typeface="Consolas"/>
-              </a:rPr>
-              <a:t>● 現場でずっと</a:t>
-            </a:r>
-          </a:p>
-          <a:p>
-            <a:pPr algn="l">
-              <a:lnSpc>
-                <a:spcPct val="116000"/>
-              </a:lnSpc>
-              <a:spcBef>
-                <a:spcPts val="0"/>
-              </a:spcBef>
-              <a:spcAft>
-                <a:spcPts val="500"/>
-              </a:spcAft>
-            </a:pPr>
-            <a:r>
-              <a:rPr sz="1000" b="0">
-                <a:solidFill>
-                  <a:srgbClr val="3C4148"/>
-                </a:solidFill>
-                <a:latin typeface="Noto Sans JP"/>
-                <a:ea typeface="Noto Sans JP"/>
-              </a:rPr>
-              <a:t>引き渡し後も点検・更新が続く。建設は一度、保守は毎年。</a:t>
-            </a:r>
-          </a:p>
-        </p:txBody>
-      </p:sp>
-      <p:sp>
-        <p:nvSpPr>
-          <p:cNvPr id="23" name="Rounded Rectangle 22"/>
+          <p:cNvPr id="32" name="Rectangle 31"/>
           <p:cNvSpPr/>
           <p:nvPr/>
         </p:nvSpPr>
         <p:spPr>
           <a:xfrm>
-            <a:off x="777240" y="3310128"/>
-            <a:ext cx="10634472" cy="457200"/>
-          </a:xfrm>
-          <a:prstGeom prst="roundRect">
-            <a:avLst>
-              <a:gd name="adj" fmla="val 6000"/>
-            </a:avLst>
+            <a:off x="777240" y="4636008"/>
+            <a:ext cx="10634472" cy="9144"/>
+          </a:xfrm>
+          <a:prstGeom prst="rect">
+            <a:avLst/>
           </a:prstGeom>
           <a:solidFill>
-            <a:srgbClr val="F3F4F6"/>
+            <a:srgbClr val="E2E4E9"/>
           </a:solidFill>
-          <a:ln w="12700">
-            <a:solidFill>
-              <a:srgbClr val="E2E4E9"/>
-            </a:solidFill>
+          <a:ln>
+            <a:noFill/>
           </a:ln>
           <a:effectLst/>
         </p:spPr>
@@ -9568,93 +9696,23 @@
       </p:sp>
       <p:sp>
         <p:nvSpPr>
-          <p:cNvPr id="24" name="TextBox 23"/>
-          <p:cNvSpPr txBox="1"/>
-          <p:nvPr/>
-        </p:nvSpPr>
-        <p:spPr>
-          <a:xfrm>
-            <a:off x="1005840" y="3310128"/>
-            <a:ext cx="10241280" cy="457200"/>
-          </a:xfrm>
-          <a:prstGeom prst="rect">
-            <a:avLst/>
-          </a:prstGeom>
-          <a:noFill/>
-        </p:spPr>
-        <p:txBody>
-          <a:bodyPr wrap="square" anchor="ctr" lIns="0" rIns="0" tIns="0" bIns="0">
-            <a:spAutoFit/>
-          </a:bodyPr>
-          <a:lstStyle/>
-          <a:p>
-            <a:pPr algn="l">
-              <a:lnSpc>
-                <a:spcPct val="106000"/>
-              </a:lnSpc>
-              <a:spcBef>
-                <a:spcPts val="0"/>
-              </a:spcBef>
-              <a:spcAft>
-                <a:spcPts val="400"/>
-              </a:spcAft>
-            </a:pPr>
-            <a:r>
-              <a:rPr sz="1200" b="0">
-                <a:solidFill>
-                  <a:srgbClr val="3C4148"/>
-                </a:solidFill>
-                <a:latin typeface="Noto Sans JP"/>
-                <a:ea typeface="Noto Sans JP"/>
-              </a:rPr>
-              <a:t>4工程のうち </a:t>
-            </a:r>
-            <a:r>
-              <a:rPr sz="1200" b="1">
-                <a:solidFill>
-                  <a:srgbClr val="E60012"/>
-                </a:solidFill>
-                <a:latin typeface="Noto Sans JP"/>
-                <a:ea typeface="Noto Sans JP"/>
-              </a:rPr>
-              <a:t>3つが“現場”</a:t>
-            </a:r>
-            <a:r>
-              <a:rPr sz="1200" b="1">
-                <a:solidFill>
-                  <a:srgbClr val="1A1D21"/>
-                </a:solidFill>
-                <a:latin typeface="Noto Sans JP"/>
-                <a:ea typeface="Noto Sans JP"/>
-              </a:rPr>
-              <a:t>——製造業の設備ビジネスは、モノを売って終わりではなく、人が現場で動き続ける労働集約の世界。</a:t>
-            </a:r>
-          </a:p>
-        </p:txBody>
-      </p:sp>
-      <p:sp>
-        <p:nvSpPr>
-          <p:cNvPr id="25" name="Rounded Rectangle 24"/>
+          <p:cNvPr id="33" name="Rectangle 32"/>
           <p:cNvSpPr/>
           <p:nvPr/>
         </p:nvSpPr>
         <p:spPr>
           <a:xfrm>
-            <a:off x="777240" y="3931920"/>
-            <a:ext cx="5120640" cy="1417320"/>
-          </a:xfrm>
-          <a:prstGeom prst="roundRect">
-            <a:avLst>
-              <a:gd name="adj" fmla="val 5000"/>
-            </a:avLst>
+            <a:off x="2788920" y="1837944"/>
+            <a:ext cx="9144" cy="2798064"/>
+          </a:xfrm>
+          <a:prstGeom prst="rect">
+            <a:avLst/>
           </a:prstGeom>
           <a:solidFill>
-            <a:srgbClr val="FFFFFF"/>
+            <a:srgbClr val="E2E4E9"/>
           </a:solidFill>
-          <a:ln w="15240">
-            <a:solidFill>
-              <a:srgbClr val="F3C7CD"/>
-            </a:solidFill>
+          <a:ln>
+            <a:noFill/>
           </a:ln>
           <a:effectLst/>
         </p:spPr>
@@ -9682,14 +9740,150 @@
       </p:sp>
       <p:sp>
         <p:nvSpPr>
-          <p:cNvPr id="26" name="TextBox 25"/>
+          <p:cNvPr id="34" name="Rectangle 33"/>
+          <p:cNvSpPr/>
+          <p:nvPr/>
+        </p:nvSpPr>
+        <p:spPr>
+          <a:xfrm>
+            <a:off x="5806440" y="1837944"/>
+            <a:ext cx="9144" cy="2798064"/>
+          </a:xfrm>
+          <a:prstGeom prst="rect">
+            <a:avLst/>
+          </a:prstGeom>
+          <a:solidFill>
+            <a:srgbClr val="E2E4E9"/>
+          </a:solidFill>
+          <a:ln>
+            <a:noFill/>
+          </a:ln>
+          <a:effectLst/>
+        </p:spPr>
+        <p:style>
+          <a:lnRef idx="1">
+            <a:schemeClr val="accent1"/>
+          </a:lnRef>
+          <a:fillRef idx="3">
+            <a:schemeClr val="accent1"/>
+          </a:fillRef>
+          <a:effectRef idx="2">
+            <a:schemeClr val="accent1"/>
+          </a:effectRef>
+          <a:fontRef idx="minor">
+            <a:schemeClr val="lt1"/>
+          </a:fontRef>
+        </p:style>
+        <p:txBody>
+          <a:bodyPr rtlCol="0" anchor="ctr"/>
+          <a:lstStyle/>
+          <a:p>
+            <a:pPr algn="ctr"/>
+          </a:p>
+        </p:txBody>
+      </p:sp>
+      <p:sp>
+        <p:nvSpPr>
+          <p:cNvPr id="35" name="Rectangle 34"/>
+          <p:cNvSpPr/>
+          <p:nvPr/>
+        </p:nvSpPr>
+        <p:spPr>
+          <a:xfrm>
+            <a:off x="7955279" y="1837944"/>
+            <a:ext cx="9144" cy="2798064"/>
+          </a:xfrm>
+          <a:prstGeom prst="rect">
+            <a:avLst/>
+          </a:prstGeom>
+          <a:solidFill>
+            <a:srgbClr val="E2E4E9"/>
+          </a:solidFill>
+          <a:ln>
+            <a:noFill/>
+          </a:ln>
+          <a:effectLst/>
+        </p:spPr>
+        <p:style>
+          <a:lnRef idx="1">
+            <a:schemeClr val="accent1"/>
+          </a:lnRef>
+          <a:fillRef idx="3">
+            <a:schemeClr val="accent1"/>
+          </a:fillRef>
+          <a:effectRef idx="2">
+            <a:schemeClr val="accent1"/>
+          </a:effectRef>
+          <a:fontRef idx="minor">
+            <a:schemeClr val="lt1"/>
+          </a:fontRef>
+        </p:style>
+        <p:txBody>
+          <a:bodyPr rtlCol="0" anchor="ctr"/>
+          <a:lstStyle/>
+          <a:p>
+            <a:pPr algn="ctr"/>
+          </a:p>
+        </p:txBody>
+      </p:sp>
+      <p:sp>
+        <p:nvSpPr>
+          <p:cNvPr id="36" name="Rounded Rectangle 35"/>
+          <p:cNvSpPr/>
+          <p:nvPr/>
+        </p:nvSpPr>
+        <p:spPr>
+          <a:xfrm>
+            <a:off x="777240" y="4343400"/>
+            <a:ext cx="10634472" cy="457200"/>
+          </a:xfrm>
+          <a:prstGeom prst="roundRect">
+            <a:avLst>
+              <a:gd name="adj" fmla="val 6000"/>
+            </a:avLst>
+          </a:prstGeom>
+          <a:solidFill>
+            <a:srgbClr val="ECEEF1"/>
+          </a:solidFill>
+          <a:ln w="12700">
+            <a:solidFill>
+              <a:srgbClr val="454B54"/>
+            </a:solidFill>
+          </a:ln>
+          <a:effectLst/>
+        </p:spPr>
+        <p:style>
+          <a:lnRef idx="1">
+            <a:schemeClr val="accent1"/>
+          </a:lnRef>
+          <a:fillRef idx="3">
+            <a:schemeClr val="accent1"/>
+          </a:fillRef>
+          <a:effectRef idx="2">
+            <a:schemeClr val="accent1"/>
+          </a:effectRef>
+          <a:fontRef idx="minor">
+            <a:schemeClr val="lt1"/>
+          </a:fontRef>
+        </p:style>
+        <p:txBody>
+          <a:bodyPr rtlCol="0" anchor="ctr"/>
+          <a:lstStyle/>
+          <a:p>
+            <a:pPr algn="ctr"/>
+          </a:p>
+        </p:txBody>
+      </p:sp>
+      <p:sp>
+        <p:nvSpPr>
+          <p:cNvPr id="37" name="TextBox 36"/>
           <p:cNvSpPr txBox="1"/>
           <p:nvPr/>
         </p:nvSpPr>
         <p:spPr>
           <a:xfrm>
-            <a:off x="1005840" y="4096512"/>
-            <a:ext cx="4754880" cy="274320"/>
+            <a:off x="1005840" y="4343400"/>
+            <a:ext cx="10241280" cy="457200"/>
           </a:xfrm>
           <a:prstGeom prst="rect">
             <a:avLst/>
@@ -9697,7 +9891,7 @@
           <a:noFill/>
         </p:spPr>
         <p:txBody>
-          <a:bodyPr wrap="square" anchor="t" lIns="0" rIns="0" tIns="0" bIns="0">
+          <a:bodyPr wrap="square" anchor="ctr" lIns="0" rIns="0" tIns="0" bIns="0">
             <a:spAutoFit/>
           </a:bodyPr>
           <a:lstStyle/>
@@ -9714,97 +9908,48 @@
               </a:spcAft>
             </a:pPr>
             <a:r>
-              <a:rPr sz="1050" b="1">
-                <a:solidFill>
-                  <a:srgbClr val="E60012"/>
-                </a:solidFill>
-                <a:latin typeface="Consolas"/>
-                <a:ea typeface="Consolas"/>
-              </a:rPr>
-              <a:t>保守（O&amp;M）は“毎年”積み上がる別市場</a:t>
-            </a:r>
-          </a:p>
-        </p:txBody>
-      </p:sp>
-      <p:sp>
-        <p:nvSpPr>
-          <p:cNvPr id="27" name="TextBox 26"/>
-          <p:cNvSpPr txBox="1"/>
-          <p:nvPr/>
-        </p:nvSpPr>
-        <p:spPr>
-          <a:xfrm>
-            <a:off x="1005840" y="4407408"/>
-            <a:ext cx="4754880" cy="822960"/>
-          </a:xfrm>
-          <a:prstGeom prst="rect">
-            <a:avLst/>
-          </a:prstGeom>
-          <a:noFill/>
-        </p:spPr>
-        <p:txBody>
-          <a:bodyPr wrap="square" anchor="t" lIns="0" rIns="0" tIns="0" bIns="0">
-            <a:spAutoFit/>
-          </a:bodyPr>
-          <a:lstStyle/>
-          <a:p>
-            <a:pPr algn="l">
-              <a:lnSpc>
-                <a:spcPct val="115000"/>
-              </a:lnSpc>
-              <a:spcBef>
-                <a:spcPts val="0"/>
-              </a:spcBef>
-              <a:spcAft>
-                <a:spcPts val="400"/>
-              </a:spcAft>
-            </a:pPr>
-            <a:r>
-              <a:rPr sz="2200" b="1">
-                <a:solidFill>
-                  <a:srgbClr val="E60012"/>
-                </a:solidFill>
-                <a:latin typeface="Consolas"/>
-                <a:ea typeface="Consolas"/>
-              </a:rPr>
-              <a:t>$15.8B → $45.6B</a:t>
-            </a:r>
-          </a:p>
-          <a:p>
-            <a:pPr algn="l">
-              <a:lnSpc>
-                <a:spcPct val="115000"/>
-              </a:lnSpc>
-              <a:spcBef>
-                <a:spcPts val="0"/>
-              </a:spcBef>
-              <a:spcAft>
-                <a:spcPts val="400"/>
-              </a:spcAft>
-            </a:pPr>
-            <a:r>
-              <a:rPr sz="1000" b="0">
-                <a:solidFill>
-                  <a:srgbClr val="3C4148"/>
+              <a:rPr sz="1150" b="1">
+                <a:solidFill>
+                  <a:srgbClr val="454B54"/>
                 </a:solidFill>
                 <a:latin typeface="Noto Sans JP"/>
                 <a:ea typeface="Noto Sans JP"/>
               </a:rPr>
-              <a:t>DC運用保守サービス市場（世界・2024→2033）。年率+11%で拡大。</a:t>
-            </a:r>
-          </a:p>
-        </p:txBody>
-      </p:sp>
-      <p:sp>
-        <p:nvSpPr>
-          <p:cNvPr id="28" name="Rounded Rectangle 27"/>
+              <a:t>①②「建てる時」は一度きり。</a:t>
+            </a:r>
+            <a:r>
+              <a:rPr sz="1150" b="1">
+                <a:solidFill>
+                  <a:srgbClr val="E60012"/>
+                </a:solidFill>
+                <a:latin typeface="Noto Sans JP"/>
+                <a:ea typeface="Noto Sans JP"/>
+              </a:rPr>
+              <a:t> だが ③「保守」は稼働中ずっと、毎年続く。</a:t>
+            </a:r>
+            <a:r>
+              <a:rPr sz="1150" b="1">
+                <a:solidFill>
+                  <a:srgbClr val="1A1D21"/>
+                </a:solidFill>
+                <a:latin typeface="Noto Sans JP"/>
+                <a:ea typeface="Noto Sans JP"/>
+              </a:rPr>
+              <a:t> → 一度つかんだ現場が、長く残る。</a:t>
+            </a:r>
+          </a:p>
+        </p:txBody>
+      </p:sp>
+      <p:sp>
+        <p:nvSpPr>
+          <p:cNvPr id="38" name="Rounded Rectangle 37"/>
           <p:cNvSpPr/>
           <p:nvPr/>
         </p:nvSpPr>
         <p:spPr>
           <a:xfrm>
-            <a:off x="6080760" y="3931920"/>
-            <a:ext cx="5330952" cy="1417320"/>
+            <a:off x="777240" y="4956048"/>
+            <a:ext cx="10634472" cy="804672"/>
           </a:xfrm>
           <a:prstGeom prst="roundRect">
             <a:avLst>
@@ -9845,14 +9990,70 @@
       </p:sp>
       <p:sp>
         <p:nvSpPr>
-          <p:cNvPr id="29" name="TextBox 28"/>
+          <p:cNvPr id="39" name="TextBox 38"/>
           <p:cNvSpPr txBox="1"/>
           <p:nvPr/>
         </p:nvSpPr>
         <p:spPr>
           <a:xfrm>
-            <a:off x="6309360" y="4114800"/>
-            <a:ext cx="4937760" cy="1097280"/>
+            <a:off x="1051560" y="4956048"/>
+            <a:ext cx="10058400" cy="804672"/>
+          </a:xfrm>
+          <a:prstGeom prst="rect">
+            <a:avLst/>
+          </a:prstGeom>
+          <a:noFill/>
+        </p:spPr>
+        <p:txBody>
+          <a:bodyPr wrap="square" anchor="ctr" lIns="0" rIns="0" tIns="0" bIns="0">
+            <a:spAutoFit/>
+          </a:bodyPr>
+          <a:lstStyle/>
+          <a:p>
+            <a:pPr algn="l">
+              <a:lnSpc>
+                <a:spcPct val="115000"/>
+              </a:lnSpc>
+              <a:spcBef>
+                <a:spcPts val="0"/>
+              </a:spcBef>
+              <a:spcAft>
+                <a:spcPts val="400"/>
+              </a:spcAft>
+            </a:pPr>
+            <a:r>
+              <a:rPr sz="1500" b="1">
+                <a:solidFill>
+                  <a:srgbClr val="1A1D21"/>
+                </a:solidFill>
+                <a:latin typeface="Noto Sans JP"/>
+                <a:ea typeface="Noto Sans JP"/>
+              </a:rPr>
+              <a:t>これまで建設業だけを相手にしてきた。</a:t>
+            </a:r>
+            <a:r>
+              <a:rPr sz="1500" b="1">
+                <a:solidFill>
+                  <a:srgbClr val="E60012"/>
+                </a:solidFill>
+                <a:latin typeface="Noto Sans JP"/>
+                <a:ea typeface="Noto Sans JP"/>
+              </a:rPr>
+              <a:t>その周辺に、据付＋試運転＋保守という“人が動く”広大な市場がある。</a:t>
+            </a:r>
+          </a:p>
+        </p:txBody>
+      </p:sp>
+      <p:sp>
+        <p:nvSpPr>
+          <p:cNvPr id="40" name="TextBox 39"/>
+          <p:cNvSpPr txBox="1"/>
+          <p:nvPr/>
+        </p:nvSpPr>
+        <p:spPr>
+          <a:xfrm>
+            <a:off x="822960" y="5870448"/>
+            <a:ext cx="10515600" cy="320040"/>
           </a:xfrm>
           <a:prstGeom prst="rect">
             <a:avLst/>
@@ -9867,157 +10068,7 @@
           <a:p>
             <a:pPr algn="l">
               <a:lnSpc>
-                <a:spcPct val="116000"/>
-              </a:lnSpc>
-              <a:spcBef>
-                <a:spcPts val="0"/>
-              </a:spcBef>
-              <a:spcAft>
-                <a:spcPts val="500"/>
-              </a:spcAft>
-            </a:pPr>
-            <a:r>
-              <a:rPr sz="1350" b="1">
-                <a:solidFill>
-                  <a:srgbClr val="1A1D21"/>
-                </a:solidFill>
-                <a:latin typeface="Noto Sans JP"/>
-                <a:ea typeface="Noto Sans JP"/>
-              </a:rPr>
-              <a:t>＝ 建設の“周辺”に、より大きく・より長く続く</a:t>
-            </a:r>
-          </a:p>
-          <a:p>
-            <a:pPr algn="l">
-              <a:lnSpc>
-                <a:spcPct val="116000"/>
-              </a:lnSpc>
-              <a:spcBef>
-                <a:spcPts val="0"/>
-              </a:spcBef>
-              <a:spcAft>
-                <a:spcPts val="500"/>
-              </a:spcAft>
-            </a:pPr>
-            <a:r>
-              <a:rPr sz="1550" b="1">
-                <a:solidFill>
-                  <a:srgbClr val="E60012"/>
-                </a:solidFill>
-                <a:latin typeface="Noto Sans JP"/>
-                <a:ea typeface="Noto Sans JP"/>
-              </a:rPr>
-              <a:t>“人が動く現場”の市場</a:t>
-            </a:r>
-            <a:r>
-              <a:rPr sz="1350" b="1">
-                <a:solidFill>
-                  <a:srgbClr val="1A1D21"/>
-                </a:solidFill>
-                <a:latin typeface="Noto Sans JP"/>
-                <a:ea typeface="Noto Sans JP"/>
-              </a:rPr>
-              <a:t>が広がっている。</a:t>
-            </a:r>
-          </a:p>
-          <a:p>
-            <a:pPr algn="l">
-              <a:lnSpc>
-                <a:spcPct val="116000"/>
-              </a:lnSpc>
-              <a:spcBef>
-                <a:spcPts val="0"/>
-              </a:spcBef>
-              <a:spcAft>
-                <a:spcPts val="500"/>
-              </a:spcAft>
-            </a:pPr>
-            <a:r>
-              <a:rPr sz="1250" b="0">
-                <a:solidFill>
-                  <a:srgbClr val="3C4148"/>
-                </a:solidFill>
-                <a:latin typeface="Noto Sans JP"/>
-                <a:ea typeface="Noto Sans JP"/>
-              </a:rPr>
-              <a:t>ここはANDPADの現場管理が、そのまま効く。</a:t>
-            </a:r>
-          </a:p>
-        </p:txBody>
-      </p:sp>
-      <p:sp>
-        <p:nvSpPr>
-          <p:cNvPr id="30" name="Rounded Rectangle 29"/>
-          <p:cNvSpPr/>
-          <p:nvPr/>
-        </p:nvSpPr>
-        <p:spPr>
-          <a:xfrm>
-            <a:off x="777240" y="5504688"/>
-            <a:ext cx="10634472" cy="713232"/>
-          </a:xfrm>
-          <a:prstGeom prst="roundRect">
-            <a:avLst>
-              <a:gd name="adj" fmla="val 5000"/>
-            </a:avLst>
-          </a:prstGeom>
-          <a:solidFill>
-            <a:srgbClr val="ECEEF1"/>
-          </a:solidFill>
-          <a:ln w="15240">
-            <a:solidFill>
-              <a:srgbClr val="454B54"/>
-            </a:solidFill>
-          </a:ln>
-          <a:effectLst/>
-        </p:spPr>
-        <p:style>
-          <a:lnRef idx="1">
-            <a:schemeClr val="accent1"/>
-          </a:lnRef>
-          <a:fillRef idx="3">
-            <a:schemeClr val="accent1"/>
-          </a:fillRef>
-          <a:effectRef idx="2">
-            <a:schemeClr val="accent1"/>
-          </a:effectRef>
-          <a:fontRef idx="minor">
-            <a:schemeClr val="lt1"/>
-          </a:fontRef>
-        </p:style>
-        <p:txBody>
-          <a:bodyPr rtlCol="0" anchor="ctr"/>
-          <a:lstStyle/>
-          <a:p>
-            <a:pPr algn="ctr"/>
-          </a:p>
-        </p:txBody>
-      </p:sp>
-      <p:sp>
-        <p:nvSpPr>
-          <p:cNvPr id="31" name="TextBox 30"/>
-          <p:cNvSpPr txBox="1"/>
-          <p:nvPr/>
-        </p:nvSpPr>
-        <p:spPr>
-          <a:xfrm>
-            <a:off x="1051560" y="5504688"/>
-            <a:ext cx="10058400" cy="713232"/>
-          </a:xfrm>
-          <a:prstGeom prst="rect">
-            <a:avLst/>
-          </a:prstGeom>
-          <a:noFill/>
-        </p:spPr>
-        <p:txBody>
-          <a:bodyPr wrap="square" anchor="ctr" lIns="0" rIns="0" tIns="0" bIns="0">
-            <a:spAutoFit/>
-          </a:bodyPr>
-          <a:lstStyle/>
-          <a:p>
-            <a:pPr algn="l">
-              <a:lnSpc>
-                <a:spcPct val="115000"/>
+                <a:spcPct val="106000"/>
               </a:lnSpc>
               <a:spcBef>
                 <a:spcPts val="0"/>
@@ -10027,24 +10078,14 @@
               </a:spcAft>
             </a:pPr>
             <a:r>
-              <a:rPr sz="1450" b="1">
-                <a:solidFill>
-                  <a:srgbClr val="1A1D21"/>
-                </a:solidFill>
-                <a:latin typeface="Noto Sans JP"/>
-                <a:ea typeface="Noto Sans JP"/>
-              </a:rPr>
-              <a:t>これまで建設業だけを相手にしてきた。</a:t>
-            </a:r>
-            <a:r>
-              <a:rPr sz="1450" b="1">
-                <a:solidFill>
-                  <a:srgbClr val="E60012"/>
-                </a:solidFill>
-                <a:latin typeface="Noto Sans JP"/>
-                <a:ea typeface="Noto Sans JP"/>
-              </a:rPr>
-              <a:t>その周辺に、設備＋据付＋試運転＋保守という広大な市場がある。</a:t>
+              <a:rPr sz="850" b="0">
+                <a:solidFill>
+                  <a:srgbClr val="8A9098"/>
+                </a:solidFill>
+                <a:latin typeface="Consolas"/>
+                <a:ea typeface="Consolas"/>
+              </a:rPr>
+              <a:t>出典：試運転＝建設費1〜3%（業界目安）・DC試運転市場 DataIntelo／DC運用保守市場 DataHorizon／保守は運用費の約4割 Thunder Said Energy。</a:t>
             </a:r>
           </a:p>
         </p:txBody>

--- a/output/andpad_soukai_ai_deck.pptx
+++ b/output/andpad_soukai_ai_deck.pptx
@@ -5305,8 +5305,8 @@
         </p:nvSpPr>
         <p:spPr>
           <a:xfrm>
-            <a:off x="3886200" y="2414015"/>
-            <a:ext cx="3383280" cy="12801"/>
+            <a:off x="3749039" y="2221992"/>
+            <a:ext cx="3566160" cy="12801"/>
           </a:xfrm>
           <a:prstGeom prst="rect">
             <a:avLst/>
@@ -5349,8 +5349,8 @@
         </p:nvSpPr>
         <p:spPr>
           <a:xfrm>
-            <a:off x="4098798" y="2356632"/>
-            <a:ext cx="420624" cy="57383"/>
+            <a:off x="3966209" y="2175805"/>
+            <a:ext cx="457200" cy="46186"/>
           </a:xfrm>
           <a:prstGeom prst="roundRect">
             <a:avLst>
@@ -5389,14 +5389,60 @@
       </p:sp>
       <p:sp>
         <p:nvSpPr>
-          <p:cNvPr id="11" name="Rounded Rectangle 10"/>
+          <p:cNvPr id="11" name="TextBox 10"/>
+          <p:cNvSpPr txBox="1"/>
+          <p:nvPr/>
+        </p:nvSpPr>
+        <p:spPr>
+          <a:xfrm>
+            <a:off x="3749039" y="2267712"/>
+            <a:ext cx="891540" cy="219456"/>
+          </a:xfrm>
+          <a:prstGeom prst="rect">
+            <a:avLst/>
+          </a:prstGeom>
+          <a:noFill/>
+        </p:spPr>
+        <p:txBody>
+          <a:bodyPr wrap="square" anchor="t" lIns="0" rIns="0" tIns="0" bIns="0">
+            <a:spAutoFit/>
+          </a:bodyPr>
+          <a:lstStyle/>
+          <a:p>
+            <a:pPr algn="ctr">
+              <a:lnSpc>
+                <a:spcPct val="106000"/>
+              </a:lnSpc>
+              <a:spcBef>
+                <a:spcPts val="0"/>
+              </a:spcBef>
+              <a:spcAft>
+                <a:spcPts val="400"/>
+              </a:spcAft>
+            </a:pPr>
+            <a:r>
+              <a:rPr sz="850" b="1">
+                <a:solidFill>
+                  <a:srgbClr val="8A9098"/>
+                </a:solidFill>
+                <a:latin typeface="Consolas"/>
+                <a:ea typeface="Consolas"/>
+              </a:rPr>
+              <a:t>FY23</a:t>
+            </a:r>
+          </a:p>
+        </p:txBody>
+      </p:sp>
+      <p:sp>
+        <p:nvSpPr>
+          <p:cNvPr id="12" name="Rounded Rectangle 11"/>
           <p:cNvSpPr/>
           <p:nvPr/>
         </p:nvSpPr>
         <p:spPr>
           <a:xfrm>
-            <a:off x="4944618" y="2230389"/>
-            <a:ext cx="420624" cy="183626"/>
+            <a:off x="4857749" y="2074195"/>
+            <a:ext cx="457200" cy="147796"/>
           </a:xfrm>
           <a:prstGeom prst="roundRect">
             <a:avLst>
@@ -5435,14 +5481,60 @@
       </p:sp>
       <p:sp>
         <p:nvSpPr>
-          <p:cNvPr id="12" name="Rounded Rectangle 11"/>
+          <p:cNvPr id="13" name="TextBox 12"/>
+          <p:cNvSpPr txBox="1"/>
+          <p:nvPr/>
+        </p:nvSpPr>
+        <p:spPr>
+          <a:xfrm>
+            <a:off x="4640579" y="2267712"/>
+            <a:ext cx="891540" cy="219456"/>
+          </a:xfrm>
+          <a:prstGeom prst="rect">
+            <a:avLst/>
+          </a:prstGeom>
+          <a:noFill/>
+        </p:spPr>
+        <p:txBody>
+          <a:bodyPr wrap="square" anchor="t" lIns="0" rIns="0" tIns="0" bIns="0">
+            <a:spAutoFit/>
+          </a:bodyPr>
+          <a:lstStyle/>
+          <a:p>
+            <a:pPr algn="ctr">
+              <a:lnSpc>
+                <a:spcPct val="106000"/>
+              </a:lnSpc>
+              <a:spcBef>
+                <a:spcPts val="0"/>
+              </a:spcBef>
+              <a:spcAft>
+                <a:spcPts val="400"/>
+              </a:spcAft>
+            </a:pPr>
+            <a:r>
+              <a:rPr sz="850" b="1">
+                <a:solidFill>
+                  <a:srgbClr val="8A9098"/>
+                </a:solidFill>
+                <a:latin typeface="Consolas"/>
+                <a:ea typeface="Consolas"/>
+              </a:rPr>
+              <a:t>FY24</a:t>
+            </a:r>
+          </a:p>
+        </p:txBody>
+      </p:sp>
+      <p:sp>
+        <p:nvSpPr>
+          <p:cNvPr id="14" name="Rounded Rectangle 13"/>
           <p:cNvSpPr/>
           <p:nvPr/>
         </p:nvSpPr>
         <p:spPr>
           <a:xfrm>
-            <a:off x="5790438" y="1974077"/>
-            <a:ext cx="420624" cy="439938"/>
+            <a:off x="5749290" y="1867895"/>
+            <a:ext cx="457200" cy="354096"/>
           </a:xfrm>
           <a:prstGeom prst="roundRect">
             <a:avLst>
@@ -5481,14 +5573,60 @@
       </p:sp>
       <p:sp>
         <p:nvSpPr>
-          <p:cNvPr id="13" name="Rounded Rectangle 12"/>
+          <p:cNvPr id="15" name="TextBox 14"/>
+          <p:cNvSpPr txBox="1"/>
+          <p:nvPr/>
+        </p:nvSpPr>
+        <p:spPr>
+          <a:xfrm>
+            <a:off x="5532120" y="2267712"/>
+            <a:ext cx="891540" cy="219456"/>
+          </a:xfrm>
+          <a:prstGeom prst="rect">
+            <a:avLst/>
+          </a:prstGeom>
+          <a:noFill/>
+        </p:spPr>
+        <p:txBody>
+          <a:bodyPr wrap="square" anchor="t" lIns="0" rIns="0" tIns="0" bIns="0">
+            <a:spAutoFit/>
+          </a:bodyPr>
+          <a:lstStyle/>
+          <a:p>
+            <a:pPr algn="ctr">
+              <a:lnSpc>
+                <a:spcPct val="106000"/>
+              </a:lnSpc>
+              <a:spcBef>
+                <a:spcPts val="0"/>
+              </a:spcBef>
+              <a:spcAft>
+                <a:spcPts val="400"/>
+              </a:spcAft>
+            </a:pPr>
+            <a:r>
+              <a:rPr sz="850" b="1">
+                <a:solidFill>
+                  <a:srgbClr val="8A9098"/>
+                </a:solidFill>
+                <a:latin typeface="Consolas"/>
+                <a:ea typeface="Consolas"/>
+              </a:rPr>
+              <a:t>FY25</a:t>
+            </a:r>
+          </a:p>
+        </p:txBody>
+      </p:sp>
+      <p:sp>
+        <p:nvSpPr>
+          <p:cNvPr id="16" name="Rounded Rectangle 15"/>
           <p:cNvSpPr/>
           <p:nvPr/>
         </p:nvSpPr>
         <p:spPr>
           <a:xfrm>
-            <a:off x="6636258" y="1664207"/>
-            <a:ext cx="420624" cy="749808"/>
+            <a:off x="6640829" y="1618488"/>
+            <a:ext cx="457200" cy="603504"/>
           </a:xfrm>
           <a:prstGeom prst="roundRect">
             <a:avLst>
@@ -5527,14 +5665,14 @@
       </p:sp>
       <p:sp>
         <p:nvSpPr>
-          <p:cNvPr id="14" name="TextBox 13"/>
+          <p:cNvPr id="17" name="TextBox 16"/>
           <p:cNvSpPr txBox="1"/>
           <p:nvPr/>
         </p:nvSpPr>
         <p:spPr>
           <a:xfrm>
-            <a:off x="6179058" y="1408175"/>
-            <a:ext cx="1335024" cy="237744"/>
+            <a:off x="6423659" y="2267712"/>
+            <a:ext cx="891540" cy="219456"/>
           </a:xfrm>
           <a:prstGeom prst="rect">
             <a:avLst/>
@@ -5559,13 +5697,59 @@
               </a:spcAft>
             </a:pPr>
             <a:r>
-              <a:rPr sz="1000" b="1">
-                <a:solidFill>
-                  <a:srgbClr val="E60012"/>
+              <a:rPr sz="850" b="1">
+                <a:solidFill>
+                  <a:srgbClr val="8A9098"/>
                 </a:solidFill>
                 <a:latin typeface="Consolas"/>
                 <a:ea typeface="Consolas"/>
               </a:rPr>
+              <a:t>FY26</a:t>
+            </a:r>
+          </a:p>
+        </p:txBody>
+      </p:sp>
+      <p:sp>
+        <p:nvSpPr>
+          <p:cNvPr id="18" name="TextBox 17"/>
+          <p:cNvSpPr txBox="1"/>
+          <p:nvPr/>
+        </p:nvSpPr>
+        <p:spPr>
+          <a:xfrm>
+            <a:off x="6137909" y="1380744"/>
+            <a:ext cx="1463040" cy="219456"/>
+          </a:xfrm>
+          <a:prstGeom prst="rect">
+            <a:avLst/>
+          </a:prstGeom>
+          <a:noFill/>
+        </p:spPr>
+        <p:txBody>
+          <a:bodyPr wrap="square" anchor="t" lIns="0" rIns="0" tIns="0" bIns="0">
+            <a:spAutoFit/>
+          </a:bodyPr>
+          <a:lstStyle/>
+          <a:p>
+            <a:pPr algn="ctr">
+              <a:lnSpc>
+                <a:spcPct val="106000"/>
+              </a:lnSpc>
+              <a:spcBef>
+                <a:spcPts val="0"/>
+              </a:spcBef>
+              <a:spcAft>
+                <a:spcPts val="400"/>
+              </a:spcAft>
+            </a:pPr>
+            <a:r>
+              <a:rPr sz="950" b="1">
+                <a:solidFill>
+                  <a:srgbClr val="E60012"/>
+                </a:solidFill>
+                <a:latin typeface="Consolas"/>
+                <a:ea typeface="Consolas"/>
+              </a:rPr>
               <a:t>約2,000億ドル</a:t>
             </a:r>
           </a:p>
@@ -5573,14 +5757,14 @@
       </p:sp>
       <p:sp>
         <p:nvSpPr>
-          <p:cNvPr id="15" name="TextBox 14"/>
+          <p:cNvPr id="19" name="TextBox 18"/>
           <p:cNvSpPr txBox="1"/>
           <p:nvPr/>
         </p:nvSpPr>
         <p:spPr>
           <a:xfrm>
-            <a:off x="7635240" y="1517904"/>
-            <a:ext cx="2286000" cy="658368"/>
+            <a:off x="7818120" y="1600200"/>
+            <a:ext cx="2743200" cy="777240"/>
           </a:xfrm>
           <a:prstGeom prst="rect">
             <a:avLst/>
@@ -5605,7 +5789,7 @@
               </a:spcAft>
             </a:pPr>
             <a:r>
-              <a:rPr sz="3300" b="1">
+              <a:rPr sz="3400" b="1">
                 <a:solidFill>
                   <a:srgbClr val="E60012"/>
                 </a:solidFill>
@@ -5619,83 +5803,14 @@
       </p:sp>
       <p:sp>
         <p:nvSpPr>
-          <p:cNvPr id="16" name="TextBox 15"/>
-          <p:cNvSpPr txBox="1"/>
-          <p:nvPr/>
-        </p:nvSpPr>
-        <p:spPr>
-          <a:xfrm>
-            <a:off x="9921240" y="1627632"/>
-            <a:ext cx="1463040" cy="822960"/>
-          </a:xfrm>
-          <a:prstGeom prst="rect">
-            <a:avLst/>
-          </a:prstGeom>
-          <a:noFill/>
-        </p:spPr>
-        <p:txBody>
-          <a:bodyPr wrap="square" anchor="ctr" lIns="0" rIns="0" tIns="0" bIns="0">
-            <a:spAutoFit/>
-          </a:bodyPr>
-          <a:lstStyle/>
-          <a:p>
-            <a:pPr algn="l">
-              <a:lnSpc>
-                <a:spcPct val="112000"/>
-              </a:lnSpc>
-              <a:spcBef>
-                <a:spcPts val="0"/>
-              </a:spcBef>
-              <a:spcAft>
-                <a:spcPts val="200"/>
-              </a:spcAft>
-            </a:pPr>
-            <a:r>
-              <a:rPr sz="950" b="1">
-                <a:solidFill>
-                  <a:srgbClr val="3C4148"/>
-                </a:solidFill>
-                <a:latin typeface="Noto Sans JP"/>
-                <a:ea typeface="Noto Sans JP"/>
-              </a:rPr>
-              <a:t>3年（FY23→FY26）</a:t>
-            </a:r>
-          </a:p>
-          <a:p>
-            <a:pPr algn="l">
-              <a:lnSpc>
-                <a:spcPct val="112000"/>
-              </a:lnSpc>
-              <a:spcBef>
-                <a:spcPts val="0"/>
-              </a:spcBef>
-              <a:spcAft>
-                <a:spcPts val="200"/>
-              </a:spcAft>
-            </a:pPr>
-            <a:r>
-              <a:rPr sz="800" b="0">
-                <a:solidFill>
-                  <a:srgbClr val="8A9098"/>
-                </a:solidFill>
-                <a:latin typeface="Consolas"/>
-                <a:ea typeface="Consolas"/>
-              </a:rPr>
-              <a:t>NVIDIA IR</a:t>
-            </a:r>
-          </a:p>
-        </p:txBody>
-      </p:sp>
-      <p:sp>
-        <p:nvSpPr>
-          <p:cNvPr id="17" name="Rounded Rectangle 16"/>
+          <p:cNvPr id="20" name="Rounded Rectangle 19"/>
           <p:cNvSpPr/>
           <p:nvPr/>
         </p:nvSpPr>
         <p:spPr>
           <a:xfrm>
-            <a:off x="777240" y="2670048"/>
-            <a:ext cx="10634472" cy="1225295"/>
+            <a:off x="777240" y="2606040"/>
+            <a:ext cx="10634472" cy="1179576"/>
           </a:xfrm>
           <a:prstGeom prst="roundRect">
             <a:avLst>
@@ -5734,13 +5849,13 @@
       </p:sp>
       <p:sp>
         <p:nvSpPr>
-          <p:cNvPr id="18" name="TextBox 17"/>
+          <p:cNvPr id="21" name="TextBox 20"/>
           <p:cNvSpPr txBox="1"/>
           <p:nvPr/>
         </p:nvSpPr>
         <p:spPr>
           <a:xfrm>
-            <a:off x="960120" y="2852928"/>
+            <a:off x="960120" y="2788920"/>
             <a:ext cx="2788920" cy="868680"/>
           </a:xfrm>
           <a:prstGeom prst="rect">
@@ -5803,14 +5918,14 @@
       </p:sp>
       <p:sp>
         <p:nvSpPr>
-          <p:cNvPr id="19" name="Rectangle 18"/>
+          <p:cNvPr id="22" name="Rectangle 21"/>
           <p:cNvSpPr/>
           <p:nvPr/>
         </p:nvSpPr>
         <p:spPr>
           <a:xfrm>
-            <a:off x="3886200" y="3712463"/>
-            <a:ext cx="3383280" cy="12801"/>
+            <a:off x="3749039" y="3456432"/>
+            <a:ext cx="3566160" cy="12801"/>
           </a:xfrm>
           <a:prstGeom prst="rect">
             <a:avLst/>
@@ -5847,14 +5962,14 @@
       </p:sp>
       <p:sp>
         <p:nvSpPr>
-          <p:cNvPr id="20" name="Rounded Rectangle 19"/>
+          <p:cNvPr id="23" name="Rounded Rectangle 22"/>
           <p:cNvSpPr/>
           <p:nvPr/>
         </p:nvSpPr>
         <p:spPr>
           <a:xfrm>
-            <a:off x="4098798" y="3526304"/>
-            <a:ext cx="420624" cy="186159"/>
+            <a:off x="3966209" y="3306596"/>
+            <a:ext cx="457200" cy="149835"/>
           </a:xfrm>
           <a:prstGeom prst="roundRect">
             <a:avLst>
@@ -5893,14 +6008,60 @@
       </p:sp>
       <p:sp>
         <p:nvSpPr>
-          <p:cNvPr id="21" name="Rounded Rectangle 20"/>
+          <p:cNvPr id="24" name="TextBox 23"/>
+          <p:cNvSpPr txBox="1"/>
+          <p:nvPr/>
+        </p:nvSpPr>
+        <p:spPr>
+          <a:xfrm>
+            <a:off x="3749039" y="3502152"/>
+            <a:ext cx="891540" cy="219456"/>
+          </a:xfrm>
+          <a:prstGeom prst="rect">
+            <a:avLst/>
+          </a:prstGeom>
+          <a:noFill/>
+        </p:spPr>
+        <p:txBody>
+          <a:bodyPr wrap="square" anchor="t" lIns="0" rIns="0" tIns="0" bIns="0">
+            <a:spAutoFit/>
+          </a:bodyPr>
+          <a:lstStyle/>
+          <a:p>
+            <a:pPr algn="ctr">
+              <a:lnSpc>
+                <a:spcPct val="106000"/>
+              </a:lnSpc>
+              <a:spcBef>
+                <a:spcPts val="0"/>
+              </a:spcBef>
+              <a:spcAft>
+                <a:spcPts val="400"/>
+              </a:spcAft>
+            </a:pPr>
+            <a:r>
+              <a:rPr sz="850" b="1">
+                <a:solidFill>
+                  <a:srgbClr val="8A9098"/>
+                </a:solidFill>
+                <a:latin typeface="Consolas"/>
+                <a:ea typeface="Consolas"/>
+              </a:rPr>
+              <a:t>’23</a:t>
+            </a:r>
+          </a:p>
+        </p:txBody>
+      </p:sp>
+      <p:sp>
+        <p:nvSpPr>
+          <p:cNvPr id="25" name="Rounded Rectangle 24"/>
           <p:cNvSpPr/>
           <p:nvPr/>
         </p:nvSpPr>
         <p:spPr>
           <a:xfrm>
-            <a:off x="4944618" y="3474593"/>
-            <a:ext cx="420624" cy="237870"/>
+            <a:off x="4857749" y="3264975"/>
+            <a:ext cx="457200" cy="191456"/>
           </a:xfrm>
           <a:prstGeom prst="roundRect">
             <a:avLst>
@@ -5939,14 +6100,60 @@
       </p:sp>
       <p:sp>
         <p:nvSpPr>
-          <p:cNvPr id="22" name="Rounded Rectangle 21"/>
+          <p:cNvPr id="26" name="TextBox 25"/>
+          <p:cNvSpPr txBox="1"/>
+          <p:nvPr/>
+        </p:nvSpPr>
+        <p:spPr>
+          <a:xfrm>
+            <a:off x="4640579" y="3502152"/>
+            <a:ext cx="891540" cy="219456"/>
+          </a:xfrm>
+          <a:prstGeom prst="rect">
+            <a:avLst/>
+          </a:prstGeom>
+          <a:noFill/>
+        </p:spPr>
+        <p:txBody>
+          <a:bodyPr wrap="square" anchor="t" lIns="0" rIns="0" tIns="0" bIns="0">
+            <a:spAutoFit/>
+          </a:bodyPr>
+          <a:lstStyle/>
+          <a:p>
+            <a:pPr algn="ctr">
+              <a:lnSpc>
+                <a:spcPct val="106000"/>
+              </a:lnSpc>
+              <a:spcBef>
+                <a:spcPts val="0"/>
+              </a:spcBef>
+              <a:spcAft>
+                <a:spcPts val="400"/>
+              </a:spcAft>
+            </a:pPr>
+            <a:r>
+              <a:rPr sz="850" b="1">
+                <a:solidFill>
+                  <a:srgbClr val="8A9098"/>
+                </a:solidFill>
+                <a:latin typeface="Consolas"/>
+                <a:ea typeface="Consolas"/>
+              </a:rPr>
+              <a:t>’24</a:t>
+            </a:r>
+          </a:p>
+        </p:txBody>
+      </p:sp>
+      <p:sp>
+        <p:nvSpPr>
+          <p:cNvPr id="27" name="Rounded Rectangle 26"/>
           <p:cNvSpPr/>
           <p:nvPr/>
         </p:nvSpPr>
         <p:spPr>
           <a:xfrm>
-            <a:off x="5790438" y="3288434"/>
-            <a:ext cx="420624" cy="424029"/>
+            <a:off x="5749290" y="3115140"/>
+            <a:ext cx="457200" cy="341291"/>
           </a:xfrm>
           <a:prstGeom prst="roundRect">
             <a:avLst>
@@ -5985,14 +6192,60 @@
       </p:sp>
       <p:sp>
         <p:nvSpPr>
-          <p:cNvPr id="23" name="Rounded Rectangle 22"/>
+          <p:cNvPr id="28" name="TextBox 27"/>
+          <p:cNvSpPr txBox="1"/>
+          <p:nvPr/>
+        </p:nvSpPr>
+        <p:spPr>
+          <a:xfrm>
+            <a:off x="5532120" y="3502152"/>
+            <a:ext cx="891540" cy="219456"/>
+          </a:xfrm>
+          <a:prstGeom prst="rect">
+            <a:avLst/>
+          </a:prstGeom>
+          <a:noFill/>
+        </p:spPr>
+        <p:txBody>
+          <a:bodyPr wrap="square" anchor="t" lIns="0" rIns="0" tIns="0" bIns="0">
+            <a:spAutoFit/>
+          </a:bodyPr>
+          <a:lstStyle/>
+          <a:p>
+            <a:pPr algn="ctr">
+              <a:lnSpc>
+                <a:spcPct val="106000"/>
+              </a:lnSpc>
+              <a:spcBef>
+                <a:spcPts val="0"/>
+              </a:spcBef>
+              <a:spcAft>
+                <a:spcPts val="400"/>
+              </a:spcAft>
+            </a:pPr>
+            <a:r>
+              <a:rPr sz="850" b="1">
+                <a:solidFill>
+                  <a:srgbClr val="8A9098"/>
+                </a:solidFill>
+                <a:latin typeface="Consolas"/>
+                <a:ea typeface="Consolas"/>
+              </a:rPr>
+              <a:t>’25</a:t>
+            </a:r>
+          </a:p>
+        </p:txBody>
+      </p:sp>
+      <p:sp>
+        <p:nvSpPr>
+          <p:cNvPr id="29" name="Rounded Rectangle 28"/>
           <p:cNvSpPr/>
           <p:nvPr/>
         </p:nvSpPr>
         <p:spPr>
           <a:xfrm>
-            <a:off x="6636258" y="2962656"/>
-            <a:ext cx="420624" cy="749808"/>
+            <a:off x="6640829" y="2852928"/>
+            <a:ext cx="457200" cy="603504"/>
           </a:xfrm>
           <a:prstGeom prst="roundRect">
             <a:avLst>
@@ -6031,14 +6284,14 @@
       </p:sp>
       <p:sp>
         <p:nvSpPr>
-          <p:cNvPr id="24" name="TextBox 23"/>
+          <p:cNvPr id="30" name="TextBox 29"/>
           <p:cNvSpPr txBox="1"/>
           <p:nvPr/>
         </p:nvSpPr>
         <p:spPr>
           <a:xfrm>
-            <a:off x="6179058" y="2706624"/>
-            <a:ext cx="1335024" cy="237744"/>
+            <a:off x="6423659" y="3502152"/>
+            <a:ext cx="891540" cy="219456"/>
           </a:xfrm>
           <a:prstGeom prst="rect">
             <a:avLst/>
@@ -6063,13 +6316,59 @@
               </a:spcAft>
             </a:pPr>
             <a:r>
-              <a:rPr sz="1000" b="1">
-                <a:solidFill>
-                  <a:srgbClr val="E60012"/>
+              <a:rPr sz="850" b="1">
+                <a:solidFill>
+                  <a:srgbClr val="8A9098"/>
                 </a:solidFill>
                 <a:latin typeface="Consolas"/>
                 <a:ea typeface="Consolas"/>
               </a:rPr>
+              <a:t>’26</a:t>
+            </a:r>
+          </a:p>
+        </p:txBody>
+      </p:sp>
+      <p:sp>
+        <p:nvSpPr>
+          <p:cNvPr id="31" name="TextBox 30"/>
+          <p:cNvSpPr txBox="1"/>
+          <p:nvPr/>
+        </p:nvSpPr>
+        <p:spPr>
+          <a:xfrm>
+            <a:off x="6137909" y="2615184"/>
+            <a:ext cx="1463040" cy="219456"/>
+          </a:xfrm>
+          <a:prstGeom prst="rect">
+            <a:avLst/>
+          </a:prstGeom>
+          <a:noFill/>
+        </p:spPr>
+        <p:txBody>
+          <a:bodyPr wrap="square" anchor="t" lIns="0" rIns="0" tIns="0" bIns="0">
+            <a:spAutoFit/>
+          </a:bodyPr>
+          <a:lstStyle/>
+          <a:p>
+            <a:pPr algn="ctr">
+              <a:lnSpc>
+                <a:spcPct val="106000"/>
+              </a:lnSpc>
+              <a:spcBef>
+                <a:spcPts val="0"/>
+              </a:spcBef>
+              <a:spcAft>
+                <a:spcPts val="400"/>
+              </a:spcAft>
+            </a:pPr>
+            <a:r>
+              <a:rPr sz="950" b="1">
+                <a:solidFill>
+                  <a:srgbClr val="E60012"/>
+                </a:solidFill>
+                <a:latin typeface="Consolas"/>
+                <a:ea typeface="Consolas"/>
+              </a:rPr>
               <a:t>7,250億ドル</a:t>
             </a:r>
           </a:p>
@@ -6077,14 +6376,14 @@
       </p:sp>
       <p:sp>
         <p:nvSpPr>
-          <p:cNvPr id="25" name="TextBox 24"/>
+          <p:cNvPr id="32" name="TextBox 31"/>
           <p:cNvSpPr txBox="1"/>
           <p:nvPr/>
         </p:nvSpPr>
         <p:spPr>
           <a:xfrm>
-            <a:off x="7635240" y="2816352"/>
-            <a:ext cx="2286000" cy="658368"/>
+            <a:off x="7818120" y="2834640"/>
+            <a:ext cx="2743200" cy="777240"/>
           </a:xfrm>
           <a:prstGeom prst="rect">
             <a:avLst/>
@@ -6109,7 +6408,7 @@
               </a:spcAft>
             </a:pPr>
             <a:r>
-              <a:rPr sz="3300" b="1">
+              <a:rPr sz="3400" b="1">
                 <a:solidFill>
                   <a:srgbClr val="E60012"/>
                 </a:solidFill>
@@ -6123,82 +6422,13 @@
       </p:sp>
       <p:sp>
         <p:nvSpPr>
-          <p:cNvPr id="26" name="TextBox 25"/>
+          <p:cNvPr id="33" name="TextBox 32"/>
           <p:cNvSpPr txBox="1"/>
           <p:nvPr/>
         </p:nvSpPr>
         <p:spPr>
           <a:xfrm>
-            <a:off x="9921240" y="2926080"/>
-            <a:ext cx="1463040" cy="822960"/>
-          </a:xfrm>
-          <a:prstGeom prst="rect">
-            <a:avLst/>
-          </a:prstGeom>
-          <a:noFill/>
-        </p:spPr>
-        <p:txBody>
-          <a:bodyPr wrap="square" anchor="ctr" lIns="0" rIns="0" tIns="0" bIns="0">
-            <a:spAutoFit/>
-          </a:bodyPr>
-          <a:lstStyle/>
-          <a:p>
-            <a:pPr algn="l">
-              <a:lnSpc>
-                <a:spcPct val="112000"/>
-              </a:lnSpc>
-              <a:spcBef>
-                <a:spcPts val="0"/>
-              </a:spcBef>
-              <a:spcAft>
-                <a:spcPts val="200"/>
-              </a:spcAft>
-            </a:pPr>
-            <a:r>
-              <a:rPr sz="950" b="1">
-                <a:solidFill>
-                  <a:srgbClr val="3C4148"/>
-                </a:solidFill>
-                <a:latin typeface="Noto Sans JP"/>
-                <a:ea typeface="Noto Sans JP"/>
-              </a:rPr>
-              <a:t>3年（'23→'26）</a:t>
-            </a:r>
-          </a:p>
-          <a:p>
-            <a:pPr algn="l">
-              <a:lnSpc>
-                <a:spcPct val="112000"/>
-              </a:lnSpc>
-              <a:spcBef>
-                <a:spcPts val="0"/>
-              </a:spcBef>
-              <a:spcAft>
-                <a:spcPts val="200"/>
-              </a:spcAft>
-            </a:pPr>
-            <a:r>
-              <a:rPr sz="800" b="0">
-                <a:solidFill>
-                  <a:srgbClr val="8A9098"/>
-                </a:solidFill>
-                <a:latin typeface="Consolas"/>
-                <a:ea typeface="Consolas"/>
-              </a:rPr>
-              <a:t>各社IR/報道</a:t>
-            </a:r>
-          </a:p>
-        </p:txBody>
-      </p:sp>
-      <p:sp>
-        <p:nvSpPr>
-          <p:cNvPr id="27" name="TextBox 26"/>
-          <p:cNvSpPr txBox="1"/>
-          <p:nvPr/>
-        </p:nvSpPr>
-        <p:spPr>
-          <a:xfrm>
-            <a:off x="960120" y="4151376"/>
+            <a:off x="960120" y="4023360"/>
             <a:ext cx="2788920" cy="868680"/>
           </a:xfrm>
           <a:prstGeom prst="rect">
@@ -6261,14 +6491,14 @@
       </p:sp>
       <p:sp>
         <p:nvSpPr>
-          <p:cNvPr id="28" name="Rectangle 27"/>
+          <p:cNvPr id="34" name="Rectangle 33"/>
           <p:cNvSpPr/>
           <p:nvPr/>
         </p:nvSpPr>
         <p:spPr>
           <a:xfrm>
-            <a:off x="3886200" y="5010912"/>
-            <a:ext cx="3383280" cy="12801"/>
+            <a:off x="3749039" y="4690872"/>
+            <a:ext cx="3566160" cy="12801"/>
           </a:xfrm>
           <a:prstGeom prst="rect">
             <a:avLst/>
@@ -6305,14 +6535,14 @@
       </p:sp>
       <p:sp>
         <p:nvSpPr>
-          <p:cNvPr id="29" name="Rounded Rectangle 28"/>
+          <p:cNvPr id="35" name="Rounded Rectangle 34"/>
           <p:cNvSpPr/>
           <p:nvPr/>
         </p:nvSpPr>
         <p:spPr>
           <a:xfrm>
-            <a:off x="4239768" y="4780828"/>
-            <a:ext cx="420624" cy="230083"/>
+            <a:off x="4114800" y="4496423"/>
+            <a:ext cx="457200" cy="194448"/>
           </a:xfrm>
           <a:prstGeom prst="roundRect">
             <a:avLst>
@@ -6351,14 +6581,60 @@
       </p:sp>
       <p:sp>
         <p:nvSpPr>
-          <p:cNvPr id="30" name="Rounded Rectangle 29"/>
+          <p:cNvPr id="36" name="TextBox 35"/>
+          <p:cNvSpPr txBox="1"/>
+          <p:nvPr/>
+        </p:nvSpPr>
+        <p:spPr>
+          <a:xfrm>
+            <a:off x="3749039" y="4736592"/>
+            <a:ext cx="1188720" cy="219456"/>
+          </a:xfrm>
+          <a:prstGeom prst="rect">
+            <a:avLst/>
+          </a:prstGeom>
+          <a:noFill/>
+        </p:spPr>
+        <p:txBody>
+          <a:bodyPr wrap="square" anchor="t" lIns="0" rIns="0" tIns="0" bIns="0">
+            <a:spAutoFit/>
+          </a:bodyPr>
+          <a:lstStyle/>
+          <a:p>
+            <a:pPr algn="ctr">
+              <a:lnSpc>
+                <a:spcPct val="106000"/>
+              </a:lnSpc>
+              <a:spcBef>
+                <a:spcPts val="0"/>
+              </a:spcBef>
+              <a:spcAft>
+                <a:spcPts val="400"/>
+              </a:spcAft>
+            </a:pPr>
+            <a:r>
+              <a:rPr sz="850" b="1">
+                <a:solidFill>
+                  <a:srgbClr val="8A9098"/>
+                </a:solidFill>
+                <a:latin typeface="Consolas"/>
+                <a:ea typeface="Consolas"/>
+              </a:rPr>
+              <a:t>’23</a:t>
+            </a:r>
+          </a:p>
+        </p:txBody>
+      </p:sp>
+      <p:sp>
+        <p:nvSpPr>
+          <p:cNvPr id="37" name="Rounded Rectangle 36"/>
           <p:cNvSpPr/>
           <p:nvPr/>
         </p:nvSpPr>
         <p:spPr>
           <a:xfrm>
-            <a:off x="5367528" y="4582450"/>
-            <a:ext cx="420624" cy="428461"/>
+            <a:off x="5303520" y="4389120"/>
+            <a:ext cx="457200" cy="301752"/>
           </a:xfrm>
           <a:prstGeom prst="roundRect">
             <a:avLst>
@@ -6397,14 +6673,60 @@
       </p:sp>
       <p:sp>
         <p:nvSpPr>
-          <p:cNvPr id="31" name="Rounded Rectangle 30"/>
+          <p:cNvPr id="38" name="TextBox 37"/>
+          <p:cNvSpPr txBox="1"/>
+          <p:nvPr/>
+        </p:nvSpPr>
+        <p:spPr>
+          <a:xfrm>
+            <a:off x="4937759" y="4736592"/>
+            <a:ext cx="1188720" cy="219456"/>
+          </a:xfrm>
+          <a:prstGeom prst="rect">
+            <a:avLst/>
+          </a:prstGeom>
+          <a:noFill/>
+        </p:spPr>
+        <p:txBody>
+          <a:bodyPr wrap="square" anchor="t" lIns="0" rIns="0" tIns="0" bIns="0">
+            <a:spAutoFit/>
+          </a:bodyPr>
+          <a:lstStyle/>
+          <a:p>
+            <a:pPr algn="ctr">
+              <a:lnSpc>
+                <a:spcPct val="106000"/>
+              </a:lnSpc>
+              <a:spcBef>
+                <a:spcPts val="0"/>
+              </a:spcBef>
+              <a:spcAft>
+                <a:spcPts val="400"/>
+              </a:spcAft>
+            </a:pPr>
+            <a:r>
+              <a:rPr sz="850" b="1">
+                <a:solidFill>
+                  <a:srgbClr val="8A9098"/>
+                </a:solidFill>
+                <a:latin typeface="Consolas"/>
+                <a:ea typeface="Consolas"/>
+              </a:rPr>
+              <a:t>’24</a:t>
+            </a:r>
+          </a:p>
+        </p:txBody>
+      </p:sp>
+      <p:sp>
+        <p:nvSpPr>
+          <p:cNvPr id="39" name="Rounded Rectangle 38"/>
           <p:cNvSpPr/>
           <p:nvPr/>
         </p:nvSpPr>
         <p:spPr>
           <a:xfrm>
-            <a:off x="6495288" y="4261103"/>
-            <a:ext cx="420624" cy="749808"/>
+            <a:off x="6492240" y="4087368"/>
+            <a:ext cx="457200" cy="603504"/>
           </a:xfrm>
           <a:prstGeom prst="roundRect">
             <a:avLst>
@@ -6443,14 +6765,14 @@
       </p:sp>
       <p:sp>
         <p:nvSpPr>
-          <p:cNvPr id="32" name="TextBox 31"/>
+          <p:cNvPr id="40" name="TextBox 39"/>
           <p:cNvSpPr txBox="1"/>
           <p:nvPr/>
         </p:nvSpPr>
         <p:spPr>
           <a:xfrm>
-            <a:off x="6038088" y="4005071"/>
-            <a:ext cx="1335024" cy="237744"/>
+            <a:off x="6126479" y="4736592"/>
+            <a:ext cx="1188720" cy="219456"/>
           </a:xfrm>
           <a:prstGeom prst="rect">
             <a:avLst/>
@@ -6475,13 +6797,59 @@
               </a:spcAft>
             </a:pPr>
             <a:r>
-              <a:rPr sz="1000" b="1">
-                <a:solidFill>
-                  <a:srgbClr val="E60012"/>
+              <a:rPr sz="850" b="1">
+                <a:solidFill>
+                  <a:srgbClr val="8A9098"/>
                 </a:solidFill>
                 <a:latin typeface="Consolas"/>
                 <a:ea typeface="Consolas"/>
               </a:rPr>
+              <a:t>’28</a:t>
+            </a:r>
+          </a:p>
+        </p:txBody>
+      </p:sp>
+      <p:sp>
+        <p:nvSpPr>
+          <p:cNvPr id="41" name="TextBox 40"/>
+          <p:cNvSpPr txBox="1"/>
+          <p:nvPr/>
+        </p:nvSpPr>
+        <p:spPr>
+          <a:xfrm>
+            <a:off x="5989320" y="3849624"/>
+            <a:ext cx="1463040" cy="219456"/>
+          </a:xfrm>
+          <a:prstGeom prst="rect">
+            <a:avLst/>
+          </a:prstGeom>
+          <a:noFill/>
+        </p:spPr>
+        <p:txBody>
+          <a:bodyPr wrap="square" anchor="t" lIns="0" rIns="0" tIns="0" bIns="0">
+            <a:spAutoFit/>
+          </a:bodyPr>
+          <a:lstStyle/>
+          <a:p>
+            <a:pPr algn="ctr">
+              <a:lnSpc>
+                <a:spcPct val="106000"/>
+              </a:lnSpc>
+              <a:spcBef>
+                <a:spcPts val="0"/>
+              </a:spcBef>
+              <a:spcAft>
+                <a:spcPts val="400"/>
+              </a:spcAft>
+            </a:pPr>
+            <a:r>
+              <a:rPr sz="950" b="1">
+                <a:solidFill>
+                  <a:srgbClr val="E60012"/>
+                </a:solidFill>
+                <a:latin typeface="Consolas"/>
+                <a:ea typeface="Consolas"/>
+              </a:rPr>
               <a:t>1兆円超</a:t>
             </a:r>
           </a:p>
@@ -6489,14 +6857,14 @@
       </p:sp>
       <p:sp>
         <p:nvSpPr>
-          <p:cNvPr id="33" name="TextBox 32"/>
+          <p:cNvPr id="42" name="TextBox 41"/>
           <p:cNvSpPr txBox="1"/>
           <p:nvPr/>
         </p:nvSpPr>
         <p:spPr>
           <a:xfrm>
-            <a:off x="7635240" y="4114800"/>
-            <a:ext cx="2286000" cy="658368"/>
+            <a:off x="7818120" y="4069080"/>
+            <a:ext cx="2743200" cy="777240"/>
           </a:xfrm>
           <a:prstGeom prst="rect">
             <a:avLst/>
@@ -6521,7 +6889,7 @@
               </a:spcAft>
             </a:pPr>
             <a:r>
-              <a:rPr sz="3300" b="1">
+              <a:rPr sz="3400" b="1">
                 <a:solidFill>
                   <a:srgbClr val="E60012"/>
                 </a:solidFill>
@@ -6535,83 +6903,14 @@
       </p:sp>
       <p:sp>
         <p:nvSpPr>
-          <p:cNvPr id="34" name="TextBox 33"/>
-          <p:cNvSpPr txBox="1"/>
-          <p:nvPr/>
-        </p:nvSpPr>
-        <p:spPr>
-          <a:xfrm>
-            <a:off x="9921240" y="4224528"/>
-            <a:ext cx="1463040" cy="822960"/>
-          </a:xfrm>
-          <a:prstGeom prst="rect">
-            <a:avLst/>
-          </a:prstGeom>
-          <a:noFill/>
-        </p:spPr>
-        <p:txBody>
-          <a:bodyPr wrap="square" anchor="ctr" lIns="0" rIns="0" tIns="0" bIns="0">
-            <a:spAutoFit/>
-          </a:bodyPr>
-          <a:lstStyle/>
-          <a:p>
-            <a:pPr algn="l">
-              <a:lnSpc>
-                <a:spcPct val="112000"/>
-              </a:lnSpc>
-              <a:spcBef>
-                <a:spcPts val="0"/>
-              </a:spcBef>
-              <a:spcAft>
-                <a:spcPts val="200"/>
-              </a:spcAft>
-            </a:pPr>
-            <a:r>
-              <a:rPr sz="950" b="1">
-                <a:solidFill>
-                  <a:srgbClr val="3C4148"/>
-                </a:solidFill>
-                <a:latin typeface="Noto Sans JP"/>
-                <a:ea typeface="Noto Sans JP"/>
-              </a:rPr>
-              <a:t>5年（'23→'28）</a:t>
-            </a:r>
-          </a:p>
-          <a:p>
-            <a:pPr algn="l">
-              <a:lnSpc>
-                <a:spcPct val="112000"/>
-              </a:lnSpc>
-              <a:spcBef>
-                <a:spcPts val="0"/>
-              </a:spcBef>
-              <a:spcAft>
-                <a:spcPts val="200"/>
-              </a:spcAft>
-            </a:pPr>
-            <a:r>
-              <a:rPr sz="800" b="0">
-                <a:solidFill>
-                  <a:srgbClr val="8A9098"/>
-                </a:solidFill>
-                <a:latin typeface="Consolas"/>
-                <a:ea typeface="Consolas"/>
-              </a:rPr>
-              <a:t>IDC Japan</a:t>
-            </a:r>
-          </a:p>
-        </p:txBody>
-      </p:sp>
-      <p:sp>
-        <p:nvSpPr>
-          <p:cNvPr id="35" name="Rounded Rectangle 34"/>
+          <p:cNvPr id="43" name="Rounded Rectangle 42"/>
           <p:cNvSpPr/>
           <p:nvPr/>
         </p:nvSpPr>
         <p:spPr>
           <a:xfrm>
-            <a:off x="777240" y="5349240"/>
-            <a:ext cx="10634472" cy="841248"/>
+            <a:off x="777240" y="5138928"/>
+            <a:ext cx="10634472" cy="749808"/>
           </a:xfrm>
           <a:prstGeom prst="roundRect">
             <a:avLst>
@@ -6650,14 +6949,14 @@
       </p:sp>
       <p:sp>
         <p:nvSpPr>
-          <p:cNvPr id="36" name="TextBox 35"/>
+          <p:cNvPr id="44" name="TextBox 43"/>
           <p:cNvSpPr txBox="1"/>
           <p:nvPr/>
         </p:nvSpPr>
         <p:spPr>
           <a:xfrm>
-            <a:off x="1005840" y="5349240"/>
-            <a:ext cx="10241280" cy="841248"/>
+            <a:off x="1005840" y="5138928"/>
+            <a:ext cx="10241280" cy="749808"/>
           </a:xfrm>
           <a:prstGeom prst="rect">
             <a:avLst/>
@@ -6700,6 +6999,52 @@
                 <a:ea typeface="Noto Sans JP"/>
               </a:rPr>
               <a:t>この波は、まだ“序盤”だ。</a:t>
+            </a:r>
+          </a:p>
+        </p:txBody>
+      </p:sp>
+      <p:sp>
+        <p:nvSpPr>
+          <p:cNvPr id="45" name="TextBox 44"/>
+          <p:cNvSpPr txBox="1"/>
+          <p:nvPr/>
+        </p:nvSpPr>
+        <p:spPr>
+          <a:xfrm>
+            <a:off x="822960" y="5989320"/>
+            <a:ext cx="10515600" cy="274320"/>
+          </a:xfrm>
+          <a:prstGeom prst="rect">
+            <a:avLst/>
+          </a:prstGeom>
+          <a:noFill/>
+        </p:spPr>
+        <p:txBody>
+          <a:bodyPr wrap="square" anchor="t" lIns="0" rIns="0" tIns="0" bIns="0">
+            <a:spAutoFit/>
+          </a:bodyPr>
+          <a:lstStyle/>
+          <a:p>
+            <a:pPr algn="l">
+              <a:lnSpc>
+                <a:spcPct val="106000"/>
+              </a:lnSpc>
+              <a:spcBef>
+                <a:spcPts val="0"/>
+              </a:spcBef>
+              <a:spcAft>
+                <a:spcPts val="400"/>
+              </a:spcAft>
+            </a:pPr>
+            <a:r>
+              <a:rPr sz="850" b="0">
+                <a:solidFill>
+                  <a:srgbClr val="8A9098"/>
+                </a:solidFill>
+                <a:latin typeface="Consolas"/>
+                <a:ea typeface="Consolas"/>
+              </a:rPr>
+              <a:t>出典：NVIDIA IR（DC売上 FY23→FY26）／Big Tech各社IR・報道（'23→'26）／IDC Japan（国内DC建設投資 '23→'28）。</a:t>
             </a:r>
           </a:p>
         </p:txBody>
@@ -6899,7 +7244,7 @@
                 <a:latin typeface="Consolas"/>
                 <a:ea typeface="Consolas"/>
               </a:rPr>
-              <a:t>DC建設費の中身：建設 vs 設備、そして 材（機器）vs 工（作業）</a:t>
+              <a:t>AI需要 → 連鎖して伸びる、日本のバリューチェーン</a:t>
             </a:r>
           </a:p>
         </p:txBody>
@@ -6945,7 +7290,7 @@
                 <a:latin typeface="Noto Sans JP"/>
                 <a:ea typeface="Noto Sans JP"/>
               </a:rPr>
-              <a:t>お金の3/4は設備（製造業）。しかも効くのは機器代ではなく“工”。</a:t>
+              <a:t>AIが伸びれば、この“川”がまるごと潤う。</a:t>
             </a:r>
           </a:p>
         </p:txBody>
@@ -6996,61 +7341,19 @@
       </p:sp>
       <p:sp>
         <p:nvSpPr>
-          <p:cNvPr id="8" name="Rectangle 7"/>
+          <p:cNvPr id="8" name="Rounded Rectangle 7"/>
           <p:cNvSpPr/>
           <p:nvPr/>
         </p:nvSpPr>
         <p:spPr>
           <a:xfrm>
-            <a:off x="777240" y="1755648"/>
-            <a:ext cx="2658618" cy="914400"/>
-          </a:xfrm>
-          <a:prstGeom prst="rect">
-            <a:avLst/>
-          </a:prstGeom>
-          <a:solidFill>
-            <a:srgbClr val="454B54"/>
-          </a:solidFill>
-          <a:ln>
-            <a:noFill/>
-          </a:ln>
-          <a:effectLst/>
-        </p:spPr>
-        <p:style>
-          <a:lnRef idx="1">
-            <a:schemeClr val="accent1"/>
-          </a:lnRef>
-          <a:fillRef idx="3">
-            <a:schemeClr val="accent1"/>
-          </a:fillRef>
-          <a:effectRef idx="2">
-            <a:schemeClr val="accent1"/>
-          </a:effectRef>
-          <a:fontRef idx="minor">
-            <a:schemeClr val="lt1"/>
-          </a:fontRef>
-        </p:style>
-        <p:txBody>
-          <a:bodyPr rtlCol="0" anchor="ctr"/>
-          <a:lstStyle/>
-          <a:p>
-            <a:pPr algn="ctr"/>
-          </a:p>
-        </p:txBody>
-      </p:sp>
-      <p:sp>
-        <p:nvSpPr>
-          <p:cNvPr id="9" name="Rectangle 8"/>
-          <p:cNvSpPr/>
-          <p:nvPr/>
-        </p:nvSpPr>
-        <p:spPr>
-          <a:xfrm>
-            <a:off x="3435858" y="1755648"/>
-            <a:ext cx="5317236" cy="914400"/>
-          </a:xfrm>
-          <a:prstGeom prst="rect">
-            <a:avLst/>
+            <a:off x="777240" y="1417320"/>
+            <a:ext cx="1417320" cy="3383280"/>
+          </a:xfrm>
+          <a:prstGeom prst="roundRect">
+            <a:avLst>
+              <a:gd name="adj" fmla="val 6000"/>
+            </a:avLst>
           </a:prstGeom>
           <a:solidFill>
             <a:srgbClr val="E60012"/>
@@ -7084,23 +7387,257 @@
       </p:sp>
       <p:sp>
         <p:nvSpPr>
-          <p:cNvPr id="10" name="Rectangle 9"/>
+          <p:cNvPr id="9" name="TextBox 8"/>
+          <p:cNvSpPr txBox="1"/>
+          <p:nvPr/>
+        </p:nvSpPr>
+        <p:spPr>
+          <a:xfrm>
+            <a:off x="822960" y="1417320"/>
+            <a:ext cx="1325880" cy="3383280"/>
+          </a:xfrm>
+          <a:prstGeom prst="rect">
+            <a:avLst/>
+          </a:prstGeom>
+          <a:noFill/>
+        </p:spPr>
+        <p:txBody>
+          <a:bodyPr wrap="square" anchor="ctr" lIns="0" rIns="0" tIns="0" bIns="0">
+            <a:spAutoFit/>
+          </a:bodyPr>
+          <a:lstStyle/>
+          <a:p>
+            <a:pPr algn="ctr">
+              <a:lnSpc>
+                <a:spcPct val="110000"/>
+              </a:lnSpc>
+              <a:spcBef>
+                <a:spcPts val="0"/>
+              </a:spcBef>
+              <a:spcAft>
+                <a:spcPts val="300"/>
+              </a:spcAft>
+            </a:pPr>
+            <a:r>
+              <a:rPr sz="900" b="1" spc="100">
+                <a:solidFill>
+                  <a:srgbClr val="FFC9CE"/>
+                </a:solidFill>
+                <a:latin typeface="Consolas"/>
+                <a:ea typeface="Consolas"/>
+              </a:rPr>
+              <a:t>起点</a:t>
+            </a:r>
+          </a:p>
+          <a:p>
+            <a:pPr algn="ctr">
+              <a:lnSpc>
+                <a:spcPct val="110000"/>
+              </a:lnSpc>
+              <a:spcBef>
+                <a:spcPts val="0"/>
+              </a:spcBef>
+              <a:spcAft>
+                <a:spcPts val="300"/>
+              </a:spcAft>
+            </a:pPr>
+            <a:r>
+              <a:rPr sz="1700" b="1">
+                <a:solidFill>
+                  <a:srgbClr val="FFFFFF"/>
+                </a:solidFill>
+                <a:latin typeface="Noto Sans JP"/>
+                <a:ea typeface="Noto Sans JP"/>
+              </a:rPr>
+              <a:t>AI・DC</a:t>
+            </a:r>
+          </a:p>
+          <a:p>
+            <a:pPr algn="ctr">
+              <a:lnSpc>
+                <a:spcPct val="110000"/>
+              </a:lnSpc>
+              <a:spcBef>
+                <a:spcPts val="0"/>
+              </a:spcBef>
+              <a:spcAft>
+                <a:spcPts val="300"/>
+              </a:spcAft>
+            </a:pPr>
+            <a:r>
+              <a:rPr sz="1200" b="1">
+                <a:solidFill>
+                  <a:srgbClr val="FFFFFF"/>
+                </a:solidFill>
+                <a:latin typeface="Noto Sans JP"/>
+                <a:ea typeface="Noto Sans JP"/>
+              </a:rPr>
+              <a:t>需要の拡大</a:t>
+            </a:r>
+          </a:p>
+          <a:p>
+            <a:pPr algn="ctr">
+              <a:lnSpc>
+                <a:spcPct val="110000"/>
+              </a:lnSpc>
+              <a:spcBef>
+                <a:spcPts val="0"/>
+              </a:spcBef>
+              <a:spcAft>
+                <a:spcPts val="300"/>
+              </a:spcAft>
+            </a:pPr>
+            <a:r>
+              <a:rPr sz="600" b="0">
+                <a:solidFill>
+                  <a:srgbClr val="FFFFFF"/>
+                </a:solidFill>
+                <a:latin typeface="Noto Sans JP"/>
+                <a:ea typeface="Noto Sans JP"/>
+              </a:rPr>
+              <a:t/>
+            </a:r>
+          </a:p>
+          <a:p>
+            <a:pPr algn="ctr">
+              <a:lnSpc>
+                <a:spcPct val="110000"/>
+              </a:lnSpc>
+              <a:spcBef>
+                <a:spcPts val="0"/>
+              </a:spcBef>
+              <a:spcAft>
+                <a:spcPts val="300"/>
+              </a:spcAft>
+            </a:pPr>
+            <a:r>
+              <a:rPr sz="950" b="0">
+                <a:solidFill>
+                  <a:srgbClr val="FFE2E5"/>
+                </a:solidFill>
+                <a:latin typeface="Noto Sans JP"/>
+                <a:ea typeface="Noto Sans JP"/>
+              </a:rPr>
+              <a:t>この一手が</a:t>
+            </a:r>
+          </a:p>
+          <a:p>
+            <a:pPr algn="ctr">
+              <a:lnSpc>
+                <a:spcPct val="110000"/>
+              </a:lnSpc>
+              <a:spcBef>
+                <a:spcPts val="0"/>
+              </a:spcBef>
+              <a:spcAft>
+                <a:spcPts val="300"/>
+              </a:spcAft>
+            </a:pPr>
+            <a:r>
+              <a:rPr sz="950" b="0">
+                <a:solidFill>
+                  <a:srgbClr val="FFE2E5"/>
+                </a:solidFill>
+                <a:latin typeface="Noto Sans JP"/>
+                <a:ea typeface="Noto Sans JP"/>
+              </a:rPr>
+              <a:t>川下まで</a:t>
+            </a:r>
+          </a:p>
+          <a:p>
+            <a:pPr algn="ctr">
+              <a:lnSpc>
+                <a:spcPct val="110000"/>
+              </a:lnSpc>
+              <a:spcBef>
+                <a:spcPts val="0"/>
+              </a:spcBef>
+              <a:spcAft>
+                <a:spcPts val="300"/>
+              </a:spcAft>
+            </a:pPr>
+            <a:r>
+              <a:rPr sz="950" b="0">
+                <a:solidFill>
+                  <a:srgbClr val="FFE2E5"/>
+                </a:solidFill>
+                <a:latin typeface="Noto Sans JP"/>
+                <a:ea typeface="Noto Sans JP"/>
+              </a:rPr>
+              <a:t>波及する</a:t>
+            </a:r>
+          </a:p>
+        </p:txBody>
+      </p:sp>
+      <p:sp>
+        <p:nvSpPr>
+          <p:cNvPr id="10" name="TextBox 9"/>
+          <p:cNvSpPr txBox="1"/>
+          <p:nvPr/>
+        </p:nvSpPr>
+        <p:spPr>
+          <a:xfrm>
+            <a:off x="2194560" y="2834640"/>
+            <a:ext cx="320040" cy="548640"/>
+          </a:xfrm>
+          <a:prstGeom prst="rect">
+            <a:avLst/>
+          </a:prstGeom>
+          <a:noFill/>
+        </p:spPr>
+        <p:txBody>
+          <a:bodyPr wrap="square" anchor="t" lIns="0" rIns="0" tIns="0" bIns="0">
+            <a:spAutoFit/>
+          </a:bodyPr>
+          <a:lstStyle/>
+          <a:p>
+            <a:pPr algn="ctr">
+              <a:lnSpc>
+                <a:spcPct val="106000"/>
+              </a:lnSpc>
+              <a:spcBef>
+                <a:spcPts val="0"/>
+              </a:spcBef>
+              <a:spcAft>
+                <a:spcPts val="400"/>
+              </a:spcAft>
+            </a:pPr>
+            <a:r>
+              <a:rPr sz="1600" b="1">
+                <a:solidFill>
+                  <a:srgbClr val="E60012"/>
+                </a:solidFill>
+                <a:latin typeface="Consolas"/>
+                <a:ea typeface="Consolas"/>
+              </a:rPr>
+              <a:t>▶</a:t>
+            </a:r>
+          </a:p>
+        </p:txBody>
+      </p:sp>
+      <p:sp>
+        <p:nvSpPr>
+          <p:cNvPr id="11" name="Rounded Rectangle 10"/>
           <p:cNvSpPr/>
           <p:nvPr/>
         </p:nvSpPr>
         <p:spPr>
           <a:xfrm>
-            <a:off x="8753094" y="1755648"/>
-            <a:ext cx="2658618" cy="914400"/>
-          </a:xfrm>
-          <a:prstGeom prst="rect">
-            <a:avLst/>
+            <a:off x="2542032" y="1417320"/>
+            <a:ext cx="1686153" cy="3383280"/>
+          </a:xfrm>
+          <a:prstGeom prst="roundRect">
+            <a:avLst>
+              <a:gd name="adj" fmla="val 5000"/>
+            </a:avLst>
           </a:prstGeom>
           <a:solidFill>
-            <a:srgbClr val="F25560"/>
+            <a:srgbClr val="FFFFFF"/>
           </a:solidFill>
-          <a:ln>
-            <a:noFill/>
+          <a:ln w="12700">
+            <a:solidFill>
+              <a:srgbClr val="E2E4E9"/>
+            </a:solidFill>
           </a:ln>
           <a:effectLst/>
         </p:spPr>
@@ -7128,630 +7665,19 @@
       </p:sp>
       <p:sp>
         <p:nvSpPr>
-          <p:cNvPr id="11" name="Rectangle 10"/>
+          <p:cNvPr id="12" name="Rounded Rectangle 11"/>
           <p:cNvSpPr/>
           <p:nvPr/>
         </p:nvSpPr>
         <p:spPr>
           <a:xfrm>
-            <a:off x="3424885" y="1755648"/>
-            <a:ext cx="21945" cy="914400"/>
-          </a:xfrm>
-          <a:prstGeom prst="rect">
-            <a:avLst/>
-          </a:prstGeom>
-          <a:solidFill>
-            <a:srgbClr val="FFFFFF"/>
-          </a:solidFill>
-          <a:ln>
-            <a:noFill/>
-          </a:ln>
-          <a:effectLst/>
-        </p:spPr>
-        <p:style>
-          <a:lnRef idx="1">
-            <a:schemeClr val="accent1"/>
-          </a:lnRef>
-          <a:fillRef idx="3">
-            <a:schemeClr val="accent1"/>
-          </a:fillRef>
-          <a:effectRef idx="2">
-            <a:schemeClr val="accent1"/>
-          </a:effectRef>
-          <a:fontRef idx="minor">
-            <a:schemeClr val="lt1"/>
-          </a:fontRef>
-        </p:style>
-        <p:txBody>
-          <a:bodyPr rtlCol="0" anchor="ctr"/>
-          <a:lstStyle/>
-          <a:p>
-            <a:pPr algn="ctr"/>
-          </a:p>
-        </p:txBody>
-      </p:sp>
-      <p:sp>
-        <p:nvSpPr>
-          <p:cNvPr id="12" name="Rectangle 11"/>
-          <p:cNvSpPr/>
-          <p:nvPr/>
-        </p:nvSpPr>
-        <p:spPr>
-          <a:xfrm>
-            <a:off x="8742121" y="1755648"/>
-            <a:ext cx="21945" cy="914400"/>
-          </a:xfrm>
-          <a:prstGeom prst="rect">
-            <a:avLst/>
-          </a:prstGeom>
-          <a:solidFill>
-            <a:srgbClr val="FFFFFF"/>
-          </a:solidFill>
-          <a:ln>
-            <a:noFill/>
-          </a:ln>
-          <a:effectLst/>
-        </p:spPr>
-        <p:style>
-          <a:lnRef idx="1">
-            <a:schemeClr val="accent1"/>
-          </a:lnRef>
-          <a:fillRef idx="3">
-            <a:schemeClr val="accent1"/>
-          </a:fillRef>
-          <a:effectRef idx="2">
-            <a:schemeClr val="accent1"/>
-          </a:effectRef>
-          <a:fontRef idx="minor">
-            <a:schemeClr val="lt1"/>
-          </a:fontRef>
-        </p:style>
-        <p:txBody>
-          <a:bodyPr rtlCol="0" anchor="ctr"/>
-          <a:lstStyle/>
-          <a:p>
-            <a:pPr algn="ctr"/>
-          </a:p>
-        </p:txBody>
-      </p:sp>
-      <p:sp>
-        <p:nvSpPr>
-          <p:cNvPr id="13" name="TextBox 12"/>
-          <p:cNvSpPr txBox="1"/>
-          <p:nvPr/>
-        </p:nvSpPr>
-        <p:spPr>
-          <a:xfrm>
-            <a:off x="777240" y="1755648"/>
-            <a:ext cx="2658618" cy="914400"/>
-          </a:xfrm>
-          <a:prstGeom prst="rect">
-            <a:avLst/>
-          </a:prstGeom>
-          <a:noFill/>
-        </p:spPr>
-        <p:txBody>
-          <a:bodyPr wrap="square" anchor="ctr" lIns="0" rIns="0" tIns="0" bIns="0">
-            <a:spAutoFit/>
-          </a:bodyPr>
-          <a:lstStyle/>
-          <a:p>
-            <a:pPr algn="ctr">
-              <a:lnSpc>
-                <a:spcPct val="100000"/>
-              </a:lnSpc>
-              <a:spcBef>
-                <a:spcPts val="0"/>
-              </a:spcBef>
-              <a:spcAft>
-                <a:spcPts val="100"/>
-              </a:spcAft>
-            </a:pPr>
-            <a:r>
-              <a:rPr sz="1050" b="1">
-                <a:solidFill>
-                  <a:srgbClr val="FFFFFF"/>
-                </a:solidFill>
-                <a:latin typeface="Noto Sans JP"/>
-                <a:ea typeface="Noto Sans JP"/>
-              </a:rPr>
-              <a:t>建築（躯体）</a:t>
-            </a:r>
-          </a:p>
-          <a:p>
-            <a:pPr algn="ctr">
-              <a:lnSpc>
-                <a:spcPct val="100000"/>
-              </a:lnSpc>
-              <a:spcBef>
-                <a:spcPts val="0"/>
-              </a:spcBef>
-              <a:spcAft>
-                <a:spcPts val="100"/>
-              </a:spcAft>
-            </a:pPr>
-            <a:r>
-              <a:rPr sz="1800" b="1">
-                <a:solidFill>
-                  <a:srgbClr val="FFFFFF"/>
-                </a:solidFill>
-                <a:latin typeface="Noto Sans JP"/>
-                <a:ea typeface="Noto Sans JP"/>
-              </a:rPr>
-              <a:t>約25%</a:t>
-            </a:r>
-          </a:p>
-        </p:txBody>
-      </p:sp>
-      <p:sp>
-        <p:nvSpPr>
-          <p:cNvPr id="14" name="TextBox 13"/>
-          <p:cNvSpPr txBox="1"/>
-          <p:nvPr/>
-        </p:nvSpPr>
-        <p:spPr>
-          <a:xfrm>
-            <a:off x="3435858" y="1755648"/>
-            <a:ext cx="5317236" cy="914400"/>
-          </a:xfrm>
-          <a:prstGeom prst="rect">
-            <a:avLst/>
-          </a:prstGeom>
-          <a:noFill/>
-        </p:spPr>
-        <p:txBody>
-          <a:bodyPr wrap="square" anchor="ctr" lIns="0" rIns="0" tIns="0" bIns="0">
-            <a:spAutoFit/>
-          </a:bodyPr>
-          <a:lstStyle/>
-          <a:p>
-            <a:pPr algn="ctr">
-              <a:lnSpc>
-                <a:spcPct val="100000"/>
-              </a:lnSpc>
-              <a:spcBef>
-                <a:spcPts val="0"/>
-              </a:spcBef>
-              <a:spcAft>
-                <a:spcPts val="100"/>
-              </a:spcAft>
-            </a:pPr>
-            <a:r>
-              <a:rPr sz="1100" b="1">
-                <a:solidFill>
-                  <a:srgbClr val="FFFFFF"/>
-                </a:solidFill>
-                <a:latin typeface="Noto Sans JP"/>
-                <a:ea typeface="Noto Sans JP"/>
-              </a:rPr>
-              <a:t>電気設備</a:t>
-            </a:r>
-          </a:p>
-          <a:p>
-            <a:pPr algn="ctr">
-              <a:lnSpc>
-                <a:spcPct val="100000"/>
-              </a:lnSpc>
-              <a:spcBef>
-                <a:spcPts val="0"/>
-              </a:spcBef>
-              <a:spcAft>
-                <a:spcPts val="100"/>
-              </a:spcAft>
-            </a:pPr>
-            <a:r>
-              <a:rPr sz="2000" b="1">
-                <a:solidFill>
-                  <a:srgbClr val="FFFFFF"/>
-                </a:solidFill>
-                <a:latin typeface="Noto Sans JP"/>
-                <a:ea typeface="Noto Sans JP"/>
-              </a:rPr>
-              <a:t>約50%</a:t>
-            </a:r>
-          </a:p>
-        </p:txBody>
-      </p:sp>
-      <p:sp>
-        <p:nvSpPr>
-          <p:cNvPr id="15" name="TextBox 14"/>
-          <p:cNvSpPr txBox="1"/>
-          <p:nvPr/>
-        </p:nvSpPr>
-        <p:spPr>
-          <a:xfrm>
-            <a:off x="8753094" y="1755648"/>
-            <a:ext cx="2658618" cy="914400"/>
-          </a:xfrm>
-          <a:prstGeom prst="rect">
-            <a:avLst/>
-          </a:prstGeom>
-          <a:noFill/>
-        </p:spPr>
-        <p:txBody>
-          <a:bodyPr wrap="square" anchor="ctr" lIns="0" rIns="0" tIns="0" bIns="0">
-            <a:spAutoFit/>
-          </a:bodyPr>
-          <a:lstStyle/>
-          <a:p>
-            <a:pPr algn="ctr">
-              <a:lnSpc>
-                <a:spcPct val="100000"/>
-              </a:lnSpc>
-              <a:spcBef>
-                <a:spcPts val="0"/>
-              </a:spcBef>
-              <a:spcAft>
-                <a:spcPts val="100"/>
-              </a:spcAft>
-            </a:pPr>
-            <a:r>
-              <a:rPr sz="1050" b="1">
-                <a:solidFill>
-                  <a:srgbClr val="FFFFFF"/>
-                </a:solidFill>
-                <a:latin typeface="Noto Sans JP"/>
-                <a:ea typeface="Noto Sans JP"/>
-              </a:rPr>
-              <a:t>空調・機械</a:t>
-            </a:r>
-          </a:p>
-          <a:p>
-            <a:pPr algn="ctr">
-              <a:lnSpc>
-                <a:spcPct val="100000"/>
-              </a:lnSpc>
-              <a:spcBef>
-                <a:spcPts val="0"/>
-              </a:spcBef>
-              <a:spcAft>
-                <a:spcPts val="100"/>
-              </a:spcAft>
-            </a:pPr>
-            <a:r>
-              <a:rPr sz="1800" b="1">
-                <a:solidFill>
-                  <a:srgbClr val="FFFFFF"/>
-                </a:solidFill>
-                <a:latin typeface="Noto Sans JP"/>
-                <a:ea typeface="Noto Sans JP"/>
-              </a:rPr>
-              <a:t>約25%</a:t>
-            </a:r>
-          </a:p>
-        </p:txBody>
-      </p:sp>
-      <p:sp>
-        <p:nvSpPr>
-          <p:cNvPr id="16" name="Rounded Rectangle 15"/>
-          <p:cNvSpPr/>
-          <p:nvPr/>
-        </p:nvSpPr>
-        <p:spPr>
-          <a:xfrm>
-            <a:off x="777240" y="1463039"/>
-            <a:ext cx="2658618" cy="228600"/>
+            <a:off x="2542032" y="1417320"/>
+            <a:ext cx="1686153" cy="457200"/>
           </a:xfrm>
           <a:prstGeom prst="roundRect">
             <a:avLst>
-              <a:gd name="adj" fmla="val 10000"/>
+              <a:gd name="adj" fmla="val 0"/>
             </a:avLst>
-          </a:prstGeom>
-          <a:solidFill>
-            <a:srgbClr val="ECEEF1"/>
-          </a:solidFill>
-          <a:ln w="12700">
-            <a:solidFill>
-              <a:srgbClr val="454B54"/>
-            </a:solidFill>
-          </a:ln>
-          <a:effectLst/>
-        </p:spPr>
-        <p:style>
-          <a:lnRef idx="1">
-            <a:schemeClr val="accent1"/>
-          </a:lnRef>
-          <a:fillRef idx="3">
-            <a:schemeClr val="accent1"/>
-          </a:fillRef>
-          <a:effectRef idx="2">
-            <a:schemeClr val="accent1"/>
-          </a:effectRef>
-          <a:fontRef idx="minor">
-            <a:schemeClr val="lt1"/>
-          </a:fontRef>
-        </p:style>
-        <p:txBody>
-          <a:bodyPr rtlCol="0" anchor="ctr"/>
-          <a:lstStyle/>
-          <a:p>
-            <a:pPr algn="ctr"/>
-          </a:p>
-        </p:txBody>
-      </p:sp>
-      <p:sp>
-        <p:nvSpPr>
-          <p:cNvPr id="17" name="TextBox 16"/>
-          <p:cNvSpPr txBox="1"/>
-          <p:nvPr/>
-        </p:nvSpPr>
-        <p:spPr>
-          <a:xfrm>
-            <a:off x="777240" y="1463039"/>
-            <a:ext cx="2658618" cy="228600"/>
-          </a:xfrm>
-          <a:prstGeom prst="rect">
-            <a:avLst/>
-          </a:prstGeom>
-          <a:noFill/>
-        </p:spPr>
-        <p:txBody>
-          <a:bodyPr wrap="square" anchor="ctr" lIns="0" rIns="0" tIns="0" bIns="0">
-            <a:spAutoFit/>
-          </a:bodyPr>
-          <a:lstStyle/>
-          <a:p>
-            <a:pPr algn="ctr">
-              <a:lnSpc>
-                <a:spcPct val="106000"/>
-              </a:lnSpc>
-              <a:spcBef>
-                <a:spcPts val="0"/>
-              </a:spcBef>
-              <a:spcAft>
-                <a:spcPts val="400"/>
-              </a:spcAft>
-            </a:pPr>
-            <a:r>
-              <a:rPr sz="950" b="1">
-                <a:solidFill>
-                  <a:srgbClr val="454B54"/>
-                </a:solidFill>
-                <a:latin typeface="Consolas"/>
-                <a:ea typeface="Consolas"/>
-              </a:rPr>
-              <a:t>建設（ゼネコン）</a:t>
-            </a:r>
-          </a:p>
-        </p:txBody>
-      </p:sp>
-      <p:sp>
-        <p:nvSpPr>
-          <p:cNvPr id="18" name="Rounded Rectangle 17"/>
-          <p:cNvSpPr/>
-          <p:nvPr/>
-        </p:nvSpPr>
-        <p:spPr>
-          <a:xfrm>
-            <a:off x="3435858" y="1463039"/>
-            <a:ext cx="7975854" cy="228600"/>
-          </a:xfrm>
-          <a:prstGeom prst="roundRect">
-            <a:avLst>
-              <a:gd name="adj" fmla="val 10000"/>
-            </a:avLst>
-          </a:prstGeom>
-          <a:solidFill>
-            <a:srgbClr val="FDECEE"/>
-          </a:solidFill>
-          <a:ln w="12700">
-            <a:solidFill>
-              <a:srgbClr val="E60012"/>
-            </a:solidFill>
-          </a:ln>
-          <a:effectLst/>
-        </p:spPr>
-        <p:style>
-          <a:lnRef idx="1">
-            <a:schemeClr val="accent1"/>
-          </a:lnRef>
-          <a:fillRef idx="3">
-            <a:schemeClr val="accent1"/>
-          </a:fillRef>
-          <a:effectRef idx="2">
-            <a:schemeClr val="accent1"/>
-          </a:effectRef>
-          <a:fontRef idx="minor">
-            <a:schemeClr val="lt1"/>
-          </a:fontRef>
-        </p:style>
-        <p:txBody>
-          <a:bodyPr rtlCol="0" anchor="ctr"/>
-          <a:lstStyle/>
-          <a:p>
-            <a:pPr algn="ctr"/>
-          </a:p>
-        </p:txBody>
-      </p:sp>
-      <p:sp>
-        <p:nvSpPr>
-          <p:cNvPr id="19" name="TextBox 18"/>
-          <p:cNvSpPr txBox="1"/>
-          <p:nvPr/>
-        </p:nvSpPr>
-        <p:spPr>
-          <a:xfrm>
-            <a:off x="3435858" y="1463039"/>
-            <a:ext cx="7975854" cy="228600"/>
-          </a:xfrm>
-          <a:prstGeom prst="rect">
-            <a:avLst/>
-          </a:prstGeom>
-          <a:noFill/>
-        </p:spPr>
-        <p:txBody>
-          <a:bodyPr wrap="square" anchor="ctr" lIns="0" rIns="0" tIns="0" bIns="0">
-            <a:spAutoFit/>
-          </a:bodyPr>
-          <a:lstStyle/>
-          <a:p>
-            <a:pPr algn="ctr">
-              <a:lnSpc>
-                <a:spcPct val="106000"/>
-              </a:lnSpc>
-              <a:spcBef>
-                <a:spcPts val="0"/>
-              </a:spcBef>
-              <a:spcAft>
-                <a:spcPts val="400"/>
-              </a:spcAft>
-            </a:pPr>
-            <a:r>
-              <a:rPr sz="1000" b="1">
-                <a:solidFill>
-                  <a:srgbClr val="E60012"/>
-                </a:solidFill>
-                <a:latin typeface="Consolas"/>
-                <a:ea typeface="Consolas"/>
-              </a:rPr>
-              <a:t>設備＝製造業（電気・機械）  約75%</a:t>
-            </a:r>
-          </a:p>
-        </p:txBody>
-      </p:sp>
-      <p:sp>
-        <p:nvSpPr>
-          <p:cNvPr id="20" name="TextBox 19"/>
-          <p:cNvSpPr txBox="1"/>
-          <p:nvPr/>
-        </p:nvSpPr>
-        <p:spPr>
-          <a:xfrm>
-            <a:off x="777240" y="2852928"/>
-            <a:ext cx="10634472" cy="274320"/>
-          </a:xfrm>
-          <a:prstGeom prst="rect">
-            <a:avLst/>
-          </a:prstGeom>
-          <a:noFill/>
-        </p:spPr>
-        <p:txBody>
-          <a:bodyPr wrap="square" anchor="t" lIns="0" rIns="0" tIns="0" bIns="0">
-            <a:spAutoFit/>
-          </a:bodyPr>
-          <a:lstStyle/>
-          <a:p>
-            <a:pPr algn="l">
-              <a:lnSpc>
-                <a:spcPct val="106000"/>
-              </a:lnSpc>
-              <a:spcBef>
-                <a:spcPts val="0"/>
-              </a:spcBef>
-              <a:spcAft>
-                <a:spcPts val="400"/>
-              </a:spcAft>
-            </a:pPr>
-            <a:r>
-              <a:rPr sz="1100" b="1">
-                <a:solidFill>
-                  <a:srgbClr val="3C4148"/>
-                </a:solidFill>
-                <a:latin typeface="Noto Sans JP"/>
-                <a:ea typeface="Noto Sans JP"/>
-              </a:rPr>
-              <a:t>↓ その「設備 約75%」の中身を、</a:t>
-            </a:r>
-            <a:r>
-              <a:rPr sz="1100" b="1">
-                <a:solidFill>
-                  <a:srgbClr val="8A9098"/>
-                </a:solidFill>
-                <a:latin typeface="Noto Sans JP"/>
-                <a:ea typeface="Noto Sans JP"/>
-              </a:rPr>
-              <a:t>材（機器・材料）</a:t>
-            </a:r>
-            <a:r>
-              <a:rPr sz="1100" b="0">
-                <a:solidFill>
-                  <a:srgbClr val="3C4148"/>
-                </a:solidFill>
-                <a:latin typeface="Noto Sans JP"/>
-                <a:ea typeface="Noto Sans JP"/>
-              </a:rPr>
-              <a:t> と </a:t>
-            </a:r>
-            <a:r>
-              <a:rPr sz="1100" b="1">
-                <a:solidFill>
-                  <a:srgbClr val="E60012"/>
-                </a:solidFill>
-                <a:latin typeface="Noto Sans JP"/>
-                <a:ea typeface="Noto Sans JP"/>
-              </a:rPr>
-              <a:t>工（据付・施工＝人が動く）</a:t>
-            </a:r>
-            <a:r>
-              <a:rPr sz="1100" b="1">
-                <a:solidFill>
-                  <a:srgbClr val="3C4148"/>
-                </a:solidFill>
-                <a:latin typeface="Noto Sans JP"/>
-                <a:ea typeface="Noto Sans JP"/>
-              </a:rPr>
-              <a:t> に分けると</a:t>
-            </a:r>
-          </a:p>
-        </p:txBody>
-      </p:sp>
-      <p:sp>
-        <p:nvSpPr>
-          <p:cNvPr id="21" name="Rectangle 20"/>
-          <p:cNvSpPr/>
-          <p:nvPr/>
-        </p:nvSpPr>
-        <p:spPr>
-          <a:xfrm>
-            <a:off x="777240" y="3200400"/>
-            <a:ext cx="6380683" cy="841248"/>
-          </a:xfrm>
-          <a:prstGeom prst="rect">
-            <a:avLst/>
-          </a:prstGeom>
-          <a:solidFill>
-            <a:srgbClr val="8A9098"/>
-          </a:solidFill>
-          <a:ln>
-            <a:noFill/>
-          </a:ln>
-          <a:effectLst/>
-        </p:spPr>
-        <p:style>
-          <a:lnRef idx="1">
-            <a:schemeClr val="accent1"/>
-          </a:lnRef>
-          <a:fillRef idx="3">
-            <a:schemeClr val="accent1"/>
-          </a:fillRef>
-          <a:effectRef idx="2">
-            <a:schemeClr val="accent1"/>
-          </a:effectRef>
-          <a:fontRef idx="minor">
-            <a:schemeClr val="lt1"/>
-          </a:fontRef>
-        </p:style>
-        <p:txBody>
-          <a:bodyPr rtlCol="0" anchor="ctr"/>
-          <a:lstStyle/>
-          <a:p>
-            <a:pPr algn="ctr"/>
-          </a:p>
-        </p:txBody>
-      </p:sp>
-      <p:sp>
-        <p:nvSpPr>
-          <p:cNvPr id="22" name="Rectangle 21"/>
-          <p:cNvSpPr/>
-          <p:nvPr/>
-        </p:nvSpPr>
-        <p:spPr>
-          <a:xfrm>
-            <a:off x="7157923" y="3200400"/>
-            <a:ext cx="4253788" cy="841248"/>
-          </a:xfrm>
-          <a:prstGeom prst="rect">
-            <a:avLst/>
           </a:prstGeom>
           <a:solidFill>
             <a:srgbClr val="E60012"/>
@@ -7785,20 +7711,515 @@
       </p:sp>
       <p:sp>
         <p:nvSpPr>
-          <p:cNvPr id="23" name="Rectangle 22"/>
+          <p:cNvPr id="13" name="TextBox 12"/>
+          <p:cNvSpPr txBox="1"/>
+          <p:nvPr/>
+        </p:nvSpPr>
+        <p:spPr>
+          <a:xfrm>
+            <a:off x="2542032" y="1417320"/>
+            <a:ext cx="1686153" cy="457200"/>
+          </a:xfrm>
+          <a:prstGeom prst="rect">
+            <a:avLst/>
+          </a:prstGeom>
+          <a:noFill/>
+        </p:spPr>
+        <p:txBody>
+          <a:bodyPr wrap="square" anchor="ctr" lIns="0" rIns="0" tIns="0" bIns="0">
+            <a:spAutoFit/>
+          </a:bodyPr>
+          <a:lstStyle/>
+          <a:p>
+            <a:pPr algn="ctr">
+              <a:lnSpc>
+                <a:spcPct val="98000"/>
+              </a:lnSpc>
+              <a:spcBef>
+                <a:spcPts val="0"/>
+              </a:spcBef>
+              <a:spcAft>
+                <a:spcPts val="0"/>
+              </a:spcAft>
+            </a:pPr>
+            <a:r>
+              <a:rPr sz="750" b="1">
+                <a:solidFill>
+                  <a:srgbClr val="FFC9CE"/>
+                </a:solidFill>
+                <a:latin typeface="Consolas"/>
+                <a:ea typeface="Consolas"/>
+              </a:rPr>
+              <a:t>01</a:t>
+            </a:r>
+          </a:p>
+          <a:p>
+            <a:pPr algn="ctr">
+              <a:lnSpc>
+                <a:spcPct val="98000"/>
+              </a:lnSpc>
+              <a:spcBef>
+                <a:spcPts val="0"/>
+              </a:spcBef>
+              <a:spcAft>
+                <a:spcPts val="0"/>
+              </a:spcAft>
+            </a:pPr>
+            <a:r>
+              <a:rPr sz="1050" b="1">
+                <a:solidFill>
+                  <a:srgbClr val="FFFFFF"/>
+                </a:solidFill>
+                <a:latin typeface="Noto Sans JP"/>
+                <a:ea typeface="Noto Sans JP"/>
+              </a:rPr>
+              <a:t>発電・電源</a:t>
+            </a:r>
+          </a:p>
+        </p:txBody>
+      </p:sp>
+      <p:sp>
+        <p:nvSpPr>
+          <p:cNvPr id="14" name="Rounded Rectangle 13"/>
           <p:cNvSpPr/>
           <p:nvPr/>
         </p:nvSpPr>
         <p:spPr>
           <a:xfrm>
-            <a:off x="7146950" y="3200400"/>
-            <a:ext cx="21945" cy="841248"/>
-          </a:xfrm>
-          <a:prstGeom prst="rect">
-            <a:avLst/>
+            <a:off x="2660903" y="2020824"/>
+            <a:ext cx="1448409" cy="420624"/>
+          </a:xfrm>
+          <a:prstGeom prst="roundRect">
+            <a:avLst>
+              <a:gd name="adj" fmla="val 16000"/>
+            </a:avLst>
+          </a:prstGeom>
+          <a:solidFill>
+            <a:srgbClr val="F3F4F6"/>
+          </a:solidFill>
+          <a:ln w="12700">
+            <a:solidFill>
+              <a:srgbClr val="E2E4E9"/>
+            </a:solidFill>
+          </a:ln>
+          <a:effectLst/>
+        </p:spPr>
+        <p:style>
+          <a:lnRef idx="1">
+            <a:schemeClr val="accent1"/>
+          </a:lnRef>
+          <a:fillRef idx="3">
+            <a:schemeClr val="accent1"/>
+          </a:fillRef>
+          <a:effectRef idx="2">
+            <a:schemeClr val="accent1"/>
+          </a:effectRef>
+          <a:fontRef idx="minor">
+            <a:schemeClr val="lt1"/>
+          </a:fontRef>
+        </p:style>
+        <p:txBody>
+          <a:bodyPr rtlCol="0" anchor="ctr"/>
+          <a:lstStyle/>
+          <a:p>
+            <a:pPr algn="ctr"/>
+          </a:p>
+        </p:txBody>
+      </p:sp>
+      <p:sp>
+        <p:nvSpPr>
+          <p:cNvPr id="15" name="TextBox 14"/>
+          <p:cNvSpPr txBox="1"/>
+          <p:nvPr/>
+        </p:nvSpPr>
+        <p:spPr>
+          <a:xfrm>
+            <a:off x="2660903" y="2020824"/>
+            <a:ext cx="1448409" cy="420624"/>
+          </a:xfrm>
+          <a:prstGeom prst="rect">
+            <a:avLst/>
+          </a:prstGeom>
+          <a:noFill/>
+        </p:spPr>
+        <p:txBody>
+          <a:bodyPr wrap="square" anchor="ctr" lIns="0" rIns="0" tIns="0" bIns="0">
+            <a:spAutoFit/>
+          </a:bodyPr>
+          <a:lstStyle/>
+          <a:p>
+            <a:pPr algn="ctr">
+              <a:lnSpc>
+                <a:spcPct val="106000"/>
+              </a:lnSpc>
+              <a:spcBef>
+                <a:spcPts val="0"/>
+              </a:spcBef>
+              <a:spcAft>
+                <a:spcPts val="400"/>
+              </a:spcAft>
+            </a:pPr>
+            <a:r>
+              <a:rPr sz="1000" b="1">
+                <a:solidFill>
+                  <a:srgbClr val="1A1D21"/>
+                </a:solidFill>
+                <a:latin typeface="Noto Sans JP"/>
+                <a:ea typeface="Noto Sans JP"/>
+              </a:rPr>
+              <a:t>三菱重工</a:t>
+            </a:r>
+          </a:p>
+        </p:txBody>
+      </p:sp>
+      <p:sp>
+        <p:nvSpPr>
+          <p:cNvPr id="16" name="Rounded Rectangle 15"/>
+          <p:cNvSpPr/>
+          <p:nvPr/>
+        </p:nvSpPr>
+        <p:spPr>
+          <a:xfrm>
+            <a:off x="2660903" y="2532888"/>
+            <a:ext cx="1448409" cy="420624"/>
+          </a:xfrm>
+          <a:prstGeom prst="roundRect">
+            <a:avLst>
+              <a:gd name="adj" fmla="val 16000"/>
+            </a:avLst>
+          </a:prstGeom>
+          <a:solidFill>
+            <a:srgbClr val="F3F4F6"/>
+          </a:solidFill>
+          <a:ln w="12700">
+            <a:solidFill>
+              <a:srgbClr val="E2E4E9"/>
+            </a:solidFill>
+          </a:ln>
+          <a:effectLst/>
+        </p:spPr>
+        <p:style>
+          <a:lnRef idx="1">
+            <a:schemeClr val="accent1"/>
+          </a:lnRef>
+          <a:fillRef idx="3">
+            <a:schemeClr val="accent1"/>
+          </a:fillRef>
+          <a:effectRef idx="2">
+            <a:schemeClr val="accent1"/>
+          </a:effectRef>
+          <a:fontRef idx="minor">
+            <a:schemeClr val="lt1"/>
+          </a:fontRef>
+        </p:style>
+        <p:txBody>
+          <a:bodyPr rtlCol="0" anchor="ctr"/>
+          <a:lstStyle/>
+          <a:p>
+            <a:pPr algn="ctr"/>
+          </a:p>
+        </p:txBody>
+      </p:sp>
+      <p:sp>
+        <p:nvSpPr>
+          <p:cNvPr id="17" name="TextBox 16"/>
+          <p:cNvSpPr txBox="1"/>
+          <p:nvPr/>
+        </p:nvSpPr>
+        <p:spPr>
+          <a:xfrm>
+            <a:off x="2660903" y="2532888"/>
+            <a:ext cx="1448409" cy="420624"/>
+          </a:xfrm>
+          <a:prstGeom prst="rect">
+            <a:avLst/>
+          </a:prstGeom>
+          <a:noFill/>
+        </p:spPr>
+        <p:txBody>
+          <a:bodyPr wrap="square" anchor="ctr" lIns="0" rIns="0" tIns="0" bIns="0">
+            <a:spAutoFit/>
+          </a:bodyPr>
+          <a:lstStyle/>
+          <a:p>
+            <a:pPr algn="ctr">
+              <a:lnSpc>
+                <a:spcPct val="106000"/>
+              </a:lnSpc>
+              <a:spcBef>
+                <a:spcPts val="0"/>
+              </a:spcBef>
+              <a:spcAft>
+                <a:spcPts val="400"/>
+              </a:spcAft>
+            </a:pPr>
+            <a:r>
+              <a:rPr sz="1000" b="1">
+                <a:solidFill>
+                  <a:srgbClr val="1A1D21"/>
+                </a:solidFill>
+                <a:latin typeface="Noto Sans JP"/>
+                <a:ea typeface="Noto Sans JP"/>
+              </a:rPr>
+              <a:t>川崎重工</a:t>
+            </a:r>
+          </a:p>
+        </p:txBody>
+      </p:sp>
+      <p:sp>
+        <p:nvSpPr>
+          <p:cNvPr id="18" name="Rounded Rectangle 17"/>
+          <p:cNvSpPr/>
+          <p:nvPr/>
+        </p:nvSpPr>
+        <p:spPr>
+          <a:xfrm>
+            <a:off x="2660903" y="3044952"/>
+            <a:ext cx="1448409" cy="420624"/>
+          </a:xfrm>
+          <a:prstGeom prst="roundRect">
+            <a:avLst>
+              <a:gd name="adj" fmla="val 16000"/>
+            </a:avLst>
+          </a:prstGeom>
+          <a:solidFill>
+            <a:srgbClr val="F3F4F6"/>
+          </a:solidFill>
+          <a:ln w="12700">
+            <a:solidFill>
+              <a:srgbClr val="E2E4E9"/>
+            </a:solidFill>
+          </a:ln>
+          <a:effectLst/>
+        </p:spPr>
+        <p:style>
+          <a:lnRef idx="1">
+            <a:schemeClr val="accent1"/>
+          </a:lnRef>
+          <a:fillRef idx="3">
+            <a:schemeClr val="accent1"/>
+          </a:fillRef>
+          <a:effectRef idx="2">
+            <a:schemeClr val="accent1"/>
+          </a:effectRef>
+          <a:fontRef idx="minor">
+            <a:schemeClr val="lt1"/>
+          </a:fontRef>
+        </p:style>
+        <p:txBody>
+          <a:bodyPr rtlCol="0" anchor="ctr"/>
+          <a:lstStyle/>
+          <a:p>
+            <a:pPr algn="ctr"/>
+          </a:p>
+        </p:txBody>
+      </p:sp>
+      <p:sp>
+        <p:nvSpPr>
+          <p:cNvPr id="19" name="TextBox 18"/>
+          <p:cNvSpPr txBox="1"/>
+          <p:nvPr/>
+        </p:nvSpPr>
+        <p:spPr>
+          <a:xfrm>
+            <a:off x="2660903" y="3044952"/>
+            <a:ext cx="1448409" cy="420624"/>
+          </a:xfrm>
+          <a:prstGeom prst="rect">
+            <a:avLst/>
+          </a:prstGeom>
+          <a:noFill/>
+        </p:spPr>
+        <p:txBody>
+          <a:bodyPr wrap="square" anchor="ctr" lIns="0" rIns="0" tIns="0" bIns="0">
+            <a:spAutoFit/>
+          </a:bodyPr>
+          <a:lstStyle/>
+          <a:p>
+            <a:pPr algn="ctr">
+              <a:lnSpc>
+                <a:spcPct val="106000"/>
+              </a:lnSpc>
+              <a:spcBef>
+                <a:spcPts val="0"/>
+              </a:spcBef>
+              <a:spcAft>
+                <a:spcPts val="400"/>
+              </a:spcAft>
+            </a:pPr>
+            <a:r>
+              <a:rPr sz="1000" b="1">
+                <a:solidFill>
+                  <a:srgbClr val="1A1D21"/>
+                </a:solidFill>
+                <a:latin typeface="Noto Sans JP"/>
+                <a:ea typeface="Noto Sans JP"/>
+              </a:rPr>
+              <a:t>IHI</a:t>
+            </a:r>
+          </a:p>
+        </p:txBody>
+      </p:sp>
+      <p:sp>
+        <p:nvSpPr>
+          <p:cNvPr id="20" name="Rounded Rectangle 19"/>
+          <p:cNvSpPr/>
+          <p:nvPr/>
+        </p:nvSpPr>
+        <p:spPr>
+          <a:xfrm>
+            <a:off x="2660903" y="3557016"/>
+            <a:ext cx="1448409" cy="420624"/>
+          </a:xfrm>
+          <a:prstGeom prst="roundRect">
+            <a:avLst>
+              <a:gd name="adj" fmla="val 16000"/>
+            </a:avLst>
+          </a:prstGeom>
+          <a:solidFill>
+            <a:srgbClr val="F3F4F6"/>
+          </a:solidFill>
+          <a:ln w="12700">
+            <a:solidFill>
+              <a:srgbClr val="E2E4E9"/>
+            </a:solidFill>
+          </a:ln>
+          <a:effectLst/>
+        </p:spPr>
+        <p:style>
+          <a:lnRef idx="1">
+            <a:schemeClr val="accent1"/>
+          </a:lnRef>
+          <a:fillRef idx="3">
+            <a:schemeClr val="accent1"/>
+          </a:fillRef>
+          <a:effectRef idx="2">
+            <a:schemeClr val="accent1"/>
+          </a:effectRef>
+          <a:fontRef idx="minor">
+            <a:schemeClr val="lt1"/>
+          </a:fontRef>
+        </p:style>
+        <p:txBody>
+          <a:bodyPr rtlCol="0" anchor="ctr"/>
+          <a:lstStyle/>
+          <a:p>
+            <a:pPr algn="ctr"/>
+          </a:p>
+        </p:txBody>
+      </p:sp>
+      <p:sp>
+        <p:nvSpPr>
+          <p:cNvPr id="21" name="TextBox 20"/>
+          <p:cNvSpPr txBox="1"/>
+          <p:nvPr/>
+        </p:nvSpPr>
+        <p:spPr>
+          <a:xfrm>
+            <a:off x="2660903" y="3557016"/>
+            <a:ext cx="1448409" cy="420624"/>
+          </a:xfrm>
+          <a:prstGeom prst="rect">
+            <a:avLst/>
+          </a:prstGeom>
+          <a:noFill/>
+        </p:spPr>
+        <p:txBody>
+          <a:bodyPr wrap="square" anchor="ctr" lIns="0" rIns="0" tIns="0" bIns="0">
+            <a:spAutoFit/>
+          </a:bodyPr>
+          <a:lstStyle/>
+          <a:p>
+            <a:pPr algn="ctr">
+              <a:lnSpc>
+                <a:spcPct val="106000"/>
+              </a:lnSpc>
+              <a:spcBef>
+                <a:spcPts val="0"/>
+              </a:spcBef>
+              <a:spcAft>
+                <a:spcPts val="400"/>
+              </a:spcAft>
+            </a:pPr>
+            <a:r>
+              <a:rPr sz="1000" b="1">
+                <a:solidFill>
+                  <a:srgbClr val="1A1D21"/>
+                </a:solidFill>
+                <a:latin typeface="Noto Sans JP"/>
+                <a:ea typeface="Noto Sans JP"/>
+              </a:rPr>
+              <a:t>デンヨー</a:t>
+            </a:r>
+          </a:p>
+        </p:txBody>
+      </p:sp>
+      <p:sp>
+        <p:nvSpPr>
+          <p:cNvPr id="22" name="Rounded Rectangle 21"/>
+          <p:cNvSpPr/>
+          <p:nvPr/>
+        </p:nvSpPr>
+        <p:spPr>
+          <a:xfrm>
+            <a:off x="4337913" y="1417320"/>
+            <a:ext cx="1686153" cy="3383280"/>
+          </a:xfrm>
+          <a:prstGeom prst="roundRect">
+            <a:avLst>
+              <a:gd name="adj" fmla="val 5000"/>
+            </a:avLst>
           </a:prstGeom>
           <a:solidFill>
             <a:srgbClr val="FFFFFF"/>
+          </a:solidFill>
+          <a:ln w="12700">
+            <a:solidFill>
+              <a:srgbClr val="E2E4E9"/>
+            </a:solidFill>
+          </a:ln>
+          <a:effectLst/>
+        </p:spPr>
+        <p:style>
+          <a:lnRef idx="1">
+            <a:schemeClr val="accent1"/>
+          </a:lnRef>
+          <a:fillRef idx="3">
+            <a:schemeClr val="accent1"/>
+          </a:fillRef>
+          <a:effectRef idx="2">
+            <a:schemeClr val="accent1"/>
+          </a:effectRef>
+          <a:fontRef idx="minor">
+            <a:schemeClr val="lt1"/>
+          </a:fontRef>
+        </p:style>
+        <p:txBody>
+          <a:bodyPr rtlCol="0" anchor="ctr"/>
+          <a:lstStyle/>
+          <a:p>
+            <a:pPr algn="ctr"/>
+          </a:p>
+        </p:txBody>
+      </p:sp>
+      <p:sp>
+        <p:nvSpPr>
+          <p:cNvPr id="23" name="Rounded Rectangle 22"/>
+          <p:cNvSpPr/>
+          <p:nvPr/>
+        </p:nvSpPr>
+        <p:spPr>
+          <a:xfrm>
+            <a:off x="4337913" y="1417320"/>
+            <a:ext cx="1686153" cy="457200"/>
+          </a:xfrm>
+          <a:prstGeom prst="roundRect">
+            <a:avLst>
+              <a:gd name="adj" fmla="val 0"/>
+            </a:avLst>
+          </a:prstGeom>
+          <a:solidFill>
+            <a:srgbClr val="E60012"/>
           </a:solidFill>
           <a:ln>
             <a:noFill/>
@@ -7835,8 +8256,8 @@
         </p:nvSpPr>
         <p:spPr>
           <a:xfrm>
-            <a:off x="777240" y="3200400"/>
-            <a:ext cx="6380683" cy="841248"/>
+            <a:off x="4337913" y="1417320"/>
+            <a:ext cx="1686153" cy="457200"/>
           </a:xfrm>
           <a:prstGeom prst="rect">
             <a:avLst/>
@@ -7851,13 +8272,36 @@
           <a:p>
             <a:pPr algn="ctr">
               <a:lnSpc>
-                <a:spcPct val="100000"/>
-              </a:lnSpc>
-              <a:spcBef>
-                <a:spcPts val="0"/>
-              </a:spcBef>
-              <a:spcAft>
-                <a:spcPts val="100"/>
+                <a:spcPct val="98000"/>
+              </a:lnSpc>
+              <a:spcBef>
+                <a:spcPts val="0"/>
+              </a:spcBef>
+              <a:spcAft>
+                <a:spcPts val="0"/>
+              </a:spcAft>
+            </a:pPr>
+            <a:r>
+              <a:rPr sz="750" b="1">
+                <a:solidFill>
+                  <a:srgbClr val="FFC9CE"/>
+                </a:solidFill>
+                <a:latin typeface="Consolas"/>
+                <a:ea typeface="Consolas"/>
+              </a:rPr>
+              <a:t>02</a:t>
+            </a:r>
+          </a:p>
+          <a:p>
+            <a:pPr algn="ctr">
+              <a:lnSpc>
+                <a:spcPct val="98000"/>
+              </a:lnSpc>
+              <a:spcBef>
+                <a:spcPts val="0"/>
+              </a:spcBef>
+              <a:spcAft>
+                <a:spcPts val="0"/>
               </a:spcAft>
             </a:pPr>
             <a:r>
@@ -7868,171 +8312,33 @@
                 <a:latin typeface="Noto Sans JP"/>
                 <a:ea typeface="Noto Sans JP"/>
               </a:rPr>
-              <a:t>材：機器・材料（変圧器・冷凍機・UPS等）</a:t>
-            </a:r>
-          </a:p>
-          <a:p>
-            <a:pPr algn="ctr">
-              <a:lnSpc>
-                <a:spcPct val="100000"/>
-              </a:lnSpc>
-              <a:spcBef>
-                <a:spcPts val="0"/>
-              </a:spcBef>
-              <a:spcAft>
-                <a:spcPts val="100"/>
-              </a:spcAft>
-            </a:pPr>
-            <a:r>
-              <a:rPr sz="1700" b="1">
-                <a:solidFill>
-                  <a:srgbClr val="FFFFFF"/>
-                </a:solidFill>
-                <a:latin typeface="Noto Sans JP"/>
-                <a:ea typeface="Noto Sans JP"/>
-              </a:rPr>
-              <a:t>約6割</a:t>
-            </a:r>
-          </a:p>
-        </p:txBody>
-      </p:sp>
-      <p:sp>
-        <p:nvSpPr>
-          <p:cNvPr id="25" name="TextBox 24"/>
-          <p:cNvSpPr txBox="1"/>
-          <p:nvPr/>
-        </p:nvSpPr>
-        <p:spPr>
-          <a:xfrm>
-            <a:off x="7157923" y="3200400"/>
-            <a:ext cx="4253788" cy="841248"/>
-          </a:xfrm>
-          <a:prstGeom prst="rect">
-            <a:avLst/>
-          </a:prstGeom>
-          <a:noFill/>
-        </p:spPr>
-        <p:txBody>
-          <a:bodyPr wrap="square" anchor="ctr" lIns="0" rIns="0" tIns="0" bIns="0">
-            <a:spAutoFit/>
-          </a:bodyPr>
-          <a:lstStyle/>
-          <a:p>
-            <a:pPr algn="ctr">
-              <a:lnSpc>
-                <a:spcPct val="100000"/>
-              </a:lnSpc>
-              <a:spcBef>
-                <a:spcPts val="0"/>
-              </a:spcBef>
-              <a:spcAft>
-                <a:spcPts val="100"/>
-              </a:spcAft>
-            </a:pPr>
-            <a:r>
-              <a:rPr sz="1050" b="1">
-                <a:solidFill>
-                  <a:srgbClr val="FFFFFF"/>
-                </a:solidFill>
-                <a:latin typeface="Noto Sans JP"/>
-                <a:ea typeface="Noto Sans JP"/>
-              </a:rPr>
-              <a:t>工：据付・施工（人が動く）</a:t>
-            </a:r>
-          </a:p>
-          <a:p>
-            <a:pPr algn="ctr">
-              <a:lnSpc>
-                <a:spcPct val="100000"/>
-              </a:lnSpc>
-              <a:spcBef>
-                <a:spcPts val="0"/>
-              </a:spcBef>
-              <a:spcAft>
-                <a:spcPts val="100"/>
-              </a:spcAft>
-            </a:pPr>
-            <a:r>
-              <a:rPr sz="1700" b="1">
-                <a:solidFill>
-                  <a:srgbClr val="FFFFFF"/>
-                </a:solidFill>
-                <a:latin typeface="Noto Sans JP"/>
-                <a:ea typeface="Noto Sans JP"/>
-              </a:rPr>
-              <a:t>約4割</a:t>
-            </a:r>
-          </a:p>
-        </p:txBody>
-      </p:sp>
-      <p:sp>
-        <p:nvSpPr>
-          <p:cNvPr id="26" name="TextBox 25"/>
-          <p:cNvSpPr txBox="1"/>
-          <p:nvPr/>
-        </p:nvSpPr>
-        <p:spPr>
-          <a:xfrm>
-            <a:off x="7157923" y="4078224"/>
-            <a:ext cx="4253788" cy="219456"/>
-          </a:xfrm>
-          <a:prstGeom prst="rect">
-            <a:avLst/>
-          </a:prstGeom>
-          <a:noFill/>
-        </p:spPr>
-        <p:txBody>
-          <a:bodyPr wrap="square" anchor="t" lIns="0" rIns="0" tIns="0" bIns="0">
-            <a:spAutoFit/>
-          </a:bodyPr>
-          <a:lstStyle/>
-          <a:p>
-            <a:pPr algn="ctr">
-              <a:lnSpc>
-                <a:spcPct val="106000"/>
-              </a:lnSpc>
-              <a:spcBef>
-                <a:spcPts val="0"/>
-              </a:spcBef>
-              <a:spcAft>
-                <a:spcPts val="400"/>
-              </a:spcAft>
-            </a:pPr>
-            <a:r>
-              <a:rPr sz="950" b="1">
-                <a:solidFill>
-                  <a:srgbClr val="E60012"/>
-                </a:solidFill>
-                <a:latin typeface="Consolas"/>
-                <a:ea typeface="Consolas"/>
-              </a:rPr>
-              <a:t>↑ ここがANDPADの市場（工）</a:t>
-            </a:r>
-          </a:p>
-        </p:txBody>
-      </p:sp>
-      <p:sp>
-        <p:nvSpPr>
-          <p:cNvPr id="27" name="Rounded Rectangle 26"/>
+              <a:t>送変電・電線</a:t>
+            </a:r>
+          </a:p>
+        </p:txBody>
+      </p:sp>
+      <p:sp>
+        <p:nvSpPr>
+          <p:cNvPr id="25" name="Rounded Rectangle 24"/>
           <p:cNvSpPr/>
           <p:nvPr/>
         </p:nvSpPr>
         <p:spPr>
           <a:xfrm>
-            <a:off x="777240" y="4590288"/>
-            <a:ext cx="10634472" cy="1170432"/>
+            <a:off x="4456785" y="2020824"/>
+            <a:ext cx="1448409" cy="420624"/>
           </a:xfrm>
           <a:prstGeom prst="roundRect">
             <a:avLst>
-              <a:gd name="adj" fmla="val 5000"/>
+              <a:gd name="adj" fmla="val 16000"/>
             </a:avLst>
           </a:prstGeom>
           <a:solidFill>
-            <a:srgbClr val="FDECEE"/>
+            <a:srgbClr val="F3F4F6"/>
           </a:solidFill>
-          <a:ln w="15240">
+          <a:ln w="12700">
             <a:solidFill>
-              <a:srgbClr val="F3C7CD"/>
+              <a:srgbClr val="E2E4E9"/>
             </a:solidFill>
           </a:ln>
           <a:effectLst/>
@@ -8061,14 +8367,1969 @@
       </p:sp>
       <p:sp>
         <p:nvSpPr>
+          <p:cNvPr id="26" name="TextBox 25"/>
+          <p:cNvSpPr txBox="1"/>
+          <p:nvPr/>
+        </p:nvSpPr>
+        <p:spPr>
+          <a:xfrm>
+            <a:off x="4456785" y="2020824"/>
+            <a:ext cx="1448409" cy="420624"/>
+          </a:xfrm>
+          <a:prstGeom prst="rect">
+            <a:avLst/>
+          </a:prstGeom>
+          <a:noFill/>
+        </p:spPr>
+        <p:txBody>
+          <a:bodyPr wrap="square" anchor="ctr" lIns="0" rIns="0" tIns="0" bIns="0">
+            <a:spAutoFit/>
+          </a:bodyPr>
+          <a:lstStyle/>
+          <a:p>
+            <a:pPr algn="ctr">
+              <a:lnSpc>
+                <a:spcPct val="106000"/>
+              </a:lnSpc>
+              <a:spcBef>
+                <a:spcPts val="0"/>
+              </a:spcBef>
+              <a:spcAft>
+                <a:spcPts val="400"/>
+              </a:spcAft>
+            </a:pPr>
+            <a:r>
+              <a:rPr sz="1000" b="1">
+                <a:solidFill>
+                  <a:srgbClr val="1A1D21"/>
+                </a:solidFill>
+                <a:latin typeface="Noto Sans JP"/>
+                <a:ea typeface="Noto Sans JP"/>
+              </a:rPr>
+              <a:t>日立</a:t>
+            </a:r>
+          </a:p>
+        </p:txBody>
+      </p:sp>
+      <p:sp>
+        <p:nvSpPr>
+          <p:cNvPr id="27" name="Rounded Rectangle 26"/>
+          <p:cNvSpPr/>
+          <p:nvPr/>
+        </p:nvSpPr>
+        <p:spPr>
+          <a:xfrm>
+            <a:off x="4456785" y="2532888"/>
+            <a:ext cx="1448409" cy="420624"/>
+          </a:xfrm>
+          <a:prstGeom prst="roundRect">
+            <a:avLst>
+              <a:gd name="adj" fmla="val 16000"/>
+            </a:avLst>
+          </a:prstGeom>
+          <a:solidFill>
+            <a:srgbClr val="F3F4F6"/>
+          </a:solidFill>
+          <a:ln w="12700">
+            <a:solidFill>
+              <a:srgbClr val="E2E4E9"/>
+            </a:solidFill>
+          </a:ln>
+          <a:effectLst/>
+        </p:spPr>
+        <p:style>
+          <a:lnRef idx="1">
+            <a:schemeClr val="accent1"/>
+          </a:lnRef>
+          <a:fillRef idx="3">
+            <a:schemeClr val="accent1"/>
+          </a:fillRef>
+          <a:effectRef idx="2">
+            <a:schemeClr val="accent1"/>
+          </a:effectRef>
+          <a:fontRef idx="minor">
+            <a:schemeClr val="lt1"/>
+          </a:fontRef>
+        </p:style>
+        <p:txBody>
+          <a:bodyPr rtlCol="0" anchor="ctr"/>
+          <a:lstStyle/>
+          <a:p>
+            <a:pPr algn="ctr"/>
+          </a:p>
+        </p:txBody>
+      </p:sp>
+      <p:sp>
+        <p:nvSpPr>
           <p:cNvPr id="28" name="TextBox 27"/>
           <p:cNvSpPr txBox="1"/>
           <p:nvPr/>
         </p:nvSpPr>
         <p:spPr>
           <a:xfrm>
-            <a:off x="1051560" y="4754880"/>
-            <a:ext cx="10058400" cy="457200"/>
+            <a:off x="4456785" y="2532888"/>
+            <a:ext cx="1448409" cy="420624"/>
+          </a:xfrm>
+          <a:prstGeom prst="rect">
+            <a:avLst/>
+          </a:prstGeom>
+          <a:noFill/>
+        </p:spPr>
+        <p:txBody>
+          <a:bodyPr wrap="square" anchor="ctr" lIns="0" rIns="0" tIns="0" bIns="0">
+            <a:spAutoFit/>
+          </a:bodyPr>
+          <a:lstStyle/>
+          <a:p>
+            <a:pPr algn="ctr">
+              <a:lnSpc>
+                <a:spcPct val="106000"/>
+              </a:lnSpc>
+              <a:spcBef>
+                <a:spcPts val="0"/>
+              </a:spcBef>
+              <a:spcAft>
+                <a:spcPts val="400"/>
+              </a:spcAft>
+            </a:pPr>
+            <a:r>
+              <a:rPr sz="1000" b="1">
+                <a:solidFill>
+                  <a:srgbClr val="1A1D21"/>
+                </a:solidFill>
+                <a:latin typeface="Noto Sans JP"/>
+                <a:ea typeface="Noto Sans JP"/>
+              </a:rPr>
+              <a:t>三菱電機</a:t>
+            </a:r>
+          </a:p>
+        </p:txBody>
+      </p:sp>
+      <p:sp>
+        <p:nvSpPr>
+          <p:cNvPr id="29" name="Rounded Rectangle 28"/>
+          <p:cNvSpPr/>
+          <p:nvPr/>
+        </p:nvSpPr>
+        <p:spPr>
+          <a:xfrm>
+            <a:off x="4456785" y="3044952"/>
+            <a:ext cx="1448409" cy="420624"/>
+          </a:xfrm>
+          <a:prstGeom prst="roundRect">
+            <a:avLst>
+              <a:gd name="adj" fmla="val 16000"/>
+            </a:avLst>
+          </a:prstGeom>
+          <a:solidFill>
+            <a:srgbClr val="F3F4F6"/>
+          </a:solidFill>
+          <a:ln w="12700">
+            <a:solidFill>
+              <a:srgbClr val="E2E4E9"/>
+            </a:solidFill>
+          </a:ln>
+          <a:effectLst/>
+        </p:spPr>
+        <p:style>
+          <a:lnRef idx="1">
+            <a:schemeClr val="accent1"/>
+          </a:lnRef>
+          <a:fillRef idx="3">
+            <a:schemeClr val="accent1"/>
+          </a:fillRef>
+          <a:effectRef idx="2">
+            <a:schemeClr val="accent1"/>
+          </a:effectRef>
+          <a:fontRef idx="minor">
+            <a:schemeClr val="lt1"/>
+          </a:fontRef>
+        </p:style>
+        <p:txBody>
+          <a:bodyPr rtlCol="0" anchor="ctr"/>
+          <a:lstStyle/>
+          <a:p>
+            <a:pPr algn="ctr"/>
+          </a:p>
+        </p:txBody>
+      </p:sp>
+      <p:sp>
+        <p:nvSpPr>
+          <p:cNvPr id="30" name="TextBox 29"/>
+          <p:cNvSpPr txBox="1"/>
+          <p:nvPr/>
+        </p:nvSpPr>
+        <p:spPr>
+          <a:xfrm>
+            <a:off x="4456785" y="3044952"/>
+            <a:ext cx="1448409" cy="420624"/>
+          </a:xfrm>
+          <a:prstGeom prst="rect">
+            <a:avLst/>
+          </a:prstGeom>
+          <a:noFill/>
+        </p:spPr>
+        <p:txBody>
+          <a:bodyPr wrap="square" anchor="ctr" lIns="0" rIns="0" tIns="0" bIns="0">
+            <a:spAutoFit/>
+          </a:bodyPr>
+          <a:lstStyle/>
+          <a:p>
+            <a:pPr algn="ctr">
+              <a:lnSpc>
+                <a:spcPct val="106000"/>
+              </a:lnSpc>
+              <a:spcBef>
+                <a:spcPts val="0"/>
+              </a:spcBef>
+              <a:spcAft>
+                <a:spcPts val="400"/>
+              </a:spcAft>
+            </a:pPr>
+            <a:r>
+              <a:rPr sz="1000" b="1">
+                <a:solidFill>
+                  <a:srgbClr val="1A1D21"/>
+                </a:solidFill>
+                <a:latin typeface="Noto Sans JP"/>
+                <a:ea typeface="Noto Sans JP"/>
+              </a:rPr>
+              <a:t>ダイヘン</a:t>
+            </a:r>
+          </a:p>
+        </p:txBody>
+      </p:sp>
+      <p:sp>
+        <p:nvSpPr>
+          <p:cNvPr id="31" name="Rounded Rectangle 30"/>
+          <p:cNvSpPr/>
+          <p:nvPr/>
+        </p:nvSpPr>
+        <p:spPr>
+          <a:xfrm>
+            <a:off x="4456785" y="3557016"/>
+            <a:ext cx="1448409" cy="420624"/>
+          </a:xfrm>
+          <a:prstGeom prst="roundRect">
+            <a:avLst>
+              <a:gd name="adj" fmla="val 16000"/>
+            </a:avLst>
+          </a:prstGeom>
+          <a:solidFill>
+            <a:srgbClr val="F3F4F6"/>
+          </a:solidFill>
+          <a:ln w="12700">
+            <a:solidFill>
+              <a:srgbClr val="E2E4E9"/>
+            </a:solidFill>
+          </a:ln>
+          <a:effectLst/>
+        </p:spPr>
+        <p:style>
+          <a:lnRef idx="1">
+            <a:schemeClr val="accent1"/>
+          </a:lnRef>
+          <a:fillRef idx="3">
+            <a:schemeClr val="accent1"/>
+          </a:fillRef>
+          <a:effectRef idx="2">
+            <a:schemeClr val="accent1"/>
+          </a:effectRef>
+          <a:fontRef idx="minor">
+            <a:schemeClr val="lt1"/>
+          </a:fontRef>
+        </p:style>
+        <p:txBody>
+          <a:bodyPr rtlCol="0" anchor="ctr"/>
+          <a:lstStyle/>
+          <a:p>
+            <a:pPr algn="ctr"/>
+          </a:p>
+        </p:txBody>
+      </p:sp>
+      <p:sp>
+        <p:nvSpPr>
+          <p:cNvPr id="32" name="TextBox 31"/>
+          <p:cNvSpPr txBox="1"/>
+          <p:nvPr/>
+        </p:nvSpPr>
+        <p:spPr>
+          <a:xfrm>
+            <a:off x="4456785" y="3557016"/>
+            <a:ext cx="1448409" cy="420624"/>
+          </a:xfrm>
+          <a:prstGeom prst="rect">
+            <a:avLst/>
+          </a:prstGeom>
+          <a:noFill/>
+        </p:spPr>
+        <p:txBody>
+          <a:bodyPr wrap="square" anchor="ctr" lIns="0" rIns="0" tIns="0" bIns="0">
+            <a:spAutoFit/>
+          </a:bodyPr>
+          <a:lstStyle/>
+          <a:p>
+            <a:pPr algn="ctr">
+              <a:lnSpc>
+                <a:spcPct val="106000"/>
+              </a:lnSpc>
+              <a:spcBef>
+                <a:spcPts val="0"/>
+              </a:spcBef>
+              <a:spcAft>
+                <a:spcPts val="400"/>
+              </a:spcAft>
+            </a:pPr>
+            <a:r>
+              <a:rPr sz="1000" b="1">
+                <a:solidFill>
+                  <a:srgbClr val="1A1D21"/>
+                </a:solidFill>
+                <a:latin typeface="Noto Sans JP"/>
+                <a:ea typeface="Noto Sans JP"/>
+              </a:rPr>
+              <a:t>フジクラ</a:t>
+            </a:r>
+          </a:p>
+        </p:txBody>
+      </p:sp>
+      <p:sp>
+        <p:nvSpPr>
+          <p:cNvPr id="33" name="Rounded Rectangle 32"/>
+          <p:cNvSpPr/>
+          <p:nvPr/>
+        </p:nvSpPr>
+        <p:spPr>
+          <a:xfrm>
+            <a:off x="6133795" y="1417320"/>
+            <a:ext cx="1686153" cy="3383280"/>
+          </a:xfrm>
+          <a:prstGeom prst="roundRect">
+            <a:avLst>
+              <a:gd name="adj" fmla="val 5000"/>
+            </a:avLst>
+          </a:prstGeom>
+          <a:solidFill>
+            <a:srgbClr val="FFFFFF"/>
+          </a:solidFill>
+          <a:ln w="12700">
+            <a:solidFill>
+              <a:srgbClr val="E2E4E9"/>
+            </a:solidFill>
+          </a:ln>
+          <a:effectLst/>
+        </p:spPr>
+        <p:style>
+          <a:lnRef idx="1">
+            <a:schemeClr val="accent1"/>
+          </a:lnRef>
+          <a:fillRef idx="3">
+            <a:schemeClr val="accent1"/>
+          </a:fillRef>
+          <a:effectRef idx="2">
+            <a:schemeClr val="accent1"/>
+          </a:effectRef>
+          <a:fontRef idx="minor">
+            <a:schemeClr val="lt1"/>
+          </a:fontRef>
+        </p:style>
+        <p:txBody>
+          <a:bodyPr rtlCol="0" anchor="ctr"/>
+          <a:lstStyle/>
+          <a:p>
+            <a:pPr algn="ctr"/>
+          </a:p>
+        </p:txBody>
+      </p:sp>
+      <p:sp>
+        <p:nvSpPr>
+          <p:cNvPr id="34" name="Rounded Rectangle 33"/>
+          <p:cNvSpPr/>
+          <p:nvPr/>
+        </p:nvSpPr>
+        <p:spPr>
+          <a:xfrm>
+            <a:off x="6133795" y="1417320"/>
+            <a:ext cx="1686153" cy="457200"/>
+          </a:xfrm>
+          <a:prstGeom prst="roundRect">
+            <a:avLst>
+              <a:gd name="adj" fmla="val 0"/>
+            </a:avLst>
+          </a:prstGeom>
+          <a:solidFill>
+            <a:srgbClr val="E60012"/>
+          </a:solidFill>
+          <a:ln>
+            <a:noFill/>
+          </a:ln>
+          <a:effectLst/>
+        </p:spPr>
+        <p:style>
+          <a:lnRef idx="1">
+            <a:schemeClr val="accent1"/>
+          </a:lnRef>
+          <a:fillRef idx="3">
+            <a:schemeClr val="accent1"/>
+          </a:fillRef>
+          <a:effectRef idx="2">
+            <a:schemeClr val="accent1"/>
+          </a:effectRef>
+          <a:fontRef idx="minor">
+            <a:schemeClr val="lt1"/>
+          </a:fontRef>
+        </p:style>
+        <p:txBody>
+          <a:bodyPr rtlCol="0" anchor="ctr"/>
+          <a:lstStyle/>
+          <a:p>
+            <a:pPr algn="ctr"/>
+          </a:p>
+        </p:txBody>
+      </p:sp>
+      <p:sp>
+        <p:nvSpPr>
+          <p:cNvPr id="35" name="TextBox 34"/>
+          <p:cNvSpPr txBox="1"/>
+          <p:nvPr/>
+        </p:nvSpPr>
+        <p:spPr>
+          <a:xfrm>
+            <a:off x="6133795" y="1417320"/>
+            <a:ext cx="1686153" cy="457200"/>
+          </a:xfrm>
+          <a:prstGeom prst="rect">
+            <a:avLst/>
+          </a:prstGeom>
+          <a:noFill/>
+        </p:spPr>
+        <p:txBody>
+          <a:bodyPr wrap="square" anchor="ctr" lIns="0" rIns="0" tIns="0" bIns="0">
+            <a:spAutoFit/>
+          </a:bodyPr>
+          <a:lstStyle/>
+          <a:p>
+            <a:pPr algn="ctr">
+              <a:lnSpc>
+                <a:spcPct val="98000"/>
+              </a:lnSpc>
+              <a:spcBef>
+                <a:spcPts val="0"/>
+              </a:spcBef>
+              <a:spcAft>
+                <a:spcPts val="0"/>
+              </a:spcAft>
+            </a:pPr>
+            <a:r>
+              <a:rPr sz="750" b="1">
+                <a:solidFill>
+                  <a:srgbClr val="FFC9CE"/>
+                </a:solidFill>
+                <a:latin typeface="Consolas"/>
+                <a:ea typeface="Consolas"/>
+              </a:rPr>
+              <a:t>03</a:t>
+            </a:r>
+          </a:p>
+          <a:p>
+            <a:pPr algn="ctr">
+              <a:lnSpc>
+                <a:spcPct val="98000"/>
+              </a:lnSpc>
+              <a:spcBef>
+                <a:spcPts val="0"/>
+              </a:spcBef>
+              <a:spcAft>
+                <a:spcPts val="0"/>
+              </a:spcAft>
+            </a:pPr>
+            <a:r>
+              <a:rPr sz="1050" b="1">
+                <a:solidFill>
+                  <a:srgbClr val="FFFFFF"/>
+                </a:solidFill>
+                <a:latin typeface="Noto Sans JP"/>
+                <a:ea typeface="Noto Sans JP"/>
+              </a:rPr>
+              <a:t>DC建設・設備</a:t>
+            </a:r>
+          </a:p>
+        </p:txBody>
+      </p:sp>
+      <p:sp>
+        <p:nvSpPr>
+          <p:cNvPr id="36" name="Rounded Rectangle 35"/>
+          <p:cNvSpPr/>
+          <p:nvPr/>
+        </p:nvSpPr>
+        <p:spPr>
+          <a:xfrm>
+            <a:off x="6252667" y="2020824"/>
+            <a:ext cx="1448409" cy="420624"/>
+          </a:xfrm>
+          <a:prstGeom prst="roundRect">
+            <a:avLst>
+              <a:gd name="adj" fmla="val 16000"/>
+            </a:avLst>
+          </a:prstGeom>
+          <a:solidFill>
+            <a:srgbClr val="F3F4F6"/>
+          </a:solidFill>
+          <a:ln w="12700">
+            <a:solidFill>
+              <a:srgbClr val="E2E4E9"/>
+            </a:solidFill>
+          </a:ln>
+          <a:effectLst/>
+        </p:spPr>
+        <p:style>
+          <a:lnRef idx="1">
+            <a:schemeClr val="accent1"/>
+          </a:lnRef>
+          <a:fillRef idx="3">
+            <a:schemeClr val="accent1"/>
+          </a:fillRef>
+          <a:effectRef idx="2">
+            <a:schemeClr val="accent1"/>
+          </a:effectRef>
+          <a:fontRef idx="minor">
+            <a:schemeClr val="lt1"/>
+          </a:fontRef>
+        </p:style>
+        <p:txBody>
+          <a:bodyPr rtlCol="0" anchor="ctr"/>
+          <a:lstStyle/>
+          <a:p>
+            <a:pPr algn="ctr"/>
+          </a:p>
+        </p:txBody>
+      </p:sp>
+      <p:sp>
+        <p:nvSpPr>
+          <p:cNvPr id="37" name="TextBox 36"/>
+          <p:cNvSpPr txBox="1"/>
+          <p:nvPr/>
+        </p:nvSpPr>
+        <p:spPr>
+          <a:xfrm>
+            <a:off x="6252667" y="2020824"/>
+            <a:ext cx="1448409" cy="420624"/>
+          </a:xfrm>
+          <a:prstGeom prst="rect">
+            <a:avLst/>
+          </a:prstGeom>
+          <a:noFill/>
+        </p:spPr>
+        <p:txBody>
+          <a:bodyPr wrap="square" anchor="ctr" lIns="0" rIns="0" tIns="0" bIns="0">
+            <a:spAutoFit/>
+          </a:bodyPr>
+          <a:lstStyle/>
+          <a:p>
+            <a:pPr algn="ctr">
+              <a:lnSpc>
+                <a:spcPct val="106000"/>
+              </a:lnSpc>
+              <a:spcBef>
+                <a:spcPts val="0"/>
+              </a:spcBef>
+              <a:spcAft>
+                <a:spcPts val="400"/>
+              </a:spcAft>
+            </a:pPr>
+            <a:r>
+              <a:rPr sz="1000" b="1">
+                <a:solidFill>
+                  <a:srgbClr val="1A1D21"/>
+                </a:solidFill>
+                <a:latin typeface="Noto Sans JP"/>
+                <a:ea typeface="Noto Sans JP"/>
+              </a:rPr>
+              <a:t>鹿島建設</a:t>
+            </a:r>
+          </a:p>
+        </p:txBody>
+      </p:sp>
+      <p:sp>
+        <p:nvSpPr>
+          <p:cNvPr id="38" name="Rounded Rectangle 37"/>
+          <p:cNvSpPr/>
+          <p:nvPr/>
+        </p:nvSpPr>
+        <p:spPr>
+          <a:xfrm>
+            <a:off x="6252667" y="2532888"/>
+            <a:ext cx="1448409" cy="420624"/>
+          </a:xfrm>
+          <a:prstGeom prst="roundRect">
+            <a:avLst>
+              <a:gd name="adj" fmla="val 16000"/>
+            </a:avLst>
+          </a:prstGeom>
+          <a:solidFill>
+            <a:srgbClr val="F3F4F6"/>
+          </a:solidFill>
+          <a:ln w="12700">
+            <a:solidFill>
+              <a:srgbClr val="E2E4E9"/>
+            </a:solidFill>
+          </a:ln>
+          <a:effectLst/>
+        </p:spPr>
+        <p:style>
+          <a:lnRef idx="1">
+            <a:schemeClr val="accent1"/>
+          </a:lnRef>
+          <a:fillRef idx="3">
+            <a:schemeClr val="accent1"/>
+          </a:fillRef>
+          <a:effectRef idx="2">
+            <a:schemeClr val="accent1"/>
+          </a:effectRef>
+          <a:fontRef idx="minor">
+            <a:schemeClr val="lt1"/>
+          </a:fontRef>
+        </p:style>
+        <p:txBody>
+          <a:bodyPr rtlCol="0" anchor="ctr"/>
+          <a:lstStyle/>
+          <a:p>
+            <a:pPr algn="ctr"/>
+          </a:p>
+        </p:txBody>
+      </p:sp>
+      <p:sp>
+        <p:nvSpPr>
+          <p:cNvPr id="39" name="TextBox 38"/>
+          <p:cNvSpPr txBox="1"/>
+          <p:nvPr/>
+        </p:nvSpPr>
+        <p:spPr>
+          <a:xfrm>
+            <a:off x="6252667" y="2532888"/>
+            <a:ext cx="1448409" cy="420624"/>
+          </a:xfrm>
+          <a:prstGeom prst="rect">
+            <a:avLst/>
+          </a:prstGeom>
+          <a:noFill/>
+        </p:spPr>
+        <p:txBody>
+          <a:bodyPr wrap="square" anchor="ctr" lIns="0" rIns="0" tIns="0" bIns="0">
+            <a:spAutoFit/>
+          </a:bodyPr>
+          <a:lstStyle/>
+          <a:p>
+            <a:pPr algn="ctr">
+              <a:lnSpc>
+                <a:spcPct val="106000"/>
+              </a:lnSpc>
+              <a:spcBef>
+                <a:spcPts val="0"/>
+              </a:spcBef>
+              <a:spcAft>
+                <a:spcPts val="400"/>
+              </a:spcAft>
+            </a:pPr>
+            <a:r>
+              <a:rPr sz="1000" b="1">
+                <a:solidFill>
+                  <a:srgbClr val="1A1D21"/>
+                </a:solidFill>
+                <a:latin typeface="Noto Sans JP"/>
+                <a:ea typeface="Noto Sans JP"/>
+              </a:rPr>
+              <a:t>大林組</a:t>
+            </a:r>
+          </a:p>
+        </p:txBody>
+      </p:sp>
+      <p:sp>
+        <p:nvSpPr>
+          <p:cNvPr id="40" name="Rounded Rectangle 39"/>
+          <p:cNvSpPr/>
+          <p:nvPr/>
+        </p:nvSpPr>
+        <p:spPr>
+          <a:xfrm>
+            <a:off x="6252667" y="3044952"/>
+            <a:ext cx="1448409" cy="420624"/>
+          </a:xfrm>
+          <a:prstGeom prst="roundRect">
+            <a:avLst>
+              <a:gd name="adj" fmla="val 16000"/>
+            </a:avLst>
+          </a:prstGeom>
+          <a:solidFill>
+            <a:srgbClr val="F3F4F6"/>
+          </a:solidFill>
+          <a:ln w="12700">
+            <a:solidFill>
+              <a:srgbClr val="E2E4E9"/>
+            </a:solidFill>
+          </a:ln>
+          <a:effectLst/>
+        </p:spPr>
+        <p:style>
+          <a:lnRef idx="1">
+            <a:schemeClr val="accent1"/>
+          </a:lnRef>
+          <a:fillRef idx="3">
+            <a:schemeClr val="accent1"/>
+          </a:fillRef>
+          <a:effectRef idx="2">
+            <a:schemeClr val="accent1"/>
+          </a:effectRef>
+          <a:fontRef idx="minor">
+            <a:schemeClr val="lt1"/>
+          </a:fontRef>
+        </p:style>
+        <p:txBody>
+          <a:bodyPr rtlCol="0" anchor="ctr"/>
+          <a:lstStyle/>
+          <a:p>
+            <a:pPr algn="ctr"/>
+          </a:p>
+        </p:txBody>
+      </p:sp>
+      <p:sp>
+        <p:nvSpPr>
+          <p:cNvPr id="41" name="TextBox 40"/>
+          <p:cNvSpPr txBox="1"/>
+          <p:nvPr/>
+        </p:nvSpPr>
+        <p:spPr>
+          <a:xfrm>
+            <a:off x="6252667" y="3044952"/>
+            <a:ext cx="1448409" cy="420624"/>
+          </a:xfrm>
+          <a:prstGeom prst="rect">
+            <a:avLst/>
+          </a:prstGeom>
+          <a:noFill/>
+        </p:spPr>
+        <p:txBody>
+          <a:bodyPr wrap="square" anchor="ctr" lIns="0" rIns="0" tIns="0" bIns="0">
+            <a:spAutoFit/>
+          </a:bodyPr>
+          <a:lstStyle/>
+          <a:p>
+            <a:pPr algn="ctr">
+              <a:lnSpc>
+                <a:spcPct val="106000"/>
+              </a:lnSpc>
+              <a:spcBef>
+                <a:spcPts val="0"/>
+              </a:spcBef>
+              <a:spcAft>
+                <a:spcPts val="400"/>
+              </a:spcAft>
+            </a:pPr>
+            <a:r>
+              <a:rPr sz="1000" b="1">
+                <a:solidFill>
+                  <a:srgbClr val="1A1D21"/>
+                </a:solidFill>
+                <a:latin typeface="Noto Sans JP"/>
+                <a:ea typeface="Noto Sans JP"/>
+              </a:rPr>
+              <a:t>きんでん</a:t>
+            </a:r>
+          </a:p>
+        </p:txBody>
+      </p:sp>
+      <p:sp>
+        <p:nvSpPr>
+          <p:cNvPr id="42" name="Rounded Rectangle 41"/>
+          <p:cNvSpPr/>
+          <p:nvPr/>
+        </p:nvSpPr>
+        <p:spPr>
+          <a:xfrm>
+            <a:off x="6252667" y="3557016"/>
+            <a:ext cx="1448409" cy="420624"/>
+          </a:xfrm>
+          <a:prstGeom prst="roundRect">
+            <a:avLst>
+              <a:gd name="adj" fmla="val 16000"/>
+            </a:avLst>
+          </a:prstGeom>
+          <a:solidFill>
+            <a:srgbClr val="F3F4F6"/>
+          </a:solidFill>
+          <a:ln w="12700">
+            <a:solidFill>
+              <a:srgbClr val="E2E4E9"/>
+            </a:solidFill>
+          </a:ln>
+          <a:effectLst/>
+        </p:spPr>
+        <p:style>
+          <a:lnRef idx="1">
+            <a:schemeClr val="accent1"/>
+          </a:lnRef>
+          <a:fillRef idx="3">
+            <a:schemeClr val="accent1"/>
+          </a:fillRef>
+          <a:effectRef idx="2">
+            <a:schemeClr val="accent1"/>
+          </a:effectRef>
+          <a:fontRef idx="minor">
+            <a:schemeClr val="lt1"/>
+          </a:fontRef>
+        </p:style>
+        <p:txBody>
+          <a:bodyPr rtlCol="0" anchor="ctr"/>
+          <a:lstStyle/>
+          <a:p>
+            <a:pPr algn="ctr"/>
+          </a:p>
+        </p:txBody>
+      </p:sp>
+      <p:sp>
+        <p:nvSpPr>
+          <p:cNvPr id="43" name="TextBox 42"/>
+          <p:cNvSpPr txBox="1"/>
+          <p:nvPr/>
+        </p:nvSpPr>
+        <p:spPr>
+          <a:xfrm>
+            <a:off x="6252667" y="3557016"/>
+            <a:ext cx="1448409" cy="420624"/>
+          </a:xfrm>
+          <a:prstGeom prst="rect">
+            <a:avLst/>
+          </a:prstGeom>
+          <a:noFill/>
+        </p:spPr>
+        <p:txBody>
+          <a:bodyPr wrap="square" anchor="ctr" lIns="0" rIns="0" tIns="0" bIns="0">
+            <a:spAutoFit/>
+          </a:bodyPr>
+          <a:lstStyle/>
+          <a:p>
+            <a:pPr algn="ctr">
+              <a:lnSpc>
+                <a:spcPct val="106000"/>
+              </a:lnSpc>
+              <a:spcBef>
+                <a:spcPts val="0"/>
+              </a:spcBef>
+              <a:spcAft>
+                <a:spcPts val="400"/>
+              </a:spcAft>
+            </a:pPr>
+            <a:r>
+              <a:rPr sz="1000" b="1">
+                <a:solidFill>
+                  <a:srgbClr val="1A1D21"/>
+                </a:solidFill>
+                <a:latin typeface="Noto Sans JP"/>
+                <a:ea typeface="Noto Sans JP"/>
+              </a:rPr>
+              <a:t>高砂熱学</a:t>
+            </a:r>
+          </a:p>
+        </p:txBody>
+      </p:sp>
+      <p:sp>
+        <p:nvSpPr>
+          <p:cNvPr id="44" name="Rounded Rectangle 43"/>
+          <p:cNvSpPr/>
+          <p:nvPr/>
+        </p:nvSpPr>
+        <p:spPr>
+          <a:xfrm>
+            <a:off x="7929676" y="1417320"/>
+            <a:ext cx="1686153" cy="3383280"/>
+          </a:xfrm>
+          <a:prstGeom prst="roundRect">
+            <a:avLst>
+              <a:gd name="adj" fmla="val 5000"/>
+            </a:avLst>
+          </a:prstGeom>
+          <a:solidFill>
+            <a:srgbClr val="FFFFFF"/>
+          </a:solidFill>
+          <a:ln w="12700">
+            <a:solidFill>
+              <a:srgbClr val="E2E4E9"/>
+            </a:solidFill>
+          </a:ln>
+          <a:effectLst/>
+        </p:spPr>
+        <p:style>
+          <a:lnRef idx="1">
+            <a:schemeClr val="accent1"/>
+          </a:lnRef>
+          <a:fillRef idx="3">
+            <a:schemeClr val="accent1"/>
+          </a:fillRef>
+          <a:effectRef idx="2">
+            <a:schemeClr val="accent1"/>
+          </a:effectRef>
+          <a:fontRef idx="minor">
+            <a:schemeClr val="lt1"/>
+          </a:fontRef>
+        </p:style>
+        <p:txBody>
+          <a:bodyPr rtlCol="0" anchor="ctr"/>
+          <a:lstStyle/>
+          <a:p>
+            <a:pPr algn="ctr"/>
+          </a:p>
+        </p:txBody>
+      </p:sp>
+      <p:sp>
+        <p:nvSpPr>
+          <p:cNvPr id="45" name="Rounded Rectangle 44"/>
+          <p:cNvSpPr/>
+          <p:nvPr/>
+        </p:nvSpPr>
+        <p:spPr>
+          <a:xfrm>
+            <a:off x="7929676" y="1417320"/>
+            <a:ext cx="1686153" cy="457200"/>
+          </a:xfrm>
+          <a:prstGeom prst="roundRect">
+            <a:avLst>
+              <a:gd name="adj" fmla="val 0"/>
+            </a:avLst>
+          </a:prstGeom>
+          <a:solidFill>
+            <a:srgbClr val="E60012"/>
+          </a:solidFill>
+          <a:ln>
+            <a:noFill/>
+          </a:ln>
+          <a:effectLst/>
+        </p:spPr>
+        <p:style>
+          <a:lnRef idx="1">
+            <a:schemeClr val="accent1"/>
+          </a:lnRef>
+          <a:fillRef idx="3">
+            <a:schemeClr val="accent1"/>
+          </a:fillRef>
+          <a:effectRef idx="2">
+            <a:schemeClr val="accent1"/>
+          </a:effectRef>
+          <a:fontRef idx="minor">
+            <a:schemeClr val="lt1"/>
+          </a:fontRef>
+        </p:style>
+        <p:txBody>
+          <a:bodyPr rtlCol="0" anchor="ctr"/>
+          <a:lstStyle/>
+          <a:p>
+            <a:pPr algn="ctr"/>
+          </a:p>
+        </p:txBody>
+      </p:sp>
+      <p:sp>
+        <p:nvSpPr>
+          <p:cNvPr id="46" name="TextBox 45"/>
+          <p:cNvSpPr txBox="1"/>
+          <p:nvPr/>
+        </p:nvSpPr>
+        <p:spPr>
+          <a:xfrm>
+            <a:off x="7929676" y="1417320"/>
+            <a:ext cx="1686153" cy="457200"/>
+          </a:xfrm>
+          <a:prstGeom prst="rect">
+            <a:avLst/>
+          </a:prstGeom>
+          <a:noFill/>
+        </p:spPr>
+        <p:txBody>
+          <a:bodyPr wrap="square" anchor="ctr" lIns="0" rIns="0" tIns="0" bIns="0">
+            <a:spAutoFit/>
+          </a:bodyPr>
+          <a:lstStyle/>
+          <a:p>
+            <a:pPr algn="ctr">
+              <a:lnSpc>
+                <a:spcPct val="98000"/>
+              </a:lnSpc>
+              <a:spcBef>
+                <a:spcPts val="0"/>
+              </a:spcBef>
+              <a:spcAft>
+                <a:spcPts val="0"/>
+              </a:spcAft>
+            </a:pPr>
+            <a:r>
+              <a:rPr sz="750" b="1">
+                <a:solidFill>
+                  <a:srgbClr val="FFC9CE"/>
+                </a:solidFill>
+                <a:latin typeface="Consolas"/>
+                <a:ea typeface="Consolas"/>
+              </a:rPr>
+              <a:t>04</a:t>
+            </a:r>
+          </a:p>
+          <a:p>
+            <a:pPr algn="ctr">
+              <a:lnSpc>
+                <a:spcPct val="98000"/>
+              </a:lnSpc>
+              <a:spcBef>
+                <a:spcPts val="0"/>
+              </a:spcBef>
+              <a:spcAft>
+                <a:spcPts val="0"/>
+              </a:spcAft>
+            </a:pPr>
+            <a:r>
+              <a:rPr sz="1050" b="1">
+                <a:solidFill>
+                  <a:srgbClr val="FFFFFF"/>
+                </a:solidFill>
+                <a:latin typeface="Noto Sans JP"/>
+                <a:ea typeface="Noto Sans JP"/>
+              </a:rPr>
+              <a:t>冷却・電源保護</a:t>
+            </a:r>
+          </a:p>
+        </p:txBody>
+      </p:sp>
+      <p:sp>
+        <p:nvSpPr>
+          <p:cNvPr id="47" name="Rounded Rectangle 46"/>
+          <p:cNvSpPr/>
+          <p:nvPr/>
+        </p:nvSpPr>
+        <p:spPr>
+          <a:xfrm>
+            <a:off x="8048548" y="2020824"/>
+            <a:ext cx="1448409" cy="420624"/>
+          </a:xfrm>
+          <a:prstGeom prst="roundRect">
+            <a:avLst>
+              <a:gd name="adj" fmla="val 16000"/>
+            </a:avLst>
+          </a:prstGeom>
+          <a:solidFill>
+            <a:srgbClr val="F3F4F6"/>
+          </a:solidFill>
+          <a:ln w="12700">
+            <a:solidFill>
+              <a:srgbClr val="E2E4E9"/>
+            </a:solidFill>
+          </a:ln>
+          <a:effectLst/>
+        </p:spPr>
+        <p:style>
+          <a:lnRef idx="1">
+            <a:schemeClr val="accent1"/>
+          </a:lnRef>
+          <a:fillRef idx="3">
+            <a:schemeClr val="accent1"/>
+          </a:fillRef>
+          <a:effectRef idx="2">
+            <a:schemeClr val="accent1"/>
+          </a:effectRef>
+          <a:fontRef idx="minor">
+            <a:schemeClr val="lt1"/>
+          </a:fontRef>
+        </p:style>
+        <p:txBody>
+          <a:bodyPr rtlCol="0" anchor="ctr"/>
+          <a:lstStyle/>
+          <a:p>
+            <a:pPr algn="ctr"/>
+          </a:p>
+        </p:txBody>
+      </p:sp>
+      <p:sp>
+        <p:nvSpPr>
+          <p:cNvPr id="48" name="TextBox 47"/>
+          <p:cNvSpPr txBox="1"/>
+          <p:nvPr/>
+        </p:nvSpPr>
+        <p:spPr>
+          <a:xfrm>
+            <a:off x="8048548" y="2020824"/>
+            <a:ext cx="1448409" cy="420624"/>
+          </a:xfrm>
+          <a:prstGeom prst="rect">
+            <a:avLst/>
+          </a:prstGeom>
+          <a:noFill/>
+        </p:spPr>
+        <p:txBody>
+          <a:bodyPr wrap="square" anchor="ctr" lIns="0" rIns="0" tIns="0" bIns="0">
+            <a:spAutoFit/>
+          </a:bodyPr>
+          <a:lstStyle/>
+          <a:p>
+            <a:pPr algn="ctr">
+              <a:lnSpc>
+                <a:spcPct val="106000"/>
+              </a:lnSpc>
+              <a:spcBef>
+                <a:spcPts val="0"/>
+              </a:spcBef>
+              <a:spcAft>
+                <a:spcPts val="400"/>
+              </a:spcAft>
+            </a:pPr>
+            <a:r>
+              <a:rPr sz="1000" b="1">
+                <a:solidFill>
+                  <a:srgbClr val="1A1D21"/>
+                </a:solidFill>
+                <a:latin typeface="Noto Sans JP"/>
+                <a:ea typeface="Noto Sans JP"/>
+              </a:rPr>
+              <a:t>ダイキン</a:t>
+            </a:r>
+          </a:p>
+        </p:txBody>
+      </p:sp>
+      <p:sp>
+        <p:nvSpPr>
+          <p:cNvPr id="49" name="Rounded Rectangle 48"/>
+          <p:cNvSpPr/>
+          <p:nvPr/>
+        </p:nvSpPr>
+        <p:spPr>
+          <a:xfrm>
+            <a:off x="8048548" y="2532888"/>
+            <a:ext cx="1448409" cy="420624"/>
+          </a:xfrm>
+          <a:prstGeom prst="roundRect">
+            <a:avLst>
+              <a:gd name="adj" fmla="val 16000"/>
+            </a:avLst>
+          </a:prstGeom>
+          <a:solidFill>
+            <a:srgbClr val="F3F4F6"/>
+          </a:solidFill>
+          <a:ln w="12700">
+            <a:solidFill>
+              <a:srgbClr val="E2E4E9"/>
+            </a:solidFill>
+          </a:ln>
+          <a:effectLst/>
+        </p:spPr>
+        <p:style>
+          <a:lnRef idx="1">
+            <a:schemeClr val="accent1"/>
+          </a:lnRef>
+          <a:fillRef idx="3">
+            <a:schemeClr val="accent1"/>
+          </a:fillRef>
+          <a:effectRef idx="2">
+            <a:schemeClr val="accent1"/>
+          </a:effectRef>
+          <a:fontRef idx="minor">
+            <a:schemeClr val="lt1"/>
+          </a:fontRef>
+        </p:style>
+        <p:txBody>
+          <a:bodyPr rtlCol="0" anchor="ctr"/>
+          <a:lstStyle/>
+          <a:p>
+            <a:pPr algn="ctr"/>
+          </a:p>
+        </p:txBody>
+      </p:sp>
+      <p:sp>
+        <p:nvSpPr>
+          <p:cNvPr id="50" name="TextBox 49"/>
+          <p:cNvSpPr txBox="1"/>
+          <p:nvPr/>
+        </p:nvSpPr>
+        <p:spPr>
+          <a:xfrm>
+            <a:off x="8048548" y="2532888"/>
+            <a:ext cx="1448409" cy="420624"/>
+          </a:xfrm>
+          <a:prstGeom prst="rect">
+            <a:avLst/>
+          </a:prstGeom>
+          <a:noFill/>
+        </p:spPr>
+        <p:txBody>
+          <a:bodyPr wrap="square" anchor="ctr" lIns="0" rIns="0" tIns="0" bIns="0">
+            <a:spAutoFit/>
+          </a:bodyPr>
+          <a:lstStyle/>
+          <a:p>
+            <a:pPr algn="ctr">
+              <a:lnSpc>
+                <a:spcPct val="106000"/>
+              </a:lnSpc>
+              <a:spcBef>
+                <a:spcPts val="0"/>
+              </a:spcBef>
+              <a:spcAft>
+                <a:spcPts val="400"/>
+              </a:spcAft>
+            </a:pPr>
+            <a:r>
+              <a:rPr sz="1000" b="1">
+                <a:solidFill>
+                  <a:srgbClr val="1A1D21"/>
+                </a:solidFill>
+                <a:latin typeface="Noto Sans JP"/>
+                <a:ea typeface="Noto Sans JP"/>
+              </a:rPr>
+              <a:t>GSユアサ</a:t>
+            </a:r>
+          </a:p>
+        </p:txBody>
+      </p:sp>
+      <p:sp>
+        <p:nvSpPr>
+          <p:cNvPr id="51" name="Rounded Rectangle 50"/>
+          <p:cNvSpPr/>
+          <p:nvPr/>
+        </p:nvSpPr>
+        <p:spPr>
+          <a:xfrm>
+            <a:off x="8048548" y="3044952"/>
+            <a:ext cx="1448409" cy="420624"/>
+          </a:xfrm>
+          <a:prstGeom prst="roundRect">
+            <a:avLst>
+              <a:gd name="adj" fmla="val 16000"/>
+            </a:avLst>
+          </a:prstGeom>
+          <a:solidFill>
+            <a:srgbClr val="F3F4F6"/>
+          </a:solidFill>
+          <a:ln w="12700">
+            <a:solidFill>
+              <a:srgbClr val="E2E4E9"/>
+            </a:solidFill>
+          </a:ln>
+          <a:effectLst/>
+        </p:spPr>
+        <p:style>
+          <a:lnRef idx="1">
+            <a:schemeClr val="accent1"/>
+          </a:lnRef>
+          <a:fillRef idx="3">
+            <a:schemeClr val="accent1"/>
+          </a:fillRef>
+          <a:effectRef idx="2">
+            <a:schemeClr val="accent1"/>
+          </a:effectRef>
+          <a:fontRef idx="minor">
+            <a:schemeClr val="lt1"/>
+          </a:fontRef>
+        </p:style>
+        <p:txBody>
+          <a:bodyPr rtlCol="0" anchor="ctr"/>
+          <a:lstStyle/>
+          <a:p>
+            <a:pPr algn="ctr"/>
+          </a:p>
+        </p:txBody>
+      </p:sp>
+      <p:sp>
+        <p:nvSpPr>
+          <p:cNvPr id="52" name="TextBox 51"/>
+          <p:cNvSpPr txBox="1"/>
+          <p:nvPr/>
+        </p:nvSpPr>
+        <p:spPr>
+          <a:xfrm>
+            <a:off x="8048548" y="3044952"/>
+            <a:ext cx="1448409" cy="420624"/>
+          </a:xfrm>
+          <a:prstGeom prst="rect">
+            <a:avLst/>
+          </a:prstGeom>
+          <a:noFill/>
+        </p:spPr>
+        <p:txBody>
+          <a:bodyPr wrap="square" anchor="ctr" lIns="0" rIns="0" tIns="0" bIns="0">
+            <a:spAutoFit/>
+          </a:bodyPr>
+          <a:lstStyle/>
+          <a:p>
+            <a:pPr algn="ctr">
+              <a:lnSpc>
+                <a:spcPct val="106000"/>
+              </a:lnSpc>
+              <a:spcBef>
+                <a:spcPts val="0"/>
+              </a:spcBef>
+              <a:spcAft>
+                <a:spcPts val="400"/>
+              </a:spcAft>
+            </a:pPr>
+            <a:r>
+              <a:rPr sz="1000" b="1">
+                <a:solidFill>
+                  <a:srgbClr val="1A1D21"/>
+                </a:solidFill>
+                <a:latin typeface="Noto Sans JP"/>
+                <a:ea typeface="Noto Sans JP"/>
+              </a:rPr>
+              <a:t>荏原製作所</a:t>
+            </a:r>
+          </a:p>
+        </p:txBody>
+      </p:sp>
+      <p:sp>
+        <p:nvSpPr>
+          <p:cNvPr id="53" name="Rounded Rectangle 52"/>
+          <p:cNvSpPr/>
+          <p:nvPr/>
+        </p:nvSpPr>
+        <p:spPr>
+          <a:xfrm>
+            <a:off x="9725558" y="1417320"/>
+            <a:ext cx="1686153" cy="3383280"/>
+          </a:xfrm>
+          <a:prstGeom prst="roundRect">
+            <a:avLst>
+              <a:gd name="adj" fmla="val 5000"/>
+            </a:avLst>
+          </a:prstGeom>
+          <a:solidFill>
+            <a:srgbClr val="FFFFFF"/>
+          </a:solidFill>
+          <a:ln w="12700">
+            <a:solidFill>
+              <a:srgbClr val="E2E4E9"/>
+            </a:solidFill>
+          </a:ln>
+          <a:effectLst/>
+        </p:spPr>
+        <p:style>
+          <a:lnRef idx="1">
+            <a:schemeClr val="accent1"/>
+          </a:lnRef>
+          <a:fillRef idx="3">
+            <a:schemeClr val="accent1"/>
+          </a:fillRef>
+          <a:effectRef idx="2">
+            <a:schemeClr val="accent1"/>
+          </a:effectRef>
+          <a:fontRef idx="minor">
+            <a:schemeClr val="lt1"/>
+          </a:fontRef>
+        </p:style>
+        <p:txBody>
+          <a:bodyPr rtlCol="0" anchor="ctr"/>
+          <a:lstStyle/>
+          <a:p>
+            <a:pPr algn="ctr"/>
+          </a:p>
+        </p:txBody>
+      </p:sp>
+      <p:sp>
+        <p:nvSpPr>
+          <p:cNvPr id="54" name="Rounded Rectangle 53"/>
+          <p:cNvSpPr/>
+          <p:nvPr/>
+        </p:nvSpPr>
+        <p:spPr>
+          <a:xfrm>
+            <a:off x="9725558" y="1417320"/>
+            <a:ext cx="1686153" cy="457200"/>
+          </a:xfrm>
+          <a:prstGeom prst="roundRect">
+            <a:avLst>
+              <a:gd name="adj" fmla="val 0"/>
+            </a:avLst>
+          </a:prstGeom>
+          <a:solidFill>
+            <a:srgbClr val="E60012"/>
+          </a:solidFill>
+          <a:ln>
+            <a:noFill/>
+          </a:ln>
+          <a:effectLst/>
+        </p:spPr>
+        <p:style>
+          <a:lnRef idx="1">
+            <a:schemeClr val="accent1"/>
+          </a:lnRef>
+          <a:fillRef idx="3">
+            <a:schemeClr val="accent1"/>
+          </a:fillRef>
+          <a:effectRef idx="2">
+            <a:schemeClr val="accent1"/>
+          </a:effectRef>
+          <a:fontRef idx="minor">
+            <a:schemeClr val="lt1"/>
+          </a:fontRef>
+        </p:style>
+        <p:txBody>
+          <a:bodyPr rtlCol="0" anchor="ctr"/>
+          <a:lstStyle/>
+          <a:p>
+            <a:pPr algn="ctr"/>
+          </a:p>
+        </p:txBody>
+      </p:sp>
+      <p:sp>
+        <p:nvSpPr>
+          <p:cNvPr id="55" name="TextBox 54"/>
+          <p:cNvSpPr txBox="1"/>
+          <p:nvPr/>
+        </p:nvSpPr>
+        <p:spPr>
+          <a:xfrm>
+            <a:off x="9725558" y="1417320"/>
+            <a:ext cx="1686153" cy="457200"/>
+          </a:xfrm>
+          <a:prstGeom prst="rect">
+            <a:avLst/>
+          </a:prstGeom>
+          <a:noFill/>
+        </p:spPr>
+        <p:txBody>
+          <a:bodyPr wrap="square" anchor="ctr" lIns="0" rIns="0" tIns="0" bIns="0">
+            <a:spAutoFit/>
+          </a:bodyPr>
+          <a:lstStyle/>
+          <a:p>
+            <a:pPr algn="ctr">
+              <a:lnSpc>
+                <a:spcPct val="98000"/>
+              </a:lnSpc>
+              <a:spcBef>
+                <a:spcPts val="0"/>
+              </a:spcBef>
+              <a:spcAft>
+                <a:spcPts val="0"/>
+              </a:spcAft>
+            </a:pPr>
+            <a:r>
+              <a:rPr sz="750" b="1">
+                <a:solidFill>
+                  <a:srgbClr val="FFC9CE"/>
+                </a:solidFill>
+                <a:latin typeface="Consolas"/>
+                <a:ea typeface="Consolas"/>
+              </a:rPr>
+              <a:t>05</a:t>
+            </a:r>
+          </a:p>
+          <a:p>
+            <a:pPr algn="ctr">
+              <a:lnSpc>
+                <a:spcPct val="98000"/>
+              </a:lnSpc>
+              <a:spcBef>
+                <a:spcPts val="0"/>
+              </a:spcBef>
+              <a:spcAft>
+                <a:spcPts val="0"/>
+              </a:spcAft>
+            </a:pPr>
+            <a:r>
+              <a:rPr sz="1050" b="1">
+                <a:solidFill>
+                  <a:srgbClr val="FFFFFF"/>
+                </a:solidFill>
+                <a:latin typeface="Noto Sans JP"/>
+                <a:ea typeface="Noto Sans JP"/>
+              </a:rPr>
+              <a:t>半導体</a:t>
+            </a:r>
+          </a:p>
+        </p:txBody>
+      </p:sp>
+      <p:sp>
+        <p:nvSpPr>
+          <p:cNvPr id="56" name="Rounded Rectangle 55"/>
+          <p:cNvSpPr/>
+          <p:nvPr/>
+        </p:nvSpPr>
+        <p:spPr>
+          <a:xfrm>
+            <a:off x="9844430" y="2020824"/>
+            <a:ext cx="1448409" cy="420624"/>
+          </a:xfrm>
+          <a:prstGeom prst="roundRect">
+            <a:avLst>
+              <a:gd name="adj" fmla="val 16000"/>
+            </a:avLst>
+          </a:prstGeom>
+          <a:solidFill>
+            <a:srgbClr val="F3F4F6"/>
+          </a:solidFill>
+          <a:ln w="12700">
+            <a:solidFill>
+              <a:srgbClr val="E2E4E9"/>
+            </a:solidFill>
+          </a:ln>
+          <a:effectLst/>
+        </p:spPr>
+        <p:style>
+          <a:lnRef idx="1">
+            <a:schemeClr val="accent1"/>
+          </a:lnRef>
+          <a:fillRef idx="3">
+            <a:schemeClr val="accent1"/>
+          </a:fillRef>
+          <a:effectRef idx="2">
+            <a:schemeClr val="accent1"/>
+          </a:effectRef>
+          <a:fontRef idx="minor">
+            <a:schemeClr val="lt1"/>
+          </a:fontRef>
+        </p:style>
+        <p:txBody>
+          <a:bodyPr rtlCol="0" anchor="ctr"/>
+          <a:lstStyle/>
+          <a:p>
+            <a:pPr algn="ctr"/>
+          </a:p>
+        </p:txBody>
+      </p:sp>
+      <p:sp>
+        <p:nvSpPr>
+          <p:cNvPr id="57" name="TextBox 56"/>
+          <p:cNvSpPr txBox="1"/>
+          <p:nvPr/>
+        </p:nvSpPr>
+        <p:spPr>
+          <a:xfrm>
+            <a:off x="9844430" y="2020824"/>
+            <a:ext cx="1448409" cy="420624"/>
+          </a:xfrm>
+          <a:prstGeom prst="rect">
+            <a:avLst/>
+          </a:prstGeom>
+          <a:noFill/>
+        </p:spPr>
+        <p:txBody>
+          <a:bodyPr wrap="square" anchor="ctr" lIns="0" rIns="0" tIns="0" bIns="0">
+            <a:spAutoFit/>
+          </a:bodyPr>
+          <a:lstStyle/>
+          <a:p>
+            <a:pPr algn="ctr">
+              <a:lnSpc>
+                <a:spcPct val="106000"/>
+              </a:lnSpc>
+              <a:spcBef>
+                <a:spcPts val="0"/>
+              </a:spcBef>
+              <a:spcAft>
+                <a:spcPts val="400"/>
+              </a:spcAft>
+            </a:pPr>
+            <a:r>
+              <a:rPr sz="1000" b="1">
+                <a:solidFill>
+                  <a:srgbClr val="1A1D21"/>
+                </a:solidFill>
+                <a:latin typeface="Noto Sans JP"/>
+                <a:ea typeface="Noto Sans JP"/>
+              </a:rPr>
+              <a:t>東京エレクトロン</a:t>
+            </a:r>
+          </a:p>
+        </p:txBody>
+      </p:sp>
+      <p:sp>
+        <p:nvSpPr>
+          <p:cNvPr id="58" name="Rounded Rectangle 57"/>
+          <p:cNvSpPr/>
+          <p:nvPr/>
+        </p:nvSpPr>
+        <p:spPr>
+          <a:xfrm>
+            <a:off x="9844430" y="2532888"/>
+            <a:ext cx="1448409" cy="420624"/>
+          </a:xfrm>
+          <a:prstGeom prst="roundRect">
+            <a:avLst>
+              <a:gd name="adj" fmla="val 16000"/>
+            </a:avLst>
+          </a:prstGeom>
+          <a:solidFill>
+            <a:srgbClr val="F3F4F6"/>
+          </a:solidFill>
+          <a:ln w="12700">
+            <a:solidFill>
+              <a:srgbClr val="E2E4E9"/>
+            </a:solidFill>
+          </a:ln>
+          <a:effectLst/>
+        </p:spPr>
+        <p:style>
+          <a:lnRef idx="1">
+            <a:schemeClr val="accent1"/>
+          </a:lnRef>
+          <a:fillRef idx="3">
+            <a:schemeClr val="accent1"/>
+          </a:fillRef>
+          <a:effectRef idx="2">
+            <a:schemeClr val="accent1"/>
+          </a:effectRef>
+          <a:fontRef idx="minor">
+            <a:schemeClr val="lt1"/>
+          </a:fontRef>
+        </p:style>
+        <p:txBody>
+          <a:bodyPr rtlCol="0" anchor="ctr"/>
+          <a:lstStyle/>
+          <a:p>
+            <a:pPr algn="ctr"/>
+          </a:p>
+        </p:txBody>
+      </p:sp>
+      <p:sp>
+        <p:nvSpPr>
+          <p:cNvPr id="59" name="TextBox 58"/>
+          <p:cNvSpPr txBox="1"/>
+          <p:nvPr/>
+        </p:nvSpPr>
+        <p:spPr>
+          <a:xfrm>
+            <a:off x="9844430" y="2532888"/>
+            <a:ext cx="1448409" cy="420624"/>
+          </a:xfrm>
+          <a:prstGeom prst="rect">
+            <a:avLst/>
+          </a:prstGeom>
+          <a:noFill/>
+        </p:spPr>
+        <p:txBody>
+          <a:bodyPr wrap="square" anchor="ctr" lIns="0" rIns="0" tIns="0" bIns="0">
+            <a:spAutoFit/>
+          </a:bodyPr>
+          <a:lstStyle/>
+          <a:p>
+            <a:pPr algn="ctr">
+              <a:lnSpc>
+                <a:spcPct val="106000"/>
+              </a:lnSpc>
+              <a:spcBef>
+                <a:spcPts val="0"/>
+              </a:spcBef>
+              <a:spcAft>
+                <a:spcPts val="400"/>
+              </a:spcAft>
+            </a:pPr>
+            <a:r>
+              <a:rPr sz="1000" b="1">
+                <a:solidFill>
+                  <a:srgbClr val="1A1D21"/>
+                </a:solidFill>
+                <a:latin typeface="Noto Sans JP"/>
+                <a:ea typeface="Noto Sans JP"/>
+              </a:rPr>
+              <a:t>ディスコ</a:t>
+            </a:r>
+          </a:p>
+        </p:txBody>
+      </p:sp>
+      <p:sp>
+        <p:nvSpPr>
+          <p:cNvPr id="60" name="Rounded Rectangle 59"/>
+          <p:cNvSpPr/>
+          <p:nvPr/>
+        </p:nvSpPr>
+        <p:spPr>
+          <a:xfrm>
+            <a:off x="9844430" y="3044952"/>
+            <a:ext cx="1448409" cy="420624"/>
+          </a:xfrm>
+          <a:prstGeom prst="roundRect">
+            <a:avLst>
+              <a:gd name="adj" fmla="val 16000"/>
+            </a:avLst>
+          </a:prstGeom>
+          <a:solidFill>
+            <a:srgbClr val="F3F4F6"/>
+          </a:solidFill>
+          <a:ln w="12700">
+            <a:solidFill>
+              <a:srgbClr val="E2E4E9"/>
+            </a:solidFill>
+          </a:ln>
+          <a:effectLst/>
+        </p:spPr>
+        <p:style>
+          <a:lnRef idx="1">
+            <a:schemeClr val="accent1"/>
+          </a:lnRef>
+          <a:fillRef idx="3">
+            <a:schemeClr val="accent1"/>
+          </a:fillRef>
+          <a:effectRef idx="2">
+            <a:schemeClr val="accent1"/>
+          </a:effectRef>
+          <a:fontRef idx="minor">
+            <a:schemeClr val="lt1"/>
+          </a:fontRef>
+        </p:style>
+        <p:txBody>
+          <a:bodyPr rtlCol="0" anchor="ctr"/>
+          <a:lstStyle/>
+          <a:p>
+            <a:pPr algn="ctr"/>
+          </a:p>
+        </p:txBody>
+      </p:sp>
+      <p:sp>
+        <p:nvSpPr>
+          <p:cNvPr id="61" name="TextBox 60"/>
+          <p:cNvSpPr txBox="1"/>
+          <p:nvPr/>
+        </p:nvSpPr>
+        <p:spPr>
+          <a:xfrm>
+            <a:off x="9844430" y="3044952"/>
+            <a:ext cx="1448409" cy="420624"/>
+          </a:xfrm>
+          <a:prstGeom prst="rect">
+            <a:avLst/>
+          </a:prstGeom>
+          <a:noFill/>
+        </p:spPr>
+        <p:txBody>
+          <a:bodyPr wrap="square" anchor="ctr" lIns="0" rIns="0" tIns="0" bIns="0">
+            <a:spAutoFit/>
+          </a:bodyPr>
+          <a:lstStyle/>
+          <a:p>
+            <a:pPr algn="ctr">
+              <a:lnSpc>
+                <a:spcPct val="106000"/>
+              </a:lnSpc>
+              <a:spcBef>
+                <a:spcPts val="0"/>
+              </a:spcBef>
+              <a:spcAft>
+                <a:spcPts val="400"/>
+              </a:spcAft>
+            </a:pPr>
+            <a:r>
+              <a:rPr sz="1000" b="1">
+                <a:solidFill>
+                  <a:srgbClr val="1A1D21"/>
+                </a:solidFill>
+                <a:latin typeface="Noto Sans JP"/>
+                <a:ea typeface="Noto Sans JP"/>
+              </a:rPr>
+              <a:t>キオクシア</a:t>
+            </a:r>
+          </a:p>
+        </p:txBody>
+      </p:sp>
+      <p:sp>
+        <p:nvSpPr>
+          <p:cNvPr id="62" name="Rounded Rectangle 61"/>
+          <p:cNvSpPr/>
+          <p:nvPr/>
+        </p:nvSpPr>
+        <p:spPr>
+          <a:xfrm>
+            <a:off x="9844430" y="3557016"/>
+            <a:ext cx="1448409" cy="420624"/>
+          </a:xfrm>
+          <a:prstGeom prst="roundRect">
+            <a:avLst>
+              <a:gd name="adj" fmla="val 16000"/>
+            </a:avLst>
+          </a:prstGeom>
+          <a:solidFill>
+            <a:srgbClr val="F3F4F6"/>
+          </a:solidFill>
+          <a:ln w="12700">
+            <a:solidFill>
+              <a:srgbClr val="E2E4E9"/>
+            </a:solidFill>
+          </a:ln>
+          <a:effectLst/>
+        </p:spPr>
+        <p:style>
+          <a:lnRef idx="1">
+            <a:schemeClr val="accent1"/>
+          </a:lnRef>
+          <a:fillRef idx="3">
+            <a:schemeClr val="accent1"/>
+          </a:fillRef>
+          <a:effectRef idx="2">
+            <a:schemeClr val="accent1"/>
+          </a:effectRef>
+          <a:fontRef idx="minor">
+            <a:schemeClr val="lt1"/>
+          </a:fontRef>
+        </p:style>
+        <p:txBody>
+          <a:bodyPr rtlCol="0" anchor="ctr"/>
+          <a:lstStyle/>
+          <a:p>
+            <a:pPr algn="ctr"/>
+          </a:p>
+        </p:txBody>
+      </p:sp>
+      <p:sp>
+        <p:nvSpPr>
+          <p:cNvPr id="63" name="TextBox 62"/>
+          <p:cNvSpPr txBox="1"/>
+          <p:nvPr/>
+        </p:nvSpPr>
+        <p:spPr>
+          <a:xfrm>
+            <a:off x="9844430" y="3557016"/>
+            <a:ext cx="1448409" cy="420624"/>
+          </a:xfrm>
+          <a:prstGeom prst="rect">
+            <a:avLst/>
+          </a:prstGeom>
+          <a:noFill/>
+        </p:spPr>
+        <p:txBody>
+          <a:bodyPr wrap="square" anchor="ctr" lIns="0" rIns="0" tIns="0" bIns="0">
+            <a:spAutoFit/>
+          </a:bodyPr>
+          <a:lstStyle/>
+          <a:p>
+            <a:pPr algn="ctr">
+              <a:lnSpc>
+                <a:spcPct val="106000"/>
+              </a:lnSpc>
+              <a:spcBef>
+                <a:spcPts val="0"/>
+              </a:spcBef>
+              <a:spcAft>
+                <a:spcPts val="400"/>
+              </a:spcAft>
+            </a:pPr>
+            <a:r>
+              <a:rPr sz="1000" b="1">
+                <a:solidFill>
+                  <a:srgbClr val="1A1D21"/>
+                </a:solidFill>
+                <a:latin typeface="Noto Sans JP"/>
+                <a:ea typeface="Noto Sans JP"/>
+              </a:rPr>
+              <a:t>信越化学</a:t>
+            </a:r>
+          </a:p>
+        </p:txBody>
+      </p:sp>
+      <p:sp>
+        <p:nvSpPr>
+          <p:cNvPr id="64" name="Rounded Rectangle 63"/>
+          <p:cNvSpPr/>
+          <p:nvPr/>
+        </p:nvSpPr>
+        <p:spPr>
+          <a:xfrm>
+            <a:off x="777240" y="5029200"/>
+            <a:ext cx="10634472" cy="749808"/>
+          </a:xfrm>
+          <a:prstGeom prst="roundRect">
+            <a:avLst>
+              <a:gd name="adj" fmla="val 5000"/>
+            </a:avLst>
+          </a:prstGeom>
+          <a:solidFill>
+            <a:srgbClr val="ECEEF1"/>
+          </a:solidFill>
+          <a:ln w="15240">
+            <a:solidFill>
+              <a:srgbClr val="454B54"/>
+            </a:solidFill>
+          </a:ln>
+          <a:effectLst/>
+        </p:spPr>
+        <p:style>
+          <a:lnRef idx="1">
+            <a:schemeClr val="accent1"/>
+          </a:lnRef>
+          <a:fillRef idx="3">
+            <a:schemeClr val="accent1"/>
+          </a:fillRef>
+          <a:effectRef idx="2">
+            <a:schemeClr val="accent1"/>
+          </a:effectRef>
+          <a:fontRef idx="minor">
+            <a:schemeClr val="lt1"/>
+          </a:fontRef>
+        </p:style>
+        <p:txBody>
+          <a:bodyPr rtlCol="0" anchor="ctr"/>
+          <a:lstStyle/>
+          <a:p>
+            <a:pPr algn="ctr"/>
+          </a:p>
+        </p:txBody>
+      </p:sp>
+      <p:sp>
+        <p:nvSpPr>
+          <p:cNvPr id="65" name="TextBox 64"/>
+          <p:cNvSpPr txBox="1"/>
+          <p:nvPr/>
+        </p:nvSpPr>
+        <p:spPr>
+          <a:xfrm>
+            <a:off x="1005840" y="5029200"/>
+            <a:ext cx="10241280" cy="749808"/>
+          </a:xfrm>
+          <a:prstGeom prst="rect">
+            <a:avLst/>
+          </a:prstGeom>
+          <a:noFill/>
+        </p:spPr>
+        <p:txBody>
+          <a:bodyPr wrap="square" anchor="ctr" lIns="0" rIns="0" tIns="0" bIns="0">
+            <a:spAutoFit/>
+          </a:bodyPr>
+          <a:lstStyle/>
+          <a:p>
+            <a:pPr algn="l">
+              <a:lnSpc>
+                <a:spcPct val="106000"/>
+              </a:lnSpc>
+              <a:spcBef>
+                <a:spcPts val="0"/>
+              </a:spcBef>
+              <a:spcAft>
+                <a:spcPts val="400"/>
+              </a:spcAft>
+            </a:pPr>
+            <a:r>
+              <a:rPr sz="1650" b="1">
+                <a:solidFill>
+                  <a:srgbClr val="1A1D21"/>
+                </a:solidFill>
+                <a:latin typeface="Noto Sans JP"/>
+                <a:ea typeface="Noto Sans JP"/>
+              </a:rPr>
+              <a:t>AIの“源流”が、川下の日本メーカーまで、まるごと潤す。</a:t>
+            </a:r>
+            <a:r>
+              <a:rPr sz="1650" b="1">
+                <a:solidFill>
+                  <a:srgbClr val="E60012"/>
+                </a:solidFill>
+                <a:latin typeface="Noto Sans JP"/>
+                <a:ea typeface="Noto Sans JP"/>
+              </a:rPr>
+              <a:t>　狙える現場は、この一社一社にある。</a:t>
+            </a:r>
+          </a:p>
+        </p:txBody>
+      </p:sp>
+      <p:sp>
+        <p:nvSpPr>
+          <p:cNvPr id="66" name="TextBox 65"/>
+          <p:cNvSpPr txBox="1"/>
+          <p:nvPr/>
+        </p:nvSpPr>
+        <p:spPr>
+          <a:xfrm>
+            <a:off x="822960" y="5870448"/>
+            <a:ext cx="10515600" cy="274320"/>
           </a:xfrm>
           <a:prstGeom prst="rect">
             <a:avLst/>
@@ -8093,98 +10354,6 @@
               </a:spcAft>
             </a:pPr>
             <a:r>
-              <a:rPr sz="1450" b="1">
-                <a:solidFill>
-                  <a:srgbClr val="1A1D21"/>
-                </a:solidFill>
-                <a:latin typeface="Noto Sans JP"/>
-                <a:ea typeface="Noto Sans JP"/>
-              </a:rPr>
-              <a:t>機器そのものの価格（材）は、正直ANDPADには関係ない。</a:t>
-            </a:r>
-          </a:p>
-        </p:txBody>
-      </p:sp>
-      <p:sp>
-        <p:nvSpPr>
-          <p:cNvPr id="29" name="TextBox 28"/>
-          <p:cNvSpPr txBox="1"/>
-          <p:nvPr/>
-        </p:nvSpPr>
-        <p:spPr>
-          <a:xfrm>
-            <a:off x="1051560" y="5230368"/>
-            <a:ext cx="10058400" cy="457200"/>
-          </a:xfrm>
-          <a:prstGeom prst="rect">
-            <a:avLst/>
-          </a:prstGeom>
-          <a:noFill/>
-        </p:spPr>
-        <p:txBody>
-          <a:bodyPr wrap="square" anchor="t" lIns="0" rIns="0" tIns="0" bIns="0">
-            <a:spAutoFit/>
-          </a:bodyPr>
-          <a:lstStyle/>
-          <a:p>
-            <a:pPr algn="l">
-              <a:lnSpc>
-                <a:spcPct val="115000"/>
-              </a:lnSpc>
-              <a:spcBef>
-                <a:spcPts val="0"/>
-              </a:spcBef>
-              <a:spcAft>
-                <a:spcPts val="400"/>
-              </a:spcAft>
-            </a:pPr>
-            <a:r>
-              <a:rPr sz="1450" b="1">
-                <a:solidFill>
-                  <a:srgbClr val="E60012"/>
-                </a:solidFill>
-                <a:latin typeface="Noto Sans JP"/>
-                <a:ea typeface="Noto Sans JP"/>
-              </a:rPr>
-              <a:t>効くのは“工”＝据付・施工。それでも建設費の約3割。大型DC1棟で数十〜百億円級が、現場作業に向かう。</a:t>
-            </a:r>
-          </a:p>
-        </p:txBody>
-      </p:sp>
-      <p:sp>
-        <p:nvSpPr>
-          <p:cNvPr id="30" name="TextBox 29"/>
-          <p:cNvSpPr txBox="1"/>
-          <p:nvPr/>
-        </p:nvSpPr>
-        <p:spPr>
-          <a:xfrm>
-            <a:off x="822960" y="5870448"/>
-            <a:ext cx="10515600" cy="320040"/>
-          </a:xfrm>
-          <a:prstGeom prst="rect">
-            <a:avLst/>
-          </a:prstGeom>
-          <a:noFill/>
-        </p:spPr>
-        <p:txBody>
-          <a:bodyPr wrap="square" anchor="t" lIns="0" rIns="0" tIns="0" bIns="0">
-            <a:spAutoFit/>
-          </a:bodyPr>
-          <a:lstStyle/>
-          <a:p>
-            <a:pPr algn="l">
-              <a:lnSpc>
-                <a:spcPct val="106000"/>
-              </a:lnSpc>
-              <a:spcBef>
-                <a:spcPts val="0"/>
-              </a:spcBef>
-              <a:spcAft>
-                <a:spcPts val="400"/>
-              </a:spcAft>
-            </a:pPr>
-            <a:r>
               <a:rPr sz="850" b="0">
                 <a:solidFill>
                   <a:srgbClr val="8A9098"/>
@@ -8192,7 +10361,7 @@
                 <a:latin typeface="Consolas"/>
                 <a:ea typeface="Consolas"/>
               </a:rPr>
-              <a:t>出典：日経xTECH（設備工事＝電気50%＋空調等25%）／材工比は積算の一般構成（直接工事費＝材料費＋労務費＋経費）にもとづく目安・物件で変動。</a:t>
+              <a:t>※ 各段階の代表企業を抜粋（社名表記＝ロゴのイメージ、実ロゴへ差し替え可）。数値・詳細は次頁以降。</a:t>
             </a:r>
           </a:p>
         </p:txBody>
@@ -8392,7 +10561,7 @@
                 <a:latin typeface="Consolas"/>
                 <a:ea typeface="Consolas"/>
               </a:rPr>
-              <a:t>“工”の3工程：据付・試運転・保守——割合と市場を同じ物差しで</a:t>
+              <a:t>建設費の中身：どこにANDPADの市場があるか</a:t>
             </a:r>
           </a:p>
         </p:txBody>
@@ -8438,7 +10607,7 @@
                 <a:latin typeface="Noto Sans JP"/>
                 <a:ea typeface="Noto Sans JP"/>
               </a:rPr>
-              <a:t>「作って終わり」じゃない。建てる時も、建てた後も、現場が続く。</a:t>
+              <a:t>お金の3/4は設備。効くのは機器代ではなく“工”＝据付・試運転・保守。</a:t>
             </a:r>
           </a:p>
         </p:txBody>
@@ -8495,8 +10664,52 @@
         </p:nvSpPr>
         <p:spPr>
           <a:xfrm>
-            <a:off x="777240" y="1417320"/>
-            <a:ext cx="10634472" cy="420624"/>
+            <a:off x="777240" y="1691640"/>
+            <a:ext cx="2658618" cy="822960"/>
+          </a:xfrm>
+          <a:prstGeom prst="rect">
+            <a:avLst/>
+          </a:prstGeom>
+          <a:solidFill>
+            <a:srgbClr val="454B54"/>
+          </a:solidFill>
+          <a:ln>
+            <a:noFill/>
+          </a:ln>
+          <a:effectLst/>
+        </p:spPr>
+        <p:style>
+          <a:lnRef idx="1">
+            <a:schemeClr val="accent1"/>
+          </a:lnRef>
+          <a:fillRef idx="3">
+            <a:schemeClr val="accent1"/>
+          </a:fillRef>
+          <a:effectRef idx="2">
+            <a:schemeClr val="accent1"/>
+          </a:effectRef>
+          <a:fontRef idx="minor">
+            <a:schemeClr val="lt1"/>
+          </a:fontRef>
+        </p:style>
+        <p:txBody>
+          <a:bodyPr rtlCol="0" anchor="ctr"/>
+          <a:lstStyle/>
+          <a:p>
+            <a:pPr algn="ctr"/>
+          </a:p>
+        </p:txBody>
+      </p:sp>
+      <p:sp>
+        <p:nvSpPr>
+          <p:cNvPr id="9" name="Rectangle 8"/>
+          <p:cNvSpPr/>
+          <p:nvPr/>
+        </p:nvSpPr>
+        <p:spPr>
+          <a:xfrm>
+            <a:off x="3435858" y="1691640"/>
+            <a:ext cx="5317236" cy="822960"/>
           </a:xfrm>
           <a:prstGeom prst="rect">
             <a:avLst/>
@@ -8533,457 +10746,20 @@
       </p:sp>
       <p:sp>
         <p:nvSpPr>
-          <p:cNvPr id="9" name="TextBox 8"/>
-          <p:cNvSpPr txBox="1"/>
-          <p:nvPr/>
-        </p:nvSpPr>
-        <p:spPr>
-          <a:xfrm>
-            <a:off x="905256" y="1417320"/>
-            <a:ext cx="1828800" cy="420624"/>
-          </a:xfrm>
-          <a:prstGeom prst="rect">
-            <a:avLst/>
-          </a:prstGeom>
-          <a:noFill/>
-        </p:spPr>
-        <p:txBody>
-          <a:bodyPr wrap="square" anchor="ctr" lIns="0" rIns="0" tIns="0" bIns="0">
-            <a:spAutoFit/>
-          </a:bodyPr>
-          <a:lstStyle/>
-          <a:p>
-            <a:pPr algn="l">
-              <a:lnSpc>
-                <a:spcPct val="106000"/>
-              </a:lnSpc>
-              <a:spcBef>
-                <a:spcPts val="0"/>
-              </a:spcBef>
-              <a:spcAft>
-                <a:spcPts val="400"/>
-              </a:spcAft>
-            </a:pPr>
-            <a:r>
-              <a:rPr sz="1050" b="1">
-                <a:solidFill>
-                  <a:srgbClr val="FFFFFF"/>
-                </a:solidFill>
-                <a:latin typeface="Consolas"/>
-                <a:ea typeface="Consolas"/>
-              </a:rPr>
-              <a:t>工程</a:t>
-            </a:r>
-          </a:p>
-        </p:txBody>
-      </p:sp>
-      <p:sp>
-        <p:nvSpPr>
-          <p:cNvPr id="10" name="TextBox 9"/>
-          <p:cNvSpPr txBox="1"/>
-          <p:nvPr/>
-        </p:nvSpPr>
-        <p:spPr>
-          <a:xfrm>
-            <a:off x="2916936" y="1417320"/>
-            <a:ext cx="2834639" cy="420624"/>
-          </a:xfrm>
-          <a:prstGeom prst="rect">
-            <a:avLst/>
-          </a:prstGeom>
-          <a:noFill/>
-        </p:spPr>
-        <p:txBody>
-          <a:bodyPr wrap="square" anchor="ctr" lIns="0" rIns="0" tIns="0" bIns="0">
-            <a:spAutoFit/>
-          </a:bodyPr>
-          <a:lstStyle/>
-          <a:p>
-            <a:pPr algn="l">
-              <a:lnSpc>
-                <a:spcPct val="106000"/>
-              </a:lnSpc>
-              <a:spcBef>
-                <a:spcPts val="0"/>
-              </a:spcBef>
-              <a:spcAft>
-                <a:spcPts val="400"/>
-              </a:spcAft>
-            </a:pPr>
-            <a:r>
-              <a:rPr sz="1050" b="1">
-                <a:solidFill>
-                  <a:srgbClr val="FFFFFF"/>
-                </a:solidFill>
-                <a:latin typeface="Consolas"/>
-                <a:ea typeface="Consolas"/>
-              </a:rPr>
-              <a:t>やること</a:t>
-            </a:r>
-          </a:p>
-        </p:txBody>
-      </p:sp>
-      <p:sp>
-        <p:nvSpPr>
-          <p:cNvPr id="11" name="TextBox 10"/>
-          <p:cNvSpPr txBox="1"/>
-          <p:nvPr/>
-        </p:nvSpPr>
-        <p:spPr>
-          <a:xfrm>
-            <a:off x="5934455" y="1417320"/>
-            <a:ext cx="1965960" cy="420624"/>
-          </a:xfrm>
-          <a:prstGeom prst="rect">
-            <a:avLst/>
-          </a:prstGeom>
-          <a:noFill/>
-        </p:spPr>
-        <p:txBody>
-          <a:bodyPr wrap="square" anchor="ctr" lIns="0" rIns="0" tIns="0" bIns="0">
-            <a:spAutoFit/>
-          </a:bodyPr>
-          <a:lstStyle/>
-          <a:p>
-            <a:pPr algn="l">
-              <a:lnSpc>
-                <a:spcPct val="106000"/>
-              </a:lnSpc>
-              <a:spcBef>
-                <a:spcPts val="0"/>
-              </a:spcBef>
-              <a:spcAft>
-                <a:spcPts val="400"/>
-              </a:spcAft>
-            </a:pPr>
-            <a:r>
-              <a:rPr sz="1050" b="1">
-                <a:solidFill>
-                  <a:srgbClr val="FFFFFF"/>
-                </a:solidFill>
-                <a:latin typeface="Consolas"/>
-                <a:ea typeface="Consolas"/>
-              </a:rPr>
-              <a:t>建設費に対する割合</a:t>
-            </a:r>
-          </a:p>
-        </p:txBody>
-      </p:sp>
-      <p:sp>
-        <p:nvSpPr>
-          <p:cNvPr id="12" name="TextBox 11"/>
-          <p:cNvSpPr txBox="1"/>
-          <p:nvPr/>
-        </p:nvSpPr>
-        <p:spPr>
-          <a:xfrm>
-            <a:off x="8083296" y="1417320"/>
-            <a:ext cx="3273551" cy="420624"/>
-          </a:xfrm>
-          <a:prstGeom prst="rect">
-            <a:avLst/>
-          </a:prstGeom>
-          <a:noFill/>
-        </p:spPr>
-        <p:txBody>
-          <a:bodyPr wrap="square" anchor="ctr" lIns="0" rIns="0" tIns="0" bIns="0">
-            <a:spAutoFit/>
-          </a:bodyPr>
-          <a:lstStyle/>
-          <a:p>
-            <a:pPr algn="l">
-              <a:lnSpc>
-                <a:spcPct val="106000"/>
-              </a:lnSpc>
-              <a:spcBef>
-                <a:spcPts val="0"/>
-              </a:spcBef>
-              <a:spcAft>
-                <a:spcPts val="400"/>
-              </a:spcAft>
-            </a:pPr>
-            <a:r>
-              <a:rPr sz="1050" b="1">
-                <a:solidFill>
-                  <a:srgbClr val="FFFFFF"/>
-                </a:solidFill>
-                <a:latin typeface="Consolas"/>
-                <a:ea typeface="Consolas"/>
-              </a:rPr>
-              <a:t>市場の広がり（世界）</a:t>
-            </a:r>
-          </a:p>
-        </p:txBody>
-      </p:sp>
-      <p:sp>
-        <p:nvSpPr>
-          <p:cNvPr id="13" name="TextBox 12"/>
-          <p:cNvSpPr txBox="1"/>
-          <p:nvPr/>
-        </p:nvSpPr>
-        <p:spPr>
-          <a:xfrm>
-            <a:off x="905256" y="1965960"/>
-            <a:ext cx="1810512" cy="749808"/>
-          </a:xfrm>
-          <a:prstGeom prst="rect">
-            <a:avLst/>
-          </a:prstGeom>
-          <a:noFill/>
-        </p:spPr>
-        <p:txBody>
-          <a:bodyPr wrap="square" anchor="t" lIns="0" rIns="0" tIns="0" bIns="0">
-            <a:spAutoFit/>
-          </a:bodyPr>
-          <a:lstStyle/>
-          <a:p>
-            <a:pPr algn="l">
-              <a:lnSpc>
-                <a:spcPct val="110000"/>
-              </a:lnSpc>
-              <a:spcBef>
-                <a:spcPts val="0"/>
-              </a:spcBef>
-              <a:spcAft>
-                <a:spcPts val="300"/>
-              </a:spcAft>
-            </a:pPr>
-            <a:r>
-              <a:rPr sz="1300" b="1">
-                <a:solidFill>
-                  <a:srgbClr val="1A1D21"/>
-                </a:solidFill>
-                <a:latin typeface="Noto Sans JP"/>
-                <a:ea typeface="Noto Sans JP"/>
-              </a:rPr>
-              <a:t>① 据付・施工</a:t>
-            </a:r>
-          </a:p>
-          <a:p>
-            <a:pPr algn="l">
-              <a:lnSpc>
-                <a:spcPct val="110000"/>
-              </a:lnSpc>
-              <a:spcBef>
-                <a:spcPts val="0"/>
-              </a:spcBef>
-              <a:spcAft>
-                <a:spcPts val="300"/>
-              </a:spcAft>
-            </a:pPr>
-            <a:r>
-              <a:rPr sz="850" b="1">
-                <a:solidFill>
-                  <a:srgbClr val="E60012"/>
-                </a:solidFill>
-                <a:latin typeface="Consolas"/>
-                <a:ea typeface="Consolas"/>
-              </a:rPr>
-              <a:t>建てる時</a:t>
-            </a:r>
-          </a:p>
-        </p:txBody>
-      </p:sp>
-      <p:sp>
-        <p:nvSpPr>
-          <p:cNvPr id="14" name="TextBox 13"/>
-          <p:cNvSpPr txBox="1"/>
-          <p:nvPr/>
-        </p:nvSpPr>
-        <p:spPr>
-          <a:xfrm>
-            <a:off x="2916936" y="1837944"/>
-            <a:ext cx="2798063" cy="932688"/>
-          </a:xfrm>
-          <a:prstGeom prst="rect">
-            <a:avLst/>
-          </a:prstGeom>
-          <a:noFill/>
-        </p:spPr>
-        <p:txBody>
-          <a:bodyPr wrap="square" anchor="ctr" lIns="0" rIns="0" tIns="0" bIns="0">
-            <a:spAutoFit/>
-          </a:bodyPr>
-          <a:lstStyle/>
-          <a:p>
-            <a:pPr algn="l">
-              <a:lnSpc>
-                <a:spcPct val="116000"/>
-              </a:lnSpc>
-              <a:spcBef>
-                <a:spcPts val="0"/>
-              </a:spcBef>
-              <a:spcAft>
-                <a:spcPts val="400"/>
-              </a:spcAft>
-            </a:pPr>
-            <a:r>
-              <a:rPr sz="1100" b="0">
-                <a:solidFill>
-                  <a:srgbClr val="3C4148"/>
-                </a:solidFill>
-                <a:latin typeface="Noto Sans JP"/>
-                <a:ea typeface="Noto Sans JP"/>
-              </a:rPr>
-              <a:t>機器を搬入し、据付・配線・配管する</a:t>
-            </a:r>
-          </a:p>
-        </p:txBody>
-      </p:sp>
-      <p:sp>
-        <p:nvSpPr>
-          <p:cNvPr id="15" name="TextBox 14"/>
-          <p:cNvSpPr txBox="1"/>
-          <p:nvPr/>
-        </p:nvSpPr>
-        <p:spPr>
-          <a:xfrm>
-            <a:off x="5934455" y="1984248"/>
-            <a:ext cx="1929384" cy="457200"/>
-          </a:xfrm>
-          <a:prstGeom prst="rect">
-            <a:avLst/>
-          </a:prstGeom>
-          <a:noFill/>
-        </p:spPr>
-        <p:txBody>
-          <a:bodyPr wrap="square" anchor="t" lIns="0" rIns="0" tIns="0" bIns="0">
-            <a:spAutoFit/>
-          </a:bodyPr>
-          <a:lstStyle/>
-          <a:p>
-            <a:pPr algn="l">
-              <a:lnSpc>
-                <a:spcPct val="106000"/>
-              </a:lnSpc>
-              <a:spcBef>
-                <a:spcPts val="0"/>
-              </a:spcBef>
-              <a:spcAft>
-                <a:spcPts val="400"/>
-              </a:spcAft>
-            </a:pPr>
-            <a:r>
-              <a:rPr sz="2000" b="1">
-                <a:solidFill>
-                  <a:srgbClr val="E60012"/>
-                </a:solidFill>
-                <a:latin typeface="Noto Sans JP"/>
-                <a:ea typeface="Noto Sans JP"/>
-              </a:rPr>
-              <a:t>約3割</a:t>
-            </a:r>
-          </a:p>
-        </p:txBody>
-      </p:sp>
-      <p:sp>
-        <p:nvSpPr>
-          <p:cNvPr id="16" name="TextBox 15"/>
-          <p:cNvSpPr txBox="1"/>
-          <p:nvPr/>
-        </p:nvSpPr>
-        <p:spPr>
-          <a:xfrm>
-            <a:off x="5934455" y="2404872"/>
-            <a:ext cx="1929384" cy="292608"/>
-          </a:xfrm>
-          <a:prstGeom prst="rect">
-            <a:avLst/>
-          </a:prstGeom>
-          <a:noFill/>
-        </p:spPr>
-        <p:txBody>
-          <a:bodyPr wrap="square" anchor="t" lIns="0" rIns="0" tIns="0" bIns="0">
-            <a:spAutoFit/>
-          </a:bodyPr>
-          <a:lstStyle/>
-          <a:p>
-            <a:pPr algn="l">
-              <a:lnSpc>
-                <a:spcPct val="105000"/>
-              </a:lnSpc>
-              <a:spcBef>
-                <a:spcPts val="0"/>
-              </a:spcBef>
-              <a:spcAft>
-                <a:spcPts val="400"/>
-              </a:spcAft>
-            </a:pPr>
-            <a:r>
-              <a:rPr sz="850" b="1">
-                <a:solidFill>
-                  <a:srgbClr val="8A9098"/>
-                </a:solidFill>
-                <a:latin typeface="Consolas"/>
-                <a:ea typeface="Consolas"/>
-              </a:rPr>
-              <a:t>設備の“工”＝ 建設費の約30%</a:t>
-            </a:r>
-          </a:p>
-        </p:txBody>
-      </p:sp>
-      <p:sp>
-        <p:nvSpPr>
-          <p:cNvPr id="17" name="TextBox 16"/>
-          <p:cNvSpPr txBox="1"/>
-          <p:nvPr/>
-        </p:nvSpPr>
-        <p:spPr>
-          <a:xfrm>
-            <a:off x="8083296" y="1837944"/>
-            <a:ext cx="3218687" cy="932688"/>
-          </a:xfrm>
-          <a:prstGeom prst="rect">
-            <a:avLst/>
-          </a:prstGeom>
-          <a:noFill/>
-        </p:spPr>
-        <p:txBody>
-          <a:bodyPr wrap="square" anchor="ctr" lIns="0" rIns="0" tIns="0" bIns="0">
-            <a:spAutoFit/>
-          </a:bodyPr>
-          <a:lstStyle/>
-          <a:p>
-            <a:pPr algn="l">
-              <a:lnSpc>
-                <a:spcPct val="116000"/>
-              </a:lnSpc>
-              <a:spcBef>
-                <a:spcPts val="0"/>
-              </a:spcBef>
-              <a:spcAft>
-                <a:spcPts val="400"/>
-              </a:spcAft>
-            </a:pPr>
-            <a:r>
-              <a:rPr sz="1050" b="1">
-                <a:solidFill>
-                  <a:srgbClr val="1A1D21"/>
-                </a:solidFill>
-                <a:latin typeface="Noto Sans JP"/>
-                <a:ea typeface="Noto Sans JP"/>
-              </a:rPr>
-              <a:t>国内の設備工事そのもの。ANDPADの中核市場</a:t>
-            </a:r>
-          </a:p>
-        </p:txBody>
-      </p:sp>
-      <p:sp>
-        <p:nvSpPr>
-          <p:cNvPr id="18" name="Rectangle 17"/>
+          <p:cNvPr id="10" name="Rectangle 9"/>
           <p:cNvSpPr/>
           <p:nvPr/>
         </p:nvSpPr>
         <p:spPr>
           <a:xfrm>
-            <a:off x="777240" y="2770632"/>
-            <a:ext cx="10634472" cy="932688"/>
+            <a:off x="8753094" y="1691640"/>
+            <a:ext cx="2658618" cy="822960"/>
           </a:xfrm>
           <a:prstGeom prst="rect">
             <a:avLst/>
           </a:prstGeom>
           <a:solidFill>
-            <a:srgbClr val="F3F4F6"/>
+            <a:srgbClr val="F25560"/>
           </a:solidFill>
           <a:ln>
             <a:noFill/>
@@ -9014,526 +10790,20 @@
       </p:sp>
       <p:sp>
         <p:nvSpPr>
-          <p:cNvPr id="19" name="TextBox 18"/>
-          <p:cNvSpPr txBox="1"/>
-          <p:nvPr/>
-        </p:nvSpPr>
-        <p:spPr>
-          <a:xfrm>
-            <a:off x="905256" y="2898648"/>
-            <a:ext cx="1810512" cy="749808"/>
-          </a:xfrm>
-          <a:prstGeom prst="rect">
-            <a:avLst/>
-          </a:prstGeom>
-          <a:noFill/>
-        </p:spPr>
-        <p:txBody>
-          <a:bodyPr wrap="square" anchor="t" lIns="0" rIns="0" tIns="0" bIns="0">
-            <a:spAutoFit/>
-          </a:bodyPr>
-          <a:lstStyle/>
-          <a:p>
-            <a:pPr algn="l">
-              <a:lnSpc>
-                <a:spcPct val="110000"/>
-              </a:lnSpc>
-              <a:spcBef>
-                <a:spcPts val="0"/>
-              </a:spcBef>
-              <a:spcAft>
-                <a:spcPts val="300"/>
-              </a:spcAft>
-            </a:pPr>
-            <a:r>
-              <a:rPr sz="1300" b="1">
-                <a:solidFill>
-                  <a:srgbClr val="1A1D21"/>
-                </a:solidFill>
-                <a:latin typeface="Noto Sans JP"/>
-                <a:ea typeface="Noto Sans JP"/>
-              </a:rPr>
-              <a:t>② 試運転</a:t>
-            </a:r>
-          </a:p>
-          <a:p>
-            <a:pPr algn="l">
-              <a:lnSpc>
-                <a:spcPct val="110000"/>
-              </a:lnSpc>
-              <a:spcBef>
-                <a:spcPts val="0"/>
-              </a:spcBef>
-              <a:spcAft>
-                <a:spcPts val="300"/>
-              </a:spcAft>
-            </a:pPr>
-            <a:r>
-              <a:rPr sz="850" b="1">
-                <a:solidFill>
-                  <a:srgbClr val="E60012"/>
-                </a:solidFill>
-                <a:latin typeface="Consolas"/>
-                <a:ea typeface="Consolas"/>
-              </a:rPr>
-              <a:t>建てる時</a:t>
-            </a:r>
-          </a:p>
-        </p:txBody>
-      </p:sp>
-      <p:sp>
-        <p:nvSpPr>
-          <p:cNvPr id="20" name="TextBox 19"/>
-          <p:cNvSpPr txBox="1"/>
-          <p:nvPr/>
-        </p:nvSpPr>
-        <p:spPr>
-          <a:xfrm>
-            <a:off x="2916936" y="2770632"/>
-            <a:ext cx="2798063" cy="932688"/>
-          </a:xfrm>
-          <a:prstGeom prst="rect">
-            <a:avLst/>
-          </a:prstGeom>
-          <a:noFill/>
-        </p:spPr>
-        <p:txBody>
-          <a:bodyPr wrap="square" anchor="ctr" lIns="0" rIns="0" tIns="0" bIns="0">
-            <a:spAutoFit/>
-          </a:bodyPr>
-          <a:lstStyle/>
-          <a:p>
-            <a:pPr algn="l">
-              <a:lnSpc>
-                <a:spcPct val="116000"/>
-              </a:lnSpc>
-              <a:spcBef>
-                <a:spcPts val="0"/>
-              </a:spcBef>
-              <a:spcAft>
-                <a:spcPts val="400"/>
-              </a:spcAft>
-            </a:pPr>
-            <a:r>
-              <a:rPr sz="1100" b="0">
-                <a:solidFill>
-                  <a:srgbClr val="3C4148"/>
-                </a:solidFill>
-                <a:latin typeface="Noto Sans JP"/>
-                <a:ea typeface="Noto Sans JP"/>
-              </a:rPr>
-              <a:t>通電・調整・性能検証で“動かす”</a:t>
-            </a:r>
-          </a:p>
-        </p:txBody>
-      </p:sp>
-      <p:sp>
-        <p:nvSpPr>
-          <p:cNvPr id="21" name="TextBox 20"/>
-          <p:cNvSpPr txBox="1"/>
-          <p:nvPr/>
-        </p:nvSpPr>
-        <p:spPr>
-          <a:xfrm>
-            <a:off x="5934455" y="2916936"/>
-            <a:ext cx="1929384" cy="457200"/>
-          </a:xfrm>
-          <a:prstGeom prst="rect">
-            <a:avLst/>
-          </a:prstGeom>
-          <a:noFill/>
-        </p:spPr>
-        <p:txBody>
-          <a:bodyPr wrap="square" anchor="t" lIns="0" rIns="0" tIns="0" bIns="0">
-            <a:spAutoFit/>
-          </a:bodyPr>
-          <a:lstStyle/>
-          <a:p>
-            <a:pPr algn="l">
-              <a:lnSpc>
-                <a:spcPct val="106000"/>
-              </a:lnSpc>
-              <a:spcBef>
-                <a:spcPts val="0"/>
-              </a:spcBef>
-              <a:spcAft>
-                <a:spcPts val="400"/>
-              </a:spcAft>
-            </a:pPr>
-            <a:r>
-              <a:rPr sz="2000" b="1">
-                <a:solidFill>
-                  <a:srgbClr val="E60012"/>
-                </a:solidFill>
-                <a:latin typeface="Noto Sans JP"/>
-                <a:ea typeface="Noto Sans JP"/>
-              </a:rPr>
-              <a:t>約1〜3%</a:t>
-            </a:r>
-          </a:p>
-        </p:txBody>
-      </p:sp>
-      <p:sp>
-        <p:nvSpPr>
-          <p:cNvPr id="22" name="TextBox 21"/>
-          <p:cNvSpPr txBox="1"/>
-          <p:nvPr/>
-        </p:nvSpPr>
-        <p:spPr>
-          <a:xfrm>
-            <a:off x="5934455" y="3337560"/>
-            <a:ext cx="1929384" cy="292608"/>
-          </a:xfrm>
-          <a:prstGeom prst="rect">
-            <a:avLst/>
-          </a:prstGeom>
-          <a:noFill/>
-        </p:spPr>
-        <p:txBody>
-          <a:bodyPr wrap="square" anchor="t" lIns="0" rIns="0" tIns="0" bIns="0">
-            <a:spAutoFit/>
-          </a:bodyPr>
-          <a:lstStyle/>
-          <a:p>
-            <a:pPr algn="l">
-              <a:lnSpc>
-                <a:spcPct val="105000"/>
-              </a:lnSpc>
-              <a:spcBef>
-                <a:spcPts val="0"/>
-              </a:spcBef>
-              <a:spcAft>
-                <a:spcPts val="400"/>
-              </a:spcAft>
-            </a:pPr>
-            <a:r>
-              <a:rPr sz="850" b="1">
-                <a:solidFill>
-                  <a:srgbClr val="8A9098"/>
-                </a:solidFill>
-                <a:latin typeface="Consolas"/>
-                <a:ea typeface="Consolas"/>
-              </a:rPr>
-              <a:t>＋ 建設費の1〜3%</a:t>
-            </a:r>
-          </a:p>
-        </p:txBody>
-      </p:sp>
-      <p:sp>
-        <p:nvSpPr>
-          <p:cNvPr id="23" name="TextBox 22"/>
-          <p:cNvSpPr txBox="1"/>
-          <p:nvPr/>
-        </p:nvSpPr>
-        <p:spPr>
-          <a:xfrm>
-            <a:off x="8083296" y="2770632"/>
-            <a:ext cx="3218687" cy="932688"/>
-          </a:xfrm>
-          <a:prstGeom prst="rect">
-            <a:avLst/>
-          </a:prstGeom>
-          <a:noFill/>
-        </p:spPr>
-        <p:txBody>
-          <a:bodyPr wrap="square" anchor="ctr" lIns="0" rIns="0" tIns="0" bIns="0">
-            <a:spAutoFit/>
-          </a:bodyPr>
-          <a:lstStyle/>
-          <a:p>
-            <a:pPr algn="l">
-              <a:lnSpc>
-                <a:spcPct val="116000"/>
-              </a:lnSpc>
-              <a:spcBef>
-                <a:spcPts val="0"/>
-              </a:spcBef>
-              <a:spcAft>
-                <a:spcPts val="400"/>
-              </a:spcAft>
-            </a:pPr>
-            <a:r>
-              <a:rPr sz="1050" b="1">
-                <a:solidFill>
-                  <a:srgbClr val="1A1D21"/>
-                </a:solidFill>
-                <a:latin typeface="Noto Sans JP"/>
-                <a:ea typeface="Noto Sans JP"/>
-              </a:rPr>
-              <a:t>試運転サービス市場 $2.15B→$4.25B（'24→'33）</a:t>
-            </a:r>
-          </a:p>
-        </p:txBody>
-      </p:sp>
-      <p:sp>
-        <p:nvSpPr>
-          <p:cNvPr id="24" name="TextBox 23"/>
-          <p:cNvSpPr txBox="1"/>
-          <p:nvPr/>
-        </p:nvSpPr>
-        <p:spPr>
-          <a:xfrm>
-            <a:off x="905256" y="3831336"/>
-            <a:ext cx="1810512" cy="749808"/>
-          </a:xfrm>
-          <a:prstGeom prst="rect">
-            <a:avLst/>
-          </a:prstGeom>
-          <a:noFill/>
-        </p:spPr>
-        <p:txBody>
-          <a:bodyPr wrap="square" anchor="t" lIns="0" rIns="0" tIns="0" bIns="0">
-            <a:spAutoFit/>
-          </a:bodyPr>
-          <a:lstStyle/>
-          <a:p>
-            <a:pPr algn="l">
-              <a:lnSpc>
-                <a:spcPct val="110000"/>
-              </a:lnSpc>
-              <a:spcBef>
-                <a:spcPts val="0"/>
-              </a:spcBef>
-              <a:spcAft>
-                <a:spcPts val="300"/>
-              </a:spcAft>
-            </a:pPr>
-            <a:r>
-              <a:rPr sz="1300" b="1">
-                <a:solidFill>
-                  <a:srgbClr val="1A1D21"/>
-                </a:solidFill>
-                <a:latin typeface="Noto Sans JP"/>
-                <a:ea typeface="Noto Sans JP"/>
-              </a:rPr>
-              <a:t>③ 保守・運用</a:t>
-            </a:r>
-          </a:p>
-          <a:p>
-            <a:pPr algn="l">
-              <a:lnSpc>
-                <a:spcPct val="110000"/>
-              </a:lnSpc>
-              <a:spcBef>
-                <a:spcPts val="0"/>
-              </a:spcBef>
-              <a:spcAft>
-                <a:spcPts val="300"/>
-              </a:spcAft>
-            </a:pPr>
-            <a:r>
-              <a:rPr sz="850" b="1">
-                <a:solidFill>
-                  <a:srgbClr val="454B54"/>
-                </a:solidFill>
-                <a:latin typeface="Consolas"/>
-                <a:ea typeface="Consolas"/>
-              </a:rPr>
-              <a:t>建てた後ずっと</a:t>
-            </a:r>
-          </a:p>
-        </p:txBody>
-      </p:sp>
-      <p:sp>
-        <p:nvSpPr>
-          <p:cNvPr id="25" name="TextBox 24"/>
-          <p:cNvSpPr txBox="1"/>
-          <p:nvPr/>
-        </p:nvSpPr>
-        <p:spPr>
-          <a:xfrm>
-            <a:off x="2916936" y="3703320"/>
-            <a:ext cx="2798063" cy="932688"/>
-          </a:xfrm>
-          <a:prstGeom prst="rect">
-            <a:avLst/>
-          </a:prstGeom>
-          <a:noFill/>
-        </p:spPr>
-        <p:txBody>
-          <a:bodyPr wrap="square" anchor="ctr" lIns="0" rIns="0" tIns="0" bIns="0">
-            <a:spAutoFit/>
-          </a:bodyPr>
-          <a:lstStyle/>
-          <a:p>
-            <a:pPr algn="l">
-              <a:lnSpc>
-                <a:spcPct val="116000"/>
-              </a:lnSpc>
-              <a:spcBef>
-                <a:spcPts val="0"/>
-              </a:spcBef>
-              <a:spcAft>
-                <a:spcPts val="400"/>
-              </a:spcAft>
-            </a:pPr>
-            <a:r>
-              <a:rPr sz="1100" b="0">
-                <a:solidFill>
-                  <a:srgbClr val="3C4148"/>
-                </a:solidFill>
-                <a:latin typeface="Noto Sans JP"/>
-                <a:ea typeface="Noto Sans JP"/>
-              </a:rPr>
-              <a:t>点検・更新・障害対応（稼働中ずっと）</a:t>
-            </a:r>
-          </a:p>
-        </p:txBody>
-      </p:sp>
-      <p:sp>
-        <p:nvSpPr>
-          <p:cNvPr id="26" name="TextBox 25"/>
-          <p:cNvSpPr txBox="1"/>
-          <p:nvPr/>
-        </p:nvSpPr>
-        <p:spPr>
-          <a:xfrm>
-            <a:off x="5934455" y="3849624"/>
-            <a:ext cx="1929384" cy="457200"/>
-          </a:xfrm>
-          <a:prstGeom prst="rect">
-            <a:avLst/>
-          </a:prstGeom>
-          <a:noFill/>
-        </p:spPr>
-        <p:txBody>
-          <a:bodyPr wrap="square" anchor="t" lIns="0" rIns="0" tIns="0" bIns="0">
-            <a:spAutoFit/>
-          </a:bodyPr>
-          <a:lstStyle/>
-          <a:p>
-            <a:pPr algn="l">
-              <a:lnSpc>
-                <a:spcPct val="106000"/>
-              </a:lnSpc>
-              <a:spcBef>
-                <a:spcPts val="0"/>
-              </a:spcBef>
-              <a:spcAft>
-                <a:spcPts val="400"/>
-              </a:spcAft>
-            </a:pPr>
-            <a:r>
-              <a:rPr sz="2000" b="1">
-                <a:solidFill>
-                  <a:srgbClr val="E60012"/>
-                </a:solidFill>
-                <a:latin typeface="Noto Sans JP"/>
-                <a:ea typeface="Noto Sans JP"/>
-              </a:rPr>
-              <a:t>毎年発生</a:t>
-            </a:r>
-          </a:p>
-        </p:txBody>
-      </p:sp>
-      <p:sp>
-        <p:nvSpPr>
-          <p:cNvPr id="27" name="TextBox 26"/>
-          <p:cNvSpPr txBox="1"/>
-          <p:nvPr/>
-        </p:nvSpPr>
-        <p:spPr>
-          <a:xfrm>
-            <a:off x="5934455" y="4270248"/>
-            <a:ext cx="1929384" cy="292608"/>
-          </a:xfrm>
-          <a:prstGeom prst="rect">
-            <a:avLst/>
-          </a:prstGeom>
-          <a:noFill/>
-        </p:spPr>
-        <p:txBody>
-          <a:bodyPr wrap="square" anchor="t" lIns="0" rIns="0" tIns="0" bIns="0">
-            <a:spAutoFit/>
-          </a:bodyPr>
-          <a:lstStyle/>
-          <a:p>
-            <a:pPr algn="l">
-              <a:lnSpc>
-                <a:spcPct val="105000"/>
-              </a:lnSpc>
-              <a:spcBef>
-                <a:spcPts val="0"/>
-              </a:spcBef>
-              <a:spcAft>
-                <a:spcPts val="400"/>
-              </a:spcAft>
-            </a:pPr>
-            <a:r>
-              <a:rPr sz="850" b="1">
-                <a:solidFill>
-                  <a:srgbClr val="8A9098"/>
-                </a:solidFill>
-                <a:latin typeface="Consolas"/>
-                <a:ea typeface="Consolas"/>
-              </a:rPr>
-              <a:t>運用費の約4割（毎年）</a:t>
-            </a:r>
-          </a:p>
-        </p:txBody>
-      </p:sp>
-      <p:sp>
-        <p:nvSpPr>
-          <p:cNvPr id="28" name="TextBox 27"/>
-          <p:cNvSpPr txBox="1"/>
-          <p:nvPr/>
-        </p:nvSpPr>
-        <p:spPr>
-          <a:xfrm>
-            <a:off x="8083296" y="3703320"/>
-            <a:ext cx="3218687" cy="932688"/>
-          </a:xfrm>
-          <a:prstGeom prst="rect">
-            <a:avLst/>
-          </a:prstGeom>
-          <a:noFill/>
-        </p:spPr>
-        <p:txBody>
-          <a:bodyPr wrap="square" anchor="ctr" lIns="0" rIns="0" tIns="0" bIns="0">
-            <a:spAutoFit/>
-          </a:bodyPr>
-          <a:lstStyle/>
-          <a:p>
-            <a:pPr algn="l">
-              <a:lnSpc>
-                <a:spcPct val="116000"/>
-              </a:lnSpc>
-              <a:spcBef>
-                <a:spcPts val="0"/>
-              </a:spcBef>
-              <a:spcAft>
-                <a:spcPts val="400"/>
-              </a:spcAft>
-            </a:pPr>
-            <a:r>
-              <a:rPr sz="1050" b="1">
-                <a:solidFill>
-                  <a:srgbClr val="1A1D21"/>
-                </a:solidFill>
-                <a:latin typeface="Noto Sans JP"/>
-                <a:ea typeface="Noto Sans JP"/>
-              </a:rPr>
-              <a:t>DC運用保守市場 $15.8B→$45.6B（'24→'33）</a:t>
-            </a:r>
-          </a:p>
-        </p:txBody>
-      </p:sp>
-      <p:sp>
-        <p:nvSpPr>
-          <p:cNvPr id="29" name="Rectangle 28"/>
+          <p:cNvPr id="11" name="Rectangle 10"/>
           <p:cNvSpPr/>
           <p:nvPr/>
         </p:nvSpPr>
         <p:spPr>
           <a:xfrm>
-            <a:off x="777240" y="1837944"/>
-            <a:ext cx="10634472" cy="9144"/>
+            <a:off x="3424885" y="1691640"/>
+            <a:ext cx="21945" cy="822960"/>
           </a:xfrm>
           <a:prstGeom prst="rect">
             <a:avLst/>
           </a:prstGeom>
           <a:solidFill>
-            <a:srgbClr val="E2E4E9"/>
+            <a:srgbClr val="FFFFFF"/>
           </a:solidFill>
           <a:ln>
             <a:noFill/>
@@ -9564,20 +10834,20 @@
       </p:sp>
       <p:sp>
         <p:nvSpPr>
-          <p:cNvPr id="30" name="Rectangle 29"/>
+          <p:cNvPr id="12" name="Rectangle 11"/>
           <p:cNvSpPr/>
           <p:nvPr/>
         </p:nvSpPr>
         <p:spPr>
           <a:xfrm>
-            <a:off x="777240" y="2770632"/>
-            <a:ext cx="10634472" cy="9144"/>
+            <a:off x="8742121" y="1691640"/>
+            <a:ext cx="21945" cy="822960"/>
           </a:xfrm>
           <a:prstGeom prst="rect">
             <a:avLst/>
           </a:prstGeom>
           <a:solidFill>
-            <a:srgbClr val="E2E4E9"/>
+            <a:srgbClr val="FFFFFF"/>
           </a:solidFill>
           <a:ln>
             <a:noFill/>
@@ -9608,238 +10878,225 @@
       </p:sp>
       <p:sp>
         <p:nvSpPr>
-          <p:cNvPr id="31" name="Rectangle 30"/>
+          <p:cNvPr id="13" name="TextBox 12"/>
+          <p:cNvSpPr txBox="1"/>
+          <p:nvPr/>
+        </p:nvSpPr>
+        <p:spPr>
+          <a:xfrm>
+            <a:off x="777240" y="1691640"/>
+            <a:ext cx="2658618" cy="822960"/>
+          </a:xfrm>
+          <a:prstGeom prst="rect">
+            <a:avLst/>
+          </a:prstGeom>
+          <a:noFill/>
+        </p:spPr>
+        <p:txBody>
+          <a:bodyPr wrap="square" anchor="ctr" lIns="0" rIns="0" tIns="0" bIns="0">
+            <a:spAutoFit/>
+          </a:bodyPr>
+          <a:lstStyle/>
+          <a:p>
+            <a:pPr algn="ctr">
+              <a:lnSpc>
+                <a:spcPct val="100000"/>
+              </a:lnSpc>
+              <a:spcBef>
+                <a:spcPts val="0"/>
+              </a:spcBef>
+              <a:spcAft>
+                <a:spcPts val="100"/>
+              </a:spcAft>
+            </a:pPr>
+            <a:r>
+              <a:rPr sz="1000" b="1">
+                <a:solidFill>
+                  <a:srgbClr val="FFFFFF"/>
+                </a:solidFill>
+                <a:latin typeface="Noto Sans JP"/>
+                <a:ea typeface="Noto Sans JP"/>
+              </a:rPr>
+              <a:t>建築（躯体）</a:t>
+            </a:r>
+          </a:p>
+          <a:p>
+            <a:pPr algn="ctr">
+              <a:lnSpc>
+                <a:spcPct val="100000"/>
+              </a:lnSpc>
+              <a:spcBef>
+                <a:spcPts val="0"/>
+              </a:spcBef>
+              <a:spcAft>
+                <a:spcPts val="100"/>
+              </a:spcAft>
+            </a:pPr>
+            <a:r>
+              <a:rPr sz="1700" b="1">
+                <a:solidFill>
+                  <a:srgbClr val="FFFFFF"/>
+                </a:solidFill>
+                <a:latin typeface="Noto Sans JP"/>
+                <a:ea typeface="Noto Sans JP"/>
+              </a:rPr>
+              <a:t>約25%</a:t>
+            </a:r>
+          </a:p>
+        </p:txBody>
+      </p:sp>
+      <p:sp>
+        <p:nvSpPr>
+          <p:cNvPr id="14" name="TextBox 13"/>
+          <p:cNvSpPr txBox="1"/>
+          <p:nvPr/>
+        </p:nvSpPr>
+        <p:spPr>
+          <a:xfrm>
+            <a:off x="3435858" y="1691640"/>
+            <a:ext cx="5317236" cy="822960"/>
+          </a:xfrm>
+          <a:prstGeom prst="rect">
+            <a:avLst/>
+          </a:prstGeom>
+          <a:noFill/>
+        </p:spPr>
+        <p:txBody>
+          <a:bodyPr wrap="square" anchor="ctr" lIns="0" rIns="0" tIns="0" bIns="0">
+            <a:spAutoFit/>
+          </a:bodyPr>
+          <a:lstStyle/>
+          <a:p>
+            <a:pPr algn="ctr">
+              <a:lnSpc>
+                <a:spcPct val="100000"/>
+              </a:lnSpc>
+              <a:spcBef>
+                <a:spcPts val="0"/>
+              </a:spcBef>
+              <a:spcAft>
+                <a:spcPts val="100"/>
+              </a:spcAft>
+            </a:pPr>
+            <a:r>
+              <a:rPr sz="1050" b="1">
+                <a:solidFill>
+                  <a:srgbClr val="FFFFFF"/>
+                </a:solidFill>
+                <a:latin typeface="Noto Sans JP"/>
+                <a:ea typeface="Noto Sans JP"/>
+              </a:rPr>
+              <a:t>電気設備</a:t>
+            </a:r>
+          </a:p>
+          <a:p>
+            <a:pPr algn="ctr">
+              <a:lnSpc>
+                <a:spcPct val="100000"/>
+              </a:lnSpc>
+              <a:spcBef>
+                <a:spcPts val="0"/>
+              </a:spcBef>
+              <a:spcAft>
+                <a:spcPts val="100"/>
+              </a:spcAft>
+            </a:pPr>
+            <a:r>
+              <a:rPr sz="1900" b="1">
+                <a:solidFill>
+                  <a:srgbClr val="FFFFFF"/>
+                </a:solidFill>
+                <a:latin typeface="Noto Sans JP"/>
+                <a:ea typeface="Noto Sans JP"/>
+              </a:rPr>
+              <a:t>約50%</a:t>
+            </a:r>
+          </a:p>
+        </p:txBody>
+      </p:sp>
+      <p:sp>
+        <p:nvSpPr>
+          <p:cNvPr id="15" name="TextBox 14"/>
+          <p:cNvSpPr txBox="1"/>
+          <p:nvPr/>
+        </p:nvSpPr>
+        <p:spPr>
+          <a:xfrm>
+            <a:off x="8753094" y="1691640"/>
+            <a:ext cx="2658618" cy="822960"/>
+          </a:xfrm>
+          <a:prstGeom prst="rect">
+            <a:avLst/>
+          </a:prstGeom>
+          <a:noFill/>
+        </p:spPr>
+        <p:txBody>
+          <a:bodyPr wrap="square" anchor="ctr" lIns="0" rIns="0" tIns="0" bIns="0">
+            <a:spAutoFit/>
+          </a:bodyPr>
+          <a:lstStyle/>
+          <a:p>
+            <a:pPr algn="ctr">
+              <a:lnSpc>
+                <a:spcPct val="100000"/>
+              </a:lnSpc>
+              <a:spcBef>
+                <a:spcPts val="0"/>
+              </a:spcBef>
+              <a:spcAft>
+                <a:spcPts val="100"/>
+              </a:spcAft>
+            </a:pPr>
+            <a:r>
+              <a:rPr sz="1000" b="1">
+                <a:solidFill>
+                  <a:srgbClr val="FFFFFF"/>
+                </a:solidFill>
+                <a:latin typeface="Noto Sans JP"/>
+                <a:ea typeface="Noto Sans JP"/>
+              </a:rPr>
+              <a:t>空調・機械</a:t>
+            </a:r>
+          </a:p>
+          <a:p>
+            <a:pPr algn="ctr">
+              <a:lnSpc>
+                <a:spcPct val="100000"/>
+              </a:lnSpc>
+              <a:spcBef>
+                <a:spcPts val="0"/>
+              </a:spcBef>
+              <a:spcAft>
+                <a:spcPts val="100"/>
+              </a:spcAft>
+            </a:pPr>
+            <a:r>
+              <a:rPr sz="1700" b="1">
+                <a:solidFill>
+                  <a:srgbClr val="FFFFFF"/>
+                </a:solidFill>
+                <a:latin typeface="Noto Sans JP"/>
+                <a:ea typeface="Noto Sans JP"/>
+              </a:rPr>
+              <a:t>約25%</a:t>
+            </a:r>
+          </a:p>
+        </p:txBody>
+      </p:sp>
+      <p:sp>
+        <p:nvSpPr>
+          <p:cNvPr id="16" name="Rounded Rectangle 15"/>
           <p:cNvSpPr/>
           <p:nvPr/>
         </p:nvSpPr>
         <p:spPr>
           <a:xfrm>
-            <a:off x="777240" y="3703320"/>
-            <a:ext cx="10634472" cy="9144"/>
-          </a:xfrm>
-          <a:prstGeom prst="rect">
-            <a:avLst/>
-          </a:prstGeom>
-          <a:solidFill>
-            <a:srgbClr val="E2E4E9"/>
-          </a:solidFill>
-          <a:ln>
-            <a:noFill/>
-          </a:ln>
-          <a:effectLst/>
-        </p:spPr>
-        <p:style>
-          <a:lnRef idx="1">
-            <a:schemeClr val="accent1"/>
-          </a:lnRef>
-          <a:fillRef idx="3">
-            <a:schemeClr val="accent1"/>
-          </a:fillRef>
-          <a:effectRef idx="2">
-            <a:schemeClr val="accent1"/>
-          </a:effectRef>
-          <a:fontRef idx="minor">
-            <a:schemeClr val="lt1"/>
-          </a:fontRef>
-        </p:style>
-        <p:txBody>
-          <a:bodyPr rtlCol="0" anchor="ctr"/>
-          <a:lstStyle/>
-          <a:p>
-            <a:pPr algn="ctr"/>
-          </a:p>
-        </p:txBody>
-      </p:sp>
-      <p:sp>
-        <p:nvSpPr>
-          <p:cNvPr id="32" name="Rectangle 31"/>
-          <p:cNvSpPr/>
-          <p:nvPr/>
-        </p:nvSpPr>
-        <p:spPr>
-          <a:xfrm>
-            <a:off x="777240" y="4636008"/>
-            <a:ext cx="10634472" cy="9144"/>
-          </a:xfrm>
-          <a:prstGeom prst="rect">
-            <a:avLst/>
-          </a:prstGeom>
-          <a:solidFill>
-            <a:srgbClr val="E2E4E9"/>
-          </a:solidFill>
-          <a:ln>
-            <a:noFill/>
-          </a:ln>
-          <a:effectLst/>
-        </p:spPr>
-        <p:style>
-          <a:lnRef idx="1">
-            <a:schemeClr val="accent1"/>
-          </a:lnRef>
-          <a:fillRef idx="3">
-            <a:schemeClr val="accent1"/>
-          </a:fillRef>
-          <a:effectRef idx="2">
-            <a:schemeClr val="accent1"/>
-          </a:effectRef>
-          <a:fontRef idx="minor">
-            <a:schemeClr val="lt1"/>
-          </a:fontRef>
-        </p:style>
-        <p:txBody>
-          <a:bodyPr rtlCol="0" anchor="ctr"/>
-          <a:lstStyle/>
-          <a:p>
-            <a:pPr algn="ctr"/>
-          </a:p>
-        </p:txBody>
-      </p:sp>
-      <p:sp>
-        <p:nvSpPr>
-          <p:cNvPr id="33" name="Rectangle 32"/>
-          <p:cNvSpPr/>
-          <p:nvPr/>
-        </p:nvSpPr>
-        <p:spPr>
-          <a:xfrm>
-            <a:off x="2788920" y="1837944"/>
-            <a:ext cx="9144" cy="2798064"/>
-          </a:xfrm>
-          <a:prstGeom prst="rect">
-            <a:avLst/>
-          </a:prstGeom>
-          <a:solidFill>
-            <a:srgbClr val="E2E4E9"/>
-          </a:solidFill>
-          <a:ln>
-            <a:noFill/>
-          </a:ln>
-          <a:effectLst/>
-        </p:spPr>
-        <p:style>
-          <a:lnRef idx="1">
-            <a:schemeClr val="accent1"/>
-          </a:lnRef>
-          <a:fillRef idx="3">
-            <a:schemeClr val="accent1"/>
-          </a:fillRef>
-          <a:effectRef idx="2">
-            <a:schemeClr val="accent1"/>
-          </a:effectRef>
-          <a:fontRef idx="minor">
-            <a:schemeClr val="lt1"/>
-          </a:fontRef>
-        </p:style>
-        <p:txBody>
-          <a:bodyPr rtlCol="0" anchor="ctr"/>
-          <a:lstStyle/>
-          <a:p>
-            <a:pPr algn="ctr"/>
-          </a:p>
-        </p:txBody>
-      </p:sp>
-      <p:sp>
-        <p:nvSpPr>
-          <p:cNvPr id="34" name="Rectangle 33"/>
-          <p:cNvSpPr/>
-          <p:nvPr/>
-        </p:nvSpPr>
-        <p:spPr>
-          <a:xfrm>
-            <a:off x="5806440" y="1837944"/>
-            <a:ext cx="9144" cy="2798064"/>
-          </a:xfrm>
-          <a:prstGeom prst="rect">
-            <a:avLst/>
-          </a:prstGeom>
-          <a:solidFill>
-            <a:srgbClr val="E2E4E9"/>
-          </a:solidFill>
-          <a:ln>
-            <a:noFill/>
-          </a:ln>
-          <a:effectLst/>
-        </p:spPr>
-        <p:style>
-          <a:lnRef idx="1">
-            <a:schemeClr val="accent1"/>
-          </a:lnRef>
-          <a:fillRef idx="3">
-            <a:schemeClr val="accent1"/>
-          </a:fillRef>
-          <a:effectRef idx="2">
-            <a:schemeClr val="accent1"/>
-          </a:effectRef>
-          <a:fontRef idx="minor">
-            <a:schemeClr val="lt1"/>
-          </a:fontRef>
-        </p:style>
-        <p:txBody>
-          <a:bodyPr rtlCol="0" anchor="ctr"/>
-          <a:lstStyle/>
-          <a:p>
-            <a:pPr algn="ctr"/>
-          </a:p>
-        </p:txBody>
-      </p:sp>
-      <p:sp>
-        <p:nvSpPr>
-          <p:cNvPr id="35" name="Rectangle 34"/>
-          <p:cNvSpPr/>
-          <p:nvPr/>
-        </p:nvSpPr>
-        <p:spPr>
-          <a:xfrm>
-            <a:off x="7955279" y="1837944"/>
-            <a:ext cx="9144" cy="2798064"/>
-          </a:xfrm>
-          <a:prstGeom prst="rect">
-            <a:avLst/>
-          </a:prstGeom>
-          <a:solidFill>
-            <a:srgbClr val="E2E4E9"/>
-          </a:solidFill>
-          <a:ln>
-            <a:noFill/>
-          </a:ln>
-          <a:effectLst/>
-        </p:spPr>
-        <p:style>
-          <a:lnRef idx="1">
-            <a:schemeClr val="accent1"/>
-          </a:lnRef>
-          <a:fillRef idx="3">
-            <a:schemeClr val="accent1"/>
-          </a:fillRef>
-          <a:effectRef idx="2">
-            <a:schemeClr val="accent1"/>
-          </a:effectRef>
-          <a:fontRef idx="minor">
-            <a:schemeClr val="lt1"/>
-          </a:fontRef>
-        </p:style>
-        <p:txBody>
-          <a:bodyPr rtlCol="0" anchor="ctr"/>
-          <a:lstStyle/>
-          <a:p>
-            <a:pPr algn="ctr"/>
-          </a:p>
-        </p:txBody>
-      </p:sp>
-      <p:sp>
-        <p:nvSpPr>
-          <p:cNvPr id="36" name="Rounded Rectangle 35"/>
-          <p:cNvSpPr/>
-          <p:nvPr/>
-        </p:nvSpPr>
-        <p:spPr>
-          <a:xfrm>
-            <a:off x="777240" y="4343400"/>
-            <a:ext cx="10634472" cy="457200"/>
+            <a:off x="777240" y="1417320"/>
+            <a:ext cx="2658618" cy="219456"/>
           </a:xfrm>
           <a:prstGeom prst="roundRect">
             <a:avLst>
-              <a:gd name="adj" fmla="val 6000"/>
+              <a:gd name="adj" fmla="val 10000"/>
             </a:avLst>
           </a:prstGeom>
           <a:solidFill>
@@ -9876,14 +11133,14 @@
       </p:sp>
       <p:sp>
         <p:nvSpPr>
-          <p:cNvPr id="37" name="TextBox 36"/>
+          <p:cNvPr id="17" name="TextBox 16"/>
           <p:cNvSpPr txBox="1"/>
           <p:nvPr/>
         </p:nvSpPr>
         <p:spPr>
           <a:xfrm>
-            <a:off x="1005840" y="4343400"/>
-            <a:ext cx="10241280" cy="457200"/>
+            <a:off x="777240" y="1417320"/>
+            <a:ext cx="2658618" cy="219456"/>
           </a:xfrm>
           <a:prstGeom prst="rect">
             <a:avLst/>
@@ -9896,6 +11153,146 @@
           </a:bodyPr>
           <a:lstStyle/>
           <a:p>
+            <a:pPr algn="ctr">
+              <a:lnSpc>
+                <a:spcPct val="106000"/>
+              </a:lnSpc>
+              <a:spcBef>
+                <a:spcPts val="0"/>
+              </a:spcBef>
+              <a:spcAft>
+                <a:spcPts val="400"/>
+              </a:spcAft>
+            </a:pPr>
+            <a:r>
+              <a:rPr sz="900" b="1">
+                <a:solidFill>
+                  <a:srgbClr val="454B54"/>
+                </a:solidFill>
+                <a:latin typeface="Consolas"/>
+                <a:ea typeface="Consolas"/>
+              </a:rPr>
+              <a:t>建設（ゼネコン）</a:t>
+            </a:r>
+          </a:p>
+        </p:txBody>
+      </p:sp>
+      <p:sp>
+        <p:nvSpPr>
+          <p:cNvPr id="18" name="Rounded Rectangle 17"/>
+          <p:cNvSpPr/>
+          <p:nvPr/>
+        </p:nvSpPr>
+        <p:spPr>
+          <a:xfrm>
+            <a:off x="3435858" y="1417320"/>
+            <a:ext cx="7975854" cy="219456"/>
+          </a:xfrm>
+          <a:prstGeom prst="roundRect">
+            <a:avLst>
+              <a:gd name="adj" fmla="val 10000"/>
+            </a:avLst>
+          </a:prstGeom>
+          <a:solidFill>
+            <a:srgbClr val="FDECEE"/>
+          </a:solidFill>
+          <a:ln w="12700">
+            <a:solidFill>
+              <a:srgbClr val="E60012"/>
+            </a:solidFill>
+          </a:ln>
+          <a:effectLst/>
+        </p:spPr>
+        <p:style>
+          <a:lnRef idx="1">
+            <a:schemeClr val="accent1"/>
+          </a:lnRef>
+          <a:fillRef idx="3">
+            <a:schemeClr val="accent1"/>
+          </a:fillRef>
+          <a:effectRef idx="2">
+            <a:schemeClr val="accent1"/>
+          </a:effectRef>
+          <a:fontRef idx="minor">
+            <a:schemeClr val="lt1"/>
+          </a:fontRef>
+        </p:style>
+        <p:txBody>
+          <a:bodyPr rtlCol="0" anchor="ctr"/>
+          <a:lstStyle/>
+          <a:p>
+            <a:pPr algn="ctr"/>
+          </a:p>
+        </p:txBody>
+      </p:sp>
+      <p:sp>
+        <p:nvSpPr>
+          <p:cNvPr id="19" name="TextBox 18"/>
+          <p:cNvSpPr txBox="1"/>
+          <p:nvPr/>
+        </p:nvSpPr>
+        <p:spPr>
+          <a:xfrm>
+            <a:off x="3435858" y="1417320"/>
+            <a:ext cx="7975854" cy="219456"/>
+          </a:xfrm>
+          <a:prstGeom prst="rect">
+            <a:avLst/>
+          </a:prstGeom>
+          <a:noFill/>
+        </p:spPr>
+        <p:txBody>
+          <a:bodyPr wrap="square" anchor="ctr" lIns="0" rIns="0" tIns="0" bIns="0">
+            <a:spAutoFit/>
+          </a:bodyPr>
+          <a:lstStyle/>
+          <a:p>
+            <a:pPr algn="ctr">
+              <a:lnSpc>
+                <a:spcPct val="106000"/>
+              </a:lnSpc>
+              <a:spcBef>
+                <a:spcPts val="0"/>
+              </a:spcBef>
+              <a:spcAft>
+                <a:spcPts val="400"/>
+              </a:spcAft>
+            </a:pPr>
+            <a:r>
+              <a:rPr sz="950" b="1">
+                <a:solidFill>
+                  <a:srgbClr val="E60012"/>
+                </a:solidFill>
+                <a:latin typeface="Consolas"/>
+                <a:ea typeface="Consolas"/>
+              </a:rPr>
+              <a:t>設備＝製造業（電気・機械）  約75%</a:t>
+            </a:r>
+          </a:p>
+        </p:txBody>
+      </p:sp>
+      <p:sp>
+        <p:nvSpPr>
+          <p:cNvPr id="20" name="TextBox 19"/>
+          <p:cNvSpPr txBox="1"/>
+          <p:nvPr/>
+        </p:nvSpPr>
+        <p:spPr>
+          <a:xfrm>
+            <a:off x="777240" y="2697480"/>
+            <a:ext cx="10634472" cy="256032"/>
+          </a:xfrm>
+          <a:prstGeom prst="rect">
+            <a:avLst/>
+          </a:prstGeom>
+          <a:noFill/>
+        </p:spPr>
+        <p:txBody>
+          <a:bodyPr wrap="square" anchor="t" lIns="0" rIns="0" tIns="0" bIns="0">
+            <a:spAutoFit/>
+          </a:bodyPr>
+          <a:lstStyle/>
+          <a:p>
             <a:pPr algn="l">
               <a:lnSpc>
                 <a:spcPct val="106000"/>
@@ -9908,48 +11305,851 @@
               </a:spcAft>
             </a:pPr>
             <a:r>
-              <a:rPr sz="1150" b="1">
-                <a:solidFill>
-                  <a:srgbClr val="454B54"/>
+              <a:rPr sz="1050" b="1">
+                <a:solidFill>
+                  <a:srgbClr val="3C4148"/>
                 </a:solidFill>
                 <a:latin typeface="Noto Sans JP"/>
                 <a:ea typeface="Noto Sans JP"/>
               </a:rPr>
-              <a:t>①②「建てる時」は一度きり。</a:t>
-            </a:r>
-            <a:r>
-              <a:rPr sz="1150" b="1">
-                <a:solidFill>
-                  <a:srgbClr val="E60012"/>
+              <a:t>↓ その「設備 約75%」を </a:t>
+            </a:r>
+            <a:r>
+              <a:rPr sz="1050" b="1">
+                <a:solidFill>
+                  <a:srgbClr val="8A9098"/>
                 </a:solidFill>
                 <a:latin typeface="Noto Sans JP"/>
                 <a:ea typeface="Noto Sans JP"/>
               </a:rPr>
-              <a:t> だが ③「保守」は稼働中ずっと、毎年続く。</a:t>
-            </a:r>
-            <a:r>
-              <a:rPr sz="1150" b="1">
-                <a:solidFill>
-                  <a:srgbClr val="1A1D21"/>
+              <a:t>材（機器・材料）</a:t>
+            </a:r>
+            <a:r>
+              <a:rPr sz="1050" b="0">
+                <a:solidFill>
+                  <a:srgbClr val="3C4148"/>
                 </a:solidFill>
                 <a:latin typeface="Noto Sans JP"/>
                 <a:ea typeface="Noto Sans JP"/>
               </a:rPr>
-              <a:t> → 一度つかんだ現場が、長く残る。</a:t>
-            </a:r>
-          </a:p>
-        </p:txBody>
-      </p:sp>
-      <p:sp>
-        <p:nvSpPr>
-          <p:cNvPr id="38" name="Rounded Rectangle 37"/>
+              <a:t> と </a:t>
+            </a:r>
+            <a:r>
+              <a:rPr sz="1050" b="1">
+                <a:solidFill>
+                  <a:srgbClr val="E60012"/>
+                </a:solidFill>
+                <a:latin typeface="Noto Sans JP"/>
+                <a:ea typeface="Noto Sans JP"/>
+              </a:rPr>
+              <a:t>工（据付・施工＝人が動く）</a:t>
+            </a:r>
+            <a:r>
+              <a:rPr sz="1050" b="1">
+                <a:solidFill>
+                  <a:srgbClr val="3C4148"/>
+                </a:solidFill>
+                <a:latin typeface="Noto Sans JP"/>
+                <a:ea typeface="Noto Sans JP"/>
+              </a:rPr>
+              <a:t> に分けると</a:t>
+            </a:r>
+          </a:p>
+        </p:txBody>
+      </p:sp>
+      <p:sp>
+        <p:nvSpPr>
+          <p:cNvPr id="21" name="Rectangle 20"/>
           <p:cNvSpPr/>
           <p:nvPr/>
         </p:nvSpPr>
         <p:spPr>
           <a:xfrm>
-            <a:off x="777240" y="4956048"/>
-            <a:ext cx="10634472" cy="804672"/>
+            <a:off x="777240" y="2999232"/>
+            <a:ext cx="6380683" cy="749808"/>
+          </a:xfrm>
+          <a:prstGeom prst="rect">
+            <a:avLst/>
+          </a:prstGeom>
+          <a:solidFill>
+            <a:srgbClr val="8A9098"/>
+          </a:solidFill>
+          <a:ln>
+            <a:noFill/>
+          </a:ln>
+          <a:effectLst/>
+        </p:spPr>
+        <p:style>
+          <a:lnRef idx="1">
+            <a:schemeClr val="accent1"/>
+          </a:lnRef>
+          <a:fillRef idx="3">
+            <a:schemeClr val="accent1"/>
+          </a:fillRef>
+          <a:effectRef idx="2">
+            <a:schemeClr val="accent1"/>
+          </a:effectRef>
+          <a:fontRef idx="minor">
+            <a:schemeClr val="lt1"/>
+          </a:fontRef>
+        </p:style>
+        <p:txBody>
+          <a:bodyPr rtlCol="0" anchor="ctr"/>
+          <a:lstStyle/>
+          <a:p>
+            <a:pPr algn="ctr"/>
+          </a:p>
+        </p:txBody>
+      </p:sp>
+      <p:sp>
+        <p:nvSpPr>
+          <p:cNvPr id="22" name="Rectangle 21"/>
+          <p:cNvSpPr/>
+          <p:nvPr/>
+        </p:nvSpPr>
+        <p:spPr>
+          <a:xfrm>
+            <a:off x="7157923" y="2999232"/>
+            <a:ext cx="4253788" cy="749808"/>
+          </a:xfrm>
+          <a:prstGeom prst="rect">
+            <a:avLst/>
+          </a:prstGeom>
+          <a:solidFill>
+            <a:srgbClr val="E60012"/>
+          </a:solidFill>
+          <a:ln>
+            <a:noFill/>
+          </a:ln>
+          <a:effectLst/>
+        </p:spPr>
+        <p:style>
+          <a:lnRef idx="1">
+            <a:schemeClr val="accent1"/>
+          </a:lnRef>
+          <a:fillRef idx="3">
+            <a:schemeClr val="accent1"/>
+          </a:fillRef>
+          <a:effectRef idx="2">
+            <a:schemeClr val="accent1"/>
+          </a:effectRef>
+          <a:fontRef idx="minor">
+            <a:schemeClr val="lt1"/>
+          </a:fontRef>
+        </p:style>
+        <p:txBody>
+          <a:bodyPr rtlCol="0" anchor="ctr"/>
+          <a:lstStyle/>
+          <a:p>
+            <a:pPr algn="ctr"/>
+          </a:p>
+        </p:txBody>
+      </p:sp>
+      <p:sp>
+        <p:nvSpPr>
+          <p:cNvPr id="23" name="Rectangle 22"/>
+          <p:cNvSpPr/>
+          <p:nvPr/>
+        </p:nvSpPr>
+        <p:spPr>
+          <a:xfrm>
+            <a:off x="7146950" y="2999232"/>
+            <a:ext cx="21945" cy="749808"/>
+          </a:xfrm>
+          <a:prstGeom prst="rect">
+            <a:avLst/>
+          </a:prstGeom>
+          <a:solidFill>
+            <a:srgbClr val="FFFFFF"/>
+          </a:solidFill>
+          <a:ln>
+            <a:noFill/>
+          </a:ln>
+          <a:effectLst/>
+        </p:spPr>
+        <p:style>
+          <a:lnRef idx="1">
+            <a:schemeClr val="accent1"/>
+          </a:lnRef>
+          <a:fillRef idx="3">
+            <a:schemeClr val="accent1"/>
+          </a:fillRef>
+          <a:effectRef idx="2">
+            <a:schemeClr val="accent1"/>
+          </a:effectRef>
+          <a:fontRef idx="minor">
+            <a:schemeClr val="lt1"/>
+          </a:fontRef>
+        </p:style>
+        <p:txBody>
+          <a:bodyPr rtlCol="0" anchor="ctr"/>
+          <a:lstStyle/>
+          <a:p>
+            <a:pPr algn="ctr"/>
+          </a:p>
+        </p:txBody>
+      </p:sp>
+      <p:sp>
+        <p:nvSpPr>
+          <p:cNvPr id="24" name="TextBox 23"/>
+          <p:cNvSpPr txBox="1"/>
+          <p:nvPr/>
+        </p:nvSpPr>
+        <p:spPr>
+          <a:xfrm>
+            <a:off x="777240" y="2999232"/>
+            <a:ext cx="6380683" cy="749808"/>
+          </a:xfrm>
+          <a:prstGeom prst="rect">
+            <a:avLst/>
+          </a:prstGeom>
+          <a:noFill/>
+        </p:spPr>
+        <p:txBody>
+          <a:bodyPr wrap="square" anchor="ctr" lIns="0" rIns="0" tIns="0" bIns="0">
+            <a:spAutoFit/>
+          </a:bodyPr>
+          <a:lstStyle/>
+          <a:p>
+            <a:pPr algn="ctr">
+              <a:lnSpc>
+                <a:spcPct val="106000"/>
+              </a:lnSpc>
+              <a:spcBef>
+                <a:spcPts val="0"/>
+              </a:spcBef>
+              <a:spcAft>
+                <a:spcPts val="400"/>
+              </a:spcAft>
+            </a:pPr>
+            <a:r>
+              <a:rPr sz="1100" b="1">
+                <a:solidFill>
+                  <a:srgbClr val="FFFFFF"/>
+                </a:solidFill>
+                <a:latin typeface="Noto Sans JP"/>
+                <a:ea typeface="Noto Sans JP"/>
+              </a:rPr>
+              <a:t>材：機器・材料（変圧器・冷凍機・UPS等）  約6割</a:t>
+            </a:r>
+          </a:p>
+        </p:txBody>
+      </p:sp>
+      <p:sp>
+        <p:nvSpPr>
+          <p:cNvPr id="25" name="TextBox 24"/>
+          <p:cNvSpPr txBox="1"/>
+          <p:nvPr/>
+        </p:nvSpPr>
+        <p:spPr>
+          <a:xfrm>
+            <a:off x="7157923" y="2999232"/>
+            <a:ext cx="4253788" cy="749808"/>
+          </a:xfrm>
+          <a:prstGeom prst="rect">
+            <a:avLst/>
+          </a:prstGeom>
+          <a:noFill/>
+        </p:spPr>
+        <p:txBody>
+          <a:bodyPr wrap="square" anchor="ctr" lIns="0" rIns="0" tIns="0" bIns="0">
+            <a:spAutoFit/>
+          </a:bodyPr>
+          <a:lstStyle/>
+          <a:p>
+            <a:pPr algn="ctr">
+              <a:lnSpc>
+                <a:spcPct val="106000"/>
+              </a:lnSpc>
+              <a:spcBef>
+                <a:spcPts val="0"/>
+              </a:spcBef>
+              <a:spcAft>
+                <a:spcPts val="400"/>
+              </a:spcAft>
+            </a:pPr>
+            <a:r>
+              <a:rPr sz="1100" b="1">
+                <a:solidFill>
+                  <a:srgbClr val="FFFFFF"/>
+                </a:solidFill>
+                <a:latin typeface="Noto Sans JP"/>
+                <a:ea typeface="Noto Sans JP"/>
+              </a:rPr>
+              <a:t>工：据付・施工  約4割</a:t>
+            </a:r>
+          </a:p>
+        </p:txBody>
+      </p:sp>
+      <p:sp>
+        <p:nvSpPr>
+          <p:cNvPr id="26" name="TextBox 25"/>
+          <p:cNvSpPr txBox="1"/>
+          <p:nvPr/>
+        </p:nvSpPr>
+        <p:spPr>
+          <a:xfrm>
+            <a:off x="7157923" y="3767327"/>
+            <a:ext cx="4253788" cy="201168"/>
+          </a:xfrm>
+          <a:prstGeom prst="rect">
+            <a:avLst/>
+          </a:prstGeom>
+          <a:noFill/>
+        </p:spPr>
+        <p:txBody>
+          <a:bodyPr wrap="square" anchor="t" lIns="0" rIns="0" tIns="0" bIns="0">
+            <a:spAutoFit/>
+          </a:bodyPr>
+          <a:lstStyle/>
+          <a:p>
+            <a:pPr algn="ctr">
+              <a:lnSpc>
+                <a:spcPct val="106000"/>
+              </a:lnSpc>
+              <a:spcBef>
+                <a:spcPts val="0"/>
+              </a:spcBef>
+              <a:spcAft>
+                <a:spcPts val="400"/>
+              </a:spcAft>
+            </a:pPr>
+            <a:r>
+              <a:rPr sz="900" b="1">
+                <a:solidFill>
+                  <a:srgbClr val="E60012"/>
+                </a:solidFill>
+                <a:latin typeface="Consolas"/>
+                <a:ea typeface="Consolas"/>
+              </a:rPr>
+              <a:t>↑ ここがANDPADの市場（工）</a:t>
+            </a:r>
+          </a:p>
+        </p:txBody>
+      </p:sp>
+      <p:sp>
+        <p:nvSpPr>
+          <p:cNvPr id="27" name="Rounded Rectangle 26"/>
+          <p:cNvSpPr/>
+          <p:nvPr/>
+        </p:nvSpPr>
+        <p:spPr>
+          <a:xfrm>
+            <a:off x="777240" y="4160520"/>
+            <a:ext cx="3422904" cy="749808"/>
+          </a:xfrm>
+          <a:prstGeom prst="roundRect">
+            <a:avLst>
+              <a:gd name="adj" fmla="val 6000"/>
+            </a:avLst>
+          </a:prstGeom>
+          <a:solidFill>
+            <a:srgbClr val="FFFFFF"/>
+          </a:solidFill>
+          <a:ln w="15240">
+            <a:solidFill>
+              <a:srgbClr val="F3C7CD"/>
+            </a:solidFill>
+          </a:ln>
+          <a:effectLst/>
+        </p:spPr>
+        <p:style>
+          <a:lnRef idx="1">
+            <a:schemeClr val="accent1"/>
+          </a:lnRef>
+          <a:fillRef idx="3">
+            <a:schemeClr val="accent1"/>
+          </a:fillRef>
+          <a:effectRef idx="2">
+            <a:schemeClr val="accent1"/>
+          </a:effectRef>
+          <a:fontRef idx="minor">
+            <a:schemeClr val="lt1"/>
+          </a:fontRef>
+        </p:style>
+        <p:txBody>
+          <a:bodyPr rtlCol="0" anchor="ctr"/>
+          <a:lstStyle/>
+          <a:p>
+            <a:pPr algn="ctr"/>
+          </a:p>
+        </p:txBody>
+      </p:sp>
+      <p:sp>
+        <p:nvSpPr>
+          <p:cNvPr id="28" name="Rectangle 27"/>
+          <p:cNvSpPr/>
+          <p:nvPr/>
+        </p:nvSpPr>
+        <p:spPr>
+          <a:xfrm>
+            <a:off x="777240" y="4160520"/>
+            <a:ext cx="82296" cy="749808"/>
+          </a:xfrm>
+          <a:prstGeom prst="rect">
+            <a:avLst/>
+          </a:prstGeom>
+          <a:solidFill>
+            <a:srgbClr val="E60012"/>
+          </a:solidFill>
+          <a:ln>
+            <a:noFill/>
+          </a:ln>
+          <a:effectLst/>
+        </p:spPr>
+        <p:style>
+          <a:lnRef idx="1">
+            <a:schemeClr val="accent1"/>
+          </a:lnRef>
+          <a:fillRef idx="3">
+            <a:schemeClr val="accent1"/>
+          </a:fillRef>
+          <a:effectRef idx="2">
+            <a:schemeClr val="accent1"/>
+          </a:effectRef>
+          <a:fontRef idx="minor">
+            <a:schemeClr val="lt1"/>
+          </a:fontRef>
+        </p:style>
+        <p:txBody>
+          <a:bodyPr rtlCol="0" anchor="ctr"/>
+          <a:lstStyle/>
+          <a:p>
+            <a:pPr algn="ctr"/>
+          </a:p>
+        </p:txBody>
+      </p:sp>
+      <p:sp>
+        <p:nvSpPr>
+          <p:cNvPr id="29" name="TextBox 28"/>
+          <p:cNvSpPr txBox="1"/>
+          <p:nvPr/>
+        </p:nvSpPr>
+        <p:spPr>
+          <a:xfrm>
+            <a:off x="978408" y="4270248"/>
+            <a:ext cx="3112008" cy="566928"/>
+          </a:xfrm>
+          <a:prstGeom prst="rect">
+            <a:avLst/>
+          </a:prstGeom>
+          <a:noFill/>
+        </p:spPr>
+        <p:txBody>
+          <a:bodyPr wrap="square" anchor="t" lIns="0" rIns="0" tIns="0" bIns="0">
+            <a:spAutoFit/>
+          </a:bodyPr>
+          <a:lstStyle/>
+          <a:p>
+            <a:pPr algn="l">
+              <a:lnSpc>
+                <a:spcPct val="112000"/>
+              </a:lnSpc>
+              <a:spcBef>
+                <a:spcPts val="0"/>
+              </a:spcBef>
+              <a:spcAft>
+                <a:spcPts val="200"/>
+              </a:spcAft>
+            </a:pPr>
+            <a:r>
+              <a:rPr sz="1150" b="1">
+                <a:solidFill>
+                  <a:srgbClr val="1A1D21"/>
+                </a:solidFill>
+                <a:latin typeface="Noto Sans JP"/>
+                <a:ea typeface="Noto Sans JP"/>
+              </a:rPr>
+              <a:t>据付・施工</a:t>
+            </a:r>
+            <a:r>
+              <a:rPr sz="1000" b="1">
+                <a:solidFill>
+                  <a:srgbClr val="E60012"/>
+                </a:solidFill>
+                <a:latin typeface="Noto Sans JP"/>
+                <a:ea typeface="Noto Sans JP"/>
+              </a:rPr>
+              <a:t>　建設費の約3割</a:t>
+            </a:r>
+          </a:p>
+          <a:p>
+            <a:pPr algn="l">
+              <a:lnSpc>
+                <a:spcPct val="112000"/>
+              </a:lnSpc>
+              <a:spcBef>
+                <a:spcPts val="0"/>
+              </a:spcBef>
+              <a:spcAft>
+                <a:spcPts val="200"/>
+              </a:spcAft>
+            </a:pPr>
+            <a:r>
+              <a:rPr sz="950" b="0">
+                <a:solidFill>
+                  <a:srgbClr val="3C4148"/>
+                </a:solidFill>
+                <a:latin typeface="Noto Sans JP"/>
+                <a:ea typeface="Noto Sans JP"/>
+              </a:rPr>
+              <a:t>国内の設備工事＝中核</a:t>
+            </a:r>
+          </a:p>
+        </p:txBody>
+      </p:sp>
+      <p:sp>
+        <p:nvSpPr>
+          <p:cNvPr id="30" name="Rounded Rectangle 29"/>
+          <p:cNvSpPr/>
+          <p:nvPr/>
+        </p:nvSpPr>
+        <p:spPr>
+          <a:xfrm>
+            <a:off x="4383024" y="4160520"/>
+            <a:ext cx="3422904" cy="749808"/>
+          </a:xfrm>
+          <a:prstGeom prst="roundRect">
+            <a:avLst>
+              <a:gd name="adj" fmla="val 6000"/>
+            </a:avLst>
+          </a:prstGeom>
+          <a:solidFill>
+            <a:srgbClr val="FFFFFF"/>
+          </a:solidFill>
+          <a:ln w="15240">
+            <a:solidFill>
+              <a:srgbClr val="F3C7CD"/>
+            </a:solidFill>
+          </a:ln>
+          <a:effectLst/>
+        </p:spPr>
+        <p:style>
+          <a:lnRef idx="1">
+            <a:schemeClr val="accent1"/>
+          </a:lnRef>
+          <a:fillRef idx="3">
+            <a:schemeClr val="accent1"/>
+          </a:fillRef>
+          <a:effectRef idx="2">
+            <a:schemeClr val="accent1"/>
+          </a:effectRef>
+          <a:fontRef idx="minor">
+            <a:schemeClr val="lt1"/>
+          </a:fontRef>
+        </p:style>
+        <p:txBody>
+          <a:bodyPr rtlCol="0" anchor="ctr"/>
+          <a:lstStyle/>
+          <a:p>
+            <a:pPr algn="ctr"/>
+          </a:p>
+        </p:txBody>
+      </p:sp>
+      <p:sp>
+        <p:nvSpPr>
+          <p:cNvPr id="31" name="Rectangle 30"/>
+          <p:cNvSpPr/>
+          <p:nvPr/>
+        </p:nvSpPr>
+        <p:spPr>
+          <a:xfrm>
+            <a:off x="4383024" y="4160520"/>
+            <a:ext cx="82296" cy="749808"/>
+          </a:xfrm>
+          <a:prstGeom prst="rect">
+            <a:avLst/>
+          </a:prstGeom>
+          <a:solidFill>
+            <a:srgbClr val="E60012"/>
+          </a:solidFill>
+          <a:ln>
+            <a:noFill/>
+          </a:ln>
+          <a:effectLst/>
+        </p:spPr>
+        <p:style>
+          <a:lnRef idx="1">
+            <a:schemeClr val="accent1"/>
+          </a:lnRef>
+          <a:fillRef idx="3">
+            <a:schemeClr val="accent1"/>
+          </a:fillRef>
+          <a:effectRef idx="2">
+            <a:schemeClr val="accent1"/>
+          </a:effectRef>
+          <a:fontRef idx="minor">
+            <a:schemeClr val="lt1"/>
+          </a:fontRef>
+        </p:style>
+        <p:txBody>
+          <a:bodyPr rtlCol="0" anchor="ctr"/>
+          <a:lstStyle/>
+          <a:p>
+            <a:pPr algn="ctr"/>
+          </a:p>
+        </p:txBody>
+      </p:sp>
+      <p:sp>
+        <p:nvSpPr>
+          <p:cNvPr id="32" name="TextBox 31"/>
+          <p:cNvSpPr txBox="1"/>
+          <p:nvPr/>
+        </p:nvSpPr>
+        <p:spPr>
+          <a:xfrm>
+            <a:off x="4584192" y="4270248"/>
+            <a:ext cx="3112008" cy="566928"/>
+          </a:xfrm>
+          <a:prstGeom prst="rect">
+            <a:avLst/>
+          </a:prstGeom>
+          <a:noFill/>
+        </p:spPr>
+        <p:txBody>
+          <a:bodyPr wrap="square" anchor="t" lIns="0" rIns="0" tIns="0" bIns="0">
+            <a:spAutoFit/>
+          </a:bodyPr>
+          <a:lstStyle/>
+          <a:p>
+            <a:pPr algn="l">
+              <a:lnSpc>
+                <a:spcPct val="112000"/>
+              </a:lnSpc>
+              <a:spcBef>
+                <a:spcPts val="0"/>
+              </a:spcBef>
+              <a:spcAft>
+                <a:spcPts val="200"/>
+              </a:spcAft>
+            </a:pPr>
+            <a:r>
+              <a:rPr sz="1150" b="1">
+                <a:solidFill>
+                  <a:srgbClr val="1A1D21"/>
+                </a:solidFill>
+                <a:latin typeface="Noto Sans JP"/>
+                <a:ea typeface="Noto Sans JP"/>
+              </a:rPr>
+              <a:t>試運転</a:t>
+            </a:r>
+            <a:r>
+              <a:rPr sz="1000" b="1">
+                <a:solidFill>
+                  <a:srgbClr val="E60012"/>
+                </a:solidFill>
+                <a:latin typeface="Noto Sans JP"/>
+                <a:ea typeface="Noto Sans JP"/>
+              </a:rPr>
+              <a:t>　建設費の1〜3%</a:t>
+            </a:r>
+          </a:p>
+          <a:p>
+            <a:pPr algn="l">
+              <a:lnSpc>
+                <a:spcPct val="112000"/>
+              </a:lnSpc>
+              <a:spcBef>
+                <a:spcPts val="0"/>
+              </a:spcBef>
+              <a:spcAft>
+                <a:spcPts val="200"/>
+              </a:spcAft>
+            </a:pPr>
+            <a:r>
+              <a:rPr sz="950" b="0">
+                <a:solidFill>
+                  <a:srgbClr val="3C4148"/>
+                </a:solidFill>
+                <a:latin typeface="Noto Sans JP"/>
+                <a:ea typeface="Noto Sans JP"/>
+              </a:rPr>
+              <a:t>世界 $2.1B→$4.3B</a:t>
+            </a:r>
+          </a:p>
+        </p:txBody>
+      </p:sp>
+      <p:sp>
+        <p:nvSpPr>
+          <p:cNvPr id="33" name="Rounded Rectangle 32"/>
+          <p:cNvSpPr/>
+          <p:nvPr/>
+        </p:nvSpPr>
+        <p:spPr>
+          <a:xfrm>
+            <a:off x="7988808" y="4160520"/>
+            <a:ext cx="3422904" cy="749808"/>
+          </a:xfrm>
+          <a:prstGeom prst="roundRect">
+            <a:avLst>
+              <a:gd name="adj" fmla="val 6000"/>
+            </a:avLst>
+          </a:prstGeom>
+          <a:solidFill>
+            <a:srgbClr val="FFFFFF"/>
+          </a:solidFill>
+          <a:ln w="15240">
+            <a:solidFill>
+              <a:srgbClr val="F3C7CD"/>
+            </a:solidFill>
+          </a:ln>
+          <a:effectLst/>
+        </p:spPr>
+        <p:style>
+          <a:lnRef idx="1">
+            <a:schemeClr val="accent1"/>
+          </a:lnRef>
+          <a:fillRef idx="3">
+            <a:schemeClr val="accent1"/>
+          </a:fillRef>
+          <a:effectRef idx="2">
+            <a:schemeClr val="accent1"/>
+          </a:effectRef>
+          <a:fontRef idx="minor">
+            <a:schemeClr val="lt1"/>
+          </a:fontRef>
+        </p:style>
+        <p:txBody>
+          <a:bodyPr rtlCol="0" anchor="ctr"/>
+          <a:lstStyle/>
+          <a:p>
+            <a:pPr algn="ctr"/>
+          </a:p>
+        </p:txBody>
+      </p:sp>
+      <p:sp>
+        <p:nvSpPr>
+          <p:cNvPr id="34" name="Rectangle 33"/>
+          <p:cNvSpPr/>
+          <p:nvPr/>
+        </p:nvSpPr>
+        <p:spPr>
+          <a:xfrm>
+            <a:off x="7988808" y="4160520"/>
+            <a:ext cx="82296" cy="749808"/>
+          </a:xfrm>
+          <a:prstGeom prst="rect">
+            <a:avLst/>
+          </a:prstGeom>
+          <a:solidFill>
+            <a:srgbClr val="E60012"/>
+          </a:solidFill>
+          <a:ln>
+            <a:noFill/>
+          </a:ln>
+          <a:effectLst/>
+        </p:spPr>
+        <p:style>
+          <a:lnRef idx="1">
+            <a:schemeClr val="accent1"/>
+          </a:lnRef>
+          <a:fillRef idx="3">
+            <a:schemeClr val="accent1"/>
+          </a:fillRef>
+          <a:effectRef idx="2">
+            <a:schemeClr val="accent1"/>
+          </a:effectRef>
+          <a:fontRef idx="minor">
+            <a:schemeClr val="lt1"/>
+          </a:fontRef>
+        </p:style>
+        <p:txBody>
+          <a:bodyPr rtlCol="0" anchor="ctr"/>
+          <a:lstStyle/>
+          <a:p>
+            <a:pPr algn="ctr"/>
+          </a:p>
+        </p:txBody>
+      </p:sp>
+      <p:sp>
+        <p:nvSpPr>
+          <p:cNvPr id="35" name="TextBox 34"/>
+          <p:cNvSpPr txBox="1"/>
+          <p:nvPr/>
+        </p:nvSpPr>
+        <p:spPr>
+          <a:xfrm>
+            <a:off x="8189976" y="4270248"/>
+            <a:ext cx="3112008" cy="566928"/>
+          </a:xfrm>
+          <a:prstGeom prst="rect">
+            <a:avLst/>
+          </a:prstGeom>
+          <a:noFill/>
+        </p:spPr>
+        <p:txBody>
+          <a:bodyPr wrap="square" anchor="t" lIns="0" rIns="0" tIns="0" bIns="0">
+            <a:spAutoFit/>
+          </a:bodyPr>
+          <a:lstStyle/>
+          <a:p>
+            <a:pPr algn="l">
+              <a:lnSpc>
+                <a:spcPct val="112000"/>
+              </a:lnSpc>
+              <a:spcBef>
+                <a:spcPts val="0"/>
+              </a:spcBef>
+              <a:spcAft>
+                <a:spcPts val="200"/>
+              </a:spcAft>
+            </a:pPr>
+            <a:r>
+              <a:rPr sz="1150" b="1">
+                <a:solidFill>
+                  <a:srgbClr val="1A1D21"/>
+                </a:solidFill>
+                <a:latin typeface="Noto Sans JP"/>
+                <a:ea typeface="Noto Sans JP"/>
+              </a:rPr>
+              <a:t>保守・運用</a:t>
+            </a:r>
+            <a:r>
+              <a:rPr sz="1000" b="1">
+                <a:solidFill>
+                  <a:srgbClr val="E60012"/>
+                </a:solidFill>
+                <a:latin typeface="Noto Sans JP"/>
+                <a:ea typeface="Noto Sans JP"/>
+              </a:rPr>
+              <a:t>　毎年・運用費の約4割</a:t>
+            </a:r>
+          </a:p>
+          <a:p>
+            <a:pPr algn="l">
+              <a:lnSpc>
+                <a:spcPct val="112000"/>
+              </a:lnSpc>
+              <a:spcBef>
+                <a:spcPts val="0"/>
+              </a:spcBef>
+              <a:spcAft>
+                <a:spcPts val="200"/>
+              </a:spcAft>
+            </a:pPr>
+            <a:r>
+              <a:rPr sz="950" b="0">
+                <a:solidFill>
+                  <a:srgbClr val="3C4148"/>
+                </a:solidFill>
+                <a:latin typeface="Noto Sans JP"/>
+                <a:ea typeface="Noto Sans JP"/>
+              </a:rPr>
+              <a:t>世界 $15.8B→$45.6B</a:t>
+            </a:r>
+          </a:p>
+        </p:txBody>
+      </p:sp>
+      <p:sp>
+        <p:nvSpPr>
+          <p:cNvPr id="36" name="Rounded Rectangle 35"/>
+          <p:cNvSpPr/>
+          <p:nvPr/>
+        </p:nvSpPr>
+        <p:spPr>
+          <a:xfrm>
+            <a:off x="777240" y="5138928"/>
+            <a:ext cx="10634472" cy="749808"/>
           </a:xfrm>
           <a:prstGeom prst="roundRect">
             <a:avLst>
@@ -9990,14 +12190,14 @@
       </p:sp>
       <p:sp>
         <p:nvSpPr>
-          <p:cNvPr id="39" name="TextBox 38"/>
+          <p:cNvPr id="37" name="TextBox 36"/>
           <p:cNvSpPr txBox="1"/>
           <p:nvPr/>
         </p:nvSpPr>
         <p:spPr>
           <a:xfrm>
-            <a:off x="1051560" y="4956048"/>
-            <a:ext cx="10058400" cy="804672"/>
+            <a:off x="1051560" y="5138928"/>
+            <a:ext cx="10058400" cy="749808"/>
           </a:xfrm>
           <a:prstGeom prst="rect">
             <a:avLst/>
@@ -10029,7 +12229,7 @@
                 <a:latin typeface="Noto Sans JP"/>
                 <a:ea typeface="Noto Sans JP"/>
               </a:rPr>
-              <a:t>これまで建設業だけを相手にしてきた。</a:t>
+              <a:t>これまで建設業だけを見てきた。</a:t>
             </a:r>
             <a:r>
               <a:rPr sz="1500" b="1">
@@ -10039,21 +12239,21 @@
                 <a:latin typeface="Noto Sans JP"/>
                 <a:ea typeface="Noto Sans JP"/>
               </a:rPr>
-              <a:t>その周辺に、据付＋試運転＋保守という“人が動く”広大な市場がある。</a:t>
-            </a:r>
-          </a:p>
-        </p:txBody>
-      </p:sp>
-      <p:sp>
-        <p:nvSpPr>
-          <p:cNvPr id="40" name="TextBox 39"/>
+              <a:t>その周辺の“工”（据付・試運転・保守）に、広大な市場が広がっている。</a:t>
+            </a:r>
+          </a:p>
+        </p:txBody>
+      </p:sp>
+      <p:sp>
+        <p:nvSpPr>
+          <p:cNvPr id="38" name="TextBox 37"/>
           <p:cNvSpPr txBox="1"/>
           <p:nvPr/>
         </p:nvSpPr>
         <p:spPr>
           <a:xfrm>
-            <a:off x="822960" y="5870448"/>
-            <a:ext cx="10515600" cy="320040"/>
+            <a:off x="822960" y="5943600"/>
+            <a:ext cx="10515600" cy="256032"/>
           </a:xfrm>
           <a:prstGeom prst="rect">
             <a:avLst/>
@@ -10085,7 +12285,7 @@
                 <a:latin typeface="Consolas"/>
                 <a:ea typeface="Consolas"/>
               </a:rPr>
-              <a:t>出典：試運転＝建設費1〜3%（業界目安）・DC試運転市場 DataIntelo／DC運用保守市場 DataHorizon／保守は運用費の約4割 Thunder Said Energy。</a:t>
+              <a:t>出典：日経xTECH（設備工事≒建設費の75%）／材工比・試運転1〜3%は積算/業界目安／市場：DataIntelo・DataHorizon。</a:t>
             </a:r>
           </a:p>
         </p:txBody>
@@ -10285,7 +12485,7 @@
                 <a:latin typeface="Consolas"/>
                 <a:ea typeface="Consolas"/>
               </a:rPr>
-              <a:t>AI需要は、バリューチェーンのどこに効くのか（国内主要プレーヤー）</a:t>
+              <a:t>バリューチェーン別・国内主要プレーヤーと伸び</a:t>
             </a:r>
           </a:p>
         </p:txBody>
@@ -13355,7 +15555,7 @@
                 <a:latin typeface="Noto Sans JP"/>
                 <a:ea typeface="Noto Sans JP"/>
               </a:rPr>
-              <a:t>国家予算級のAIマネーが国内に流入。受注残・設備投資計画に裏打ちされた構造需要。</a:t>
+              <a:t>AIチップ需要は3年で約13倍、投資ピークは2027-28。受注残に裏打ちされた構造需要。</a:t>
             </a:r>
           </a:p>
         </p:txBody>

--- a/output/andpad_soukai_ai_deck.pptx
+++ b/output/andpad_soukai_ai_deck.pptx
@@ -3873,7 +3873,7 @@
                 <a:latin typeface="Consolas"/>
                 <a:ea typeface="Consolas"/>
               </a:rPr>
-              <a:t>なぜ、いま製造業がアツいのか</a:t>
+              <a:t>世界のメガトレンドと、その“共通の土台”</a:t>
             </a:r>
           </a:p>
         </p:txBody>
@@ -3919,7 +3919,7 @@
                 <a:latin typeface="Noto Sans JP"/>
                 <a:ea typeface="Noto Sans JP"/>
               </a:rPr>
-              <a:t>AIブームは“クラウドの話”ではない。電気と鉄と現場の話だ。</a:t>
+              <a:t>世界が動く先には、必ず「設備」がいる。その主役は、製造業だ。</a:t>
             </a:r>
           </a:p>
         </p:txBody>
@@ -3976,8 +3976,8 @@
         </p:nvSpPr>
         <p:spPr>
           <a:xfrm>
-            <a:off x="777240" y="1481328"/>
-            <a:ext cx="3429000" cy="1783080"/>
+            <a:off x="777240" y="1417320"/>
+            <a:ext cx="3429000" cy="1965960"/>
           </a:xfrm>
           <a:prstGeom prst="roundRect">
             <a:avLst>
@@ -3987,7 +3987,7 @@
           <a:solidFill>
             <a:srgbClr val="FFFFFF"/>
           </a:solidFill>
-          <a:ln w="15240">
+          <a:ln w="20320">
             <a:solidFill>
               <a:srgbClr val="F3C7CD"/>
             </a:solidFill>
@@ -4024,8 +4024,8 @@
         </p:nvSpPr>
         <p:spPr>
           <a:xfrm>
-            <a:off x="777240" y="1481328"/>
-            <a:ext cx="3429000" cy="91440"/>
+            <a:off x="777240" y="1417320"/>
+            <a:ext cx="3429000" cy="512064"/>
           </a:xfrm>
           <a:prstGeom prst="roundRect">
             <a:avLst>
@@ -4070,8 +4070,8 @@
         </p:nvSpPr>
         <p:spPr>
           <a:xfrm>
-            <a:off x="1033271" y="1737360"/>
-            <a:ext cx="2916936" cy="1417319"/>
+            <a:off x="978408" y="1417320"/>
+            <a:ext cx="3063240" cy="512064"/>
           </a:xfrm>
           <a:prstGeom prst="rect">
             <a:avLst/>
@@ -4079,150 +4079,56 @@
           <a:noFill/>
         </p:spPr>
         <p:txBody>
-          <a:bodyPr wrap="square" anchor="t" lIns="0" rIns="0" tIns="0" bIns="0">
+          <a:bodyPr wrap="square" anchor="ctr" lIns="0" rIns="0" tIns="0" bIns="0">
             <a:spAutoFit/>
           </a:bodyPr>
           <a:lstStyle/>
           <a:p>
             <a:pPr algn="l">
               <a:lnSpc>
-                <a:spcPct val="116000"/>
-              </a:lnSpc>
-              <a:spcBef>
-                <a:spcPts val="0"/>
-              </a:spcBef>
-              <a:spcAft>
-                <a:spcPts val="700"/>
-              </a:spcAft>
-            </a:pPr>
-            <a:r>
-              <a:rPr sz="1050" b="1" spc="100">
-                <a:solidFill>
-                  <a:srgbClr val="E60012"/>
-                </a:solidFill>
-                <a:latin typeface="Consolas"/>
-                <a:ea typeface="Consolas"/>
-              </a:rPr>
-              <a:t>きっかけ</a:t>
-            </a:r>
-          </a:p>
-          <a:p>
-            <a:pPr algn="l">
-              <a:lnSpc>
-                <a:spcPct val="116000"/>
-              </a:lnSpc>
-              <a:spcBef>
-                <a:spcPts val="0"/>
-              </a:spcBef>
-              <a:spcAft>
-                <a:spcPts val="700"/>
-              </a:spcAft>
-            </a:pPr>
-            <a:r>
-              <a:rPr sz="1600" b="1">
-                <a:solidFill>
-                  <a:srgbClr val="1A1D21"/>
+                <a:spcPct val="106000"/>
+              </a:lnSpc>
+              <a:spcBef>
+                <a:spcPts val="0"/>
+              </a:spcBef>
+              <a:spcAft>
+                <a:spcPts val="400"/>
+              </a:spcAft>
+            </a:pPr>
+            <a:r>
+              <a:rPr sz="1450" b="1">
+                <a:solidFill>
+                  <a:srgbClr val="FFFFFF"/>
                 </a:solidFill>
                 <a:latin typeface="Noto Sans JP"/>
                 <a:ea typeface="Noto Sans JP"/>
               </a:rPr>
-              <a:t>AIは“電気と設備の塊”</a:t>
-            </a:r>
-          </a:p>
-          <a:p>
-            <a:pPr algn="l">
-              <a:lnSpc>
-                <a:spcPct val="116000"/>
-              </a:lnSpc>
-              <a:spcBef>
-                <a:spcPts val="0"/>
-              </a:spcBef>
-              <a:spcAft>
-                <a:spcPts val="700"/>
-              </a:spcAft>
-            </a:pPr>
-            <a:r>
-              <a:rPr sz="1150" b="0">
-                <a:solidFill>
-                  <a:srgbClr val="3C4148"/>
-                </a:solidFill>
-                <a:latin typeface="Noto Sans JP"/>
-                <a:ea typeface="Noto Sans JP"/>
-              </a:rPr>
-              <a:t>DC（データセンター）1棟で数万世帯分の電力。膨大な発電・変圧器・冷却・半導体が要る。</a:t>
-            </a:r>
-          </a:p>
-        </p:txBody>
-      </p:sp>
-      <p:sp>
-        <p:nvSpPr>
-          <p:cNvPr id="11" name="TextBox 10"/>
-          <p:cNvSpPr txBox="1"/>
-          <p:nvPr/>
-        </p:nvSpPr>
-        <p:spPr>
-          <a:xfrm>
-            <a:off x="4178807" y="1984248"/>
-            <a:ext cx="329184" cy="548640"/>
-          </a:xfrm>
-          <a:prstGeom prst="rect">
-            <a:avLst/>
-          </a:prstGeom>
-          <a:noFill/>
-        </p:spPr>
-        <p:txBody>
-          <a:bodyPr wrap="square" anchor="t" lIns="0" rIns="0" tIns="0" bIns="0">
-            <a:spAutoFit/>
-          </a:bodyPr>
-          <a:lstStyle/>
-          <a:p>
-            <a:pPr algn="ctr">
-              <a:lnSpc>
-                <a:spcPct val="106000"/>
-              </a:lnSpc>
-              <a:spcBef>
-                <a:spcPts val="0"/>
-              </a:spcBef>
-              <a:spcAft>
-                <a:spcPts val="400"/>
-              </a:spcAft>
-            </a:pPr>
-            <a:r>
-              <a:rPr sz="2200" b="1">
-                <a:solidFill>
-                  <a:srgbClr val="E60012"/>
-                </a:solidFill>
-                <a:latin typeface="Consolas"/>
-                <a:ea typeface="Consolas"/>
-              </a:rPr>
-              <a:t>→</a:t>
-            </a:r>
-          </a:p>
-        </p:txBody>
-      </p:sp>
-      <p:sp>
-        <p:nvSpPr>
-          <p:cNvPr id="12" name="Rounded Rectangle 11"/>
+              <a:t>① AI</a:t>
+            </a:r>
+          </a:p>
+        </p:txBody>
+      </p:sp>
+      <p:sp>
+        <p:nvSpPr>
+          <p:cNvPr id="11" name="Rounded Rectangle 10"/>
           <p:cNvSpPr/>
           <p:nvPr/>
         </p:nvSpPr>
         <p:spPr>
           <a:xfrm>
-            <a:off x="4480559" y="1481328"/>
-            <a:ext cx="3429000" cy="1783080"/>
+            <a:off x="2907791" y="1549908"/>
+            <a:ext cx="1133856" cy="246888"/>
           </a:xfrm>
           <a:prstGeom prst="roundRect">
             <a:avLst>
-              <a:gd name="adj" fmla="val 6000"/>
+              <a:gd name="adj" fmla="val 40000"/>
             </a:avLst>
           </a:prstGeom>
           <a:solidFill>
             <a:srgbClr val="FFFFFF"/>
           </a:solidFill>
-          <a:ln w="15240">
-            <a:solidFill>
-              <a:srgbClr val="F3C7CD"/>
-            </a:solidFill>
+          <a:ln>
+            <a:noFill/>
           </a:ln>
           <a:effectLst/>
         </p:spPr>
@@ -4250,14 +4156,200 @@
       </p:sp>
       <p:sp>
         <p:nvSpPr>
-          <p:cNvPr id="13" name="Rounded Rectangle 12"/>
+          <p:cNvPr id="12" name="TextBox 11"/>
+          <p:cNvSpPr txBox="1"/>
+          <p:nvPr/>
+        </p:nvSpPr>
+        <p:spPr>
+          <a:xfrm>
+            <a:off x="2907791" y="1549908"/>
+            <a:ext cx="1133856" cy="246888"/>
+          </a:xfrm>
+          <a:prstGeom prst="rect">
+            <a:avLst/>
+          </a:prstGeom>
+          <a:noFill/>
+        </p:spPr>
+        <p:txBody>
+          <a:bodyPr wrap="square" anchor="ctr" lIns="0" rIns="0" tIns="0" bIns="0">
+            <a:spAutoFit/>
+          </a:bodyPr>
+          <a:lstStyle/>
+          <a:p>
+            <a:pPr algn="ctr">
+              <a:lnSpc>
+                <a:spcPct val="106000"/>
+              </a:lnSpc>
+              <a:spcBef>
+                <a:spcPts val="0"/>
+              </a:spcBef>
+              <a:spcAft>
+                <a:spcPts val="400"/>
+              </a:spcAft>
+            </a:pPr>
+            <a:r>
+              <a:rPr sz="850" b="1">
+                <a:solidFill>
+                  <a:srgbClr val="E60012"/>
+                </a:solidFill>
+                <a:latin typeface="Consolas"/>
+                <a:ea typeface="Consolas"/>
+              </a:rPr>
+              <a:t>本日フォーカス</a:t>
+            </a:r>
+          </a:p>
+        </p:txBody>
+      </p:sp>
+      <p:sp>
+        <p:nvSpPr>
+          <p:cNvPr id="13" name="TextBox 12"/>
+          <p:cNvSpPr txBox="1"/>
+          <p:nvPr/>
+        </p:nvSpPr>
+        <p:spPr>
+          <a:xfrm>
+            <a:off x="996695" y="2093976"/>
+            <a:ext cx="2990088" cy="502920"/>
+          </a:xfrm>
+          <a:prstGeom prst="rect">
+            <a:avLst/>
+          </a:prstGeom>
+          <a:noFill/>
+        </p:spPr>
+        <p:txBody>
+          <a:bodyPr wrap="square" anchor="t" lIns="0" rIns="0" tIns="0" bIns="0">
+            <a:spAutoFit/>
+          </a:bodyPr>
+          <a:lstStyle/>
+          <a:p>
+            <a:pPr algn="l">
+              <a:lnSpc>
+                <a:spcPct val="114000"/>
+              </a:lnSpc>
+              <a:spcBef>
+                <a:spcPts val="0"/>
+              </a:spcBef>
+              <a:spcAft>
+                <a:spcPts val="400"/>
+              </a:spcAft>
+            </a:pPr>
+            <a:r>
+              <a:rPr sz="1350" b="1">
+                <a:solidFill>
+                  <a:srgbClr val="1A1D21"/>
+                </a:solidFill>
+                <a:latin typeface="Noto Sans JP"/>
+                <a:ea typeface="Noto Sans JP"/>
+              </a:rPr>
+              <a:t>生成AI・データセンター・半導体</a:t>
+            </a:r>
+          </a:p>
+        </p:txBody>
+      </p:sp>
+      <p:sp>
+        <p:nvSpPr>
+          <p:cNvPr id="14" name="TextBox 13"/>
+          <p:cNvSpPr txBox="1"/>
+          <p:nvPr/>
+        </p:nvSpPr>
+        <p:spPr>
+          <a:xfrm>
+            <a:off x="996695" y="2715768"/>
+            <a:ext cx="2990088" cy="548640"/>
+          </a:xfrm>
+          <a:prstGeom prst="rect">
+            <a:avLst/>
+          </a:prstGeom>
+          <a:noFill/>
+        </p:spPr>
+        <p:txBody>
+          <a:bodyPr wrap="square" anchor="t" lIns="0" rIns="0" tIns="0" bIns="0">
+            <a:spAutoFit/>
+          </a:bodyPr>
+          <a:lstStyle/>
+          <a:p>
+            <a:pPr algn="l">
+              <a:lnSpc>
+                <a:spcPct val="116000"/>
+              </a:lnSpc>
+              <a:spcBef>
+                <a:spcPts val="0"/>
+              </a:spcBef>
+              <a:spcAft>
+                <a:spcPts val="400"/>
+              </a:spcAft>
+            </a:pPr>
+            <a:r>
+              <a:rPr sz="1150" b="1">
+                <a:solidFill>
+                  <a:srgbClr val="E60012"/>
+                </a:solidFill>
+                <a:latin typeface="Noto Sans JP"/>
+                <a:ea typeface="Noto Sans JP"/>
+              </a:rPr>
+              <a:t>→ 電源・冷却・建屋・チップ工場が大量に要る</a:t>
+            </a:r>
+          </a:p>
+        </p:txBody>
+      </p:sp>
+      <p:sp>
+        <p:nvSpPr>
+          <p:cNvPr id="15" name="Rounded Rectangle 14"/>
           <p:cNvSpPr/>
           <p:nvPr/>
         </p:nvSpPr>
         <p:spPr>
           <a:xfrm>
-            <a:off x="4480559" y="1481328"/>
-            <a:ext cx="3429000" cy="91440"/>
+            <a:off x="4379976" y="1417320"/>
+            <a:ext cx="3429000" cy="1965960"/>
+          </a:xfrm>
+          <a:prstGeom prst="roundRect">
+            <a:avLst>
+              <a:gd name="adj" fmla="val 6000"/>
+            </a:avLst>
+          </a:prstGeom>
+          <a:solidFill>
+            <a:srgbClr val="FFFFFF"/>
+          </a:solidFill>
+          <a:ln w="12700">
+            <a:solidFill>
+              <a:srgbClr val="E2E4E9"/>
+            </a:solidFill>
+          </a:ln>
+          <a:effectLst/>
+        </p:spPr>
+        <p:style>
+          <a:lnRef idx="1">
+            <a:schemeClr val="accent1"/>
+          </a:lnRef>
+          <a:fillRef idx="3">
+            <a:schemeClr val="accent1"/>
+          </a:fillRef>
+          <a:effectRef idx="2">
+            <a:schemeClr val="accent1"/>
+          </a:effectRef>
+          <a:fontRef idx="minor">
+            <a:schemeClr val="lt1"/>
+          </a:fontRef>
+        </p:style>
+        <p:txBody>
+          <a:bodyPr rtlCol="0" anchor="ctr"/>
+          <a:lstStyle/>
+          <a:p>
+            <a:pPr algn="ctr"/>
+          </a:p>
+        </p:txBody>
+      </p:sp>
+      <p:sp>
+        <p:nvSpPr>
+          <p:cNvPr id="16" name="Rounded Rectangle 15"/>
+          <p:cNvSpPr/>
+          <p:nvPr/>
+        </p:nvSpPr>
+        <p:spPr>
+          <a:xfrm>
+            <a:off x="4379976" y="1417320"/>
+            <a:ext cx="3429000" cy="512064"/>
           </a:xfrm>
           <a:prstGeom prst="roundRect">
             <a:avLst>
@@ -4265,7 +4357,7 @@
             </a:avLst>
           </a:prstGeom>
           <a:solidFill>
-            <a:srgbClr val="E60012"/>
+            <a:srgbClr val="454B54"/>
           </a:solidFill>
           <a:ln>
             <a:noFill/>
@@ -4296,14 +4388,60 @@
       </p:sp>
       <p:sp>
         <p:nvSpPr>
-          <p:cNvPr id="14" name="TextBox 13"/>
+          <p:cNvPr id="17" name="TextBox 16"/>
           <p:cNvSpPr txBox="1"/>
           <p:nvPr/>
         </p:nvSpPr>
         <p:spPr>
           <a:xfrm>
-            <a:off x="4736592" y="1737360"/>
-            <a:ext cx="2916936" cy="1417319"/>
+            <a:off x="4581144" y="1417320"/>
+            <a:ext cx="3063240" cy="512064"/>
+          </a:xfrm>
+          <a:prstGeom prst="rect">
+            <a:avLst/>
+          </a:prstGeom>
+          <a:noFill/>
+        </p:spPr>
+        <p:txBody>
+          <a:bodyPr wrap="square" anchor="ctr" lIns="0" rIns="0" tIns="0" bIns="0">
+            <a:spAutoFit/>
+          </a:bodyPr>
+          <a:lstStyle/>
+          <a:p>
+            <a:pPr algn="l">
+              <a:lnSpc>
+                <a:spcPct val="106000"/>
+              </a:lnSpc>
+              <a:spcBef>
+                <a:spcPts val="0"/>
+              </a:spcBef>
+              <a:spcAft>
+                <a:spcPts val="400"/>
+              </a:spcAft>
+            </a:pPr>
+            <a:r>
+              <a:rPr sz="1450" b="1">
+                <a:solidFill>
+                  <a:srgbClr val="FFFFFF"/>
+                </a:solidFill>
+                <a:latin typeface="Noto Sans JP"/>
+                <a:ea typeface="Noto Sans JP"/>
+              </a:rPr>
+              <a:t>② 脱炭素（GX）</a:t>
+            </a:r>
+          </a:p>
+        </p:txBody>
+      </p:sp>
+      <p:sp>
+        <p:nvSpPr>
+          <p:cNvPr id="18" name="TextBox 17"/>
+          <p:cNvSpPr txBox="1"/>
+          <p:nvPr/>
+        </p:nvSpPr>
+        <p:spPr>
+          <a:xfrm>
+            <a:off x="4599432" y="2093976"/>
+            <a:ext cx="2990088" cy="502920"/>
           </a:xfrm>
           <a:prstGeom prst="rect">
             <a:avLst/>
@@ -4318,84 +4456,38 @@
           <a:p>
             <a:pPr algn="l">
               <a:lnSpc>
-                <a:spcPct val="116000"/>
-              </a:lnSpc>
-              <a:spcBef>
-                <a:spcPts val="0"/>
-              </a:spcBef>
-              <a:spcAft>
-                <a:spcPts val="700"/>
-              </a:spcAft>
-            </a:pPr>
-            <a:r>
-              <a:rPr sz="1050" b="1" spc="100">
-                <a:solidFill>
-                  <a:srgbClr val="E60012"/>
-                </a:solidFill>
-                <a:latin typeface="Consolas"/>
-                <a:ea typeface="Consolas"/>
-              </a:rPr>
-              <a:t>連鎖</a:t>
-            </a:r>
-          </a:p>
-          <a:p>
-            <a:pPr algn="l">
-              <a:lnSpc>
-                <a:spcPct val="116000"/>
-              </a:lnSpc>
-              <a:spcBef>
-                <a:spcPts val="0"/>
-              </a:spcBef>
-              <a:spcAft>
-                <a:spcPts val="700"/>
-              </a:spcAft>
-            </a:pPr>
-            <a:r>
-              <a:rPr sz="1600" b="1">
+                <a:spcPct val="114000"/>
+              </a:lnSpc>
+              <a:spcBef>
+                <a:spcPts val="0"/>
+              </a:spcBef>
+              <a:spcAft>
+                <a:spcPts val="400"/>
+              </a:spcAft>
+            </a:pPr>
+            <a:r>
+              <a:rPr sz="1350" b="1">
                 <a:solidFill>
                   <a:srgbClr val="1A1D21"/>
                 </a:solidFill>
                 <a:latin typeface="Noto Sans JP"/>
                 <a:ea typeface="Noto Sans JP"/>
               </a:rPr>
-              <a:t>製造業が一斉に動き出す</a:t>
-            </a:r>
-          </a:p>
-          <a:p>
-            <a:pPr algn="l">
-              <a:lnSpc>
-                <a:spcPct val="116000"/>
-              </a:lnSpc>
-              <a:spcBef>
-                <a:spcPts val="0"/>
-              </a:spcBef>
-              <a:spcAft>
-                <a:spcPts val="700"/>
-              </a:spcAft>
-            </a:pPr>
-            <a:r>
-              <a:rPr sz="1150" b="0">
-                <a:solidFill>
-                  <a:srgbClr val="3C4148"/>
-                </a:solidFill>
-                <a:latin typeface="Noto Sans JP"/>
-                <a:ea typeface="Noto Sans JP"/>
-              </a:rPr>
-              <a:t>重電・電線・空調・UPS・半導体——各社が工場を増設し、機器の製造・納入・据付が全国で立ち上がる。</a:t>
-            </a:r>
-          </a:p>
-        </p:txBody>
-      </p:sp>
-      <p:sp>
-        <p:nvSpPr>
-          <p:cNvPr id="15" name="TextBox 14"/>
+              <a:t>再エネ・送電網・電化・蓄電池</a:t>
+            </a:r>
+          </a:p>
+        </p:txBody>
+      </p:sp>
+      <p:sp>
+        <p:nvSpPr>
+          <p:cNvPr id="19" name="TextBox 18"/>
           <p:cNvSpPr txBox="1"/>
           <p:nvPr/>
         </p:nvSpPr>
         <p:spPr>
           <a:xfrm>
-            <a:off x="7882127" y="1984248"/>
-            <a:ext cx="329184" cy="548640"/>
+            <a:off x="4599432" y="2715768"/>
+            <a:ext cx="2990088" cy="548640"/>
           </a:xfrm>
           <a:prstGeom prst="rect">
             <a:avLst/>
@@ -4408,9 +4500,9 @@
           </a:bodyPr>
           <a:lstStyle/>
           <a:p>
-            <a:pPr algn="ctr">
-              <a:lnSpc>
-                <a:spcPct val="106000"/>
+            <a:pPr algn="l">
+              <a:lnSpc>
+                <a:spcPct val="116000"/>
               </a:lnSpc>
               <a:spcBef>
                 <a:spcPts val="0"/>
@@ -4420,28 +4512,28 @@
               </a:spcAft>
             </a:pPr>
             <a:r>
-              <a:rPr sz="2200" b="1">
-                <a:solidFill>
-                  <a:srgbClr val="E60012"/>
-                </a:solidFill>
-                <a:latin typeface="Consolas"/>
-                <a:ea typeface="Consolas"/>
-              </a:rPr>
-              <a:t>→</a:t>
-            </a:r>
-          </a:p>
-        </p:txBody>
-      </p:sp>
-      <p:sp>
-        <p:nvSpPr>
-          <p:cNvPr id="16" name="Rounded Rectangle 15"/>
+              <a:rPr sz="1150" b="0">
+                <a:solidFill>
+                  <a:srgbClr val="3C4148"/>
+                </a:solidFill>
+                <a:latin typeface="Noto Sans JP"/>
+                <a:ea typeface="Noto Sans JP"/>
+              </a:rPr>
+              <a:t>→ 発電・変電・ケーブル・電池／EV工場</a:t>
+            </a:r>
+          </a:p>
+        </p:txBody>
+      </p:sp>
+      <p:sp>
+        <p:nvSpPr>
+          <p:cNvPr id="20" name="Rounded Rectangle 19"/>
           <p:cNvSpPr/>
           <p:nvPr/>
         </p:nvSpPr>
         <p:spPr>
           <a:xfrm>
-            <a:off x="8183879" y="1481328"/>
-            <a:ext cx="3429000" cy="1783080"/>
+            <a:off x="7982712" y="1417320"/>
+            <a:ext cx="3429000" cy="1965960"/>
           </a:xfrm>
           <a:prstGeom prst="roundRect">
             <a:avLst>
@@ -4451,9 +4543,9 @@
           <a:solidFill>
             <a:srgbClr val="FFFFFF"/>
           </a:solidFill>
-          <a:ln w="15240">
+          <a:ln w="12700">
             <a:solidFill>
-              <a:srgbClr val="F3C7CD"/>
+              <a:srgbClr val="E2E4E9"/>
             </a:solidFill>
           </a:ln>
           <a:effectLst/>
@@ -4482,14 +4574,14 @@
       </p:sp>
       <p:sp>
         <p:nvSpPr>
-          <p:cNvPr id="17" name="Rounded Rectangle 16"/>
+          <p:cNvPr id="21" name="Rounded Rectangle 20"/>
           <p:cNvSpPr/>
           <p:nvPr/>
         </p:nvSpPr>
         <p:spPr>
           <a:xfrm>
-            <a:off x="8183879" y="1481328"/>
-            <a:ext cx="3429000" cy="91440"/>
+            <a:off x="7982712" y="1417320"/>
+            <a:ext cx="3429000" cy="512064"/>
           </a:xfrm>
           <a:prstGeom prst="roundRect">
             <a:avLst>
@@ -4497,7 +4589,7 @@
             </a:avLst>
           </a:prstGeom>
           <a:solidFill>
-            <a:srgbClr val="E60012"/>
+            <a:srgbClr val="454B54"/>
           </a:solidFill>
           <a:ln>
             <a:noFill/>
@@ -4528,14 +4620,60 @@
       </p:sp>
       <p:sp>
         <p:nvSpPr>
-          <p:cNvPr id="18" name="TextBox 17"/>
+          <p:cNvPr id="22" name="TextBox 21"/>
           <p:cNvSpPr txBox="1"/>
           <p:nvPr/>
         </p:nvSpPr>
         <p:spPr>
           <a:xfrm>
-            <a:off x="8439911" y="1737360"/>
-            <a:ext cx="2916936" cy="1417319"/>
+            <a:off x="8183880" y="1417320"/>
+            <a:ext cx="3063240" cy="512064"/>
+          </a:xfrm>
+          <a:prstGeom prst="rect">
+            <a:avLst/>
+          </a:prstGeom>
+          <a:noFill/>
+        </p:spPr>
+        <p:txBody>
+          <a:bodyPr wrap="square" anchor="ctr" lIns="0" rIns="0" tIns="0" bIns="0">
+            <a:spAutoFit/>
+          </a:bodyPr>
+          <a:lstStyle/>
+          <a:p>
+            <a:pPr algn="l">
+              <a:lnSpc>
+                <a:spcPct val="106000"/>
+              </a:lnSpc>
+              <a:spcBef>
+                <a:spcPts val="0"/>
+              </a:spcBef>
+              <a:spcAft>
+                <a:spcPts val="400"/>
+              </a:spcAft>
+            </a:pPr>
+            <a:r>
+              <a:rPr sz="1450" b="1">
+                <a:solidFill>
+                  <a:srgbClr val="FFFFFF"/>
+                </a:solidFill>
+                <a:latin typeface="Noto Sans JP"/>
+                <a:ea typeface="Noto Sans JP"/>
+              </a:rPr>
+              <a:t>③ 経済安保・国内回帰</a:t>
+            </a:r>
+          </a:p>
+        </p:txBody>
+      </p:sp>
+      <p:sp>
+        <p:nvSpPr>
+          <p:cNvPr id="23" name="TextBox 22"/>
+          <p:cNvSpPr txBox="1"/>
+          <p:nvPr/>
+        </p:nvSpPr>
+        <p:spPr>
+          <a:xfrm>
+            <a:off x="8202168" y="2093976"/>
+            <a:ext cx="2990088" cy="502920"/>
           </a:xfrm>
           <a:prstGeom prst="rect">
             <a:avLst/>
@@ -4550,49 +4688,49 @@
           <a:p>
             <a:pPr algn="l">
               <a:lnSpc>
-                <a:spcPct val="116000"/>
-              </a:lnSpc>
-              <a:spcBef>
-                <a:spcPts val="0"/>
-              </a:spcBef>
-              <a:spcAft>
-                <a:spcPts val="700"/>
-              </a:spcAft>
-            </a:pPr>
-            <a:r>
-              <a:rPr sz="1050" b="1" spc="100">
-                <a:solidFill>
-                  <a:srgbClr val="E60012"/>
-                </a:solidFill>
-                <a:latin typeface="Consolas"/>
-                <a:ea typeface="Consolas"/>
-              </a:rPr>
-              <a:t>結果</a:t>
-            </a:r>
-          </a:p>
-          <a:p>
-            <a:pPr algn="l">
-              <a:lnSpc>
-                <a:spcPct val="116000"/>
-              </a:lnSpc>
-              <a:spcBef>
-                <a:spcPts val="0"/>
-              </a:spcBef>
-              <a:spcAft>
-                <a:spcPts val="700"/>
-              </a:spcAft>
-            </a:pPr>
-            <a:r>
-              <a:rPr sz="1600" b="1">
+                <a:spcPct val="114000"/>
+              </a:lnSpc>
+              <a:spcBef>
+                <a:spcPts val="0"/>
+              </a:spcBef>
+              <a:spcAft>
+                <a:spcPts val="400"/>
+              </a:spcAft>
+            </a:pPr>
+            <a:r>
+              <a:rPr sz="1350" b="1">
                 <a:solidFill>
                   <a:srgbClr val="1A1D21"/>
                 </a:solidFill>
                 <a:latin typeface="Noto Sans JP"/>
                 <a:ea typeface="Noto Sans JP"/>
               </a:rPr>
-              <a:t>“現場”が全国で急増する</a:t>
-            </a:r>
-          </a:p>
+              <a:t>半導体・重要物資の国産化</a:t>
+            </a:r>
+          </a:p>
+        </p:txBody>
+      </p:sp>
+      <p:sp>
+        <p:nvSpPr>
+          <p:cNvPr id="24" name="TextBox 23"/>
+          <p:cNvSpPr txBox="1"/>
+          <p:nvPr/>
+        </p:nvSpPr>
+        <p:spPr>
+          <a:xfrm>
+            <a:off x="8202168" y="2715768"/>
+            <a:ext cx="2990088" cy="548640"/>
+          </a:xfrm>
+          <a:prstGeom prst="rect">
+            <a:avLst/>
+          </a:prstGeom>
+          <a:noFill/>
+        </p:spPr>
+        <p:txBody>
+          <a:bodyPr wrap="square" anchor="t" lIns="0" rIns="0" tIns="0" bIns="0">
+            <a:spAutoFit/>
+          </a:bodyPr>
+          <a:lstStyle/>
           <a:p>
             <a:pPr algn="l">
               <a:lnSpc>
@@ -4602,7 +4740,7 @@
                 <a:spcPts val="0"/>
               </a:spcBef>
               <a:spcAft>
-                <a:spcPts val="700"/>
+                <a:spcPts val="400"/>
               </a:spcAft>
             </a:pPr>
             <a:r>
@@ -4613,14 +4751,14 @@
                 <a:latin typeface="Noto Sans JP"/>
                 <a:ea typeface="Noto Sans JP"/>
               </a:rPr>
-              <a:t>工場を建てる現場も、機器を据え付け・試運転・保守する現場も、同時多発で増えていく。</a:t>
-            </a:r>
-          </a:p>
-        </p:txBody>
-      </p:sp>
-      <p:sp>
-        <p:nvSpPr>
-          <p:cNvPr id="19" name="Rounded Rectangle 18"/>
+              <a:t>→ 国内に工場を新設し、供給網を再構築</a:t>
+            </a:r>
+          </a:p>
+        </p:txBody>
+      </p:sp>
+      <p:sp>
+        <p:nvSpPr>
+          <p:cNvPr id="25" name="Rounded Rectangle 24"/>
           <p:cNvSpPr/>
           <p:nvPr/>
         </p:nvSpPr>
@@ -4668,13 +4806,13 @@
       </p:sp>
       <p:sp>
         <p:nvSpPr>
-          <p:cNvPr id="20" name="TextBox 19"/>
+          <p:cNvPr id="26" name="TextBox 25"/>
           <p:cNvSpPr txBox="1"/>
           <p:nvPr/>
         </p:nvSpPr>
         <p:spPr>
           <a:xfrm>
-            <a:off x="1051560" y="3822191"/>
+            <a:off x="1051560" y="3813048"/>
             <a:ext cx="10058400" cy="457200"/>
           </a:xfrm>
           <a:prstGeom prst="rect">
@@ -4700,48 +4838,48 @@
               </a:spcAft>
             </a:pPr>
             <a:r>
-              <a:rPr sz="1700" b="1">
+              <a:rPr sz="1650" b="1">
                 <a:solidFill>
                   <a:srgbClr val="1A1D21"/>
                 </a:solidFill>
                 <a:latin typeface="Noto Sans JP"/>
                 <a:ea typeface="Noto Sans JP"/>
               </a:rPr>
-              <a:t>いま製造業は、建設業のように</a:t>
-            </a:r>
-            <a:r>
-              <a:rPr sz="1700" b="1">
+              <a:t>どのメガトレンドも、実現するには</a:t>
+            </a:r>
+            <a:r>
+              <a:rPr sz="1650" b="1">
                 <a:solidFill>
                   <a:srgbClr val="E60012"/>
                 </a:solidFill>
                 <a:latin typeface="Noto Sans JP"/>
                 <a:ea typeface="Noto Sans JP"/>
               </a:rPr>
-              <a:t>“現場だらけ”</a:t>
-            </a:r>
-            <a:r>
-              <a:rPr sz="1700" b="1">
+              <a:t>膨大な“設備”</a:t>
+            </a:r>
+            <a:r>
+              <a:rPr sz="1650" b="1">
                 <a:solidFill>
                   <a:srgbClr val="1A1D21"/>
                 </a:solidFill>
                 <a:latin typeface="Noto Sans JP"/>
                 <a:ea typeface="Noto Sans JP"/>
               </a:rPr>
-              <a:t>になっている。</a:t>
-            </a:r>
-          </a:p>
-        </p:txBody>
-      </p:sp>
-      <p:sp>
-        <p:nvSpPr>
-          <p:cNvPr id="21" name="TextBox 20"/>
+              <a:t>がいる。</a:t>
+            </a:r>
+          </a:p>
+        </p:txBody>
+      </p:sp>
+      <p:sp>
+        <p:nvSpPr>
+          <p:cNvPr id="27" name="TextBox 26"/>
           <p:cNvSpPr txBox="1"/>
           <p:nvPr/>
         </p:nvSpPr>
         <p:spPr>
           <a:xfrm>
-            <a:off x="1051560" y="4370832"/>
-            <a:ext cx="10058400" cy="411480"/>
+            <a:off x="1051560" y="4315968"/>
+            <a:ext cx="10058400" cy="457200"/>
           </a:xfrm>
           <a:prstGeom prst="rect">
             <a:avLst/>
@@ -4766,28 +4904,38 @@
               </a:spcAft>
             </a:pPr>
             <a:r>
-              <a:rPr sz="1250" b="0">
+              <a:rPr sz="1300" b="0">
                 <a:solidFill>
                   <a:srgbClr val="3C4148"/>
                 </a:solidFill>
                 <a:latin typeface="Noto Sans JP"/>
                 <a:ea typeface="Noto Sans JP"/>
               </a:rPr>
-              <a:t>＝ 我々が建設業で磨いた「現場管理」が、そのまま効く土俵が、製造業に新しく生まれている。</a:t>
-            </a:r>
-          </a:p>
-        </p:txBody>
-      </p:sp>
-      <p:sp>
-        <p:nvSpPr>
-          <p:cNvPr id="22" name="Rounded Rectangle 21"/>
+              <a:t>そして設備を作る・建てるのは——建設業だけでなく、</a:t>
+            </a:r>
+            <a:r>
+              <a:rPr sz="1300" b="1">
+                <a:solidFill>
+                  <a:srgbClr val="E60012"/>
+                </a:solidFill>
+                <a:latin typeface="Noto Sans JP"/>
+                <a:ea typeface="Noto Sans JP"/>
+              </a:rPr>
+              <a:t>重電・機械・電機など製造業がコア。</a:t>
+            </a:r>
+          </a:p>
+        </p:txBody>
+      </p:sp>
+      <p:sp>
+        <p:nvSpPr>
+          <p:cNvPr id="28" name="Rounded Rectangle 27"/>
           <p:cNvSpPr/>
           <p:nvPr/>
         </p:nvSpPr>
         <p:spPr>
           <a:xfrm>
-            <a:off x="777240" y="5074920"/>
-            <a:ext cx="10634472" cy="1143000"/>
+            <a:off x="777240" y="5029200"/>
+            <a:ext cx="10634472" cy="1188720"/>
           </a:xfrm>
           <a:prstGeom prst="roundRect">
             <a:avLst>
@@ -4795,12 +4943,10 @@
             </a:avLst>
           </a:prstGeom>
           <a:solidFill>
-            <a:srgbClr val="FDECEE"/>
+            <a:srgbClr val="E60012"/>
           </a:solidFill>
-          <a:ln w="12700">
-            <a:solidFill>
-              <a:srgbClr val="F3C7CD"/>
-            </a:solidFill>
+          <a:ln>
+            <a:noFill/>
           </a:ln>
           <a:effectLst/>
         </p:spPr>
@@ -4828,13 +4974,13 @@
       </p:sp>
       <p:sp>
         <p:nvSpPr>
-          <p:cNvPr id="23" name="TextBox 22"/>
+          <p:cNvPr id="29" name="TextBox 28"/>
           <p:cNvSpPr txBox="1"/>
           <p:nvPr/>
         </p:nvSpPr>
         <p:spPr>
           <a:xfrm>
-            <a:off x="1051560" y="5266944"/>
+            <a:off x="1051560" y="5193792"/>
             <a:ext cx="10058400" cy="457200"/>
           </a:xfrm>
           <a:prstGeom prst="rect">
@@ -4860,28 +5006,28 @@
               </a:spcAft>
             </a:pPr>
             <a:r>
-              <a:rPr sz="1550" b="1">
-                <a:solidFill>
-                  <a:srgbClr val="1A1D21"/>
+              <a:rPr sz="1650" b="1">
+                <a:solidFill>
+                  <a:srgbClr val="FFFFFF"/>
                 </a:solidFill>
                 <a:latin typeface="Noto Sans JP"/>
                 <a:ea typeface="Noto Sans JP"/>
               </a:rPr>
-              <a:t>しかもこれは、一過性のブームではない。</a:t>
-            </a:r>
-          </a:p>
-        </p:txBody>
-      </p:sp>
-      <p:sp>
-        <p:nvSpPr>
-          <p:cNvPr id="24" name="TextBox 23"/>
+              <a:t>この“設備”の市場が、いま圧倒的に広がっている。乗らない手はない。</a:t>
+            </a:r>
+          </a:p>
+        </p:txBody>
+      </p:sp>
+      <p:sp>
+        <p:nvSpPr>
+          <p:cNvPr id="30" name="TextBox 29"/>
           <p:cNvSpPr txBox="1"/>
           <p:nvPr/>
         </p:nvSpPr>
         <p:spPr>
           <a:xfrm>
-            <a:off x="1051560" y="5742432"/>
-            <a:ext cx="10058400" cy="411480"/>
+            <a:off x="1051560" y="5705856"/>
+            <a:ext cx="10058400" cy="457200"/>
           </a:xfrm>
           <a:prstGeom prst="rect">
             <a:avLst/>
@@ -4906,34 +5052,34 @@
               </a:spcAft>
             </a:pPr>
             <a:r>
-              <a:rPr sz="1250" b="0">
-                <a:solidFill>
-                  <a:srgbClr val="3C4148"/>
+              <a:rPr sz="1350" b="1">
+                <a:solidFill>
+                  <a:srgbClr val="FFD2D7"/>
                 </a:solidFill>
                 <a:latin typeface="Noto Sans JP"/>
                 <a:ea typeface="Noto Sans JP"/>
               </a:rPr>
-              <a:t>各社の受注残・設備投資計画・売上ガイダンスに裏打ちされた、数年〜十数年続く</a:t>
-            </a:r>
-            <a:r>
-              <a:rPr sz="1250" b="1">
-                <a:solidFill>
-                  <a:srgbClr val="E60012"/>
+              <a:t>→ 今日はその中で、最も勢いのある「</a:t>
+            </a:r>
+            <a:r>
+              <a:rPr sz="1350" b="1">
+                <a:solidFill>
+                  <a:srgbClr val="FFFFFF"/>
                 </a:solidFill>
                 <a:latin typeface="Noto Sans JP"/>
                 <a:ea typeface="Noto Sans JP"/>
               </a:rPr>
-              <a:t>構造需要</a:t>
-            </a:r>
-            <a:r>
-              <a:rPr sz="1250" b="0">
-                <a:solidFill>
-                  <a:srgbClr val="3C4148"/>
+              <a:t>AI</a:t>
+            </a:r>
+            <a:r>
+              <a:rPr sz="1350" b="1">
+                <a:solidFill>
+                  <a:srgbClr val="FFD2D7"/>
                 </a:solidFill>
                 <a:latin typeface="Noto Sans JP"/>
                 <a:ea typeface="Noto Sans JP"/>
               </a:rPr>
-              <a:t>だ。</a:t>
+              <a:t>」にフォーカスして話す。</a:t>
             </a:r>
           </a:p>
         </p:txBody>

--- a/output/andpad_soukai_ai_deck.pptx
+++ b/output/andpad_soukai_ai_deck.pptx
@@ -3146,8 +3146,8 @@
         </p:nvSpPr>
         <p:spPr>
           <a:xfrm>
-            <a:off x="822960" y="1417320"/>
-            <a:ext cx="109728" cy="109728"/>
+            <a:off x="822960" y="1463040"/>
+            <a:ext cx="137160" cy="137160"/>
           </a:xfrm>
           <a:prstGeom prst="rect">
             <a:avLst/>
@@ -3190,8 +3190,8 @@
         </p:nvSpPr>
         <p:spPr>
           <a:xfrm>
-            <a:off x="1014984" y="1353312"/>
-            <a:ext cx="9144000" cy="256032"/>
+            <a:off x="1060704" y="1389888"/>
+            <a:ext cx="9601200" cy="274320"/>
           </a:xfrm>
           <a:prstGeom prst="rect">
             <a:avLst/>
@@ -3206,17 +3206,17 @@
           <a:p>
             <a:pPr algn="l">
               <a:lnSpc>
-                <a:spcPct val="108000"/>
-              </a:lnSpc>
-              <a:spcBef>
-                <a:spcPts val="0"/>
-              </a:spcBef>
-              <a:spcAft>
-                <a:spcPts val="400"/>
-              </a:spcAft>
-            </a:pPr>
-            <a:r>
-              <a:rPr sz="1150" b="1" spc="200">
+                <a:spcPct val="110000"/>
+              </a:lnSpc>
+              <a:spcBef>
+                <a:spcPts val="0"/>
+              </a:spcBef>
+              <a:spcAft>
+                <a:spcPts val="400"/>
+              </a:spcAft>
+            </a:pPr>
+            <a:r>
+              <a:rPr sz="1300" b="1" spc="200">
                 <a:solidFill>
                   <a:srgbClr val="E60012"/>
                 </a:solidFill>
@@ -3236,8 +3236,8 @@
         </p:nvSpPr>
         <p:spPr>
           <a:xfrm>
-            <a:off x="795528" y="2148840"/>
-            <a:ext cx="10698480" cy="2011680"/>
+            <a:off x="786384" y="2240280"/>
+            <a:ext cx="10789920" cy="2011680"/>
           </a:xfrm>
           <a:prstGeom prst="rect">
             <a:avLst/>
@@ -3262,9 +3262,9 @@
               </a:spcAft>
             </a:pPr>
             <a:r>
-              <a:rPr sz="4000" b="1">
-                <a:solidFill>
-                  <a:srgbClr val="171A1E"/>
+              <a:rPr sz="4600" b="1">
+                <a:solidFill>
+                  <a:srgbClr val="15181C"/>
                 </a:solidFill>
                 <a:latin typeface="Noto Sans JP"/>
                 <a:ea typeface="Noto Sans JP"/>
@@ -3285,9 +3285,9 @@
               </a:spcAft>
             </a:pPr>
             <a:r>
-              <a:rPr sz="4000" b="1">
-                <a:solidFill>
-                  <a:srgbClr val="171A1E"/>
+              <a:rPr sz="4600" b="1">
+                <a:solidFill>
+                  <a:srgbClr val="15181C"/>
                 </a:solidFill>
                 <a:latin typeface="Noto Sans JP"/>
                 <a:ea typeface="Noto Sans JP"/>
@@ -3295,7 +3295,7 @@
               <a:t>なぜ、いま</a:t>
             </a:r>
             <a:r>
-              <a:rPr sz="4000" b="1">
+              <a:rPr sz="4600" b="1">
                 <a:solidFill>
                   <a:srgbClr val="E60012"/>
                 </a:solidFill>
@@ -3305,9 +3305,9 @@
               <a:t>製造業</a:t>
             </a:r>
             <a:r>
-              <a:rPr sz="4000" b="1">
-                <a:solidFill>
-                  <a:srgbClr val="171A1E"/>
+              <a:rPr sz="4600" b="1">
+                <a:solidFill>
+                  <a:srgbClr val="15181C"/>
                 </a:solidFill>
                 <a:latin typeface="Noto Sans JP"/>
                 <a:ea typeface="Noto Sans JP"/>
@@ -3325,8 +3325,8 @@
         </p:nvSpPr>
         <p:spPr>
           <a:xfrm>
-            <a:off x="822960" y="4160520"/>
-            <a:ext cx="2743200" cy="30480"/>
+            <a:off x="822960" y="4434840"/>
+            <a:ext cx="2926080" cy="45720"/>
           </a:xfrm>
           <a:prstGeom prst="rect">
             <a:avLst/>
@@ -3369,8 +3369,8 @@
         </p:nvSpPr>
         <p:spPr>
           <a:xfrm>
-            <a:off x="804672" y="4434840"/>
-            <a:ext cx="10607040" cy="914400"/>
+            <a:off x="804672" y="4709160"/>
+            <a:ext cx="10698480" cy="1005840"/>
           </a:xfrm>
           <a:prstGeom prst="rect">
             <a:avLst/>
@@ -3385,47 +3385,47 @@
           <a:p>
             <a:pPr algn="l">
               <a:lnSpc>
-                <a:spcPct val="140000"/>
-              </a:lnSpc>
-              <a:spcBef>
-                <a:spcPts val="0"/>
-              </a:spcBef>
-              <a:spcAft>
-                <a:spcPts val="400"/>
-              </a:spcAft>
-            </a:pPr>
-            <a:r>
-              <a:rPr sz="1500" b="0">
-                <a:solidFill>
-                  <a:srgbClr val="3C4148"/>
+                <a:spcPct val="150000"/>
+              </a:lnSpc>
+              <a:spcBef>
+                <a:spcPts val="0"/>
+              </a:spcBef>
+              <a:spcAft>
+                <a:spcPts val="400"/>
+              </a:spcAft>
+            </a:pPr>
+            <a:r>
+              <a:rPr sz="1700" b="0">
+                <a:solidFill>
+                  <a:srgbClr val="373C43"/>
                 </a:solidFill>
                 <a:latin typeface="Noto Sans JP"/>
                 <a:ea typeface="Noto Sans JP"/>
               </a:rPr>
-              <a:t>AIをはじめとする世界のメガトレンドは、膨大な“設備”を必要とする。</a:t>
+              <a:t>AIをはじめ世界のメガトレンドは、膨大な“設備”を必要とする。</a:t>
             </a:r>
           </a:p>
           <a:p>
             <a:pPr algn="l">
               <a:lnSpc>
-                <a:spcPct val="140000"/>
-              </a:lnSpc>
-              <a:spcBef>
-                <a:spcPts val="0"/>
-              </a:spcBef>
-              <a:spcAft>
-                <a:spcPts val="400"/>
-              </a:spcAft>
-            </a:pPr>
-            <a:r>
-              <a:rPr sz="1500" b="0">
-                <a:solidFill>
-                  <a:srgbClr val="3C4148"/>
+                <a:spcPct val="150000"/>
+              </a:lnSpc>
+              <a:spcBef>
+                <a:spcPts val="0"/>
+              </a:spcBef>
+              <a:spcAft>
+                <a:spcPts val="400"/>
+              </a:spcAft>
+            </a:pPr>
+            <a:r>
+              <a:rPr sz="1700" b="0">
+                <a:solidFill>
+                  <a:srgbClr val="373C43"/>
                 </a:solidFill>
                 <a:latin typeface="Noto Sans JP"/>
                 <a:ea typeface="Noto Sans JP"/>
               </a:rPr>
-              <a:t>そして設備を作り・建てるのは、建設業だけでなく製造業がコア——その市場が、いま圧倒的に広がっている。</a:t>
+              <a:t>それを作り・建てるのは、建設業だけでなく製造業がコア——その市場が、いま圧倒的に広がっている。</a:t>
             </a:r>
           </a:p>
         </p:txBody>
@@ -3438,14 +3438,14 @@
         </p:nvSpPr>
         <p:spPr>
           <a:xfrm>
-            <a:off x="822960" y="6263640"/>
+            <a:off x="822960" y="6355080"/>
             <a:ext cx="10543032" cy="12700"/>
           </a:xfrm>
           <a:prstGeom prst="rect">
             <a:avLst/>
           </a:prstGeom>
           <a:solidFill>
-            <a:srgbClr val="DCDFE4"/>
+            <a:srgbClr val="D6DADF"/>
           </a:solidFill>
           <a:ln>
             <a:noFill/>
@@ -3482,8 +3482,8 @@
         </p:nvSpPr>
         <p:spPr>
           <a:xfrm>
-            <a:off x="804672" y="6382512"/>
-            <a:ext cx="10607040" cy="274320"/>
+            <a:off x="804672" y="6455664"/>
+            <a:ext cx="10698480" cy="274320"/>
           </a:xfrm>
           <a:prstGeom prst="rect">
             <a:avLst/>
@@ -3498,19 +3498,19 @@
           <a:p>
             <a:pPr algn="l">
               <a:lnSpc>
-                <a:spcPct val="108000"/>
-              </a:lnSpc>
-              <a:spcBef>
-                <a:spcPts val="0"/>
-              </a:spcBef>
-              <a:spcAft>
-                <a:spcPts val="400"/>
-              </a:spcAft>
-            </a:pPr>
-            <a:r>
-              <a:rPr sz="1000" b="0">
-                <a:solidFill>
-                  <a:srgbClr val="A5ABB2"/>
+                <a:spcPct val="110000"/>
+              </a:lnSpc>
+              <a:spcBef>
+                <a:spcPts val="0"/>
+              </a:spcBef>
+              <a:spcAft>
+                <a:spcPts val="400"/>
+              </a:spcAft>
+            </a:pPr>
+            <a:r>
+              <a:rPr sz="1050" b="0">
+                <a:solidFill>
+                  <a:srgbClr val="9AA1A9"/>
                 </a:solidFill>
                 <a:latin typeface="Consolas"/>
                 <a:ea typeface="Consolas"/>
@@ -3590,8 +3590,8 @@
         </p:nvSpPr>
         <p:spPr>
           <a:xfrm>
-            <a:off x="822960" y="585216"/>
-            <a:ext cx="109728" cy="109728"/>
+            <a:off x="822960" y="566928"/>
+            <a:ext cx="128016" cy="128016"/>
           </a:xfrm>
           <a:prstGeom prst="rect">
             <a:avLst/>
@@ -3634,8 +3634,8 @@
         </p:nvSpPr>
         <p:spPr>
           <a:xfrm>
-            <a:off x="1014984" y="521207"/>
-            <a:ext cx="8686800" cy="237744"/>
+            <a:off x="1042415" y="502920"/>
+            <a:ext cx="8686800" cy="256032"/>
           </a:xfrm>
           <a:prstGeom prst="rect">
             <a:avLst/>
@@ -3650,17 +3650,17 @@
           <a:p>
             <a:pPr algn="l">
               <a:lnSpc>
-                <a:spcPct val="108000"/>
-              </a:lnSpc>
-              <a:spcBef>
-                <a:spcPts val="0"/>
-              </a:spcBef>
-              <a:spcAft>
-                <a:spcPts val="400"/>
-              </a:spcAft>
-            </a:pPr>
-            <a:r>
-              <a:rPr sz="1050" b="1" spc="150">
+                <a:spcPct val="110000"/>
+              </a:lnSpc>
+              <a:spcBef>
+                <a:spcPts val="0"/>
+              </a:spcBef>
+              <a:spcAft>
+                <a:spcPts val="400"/>
+              </a:spcAft>
+            </a:pPr>
+            <a:r>
+              <a:rPr sz="1150" b="1" spc="150">
                 <a:solidFill>
                   <a:srgbClr val="E60012"/>
                 </a:solidFill>
@@ -3680,8 +3680,8 @@
         </p:nvSpPr>
         <p:spPr>
           <a:xfrm>
-            <a:off x="10817352" y="521207"/>
-            <a:ext cx="548640" cy="237744"/>
+            <a:off x="10725912" y="502920"/>
+            <a:ext cx="640080" cy="256032"/>
           </a:xfrm>
           <a:prstGeom prst="rect">
             <a:avLst/>
@@ -3696,19 +3696,19 @@
           <a:p>
             <a:pPr algn="r">
               <a:lnSpc>
-                <a:spcPct val="108000"/>
-              </a:lnSpc>
-              <a:spcBef>
-                <a:spcPts val="0"/>
-              </a:spcBef>
-              <a:spcAft>
-                <a:spcPts val="400"/>
-              </a:spcAft>
-            </a:pPr>
-            <a:r>
-              <a:rPr sz="1050" b="1">
-                <a:solidFill>
-                  <a:srgbClr val="A5ABB2"/>
+                <a:spcPct val="110000"/>
+              </a:lnSpc>
+              <a:spcBef>
+                <a:spcPts val="0"/>
+              </a:spcBef>
+              <a:spcAft>
+                <a:spcPts val="400"/>
+              </a:spcAft>
+            </a:pPr>
+            <a:r>
+              <a:rPr sz="1150" b="1">
+                <a:solidFill>
+                  <a:srgbClr val="9AA1A9"/>
                 </a:solidFill>
                 <a:latin typeface="Consolas"/>
                 <a:ea typeface="Consolas"/>
@@ -3726,8 +3726,8 @@
         </p:nvSpPr>
         <p:spPr>
           <a:xfrm>
-            <a:off x="804672" y="822960"/>
-            <a:ext cx="10543032" cy="457200"/>
+            <a:off x="804672" y="841248"/>
+            <a:ext cx="10543032" cy="502920"/>
           </a:xfrm>
           <a:prstGeom prst="rect">
             <a:avLst/>
@@ -3742,19 +3742,19 @@
           <a:p>
             <a:pPr algn="l">
               <a:lnSpc>
-                <a:spcPct val="108000"/>
-              </a:lnSpc>
-              <a:spcBef>
-                <a:spcPts val="0"/>
-              </a:spcBef>
-              <a:spcAft>
-                <a:spcPts val="400"/>
-              </a:spcAft>
-            </a:pPr>
-            <a:r>
-              <a:rPr sz="2100" b="1">
-                <a:solidFill>
-                  <a:srgbClr val="171A1E"/>
+                <a:spcPct val="110000"/>
+              </a:lnSpc>
+              <a:spcBef>
+                <a:spcPts val="0"/>
+              </a:spcBef>
+              <a:spcAft>
+                <a:spcPts val="400"/>
+              </a:spcAft>
+            </a:pPr>
+            <a:r>
+              <a:rPr sz="2400" b="1">
+                <a:solidFill>
+                  <a:srgbClr val="15181C"/>
                 </a:solidFill>
                 <a:latin typeface="Noto Sans JP"/>
                 <a:ea typeface="Noto Sans JP"/>
@@ -3772,14 +3772,14 @@
         </p:nvSpPr>
         <p:spPr>
           <a:xfrm>
-            <a:off x="822960" y="1389888"/>
-            <a:ext cx="10543032" cy="15240"/>
+            <a:off x="822960" y="1463040"/>
+            <a:ext cx="10543032" cy="17780"/>
           </a:xfrm>
           <a:prstGeom prst="rect">
             <a:avLst/>
           </a:prstGeom>
           <a:solidFill>
-            <a:srgbClr val="DCDFE4"/>
+            <a:srgbClr val="D6DADF"/>
           </a:solidFill>
           <a:ln>
             <a:noFill/>
@@ -3816,8 +3816,8 @@
         </p:nvSpPr>
         <p:spPr>
           <a:xfrm>
-            <a:off x="822960" y="1783080"/>
-            <a:ext cx="3057144" cy="219456"/>
+            <a:off x="822960" y="1810512"/>
+            <a:ext cx="3057144" cy="237744"/>
           </a:xfrm>
           <a:prstGeom prst="rect">
             <a:avLst/>
@@ -3832,19 +3832,19 @@
           <a:p>
             <a:pPr algn="l">
               <a:lnSpc>
-                <a:spcPct val="108000"/>
-              </a:lnSpc>
-              <a:spcBef>
-                <a:spcPts val="0"/>
-              </a:spcBef>
-              <a:spcAft>
-                <a:spcPts val="400"/>
-              </a:spcAft>
-            </a:pPr>
-            <a:r>
-              <a:rPr sz="1000" b="1" spc="100">
-                <a:solidFill>
-                  <a:srgbClr val="A5ABB2"/>
+                <a:spcPct val="110000"/>
+              </a:lnSpc>
+              <a:spcBef>
+                <a:spcPts val="0"/>
+              </a:spcBef>
+              <a:spcAft>
+                <a:spcPts val="400"/>
+              </a:spcAft>
+            </a:pPr>
+            <a:r>
+              <a:rPr sz="1100" b="1" spc="100">
+                <a:solidFill>
+                  <a:srgbClr val="9AA1A9"/>
                 </a:solidFill>
                 <a:latin typeface="Consolas"/>
                 <a:ea typeface="Consolas"/>
@@ -3862,8 +3862,8 @@
         </p:nvSpPr>
         <p:spPr>
           <a:xfrm>
-            <a:off x="822960" y="2039112"/>
-            <a:ext cx="3057144" cy="402336"/>
+            <a:off x="822960" y="2103120"/>
+            <a:ext cx="3130296" cy="457200"/>
           </a:xfrm>
           <a:prstGeom prst="rect">
             <a:avLst/>
@@ -3878,17 +3878,17 @@
           <a:p>
             <a:pPr algn="l">
               <a:lnSpc>
-                <a:spcPct val="108000"/>
-              </a:lnSpc>
-              <a:spcBef>
-                <a:spcPts val="0"/>
-              </a:spcBef>
-              <a:spcAft>
-                <a:spcPts val="400"/>
-              </a:spcAft>
-            </a:pPr>
-            <a:r>
-              <a:rPr sz="1900" b="1">
+                <a:spcPct val="110000"/>
+              </a:lnSpc>
+              <a:spcBef>
+                <a:spcPts val="0"/>
+              </a:spcBef>
+              <a:spcAft>
+                <a:spcPts val="400"/>
+              </a:spcAft>
+            </a:pPr>
+            <a:r>
+              <a:rPr sz="2300" b="1">
                 <a:solidFill>
                   <a:srgbClr val="E60012"/>
                 </a:solidFill>
@@ -3908,8 +3908,8 @@
         </p:nvSpPr>
         <p:spPr>
           <a:xfrm>
-            <a:off x="822960" y="2496312"/>
-            <a:ext cx="3057144" cy="219456"/>
+            <a:off x="822960" y="2633472"/>
+            <a:ext cx="3148584" cy="237744"/>
           </a:xfrm>
           <a:prstGeom prst="rect">
             <a:avLst/>
@@ -3924,24 +3924,24 @@
           <a:p>
             <a:pPr algn="l">
               <a:lnSpc>
-                <a:spcPct val="108000"/>
-              </a:lnSpc>
-              <a:spcBef>
-                <a:spcPts val="0"/>
-              </a:spcBef>
-              <a:spcAft>
-                <a:spcPts val="400"/>
-              </a:spcAft>
-            </a:pPr>
-            <a:r>
-              <a:rPr sz="950" b="1">
+                <a:spcPct val="110000"/>
+              </a:lnSpc>
+              <a:spcBef>
+                <a:spcPts val="0"/>
+              </a:spcBef>
+              <a:spcAft>
+                <a:spcPts val="400"/>
+              </a:spcAft>
+            </a:pPr>
+            <a:r>
+              <a:rPr sz="1100" b="1">
                 <a:solidFill>
                   <a:srgbClr val="E60012"/>
                 </a:solidFill>
                 <a:latin typeface="Consolas"/>
                 <a:ea typeface="Consolas"/>
               </a:rPr>
-              <a:t>● 本日フォーカス</a:t>
+              <a:t>●  本日フォーカス</a:t>
             </a:r>
           </a:p>
         </p:txBody>
@@ -3954,8 +3954,8 @@
         </p:nvSpPr>
         <p:spPr>
           <a:xfrm>
-            <a:off x="822960" y="2807208"/>
-            <a:ext cx="3011423" cy="365760"/>
+            <a:off x="822960" y="3035808"/>
+            <a:ext cx="3057144" cy="402336"/>
           </a:xfrm>
           <a:prstGeom prst="rect">
             <a:avLst/>
@@ -3970,19 +3970,19 @@
           <a:p>
             <a:pPr algn="l">
               <a:lnSpc>
-                <a:spcPct val="114000"/>
-              </a:lnSpc>
-              <a:spcBef>
-                <a:spcPts val="0"/>
-              </a:spcBef>
-              <a:spcAft>
-                <a:spcPts val="400"/>
-              </a:spcAft>
-            </a:pPr>
-            <a:r>
-              <a:rPr sz="1200" b="1">
-                <a:solidFill>
-                  <a:srgbClr val="7A828B"/>
+                <a:spcPct val="118000"/>
+              </a:lnSpc>
+              <a:spcBef>
+                <a:spcPts val="0"/>
+              </a:spcBef>
+              <a:spcAft>
+                <a:spcPts val="400"/>
+              </a:spcAft>
+            </a:pPr>
+            <a:r>
+              <a:rPr sz="1450" b="1">
+                <a:solidFill>
+                  <a:srgbClr val="6E767F"/>
                 </a:solidFill>
                 <a:latin typeface="Noto Sans JP"/>
                 <a:ea typeface="Noto Sans JP"/>
@@ -4000,8 +4000,8 @@
         </p:nvSpPr>
         <p:spPr>
           <a:xfrm>
-            <a:off x="822960" y="3154680"/>
-            <a:ext cx="3011423" cy="457200"/>
+            <a:off x="822960" y="3474720"/>
+            <a:ext cx="3057144" cy="502920"/>
           </a:xfrm>
           <a:prstGeom prst="rect">
             <a:avLst/>
@@ -4016,17 +4016,17 @@
           <a:p>
             <a:pPr algn="l">
               <a:lnSpc>
-                <a:spcPct val="120000"/>
-              </a:lnSpc>
-              <a:spcBef>
-                <a:spcPts val="0"/>
-              </a:spcBef>
-              <a:spcAft>
-                <a:spcPts val="400"/>
-              </a:spcAft>
-            </a:pPr>
-            <a:r>
-              <a:rPr sz="1200" b="1">
+                <a:spcPct val="122000"/>
+              </a:lnSpc>
+              <a:spcBef>
+                <a:spcPts val="0"/>
+              </a:spcBef>
+              <a:spcAft>
+                <a:spcPts val="400"/>
+              </a:spcAft>
+            </a:pPr>
+            <a:r>
+              <a:rPr sz="1450" b="1">
                 <a:solidFill>
                   <a:srgbClr val="E60012"/>
                 </a:solidFill>
@@ -4036,9 +4036,9 @@
               <a:t>→ </a:t>
             </a:r>
             <a:r>
-              <a:rPr sz="1200" b="0">
-                <a:solidFill>
-                  <a:srgbClr val="3C4148"/>
+              <a:rPr sz="1450" b="0">
+                <a:solidFill>
+                  <a:srgbClr val="373C43"/>
                 </a:solidFill>
                 <a:latin typeface="Noto Sans JP"/>
                 <a:ea typeface="Noto Sans JP"/>
@@ -4056,14 +4056,14 @@
         </p:nvSpPr>
         <p:spPr>
           <a:xfrm>
-            <a:off x="4136136" y="1783080"/>
-            <a:ext cx="12700" cy="1783080"/>
+            <a:off x="4117847" y="1856231"/>
+            <a:ext cx="15240" cy="2057400"/>
           </a:xfrm>
           <a:prstGeom prst="rect">
             <a:avLst/>
           </a:prstGeom>
           <a:solidFill>
-            <a:srgbClr val="DCDFE4"/>
+            <a:srgbClr val="D6DADF"/>
           </a:solidFill>
           <a:ln>
             <a:noFill/>
@@ -4100,8 +4100,8 @@
         </p:nvSpPr>
         <p:spPr>
           <a:xfrm>
-            <a:off x="4337304" y="1783080"/>
-            <a:ext cx="3057144" cy="219456"/>
+            <a:off x="4337304" y="1810512"/>
+            <a:ext cx="3057144" cy="237744"/>
           </a:xfrm>
           <a:prstGeom prst="rect">
             <a:avLst/>
@@ -4116,19 +4116,19 @@
           <a:p>
             <a:pPr algn="l">
               <a:lnSpc>
-                <a:spcPct val="108000"/>
-              </a:lnSpc>
-              <a:spcBef>
-                <a:spcPts val="0"/>
-              </a:spcBef>
-              <a:spcAft>
-                <a:spcPts val="400"/>
-              </a:spcAft>
-            </a:pPr>
-            <a:r>
-              <a:rPr sz="1000" b="1" spc="100">
-                <a:solidFill>
-                  <a:srgbClr val="A5ABB2"/>
+                <a:spcPct val="110000"/>
+              </a:lnSpc>
+              <a:spcBef>
+                <a:spcPts val="0"/>
+              </a:spcBef>
+              <a:spcAft>
+                <a:spcPts val="400"/>
+              </a:spcAft>
+            </a:pPr>
+            <a:r>
+              <a:rPr sz="1100" b="1" spc="100">
+                <a:solidFill>
+                  <a:srgbClr val="9AA1A9"/>
                 </a:solidFill>
                 <a:latin typeface="Consolas"/>
                 <a:ea typeface="Consolas"/>
@@ -4146,8 +4146,8 @@
         </p:nvSpPr>
         <p:spPr>
           <a:xfrm>
-            <a:off x="4337304" y="2039112"/>
-            <a:ext cx="3057144" cy="402336"/>
+            <a:off x="4337304" y="2103120"/>
+            <a:ext cx="3130296" cy="457200"/>
           </a:xfrm>
           <a:prstGeom prst="rect">
             <a:avLst/>
@@ -4162,19 +4162,19 @@
           <a:p>
             <a:pPr algn="l">
               <a:lnSpc>
-                <a:spcPct val="108000"/>
-              </a:lnSpc>
-              <a:spcBef>
-                <a:spcPts val="0"/>
-              </a:spcBef>
-              <a:spcAft>
-                <a:spcPts val="400"/>
-              </a:spcAft>
-            </a:pPr>
-            <a:r>
-              <a:rPr sz="1900" b="1">
-                <a:solidFill>
-                  <a:srgbClr val="171A1E"/>
+                <a:spcPct val="110000"/>
+              </a:lnSpc>
+              <a:spcBef>
+                <a:spcPts val="0"/>
+              </a:spcBef>
+              <a:spcAft>
+                <a:spcPts val="400"/>
+              </a:spcAft>
+            </a:pPr>
+            <a:r>
+              <a:rPr sz="2300" b="1">
+                <a:solidFill>
+                  <a:srgbClr val="15181C"/>
                 </a:solidFill>
                 <a:latin typeface="Noto Sans JP"/>
                 <a:ea typeface="Noto Sans JP"/>
@@ -4192,8 +4192,8 @@
         </p:nvSpPr>
         <p:spPr>
           <a:xfrm>
-            <a:off x="4337304" y="2496312"/>
-            <a:ext cx="3057144" cy="219456"/>
+            <a:off x="4337304" y="3035808"/>
+            <a:ext cx="3057144" cy="402336"/>
           </a:xfrm>
           <a:prstGeom prst="rect">
             <a:avLst/>
@@ -4208,24 +4208,24 @@
           <a:p>
             <a:pPr algn="l">
               <a:lnSpc>
-                <a:spcPct val="108000"/>
-              </a:lnSpc>
-              <a:spcBef>
-                <a:spcPts val="0"/>
-              </a:spcBef>
-              <a:spcAft>
-                <a:spcPts val="400"/>
-              </a:spcAft>
-            </a:pPr>
-            <a:r>
-              <a:rPr sz="950" b="0">
-                <a:solidFill>
-                  <a:srgbClr val="7A828B"/>
+                <a:spcPct val="118000"/>
+              </a:lnSpc>
+              <a:spcBef>
+                <a:spcPts val="0"/>
+              </a:spcBef>
+              <a:spcAft>
+                <a:spcPts val="400"/>
+              </a:spcAft>
+            </a:pPr>
+            <a:r>
+              <a:rPr sz="1450" b="1">
+                <a:solidFill>
+                  <a:srgbClr val="6E767F"/>
                 </a:solidFill>
                 <a:latin typeface="Noto Sans JP"/>
                 <a:ea typeface="Noto Sans JP"/>
               </a:rPr>
-              <a:t>　</a:t>
+              <a:t>再エネ・送電網・電化・蓄電池</a:t>
             </a:r>
           </a:p>
         </p:txBody>
@@ -4238,8 +4238,8 @@
         </p:nvSpPr>
         <p:spPr>
           <a:xfrm>
-            <a:off x="4337304" y="2807208"/>
-            <a:ext cx="3011423" cy="365760"/>
+            <a:off x="4337304" y="3474720"/>
+            <a:ext cx="3057144" cy="502920"/>
           </a:xfrm>
           <a:prstGeom prst="rect">
             <a:avLst/>
@@ -4254,79 +4254,33 @@
           <a:p>
             <a:pPr algn="l">
               <a:lnSpc>
-                <a:spcPct val="114000"/>
-              </a:lnSpc>
-              <a:spcBef>
-                <a:spcPts val="0"/>
-              </a:spcBef>
-              <a:spcAft>
-                <a:spcPts val="400"/>
-              </a:spcAft>
-            </a:pPr>
-            <a:r>
-              <a:rPr sz="1200" b="1">
-                <a:solidFill>
-                  <a:srgbClr val="7A828B"/>
+                <a:spcPct val="122000"/>
+              </a:lnSpc>
+              <a:spcBef>
+                <a:spcPts val="0"/>
+              </a:spcBef>
+              <a:spcAft>
+                <a:spcPts val="400"/>
+              </a:spcAft>
+            </a:pPr>
+            <a:r>
+              <a:rPr sz="1450" b="1">
+                <a:solidFill>
+                  <a:srgbClr val="E60012"/>
                 </a:solidFill>
                 <a:latin typeface="Noto Sans JP"/>
                 <a:ea typeface="Noto Sans JP"/>
               </a:rPr>
-              <a:t>再エネ・送電網・電化・蓄電池</a:t>
-            </a:r>
-          </a:p>
-        </p:txBody>
-      </p:sp>
-      <p:sp>
-        <p:nvSpPr>
-          <p:cNvPr id="18" name="TextBox 17"/>
-          <p:cNvSpPr txBox="1"/>
-          <p:nvPr/>
-        </p:nvSpPr>
-        <p:spPr>
-          <a:xfrm>
-            <a:off x="4337304" y="3154680"/>
-            <a:ext cx="3011423" cy="457200"/>
-          </a:xfrm>
-          <a:prstGeom prst="rect">
-            <a:avLst/>
-          </a:prstGeom>
-          <a:noFill/>
-        </p:spPr>
-        <p:txBody>
-          <a:bodyPr wrap="square" anchor="t" lIns="0" rIns="0" tIns="0" bIns="0">
-            <a:spAutoFit/>
-          </a:bodyPr>
-          <a:lstStyle/>
-          <a:p>
-            <a:pPr algn="l">
-              <a:lnSpc>
-                <a:spcPct val="120000"/>
-              </a:lnSpc>
-              <a:spcBef>
-                <a:spcPts val="0"/>
-              </a:spcBef>
-              <a:spcAft>
-                <a:spcPts val="400"/>
-              </a:spcAft>
-            </a:pPr>
-            <a:r>
-              <a:rPr sz="1200" b="1">
-                <a:solidFill>
-                  <a:srgbClr val="E60012"/>
+              <a:t>→ </a:t>
+            </a:r>
+            <a:r>
+              <a:rPr sz="1450" b="0">
+                <a:solidFill>
+                  <a:srgbClr val="373C43"/>
                 </a:solidFill>
                 <a:latin typeface="Noto Sans JP"/>
                 <a:ea typeface="Noto Sans JP"/>
               </a:rPr>
-              <a:t>→ </a:t>
-            </a:r>
-            <a:r>
-              <a:rPr sz="1200" b="0">
-                <a:solidFill>
-                  <a:srgbClr val="3C4148"/>
-                </a:solidFill>
-                <a:latin typeface="Noto Sans JP"/>
-                <a:ea typeface="Noto Sans JP"/>
-              </a:rPr>
               <a:t>発電・変電・ケーブル・電池／EV工場</a:t>
             </a:r>
           </a:p>
@@ -4334,20 +4288,20 @@
       </p:sp>
       <p:sp>
         <p:nvSpPr>
-          <p:cNvPr id="19" name="Rectangle 18"/>
+          <p:cNvPr id="18" name="Rectangle 17"/>
           <p:cNvSpPr/>
           <p:nvPr/>
         </p:nvSpPr>
         <p:spPr>
           <a:xfrm>
-            <a:off x="7650479" y="1783080"/>
-            <a:ext cx="12700" cy="1783080"/>
+            <a:off x="7632191" y="1856231"/>
+            <a:ext cx="15240" cy="2057400"/>
           </a:xfrm>
           <a:prstGeom prst="rect">
             <a:avLst/>
           </a:prstGeom>
           <a:solidFill>
-            <a:srgbClr val="DCDFE4"/>
+            <a:srgbClr val="D6DADF"/>
           </a:solidFill>
           <a:ln>
             <a:noFill/>
@@ -4378,14 +4332,14 @@
       </p:sp>
       <p:sp>
         <p:nvSpPr>
-          <p:cNvPr id="20" name="TextBox 19"/>
-          <p:cNvSpPr txBox="1"/>
-          <p:nvPr/>
-        </p:nvSpPr>
-        <p:spPr>
-          <a:xfrm>
-            <a:off x="7851647" y="1783080"/>
-            <a:ext cx="3057144" cy="219456"/>
+          <p:cNvPr id="19" name="TextBox 18"/>
+          <p:cNvSpPr txBox="1"/>
+          <p:nvPr/>
+        </p:nvSpPr>
+        <p:spPr>
+          <a:xfrm>
+            <a:off x="7851647" y="1810512"/>
+            <a:ext cx="3057144" cy="237744"/>
           </a:xfrm>
           <a:prstGeom prst="rect">
             <a:avLst/>
@@ -4400,19 +4354,19 @@
           <a:p>
             <a:pPr algn="l">
               <a:lnSpc>
-                <a:spcPct val="108000"/>
-              </a:lnSpc>
-              <a:spcBef>
-                <a:spcPts val="0"/>
-              </a:spcBef>
-              <a:spcAft>
-                <a:spcPts val="400"/>
-              </a:spcAft>
-            </a:pPr>
-            <a:r>
-              <a:rPr sz="1000" b="1" spc="100">
-                <a:solidFill>
-                  <a:srgbClr val="A5ABB2"/>
+                <a:spcPct val="110000"/>
+              </a:lnSpc>
+              <a:spcBef>
+                <a:spcPts val="0"/>
+              </a:spcBef>
+              <a:spcAft>
+                <a:spcPts val="400"/>
+              </a:spcAft>
+            </a:pPr>
+            <a:r>
+              <a:rPr sz="1100" b="1" spc="100">
+                <a:solidFill>
+                  <a:srgbClr val="9AA1A9"/>
                 </a:solidFill>
                 <a:latin typeface="Consolas"/>
                 <a:ea typeface="Consolas"/>
@@ -4424,14 +4378,14 @@
       </p:sp>
       <p:sp>
         <p:nvSpPr>
-          <p:cNvPr id="21" name="TextBox 20"/>
-          <p:cNvSpPr txBox="1"/>
-          <p:nvPr/>
-        </p:nvSpPr>
-        <p:spPr>
-          <a:xfrm>
-            <a:off x="7851647" y="2039112"/>
-            <a:ext cx="3057144" cy="402336"/>
+          <p:cNvPr id="20" name="TextBox 19"/>
+          <p:cNvSpPr txBox="1"/>
+          <p:nvPr/>
+        </p:nvSpPr>
+        <p:spPr>
+          <a:xfrm>
+            <a:off x="7851647" y="2103120"/>
+            <a:ext cx="3130296" cy="457200"/>
           </a:xfrm>
           <a:prstGeom prst="rect">
             <a:avLst/>
@@ -4446,19 +4400,19 @@
           <a:p>
             <a:pPr algn="l">
               <a:lnSpc>
-                <a:spcPct val="108000"/>
-              </a:lnSpc>
-              <a:spcBef>
-                <a:spcPts val="0"/>
-              </a:spcBef>
-              <a:spcAft>
-                <a:spcPts val="400"/>
-              </a:spcAft>
-            </a:pPr>
-            <a:r>
-              <a:rPr sz="1900" b="1">
-                <a:solidFill>
-                  <a:srgbClr val="171A1E"/>
+                <a:spcPct val="110000"/>
+              </a:lnSpc>
+              <a:spcBef>
+                <a:spcPts val="0"/>
+              </a:spcBef>
+              <a:spcAft>
+                <a:spcPts val="400"/>
+              </a:spcAft>
+            </a:pPr>
+            <a:r>
+              <a:rPr sz="2300" b="1">
+                <a:solidFill>
+                  <a:srgbClr val="15181C"/>
                 </a:solidFill>
                 <a:latin typeface="Noto Sans JP"/>
                 <a:ea typeface="Noto Sans JP"/>
@@ -4470,14 +4424,14 @@
       </p:sp>
       <p:sp>
         <p:nvSpPr>
-          <p:cNvPr id="22" name="TextBox 21"/>
-          <p:cNvSpPr txBox="1"/>
-          <p:nvPr/>
-        </p:nvSpPr>
-        <p:spPr>
-          <a:xfrm>
-            <a:off x="7851647" y="2496312"/>
-            <a:ext cx="3057144" cy="219456"/>
+          <p:cNvPr id="21" name="TextBox 20"/>
+          <p:cNvSpPr txBox="1"/>
+          <p:nvPr/>
+        </p:nvSpPr>
+        <p:spPr>
+          <a:xfrm>
+            <a:off x="7851647" y="3035808"/>
+            <a:ext cx="3057144" cy="402336"/>
           </a:xfrm>
           <a:prstGeom prst="rect">
             <a:avLst/>
@@ -4492,38 +4446,38 @@
           <a:p>
             <a:pPr algn="l">
               <a:lnSpc>
-                <a:spcPct val="108000"/>
-              </a:lnSpc>
-              <a:spcBef>
-                <a:spcPts val="0"/>
-              </a:spcBef>
-              <a:spcAft>
-                <a:spcPts val="400"/>
-              </a:spcAft>
-            </a:pPr>
-            <a:r>
-              <a:rPr sz="950" b="0">
-                <a:solidFill>
-                  <a:srgbClr val="7A828B"/>
+                <a:spcPct val="118000"/>
+              </a:lnSpc>
+              <a:spcBef>
+                <a:spcPts val="0"/>
+              </a:spcBef>
+              <a:spcAft>
+                <a:spcPts val="400"/>
+              </a:spcAft>
+            </a:pPr>
+            <a:r>
+              <a:rPr sz="1450" b="1">
+                <a:solidFill>
+                  <a:srgbClr val="6E767F"/>
                 </a:solidFill>
                 <a:latin typeface="Noto Sans JP"/>
                 <a:ea typeface="Noto Sans JP"/>
               </a:rPr>
-              <a:t>　</a:t>
-            </a:r>
-          </a:p>
-        </p:txBody>
-      </p:sp>
-      <p:sp>
-        <p:nvSpPr>
-          <p:cNvPr id="23" name="TextBox 22"/>
-          <p:cNvSpPr txBox="1"/>
-          <p:nvPr/>
-        </p:nvSpPr>
-        <p:spPr>
-          <a:xfrm>
-            <a:off x="7851647" y="2807208"/>
-            <a:ext cx="3011423" cy="365760"/>
+              <a:t>半導体・重要物資の国産化</a:t>
+            </a:r>
+          </a:p>
+        </p:txBody>
+      </p:sp>
+      <p:sp>
+        <p:nvSpPr>
+          <p:cNvPr id="22" name="TextBox 21"/>
+          <p:cNvSpPr txBox="1"/>
+          <p:nvPr/>
+        </p:nvSpPr>
+        <p:spPr>
+          <a:xfrm>
+            <a:off x="7851647" y="3474720"/>
+            <a:ext cx="3057144" cy="502920"/>
           </a:xfrm>
           <a:prstGeom prst="rect">
             <a:avLst/>
@@ -4538,79 +4492,33 @@
           <a:p>
             <a:pPr algn="l">
               <a:lnSpc>
-                <a:spcPct val="114000"/>
-              </a:lnSpc>
-              <a:spcBef>
-                <a:spcPts val="0"/>
-              </a:spcBef>
-              <a:spcAft>
-                <a:spcPts val="400"/>
-              </a:spcAft>
-            </a:pPr>
-            <a:r>
-              <a:rPr sz="1200" b="1">
-                <a:solidFill>
-                  <a:srgbClr val="7A828B"/>
+                <a:spcPct val="122000"/>
+              </a:lnSpc>
+              <a:spcBef>
+                <a:spcPts val="0"/>
+              </a:spcBef>
+              <a:spcAft>
+                <a:spcPts val="400"/>
+              </a:spcAft>
+            </a:pPr>
+            <a:r>
+              <a:rPr sz="1450" b="1">
+                <a:solidFill>
+                  <a:srgbClr val="E60012"/>
                 </a:solidFill>
                 <a:latin typeface="Noto Sans JP"/>
                 <a:ea typeface="Noto Sans JP"/>
               </a:rPr>
-              <a:t>半導体・重要物資の国産化</a:t>
-            </a:r>
-          </a:p>
-        </p:txBody>
-      </p:sp>
-      <p:sp>
-        <p:nvSpPr>
-          <p:cNvPr id="24" name="TextBox 23"/>
-          <p:cNvSpPr txBox="1"/>
-          <p:nvPr/>
-        </p:nvSpPr>
-        <p:spPr>
-          <a:xfrm>
-            <a:off x="7851647" y="3154680"/>
-            <a:ext cx="3011423" cy="457200"/>
-          </a:xfrm>
-          <a:prstGeom prst="rect">
-            <a:avLst/>
-          </a:prstGeom>
-          <a:noFill/>
-        </p:spPr>
-        <p:txBody>
-          <a:bodyPr wrap="square" anchor="t" lIns="0" rIns="0" tIns="0" bIns="0">
-            <a:spAutoFit/>
-          </a:bodyPr>
-          <a:lstStyle/>
-          <a:p>
-            <a:pPr algn="l">
-              <a:lnSpc>
-                <a:spcPct val="120000"/>
-              </a:lnSpc>
-              <a:spcBef>
-                <a:spcPts val="0"/>
-              </a:spcBef>
-              <a:spcAft>
-                <a:spcPts val="400"/>
-              </a:spcAft>
-            </a:pPr>
-            <a:r>
-              <a:rPr sz="1200" b="1">
-                <a:solidFill>
-                  <a:srgbClr val="E60012"/>
+              <a:t>→ </a:t>
+            </a:r>
+            <a:r>
+              <a:rPr sz="1450" b="0">
+                <a:solidFill>
+                  <a:srgbClr val="373C43"/>
                 </a:solidFill>
                 <a:latin typeface="Noto Sans JP"/>
                 <a:ea typeface="Noto Sans JP"/>
               </a:rPr>
-              <a:t>→ </a:t>
-            </a:r>
-            <a:r>
-              <a:rPr sz="1200" b="0">
-                <a:solidFill>
-                  <a:srgbClr val="3C4148"/>
-                </a:solidFill>
-                <a:latin typeface="Noto Sans JP"/>
-                <a:ea typeface="Noto Sans JP"/>
-              </a:rPr>
               <a:t>国内に工場を新設し、供給網を再構築</a:t>
             </a:r>
           </a:p>
@@ -4618,20 +4526,20 @@
       </p:sp>
       <p:sp>
         <p:nvSpPr>
-          <p:cNvPr id="25" name="Rectangle 24"/>
+          <p:cNvPr id="23" name="Rectangle 22"/>
           <p:cNvSpPr/>
           <p:nvPr/>
         </p:nvSpPr>
         <p:spPr>
           <a:xfrm>
-            <a:off x="822960" y="3913632"/>
+            <a:off x="822960" y="4206240"/>
             <a:ext cx="10543032" cy="12700"/>
           </a:xfrm>
           <a:prstGeom prst="rect">
             <a:avLst/>
           </a:prstGeom>
           <a:solidFill>
-            <a:srgbClr val="DCDFE4"/>
+            <a:srgbClr val="D6DADF"/>
           </a:solidFill>
           <a:ln>
             <a:noFill/>
@@ -4662,14 +4570,14 @@
       </p:sp>
       <p:sp>
         <p:nvSpPr>
-          <p:cNvPr id="26" name="TextBox 25"/>
-          <p:cNvSpPr txBox="1"/>
-          <p:nvPr/>
-        </p:nvSpPr>
-        <p:spPr>
-          <a:xfrm>
-            <a:off x="804672" y="4160520"/>
-            <a:ext cx="10607040" cy="457200"/>
+          <p:cNvPr id="24" name="TextBox 23"/>
+          <p:cNvSpPr txBox="1"/>
+          <p:nvPr/>
+        </p:nvSpPr>
+        <p:spPr>
+          <a:xfrm>
+            <a:off x="804672" y="4434840"/>
+            <a:ext cx="10698480" cy="457200"/>
           </a:xfrm>
           <a:prstGeom prst="rect">
             <a:avLst/>
@@ -4684,19 +4592,19 @@
           <a:p>
             <a:pPr algn="l">
               <a:lnSpc>
-                <a:spcPct val="108000"/>
-              </a:lnSpc>
-              <a:spcBef>
-                <a:spcPts val="0"/>
-              </a:spcBef>
-              <a:spcAft>
-                <a:spcPts val="400"/>
-              </a:spcAft>
-            </a:pPr>
-            <a:r>
-              <a:rPr sz="1700" b="1">
-                <a:solidFill>
-                  <a:srgbClr val="171A1E"/>
+                <a:spcPct val="110000"/>
+              </a:lnSpc>
+              <a:spcBef>
+                <a:spcPts val="0"/>
+              </a:spcBef>
+              <a:spcAft>
+                <a:spcPts val="400"/>
+              </a:spcAft>
+            </a:pPr>
+            <a:r>
+              <a:rPr sz="1900" b="1">
+                <a:solidFill>
+                  <a:srgbClr val="15181C"/>
                 </a:solidFill>
                 <a:latin typeface="Noto Sans JP"/>
                 <a:ea typeface="Noto Sans JP"/>
@@ -4704,7 +4612,7 @@
               <a:t>どのメガトレンドも、実現するには</a:t>
             </a:r>
             <a:r>
-              <a:rPr sz="1700" b="1">
+              <a:rPr sz="1900" b="1">
                 <a:solidFill>
                   <a:srgbClr val="E60012"/>
                 </a:solidFill>
@@ -4714,9 +4622,9 @@
               <a:t>膨大な“設備”</a:t>
             </a:r>
             <a:r>
-              <a:rPr sz="1700" b="1">
-                <a:solidFill>
-                  <a:srgbClr val="171A1E"/>
+              <a:rPr sz="1900" b="1">
+                <a:solidFill>
+                  <a:srgbClr val="15181C"/>
                 </a:solidFill>
                 <a:latin typeface="Noto Sans JP"/>
                 <a:ea typeface="Noto Sans JP"/>
@@ -4728,14 +4636,14 @@
       </p:sp>
       <p:sp>
         <p:nvSpPr>
-          <p:cNvPr id="27" name="TextBox 26"/>
-          <p:cNvSpPr txBox="1"/>
-          <p:nvPr/>
-        </p:nvSpPr>
-        <p:spPr>
-          <a:xfrm>
-            <a:off x="804672" y="4709160"/>
-            <a:ext cx="10607040" cy="411480"/>
+          <p:cNvPr id="25" name="TextBox 24"/>
+          <p:cNvSpPr txBox="1"/>
+          <p:nvPr/>
+        </p:nvSpPr>
+        <p:spPr>
+          <a:xfrm>
+            <a:off x="804672" y="5029200"/>
+            <a:ext cx="10698480" cy="457200"/>
           </a:xfrm>
           <a:prstGeom prst="rect">
             <a:avLst/>
@@ -4750,29 +4658,29 @@
           <a:p>
             <a:pPr algn="l">
               <a:lnSpc>
-                <a:spcPct val="108000"/>
-              </a:lnSpc>
-              <a:spcBef>
-                <a:spcPts val="0"/>
-              </a:spcBef>
-              <a:spcAft>
-                <a:spcPts val="400"/>
-              </a:spcAft>
-            </a:pPr>
-            <a:r>
-              <a:rPr sz="1350" b="0">
-                <a:solidFill>
-                  <a:srgbClr val="3C4148"/>
+                <a:spcPct val="110000"/>
+              </a:lnSpc>
+              <a:spcBef>
+                <a:spcPts val="0"/>
+              </a:spcBef>
+              <a:spcAft>
+                <a:spcPts val="400"/>
+              </a:spcAft>
+            </a:pPr>
+            <a:r>
+              <a:rPr sz="1550" b="0">
+                <a:solidFill>
+                  <a:srgbClr val="373C43"/>
                 </a:solidFill>
                 <a:latin typeface="Noto Sans JP"/>
                 <a:ea typeface="Noto Sans JP"/>
               </a:rPr>
-              <a:t>そして設備を作る・建てるのは、建設業だけではない——</a:t>
-            </a:r>
-            <a:r>
-              <a:rPr sz="1350" b="1">
-                <a:solidFill>
-                  <a:srgbClr val="171A1E"/>
+              <a:t>設備を作る・建てるのは、建設業だけではない——</a:t>
+            </a:r>
+            <a:r>
+              <a:rPr sz="1550" b="1">
+                <a:solidFill>
+                  <a:srgbClr val="15181C"/>
                 </a:solidFill>
                 <a:latin typeface="Noto Sans JP"/>
                 <a:ea typeface="Noto Sans JP"/>
@@ -4784,20 +4692,20 @@
       </p:sp>
       <p:sp>
         <p:nvSpPr>
-          <p:cNvPr id="28" name="Rectangle 27"/>
+          <p:cNvPr id="26" name="Rectangle 25"/>
           <p:cNvSpPr/>
           <p:nvPr/>
         </p:nvSpPr>
         <p:spPr>
           <a:xfrm>
-            <a:off x="822960" y="5440680"/>
-            <a:ext cx="10543032" cy="12700"/>
+            <a:off x="822960" y="5760720"/>
+            <a:ext cx="82296" cy="475488"/>
           </a:xfrm>
           <a:prstGeom prst="rect">
             <a:avLst/>
           </a:prstGeom>
           <a:solidFill>
-            <a:srgbClr val="DCDFE4"/>
+            <a:srgbClr val="E60012"/>
           </a:solidFill>
           <a:ln>
             <a:noFill/>
@@ -4828,41 +4736,41 @@
       </p:sp>
       <p:sp>
         <p:nvSpPr>
-          <p:cNvPr id="29" name="TextBox 28"/>
-          <p:cNvSpPr txBox="1"/>
-          <p:nvPr/>
-        </p:nvSpPr>
-        <p:spPr>
-          <a:xfrm>
-            <a:off x="804672" y="5623560"/>
-            <a:ext cx="10607040" cy="457200"/>
-          </a:xfrm>
-          <a:prstGeom prst="rect">
-            <a:avLst/>
-          </a:prstGeom>
-          <a:noFill/>
-        </p:spPr>
-        <p:txBody>
-          <a:bodyPr wrap="square" anchor="t" lIns="0" rIns="0" tIns="0" bIns="0">
+          <p:cNvPr id="27" name="TextBox 26"/>
+          <p:cNvSpPr txBox="1"/>
+          <p:nvPr/>
+        </p:nvSpPr>
+        <p:spPr>
+          <a:xfrm>
+            <a:off x="1078992" y="5715000"/>
+            <a:ext cx="10268711" cy="566928"/>
+          </a:xfrm>
+          <a:prstGeom prst="rect">
+            <a:avLst/>
+          </a:prstGeom>
+          <a:noFill/>
+        </p:spPr>
+        <p:txBody>
+          <a:bodyPr wrap="square" anchor="ctr" lIns="0" rIns="0" tIns="0" bIns="0">
             <a:spAutoFit/>
           </a:bodyPr>
           <a:lstStyle/>
           <a:p>
             <a:pPr algn="l">
               <a:lnSpc>
-                <a:spcPct val="108000"/>
-              </a:lnSpc>
-              <a:spcBef>
-                <a:spcPts val="0"/>
-              </a:spcBef>
-              <a:spcAft>
-                <a:spcPts val="400"/>
-              </a:spcAft>
-            </a:pPr>
-            <a:r>
-              <a:rPr sz="1500" b="1">
-                <a:solidFill>
-                  <a:srgbClr val="171A1E"/>
+                <a:spcPct val="116000"/>
+              </a:lnSpc>
+              <a:spcBef>
+                <a:spcPts val="0"/>
+              </a:spcBef>
+              <a:spcAft>
+                <a:spcPts val="400"/>
+              </a:spcAft>
+            </a:pPr>
+            <a:r>
+              <a:rPr sz="1900" b="1">
+                <a:solidFill>
+                  <a:srgbClr val="15181C"/>
                 </a:solidFill>
                 <a:latin typeface="Noto Sans JP"/>
                 <a:ea typeface="Noto Sans JP"/>
@@ -4870,7 +4778,7 @@
               <a:t>→ 今日はその中で、最も勢いのある「</a:t>
             </a:r>
             <a:r>
-              <a:rPr sz="1500" b="1">
+              <a:rPr sz="1900" b="1">
                 <a:solidFill>
                   <a:srgbClr val="E60012"/>
                 </a:solidFill>
@@ -4880,9 +4788,9 @@
               <a:t>AI</a:t>
             </a:r>
             <a:r>
-              <a:rPr sz="1500" b="1">
-                <a:solidFill>
-                  <a:srgbClr val="171A1E"/>
+              <a:rPr sz="1900" b="1">
+                <a:solidFill>
+                  <a:srgbClr val="15181C"/>
                 </a:solidFill>
                 <a:latin typeface="Noto Sans JP"/>
                 <a:ea typeface="Noto Sans JP"/>
@@ -4962,8 +4870,8 @@
         </p:nvSpPr>
         <p:spPr>
           <a:xfrm>
-            <a:off x="822960" y="585216"/>
-            <a:ext cx="109728" cy="109728"/>
+            <a:off x="822960" y="566928"/>
+            <a:ext cx="128016" cy="128016"/>
           </a:xfrm>
           <a:prstGeom prst="rect">
             <a:avLst/>
@@ -5006,8 +4914,8 @@
         </p:nvSpPr>
         <p:spPr>
           <a:xfrm>
-            <a:off x="1014984" y="521207"/>
-            <a:ext cx="8686800" cy="237744"/>
+            <a:off x="1042415" y="502920"/>
+            <a:ext cx="8686800" cy="256032"/>
           </a:xfrm>
           <a:prstGeom prst="rect">
             <a:avLst/>
@@ -5022,17 +4930,17 @@
           <a:p>
             <a:pPr algn="l">
               <a:lnSpc>
-                <a:spcPct val="108000"/>
-              </a:lnSpc>
-              <a:spcBef>
-                <a:spcPts val="0"/>
-              </a:spcBef>
-              <a:spcAft>
-                <a:spcPts val="400"/>
-              </a:spcAft>
-            </a:pPr>
-            <a:r>
-              <a:rPr sz="1050" b="1" spc="150">
+                <a:spcPct val="110000"/>
+              </a:lnSpc>
+              <a:spcBef>
+                <a:spcPts val="0"/>
+              </a:spcBef>
+              <a:spcAft>
+                <a:spcPts val="400"/>
+              </a:spcAft>
+            </a:pPr>
+            <a:r>
+              <a:rPr sz="1150" b="1" spc="150">
                 <a:solidFill>
                   <a:srgbClr val="E60012"/>
                 </a:solidFill>
@@ -5052,8 +4960,8 @@
         </p:nvSpPr>
         <p:spPr>
           <a:xfrm>
-            <a:off x="10817352" y="521207"/>
-            <a:ext cx="548640" cy="237744"/>
+            <a:off x="10725912" y="502920"/>
+            <a:ext cx="640080" cy="256032"/>
           </a:xfrm>
           <a:prstGeom prst="rect">
             <a:avLst/>
@@ -5068,19 +4976,19 @@
           <a:p>
             <a:pPr algn="r">
               <a:lnSpc>
-                <a:spcPct val="108000"/>
-              </a:lnSpc>
-              <a:spcBef>
-                <a:spcPts val="0"/>
-              </a:spcBef>
-              <a:spcAft>
-                <a:spcPts val="400"/>
-              </a:spcAft>
-            </a:pPr>
-            <a:r>
-              <a:rPr sz="1050" b="1">
-                <a:solidFill>
-                  <a:srgbClr val="A5ABB2"/>
+                <a:spcPct val="110000"/>
+              </a:lnSpc>
+              <a:spcBef>
+                <a:spcPts val="0"/>
+              </a:spcBef>
+              <a:spcAft>
+                <a:spcPts val="400"/>
+              </a:spcAft>
+            </a:pPr>
+            <a:r>
+              <a:rPr sz="1150" b="1">
+                <a:solidFill>
+                  <a:srgbClr val="9AA1A9"/>
                 </a:solidFill>
                 <a:latin typeface="Consolas"/>
                 <a:ea typeface="Consolas"/>
@@ -5098,8 +5006,8 @@
         </p:nvSpPr>
         <p:spPr>
           <a:xfrm>
-            <a:off x="804672" y="822960"/>
-            <a:ext cx="10543032" cy="457200"/>
+            <a:off x="804672" y="841248"/>
+            <a:ext cx="10543032" cy="502920"/>
           </a:xfrm>
           <a:prstGeom prst="rect">
             <a:avLst/>
@@ -5114,19 +5022,19 @@
           <a:p>
             <a:pPr algn="l">
               <a:lnSpc>
-                <a:spcPct val="108000"/>
-              </a:lnSpc>
-              <a:spcBef>
-                <a:spcPts val="0"/>
-              </a:spcBef>
-              <a:spcAft>
-                <a:spcPts val="400"/>
-              </a:spcAft>
-            </a:pPr>
-            <a:r>
-              <a:rPr sz="2100" b="1">
-                <a:solidFill>
-                  <a:srgbClr val="171A1E"/>
+                <a:spcPct val="110000"/>
+              </a:lnSpc>
+              <a:spcBef>
+                <a:spcPts val="0"/>
+              </a:spcBef>
+              <a:spcAft>
+                <a:spcPts val="400"/>
+              </a:spcAft>
+            </a:pPr>
+            <a:r>
+              <a:rPr sz="2400" b="1">
+                <a:solidFill>
+                  <a:srgbClr val="15181C"/>
                 </a:solidFill>
                 <a:latin typeface="Noto Sans JP"/>
                 <a:ea typeface="Noto Sans JP"/>
@@ -5144,14 +5052,14 @@
         </p:nvSpPr>
         <p:spPr>
           <a:xfrm>
-            <a:off x="822960" y="1389888"/>
-            <a:ext cx="10543032" cy="15240"/>
+            <a:off x="822960" y="1463040"/>
+            <a:ext cx="10543032" cy="17780"/>
           </a:xfrm>
           <a:prstGeom prst="rect">
             <a:avLst/>
           </a:prstGeom>
           <a:solidFill>
-            <a:srgbClr val="DCDFE4"/>
+            <a:srgbClr val="D6DADF"/>
           </a:solidFill>
           <a:ln>
             <a:noFill/>
@@ -5188,8 +5096,8 @@
         </p:nvSpPr>
         <p:spPr>
           <a:xfrm>
-            <a:off x="822960" y="1856232"/>
-            <a:ext cx="2743200" cy="777240"/>
+            <a:off x="822960" y="1883664"/>
+            <a:ext cx="2834640" cy="777240"/>
           </a:xfrm>
           <a:prstGeom prst="rect">
             <a:avLst/>
@@ -5204,19 +5112,19 @@
           <a:p>
             <a:pPr algn="l">
               <a:lnSpc>
-                <a:spcPct val="114000"/>
-              </a:lnSpc>
-              <a:spcBef>
-                <a:spcPts val="0"/>
-              </a:spcBef>
-              <a:spcAft>
-                <a:spcPts val="300"/>
-              </a:spcAft>
-            </a:pPr>
-            <a:r>
-              <a:rPr sz="1500" b="1">
-                <a:solidFill>
-                  <a:srgbClr val="171A1E"/>
+                <a:spcPct val="116000"/>
+              </a:lnSpc>
+              <a:spcBef>
+                <a:spcPts val="0"/>
+              </a:spcBef>
+              <a:spcAft>
+                <a:spcPts val="400"/>
+              </a:spcAft>
+            </a:pPr>
+            <a:r>
+              <a:rPr sz="1700" b="1">
+                <a:solidFill>
+                  <a:srgbClr val="15181C"/>
                 </a:solidFill>
                 <a:latin typeface="Noto Sans JP"/>
                 <a:ea typeface="Noto Sans JP"/>
@@ -5227,19 +5135,19 @@
           <a:p>
             <a:pPr algn="l">
               <a:lnSpc>
-                <a:spcPct val="114000"/>
-              </a:lnSpc>
-              <a:spcBef>
-                <a:spcPts val="0"/>
-              </a:spcBef>
-              <a:spcAft>
-                <a:spcPts val="300"/>
-              </a:spcAft>
-            </a:pPr>
-            <a:r>
-              <a:rPr sz="950" b="1">
-                <a:solidFill>
-                  <a:srgbClr val="7A828B"/>
+                <a:spcPct val="116000"/>
+              </a:lnSpc>
+              <a:spcBef>
+                <a:spcPts val="0"/>
+              </a:spcBef>
+              <a:spcAft>
+                <a:spcPts val="400"/>
+              </a:spcAft>
+            </a:pPr>
+            <a:r>
+              <a:rPr sz="1050" b="1">
+                <a:solidFill>
+                  <a:srgbClr val="6E767F"/>
                 </a:solidFill>
                 <a:latin typeface="Consolas"/>
                 <a:ea typeface="Consolas"/>
@@ -5257,14 +5165,14 @@
         </p:nvSpPr>
         <p:spPr>
           <a:xfrm>
-            <a:off x="3794760" y="2404872"/>
-            <a:ext cx="3520440" cy="15240"/>
+            <a:off x="3794760" y="2432304"/>
+            <a:ext cx="3566160" cy="17780"/>
           </a:xfrm>
           <a:prstGeom prst="rect">
             <a:avLst/>
           </a:prstGeom>
           <a:solidFill>
-            <a:srgbClr val="DCDFE4"/>
+            <a:srgbClr val="D6DADF"/>
           </a:solidFill>
           <a:ln>
             <a:noFill/>
@@ -5301,14 +5209,14 @@
         </p:nvSpPr>
         <p:spPr>
           <a:xfrm>
-            <a:off x="4042791" y="2362884"/>
-            <a:ext cx="384048" cy="41987"/>
+            <a:off x="4011930" y="2386117"/>
+            <a:ext cx="457200" cy="46186"/>
           </a:xfrm>
           <a:prstGeom prst="rect">
             <a:avLst/>
           </a:prstGeom>
           <a:solidFill>
-            <a:srgbClr val="CFD3D8"/>
+            <a:srgbClr val="D2D6DB"/>
           </a:solidFill>
           <a:ln>
             <a:noFill/>
@@ -5345,8 +5253,8 @@
         </p:nvSpPr>
         <p:spPr>
           <a:xfrm>
-            <a:off x="3794760" y="2459736"/>
-            <a:ext cx="880110" cy="201168"/>
+            <a:off x="3794760" y="2496312"/>
+            <a:ext cx="891540" cy="219456"/>
           </a:xfrm>
           <a:prstGeom prst="rect">
             <a:avLst/>
@@ -5361,19 +5269,19 @@
           <a:p>
             <a:pPr algn="ctr">
               <a:lnSpc>
-                <a:spcPct val="108000"/>
-              </a:lnSpc>
-              <a:spcBef>
-                <a:spcPts val="0"/>
-              </a:spcBef>
-              <a:spcAft>
-                <a:spcPts val="400"/>
-              </a:spcAft>
-            </a:pPr>
-            <a:r>
-              <a:rPr sz="850" b="1">
-                <a:solidFill>
-                  <a:srgbClr val="7A828B"/>
+                <a:spcPct val="110000"/>
+              </a:lnSpc>
+              <a:spcBef>
+                <a:spcPts val="0"/>
+              </a:spcBef>
+              <a:spcAft>
+                <a:spcPts val="400"/>
+              </a:spcAft>
+            </a:pPr>
+            <a:r>
+              <a:rPr sz="950" b="1">
+                <a:solidFill>
+                  <a:srgbClr val="6E767F"/>
                 </a:solidFill>
                 <a:latin typeface="Consolas"/>
                 <a:ea typeface="Consolas"/>
@@ -5391,14 +5299,14 @@
         </p:nvSpPr>
         <p:spPr>
           <a:xfrm>
-            <a:off x="4922901" y="2270511"/>
-            <a:ext cx="384048" cy="134360"/>
+            <a:off x="4903470" y="2284507"/>
+            <a:ext cx="457200" cy="147796"/>
           </a:xfrm>
           <a:prstGeom prst="rect">
             <a:avLst/>
           </a:prstGeom>
           <a:solidFill>
-            <a:srgbClr val="CFD3D8"/>
+            <a:srgbClr val="D2D6DB"/>
           </a:solidFill>
           <a:ln>
             <a:noFill/>
@@ -5435,8 +5343,8 @@
         </p:nvSpPr>
         <p:spPr>
           <a:xfrm>
-            <a:off x="4674870" y="2459736"/>
-            <a:ext cx="880110" cy="201168"/>
+            <a:off x="4686300" y="2496312"/>
+            <a:ext cx="891540" cy="219456"/>
           </a:xfrm>
           <a:prstGeom prst="rect">
             <a:avLst/>
@@ -5451,19 +5359,19 @@
           <a:p>
             <a:pPr algn="ctr">
               <a:lnSpc>
-                <a:spcPct val="108000"/>
-              </a:lnSpc>
-              <a:spcBef>
-                <a:spcPts val="0"/>
-              </a:spcBef>
-              <a:spcAft>
-                <a:spcPts val="400"/>
-              </a:spcAft>
-            </a:pPr>
-            <a:r>
-              <a:rPr sz="850" b="1">
-                <a:solidFill>
-                  <a:srgbClr val="7A828B"/>
+                <a:spcPct val="110000"/>
+              </a:lnSpc>
+              <a:spcBef>
+                <a:spcPts val="0"/>
+              </a:spcBef>
+              <a:spcAft>
+                <a:spcPts val="400"/>
+              </a:spcAft>
+            </a:pPr>
+            <a:r>
+              <a:rPr sz="950" b="1">
+                <a:solidFill>
+                  <a:srgbClr val="6E767F"/>
                 </a:solidFill>
                 <a:latin typeface="Consolas"/>
                 <a:ea typeface="Consolas"/>
@@ -5481,14 +5389,14 @@
         </p:nvSpPr>
         <p:spPr>
           <a:xfrm>
-            <a:off x="5803011" y="2082965"/>
-            <a:ext cx="384048" cy="321906"/>
+            <a:off x="5795010" y="2078207"/>
+            <a:ext cx="457200" cy="354096"/>
           </a:xfrm>
           <a:prstGeom prst="rect">
             <a:avLst/>
           </a:prstGeom>
           <a:solidFill>
-            <a:srgbClr val="CFD3D8"/>
+            <a:srgbClr val="D2D6DB"/>
           </a:solidFill>
           <a:ln>
             <a:noFill/>
@@ -5525,8 +5433,8 @@
         </p:nvSpPr>
         <p:spPr>
           <a:xfrm>
-            <a:off x="5554980" y="2459736"/>
-            <a:ext cx="880110" cy="201168"/>
+            <a:off x="5577840" y="2496312"/>
+            <a:ext cx="891540" cy="219456"/>
           </a:xfrm>
           <a:prstGeom prst="rect">
             <a:avLst/>
@@ -5541,19 +5449,19 @@
           <a:p>
             <a:pPr algn="ctr">
               <a:lnSpc>
-                <a:spcPct val="108000"/>
-              </a:lnSpc>
-              <a:spcBef>
-                <a:spcPts val="0"/>
-              </a:spcBef>
-              <a:spcAft>
-                <a:spcPts val="400"/>
-              </a:spcAft>
-            </a:pPr>
-            <a:r>
-              <a:rPr sz="850" b="1">
-                <a:solidFill>
-                  <a:srgbClr val="7A828B"/>
+                <a:spcPct val="110000"/>
+              </a:lnSpc>
+              <a:spcBef>
+                <a:spcPts val="0"/>
+              </a:spcBef>
+              <a:spcAft>
+                <a:spcPts val="400"/>
+              </a:spcAft>
+            </a:pPr>
+            <a:r>
+              <a:rPr sz="950" b="1">
+                <a:solidFill>
+                  <a:srgbClr val="6E767F"/>
                 </a:solidFill>
                 <a:latin typeface="Consolas"/>
                 <a:ea typeface="Consolas"/>
@@ -5571,8 +5479,8 @@
         </p:nvSpPr>
         <p:spPr>
           <a:xfrm>
-            <a:off x="6683121" y="1856232"/>
-            <a:ext cx="384048" cy="548640"/>
+            <a:off x="6686550" y="1828800"/>
+            <a:ext cx="457200" cy="603504"/>
           </a:xfrm>
           <a:prstGeom prst="rect">
             <a:avLst/>
@@ -5615,8 +5523,8 @@
         </p:nvSpPr>
         <p:spPr>
           <a:xfrm>
-            <a:off x="6435090" y="2459736"/>
-            <a:ext cx="880110" cy="201168"/>
+            <a:off x="6469380" y="2496312"/>
+            <a:ext cx="891540" cy="219456"/>
           </a:xfrm>
           <a:prstGeom prst="rect">
             <a:avLst/>
@@ -5631,19 +5539,19 @@
           <a:p>
             <a:pPr algn="ctr">
               <a:lnSpc>
-                <a:spcPct val="108000"/>
-              </a:lnSpc>
-              <a:spcBef>
-                <a:spcPts val="0"/>
-              </a:spcBef>
-              <a:spcAft>
-                <a:spcPts val="400"/>
-              </a:spcAft>
-            </a:pPr>
-            <a:r>
-              <a:rPr sz="850" b="1">
-                <a:solidFill>
-                  <a:srgbClr val="7A828B"/>
+                <a:spcPct val="110000"/>
+              </a:lnSpc>
+              <a:spcBef>
+                <a:spcPts val="0"/>
+              </a:spcBef>
+              <a:spcAft>
+                <a:spcPts val="400"/>
+              </a:spcAft>
+            </a:pPr>
+            <a:r>
+              <a:rPr sz="950" b="1">
+                <a:solidFill>
+                  <a:srgbClr val="6E767F"/>
                 </a:solidFill>
                 <a:latin typeface="Consolas"/>
                 <a:ea typeface="Consolas"/>
@@ -5661,8 +5569,8 @@
         </p:nvSpPr>
         <p:spPr>
           <a:xfrm>
-            <a:off x="6134481" y="1636776"/>
-            <a:ext cx="1481328" cy="201168"/>
+            <a:off x="6137910" y="1591056"/>
+            <a:ext cx="1554480" cy="219456"/>
           </a:xfrm>
           <a:prstGeom prst="rect">
             <a:avLst/>
@@ -5677,19 +5585,19 @@
           <a:p>
             <a:pPr algn="ctr">
               <a:lnSpc>
-                <a:spcPct val="108000"/>
-              </a:lnSpc>
-              <a:spcBef>
-                <a:spcPts val="0"/>
-              </a:spcBef>
-              <a:spcAft>
-                <a:spcPts val="400"/>
-              </a:spcAft>
-            </a:pPr>
-            <a:r>
-              <a:rPr sz="900" b="1">
-                <a:solidFill>
-                  <a:srgbClr val="7A828B"/>
+                <a:spcPct val="110000"/>
+              </a:lnSpc>
+              <a:spcBef>
+                <a:spcPts val="0"/>
+              </a:spcBef>
+              <a:spcAft>
+                <a:spcPts val="400"/>
+              </a:spcAft>
+            </a:pPr>
+            <a:r>
+              <a:rPr sz="1000" b="1">
+                <a:solidFill>
+                  <a:srgbClr val="6E767F"/>
                 </a:solidFill>
                 <a:latin typeface="Consolas"/>
                 <a:ea typeface="Consolas"/>
@@ -5707,8 +5615,8 @@
         </p:nvSpPr>
         <p:spPr>
           <a:xfrm>
-            <a:off x="7955279" y="1783080"/>
-            <a:ext cx="1463040" cy="777240"/>
+            <a:off x="7909560" y="1810512"/>
+            <a:ext cx="1600200" cy="777240"/>
           </a:xfrm>
           <a:prstGeom prst="rect">
             <a:avLst/>
@@ -5723,17 +5631,17 @@
           <a:p>
             <a:pPr algn="l">
               <a:lnSpc>
-                <a:spcPct val="108000"/>
-              </a:lnSpc>
-              <a:spcBef>
-                <a:spcPts val="0"/>
-              </a:spcBef>
-              <a:spcAft>
-                <a:spcPts val="400"/>
-              </a:spcAft>
-            </a:pPr>
-            <a:r>
-              <a:rPr sz="3200" b="1">
+                <a:spcPct val="110000"/>
+              </a:lnSpc>
+              <a:spcBef>
+                <a:spcPts val="0"/>
+              </a:spcBef>
+              <a:spcAft>
+                <a:spcPts val="400"/>
+              </a:spcAft>
+            </a:pPr>
+            <a:r>
+              <a:rPr sz="3800" b="1">
                 <a:solidFill>
                   <a:srgbClr val="E60012"/>
                 </a:solidFill>
@@ -5753,8 +5661,8 @@
         </p:nvSpPr>
         <p:spPr>
           <a:xfrm>
-            <a:off x="9464040" y="1783080"/>
-            <a:ext cx="1920240" cy="777240"/>
+            <a:off x="9555480" y="1810512"/>
+            <a:ext cx="1828800" cy="777240"/>
           </a:xfrm>
           <a:prstGeom prst="rect">
             <a:avLst/>
@@ -5769,19 +5677,19 @@
           <a:p>
             <a:pPr algn="l">
               <a:lnSpc>
-                <a:spcPct val="108000"/>
-              </a:lnSpc>
-              <a:spcBef>
-                <a:spcPts val="0"/>
-              </a:spcBef>
-              <a:spcAft>
-                <a:spcPts val="400"/>
-              </a:spcAft>
-            </a:pPr>
-            <a:r>
-              <a:rPr sz="1100" b="1">
-                <a:solidFill>
-                  <a:srgbClr val="7A828B"/>
+                <a:spcPct val="110000"/>
+              </a:lnSpc>
+              <a:spcBef>
+                <a:spcPts val="0"/>
+              </a:spcBef>
+              <a:spcAft>
+                <a:spcPts val="400"/>
+              </a:spcAft>
+            </a:pPr>
+            <a:r>
+              <a:rPr sz="1300" b="1">
+                <a:solidFill>
+                  <a:srgbClr val="6E767F"/>
                 </a:solidFill>
                 <a:latin typeface="Noto Sans JP"/>
                 <a:ea typeface="Noto Sans JP"/>
@@ -5799,14 +5707,14 @@
         </p:nvSpPr>
         <p:spPr>
           <a:xfrm>
-            <a:off x="822960" y="2752344"/>
+            <a:off x="822960" y="2788920"/>
             <a:ext cx="10543032" cy="12700"/>
           </a:xfrm>
           <a:prstGeom prst="rect">
             <a:avLst/>
           </a:prstGeom>
           <a:solidFill>
-            <a:srgbClr val="DCDFE4"/>
+            <a:srgbClr val="D6DADF"/>
           </a:solidFill>
           <a:ln>
             <a:noFill/>
@@ -5843,8 +5751,8 @@
         </p:nvSpPr>
         <p:spPr>
           <a:xfrm>
-            <a:off x="822960" y="3026664"/>
-            <a:ext cx="2743200" cy="777240"/>
+            <a:off x="822960" y="3072384"/>
+            <a:ext cx="2834640" cy="777240"/>
           </a:xfrm>
           <a:prstGeom prst="rect">
             <a:avLst/>
@@ -5859,19 +5767,19 @@
           <a:p>
             <a:pPr algn="l">
               <a:lnSpc>
-                <a:spcPct val="114000"/>
-              </a:lnSpc>
-              <a:spcBef>
-                <a:spcPts val="0"/>
-              </a:spcBef>
-              <a:spcAft>
-                <a:spcPts val="300"/>
-              </a:spcAft>
-            </a:pPr>
-            <a:r>
-              <a:rPr sz="1500" b="1">
-                <a:solidFill>
-                  <a:srgbClr val="171A1E"/>
+                <a:spcPct val="116000"/>
+              </a:lnSpc>
+              <a:spcBef>
+                <a:spcPts val="0"/>
+              </a:spcBef>
+              <a:spcAft>
+                <a:spcPts val="400"/>
+              </a:spcAft>
+            </a:pPr>
+            <a:r>
+              <a:rPr sz="1700" b="1">
+                <a:solidFill>
+                  <a:srgbClr val="15181C"/>
                 </a:solidFill>
                 <a:latin typeface="Noto Sans JP"/>
                 <a:ea typeface="Noto Sans JP"/>
@@ -5882,19 +5790,19 @@
           <a:p>
             <a:pPr algn="l">
               <a:lnSpc>
-                <a:spcPct val="114000"/>
-              </a:lnSpc>
-              <a:spcBef>
-                <a:spcPts val="0"/>
-              </a:spcBef>
-              <a:spcAft>
-                <a:spcPts val="300"/>
-              </a:spcAft>
-            </a:pPr>
-            <a:r>
-              <a:rPr sz="950" b="1">
-                <a:solidFill>
-                  <a:srgbClr val="7A828B"/>
+                <a:spcPct val="116000"/>
+              </a:lnSpc>
+              <a:spcBef>
+                <a:spcPts val="0"/>
+              </a:spcBef>
+              <a:spcAft>
+                <a:spcPts val="400"/>
+              </a:spcAft>
+            </a:pPr>
+            <a:r>
+              <a:rPr sz="1050" b="1">
+                <a:solidFill>
+                  <a:srgbClr val="6E767F"/>
                 </a:solidFill>
                 <a:latin typeface="Consolas"/>
                 <a:ea typeface="Consolas"/>
@@ -5912,14 +5820,14 @@
         </p:nvSpPr>
         <p:spPr>
           <a:xfrm>
-            <a:off x="3794760" y="3575304"/>
-            <a:ext cx="3520440" cy="15240"/>
+            <a:off x="3794760" y="3621024"/>
+            <a:ext cx="3566160" cy="17780"/>
           </a:xfrm>
           <a:prstGeom prst="rect">
             <a:avLst/>
           </a:prstGeom>
           <a:solidFill>
-            <a:srgbClr val="DCDFE4"/>
+            <a:srgbClr val="D6DADF"/>
           </a:solidFill>
           <a:ln>
             <a:noFill/>
@@ -5956,14 +5864,14 @@
         </p:nvSpPr>
         <p:spPr>
           <a:xfrm>
-            <a:off x="4042791" y="3439089"/>
-            <a:ext cx="384048" cy="136214"/>
+            <a:off x="4011930" y="3471188"/>
+            <a:ext cx="457200" cy="149835"/>
           </a:xfrm>
           <a:prstGeom prst="rect">
             <a:avLst/>
           </a:prstGeom>
           <a:solidFill>
-            <a:srgbClr val="CFD3D8"/>
+            <a:srgbClr val="D2D6DB"/>
           </a:solidFill>
           <a:ln>
             <a:noFill/>
@@ -6000,8 +5908,8 @@
         </p:nvSpPr>
         <p:spPr>
           <a:xfrm>
-            <a:off x="3794760" y="3630168"/>
-            <a:ext cx="880110" cy="201168"/>
+            <a:off x="3794760" y="3685032"/>
+            <a:ext cx="891540" cy="219456"/>
           </a:xfrm>
           <a:prstGeom prst="rect">
             <a:avLst/>
@@ -6016,19 +5924,19 @@
           <a:p>
             <a:pPr algn="ctr">
               <a:lnSpc>
-                <a:spcPct val="108000"/>
-              </a:lnSpc>
-              <a:spcBef>
-                <a:spcPts val="0"/>
-              </a:spcBef>
-              <a:spcAft>
-                <a:spcPts val="400"/>
-              </a:spcAft>
-            </a:pPr>
-            <a:r>
-              <a:rPr sz="850" b="1">
-                <a:solidFill>
-                  <a:srgbClr val="7A828B"/>
+                <a:spcPct val="110000"/>
+              </a:lnSpc>
+              <a:spcBef>
+                <a:spcPts val="0"/>
+              </a:spcBef>
+              <a:spcAft>
+                <a:spcPts val="400"/>
+              </a:spcAft>
+            </a:pPr>
+            <a:r>
+              <a:rPr sz="950" b="1">
+                <a:solidFill>
+                  <a:srgbClr val="6E767F"/>
                 </a:solidFill>
                 <a:latin typeface="Consolas"/>
                 <a:ea typeface="Consolas"/>
@@ -6046,14 +5954,14 @@
         </p:nvSpPr>
         <p:spPr>
           <a:xfrm>
-            <a:off x="4922901" y="3401252"/>
-            <a:ext cx="384048" cy="174051"/>
+            <a:off x="4903470" y="3429567"/>
+            <a:ext cx="457200" cy="191456"/>
           </a:xfrm>
           <a:prstGeom prst="rect">
             <a:avLst/>
           </a:prstGeom>
           <a:solidFill>
-            <a:srgbClr val="CFD3D8"/>
+            <a:srgbClr val="D2D6DB"/>
           </a:solidFill>
           <a:ln>
             <a:noFill/>
@@ -6090,8 +5998,8 @@
         </p:nvSpPr>
         <p:spPr>
           <a:xfrm>
-            <a:off x="4674870" y="3630168"/>
-            <a:ext cx="880110" cy="201168"/>
+            <a:off x="4686300" y="3685032"/>
+            <a:ext cx="891540" cy="219456"/>
           </a:xfrm>
           <a:prstGeom prst="rect">
             <a:avLst/>
@@ -6106,19 +6014,19 @@
           <a:p>
             <a:pPr algn="ctr">
               <a:lnSpc>
-                <a:spcPct val="108000"/>
-              </a:lnSpc>
-              <a:spcBef>
-                <a:spcPts val="0"/>
-              </a:spcBef>
-              <a:spcAft>
-                <a:spcPts val="400"/>
-              </a:spcAft>
-            </a:pPr>
-            <a:r>
-              <a:rPr sz="850" b="1">
-                <a:solidFill>
-                  <a:srgbClr val="7A828B"/>
+                <a:spcPct val="110000"/>
+              </a:lnSpc>
+              <a:spcBef>
+                <a:spcPts val="0"/>
+              </a:spcBef>
+              <a:spcAft>
+                <a:spcPts val="400"/>
+              </a:spcAft>
+            </a:pPr>
+            <a:r>
+              <a:rPr sz="950" b="1">
+                <a:solidFill>
+                  <a:srgbClr val="6E767F"/>
                 </a:solidFill>
                 <a:latin typeface="Consolas"/>
                 <a:ea typeface="Consolas"/>
@@ -6136,14 +6044,14 @@
         </p:nvSpPr>
         <p:spPr>
           <a:xfrm>
-            <a:off x="5803011" y="3265038"/>
-            <a:ext cx="384048" cy="310265"/>
+            <a:off x="5795010" y="3279732"/>
+            <a:ext cx="457200" cy="341291"/>
           </a:xfrm>
           <a:prstGeom prst="rect">
             <a:avLst/>
           </a:prstGeom>
           <a:solidFill>
-            <a:srgbClr val="CFD3D8"/>
+            <a:srgbClr val="D2D6DB"/>
           </a:solidFill>
           <a:ln>
             <a:noFill/>
@@ -6180,8 +6088,8 @@
         </p:nvSpPr>
         <p:spPr>
           <a:xfrm>
-            <a:off x="5554980" y="3630168"/>
-            <a:ext cx="880110" cy="201168"/>
+            <a:off x="5577840" y="3685032"/>
+            <a:ext cx="891540" cy="219456"/>
           </a:xfrm>
           <a:prstGeom prst="rect">
             <a:avLst/>
@@ -6196,19 +6104,19 @@
           <a:p>
             <a:pPr algn="ctr">
               <a:lnSpc>
-                <a:spcPct val="108000"/>
-              </a:lnSpc>
-              <a:spcBef>
-                <a:spcPts val="0"/>
-              </a:spcBef>
-              <a:spcAft>
-                <a:spcPts val="400"/>
-              </a:spcAft>
-            </a:pPr>
-            <a:r>
-              <a:rPr sz="850" b="1">
-                <a:solidFill>
-                  <a:srgbClr val="7A828B"/>
+                <a:spcPct val="110000"/>
+              </a:lnSpc>
+              <a:spcBef>
+                <a:spcPts val="0"/>
+              </a:spcBef>
+              <a:spcAft>
+                <a:spcPts val="400"/>
+              </a:spcAft>
+            </a:pPr>
+            <a:r>
+              <a:rPr sz="950" b="1">
+                <a:solidFill>
+                  <a:srgbClr val="6E767F"/>
                 </a:solidFill>
                 <a:latin typeface="Consolas"/>
                 <a:ea typeface="Consolas"/>
@@ -6226,8 +6134,8 @@
         </p:nvSpPr>
         <p:spPr>
           <a:xfrm>
-            <a:off x="6683121" y="3026664"/>
-            <a:ext cx="384048" cy="548640"/>
+            <a:off x="6686550" y="3017520"/>
+            <a:ext cx="457200" cy="603504"/>
           </a:xfrm>
           <a:prstGeom prst="rect">
             <a:avLst/>
@@ -6270,8 +6178,8 @@
         </p:nvSpPr>
         <p:spPr>
           <a:xfrm>
-            <a:off x="6435090" y="3630168"/>
-            <a:ext cx="880110" cy="201168"/>
+            <a:off x="6469380" y="3685032"/>
+            <a:ext cx="891540" cy="219456"/>
           </a:xfrm>
           <a:prstGeom prst="rect">
             <a:avLst/>
@@ -6286,19 +6194,19 @@
           <a:p>
             <a:pPr algn="ctr">
               <a:lnSpc>
-                <a:spcPct val="108000"/>
-              </a:lnSpc>
-              <a:spcBef>
-                <a:spcPts val="0"/>
-              </a:spcBef>
-              <a:spcAft>
-                <a:spcPts val="400"/>
-              </a:spcAft>
-            </a:pPr>
-            <a:r>
-              <a:rPr sz="850" b="1">
-                <a:solidFill>
-                  <a:srgbClr val="7A828B"/>
+                <a:spcPct val="110000"/>
+              </a:lnSpc>
+              <a:spcBef>
+                <a:spcPts val="0"/>
+              </a:spcBef>
+              <a:spcAft>
+                <a:spcPts val="400"/>
+              </a:spcAft>
+            </a:pPr>
+            <a:r>
+              <a:rPr sz="950" b="1">
+                <a:solidFill>
+                  <a:srgbClr val="6E767F"/>
                 </a:solidFill>
                 <a:latin typeface="Consolas"/>
                 <a:ea typeface="Consolas"/>
@@ -6316,8 +6224,8 @@
         </p:nvSpPr>
         <p:spPr>
           <a:xfrm>
-            <a:off x="6134481" y="2807208"/>
-            <a:ext cx="1481328" cy="201168"/>
+            <a:off x="6137910" y="2779776"/>
+            <a:ext cx="1554480" cy="219456"/>
           </a:xfrm>
           <a:prstGeom prst="rect">
             <a:avLst/>
@@ -6332,19 +6240,19 @@
           <a:p>
             <a:pPr algn="ctr">
               <a:lnSpc>
-                <a:spcPct val="108000"/>
-              </a:lnSpc>
-              <a:spcBef>
-                <a:spcPts val="0"/>
-              </a:spcBef>
-              <a:spcAft>
-                <a:spcPts val="400"/>
-              </a:spcAft>
-            </a:pPr>
-            <a:r>
-              <a:rPr sz="900" b="1">
-                <a:solidFill>
-                  <a:srgbClr val="7A828B"/>
+                <a:spcPct val="110000"/>
+              </a:lnSpc>
+              <a:spcBef>
+                <a:spcPts val="0"/>
+              </a:spcBef>
+              <a:spcAft>
+                <a:spcPts val="400"/>
+              </a:spcAft>
+            </a:pPr>
+            <a:r>
+              <a:rPr sz="1000" b="1">
+                <a:solidFill>
+                  <a:srgbClr val="6E767F"/>
                 </a:solidFill>
                 <a:latin typeface="Consolas"/>
                 <a:ea typeface="Consolas"/>
@@ -6362,8 +6270,8 @@
         </p:nvSpPr>
         <p:spPr>
           <a:xfrm>
-            <a:off x="7955279" y="2953512"/>
-            <a:ext cx="1463040" cy="777240"/>
+            <a:off x="7909560" y="2999232"/>
+            <a:ext cx="1600200" cy="777240"/>
           </a:xfrm>
           <a:prstGeom prst="rect">
             <a:avLst/>
@@ -6378,17 +6286,17 @@
           <a:p>
             <a:pPr algn="l">
               <a:lnSpc>
-                <a:spcPct val="108000"/>
-              </a:lnSpc>
-              <a:spcBef>
-                <a:spcPts val="0"/>
-              </a:spcBef>
-              <a:spcAft>
-                <a:spcPts val="400"/>
-              </a:spcAft>
-            </a:pPr>
-            <a:r>
-              <a:rPr sz="3200" b="1">
+                <a:spcPct val="110000"/>
+              </a:lnSpc>
+              <a:spcBef>
+                <a:spcPts val="0"/>
+              </a:spcBef>
+              <a:spcAft>
+                <a:spcPts val="400"/>
+              </a:spcAft>
+            </a:pPr>
+            <a:r>
+              <a:rPr sz="3800" b="1">
                 <a:solidFill>
                   <a:srgbClr val="E60012"/>
                 </a:solidFill>
@@ -6408,8 +6316,8 @@
         </p:nvSpPr>
         <p:spPr>
           <a:xfrm>
-            <a:off x="9464040" y="2953512"/>
-            <a:ext cx="1920240" cy="777240"/>
+            <a:off x="9555480" y="2999232"/>
+            <a:ext cx="1828800" cy="777240"/>
           </a:xfrm>
           <a:prstGeom prst="rect">
             <a:avLst/>
@@ -6424,19 +6332,19 @@
           <a:p>
             <a:pPr algn="l">
               <a:lnSpc>
-                <a:spcPct val="108000"/>
-              </a:lnSpc>
-              <a:spcBef>
-                <a:spcPts val="0"/>
-              </a:spcBef>
-              <a:spcAft>
-                <a:spcPts val="400"/>
-              </a:spcAft>
-            </a:pPr>
-            <a:r>
-              <a:rPr sz="1100" b="1">
-                <a:solidFill>
-                  <a:srgbClr val="7A828B"/>
+                <a:spcPct val="110000"/>
+              </a:lnSpc>
+              <a:spcBef>
+                <a:spcPts val="0"/>
+              </a:spcBef>
+              <a:spcAft>
+                <a:spcPts val="400"/>
+              </a:spcAft>
+            </a:pPr>
+            <a:r>
+              <a:rPr sz="1300" b="1">
+                <a:solidFill>
+                  <a:srgbClr val="6E767F"/>
                 </a:solidFill>
                 <a:latin typeface="Noto Sans JP"/>
                 <a:ea typeface="Noto Sans JP"/>
@@ -6454,14 +6362,14 @@
         </p:nvSpPr>
         <p:spPr>
           <a:xfrm>
-            <a:off x="822960" y="3922776"/>
+            <a:off x="822960" y="3977639"/>
             <a:ext cx="10543032" cy="12700"/>
           </a:xfrm>
           <a:prstGeom prst="rect">
             <a:avLst/>
           </a:prstGeom>
           <a:solidFill>
-            <a:srgbClr val="DCDFE4"/>
+            <a:srgbClr val="D6DADF"/>
           </a:solidFill>
           <a:ln>
             <a:noFill/>
@@ -6498,8 +6406,8 @@
         </p:nvSpPr>
         <p:spPr>
           <a:xfrm>
-            <a:off x="822960" y="4197096"/>
-            <a:ext cx="2743200" cy="777240"/>
+            <a:off x="822960" y="4261104"/>
+            <a:ext cx="2834640" cy="777240"/>
           </a:xfrm>
           <a:prstGeom prst="rect">
             <a:avLst/>
@@ -6514,19 +6422,19 @@
           <a:p>
             <a:pPr algn="l">
               <a:lnSpc>
-                <a:spcPct val="114000"/>
-              </a:lnSpc>
-              <a:spcBef>
-                <a:spcPts val="0"/>
-              </a:spcBef>
-              <a:spcAft>
-                <a:spcPts val="300"/>
-              </a:spcAft>
-            </a:pPr>
-            <a:r>
-              <a:rPr sz="1500" b="1">
-                <a:solidFill>
-                  <a:srgbClr val="171A1E"/>
+                <a:spcPct val="116000"/>
+              </a:lnSpc>
+              <a:spcBef>
+                <a:spcPts val="0"/>
+              </a:spcBef>
+              <a:spcAft>
+                <a:spcPts val="400"/>
+              </a:spcAft>
+            </a:pPr>
+            <a:r>
+              <a:rPr sz="1700" b="1">
+                <a:solidFill>
+                  <a:srgbClr val="15181C"/>
                 </a:solidFill>
                 <a:latin typeface="Noto Sans JP"/>
                 <a:ea typeface="Noto Sans JP"/>
@@ -6537,19 +6445,19 @@
           <a:p>
             <a:pPr algn="l">
               <a:lnSpc>
-                <a:spcPct val="114000"/>
-              </a:lnSpc>
-              <a:spcBef>
-                <a:spcPts val="0"/>
-              </a:spcBef>
-              <a:spcAft>
-                <a:spcPts val="300"/>
-              </a:spcAft>
-            </a:pPr>
-            <a:r>
-              <a:rPr sz="950" b="1">
-                <a:solidFill>
-                  <a:srgbClr val="7A828B"/>
+                <a:spcPct val="116000"/>
+              </a:lnSpc>
+              <a:spcBef>
+                <a:spcPts val="0"/>
+              </a:spcBef>
+              <a:spcAft>
+                <a:spcPts val="400"/>
+              </a:spcAft>
+            </a:pPr>
+            <a:r>
+              <a:rPr sz="1050" b="1">
+                <a:solidFill>
+                  <a:srgbClr val="6E767F"/>
                 </a:solidFill>
                 <a:latin typeface="Consolas"/>
                 <a:ea typeface="Consolas"/>
@@ -6567,14 +6475,14 @@
         </p:nvSpPr>
         <p:spPr>
           <a:xfrm>
-            <a:off x="3794760" y="4745736"/>
-            <a:ext cx="3520440" cy="15240"/>
+            <a:off x="3794760" y="4809744"/>
+            <a:ext cx="3566160" cy="17780"/>
           </a:xfrm>
           <a:prstGeom prst="rect">
             <a:avLst/>
           </a:prstGeom>
           <a:solidFill>
-            <a:srgbClr val="DCDFE4"/>
+            <a:srgbClr val="D6DADF"/>
           </a:solidFill>
           <a:ln>
             <a:noFill/>
@@ -6611,14 +6519,14 @@
         </p:nvSpPr>
         <p:spPr>
           <a:xfrm>
-            <a:off x="4189476" y="4568964"/>
-            <a:ext cx="384048" cy="176771"/>
+            <a:off x="4160520" y="4615295"/>
+            <a:ext cx="457200" cy="194448"/>
           </a:xfrm>
           <a:prstGeom prst="rect">
             <a:avLst/>
           </a:prstGeom>
           <a:solidFill>
-            <a:srgbClr val="CFD3D8"/>
+            <a:srgbClr val="D2D6DB"/>
           </a:solidFill>
           <a:ln>
             <a:noFill/>
@@ -6655,8 +6563,8 @@
         </p:nvSpPr>
         <p:spPr>
           <a:xfrm>
-            <a:off x="3794760" y="4800600"/>
-            <a:ext cx="1173480" cy="201168"/>
+            <a:off x="3794760" y="4873752"/>
+            <a:ext cx="1188720" cy="219456"/>
           </a:xfrm>
           <a:prstGeom prst="rect">
             <a:avLst/>
@@ -6671,19 +6579,19 @@
           <a:p>
             <a:pPr algn="ctr">
               <a:lnSpc>
-                <a:spcPct val="108000"/>
-              </a:lnSpc>
-              <a:spcBef>
-                <a:spcPts val="0"/>
-              </a:spcBef>
-              <a:spcAft>
-                <a:spcPts val="400"/>
-              </a:spcAft>
-            </a:pPr>
-            <a:r>
-              <a:rPr sz="850" b="1">
-                <a:solidFill>
-                  <a:srgbClr val="7A828B"/>
+                <a:spcPct val="110000"/>
+              </a:lnSpc>
+              <a:spcBef>
+                <a:spcPts val="0"/>
+              </a:spcBef>
+              <a:spcAft>
+                <a:spcPts val="400"/>
+              </a:spcAft>
+            </a:pPr>
+            <a:r>
+              <a:rPr sz="950" b="1">
+                <a:solidFill>
+                  <a:srgbClr val="6E767F"/>
                 </a:solidFill>
                 <a:latin typeface="Consolas"/>
                 <a:ea typeface="Consolas"/>
@@ -6701,14 +6609,14 @@
         </p:nvSpPr>
         <p:spPr>
           <a:xfrm>
-            <a:off x="5362956" y="4471416"/>
-            <a:ext cx="384048" cy="274320"/>
+            <a:off x="5349240" y="4507992"/>
+            <a:ext cx="457200" cy="301752"/>
           </a:xfrm>
           <a:prstGeom prst="rect">
             <a:avLst/>
           </a:prstGeom>
           <a:solidFill>
-            <a:srgbClr val="CFD3D8"/>
+            <a:srgbClr val="D2D6DB"/>
           </a:solidFill>
           <a:ln>
             <a:noFill/>
@@ -6745,8 +6653,8 @@
         </p:nvSpPr>
         <p:spPr>
           <a:xfrm>
-            <a:off x="4968240" y="4800600"/>
-            <a:ext cx="1173480" cy="201168"/>
+            <a:off x="4983480" y="4873752"/>
+            <a:ext cx="1188720" cy="219456"/>
           </a:xfrm>
           <a:prstGeom prst="rect">
             <a:avLst/>
@@ -6761,19 +6669,19 @@
           <a:p>
             <a:pPr algn="ctr">
               <a:lnSpc>
-                <a:spcPct val="108000"/>
-              </a:lnSpc>
-              <a:spcBef>
-                <a:spcPts val="0"/>
-              </a:spcBef>
-              <a:spcAft>
-                <a:spcPts val="400"/>
-              </a:spcAft>
-            </a:pPr>
-            <a:r>
-              <a:rPr sz="850" b="1">
-                <a:solidFill>
-                  <a:srgbClr val="7A828B"/>
+                <a:spcPct val="110000"/>
+              </a:lnSpc>
+              <a:spcBef>
+                <a:spcPts val="0"/>
+              </a:spcBef>
+              <a:spcAft>
+                <a:spcPts val="400"/>
+              </a:spcAft>
+            </a:pPr>
+            <a:r>
+              <a:rPr sz="950" b="1">
+                <a:solidFill>
+                  <a:srgbClr val="6E767F"/>
                 </a:solidFill>
                 <a:latin typeface="Consolas"/>
                 <a:ea typeface="Consolas"/>
@@ -6791,8 +6699,8 @@
         </p:nvSpPr>
         <p:spPr>
           <a:xfrm>
-            <a:off x="6536436" y="4197096"/>
-            <a:ext cx="384048" cy="548640"/>
+            <a:off x="6537960" y="4206240"/>
+            <a:ext cx="457200" cy="603504"/>
           </a:xfrm>
           <a:prstGeom prst="rect">
             <a:avLst/>
@@ -6835,8 +6743,8 @@
         </p:nvSpPr>
         <p:spPr>
           <a:xfrm>
-            <a:off x="6141720" y="4800600"/>
-            <a:ext cx="1173480" cy="201168"/>
+            <a:off x="6172200" y="4873752"/>
+            <a:ext cx="1188720" cy="219456"/>
           </a:xfrm>
           <a:prstGeom prst="rect">
             <a:avLst/>
@@ -6851,19 +6759,19 @@
           <a:p>
             <a:pPr algn="ctr">
               <a:lnSpc>
-                <a:spcPct val="108000"/>
-              </a:lnSpc>
-              <a:spcBef>
-                <a:spcPts val="0"/>
-              </a:spcBef>
-              <a:spcAft>
-                <a:spcPts val="400"/>
-              </a:spcAft>
-            </a:pPr>
-            <a:r>
-              <a:rPr sz="850" b="1">
-                <a:solidFill>
-                  <a:srgbClr val="7A828B"/>
+                <a:spcPct val="110000"/>
+              </a:lnSpc>
+              <a:spcBef>
+                <a:spcPts val="0"/>
+              </a:spcBef>
+              <a:spcAft>
+                <a:spcPts val="400"/>
+              </a:spcAft>
+            </a:pPr>
+            <a:r>
+              <a:rPr sz="950" b="1">
+                <a:solidFill>
+                  <a:srgbClr val="6E767F"/>
                 </a:solidFill>
                 <a:latin typeface="Consolas"/>
                 <a:ea typeface="Consolas"/>
@@ -6881,8 +6789,8 @@
         </p:nvSpPr>
         <p:spPr>
           <a:xfrm>
-            <a:off x="5987796" y="3977640"/>
-            <a:ext cx="1481328" cy="201168"/>
+            <a:off x="5989320" y="3968496"/>
+            <a:ext cx="1554480" cy="219456"/>
           </a:xfrm>
           <a:prstGeom prst="rect">
             <a:avLst/>
@@ -6897,19 +6805,19 @@
           <a:p>
             <a:pPr algn="ctr">
               <a:lnSpc>
-                <a:spcPct val="108000"/>
-              </a:lnSpc>
-              <a:spcBef>
-                <a:spcPts val="0"/>
-              </a:spcBef>
-              <a:spcAft>
-                <a:spcPts val="400"/>
-              </a:spcAft>
-            </a:pPr>
-            <a:r>
-              <a:rPr sz="900" b="1">
-                <a:solidFill>
-                  <a:srgbClr val="7A828B"/>
+                <a:spcPct val="110000"/>
+              </a:lnSpc>
+              <a:spcBef>
+                <a:spcPts val="0"/>
+              </a:spcBef>
+              <a:spcAft>
+                <a:spcPts val="400"/>
+              </a:spcAft>
+            </a:pPr>
+            <a:r>
+              <a:rPr sz="1000" b="1">
+                <a:solidFill>
+                  <a:srgbClr val="6E767F"/>
                 </a:solidFill>
                 <a:latin typeface="Consolas"/>
                 <a:ea typeface="Consolas"/>
@@ -6927,8 +6835,8 @@
         </p:nvSpPr>
         <p:spPr>
           <a:xfrm>
-            <a:off x="7955279" y="4123944"/>
-            <a:ext cx="1463040" cy="777240"/>
+            <a:off x="7909560" y="4187952"/>
+            <a:ext cx="1600200" cy="777240"/>
           </a:xfrm>
           <a:prstGeom prst="rect">
             <a:avLst/>
@@ -6943,17 +6851,17 @@
           <a:p>
             <a:pPr algn="l">
               <a:lnSpc>
-                <a:spcPct val="108000"/>
-              </a:lnSpc>
-              <a:spcBef>
-                <a:spcPts val="0"/>
-              </a:spcBef>
-              <a:spcAft>
-                <a:spcPts val="400"/>
-              </a:spcAft>
-            </a:pPr>
-            <a:r>
-              <a:rPr sz="3200" b="1">
+                <a:spcPct val="110000"/>
+              </a:lnSpc>
+              <a:spcBef>
+                <a:spcPts val="0"/>
+              </a:spcBef>
+              <a:spcAft>
+                <a:spcPts val="400"/>
+              </a:spcAft>
+            </a:pPr>
+            <a:r>
+              <a:rPr sz="3800" b="1">
                 <a:solidFill>
                   <a:srgbClr val="E60012"/>
                 </a:solidFill>
@@ -6973,8 +6881,8 @@
         </p:nvSpPr>
         <p:spPr>
           <a:xfrm>
-            <a:off x="9464040" y="4123944"/>
-            <a:ext cx="1920240" cy="777240"/>
+            <a:off x="9555480" y="4187952"/>
+            <a:ext cx="1828800" cy="777240"/>
           </a:xfrm>
           <a:prstGeom prst="rect">
             <a:avLst/>
@@ -6989,19 +6897,19 @@
           <a:p>
             <a:pPr algn="l">
               <a:lnSpc>
-                <a:spcPct val="108000"/>
-              </a:lnSpc>
-              <a:spcBef>
-                <a:spcPts val="0"/>
-              </a:spcBef>
-              <a:spcAft>
-                <a:spcPts val="400"/>
-              </a:spcAft>
-            </a:pPr>
-            <a:r>
-              <a:rPr sz="1100" b="1">
-                <a:solidFill>
-                  <a:srgbClr val="7A828B"/>
+                <a:spcPct val="110000"/>
+              </a:lnSpc>
+              <a:spcBef>
+                <a:spcPts val="0"/>
+              </a:spcBef>
+              <a:spcAft>
+                <a:spcPts val="400"/>
+              </a:spcAft>
+            </a:pPr>
+            <a:r>
+              <a:rPr sz="1300" b="1">
+                <a:solidFill>
+                  <a:srgbClr val="6E767F"/>
                 </a:solidFill>
                 <a:latin typeface="Noto Sans JP"/>
                 <a:ea typeface="Noto Sans JP"/>
@@ -7019,14 +6927,14 @@
         </p:nvSpPr>
         <p:spPr>
           <a:xfrm>
-            <a:off x="822960" y="5257800"/>
-            <a:ext cx="10543032" cy="15240"/>
+            <a:off x="822960" y="5486400"/>
+            <a:ext cx="82296" cy="475488"/>
           </a:xfrm>
           <a:prstGeom prst="rect">
             <a:avLst/>
           </a:prstGeom>
           <a:solidFill>
-            <a:srgbClr val="DCDFE4"/>
+            <a:srgbClr val="E60012"/>
           </a:solidFill>
           <a:ln>
             <a:noFill/>
@@ -7063,35 +6971,35 @@
         </p:nvSpPr>
         <p:spPr>
           <a:xfrm>
-            <a:off x="804672" y="5440680"/>
-            <a:ext cx="10607040" cy="457200"/>
-          </a:xfrm>
-          <a:prstGeom prst="rect">
-            <a:avLst/>
-          </a:prstGeom>
-          <a:noFill/>
-        </p:spPr>
-        <p:txBody>
-          <a:bodyPr wrap="square" anchor="t" lIns="0" rIns="0" tIns="0" bIns="0">
+            <a:off x="1078992" y="5440680"/>
+            <a:ext cx="10268711" cy="566928"/>
+          </a:xfrm>
+          <a:prstGeom prst="rect">
+            <a:avLst/>
+          </a:prstGeom>
+          <a:noFill/>
+        </p:spPr>
+        <p:txBody>
+          <a:bodyPr wrap="square" anchor="ctr" lIns="0" rIns="0" tIns="0" bIns="0">
             <a:spAutoFit/>
           </a:bodyPr>
           <a:lstStyle/>
           <a:p>
             <a:pPr algn="l">
               <a:lnSpc>
-                <a:spcPct val="108000"/>
-              </a:lnSpc>
-              <a:spcBef>
-                <a:spcPts val="0"/>
-              </a:spcBef>
-              <a:spcAft>
-                <a:spcPts val="400"/>
-              </a:spcAft>
-            </a:pPr>
-            <a:r>
-              <a:rPr sz="1600" b="1">
-                <a:solidFill>
-                  <a:srgbClr val="171A1E"/>
+                <a:spcPct val="116000"/>
+              </a:lnSpc>
+              <a:spcBef>
+                <a:spcPts val="0"/>
+              </a:spcBef>
+              <a:spcAft>
+                <a:spcPts val="400"/>
+              </a:spcAft>
+            </a:pPr>
+            <a:r>
+              <a:rPr sz="1900" b="1">
+                <a:solidFill>
+                  <a:srgbClr val="15181C"/>
                 </a:solidFill>
                 <a:latin typeface="Noto Sans JP"/>
                 <a:ea typeface="Noto Sans JP"/>
@@ -7099,7 +7007,7 @@
               <a:t>投資のピークは2027〜2028年。この波は、まだ“</a:t>
             </a:r>
             <a:r>
-              <a:rPr sz="1600" b="1">
+              <a:rPr sz="1900" b="1">
                 <a:solidFill>
                   <a:srgbClr val="E60012"/>
                 </a:solidFill>
@@ -7109,9 +7017,9 @@
               <a:t>序盤</a:t>
             </a:r>
             <a:r>
-              <a:rPr sz="1600" b="1">
-                <a:solidFill>
-                  <a:srgbClr val="171A1E"/>
+              <a:rPr sz="1900" b="1">
+                <a:solidFill>
+                  <a:srgbClr val="15181C"/>
                 </a:solidFill>
                 <a:latin typeface="Noto Sans JP"/>
                 <a:ea typeface="Noto Sans JP"/>
@@ -7129,7 +7037,7 @@
         </p:nvSpPr>
         <p:spPr>
           <a:xfrm>
-            <a:off x="804672" y="6144768"/>
+            <a:off x="822960" y="6236208"/>
             <a:ext cx="10607040" cy="256032"/>
           </a:xfrm>
           <a:prstGeom prst="rect">
@@ -7145,19 +7053,19 @@
           <a:p>
             <a:pPr algn="l">
               <a:lnSpc>
-                <a:spcPct val="108000"/>
-              </a:lnSpc>
-              <a:spcBef>
-                <a:spcPts val="0"/>
-              </a:spcBef>
-              <a:spcAft>
-                <a:spcPts val="400"/>
-              </a:spcAft>
-            </a:pPr>
-            <a:r>
-              <a:rPr sz="850" b="0">
-                <a:solidFill>
-                  <a:srgbClr val="A5ABB2"/>
+                <a:spcPct val="110000"/>
+              </a:lnSpc>
+              <a:spcBef>
+                <a:spcPts val="0"/>
+              </a:spcBef>
+              <a:spcAft>
+                <a:spcPts val="400"/>
+              </a:spcAft>
+            </a:pPr>
+            <a:r>
+              <a:rPr sz="900" b="0">
+                <a:solidFill>
+                  <a:srgbClr val="9AA1A9"/>
                 </a:solidFill>
                 <a:latin typeface="Consolas"/>
                 <a:ea typeface="Consolas"/>
@@ -7237,8 +7145,8 @@
         </p:nvSpPr>
         <p:spPr>
           <a:xfrm>
-            <a:off x="822960" y="585216"/>
-            <a:ext cx="109728" cy="109728"/>
+            <a:off x="822960" y="566928"/>
+            <a:ext cx="128016" cy="128016"/>
           </a:xfrm>
           <a:prstGeom prst="rect">
             <a:avLst/>
@@ -7281,8 +7189,8 @@
         </p:nvSpPr>
         <p:spPr>
           <a:xfrm>
-            <a:off x="1014984" y="521207"/>
-            <a:ext cx="8686800" cy="237744"/>
+            <a:off x="1042415" y="502920"/>
+            <a:ext cx="8686800" cy="256032"/>
           </a:xfrm>
           <a:prstGeom prst="rect">
             <a:avLst/>
@@ -7297,17 +7205,17 @@
           <a:p>
             <a:pPr algn="l">
               <a:lnSpc>
-                <a:spcPct val="108000"/>
-              </a:lnSpc>
-              <a:spcBef>
-                <a:spcPts val="0"/>
-              </a:spcBef>
-              <a:spcAft>
-                <a:spcPts val="400"/>
-              </a:spcAft>
-            </a:pPr>
-            <a:r>
-              <a:rPr sz="1050" b="1" spc="150">
+                <a:spcPct val="110000"/>
+              </a:lnSpc>
+              <a:spcBef>
+                <a:spcPts val="0"/>
+              </a:spcBef>
+              <a:spcAft>
+                <a:spcPts val="400"/>
+              </a:spcAft>
+            </a:pPr>
+            <a:r>
+              <a:rPr sz="1150" b="1" spc="150">
                 <a:solidFill>
                   <a:srgbClr val="E60012"/>
                 </a:solidFill>
@@ -7327,8 +7235,8 @@
         </p:nvSpPr>
         <p:spPr>
           <a:xfrm>
-            <a:off x="10817352" y="521207"/>
-            <a:ext cx="548640" cy="237744"/>
+            <a:off x="10725912" y="502920"/>
+            <a:ext cx="640080" cy="256032"/>
           </a:xfrm>
           <a:prstGeom prst="rect">
             <a:avLst/>
@@ -7343,19 +7251,19 @@
           <a:p>
             <a:pPr algn="r">
               <a:lnSpc>
-                <a:spcPct val="108000"/>
-              </a:lnSpc>
-              <a:spcBef>
-                <a:spcPts val="0"/>
-              </a:spcBef>
-              <a:spcAft>
-                <a:spcPts val="400"/>
-              </a:spcAft>
-            </a:pPr>
-            <a:r>
-              <a:rPr sz="1050" b="1">
-                <a:solidFill>
-                  <a:srgbClr val="A5ABB2"/>
+                <a:spcPct val="110000"/>
+              </a:lnSpc>
+              <a:spcBef>
+                <a:spcPts val="0"/>
+              </a:spcBef>
+              <a:spcAft>
+                <a:spcPts val="400"/>
+              </a:spcAft>
+            </a:pPr>
+            <a:r>
+              <a:rPr sz="1150" b="1">
+                <a:solidFill>
+                  <a:srgbClr val="9AA1A9"/>
                 </a:solidFill>
                 <a:latin typeface="Consolas"/>
                 <a:ea typeface="Consolas"/>
@@ -7373,8 +7281,8 @@
         </p:nvSpPr>
         <p:spPr>
           <a:xfrm>
-            <a:off x="804672" y="822960"/>
-            <a:ext cx="10543032" cy="457200"/>
+            <a:off x="804672" y="841248"/>
+            <a:ext cx="10543032" cy="502920"/>
           </a:xfrm>
           <a:prstGeom prst="rect">
             <a:avLst/>
@@ -7389,19 +7297,19 @@
           <a:p>
             <a:pPr algn="l">
               <a:lnSpc>
-                <a:spcPct val="108000"/>
-              </a:lnSpc>
-              <a:spcBef>
-                <a:spcPts val="0"/>
-              </a:spcBef>
-              <a:spcAft>
-                <a:spcPts val="400"/>
-              </a:spcAft>
-            </a:pPr>
-            <a:r>
-              <a:rPr sz="2100" b="1">
-                <a:solidFill>
-                  <a:srgbClr val="171A1E"/>
+                <a:spcPct val="110000"/>
+              </a:lnSpc>
+              <a:spcBef>
+                <a:spcPts val="0"/>
+              </a:spcBef>
+              <a:spcAft>
+                <a:spcPts val="400"/>
+              </a:spcAft>
+            </a:pPr>
+            <a:r>
+              <a:rPr sz="2400" b="1">
+                <a:solidFill>
+                  <a:srgbClr val="15181C"/>
                 </a:solidFill>
                 <a:latin typeface="Noto Sans JP"/>
                 <a:ea typeface="Noto Sans JP"/>
@@ -7419,14 +7327,14 @@
         </p:nvSpPr>
         <p:spPr>
           <a:xfrm>
-            <a:off x="822960" y="1389888"/>
-            <a:ext cx="10543032" cy="15240"/>
+            <a:off x="822960" y="1463040"/>
+            <a:ext cx="10543032" cy="17780"/>
           </a:xfrm>
           <a:prstGeom prst="rect">
             <a:avLst/>
           </a:prstGeom>
           <a:solidFill>
-            <a:srgbClr val="DCDFE4"/>
+            <a:srgbClr val="D6DADF"/>
           </a:solidFill>
           <a:ln>
             <a:noFill/>
@@ -7463,8 +7371,8 @@
         </p:nvSpPr>
         <p:spPr>
           <a:xfrm>
-            <a:off x="822960" y="1691640"/>
-            <a:ext cx="1828800" cy="274320"/>
+            <a:off x="822960" y="1737360"/>
+            <a:ext cx="5486400" cy="310896"/>
           </a:xfrm>
           <a:prstGeom prst="rect">
             <a:avLst/>
@@ -7479,17 +7387,17 @@
           <a:p>
             <a:pPr algn="l">
               <a:lnSpc>
-                <a:spcPct val="108000"/>
-              </a:lnSpc>
-              <a:spcBef>
-                <a:spcPts val="0"/>
-              </a:spcBef>
-              <a:spcAft>
-                <a:spcPts val="400"/>
-              </a:spcAft>
-            </a:pPr>
-            <a:r>
-              <a:rPr sz="1200" b="1">
+                <a:spcPct val="110000"/>
+              </a:lnSpc>
+              <a:spcBef>
+                <a:spcPts val="0"/>
+              </a:spcBef>
+              <a:spcAft>
+                <a:spcPts val="400"/>
+              </a:spcAft>
+            </a:pPr>
+            <a:r>
+              <a:rPr sz="1500" b="1">
                 <a:solidFill>
                   <a:srgbClr val="E60012"/>
                 </a:solidFill>
@@ -7498,65 +7406,29 @@
               </a:rPr>
               <a:t>AI・DC需要の拡大</a:t>
             </a:r>
-          </a:p>
-        </p:txBody>
-      </p:sp>
-      <p:sp>
-        <p:nvSpPr>
-          <p:cNvPr id="9" name="TextBox 8"/>
-          <p:cNvSpPr txBox="1"/>
-          <p:nvPr/>
-        </p:nvSpPr>
-        <p:spPr>
-          <a:xfrm>
-            <a:off x="822960" y="1938528"/>
-            <a:ext cx="1828800" cy="274320"/>
-          </a:xfrm>
-          <a:prstGeom prst="rect">
-            <a:avLst/>
-          </a:prstGeom>
-          <a:noFill/>
-        </p:spPr>
-        <p:txBody>
-          <a:bodyPr wrap="square" anchor="t" lIns="0" rIns="0" tIns="0" bIns="0">
-            <a:spAutoFit/>
-          </a:bodyPr>
-          <a:lstStyle/>
-          <a:p>
-            <a:pPr algn="l">
-              <a:lnSpc>
-                <a:spcPct val="108000"/>
-              </a:lnSpc>
-              <a:spcBef>
-                <a:spcPts val="0"/>
-              </a:spcBef>
-              <a:spcAft>
-                <a:spcPts val="400"/>
-              </a:spcAft>
-            </a:pPr>
-            <a:r>
-              <a:rPr sz="950" b="1">
-                <a:solidFill>
-                  <a:srgbClr val="7A828B"/>
+            <a:r>
+              <a:rPr sz="1100" b="1">
+                <a:solidFill>
+                  <a:srgbClr val="6E767F"/>
                 </a:solidFill>
                 <a:latin typeface="Noto Sans JP"/>
                 <a:ea typeface="Noto Sans JP"/>
               </a:rPr>
-              <a:t>この一手が、川下までまるごと波及する</a:t>
-            </a:r>
-          </a:p>
-        </p:txBody>
-      </p:sp>
-      <p:sp>
-        <p:nvSpPr>
-          <p:cNvPr id="10" name="Rectangle 9"/>
+              <a:t>　この一手が、川下までまるごと波及する</a:t>
+            </a:r>
+          </a:p>
+        </p:txBody>
+      </p:sp>
+      <p:sp>
+        <p:nvSpPr>
+          <p:cNvPr id="9" name="Rectangle 8"/>
           <p:cNvSpPr/>
           <p:nvPr/>
         </p:nvSpPr>
         <p:spPr>
           <a:xfrm>
-            <a:off x="822960" y="2331720"/>
-            <a:ext cx="10543032" cy="20320"/>
+            <a:off x="822960" y="2194560"/>
+            <a:ext cx="10543032" cy="41148"/>
           </a:xfrm>
           <a:prstGeom prst="rect">
             <a:avLst/>
@@ -7593,14 +7465,60 @@
       </p:sp>
       <p:sp>
         <p:nvSpPr>
+          <p:cNvPr id="10" name="TextBox 9"/>
+          <p:cNvSpPr txBox="1"/>
+          <p:nvPr/>
+        </p:nvSpPr>
+        <p:spPr>
+          <a:xfrm>
+            <a:off x="822960" y="2514600"/>
+            <a:ext cx="1834286" cy="201168"/>
+          </a:xfrm>
+          <a:prstGeom prst="rect">
+            <a:avLst/>
+          </a:prstGeom>
+          <a:noFill/>
+        </p:spPr>
+        <p:txBody>
+          <a:bodyPr wrap="square" anchor="t" lIns="0" rIns="0" tIns="0" bIns="0">
+            <a:spAutoFit/>
+          </a:bodyPr>
+          <a:lstStyle/>
+          <a:p>
+            <a:pPr algn="l">
+              <a:lnSpc>
+                <a:spcPct val="110000"/>
+              </a:lnSpc>
+              <a:spcBef>
+                <a:spcPts val="0"/>
+              </a:spcBef>
+              <a:spcAft>
+                <a:spcPts val="400"/>
+              </a:spcAft>
+            </a:pPr>
+            <a:r>
+              <a:rPr sz="1000" b="1" spc="100">
+                <a:solidFill>
+                  <a:srgbClr val="9AA1A9"/>
+                </a:solidFill>
+                <a:latin typeface="Consolas"/>
+                <a:ea typeface="Consolas"/>
+              </a:rPr>
+              <a:t>01</a:t>
+            </a:r>
+          </a:p>
+        </p:txBody>
+      </p:sp>
+      <p:sp>
+        <p:nvSpPr>
           <p:cNvPr id="11" name="TextBox 10"/>
           <p:cNvSpPr txBox="1"/>
           <p:nvPr/>
         </p:nvSpPr>
         <p:spPr>
           <a:xfrm>
-            <a:off x="822960" y="2395728"/>
-            <a:ext cx="10543032" cy="219456"/>
+            <a:off x="822960" y="2770632"/>
+            <a:ext cx="1870862" cy="457200"/>
           </a:xfrm>
           <a:prstGeom prst="rect">
             <a:avLst/>
@@ -7615,24 +7533,24 @@
           <a:p>
             <a:pPr algn="l">
               <a:lnSpc>
-                <a:spcPct val="108000"/>
-              </a:lnSpc>
-              <a:spcBef>
-                <a:spcPts val="0"/>
-              </a:spcBef>
-              <a:spcAft>
-                <a:spcPts val="400"/>
-              </a:spcAft>
-            </a:pPr>
-            <a:r>
-              <a:rPr sz="1200" b="1">
-                <a:solidFill>
-                  <a:srgbClr val="E60012"/>
+                <a:spcPct val="106000"/>
+              </a:lnSpc>
+              <a:spcBef>
+                <a:spcPts val="0"/>
+              </a:spcBef>
+              <a:spcAft>
+                <a:spcPts val="400"/>
+              </a:spcAft>
+            </a:pPr>
+            <a:r>
+              <a:rPr sz="1400" b="1">
+                <a:solidFill>
+                  <a:srgbClr val="15181C"/>
                 </a:solidFill>
                 <a:latin typeface="Noto Sans JP"/>
                 <a:ea typeface="Noto Sans JP"/>
               </a:rPr>
-              <a:t>↓</a:t>
+              <a:t>発電・電源</a:t>
             </a:r>
           </a:p>
         </p:txBody>
@@ -7645,8 +7563,8 @@
         </p:nvSpPr>
         <p:spPr>
           <a:xfrm>
-            <a:off x="822960" y="2788920"/>
-            <a:ext cx="1834286" cy="182880"/>
+            <a:off x="822960" y="3337560"/>
+            <a:ext cx="1870862" cy="310896"/>
           </a:xfrm>
           <a:prstGeom prst="rect">
             <a:avLst/>
@@ -7661,53 +7579,7 @@
           <a:p>
             <a:pPr algn="l">
               <a:lnSpc>
-                <a:spcPct val="108000"/>
-              </a:lnSpc>
-              <a:spcBef>
-                <a:spcPts val="0"/>
-              </a:spcBef>
-              <a:spcAft>
-                <a:spcPts val="400"/>
-              </a:spcAft>
-            </a:pPr>
-            <a:r>
-              <a:rPr sz="900" b="1" spc="100">
-                <a:solidFill>
-                  <a:srgbClr val="A5ABB2"/>
-                </a:solidFill>
-                <a:latin typeface="Consolas"/>
-                <a:ea typeface="Consolas"/>
-              </a:rPr>
-              <a:t>01</a:t>
-            </a:r>
-          </a:p>
-        </p:txBody>
-      </p:sp>
-      <p:sp>
-        <p:nvSpPr>
-          <p:cNvPr id="13" name="TextBox 12"/>
-          <p:cNvSpPr txBox="1"/>
-          <p:nvPr/>
-        </p:nvSpPr>
-        <p:spPr>
-          <a:xfrm>
-            <a:off x="822960" y="2990088"/>
-            <a:ext cx="1852574" cy="457200"/>
-          </a:xfrm>
-          <a:prstGeom prst="rect">
-            <a:avLst/>
-          </a:prstGeom>
-          <a:noFill/>
-        </p:spPr>
-        <p:txBody>
-          <a:bodyPr wrap="square" anchor="t" lIns="0" rIns="0" tIns="0" bIns="0">
-            <a:spAutoFit/>
-          </a:bodyPr>
-          <a:lstStyle/>
-          <a:p>
-            <a:pPr algn="l">
-              <a:lnSpc>
-                <a:spcPct val="105000"/>
+                <a:spcPct val="110000"/>
               </a:lnSpc>
               <a:spcBef>
                 <a:spcPts val="0"/>
@@ -7719,26 +7591,26 @@
             <a:r>
               <a:rPr sz="1200" b="1">
                 <a:solidFill>
-                  <a:srgbClr val="171A1E"/>
+                  <a:srgbClr val="373C43"/>
                 </a:solidFill>
                 <a:latin typeface="Noto Sans JP"/>
                 <a:ea typeface="Noto Sans JP"/>
               </a:rPr>
-              <a:t>発電・電源</a:t>
-            </a:r>
-          </a:p>
-        </p:txBody>
-      </p:sp>
-      <p:sp>
-        <p:nvSpPr>
-          <p:cNvPr id="14" name="TextBox 13"/>
-          <p:cNvSpPr txBox="1"/>
-          <p:nvPr/>
-        </p:nvSpPr>
-        <p:spPr>
-          <a:xfrm>
-            <a:off x="822960" y="3465576"/>
-            <a:ext cx="1852574" cy="274320"/>
+              <a:t>三菱重工</a:t>
+            </a:r>
+          </a:p>
+        </p:txBody>
+      </p:sp>
+      <p:sp>
+        <p:nvSpPr>
+          <p:cNvPr id="13" name="TextBox 12"/>
+          <p:cNvSpPr txBox="1"/>
+          <p:nvPr/>
+        </p:nvSpPr>
+        <p:spPr>
+          <a:xfrm>
+            <a:off x="822960" y="3721608"/>
+            <a:ext cx="1870862" cy="310896"/>
           </a:xfrm>
           <a:prstGeom prst="rect">
             <a:avLst/>
@@ -7753,38 +7625,38 @@
           <a:p>
             <a:pPr algn="l">
               <a:lnSpc>
-                <a:spcPct val="108000"/>
-              </a:lnSpc>
-              <a:spcBef>
-                <a:spcPts val="0"/>
-              </a:spcBef>
-              <a:spcAft>
-                <a:spcPts val="400"/>
-              </a:spcAft>
-            </a:pPr>
-            <a:r>
-              <a:rPr sz="1050" b="1">
-                <a:solidFill>
-                  <a:srgbClr val="3C4148"/>
+                <a:spcPct val="110000"/>
+              </a:lnSpc>
+              <a:spcBef>
+                <a:spcPts val="0"/>
+              </a:spcBef>
+              <a:spcAft>
+                <a:spcPts val="400"/>
+              </a:spcAft>
+            </a:pPr>
+            <a:r>
+              <a:rPr sz="1200" b="1">
+                <a:solidFill>
+                  <a:srgbClr val="373C43"/>
                 </a:solidFill>
                 <a:latin typeface="Noto Sans JP"/>
                 <a:ea typeface="Noto Sans JP"/>
               </a:rPr>
-              <a:t>三菱重工</a:t>
-            </a:r>
-          </a:p>
-        </p:txBody>
-      </p:sp>
-      <p:sp>
-        <p:nvSpPr>
-          <p:cNvPr id="15" name="TextBox 14"/>
-          <p:cNvSpPr txBox="1"/>
-          <p:nvPr/>
-        </p:nvSpPr>
-        <p:spPr>
-          <a:xfrm>
-            <a:off x="822960" y="3758184"/>
-            <a:ext cx="1852574" cy="274320"/>
+              <a:t>川崎重工</a:t>
+            </a:r>
+          </a:p>
+        </p:txBody>
+      </p:sp>
+      <p:sp>
+        <p:nvSpPr>
+          <p:cNvPr id="14" name="TextBox 13"/>
+          <p:cNvSpPr txBox="1"/>
+          <p:nvPr/>
+        </p:nvSpPr>
+        <p:spPr>
+          <a:xfrm>
+            <a:off x="822960" y="4105656"/>
+            <a:ext cx="1870862" cy="310896"/>
           </a:xfrm>
           <a:prstGeom prst="rect">
             <a:avLst/>
@@ -7799,38 +7671,38 @@
           <a:p>
             <a:pPr algn="l">
               <a:lnSpc>
-                <a:spcPct val="108000"/>
-              </a:lnSpc>
-              <a:spcBef>
-                <a:spcPts val="0"/>
-              </a:spcBef>
-              <a:spcAft>
-                <a:spcPts val="400"/>
-              </a:spcAft>
-            </a:pPr>
-            <a:r>
-              <a:rPr sz="1050" b="1">
-                <a:solidFill>
-                  <a:srgbClr val="3C4148"/>
+                <a:spcPct val="110000"/>
+              </a:lnSpc>
+              <a:spcBef>
+                <a:spcPts val="0"/>
+              </a:spcBef>
+              <a:spcAft>
+                <a:spcPts val="400"/>
+              </a:spcAft>
+            </a:pPr>
+            <a:r>
+              <a:rPr sz="1200" b="1">
+                <a:solidFill>
+                  <a:srgbClr val="373C43"/>
                 </a:solidFill>
                 <a:latin typeface="Noto Sans JP"/>
                 <a:ea typeface="Noto Sans JP"/>
               </a:rPr>
-              <a:t>川崎重工</a:t>
-            </a:r>
-          </a:p>
-        </p:txBody>
-      </p:sp>
-      <p:sp>
-        <p:nvSpPr>
-          <p:cNvPr id="16" name="TextBox 15"/>
-          <p:cNvSpPr txBox="1"/>
-          <p:nvPr/>
-        </p:nvSpPr>
-        <p:spPr>
-          <a:xfrm>
-            <a:off x="822960" y="4050791"/>
-            <a:ext cx="1852574" cy="274320"/>
+              <a:t>IHI</a:t>
+            </a:r>
+          </a:p>
+        </p:txBody>
+      </p:sp>
+      <p:sp>
+        <p:nvSpPr>
+          <p:cNvPr id="15" name="TextBox 14"/>
+          <p:cNvSpPr txBox="1"/>
+          <p:nvPr/>
+        </p:nvSpPr>
+        <p:spPr>
+          <a:xfrm>
+            <a:off x="822960" y="4489704"/>
+            <a:ext cx="1870862" cy="310896"/>
           </a:xfrm>
           <a:prstGeom prst="rect">
             <a:avLst/>
@@ -7845,69 +7717,23 @@
           <a:p>
             <a:pPr algn="l">
               <a:lnSpc>
-                <a:spcPct val="108000"/>
-              </a:lnSpc>
-              <a:spcBef>
-                <a:spcPts val="0"/>
-              </a:spcBef>
-              <a:spcAft>
-                <a:spcPts val="400"/>
-              </a:spcAft>
-            </a:pPr>
-            <a:r>
-              <a:rPr sz="1050" b="1">
-                <a:solidFill>
-                  <a:srgbClr val="3C4148"/>
+                <a:spcPct val="110000"/>
+              </a:lnSpc>
+              <a:spcBef>
+                <a:spcPts val="0"/>
+              </a:spcBef>
+              <a:spcAft>
+                <a:spcPts val="400"/>
+              </a:spcAft>
+            </a:pPr>
+            <a:r>
+              <a:rPr sz="1200" b="1">
+                <a:solidFill>
+                  <a:srgbClr val="373C43"/>
                 </a:solidFill>
                 <a:latin typeface="Noto Sans JP"/>
                 <a:ea typeface="Noto Sans JP"/>
               </a:rPr>
-              <a:t>IHI</a:t>
-            </a:r>
-          </a:p>
-        </p:txBody>
-      </p:sp>
-      <p:sp>
-        <p:nvSpPr>
-          <p:cNvPr id="17" name="TextBox 16"/>
-          <p:cNvSpPr txBox="1"/>
-          <p:nvPr/>
-        </p:nvSpPr>
-        <p:spPr>
-          <a:xfrm>
-            <a:off x="822960" y="4343400"/>
-            <a:ext cx="1852574" cy="274320"/>
-          </a:xfrm>
-          <a:prstGeom prst="rect">
-            <a:avLst/>
-          </a:prstGeom>
-          <a:noFill/>
-        </p:spPr>
-        <p:txBody>
-          <a:bodyPr wrap="square" anchor="t" lIns="0" rIns="0" tIns="0" bIns="0">
-            <a:spAutoFit/>
-          </a:bodyPr>
-          <a:lstStyle/>
-          <a:p>
-            <a:pPr algn="l">
-              <a:lnSpc>
-                <a:spcPct val="108000"/>
-              </a:lnSpc>
-              <a:spcBef>
-                <a:spcPts val="0"/>
-              </a:spcBef>
-              <a:spcAft>
-                <a:spcPts val="400"/>
-              </a:spcAft>
-            </a:pPr>
-            <a:r>
-              <a:rPr sz="1050" b="1">
-                <a:solidFill>
-                  <a:srgbClr val="3C4148"/>
-                </a:solidFill>
-                <a:latin typeface="Noto Sans JP"/>
-                <a:ea typeface="Noto Sans JP"/>
-              </a:rPr>
               <a:t>デンヨー</a:t>
             </a:r>
           </a:p>
@@ -7915,20 +7741,20 @@
       </p:sp>
       <p:sp>
         <p:nvSpPr>
-          <p:cNvPr id="18" name="Rectangle 17"/>
+          <p:cNvPr id="16" name="Rectangle 15"/>
           <p:cNvSpPr/>
           <p:nvPr/>
         </p:nvSpPr>
         <p:spPr>
           <a:xfrm>
-            <a:off x="2821838" y="2788920"/>
-            <a:ext cx="12700" cy="1965960"/>
+            <a:off x="2821838" y="2514600"/>
+            <a:ext cx="15240" cy="2331720"/>
           </a:xfrm>
           <a:prstGeom prst="rect">
             <a:avLst/>
           </a:prstGeom>
           <a:solidFill>
-            <a:srgbClr val="DCDFE4"/>
+            <a:srgbClr val="D6DADF"/>
           </a:solidFill>
           <a:ln>
             <a:noFill/>
@@ -7959,14 +7785,14 @@
       </p:sp>
       <p:sp>
         <p:nvSpPr>
-          <p:cNvPr id="19" name="TextBox 18"/>
-          <p:cNvSpPr txBox="1"/>
-          <p:nvPr/>
-        </p:nvSpPr>
-        <p:spPr>
-          <a:xfrm>
-            <a:off x="2931566" y="2788920"/>
-            <a:ext cx="1834286" cy="182880"/>
+          <p:cNvPr id="17" name="TextBox 16"/>
+          <p:cNvSpPr txBox="1"/>
+          <p:nvPr/>
+        </p:nvSpPr>
+        <p:spPr>
+          <a:xfrm>
+            <a:off x="2931566" y="2514600"/>
+            <a:ext cx="1834286" cy="201168"/>
           </a:xfrm>
           <a:prstGeom prst="rect">
             <a:avLst/>
@@ -7981,19 +7807,19 @@
           <a:p>
             <a:pPr algn="l">
               <a:lnSpc>
-                <a:spcPct val="108000"/>
-              </a:lnSpc>
-              <a:spcBef>
-                <a:spcPts val="0"/>
-              </a:spcBef>
-              <a:spcAft>
-                <a:spcPts val="400"/>
-              </a:spcAft>
-            </a:pPr>
-            <a:r>
-              <a:rPr sz="900" b="1" spc="100">
-                <a:solidFill>
-                  <a:srgbClr val="A5ABB2"/>
+                <a:spcPct val="110000"/>
+              </a:lnSpc>
+              <a:spcBef>
+                <a:spcPts val="0"/>
+              </a:spcBef>
+              <a:spcAft>
+                <a:spcPts val="400"/>
+              </a:spcAft>
+            </a:pPr>
+            <a:r>
+              <a:rPr sz="1000" b="1" spc="100">
+                <a:solidFill>
+                  <a:srgbClr val="9AA1A9"/>
                 </a:solidFill>
                 <a:latin typeface="Consolas"/>
                 <a:ea typeface="Consolas"/>
@@ -8005,14 +7831,14 @@
       </p:sp>
       <p:sp>
         <p:nvSpPr>
-          <p:cNvPr id="20" name="TextBox 19"/>
-          <p:cNvSpPr txBox="1"/>
-          <p:nvPr/>
-        </p:nvSpPr>
-        <p:spPr>
-          <a:xfrm>
-            <a:off x="2931566" y="2990088"/>
-            <a:ext cx="1852574" cy="457200"/>
+          <p:cNvPr id="18" name="TextBox 17"/>
+          <p:cNvSpPr txBox="1"/>
+          <p:nvPr/>
+        </p:nvSpPr>
+        <p:spPr>
+          <a:xfrm>
+            <a:off x="2931566" y="2770632"/>
+            <a:ext cx="1870862" cy="457200"/>
           </a:xfrm>
           <a:prstGeom prst="rect">
             <a:avLst/>
@@ -8027,19 +7853,19 @@
           <a:p>
             <a:pPr algn="l">
               <a:lnSpc>
-                <a:spcPct val="105000"/>
-              </a:lnSpc>
-              <a:spcBef>
-                <a:spcPts val="0"/>
-              </a:spcBef>
-              <a:spcAft>
-                <a:spcPts val="400"/>
-              </a:spcAft>
-            </a:pPr>
-            <a:r>
-              <a:rPr sz="1200" b="1">
-                <a:solidFill>
-                  <a:srgbClr val="171A1E"/>
+                <a:spcPct val="106000"/>
+              </a:lnSpc>
+              <a:spcBef>
+                <a:spcPts val="0"/>
+              </a:spcBef>
+              <a:spcAft>
+                <a:spcPts val="400"/>
+              </a:spcAft>
+            </a:pPr>
+            <a:r>
+              <a:rPr sz="1400" b="1">
+                <a:solidFill>
+                  <a:srgbClr val="15181C"/>
                 </a:solidFill>
                 <a:latin typeface="Noto Sans JP"/>
                 <a:ea typeface="Noto Sans JP"/>
@@ -8051,14 +7877,14 @@
       </p:sp>
       <p:sp>
         <p:nvSpPr>
-          <p:cNvPr id="21" name="TextBox 20"/>
-          <p:cNvSpPr txBox="1"/>
-          <p:nvPr/>
-        </p:nvSpPr>
-        <p:spPr>
-          <a:xfrm>
-            <a:off x="2931566" y="3465576"/>
-            <a:ext cx="1852574" cy="274320"/>
+          <p:cNvPr id="19" name="TextBox 18"/>
+          <p:cNvSpPr txBox="1"/>
+          <p:nvPr/>
+        </p:nvSpPr>
+        <p:spPr>
+          <a:xfrm>
+            <a:off x="2931566" y="3337560"/>
+            <a:ext cx="1870862" cy="310896"/>
           </a:xfrm>
           <a:prstGeom prst="rect">
             <a:avLst/>
@@ -8073,19 +7899,19 @@
           <a:p>
             <a:pPr algn="l">
               <a:lnSpc>
-                <a:spcPct val="108000"/>
-              </a:lnSpc>
-              <a:spcBef>
-                <a:spcPts val="0"/>
-              </a:spcBef>
-              <a:spcAft>
-                <a:spcPts val="400"/>
-              </a:spcAft>
-            </a:pPr>
-            <a:r>
-              <a:rPr sz="1050" b="1">
-                <a:solidFill>
-                  <a:srgbClr val="3C4148"/>
+                <a:spcPct val="110000"/>
+              </a:lnSpc>
+              <a:spcBef>
+                <a:spcPts val="0"/>
+              </a:spcBef>
+              <a:spcAft>
+                <a:spcPts val="400"/>
+              </a:spcAft>
+            </a:pPr>
+            <a:r>
+              <a:rPr sz="1200" b="1">
+                <a:solidFill>
+                  <a:srgbClr val="373C43"/>
                 </a:solidFill>
                 <a:latin typeface="Noto Sans JP"/>
                 <a:ea typeface="Noto Sans JP"/>
@@ -8097,14 +7923,14 @@
       </p:sp>
       <p:sp>
         <p:nvSpPr>
-          <p:cNvPr id="22" name="TextBox 21"/>
-          <p:cNvSpPr txBox="1"/>
-          <p:nvPr/>
-        </p:nvSpPr>
-        <p:spPr>
-          <a:xfrm>
-            <a:off x="2931566" y="3758184"/>
-            <a:ext cx="1852574" cy="274320"/>
+          <p:cNvPr id="20" name="TextBox 19"/>
+          <p:cNvSpPr txBox="1"/>
+          <p:nvPr/>
+        </p:nvSpPr>
+        <p:spPr>
+          <a:xfrm>
+            <a:off x="2931566" y="3721608"/>
+            <a:ext cx="1870862" cy="310896"/>
           </a:xfrm>
           <a:prstGeom prst="rect">
             <a:avLst/>
@@ -8119,19 +7945,19 @@
           <a:p>
             <a:pPr algn="l">
               <a:lnSpc>
-                <a:spcPct val="108000"/>
-              </a:lnSpc>
-              <a:spcBef>
-                <a:spcPts val="0"/>
-              </a:spcBef>
-              <a:spcAft>
-                <a:spcPts val="400"/>
-              </a:spcAft>
-            </a:pPr>
-            <a:r>
-              <a:rPr sz="1050" b="1">
-                <a:solidFill>
-                  <a:srgbClr val="3C4148"/>
+                <a:spcPct val="110000"/>
+              </a:lnSpc>
+              <a:spcBef>
+                <a:spcPts val="0"/>
+              </a:spcBef>
+              <a:spcAft>
+                <a:spcPts val="400"/>
+              </a:spcAft>
+            </a:pPr>
+            <a:r>
+              <a:rPr sz="1200" b="1">
+                <a:solidFill>
+                  <a:srgbClr val="373C43"/>
                 </a:solidFill>
                 <a:latin typeface="Noto Sans JP"/>
                 <a:ea typeface="Noto Sans JP"/>
@@ -8143,14 +7969,14 @@
       </p:sp>
       <p:sp>
         <p:nvSpPr>
-          <p:cNvPr id="23" name="TextBox 22"/>
-          <p:cNvSpPr txBox="1"/>
-          <p:nvPr/>
-        </p:nvSpPr>
-        <p:spPr>
-          <a:xfrm>
-            <a:off x="2931566" y="4050791"/>
-            <a:ext cx="1852574" cy="274320"/>
+          <p:cNvPr id="21" name="TextBox 20"/>
+          <p:cNvSpPr txBox="1"/>
+          <p:nvPr/>
+        </p:nvSpPr>
+        <p:spPr>
+          <a:xfrm>
+            <a:off x="2931566" y="4105656"/>
+            <a:ext cx="1870862" cy="310896"/>
           </a:xfrm>
           <a:prstGeom prst="rect">
             <a:avLst/>
@@ -8165,19 +7991,19 @@
           <a:p>
             <a:pPr algn="l">
               <a:lnSpc>
-                <a:spcPct val="108000"/>
-              </a:lnSpc>
-              <a:spcBef>
-                <a:spcPts val="0"/>
-              </a:spcBef>
-              <a:spcAft>
-                <a:spcPts val="400"/>
-              </a:spcAft>
-            </a:pPr>
-            <a:r>
-              <a:rPr sz="1050" b="1">
-                <a:solidFill>
-                  <a:srgbClr val="3C4148"/>
+                <a:spcPct val="110000"/>
+              </a:lnSpc>
+              <a:spcBef>
+                <a:spcPts val="0"/>
+              </a:spcBef>
+              <a:spcAft>
+                <a:spcPts val="400"/>
+              </a:spcAft>
+            </a:pPr>
+            <a:r>
+              <a:rPr sz="1200" b="1">
+                <a:solidFill>
+                  <a:srgbClr val="373C43"/>
                 </a:solidFill>
                 <a:latin typeface="Noto Sans JP"/>
                 <a:ea typeface="Noto Sans JP"/>
@@ -8189,14 +8015,14 @@
       </p:sp>
       <p:sp>
         <p:nvSpPr>
-          <p:cNvPr id="24" name="TextBox 23"/>
-          <p:cNvSpPr txBox="1"/>
-          <p:nvPr/>
-        </p:nvSpPr>
-        <p:spPr>
-          <a:xfrm>
-            <a:off x="2931566" y="4343400"/>
-            <a:ext cx="1852574" cy="274320"/>
+          <p:cNvPr id="22" name="TextBox 21"/>
+          <p:cNvSpPr txBox="1"/>
+          <p:nvPr/>
+        </p:nvSpPr>
+        <p:spPr>
+          <a:xfrm>
+            <a:off x="2931566" y="4489704"/>
+            <a:ext cx="1870862" cy="310896"/>
           </a:xfrm>
           <a:prstGeom prst="rect">
             <a:avLst/>
@@ -8211,19 +8037,19 @@
           <a:p>
             <a:pPr algn="l">
               <a:lnSpc>
-                <a:spcPct val="108000"/>
-              </a:lnSpc>
-              <a:spcBef>
-                <a:spcPts val="0"/>
-              </a:spcBef>
-              <a:spcAft>
-                <a:spcPts val="400"/>
-              </a:spcAft>
-            </a:pPr>
-            <a:r>
-              <a:rPr sz="1050" b="1">
-                <a:solidFill>
-                  <a:srgbClr val="3C4148"/>
+                <a:spcPct val="110000"/>
+              </a:lnSpc>
+              <a:spcBef>
+                <a:spcPts val="0"/>
+              </a:spcBef>
+              <a:spcAft>
+                <a:spcPts val="400"/>
+              </a:spcAft>
+            </a:pPr>
+            <a:r>
+              <a:rPr sz="1200" b="1">
+                <a:solidFill>
+                  <a:srgbClr val="373C43"/>
                 </a:solidFill>
                 <a:latin typeface="Noto Sans JP"/>
                 <a:ea typeface="Noto Sans JP"/>
@@ -8235,20 +8061,20 @@
       </p:sp>
       <p:sp>
         <p:nvSpPr>
-          <p:cNvPr id="25" name="Rectangle 24"/>
+          <p:cNvPr id="23" name="Rectangle 22"/>
           <p:cNvSpPr/>
           <p:nvPr/>
         </p:nvSpPr>
         <p:spPr>
           <a:xfrm>
-            <a:off x="4930444" y="2788920"/>
-            <a:ext cx="12700" cy="1965960"/>
+            <a:off x="4930444" y="2514600"/>
+            <a:ext cx="15240" cy="2331720"/>
           </a:xfrm>
           <a:prstGeom prst="rect">
             <a:avLst/>
           </a:prstGeom>
           <a:solidFill>
-            <a:srgbClr val="DCDFE4"/>
+            <a:srgbClr val="D6DADF"/>
           </a:solidFill>
           <a:ln>
             <a:noFill/>
@@ -8279,14 +8105,14 @@
       </p:sp>
       <p:sp>
         <p:nvSpPr>
-          <p:cNvPr id="26" name="TextBox 25"/>
-          <p:cNvSpPr txBox="1"/>
-          <p:nvPr/>
-        </p:nvSpPr>
-        <p:spPr>
-          <a:xfrm>
-            <a:off x="5040172" y="2788920"/>
-            <a:ext cx="1834286" cy="182880"/>
+          <p:cNvPr id="24" name="TextBox 23"/>
+          <p:cNvSpPr txBox="1"/>
+          <p:nvPr/>
+        </p:nvSpPr>
+        <p:spPr>
+          <a:xfrm>
+            <a:off x="5040172" y="2514600"/>
+            <a:ext cx="1834286" cy="201168"/>
           </a:xfrm>
           <a:prstGeom prst="rect">
             <a:avLst/>
@@ -8301,19 +8127,19 @@
           <a:p>
             <a:pPr algn="l">
               <a:lnSpc>
-                <a:spcPct val="108000"/>
-              </a:lnSpc>
-              <a:spcBef>
-                <a:spcPts val="0"/>
-              </a:spcBef>
-              <a:spcAft>
-                <a:spcPts val="400"/>
-              </a:spcAft>
-            </a:pPr>
-            <a:r>
-              <a:rPr sz="900" b="1" spc="100">
-                <a:solidFill>
-                  <a:srgbClr val="A5ABB2"/>
+                <a:spcPct val="110000"/>
+              </a:lnSpc>
+              <a:spcBef>
+                <a:spcPts val="0"/>
+              </a:spcBef>
+              <a:spcAft>
+                <a:spcPts val="400"/>
+              </a:spcAft>
+            </a:pPr>
+            <a:r>
+              <a:rPr sz="1000" b="1" spc="100">
+                <a:solidFill>
+                  <a:srgbClr val="9AA1A9"/>
                 </a:solidFill>
                 <a:latin typeface="Consolas"/>
                 <a:ea typeface="Consolas"/>
@@ -8325,14 +8151,14 @@
       </p:sp>
       <p:sp>
         <p:nvSpPr>
-          <p:cNvPr id="27" name="TextBox 26"/>
-          <p:cNvSpPr txBox="1"/>
-          <p:nvPr/>
-        </p:nvSpPr>
-        <p:spPr>
-          <a:xfrm>
-            <a:off x="5040172" y="2990088"/>
-            <a:ext cx="1852574" cy="457200"/>
+          <p:cNvPr id="25" name="TextBox 24"/>
+          <p:cNvSpPr txBox="1"/>
+          <p:nvPr/>
+        </p:nvSpPr>
+        <p:spPr>
+          <a:xfrm>
+            <a:off x="5040172" y="2770632"/>
+            <a:ext cx="1870862" cy="457200"/>
           </a:xfrm>
           <a:prstGeom prst="rect">
             <a:avLst/>
@@ -8347,19 +8173,19 @@
           <a:p>
             <a:pPr algn="l">
               <a:lnSpc>
-                <a:spcPct val="105000"/>
-              </a:lnSpc>
-              <a:spcBef>
-                <a:spcPts val="0"/>
-              </a:spcBef>
-              <a:spcAft>
-                <a:spcPts val="400"/>
-              </a:spcAft>
-            </a:pPr>
-            <a:r>
-              <a:rPr sz="1200" b="1">
-                <a:solidFill>
-                  <a:srgbClr val="171A1E"/>
+                <a:spcPct val="106000"/>
+              </a:lnSpc>
+              <a:spcBef>
+                <a:spcPts val="0"/>
+              </a:spcBef>
+              <a:spcAft>
+                <a:spcPts val="400"/>
+              </a:spcAft>
+            </a:pPr>
+            <a:r>
+              <a:rPr sz="1400" b="1">
+                <a:solidFill>
+                  <a:srgbClr val="15181C"/>
                 </a:solidFill>
                 <a:latin typeface="Noto Sans JP"/>
                 <a:ea typeface="Noto Sans JP"/>
@@ -8371,14 +8197,14 @@
       </p:sp>
       <p:sp>
         <p:nvSpPr>
-          <p:cNvPr id="28" name="TextBox 27"/>
-          <p:cNvSpPr txBox="1"/>
-          <p:nvPr/>
-        </p:nvSpPr>
-        <p:spPr>
-          <a:xfrm>
-            <a:off x="5040172" y="3465576"/>
-            <a:ext cx="1852574" cy="274320"/>
+          <p:cNvPr id="26" name="TextBox 25"/>
+          <p:cNvSpPr txBox="1"/>
+          <p:nvPr/>
+        </p:nvSpPr>
+        <p:spPr>
+          <a:xfrm>
+            <a:off x="5040172" y="3337560"/>
+            <a:ext cx="1870862" cy="310896"/>
           </a:xfrm>
           <a:prstGeom prst="rect">
             <a:avLst/>
@@ -8393,19 +8219,19 @@
           <a:p>
             <a:pPr algn="l">
               <a:lnSpc>
-                <a:spcPct val="108000"/>
-              </a:lnSpc>
-              <a:spcBef>
-                <a:spcPts val="0"/>
-              </a:spcBef>
-              <a:spcAft>
-                <a:spcPts val="400"/>
-              </a:spcAft>
-            </a:pPr>
-            <a:r>
-              <a:rPr sz="1050" b="1">
-                <a:solidFill>
-                  <a:srgbClr val="3C4148"/>
+                <a:spcPct val="110000"/>
+              </a:lnSpc>
+              <a:spcBef>
+                <a:spcPts val="0"/>
+              </a:spcBef>
+              <a:spcAft>
+                <a:spcPts val="400"/>
+              </a:spcAft>
+            </a:pPr>
+            <a:r>
+              <a:rPr sz="1200" b="1">
+                <a:solidFill>
+                  <a:srgbClr val="373C43"/>
                 </a:solidFill>
                 <a:latin typeface="Noto Sans JP"/>
                 <a:ea typeface="Noto Sans JP"/>
@@ -8417,14 +8243,14 @@
       </p:sp>
       <p:sp>
         <p:nvSpPr>
-          <p:cNvPr id="29" name="TextBox 28"/>
-          <p:cNvSpPr txBox="1"/>
-          <p:nvPr/>
-        </p:nvSpPr>
-        <p:spPr>
-          <a:xfrm>
-            <a:off x="5040172" y="3758184"/>
-            <a:ext cx="1852574" cy="274320"/>
+          <p:cNvPr id="27" name="TextBox 26"/>
+          <p:cNvSpPr txBox="1"/>
+          <p:nvPr/>
+        </p:nvSpPr>
+        <p:spPr>
+          <a:xfrm>
+            <a:off x="5040172" y="3721608"/>
+            <a:ext cx="1870862" cy="310896"/>
           </a:xfrm>
           <a:prstGeom prst="rect">
             <a:avLst/>
@@ -8439,19 +8265,19 @@
           <a:p>
             <a:pPr algn="l">
               <a:lnSpc>
-                <a:spcPct val="108000"/>
-              </a:lnSpc>
-              <a:spcBef>
-                <a:spcPts val="0"/>
-              </a:spcBef>
-              <a:spcAft>
-                <a:spcPts val="400"/>
-              </a:spcAft>
-            </a:pPr>
-            <a:r>
-              <a:rPr sz="1050" b="1">
-                <a:solidFill>
-                  <a:srgbClr val="3C4148"/>
+                <a:spcPct val="110000"/>
+              </a:lnSpc>
+              <a:spcBef>
+                <a:spcPts val="0"/>
+              </a:spcBef>
+              <a:spcAft>
+                <a:spcPts val="400"/>
+              </a:spcAft>
+            </a:pPr>
+            <a:r>
+              <a:rPr sz="1200" b="1">
+                <a:solidFill>
+                  <a:srgbClr val="373C43"/>
                 </a:solidFill>
                 <a:latin typeface="Noto Sans JP"/>
                 <a:ea typeface="Noto Sans JP"/>
@@ -8463,14 +8289,14 @@
       </p:sp>
       <p:sp>
         <p:nvSpPr>
-          <p:cNvPr id="30" name="TextBox 29"/>
-          <p:cNvSpPr txBox="1"/>
-          <p:nvPr/>
-        </p:nvSpPr>
-        <p:spPr>
-          <a:xfrm>
-            <a:off x="5040172" y="4050791"/>
-            <a:ext cx="1852574" cy="274320"/>
+          <p:cNvPr id="28" name="TextBox 27"/>
+          <p:cNvSpPr txBox="1"/>
+          <p:nvPr/>
+        </p:nvSpPr>
+        <p:spPr>
+          <a:xfrm>
+            <a:off x="5040172" y="4105656"/>
+            <a:ext cx="1870862" cy="310896"/>
           </a:xfrm>
           <a:prstGeom prst="rect">
             <a:avLst/>
@@ -8485,19 +8311,19 @@
           <a:p>
             <a:pPr algn="l">
               <a:lnSpc>
-                <a:spcPct val="108000"/>
-              </a:lnSpc>
-              <a:spcBef>
-                <a:spcPts val="0"/>
-              </a:spcBef>
-              <a:spcAft>
-                <a:spcPts val="400"/>
-              </a:spcAft>
-            </a:pPr>
-            <a:r>
-              <a:rPr sz="1050" b="1">
-                <a:solidFill>
-                  <a:srgbClr val="3C4148"/>
+                <a:spcPct val="110000"/>
+              </a:lnSpc>
+              <a:spcBef>
+                <a:spcPts val="0"/>
+              </a:spcBef>
+              <a:spcAft>
+                <a:spcPts val="400"/>
+              </a:spcAft>
+            </a:pPr>
+            <a:r>
+              <a:rPr sz="1200" b="1">
+                <a:solidFill>
+                  <a:srgbClr val="373C43"/>
                 </a:solidFill>
                 <a:latin typeface="Noto Sans JP"/>
                 <a:ea typeface="Noto Sans JP"/>
@@ -8509,14 +8335,14 @@
       </p:sp>
       <p:sp>
         <p:nvSpPr>
-          <p:cNvPr id="31" name="TextBox 30"/>
-          <p:cNvSpPr txBox="1"/>
-          <p:nvPr/>
-        </p:nvSpPr>
-        <p:spPr>
-          <a:xfrm>
-            <a:off x="5040172" y="4343400"/>
-            <a:ext cx="1852574" cy="274320"/>
+          <p:cNvPr id="29" name="TextBox 28"/>
+          <p:cNvSpPr txBox="1"/>
+          <p:nvPr/>
+        </p:nvSpPr>
+        <p:spPr>
+          <a:xfrm>
+            <a:off x="5040172" y="4489704"/>
+            <a:ext cx="1870862" cy="310896"/>
           </a:xfrm>
           <a:prstGeom prst="rect">
             <a:avLst/>
@@ -8531,19 +8357,19 @@
           <a:p>
             <a:pPr algn="l">
               <a:lnSpc>
-                <a:spcPct val="108000"/>
-              </a:lnSpc>
-              <a:spcBef>
-                <a:spcPts val="0"/>
-              </a:spcBef>
-              <a:spcAft>
-                <a:spcPts val="400"/>
-              </a:spcAft>
-            </a:pPr>
-            <a:r>
-              <a:rPr sz="1050" b="1">
-                <a:solidFill>
-                  <a:srgbClr val="3C4148"/>
+                <a:spcPct val="110000"/>
+              </a:lnSpc>
+              <a:spcBef>
+                <a:spcPts val="0"/>
+              </a:spcBef>
+              <a:spcAft>
+                <a:spcPts val="400"/>
+              </a:spcAft>
+            </a:pPr>
+            <a:r>
+              <a:rPr sz="1200" b="1">
+                <a:solidFill>
+                  <a:srgbClr val="373C43"/>
                 </a:solidFill>
                 <a:latin typeface="Noto Sans JP"/>
                 <a:ea typeface="Noto Sans JP"/>
@@ -8555,20 +8381,20 @@
       </p:sp>
       <p:sp>
         <p:nvSpPr>
-          <p:cNvPr id="32" name="Rectangle 31"/>
+          <p:cNvPr id="30" name="Rectangle 29"/>
           <p:cNvSpPr/>
           <p:nvPr/>
         </p:nvSpPr>
         <p:spPr>
           <a:xfrm>
-            <a:off x="7039051" y="2788920"/>
-            <a:ext cx="12700" cy="1965960"/>
+            <a:off x="7039051" y="2514600"/>
+            <a:ext cx="15240" cy="2331720"/>
           </a:xfrm>
           <a:prstGeom prst="rect">
             <a:avLst/>
           </a:prstGeom>
           <a:solidFill>
-            <a:srgbClr val="DCDFE4"/>
+            <a:srgbClr val="D6DADF"/>
           </a:solidFill>
           <a:ln>
             <a:noFill/>
@@ -8599,14 +8425,14 @@
       </p:sp>
       <p:sp>
         <p:nvSpPr>
-          <p:cNvPr id="33" name="TextBox 32"/>
-          <p:cNvSpPr txBox="1"/>
-          <p:nvPr/>
-        </p:nvSpPr>
-        <p:spPr>
-          <a:xfrm>
-            <a:off x="7148779" y="2788920"/>
-            <a:ext cx="1834286" cy="182880"/>
+          <p:cNvPr id="31" name="TextBox 30"/>
+          <p:cNvSpPr txBox="1"/>
+          <p:nvPr/>
+        </p:nvSpPr>
+        <p:spPr>
+          <a:xfrm>
+            <a:off x="7148779" y="2514600"/>
+            <a:ext cx="1834286" cy="201168"/>
           </a:xfrm>
           <a:prstGeom prst="rect">
             <a:avLst/>
@@ -8621,19 +8447,19 @@
           <a:p>
             <a:pPr algn="l">
               <a:lnSpc>
-                <a:spcPct val="108000"/>
-              </a:lnSpc>
-              <a:spcBef>
-                <a:spcPts val="0"/>
-              </a:spcBef>
-              <a:spcAft>
-                <a:spcPts val="400"/>
-              </a:spcAft>
-            </a:pPr>
-            <a:r>
-              <a:rPr sz="900" b="1" spc="100">
-                <a:solidFill>
-                  <a:srgbClr val="A5ABB2"/>
+                <a:spcPct val="110000"/>
+              </a:lnSpc>
+              <a:spcBef>
+                <a:spcPts val="0"/>
+              </a:spcBef>
+              <a:spcAft>
+                <a:spcPts val="400"/>
+              </a:spcAft>
+            </a:pPr>
+            <a:r>
+              <a:rPr sz="1000" b="1" spc="100">
+                <a:solidFill>
+                  <a:srgbClr val="9AA1A9"/>
                 </a:solidFill>
                 <a:latin typeface="Consolas"/>
                 <a:ea typeface="Consolas"/>
@@ -8645,14 +8471,14 @@
       </p:sp>
       <p:sp>
         <p:nvSpPr>
-          <p:cNvPr id="34" name="TextBox 33"/>
-          <p:cNvSpPr txBox="1"/>
-          <p:nvPr/>
-        </p:nvSpPr>
-        <p:spPr>
-          <a:xfrm>
-            <a:off x="7148779" y="2990088"/>
-            <a:ext cx="1852574" cy="457200"/>
+          <p:cNvPr id="32" name="TextBox 31"/>
+          <p:cNvSpPr txBox="1"/>
+          <p:nvPr/>
+        </p:nvSpPr>
+        <p:spPr>
+          <a:xfrm>
+            <a:off x="7148779" y="2770632"/>
+            <a:ext cx="1870862" cy="457200"/>
           </a:xfrm>
           <a:prstGeom prst="rect">
             <a:avLst/>
@@ -8667,19 +8493,19 @@
           <a:p>
             <a:pPr algn="l">
               <a:lnSpc>
-                <a:spcPct val="105000"/>
-              </a:lnSpc>
-              <a:spcBef>
-                <a:spcPts val="0"/>
-              </a:spcBef>
-              <a:spcAft>
-                <a:spcPts val="400"/>
-              </a:spcAft>
-            </a:pPr>
-            <a:r>
-              <a:rPr sz="1200" b="1">
-                <a:solidFill>
-                  <a:srgbClr val="171A1E"/>
+                <a:spcPct val="106000"/>
+              </a:lnSpc>
+              <a:spcBef>
+                <a:spcPts val="0"/>
+              </a:spcBef>
+              <a:spcAft>
+                <a:spcPts val="400"/>
+              </a:spcAft>
+            </a:pPr>
+            <a:r>
+              <a:rPr sz="1400" b="1">
+                <a:solidFill>
+                  <a:srgbClr val="15181C"/>
                 </a:solidFill>
                 <a:latin typeface="Noto Sans JP"/>
                 <a:ea typeface="Noto Sans JP"/>
@@ -8691,14 +8517,14 @@
       </p:sp>
       <p:sp>
         <p:nvSpPr>
-          <p:cNvPr id="35" name="TextBox 34"/>
-          <p:cNvSpPr txBox="1"/>
-          <p:nvPr/>
-        </p:nvSpPr>
-        <p:spPr>
-          <a:xfrm>
-            <a:off x="7148779" y="3465576"/>
-            <a:ext cx="1852574" cy="274320"/>
+          <p:cNvPr id="33" name="TextBox 32"/>
+          <p:cNvSpPr txBox="1"/>
+          <p:nvPr/>
+        </p:nvSpPr>
+        <p:spPr>
+          <a:xfrm>
+            <a:off x="7148779" y="3337560"/>
+            <a:ext cx="1870862" cy="310896"/>
           </a:xfrm>
           <a:prstGeom prst="rect">
             <a:avLst/>
@@ -8713,19 +8539,19 @@
           <a:p>
             <a:pPr algn="l">
               <a:lnSpc>
-                <a:spcPct val="108000"/>
-              </a:lnSpc>
-              <a:spcBef>
-                <a:spcPts val="0"/>
-              </a:spcBef>
-              <a:spcAft>
-                <a:spcPts val="400"/>
-              </a:spcAft>
-            </a:pPr>
-            <a:r>
-              <a:rPr sz="1050" b="1">
-                <a:solidFill>
-                  <a:srgbClr val="3C4148"/>
+                <a:spcPct val="110000"/>
+              </a:lnSpc>
+              <a:spcBef>
+                <a:spcPts val="0"/>
+              </a:spcBef>
+              <a:spcAft>
+                <a:spcPts val="400"/>
+              </a:spcAft>
+            </a:pPr>
+            <a:r>
+              <a:rPr sz="1200" b="1">
+                <a:solidFill>
+                  <a:srgbClr val="373C43"/>
                 </a:solidFill>
                 <a:latin typeface="Noto Sans JP"/>
                 <a:ea typeface="Noto Sans JP"/>
@@ -8737,14 +8563,14 @@
       </p:sp>
       <p:sp>
         <p:nvSpPr>
-          <p:cNvPr id="36" name="TextBox 35"/>
-          <p:cNvSpPr txBox="1"/>
-          <p:nvPr/>
-        </p:nvSpPr>
-        <p:spPr>
-          <a:xfrm>
-            <a:off x="7148779" y="3758184"/>
-            <a:ext cx="1852574" cy="274320"/>
+          <p:cNvPr id="34" name="TextBox 33"/>
+          <p:cNvSpPr txBox="1"/>
+          <p:nvPr/>
+        </p:nvSpPr>
+        <p:spPr>
+          <a:xfrm>
+            <a:off x="7148779" y="3721608"/>
+            <a:ext cx="1870862" cy="310896"/>
           </a:xfrm>
           <a:prstGeom prst="rect">
             <a:avLst/>
@@ -8759,19 +8585,19 @@
           <a:p>
             <a:pPr algn="l">
               <a:lnSpc>
-                <a:spcPct val="108000"/>
-              </a:lnSpc>
-              <a:spcBef>
-                <a:spcPts val="0"/>
-              </a:spcBef>
-              <a:spcAft>
-                <a:spcPts val="400"/>
-              </a:spcAft>
-            </a:pPr>
-            <a:r>
-              <a:rPr sz="1050" b="1">
-                <a:solidFill>
-                  <a:srgbClr val="3C4148"/>
+                <a:spcPct val="110000"/>
+              </a:lnSpc>
+              <a:spcBef>
+                <a:spcPts val="0"/>
+              </a:spcBef>
+              <a:spcAft>
+                <a:spcPts val="400"/>
+              </a:spcAft>
+            </a:pPr>
+            <a:r>
+              <a:rPr sz="1200" b="1">
+                <a:solidFill>
+                  <a:srgbClr val="373C43"/>
                 </a:solidFill>
                 <a:latin typeface="Noto Sans JP"/>
                 <a:ea typeface="Noto Sans JP"/>
@@ -8783,14 +8609,14 @@
       </p:sp>
       <p:sp>
         <p:nvSpPr>
-          <p:cNvPr id="37" name="TextBox 36"/>
-          <p:cNvSpPr txBox="1"/>
-          <p:nvPr/>
-        </p:nvSpPr>
-        <p:spPr>
-          <a:xfrm>
-            <a:off x="7148779" y="4050791"/>
-            <a:ext cx="1852574" cy="274320"/>
+          <p:cNvPr id="35" name="TextBox 34"/>
+          <p:cNvSpPr txBox="1"/>
+          <p:nvPr/>
+        </p:nvSpPr>
+        <p:spPr>
+          <a:xfrm>
+            <a:off x="7148779" y="4105656"/>
+            <a:ext cx="1870862" cy="310896"/>
           </a:xfrm>
           <a:prstGeom prst="rect">
             <a:avLst/>
@@ -8805,19 +8631,19 @@
           <a:p>
             <a:pPr algn="l">
               <a:lnSpc>
-                <a:spcPct val="108000"/>
-              </a:lnSpc>
-              <a:spcBef>
-                <a:spcPts val="0"/>
-              </a:spcBef>
-              <a:spcAft>
-                <a:spcPts val="400"/>
-              </a:spcAft>
-            </a:pPr>
-            <a:r>
-              <a:rPr sz="1050" b="1">
-                <a:solidFill>
-                  <a:srgbClr val="3C4148"/>
+                <a:spcPct val="110000"/>
+              </a:lnSpc>
+              <a:spcBef>
+                <a:spcPts val="0"/>
+              </a:spcBef>
+              <a:spcAft>
+                <a:spcPts val="400"/>
+              </a:spcAft>
+            </a:pPr>
+            <a:r>
+              <a:rPr sz="1200" b="1">
+                <a:solidFill>
+                  <a:srgbClr val="373C43"/>
                 </a:solidFill>
                 <a:latin typeface="Noto Sans JP"/>
                 <a:ea typeface="Noto Sans JP"/>
@@ -8829,20 +8655,20 @@
       </p:sp>
       <p:sp>
         <p:nvSpPr>
-          <p:cNvPr id="38" name="Rectangle 37"/>
+          <p:cNvPr id="36" name="Rectangle 35"/>
           <p:cNvSpPr/>
           <p:nvPr/>
         </p:nvSpPr>
         <p:spPr>
           <a:xfrm>
-            <a:off x="9147657" y="2788920"/>
-            <a:ext cx="12700" cy="1965960"/>
+            <a:off x="9147657" y="2514600"/>
+            <a:ext cx="15240" cy="2331720"/>
           </a:xfrm>
           <a:prstGeom prst="rect">
             <a:avLst/>
           </a:prstGeom>
           <a:solidFill>
-            <a:srgbClr val="DCDFE4"/>
+            <a:srgbClr val="D6DADF"/>
           </a:solidFill>
           <a:ln>
             <a:noFill/>
@@ -8873,14 +8699,14 @@
       </p:sp>
       <p:sp>
         <p:nvSpPr>
-          <p:cNvPr id="39" name="TextBox 38"/>
-          <p:cNvSpPr txBox="1"/>
-          <p:nvPr/>
-        </p:nvSpPr>
-        <p:spPr>
-          <a:xfrm>
-            <a:off x="9257385" y="2788920"/>
-            <a:ext cx="1834286" cy="182880"/>
+          <p:cNvPr id="37" name="TextBox 36"/>
+          <p:cNvSpPr txBox="1"/>
+          <p:nvPr/>
+        </p:nvSpPr>
+        <p:spPr>
+          <a:xfrm>
+            <a:off x="9257385" y="2514600"/>
+            <a:ext cx="1834286" cy="201168"/>
           </a:xfrm>
           <a:prstGeom prst="rect">
             <a:avLst/>
@@ -8895,19 +8721,19 @@
           <a:p>
             <a:pPr algn="l">
               <a:lnSpc>
-                <a:spcPct val="108000"/>
-              </a:lnSpc>
-              <a:spcBef>
-                <a:spcPts val="0"/>
-              </a:spcBef>
-              <a:spcAft>
-                <a:spcPts val="400"/>
-              </a:spcAft>
-            </a:pPr>
-            <a:r>
-              <a:rPr sz="900" b="1" spc="100">
-                <a:solidFill>
-                  <a:srgbClr val="A5ABB2"/>
+                <a:spcPct val="110000"/>
+              </a:lnSpc>
+              <a:spcBef>
+                <a:spcPts val="0"/>
+              </a:spcBef>
+              <a:spcAft>
+                <a:spcPts val="400"/>
+              </a:spcAft>
+            </a:pPr>
+            <a:r>
+              <a:rPr sz="1000" b="1" spc="100">
+                <a:solidFill>
+                  <a:srgbClr val="9AA1A9"/>
                 </a:solidFill>
                 <a:latin typeface="Consolas"/>
                 <a:ea typeface="Consolas"/>
@@ -8919,14 +8745,14 @@
       </p:sp>
       <p:sp>
         <p:nvSpPr>
-          <p:cNvPr id="40" name="TextBox 39"/>
-          <p:cNvSpPr txBox="1"/>
-          <p:nvPr/>
-        </p:nvSpPr>
-        <p:spPr>
-          <a:xfrm>
-            <a:off x="9257385" y="2990088"/>
-            <a:ext cx="1852574" cy="457200"/>
+          <p:cNvPr id="38" name="TextBox 37"/>
+          <p:cNvSpPr txBox="1"/>
+          <p:nvPr/>
+        </p:nvSpPr>
+        <p:spPr>
+          <a:xfrm>
+            <a:off x="9257385" y="2770632"/>
+            <a:ext cx="1870862" cy="457200"/>
           </a:xfrm>
           <a:prstGeom prst="rect">
             <a:avLst/>
@@ -8941,19 +8767,19 @@
           <a:p>
             <a:pPr algn="l">
               <a:lnSpc>
-                <a:spcPct val="105000"/>
-              </a:lnSpc>
-              <a:spcBef>
-                <a:spcPts val="0"/>
-              </a:spcBef>
-              <a:spcAft>
-                <a:spcPts val="400"/>
-              </a:spcAft>
-            </a:pPr>
-            <a:r>
-              <a:rPr sz="1200" b="1">
-                <a:solidFill>
-                  <a:srgbClr val="171A1E"/>
+                <a:spcPct val="106000"/>
+              </a:lnSpc>
+              <a:spcBef>
+                <a:spcPts val="0"/>
+              </a:spcBef>
+              <a:spcAft>
+                <a:spcPts val="400"/>
+              </a:spcAft>
+            </a:pPr>
+            <a:r>
+              <a:rPr sz="1400" b="1">
+                <a:solidFill>
+                  <a:srgbClr val="15181C"/>
                 </a:solidFill>
                 <a:latin typeface="Noto Sans JP"/>
                 <a:ea typeface="Noto Sans JP"/>
@@ -8965,14 +8791,14 @@
       </p:sp>
       <p:sp>
         <p:nvSpPr>
-          <p:cNvPr id="41" name="TextBox 40"/>
-          <p:cNvSpPr txBox="1"/>
-          <p:nvPr/>
-        </p:nvSpPr>
-        <p:spPr>
-          <a:xfrm>
-            <a:off x="9257385" y="3465576"/>
-            <a:ext cx="1852574" cy="274320"/>
+          <p:cNvPr id="39" name="TextBox 38"/>
+          <p:cNvSpPr txBox="1"/>
+          <p:nvPr/>
+        </p:nvSpPr>
+        <p:spPr>
+          <a:xfrm>
+            <a:off x="9257385" y="3337560"/>
+            <a:ext cx="1870862" cy="310896"/>
           </a:xfrm>
           <a:prstGeom prst="rect">
             <a:avLst/>
@@ -8987,19 +8813,19 @@
           <a:p>
             <a:pPr algn="l">
               <a:lnSpc>
-                <a:spcPct val="108000"/>
-              </a:lnSpc>
-              <a:spcBef>
-                <a:spcPts val="0"/>
-              </a:spcBef>
-              <a:spcAft>
-                <a:spcPts val="400"/>
-              </a:spcAft>
-            </a:pPr>
-            <a:r>
-              <a:rPr sz="1050" b="1">
-                <a:solidFill>
-                  <a:srgbClr val="3C4148"/>
+                <a:spcPct val="110000"/>
+              </a:lnSpc>
+              <a:spcBef>
+                <a:spcPts val="0"/>
+              </a:spcBef>
+              <a:spcAft>
+                <a:spcPts val="400"/>
+              </a:spcAft>
+            </a:pPr>
+            <a:r>
+              <a:rPr sz="1200" b="1">
+                <a:solidFill>
+                  <a:srgbClr val="373C43"/>
                 </a:solidFill>
                 <a:latin typeface="Noto Sans JP"/>
                 <a:ea typeface="Noto Sans JP"/>
@@ -9011,14 +8837,14 @@
       </p:sp>
       <p:sp>
         <p:nvSpPr>
-          <p:cNvPr id="42" name="TextBox 41"/>
-          <p:cNvSpPr txBox="1"/>
-          <p:nvPr/>
-        </p:nvSpPr>
-        <p:spPr>
-          <a:xfrm>
-            <a:off x="9257385" y="3758184"/>
-            <a:ext cx="1852574" cy="274320"/>
+          <p:cNvPr id="40" name="TextBox 39"/>
+          <p:cNvSpPr txBox="1"/>
+          <p:nvPr/>
+        </p:nvSpPr>
+        <p:spPr>
+          <a:xfrm>
+            <a:off x="9257385" y="3721608"/>
+            <a:ext cx="1870862" cy="310896"/>
           </a:xfrm>
           <a:prstGeom prst="rect">
             <a:avLst/>
@@ -9033,19 +8859,19 @@
           <a:p>
             <a:pPr algn="l">
               <a:lnSpc>
-                <a:spcPct val="108000"/>
-              </a:lnSpc>
-              <a:spcBef>
-                <a:spcPts val="0"/>
-              </a:spcBef>
-              <a:spcAft>
-                <a:spcPts val="400"/>
-              </a:spcAft>
-            </a:pPr>
-            <a:r>
-              <a:rPr sz="1050" b="1">
-                <a:solidFill>
-                  <a:srgbClr val="3C4148"/>
+                <a:spcPct val="110000"/>
+              </a:lnSpc>
+              <a:spcBef>
+                <a:spcPts val="0"/>
+              </a:spcBef>
+              <a:spcAft>
+                <a:spcPts val="400"/>
+              </a:spcAft>
+            </a:pPr>
+            <a:r>
+              <a:rPr sz="1200" b="1">
+                <a:solidFill>
+                  <a:srgbClr val="373C43"/>
                 </a:solidFill>
                 <a:latin typeface="Noto Sans JP"/>
                 <a:ea typeface="Noto Sans JP"/>
@@ -9057,14 +8883,14 @@
       </p:sp>
       <p:sp>
         <p:nvSpPr>
-          <p:cNvPr id="43" name="TextBox 42"/>
-          <p:cNvSpPr txBox="1"/>
-          <p:nvPr/>
-        </p:nvSpPr>
-        <p:spPr>
-          <a:xfrm>
-            <a:off x="9257385" y="4050791"/>
-            <a:ext cx="1852574" cy="274320"/>
+          <p:cNvPr id="41" name="TextBox 40"/>
+          <p:cNvSpPr txBox="1"/>
+          <p:nvPr/>
+        </p:nvSpPr>
+        <p:spPr>
+          <a:xfrm>
+            <a:off x="9257385" y="4105656"/>
+            <a:ext cx="1870862" cy="310896"/>
           </a:xfrm>
           <a:prstGeom prst="rect">
             <a:avLst/>
@@ -9079,19 +8905,19 @@
           <a:p>
             <a:pPr algn="l">
               <a:lnSpc>
-                <a:spcPct val="108000"/>
-              </a:lnSpc>
-              <a:spcBef>
-                <a:spcPts val="0"/>
-              </a:spcBef>
-              <a:spcAft>
-                <a:spcPts val="400"/>
-              </a:spcAft>
-            </a:pPr>
-            <a:r>
-              <a:rPr sz="1050" b="1">
-                <a:solidFill>
-                  <a:srgbClr val="3C4148"/>
+                <a:spcPct val="110000"/>
+              </a:lnSpc>
+              <a:spcBef>
+                <a:spcPts val="0"/>
+              </a:spcBef>
+              <a:spcAft>
+                <a:spcPts val="400"/>
+              </a:spcAft>
+            </a:pPr>
+            <a:r>
+              <a:rPr sz="1200" b="1">
+                <a:solidFill>
+                  <a:srgbClr val="373C43"/>
                 </a:solidFill>
                 <a:latin typeface="Noto Sans JP"/>
                 <a:ea typeface="Noto Sans JP"/>
@@ -9103,14 +8929,14 @@
       </p:sp>
       <p:sp>
         <p:nvSpPr>
-          <p:cNvPr id="44" name="TextBox 43"/>
-          <p:cNvSpPr txBox="1"/>
-          <p:nvPr/>
-        </p:nvSpPr>
-        <p:spPr>
-          <a:xfrm>
-            <a:off x="9257385" y="4343400"/>
-            <a:ext cx="1852574" cy="274320"/>
+          <p:cNvPr id="42" name="TextBox 41"/>
+          <p:cNvSpPr txBox="1"/>
+          <p:nvPr/>
+        </p:nvSpPr>
+        <p:spPr>
+          <a:xfrm>
+            <a:off x="9257385" y="4489704"/>
+            <a:ext cx="1870862" cy="310896"/>
           </a:xfrm>
           <a:prstGeom prst="rect">
             <a:avLst/>
@@ -9125,19 +8951,19 @@
           <a:p>
             <a:pPr algn="l">
               <a:lnSpc>
-                <a:spcPct val="108000"/>
-              </a:lnSpc>
-              <a:spcBef>
-                <a:spcPts val="0"/>
-              </a:spcBef>
-              <a:spcAft>
-                <a:spcPts val="400"/>
-              </a:spcAft>
-            </a:pPr>
-            <a:r>
-              <a:rPr sz="1050" b="1">
-                <a:solidFill>
-                  <a:srgbClr val="3C4148"/>
+                <a:spcPct val="110000"/>
+              </a:lnSpc>
+              <a:spcBef>
+                <a:spcPts val="0"/>
+              </a:spcBef>
+              <a:spcAft>
+                <a:spcPts val="400"/>
+              </a:spcAft>
+            </a:pPr>
+            <a:r>
+              <a:rPr sz="1200" b="1">
+                <a:solidFill>
+                  <a:srgbClr val="373C43"/>
                 </a:solidFill>
                 <a:latin typeface="Noto Sans JP"/>
                 <a:ea typeface="Noto Sans JP"/>
@@ -9149,20 +8975,20 @@
       </p:sp>
       <p:sp>
         <p:nvSpPr>
-          <p:cNvPr id="45" name="Rectangle 44"/>
+          <p:cNvPr id="43" name="Rectangle 42"/>
           <p:cNvSpPr/>
           <p:nvPr/>
         </p:nvSpPr>
         <p:spPr>
           <a:xfrm>
-            <a:off x="822960" y="5074920"/>
-            <a:ext cx="10543032" cy="15240"/>
+            <a:off x="822960" y="5257800"/>
+            <a:ext cx="82296" cy="438912"/>
           </a:xfrm>
           <a:prstGeom prst="rect">
             <a:avLst/>
           </a:prstGeom>
           <a:solidFill>
-            <a:srgbClr val="DCDFE4"/>
+            <a:srgbClr val="E60012"/>
           </a:solidFill>
           <a:ln>
             <a:noFill/>
@@ -9193,91 +9019,101 @@
       </p:sp>
       <p:sp>
         <p:nvSpPr>
-          <p:cNvPr id="46" name="TextBox 45"/>
-          <p:cNvSpPr txBox="1"/>
-          <p:nvPr/>
-        </p:nvSpPr>
-        <p:spPr>
-          <a:xfrm>
-            <a:off x="804672" y="5285232"/>
-            <a:ext cx="10607040" cy="457200"/>
-          </a:xfrm>
-          <a:prstGeom prst="rect">
-            <a:avLst/>
-          </a:prstGeom>
-          <a:noFill/>
-        </p:spPr>
-        <p:txBody>
-          <a:bodyPr wrap="square" anchor="t" lIns="0" rIns="0" tIns="0" bIns="0">
+          <p:cNvPr id="44" name="TextBox 43"/>
+          <p:cNvSpPr txBox="1"/>
+          <p:nvPr/>
+        </p:nvSpPr>
+        <p:spPr>
+          <a:xfrm>
+            <a:off x="1078992" y="5212080"/>
+            <a:ext cx="10268711" cy="530352"/>
+          </a:xfrm>
+          <a:prstGeom prst="rect">
+            <a:avLst/>
+          </a:prstGeom>
+          <a:noFill/>
+        </p:spPr>
+        <p:txBody>
+          <a:bodyPr wrap="square" anchor="ctr" lIns="0" rIns="0" tIns="0" bIns="0">
             <a:spAutoFit/>
           </a:bodyPr>
           <a:lstStyle/>
           <a:p>
             <a:pPr algn="l">
               <a:lnSpc>
-                <a:spcPct val="108000"/>
-              </a:lnSpc>
-              <a:spcBef>
-                <a:spcPts val="0"/>
-              </a:spcBef>
-              <a:spcAft>
-                <a:spcPts val="400"/>
-              </a:spcAft>
-            </a:pPr>
-            <a:r>
-              <a:rPr sz="1600" b="1">
-                <a:solidFill>
-                  <a:srgbClr val="171A1E"/>
+                <a:spcPct val="116000"/>
+              </a:lnSpc>
+              <a:spcBef>
+                <a:spcPts val="0"/>
+              </a:spcBef>
+              <a:spcAft>
+                <a:spcPts val="400"/>
+              </a:spcAft>
+            </a:pPr>
+            <a:r>
+              <a:rPr sz="1900" b="1">
+                <a:solidFill>
+                  <a:srgbClr val="15181C"/>
                 </a:solidFill>
                 <a:latin typeface="Noto Sans JP"/>
                 <a:ea typeface="Noto Sans JP"/>
               </a:rPr>
-              <a:t>AIの“源流”が、川下の日本メーカーまで、まるごと潤す。</a:t>
-            </a:r>
-          </a:p>
-        </p:txBody>
-      </p:sp>
-      <p:sp>
-        <p:nvSpPr>
-          <p:cNvPr id="47" name="TextBox 46"/>
-          <p:cNvSpPr txBox="1"/>
-          <p:nvPr/>
-        </p:nvSpPr>
-        <p:spPr>
-          <a:xfrm>
-            <a:off x="804672" y="5742432"/>
-            <a:ext cx="10607040" cy="365760"/>
-          </a:xfrm>
-          <a:prstGeom prst="rect">
-            <a:avLst/>
-          </a:prstGeom>
-          <a:noFill/>
-        </p:spPr>
-        <p:txBody>
-          <a:bodyPr wrap="square" anchor="t" lIns="0" rIns="0" tIns="0" bIns="0">
-            <a:spAutoFit/>
-          </a:bodyPr>
-          <a:lstStyle/>
-          <a:p>
-            <a:pPr algn="l">
-              <a:lnSpc>
-                <a:spcPct val="108000"/>
-              </a:lnSpc>
-              <a:spcBef>
-                <a:spcPts val="0"/>
-              </a:spcBef>
-              <a:spcAft>
-                <a:spcPts val="400"/>
-              </a:spcAft>
-            </a:pPr>
-            <a:r>
-              <a:rPr sz="1300" b="1">
+              <a:t>AIの“源流”が、川下の日本メーカーまで、</a:t>
+            </a:r>
+            <a:r>
+              <a:rPr sz="1900" b="1">
                 <a:solidFill>
                   <a:srgbClr val="E60012"/>
                 </a:solidFill>
                 <a:latin typeface="Noto Sans JP"/>
                 <a:ea typeface="Noto Sans JP"/>
               </a:rPr>
+              <a:t>まるごと潤す。</a:t>
+            </a:r>
+          </a:p>
+        </p:txBody>
+      </p:sp>
+      <p:sp>
+        <p:nvSpPr>
+          <p:cNvPr id="45" name="TextBox 44"/>
+          <p:cNvSpPr txBox="1"/>
+          <p:nvPr/>
+        </p:nvSpPr>
+        <p:spPr>
+          <a:xfrm>
+            <a:off x="1078992" y="5833872"/>
+            <a:ext cx="10332720" cy="310896"/>
+          </a:xfrm>
+          <a:prstGeom prst="rect">
+            <a:avLst/>
+          </a:prstGeom>
+          <a:noFill/>
+        </p:spPr>
+        <p:txBody>
+          <a:bodyPr wrap="square" anchor="t" lIns="0" rIns="0" tIns="0" bIns="0">
+            <a:spAutoFit/>
+          </a:bodyPr>
+          <a:lstStyle/>
+          <a:p>
+            <a:pPr algn="l">
+              <a:lnSpc>
+                <a:spcPct val="110000"/>
+              </a:lnSpc>
+              <a:spcBef>
+                <a:spcPts val="0"/>
+              </a:spcBef>
+              <a:spcAft>
+                <a:spcPts val="400"/>
+              </a:spcAft>
+            </a:pPr>
+            <a:r>
+              <a:rPr sz="1400" b="1">
+                <a:solidFill>
+                  <a:srgbClr val="373C43"/>
+                </a:solidFill>
+                <a:latin typeface="Noto Sans JP"/>
+                <a:ea typeface="Noto Sans JP"/>
+              </a:rPr>
               <a:t>狙える現場は、この一社一社にある。</a:t>
             </a:r>
           </a:p>
@@ -9285,13 +9121,13 @@
       </p:sp>
       <p:sp>
         <p:nvSpPr>
-          <p:cNvPr id="48" name="TextBox 47"/>
-          <p:cNvSpPr txBox="1"/>
-          <p:nvPr/>
-        </p:nvSpPr>
-        <p:spPr>
-          <a:xfrm>
-            <a:off x="804672" y="6263640"/>
+          <p:cNvPr id="46" name="TextBox 45"/>
+          <p:cNvSpPr txBox="1"/>
+          <p:nvPr/>
+        </p:nvSpPr>
+        <p:spPr>
+          <a:xfrm>
+            <a:off x="822960" y="6327648"/>
             <a:ext cx="10607040" cy="256032"/>
           </a:xfrm>
           <a:prstGeom prst="rect">
@@ -9307,19 +9143,19 @@
           <a:p>
             <a:pPr algn="l">
               <a:lnSpc>
-                <a:spcPct val="108000"/>
-              </a:lnSpc>
-              <a:spcBef>
-                <a:spcPts val="0"/>
-              </a:spcBef>
-              <a:spcAft>
-                <a:spcPts val="400"/>
-              </a:spcAft>
-            </a:pPr>
-            <a:r>
-              <a:rPr sz="850" b="0">
-                <a:solidFill>
-                  <a:srgbClr val="A5ABB2"/>
+                <a:spcPct val="110000"/>
+              </a:lnSpc>
+              <a:spcBef>
+                <a:spcPts val="0"/>
+              </a:spcBef>
+              <a:spcAft>
+                <a:spcPts val="400"/>
+              </a:spcAft>
+            </a:pPr>
+            <a:r>
+              <a:rPr sz="900" b="0">
+                <a:solidFill>
+                  <a:srgbClr val="9AA1A9"/>
                 </a:solidFill>
                 <a:latin typeface="Consolas"/>
                 <a:ea typeface="Consolas"/>
@@ -9399,8 +9235,8 @@
         </p:nvSpPr>
         <p:spPr>
           <a:xfrm>
-            <a:off x="822960" y="585216"/>
-            <a:ext cx="109728" cy="109728"/>
+            <a:off x="822960" y="566928"/>
+            <a:ext cx="128016" cy="128016"/>
           </a:xfrm>
           <a:prstGeom prst="rect">
             <a:avLst/>
@@ -9443,8 +9279,8 @@
         </p:nvSpPr>
         <p:spPr>
           <a:xfrm>
-            <a:off x="1014984" y="521207"/>
-            <a:ext cx="8686800" cy="237744"/>
+            <a:off x="1042415" y="502920"/>
+            <a:ext cx="8686800" cy="256032"/>
           </a:xfrm>
           <a:prstGeom prst="rect">
             <a:avLst/>
@@ -9459,17 +9295,17 @@
           <a:p>
             <a:pPr algn="l">
               <a:lnSpc>
-                <a:spcPct val="108000"/>
-              </a:lnSpc>
-              <a:spcBef>
-                <a:spcPts val="0"/>
-              </a:spcBef>
-              <a:spcAft>
-                <a:spcPts val="400"/>
-              </a:spcAft>
-            </a:pPr>
-            <a:r>
-              <a:rPr sz="1050" b="1" spc="150">
+                <a:spcPct val="110000"/>
+              </a:lnSpc>
+              <a:spcBef>
+                <a:spcPts val="0"/>
+              </a:spcBef>
+              <a:spcAft>
+                <a:spcPts val="400"/>
+              </a:spcAft>
+            </a:pPr>
+            <a:r>
+              <a:rPr sz="1150" b="1" spc="150">
                 <a:solidFill>
                   <a:srgbClr val="E60012"/>
                 </a:solidFill>
@@ -9489,8 +9325,8 @@
         </p:nvSpPr>
         <p:spPr>
           <a:xfrm>
-            <a:off x="10817352" y="521207"/>
-            <a:ext cx="548640" cy="237744"/>
+            <a:off x="10725912" y="502920"/>
+            <a:ext cx="640080" cy="256032"/>
           </a:xfrm>
           <a:prstGeom prst="rect">
             <a:avLst/>
@@ -9505,19 +9341,19 @@
           <a:p>
             <a:pPr algn="r">
               <a:lnSpc>
-                <a:spcPct val="108000"/>
-              </a:lnSpc>
-              <a:spcBef>
-                <a:spcPts val="0"/>
-              </a:spcBef>
-              <a:spcAft>
-                <a:spcPts val="400"/>
-              </a:spcAft>
-            </a:pPr>
-            <a:r>
-              <a:rPr sz="1050" b="1">
-                <a:solidFill>
-                  <a:srgbClr val="A5ABB2"/>
+                <a:spcPct val="110000"/>
+              </a:lnSpc>
+              <a:spcBef>
+                <a:spcPts val="0"/>
+              </a:spcBef>
+              <a:spcAft>
+                <a:spcPts val="400"/>
+              </a:spcAft>
+            </a:pPr>
+            <a:r>
+              <a:rPr sz="1150" b="1">
+                <a:solidFill>
+                  <a:srgbClr val="9AA1A9"/>
                 </a:solidFill>
                 <a:latin typeface="Consolas"/>
                 <a:ea typeface="Consolas"/>
@@ -9535,8 +9371,8 @@
         </p:nvSpPr>
         <p:spPr>
           <a:xfrm>
-            <a:off x="804672" y="822960"/>
-            <a:ext cx="10543032" cy="457200"/>
+            <a:off x="804672" y="841248"/>
+            <a:ext cx="10543032" cy="502920"/>
           </a:xfrm>
           <a:prstGeom prst="rect">
             <a:avLst/>
@@ -9551,19 +9387,19 @@
           <a:p>
             <a:pPr algn="l">
               <a:lnSpc>
-                <a:spcPct val="108000"/>
-              </a:lnSpc>
-              <a:spcBef>
-                <a:spcPts val="0"/>
-              </a:spcBef>
-              <a:spcAft>
-                <a:spcPts val="400"/>
-              </a:spcAft>
-            </a:pPr>
-            <a:r>
-              <a:rPr sz="2100" b="1">
-                <a:solidFill>
-                  <a:srgbClr val="171A1E"/>
+                <a:spcPct val="110000"/>
+              </a:lnSpc>
+              <a:spcBef>
+                <a:spcPts val="0"/>
+              </a:spcBef>
+              <a:spcAft>
+                <a:spcPts val="400"/>
+              </a:spcAft>
+            </a:pPr>
+            <a:r>
+              <a:rPr sz="2400" b="1">
+                <a:solidFill>
+                  <a:srgbClr val="15181C"/>
                 </a:solidFill>
                 <a:latin typeface="Noto Sans JP"/>
                 <a:ea typeface="Noto Sans JP"/>
@@ -9581,14 +9417,14 @@
         </p:nvSpPr>
         <p:spPr>
           <a:xfrm>
-            <a:off x="822960" y="1389888"/>
-            <a:ext cx="10543032" cy="15240"/>
+            <a:off x="822960" y="1463040"/>
+            <a:ext cx="10543032" cy="17780"/>
           </a:xfrm>
           <a:prstGeom prst="rect">
             <a:avLst/>
           </a:prstGeom>
           <a:solidFill>
-            <a:srgbClr val="DCDFE4"/>
+            <a:srgbClr val="D6DADF"/>
           </a:solidFill>
           <a:ln>
             <a:noFill/>
@@ -9625,14 +9461,14 @@
         </p:nvSpPr>
         <p:spPr>
           <a:xfrm>
-            <a:off x="822960" y="1874519"/>
-            <a:ext cx="2635758" cy="749808"/>
+            <a:off x="822960" y="2011680"/>
+            <a:ext cx="2635758" cy="896112"/>
           </a:xfrm>
           <a:prstGeom prst="rect">
             <a:avLst/>
           </a:prstGeom>
           <a:solidFill>
-            <a:srgbClr val="5A6068"/>
+            <a:srgbClr val="535961"/>
           </a:solidFill>
           <a:ln>
             <a:noFill/>
@@ -9669,14 +9505,14 @@
         </p:nvSpPr>
         <p:spPr>
           <a:xfrm>
-            <a:off x="3458718" y="1874519"/>
-            <a:ext cx="5271516" cy="749808"/>
+            <a:off x="3458718" y="2011680"/>
+            <a:ext cx="5271516" cy="896112"/>
           </a:xfrm>
           <a:prstGeom prst="rect">
             <a:avLst/>
           </a:prstGeom>
           <a:solidFill>
-            <a:srgbClr val="CFD3D8"/>
+            <a:srgbClr val="E60012"/>
           </a:solidFill>
           <a:ln>
             <a:noFill/>
@@ -9713,14 +9549,14 @@
         </p:nvSpPr>
         <p:spPr>
           <a:xfrm>
-            <a:off x="8730234" y="1874519"/>
-            <a:ext cx="2635758" cy="749808"/>
+            <a:off x="8730234" y="2011680"/>
+            <a:ext cx="2635758" cy="896112"/>
           </a:xfrm>
           <a:prstGeom prst="rect">
             <a:avLst/>
           </a:prstGeom>
           <a:solidFill>
-            <a:srgbClr val="ADB2B9"/>
+            <a:srgbClr val="F06670"/>
           </a:solidFill>
           <a:ln>
             <a:noFill/>
@@ -9757,8 +9593,8 @@
         </p:nvSpPr>
         <p:spPr>
           <a:xfrm>
-            <a:off x="3449574" y="1874519"/>
-            <a:ext cx="18288" cy="749808"/>
+            <a:off x="3447745" y="2011680"/>
+            <a:ext cx="21945" cy="896112"/>
           </a:xfrm>
           <a:prstGeom prst="rect">
             <a:avLst/>
@@ -9801,8 +9637,8 @@
         </p:nvSpPr>
         <p:spPr>
           <a:xfrm>
-            <a:off x="8721090" y="1874519"/>
-            <a:ext cx="18288" cy="749808"/>
+            <a:off x="8719261" y="2011680"/>
+            <a:ext cx="21945" cy="896112"/>
           </a:xfrm>
           <a:prstGeom prst="rect">
             <a:avLst/>
@@ -9845,8 +9681,8 @@
         </p:nvSpPr>
         <p:spPr>
           <a:xfrm>
-            <a:off x="822960" y="1874519"/>
-            <a:ext cx="2635758" cy="749808"/>
+            <a:off x="822960" y="2011680"/>
+            <a:ext cx="2635758" cy="896112"/>
           </a:xfrm>
           <a:prstGeom prst="rect">
             <a:avLst/>
@@ -9867,11 +9703,11 @@
                 <a:spcPts val="0"/>
               </a:spcBef>
               <a:spcAft>
-                <a:spcPts val="0"/>
-              </a:spcAft>
-            </a:pPr>
-            <a:r>
-              <a:rPr sz="1000" b="1">
+                <a:spcPts val="100"/>
+              </a:spcAft>
+            </a:pPr>
+            <a:r>
+              <a:rPr sz="1100" b="1">
                 <a:solidFill>
                   <a:srgbClr val="FFFFFF"/>
                 </a:solidFill>
@@ -9890,11 +9726,11 @@
                 <a:spcPts val="0"/>
               </a:spcBef>
               <a:spcAft>
-                <a:spcPts val="0"/>
-              </a:spcAft>
-            </a:pPr>
-            <a:r>
-              <a:rPr sz="1600" b="1">
+                <a:spcPts val="100"/>
+              </a:spcAft>
+            </a:pPr>
+            <a:r>
+              <a:rPr sz="1900" b="1">
                 <a:solidFill>
                   <a:srgbClr val="FFFFFF"/>
                 </a:solidFill>
@@ -9914,8 +9750,8 @@
         </p:nvSpPr>
         <p:spPr>
           <a:xfrm>
-            <a:off x="3458718" y="1874519"/>
-            <a:ext cx="5271516" cy="749808"/>
+            <a:off x="3458718" y="2011680"/>
+            <a:ext cx="5271516" cy="896112"/>
           </a:xfrm>
           <a:prstGeom prst="rect">
             <a:avLst/>
@@ -9936,13 +9772,13 @@
                 <a:spcPts val="0"/>
               </a:spcBef>
               <a:spcAft>
-                <a:spcPts val="0"/>
-              </a:spcAft>
-            </a:pPr>
-            <a:r>
-              <a:rPr sz="1050" b="1">
-                <a:solidFill>
-                  <a:srgbClr val="171A1E"/>
+                <a:spcPts val="100"/>
+              </a:spcAft>
+            </a:pPr>
+            <a:r>
+              <a:rPr sz="1200" b="1">
+                <a:solidFill>
+                  <a:srgbClr val="FFFFFF"/>
                 </a:solidFill>
                 <a:latin typeface="Noto Sans JP"/>
                 <a:ea typeface="Noto Sans JP"/>
@@ -9959,13 +9795,13 @@
                 <a:spcPts val="0"/>
               </a:spcBef>
               <a:spcAft>
-                <a:spcPts val="0"/>
-              </a:spcAft>
-            </a:pPr>
-            <a:r>
-              <a:rPr sz="1800" b="1">
-                <a:solidFill>
-                  <a:srgbClr val="171A1E"/>
+                <a:spcPts val="100"/>
+              </a:spcAft>
+            </a:pPr>
+            <a:r>
+              <a:rPr sz="2200" b="1">
+                <a:solidFill>
+                  <a:srgbClr val="FFFFFF"/>
                 </a:solidFill>
                 <a:latin typeface="Noto Sans JP"/>
                 <a:ea typeface="Noto Sans JP"/>
@@ -9983,8 +9819,8 @@
         </p:nvSpPr>
         <p:spPr>
           <a:xfrm>
-            <a:off x="8730234" y="1874519"/>
-            <a:ext cx="2635758" cy="749808"/>
+            <a:off x="8730234" y="2011680"/>
+            <a:ext cx="2635758" cy="896112"/>
           </a:xfrm>
           <a:prstGeom prst="rect">
             <a:avLst/>
@@ -10005,13 +9841,13 @@
                 <a:spcPts val="0"/>
               </a:spcBef>
               <a:spcAft>
-                <a:spcPts val="0"/>
-              </a:spcAft>
-            </a:pPr>
-            <a:r>
-              <a:rPr sz="1000" b="1">
-                <a:solidFill>
-                  <a:srgbClr val="171A1E"/>
+                <a:spcPts val="100"/>
+              </a:spcAft>
+            </a:pPr>
+            <a:r>
+              <a:rPr sz="1100" b="1">
+                <a:solidFill>
+                  <a:srgbClr val="FFFFFF"/>
                 </a:solidFill>
                 <a:latin typeface="Noto Sans JP"/>
                 <a:ea typeface="Noto Sans JP"/>
@@ -10028,13 +9864,13 @@
                 <a:spcPts val="0"/>
               </a:spcBef>
               <a:spcAft>
-                <a:spcPts val="0"/>
-              </a:spcAft>
-            </a:pPr>
-            <a:r>
-              <a:rPr sz="1600" b="1">
-                <a:solidFill>
-                  <a:srgbClr val="171A1E"/>
+                <a:spcPts val="100"/>
+              </a:spcAft>
+            </a:pPr>
+            <a:r>
+              <a:rPr sz="1900" b="1">
+                <a:solidFill>
+                  <a:srgbClr val="FFFFFF"/>
                 </a:solidFill>
                 <a:latin typeface="Noto Sans JP"/>
                 <a:ea typeface="Noto Sans JP"/>
@@ -10052,8 +9888,8 @@
         </p:nvSpPr>
         <p:spPr>
           <a:xfrm>
-            <a:off x="822960" y="1618487"/>
-            <a:ext cx="2635758" cy="219456"/>
+            <a:off x="822960" y="1719072"/>
+            <a:ext cx="2635758" cy="237744"/>
           </a:xfrm>
           <a:prstGeom prst="rect">
             <a:avLst/>
@@ -10068,19 +9904,19 @@
           <a:p>
             <a:pPr algn="l">
               <a:lnSpc>
-                <a:spcPct val="108000"/>
-              </a:lnSpc>
-              <a:spcBef>
-                <a:spcPts val="0"/>
-              </a:spcBef>
-              <a:spcAft>
-                <a:spcPts val="400"/>
-              </a:spcAft>
-            </a:pPr>
-            <a:r>
-              <a:rPr sz="950" b="1">
-                <a:solidFill>
-                  <a:srgbClr val="7A828B"/>
+                <a:spcPct val="110000"/>
+              </a:lnSpc>
+              <a:spcBef>
+                <a:spcPts val="0"/>
+              </a:spcBef>
+              <a:spcAft>
+                <a:spcPts val="400"/>
+              </a:spcAft>
+            </a:pPr>
+            <a:r>
+              <a:rPr sz="1050" b="1">
+                <a:solidFill>
+                  <a:srgbClr val="6E767F"/>
                 </a:solidFill>
                 <a:latin typeface="Consolas"/>
                 <a:ea typeface="Consolas"/>
@@ -10098,8 +9934,8 @@
         </p:nvSpPr>
         <p:spPr>
           <a:xfrm>
-            <a:off x="3458718" y="1618487"/>
-            <a:ext cx="7907273" cy="219456"/>
+            <a:off x="3458718" y="1719072"/>
+            <a:ext cx="7907273" cy="237744"/>
           </a:xfrm>
           <a:prstGeom prst="rect">
             <a:avLst/>
@@ -10114,17 +9950,17 @@
           <a:p>
             <a:pPr algn="l">
               <a:lnSpc>
-                <a:spcPct val="108000"/>
-              </a:lnSpc>
-              <a:spcBef>
-                <a:spcPts val="0"/>
-              </a:spcBef>
-              <a:spcAft>
-                <a:spcPts val="400"/>
-              </a:spcAft>
-            </a:pPr>
-            <a:r>
-              <a:rPr sz="950" b="1">
+                <a:spcPct val="110000"/>
+              </a:lnSpc>
+              <a:spcBef>
+                <a:spcPts val="0"/>
+              </a:spcBef>
+              <a:spcAft>
+                <a:spcPts val="400"/>
+              </a:spcAft>
+            </a:pPr>
+            <a:r>
+              <a:rPr sz="1100" b="1">
                 <a:solidFill>
                   <a:srgbClr val="E60012"/>
                 </a:solidFill>
@@ -10144,8 +9980,8 @@
         </p:nvSpPr>
         <p:spPr>
           <a:xfrm>
-            <a:off x="822960" y="2880360"/>
-            <a:ext cx="10543032" cy="237744"/>
+            <a:off x="822960" y="3154680"/>
+            <a:ext cx="10543032" cy="256032"/>
           </a:xfrm>
           <a:prstGeom prst="rect">
             <a:avLst/>
@@ -10160,19 +9996,19 @@
           <a:p>
             <a:pPr algn="l">
               <a:lnSpc>
-                <a:spcPct val="108000"/>
-              </a:lnSpc>
-              <a:spcBef>
-                <a:spcPts val="0"/>
-              </a:spcBef>
-              <a:spcAft>
-                <a:spcPts val="400"/>
-              </a:spcAft>
-            </a:pPr>
-            <a:r>
-              <a:rPr sz="1100" b="1">
-                <a:solidFill>
-                  <a:srgbClr val="3C4148"/>
+                <a:spcPct val="110000"/>
+              </a:lnSpc>
+              <a:spcBef>
+                <a:spcPts val="0"/>
+              </a:spcBef>
+              <a:spcAft>
+                <a:spcPts val="400"/>
+              </a:spcAft>
+            </a:pPr>
+            <a:r>
+              <a:rPr sz="1250" b="1">
+                <a:solidFill>
+                  <a:srgbClr val="373C43"/>
                 </a:solidFill>
                 <a:latin typeface="Noto Sans JP"/>
                 <a:ea typeface="Noto Sans JP"/>
@@ -10180,9 +10016,9 @@
               <a:t>その「設備 約75%」を  </a:t>
             </a:r>
             <a:r>
-              <a:rPr sz="1100" b="1">
-                <a:solidFill>
-                  <a:srgbClr val="7A828B"/>
+              <a:rPr sz="1250" b="1">
+                <a:solidFill>
+                  <a:srgbClr val="6E767F"/>
                 </a:solidFill>
                 <a:latin typeface="Noto Sans JP"/>
                 <a:ea typeface="Noto Sans JP"/>
@@ -10190,9 +10026,9 @@
               <a:t>材（機器・材料）</a:t>
             </a:r>
             <a:r>
-              <a:rPr sz="1100" b="0">
-                <a:solidFill>
-                  <a:srgbClr val="3C4148"/>
+              <a:rPr sz="1250" b="0">
+                <a:solidFill>
+                  <a:srgbClr val="373C43"/>
                 </a:solidFill>
                 <a:latin typeface="Noto Sans JP"/>
                 <a:ea typeface="Noto Sans JP"/>
@@ -10200,7 +10036,7 @@
               <a:t>  と  </a:t>
             </a:r>
             <a:r>
-              <a:rPr sz="1100" b="1">
+              <a:rPr sz="1250" b="1">
                 <a:solidFill>
                   <a:srgbClr val="E60012"/>
                 </a:solidFill>
@@ -10210,9 +10046,9 @@
               <a:t>工（据付・施工＝人が動く）</a:t>
             </a:r>
             <a:r>
-              <a:rPr sz="1100" b="1">
-                <a:solidFill>
-                  <a:srgbClr val="3C4148"/>
+              <a:rPr sz="1250" b="1">
+                <a:solidFill>
+                  <a:srgbClr val="373C43"/>
                 </a:solidFill>
                 <a:latin typeface="Noto Sans JP"/>
                 <a:ea typeface="Noto Sans JP"/>
@@ -10230,14 +10066,14 @@
         </p:nvSpPr>
         <p:spPr>
           <a:xfrm>
-            <a:off x="822960" y="3182112"/>
-            <a:ext cx="6325819" cy="713232"/>
+            <a:off x="822960" y="3493008"/>
+            <a:ext cx="6325819" cy="804672"/>
           </a:xfrm>
           <a:prstGeom prst="rect">
             <a:avLst/>
           </a:prstGeom>
           <a:solidFill>
-            <a:srgbClr val="CFD3D8"/>
+            <a:srgbClr val="D2D6DB"/>
           </a:solidFill>
           <a:ln>
             <a:noFill/>
@@ -10274,8 +10110,8 @@
         </p:nvSpPr>
         <p:spPr>
           <a:xfrm>
-            <a:off x="7148779" y="3182112"/>
-            <a:ext cx="4217212" cy="713232"/>
+            <a:off x="7148779" y="3493008"/>
+            <a:ext cx="4217212" cy="804672"/>
           </a:xfrm>
           <a:prstGeom prst="rect">
             <a:avLst/>
@@ -10318,8 +10154,8 @@
         </p:nvSpPr>
         <p:spPr>
           <a:xfrm>
-            <a:off x="7139635" y="3182112"/>
-            <a:ext cx="18288" cy="713232"/>
+            <a:off x="7137806" y="3493008"/>
+            <a:ext cx="21945" cy="804672"/>
           </a:xfrm>
           <a:prstGeom prst="rect">
             <a:avLst/>
@@ -10362,8 +10198,8 @@
         </p:nvSpPr>
         <p:spPr>
           <a:xfrm>
-            <a:off x="822960" y="3182112"/>
-            <a:ext cx="6325819" cy="713232"/>
+            <a:off x="822960" y="3493008"/>
+            <a:ext cx="6325819" cy="804672"/>
           </a:xfrm>
           <a:prstGeom prst="rect">
             <a:avLst/>
@@ -10378,19 +10214,19 @@
           <a:p>
             <a:pPr algn="ctr">
               <a:lnSpc>
-                <a:spcPct val="108000"/>
-              </a:lnSpc>
-              <a:spcBef>
-                <a:spcPts val="0"/>
-              </a:spcBef>
-              <a:spcAft>
-                <a:spcPts val="400"/>
-              </a:spcAft>
-            </a:pPr>
-            <a:r>
-              <a:rPr sz="1100" b="1">
-                <a:solidFill>
-                  <a:srgbClr val="171A1E"/>
+                <a:spcPct val="110000"/>
+              </a:lnSpc>
+              <a:spcBef>
+                <a:spcPts val="0"/>
+              </a:spcBef>
+              <a:spcAft>
+                <a:spcPts val="400"/>
+              </a:spcAft>
+            </a:pPr>
+            <a:r>
+              <a:rPr sz="1250" b="1">
+                <a:solidFill>
+                  <a:srgbClr val="15181C"/>
                 </a:solidFill>
                 <a:latin typeface="Noto Sans JP"/>
                 <a:ea typeface="Noto Sans JP"/>
@@ -10408,8 +10244,8 @@
         </p:nvSpPr>
         <p:spPr>
           <a:xfrm>
-            <a:off x="7148779" y="3182112"/>
-            <a:ext cx="4217212" cy="713232"/>
+            <a:off x="7148779" y="3493008"/>
+            <a:ext cx="4217212" cy="804672"/>
           </a:xfrm>
           <a:prstGeom prst="rect">
             <a:avLst/>
@@ -10424,17 +10260,17 @@
           <a:p>
             <a:pPr algn="ctr">
               <a:lnSpc>
-                <a:spcPct val="108000"/>
-              </a:lnSpc>
-              <a:spcBef>
-                <a:spcPts val="0"/>
-              </a:spcBef>
-              <a:spcAft>
-                <a:spcPts val="400"/>
-              </a:spcAft>
-            </a:pPr>
-            <a:r>
-              <a:rPr sz="1100" b="1">
+                <a:spcPct val="110000"/>
+              </a:lnSpc>
+              <a:spcBef>
+                <a:spcPts val="0"/>
+              </a:spcBef>
+              <a:spcAft>
+                <a:spcPts val="400"/>
+              </a:spcAft>
+            </a:pPr>
+            <a:r>
+              <a:rPr sz="1250" b="1">
                 <a:solidFill>
                   <a:srgbClr val="FFFFFF"/>
                 </a:solidFill>
@@ -10454,8 +10290,8 @@
         </p:nvSpPr>
         <p:spPr>
           <a:xfrm>
-            <a:off x="7148779" y="3941063"/>
-            <a:ext cx="4217212" cy="201168"/>
+            <a:off x="7148779" y="4352544"/>
+            <a:ext cx="4217212" cy="219456"/>
           </a:xfrm>
           <a:prstGeom prst="rect">
             <a:avLst/>
@@ -10470,17 +10306,17 @@
           <a:p>
             <a:pPr algn="ctr">
               <a:lnSpc>
-                <a:spcPct val="108000"/>
-              </a:lnSpc>
-              <a:spcBef>
-                <a:spcPts val="0"/>
-              </a:spcBef>
-              <a:spcAft>
-                <a:spcPts val="400"/>
-              </a:spcAft>
-            </a:pPr>
-            <a:r>
-              <a:rPr sz="900" b="1">
+                <a:spcPct val="110000"/>
+              </a:lnSpc>
+              <a:spcBef>
+                <a:spcPts val="0"/>
+              </a:spcBef>
+              <a:spcAft>
+                <a:spcPts val="400"/>
+              </a:spcAft>
+            </a:pPr>
+            <a:r>
+              <a:rPr sz="1000" b="1">
                 <a:solidFill>
                   <a:srgbClr val="E60012"/>
                 </a:solidFill>
@@ -10500,8 +10336,8 @@
         </p:nvSpPr>
         <p:spPr>
           <a:xfrm>
-            <a:off x="822960" y="4434840"/>
-            <a:ext cx="3148584" cy="256032"/>
+            <a:off x="822960" y="4828032"/>
+            <a:ext cx="3148584" cy="274320"/>
           </a:xfrm>
           <a:prstGeom prst="rect">
             <a:avLst/>
@@ -10516,19 +10352,19 @@
           <a:p>
             <a:pPr algn="l">
               <a:lnSpc>
-                <a:spcPct val="108000"/>
-              </a:lnSpc>
-              <a:spcBef>
-                <a:spcPts val="0"/>
-              </a:spcBef>
-              <a:spcAft>
-                <a:spcPts val="400"/>
-              </a:spcAft>
-            </a:pPr>
-            <a:r>
-              <a:rPr sz="1200" b="1">
-                <a:solidFill>
-                  <a:srgbClr val="171A1E"/>
+                <a:spcPct val="110000"/>
+              </a:lnSpc>
+              <a:spcBef>
+                <a:spcPts val="0"/>
+              </a:spcBef>
+              <a:spcAft>
+                <a:spcPts val="400"/>
+              </a:spcAft>
+            </a:pPr>
+            <a:r>
+              <a:rPr sz="1350" b="1">
+                <a:solidFill>
+                  <a:srgbClr val="15181C"/>
                 </a:solidFill>
                 <a:latin typeface="Noto Sans JP"/>
                 <a:ea typeface="Noto Sans JP"/>
@@ -10536,7 +10372,7 @@
               <a:t>据付・施工</a:t>
             </a:r>
             <a:r>
-              <a:rPr sz="1100" b="1">
+              <a:rPr sz="1200" b="1">
                 <a:solidFill>
                   <a:srgbClr val="E60012"/>
                 </a:solidFill>
@@ -10556,8 +10392,8 @@
         </p:nvSpPr>
         <p:spPr>
           <a:xfrm>
-            <a:off x="822960" y="4727448"/>
-            <a:ext cx="3148584" cy="274320"/>
+            <a:off x="822960" y="5157216"/>
+            <a:ext cx="3148584" cy="292608"/>
           </a:xfrm>
           <a:prstGeom prst="rect">
             <a:avLst/>
@@ -10572,19 +10408,19 @@
           <a:p>
             <a:pPr algn="l">
               <a:lnSpc>
-                <a:spcPct val="112000"/>
-              </a:lnSpc>
-              <a:spcBef>
-                <a:spcPts val="0"/>
-              </a:spcBef>
-              <a:spcAft>
-                <a:spcPts val="400"/>
-              </a:spcAft>
-            </a:pPr>
-            <a:r>
-              <a:rPr sz="950" b="1">
-                <a:solidFill>
-                  <a:srgbClr val="7A828B"/>
+                <a:spcPct val="114000"/>
+              </a:lnSpc>
+              <a:spcBef>
+                <a:spcPts val="0"/>
+              </a:spcBef>
+              <a:spcAft>
+                <a:spcPts val="400"/>
+              </a:spcAft>
+            </a:pPr>
+            <a:r>
+              <a:rPr sz="1050" b="1">
+                <a:solidFill>
+                  <a:srgbClr val="6E767F"/>
                 </a:solidFill>
                 <a:latin typeface="Noto Sans JP"/>
                 <a:ea typeface="Noto Sans JP"/>
@@ -10602,14 +10438,14 @@
         </p:nvSpPr>
         <p:spPr>
           <a:xfrm>
-            <a:off x="4172712" y="4434840"/>
-            <a:ext cx="12700" cy="603504"/>
+            <a:off x="4154423" y="4828032"/>
+            <a:ext cx="15240" cy="640080"/>
           </a:xfrm>
           <a:prstGeom prst="rect">
             <a:avLst/>
           </a:prstGeom>
           <a:solidFill>
-            <a:srgbClr val="DCDFE4"/>
+            <a:srgbClr val="D6DADF"/>
           </a:solidFill>
           <a:ln>
             <a:noFill/>
@@ -10646,8 +10482,8 @@
         </p:nvSpPr>
         <p:spPr>
           <a:xfrm>
-            <a:off x="4337304" y="4434840"/>
-            <a:ext cx="3148584" cy="256032"/>
+            <a:off x="4337304" y="4828032"/>
+            <a:ext cx="3148584" cy="274320"/>
           </a:xfrm>
           <a:prstGeom prst="rect">
             <a:avLst/>
@@ -10662,19 +10498,19 @@
           <a:p>
             <a:pPr algn="l">
               <a:lnSpc>
-                <a:spcPct val="108000"/>
-              </a:lnSpc>
-              <a:spcBef>
-                <a:spcPts val="0"/>
-              </a:spcBef>
-              <a:spcAft>
-                <a:spcPts val="400"/>
-              </a:spcAft>
-            </a:pPr>
-            <a:r>
-              <a:rPr sz="1200" b="1">
-                <a:solidFill>
-                  <a:srgbClr val="171A1E"/>
+                <a:spcPct val="110000"/>
+              </a:lnSpc>
+              <a:spcBef>
+                <a:spcPts val="0"/>
+              </a:spcBef>
+              <a:spcAft>
+                <a:spcPts val="400"/>
+              </a:spcAft>
+            </a:pPr>
+            <a:r>
+              <a:rPr sz="1350" b="1">
+                <a:solidFill>
+                  <a:srgbClr val="15181C"/>
                 </a:solidFill>
                 <a:latin typeface="Noto Sans JP"/>
                 <a:ea typeface="Noto Sans JP"/>
@@ -10682,7 +10518,7 @@
               <a:t>試運転</a:t>
             </a:r>
             <a:r>
-              <a:rPr sz="1100" b="1">
+              <a:rPr sz="1200" b="1">
                 <a:solidFill>
                   <a:srgbClr val="E60012"/>
                 </a:solidFill>
@@ -10702,8 +10538,8 @@
         </p:nvSpPr>
         <p:spPr>
           <a:xfrm>
-            <a:off x="4337304" y="4727448"/>
-            <a:ext cx="3148584" cy="274320"/>
+            <a:off x="4337304" y="5157216"/>
+            <a:ext cx="3148584" cy="292608"/>
           </a:xfrm>
           <a:prstGeom prst="rect">
             <a:avLst/>
@@ -10718,19 +10554,19 @@
           <a:p>
             <a:pPr algn="l">
               <a:lnSpc>
-                <a:spcPct val="112000"/>
-              </a:lnSpc>
-              <a:spcBef>
-                <a:spcPts val="0"/>
-              </a:spcBef>
-              <a:spcAft>
-                <a:spcPts val="400"/>
-              </a:spcAft>
-            </a:pPr>
-            <a:r>
-              <a:rPr sz="950" b="1">
-                <a:solidFill>
-                  <a:srgbClr val="7A828B"/>
+                <a:spcPct val="114000"/>
+              </a:lnSpc>
+              <a:spcBef>
+                <a:spcPts val="0"/>
+              </a:spcBef>
+              <a:spcAft>
+                <a:spcPts val="400"/>
+              </a:spcAft>
+            </a:pPr>
+            <a:r>
+              <a:rPr sz="1050" b="1">
+                <a:solidFill>
+                  <a:srgbClr val="6E767F"/>
                 </a:solidFill>
                 <a:latin typeface="Noto Sans JP"/>
                 <a:ea typeface="Noto Sans JP"/>
@@ -10748,14 +10584,14 @@
         </p:nvSpPr>
         <p:spPr>
           <a:xfrm>
-            <a:off x="7687056" y="4434840"/>
-            <a:ext cx="12700" cy="603504"/>
+            <a:off x="7668768" y="4828032"/>
+            <a:ext cx="15240" cy="640080"/>
           </a:xfrm>
           <a:prstGeom prst="rect">
             <a:avLst/>
           </a:prstGeom>
           <a:solidFill>
-            <a:srgbClr val="DCDFE4"/>
+            <a:srgbClr val="D6DADF"/>
           </a:solidFill>
           <a:ln>
             <a:noFill/>
@@ -10792,8 +10628,8 @@
         </p:nvSpPr>
         <p:spPr>
           <a:xfrm>
-            <a:off x="7851647" y="4434840"/>
-            <a:ext cx="3148584" cy="256032"/>
+            <a:off x="7851647" y="4828032"/>
+            <a:ext cx="3148584" cy="274320"/>
           </a:xfrm>
           <a:prstGeom prst="rect">
             <a:avLst/>
@@ -10808,19 +10644,19 @@
           <a:p>
             <a:pPr algn="l">
               <a:lnSpc>
-                <a:spcPct val="108000"/>
-              </a:lnSpc>
-              <a:spcBef>
-                <a:spcPts val="0"/>
-              </a:spcBef>
-              <a:spcAft>
-                <a:spcPts val="400"/>
-              </a:spcAft>
-            </a:pPr>
-            <a:r>
-              <a:rPr sz="1200" b="1">
-                <a:solidFill>
-                  <a:srgbClr val="171A1E"/>
+                <a:spcPct val="110000"/>
+              </a:lnSpc>
+              <a:spcBef>
+                <a:spcPts val="0"/>
+              </a:spcBef>
+              <a:spcAft>
+                <a:spcPts val="400"/>
+              </a:spcAft>
+            </a:pPr>
+            <a:r>
+              <a:rPr sz="1350" b="1">
+                <a:solidFill>
+                  <a:srgbClr val="15181C"/>
                 </a:solidFill>
                 <a:latin typeface="Noto Sans JP"/>
                 <a:ea typeface="Noto Sans JP"/>
@@ -10828,7 +10664,7 @@
               <a:t>保守・運用</a:t>
             </a:r>
             <a:r>
-              <a:rPr sz="1100" b="1">
+              <a:rPr sz="1200" b="1">
                 <a:solidFill>
                   <a:srgbClr val="E60012"/>
                 </a:solidFill>
@@ -10848,8 +10684,8 @@
         </p:nvSpPr>
         <p:spPr>
           <a:xfrm>
-            <a:off x="7851647" y="4727448"/>
-            <a:ext cx="3148584" cy="274320"/>
+            <a:off x="7851647" y="5157216"/>
+            <a:ext cx="3148584" cy="292608"/>
           </a:xfrm>
           <a:prstGeom prst="rect">
             <a:avLst/>
@@ -10864,19 +10700,19 @@
           <a:p>
             <a:pPr algn="l">
               <a:lnSpc>
-                <a:spcPct val="112000"/>
-              </a:lnSpc>
-              <a:spcBef>
-                <a:spcPts val="0"/>
-              </a:spcBef>
-              <a:spcAft>
-                <a:spcPts val="400"/>
-              </a:spcAft>
-            </a:pPr>
-            <a:r>
-              <a:rPr sz="950" b="1">
-                <a:solidFill>
-                  <a:srgbClr val="7A828B"/>
+                <a:spcPct val="114000"/>
+              </a:lnSpc>
+              <a:spcBef>
+                <a:spcPts val="0"/>
+              </a:spcBef>
+              <a:spcAft>
+                <a:spcPts val="400"/>
+              </a:spcAft>
+            </a:pPr>
+            <a:r>
+              <a:rPr sz="1050" b="1">
+                <a:solidFill>
+                  <a:srgbClr val="6E767F"/>
                 </a:solidFill>
                 <a:latin typeface="Noto Sans JP"/>
                 <a:ea typeface="Noto Sans JP"/>
@@ -10894,14 +10730,14 @@
         </p:nvSpPr>
         <p:spPr>
           <a:xfrm>
-            <a:off x="822960" y="5349240"/>
-            <a:ext cx="10543032" cy="15240"/>
+            <a:off x="822960" y="5824728"/>
+            <a:ext cx="82296" cy="420624"/>
           </a:xfrm>
           <a:prstGeom prst="rect">
             <a:avLst/>
           </a:prstGeom>
           <a:solidFill>
-            <a:srgbClr val="DCDFE4"/>
+            <a:srgbClr val="E60012"/>
           </a:solidFill>
           <a:ln>
             <a:noFill/>
@@ -10938,43 +10774,43 @@
         </p:nvSpPr>
         <p:spPr>
           <a:xfrm>
-            <a:off x="804672" y="5532120"/>
-            <a:ext cx="10607040" cy="457200"/>
-          </a:xfrm>
-          <a:prstGeom prst="rect">
-            <a:avLst/>
-          </a:prstGeom>
-          <a:noFill/>
-        </p:spPr>
-        <p:txBody>
-          <a:bodyPr wrap="square" anchor="t" lIns="0" rIns="0" tIns="0" bIns="0">
+            <a:off x="1078992" y="5779008"/>
+            <a:ext cx="10268711" cy="512064"/>
+          </a:xfrm>
+          <a:prstGeom prst="rect">
+            <a:avLst/>
+          </a:prstGeom>
+          <a:noFill/>
+        </p:spPr>
+        <p:txBody>
+          <a:bodyPr wrap="square" anchor="ctr" lIns="0" rIns="0" tIns="0" bIns="0">
             <a:spAutoFit/>
           </a:bodyPr>
           <a:lstStyle/>
           <a:p>
             <a:pPr algn="l">
               <a:lnSpc>
-                <a:spcPct val="108000"/>
-              </a:lnSpc>
-              <a:spcBef>
-                <a:spcPts val="0"/>
-              </a:spcBef>
-              <a:spcAft>
-                <a:spcPts val="400"/>
-              </a:spcAft>
-            </a:pPr>
-            <a:r>
-              <a:rPr sz="1400" b="1">
-                <a:solidFill>
-                  <a:srgbClr val="171A1E"/>
+                <a:spcPct val="116000"/>
+              </a:lnSpc>
+              <a:spcBef>
+                <a:spcPts val="0"/>
+              </a:spcBef>
+              <a:spcAft>
+                <a:spcPts val="400"/>
+              </a:spcAft>
+            </a:pPr>
+            <a:r>
+              <a:rPr sz="1600" b="1">
+                <a:solidFill>
+                  <a:srgbClr val="15181C"/>
                 </a:solidFill>
                 <a:latin typeface="Noto Sans JP"/>
                 <a:ea typeface="Noto Sans JP"/>
               </a:rPr>
-              <a:t>これまで建設業だけを見てきた。その周辺の“工”（据付・試運転・保守）に、</a:t>
-            </a:r>
-            <a:r>
-              <a:rPr sz="1400" b="1">
+              <a:t>建設業だけを見てきた。その周辺の“工”（据付・試運転・保守）に、</a:t>
+            </a:r>
+            <a:r>
+              <a:rPr sz="1600" b="1">
                 <a:solidFill>
                   <a:srgbClr val="E60012"/>
                 </a:solidFill>
@@ -10984,60 +10820,14 @@
               <a:t>広大な市場</a:t>
             </a:r>
             <a:r>
-              <a:rPr sz="1400" b="1">
-                <a:solidFill>
-                  <a:srgbClr val="171A1E"/>
+              <a:rPr sz="1600" b="1">
+                <a:solidFill>
+                  <a:srgbClr val="15181C"/>
                 </a:solidFill>
                 <a:latin typeface="Noto Sans JP"/>
                 <a:ea typeface="Noto Sans JP"/>
               </a:rPr>
               <a:t>がある。</a:t>
-            </a:r>
-          </a:p>
-        </p:txBody>
-      </p:sp>
-      <p:sp>
-        <p:nvSpPr>
-          <p:cNvPr id="35" name="TextBox 34"/>
-          <p:cNvSpPr txBox="1"/>
-          <p:nvPr/>
-        </p:nvSpPr>
-        <p:spPr>
-          <a:xfrm>
-            <a:off x="804672" y="6199632"/>
-            <a:ext cx="10607040" cy="237744"/>
-          </a:xfrm>
-          <a:prstGeom prst="rect">
-            <a:avLst/>
-          </a:prstGeom>
-          <a:noFill/>
-        </p:spPr>
-        <p:txBody>
-          <a:bodyPr wrap="square" anchor="t" lIns="0" rIns="0" tIns="0" bIns="0">
-            <a:spAutoFit/>
-          </a:bodyPr>
-          <a:lstStyle/>
-          <a:p>
-            <a:pPr algn="l">
-              <a:lnSpc>
-                <a:spcPct val="108000"/>
-              </a:lnSpc>
-              <a:spcBef>
-                <a:spcPts val="0"/>
-              </a:spcBef>
-              <a:spcAft>
-                <a:spcPts val="400"/>
-              </a:spcAft>
-            </a:pPr>
-            <a:r>
-              <a:rPr sz="850" b="0">
-                <a:solidFill>
-                  <a:srgbClr val="A5ABB2"/>
-                </a:solidFill>
-                <a:latin typeface="Consolas"/>
-                <a:ea typeface="Consolas"/>
-              </a:rPr>
-              <a:t>出典：日経xTECH（設備工事≒建設費の75%）／材工比・試運転1〜3%は積算・業界目安／市場：DataIntelo・DataHorizon。</a:t>
             </a:r>
           </a:p>
         </p:txBody>
@@ -11112,8 +10902,8 @@
         </p:nvSpPr>
         <p:spPr>
           <a:xfrm>
-            <a:off x="822960" y="585216"/>
-            <a:ext cx="109728" cy="109728"/>
+            <a:off x="822960" y="566928"/>
+            <a:ext cx="128016" cy="128016"/>
           </a:xfrm>
           <a:prstGeom prst="rect">
             <a:avLst/>
@@ -11156,8 +10946,8 @@
         </p:nvSpPr>
         <p:spPr>
           <a:xfrm>
-            <a:off x="1014984" y="521207"/>
-            <a:ext cx="8686800" cy="237744"/>
+            <a:off x="1042415" y="502920"/>
+            <a:ext cx="8686800" cy="256032"/>
           </a:xfrm>
           <a:prstGeom prst="rect">
             <a:avLst/>
@@ -11172,17 +10962,17 @@
           <a:p>
             <a:pPr algn="l">
               <a:lnSpc>
-                <a:spcPct val="108000"/>
-              </a:lnSpc>
-              <a:spcBef>
-                <a:spcPts val="0"/>
-              </a:spcBef>
-              <a:spcAft>
-                <a:spcPts val="400"/>
-              </a:spcAft>
-            </a:pPr>
-            <a:r>
-              <a:rPr sz="1050" b="1" spc="150">
+                <a:spcPct val="110000"/>
+              </a:lnSpc>
+              <a:spcBef>
+                <a:spcPts val="0"/>
+              </a:spcBef>
+              <a:spcAft>
+                <a:spcPts val="400"/>
+              </a:spcAft>
+            </a:pPr>
+            <a:r>
+              <a:rPr sz="1150" b="1" spc="150">
                 <a:solidFill>
                   <a:srgbClr val="E60012"/>
                 </a:solidFill>
@@ -11202,8 +10992,8 @@
         </p:nvSpPr>
         <p:spPr>
           <a:xfrm>
-            <a:off x="10817352" y="521207"/>
-            <a:ext cx="548640" cy="237744"/>
+            <a:off x="10725912" y="502920"/>
+            <a:ext cx="640080" cy="256032"/>
           </a:xfrm>
           <a:prstGeom prst="rect">
             <a:avLst/>
@@ -11218,19 +11008,19 @@
           <a:p>
             <a:pPr algn="r">
               <a:lnSpc>
-                <a:spcPct val="108000"/>
-              </a:lnSpc>
-              <a:spcBef>
-                <a:spcPts val="0"/>
-              </a:spcBef>
-              <a:spcAft>
-                <a:spcPts val="400"/>
-              </a:spcAft>
-            </a:pPr>
-            <a:r>
-              <a:rPr sz="1050" b="1">
-                <a:solidFill>
-                  <a:srgbClr val="A5ABB2"/>
+                <a:spcPct val="110000"/>
+              </a:lnSpc>
+              <a:spcBef>
+                <a:spcPts val="0"/>
+              </a:spcBef>
+              <a:spcAft>
+                <a:spcPts val="400"/>
+              </a:spcAft>
+            </a:pPr>
+            <a:r>
+              <a:rPr sz="1150" b="1">
+                <a:solidFill>
+                  <a:srgbClr val="9AA1A9"/>
                 </a:solidFill>
                 <a:latin typeface="Consolas"/>
                 <a:ea typeface="Consolas"/>
@@ -11248,8 +11038,8 @@
         </p:nvSpPr>
         <p:spPr>
           <a:xfrm>
-            <a:off x="804672" y="822960"/>
-            <a:ext cx="10543032" cy="457200"/>
+            <a:off x="804672" y="841248"/>
+            <a:ext cx="10543032" cy="502920"/>
           </a:xfrm>
           <a:prstGeom prst="rect">
             <a:avLst/>
@@ -11264,19 +11054,19 @@
           <a:p>
             <a:pPr algn="l">
               <a:lnSpc>
-                <a:spcPct val="108000"/>
-              </a:lnSpc>
-              <a:spcBef>
-                <a:spcPts val="0"/>
-              </a:spcBef>
-              <a:spcAft>
-                <a:spcPts val="400"/>
-              </a:spcAft>
-            </a:pPr>
-            <a:r>
-              <a:rPr sz="2100" b="1">
-                <a:solidFill>
-                  <a:srgbClr val="171A1E"/>
+                <a:spcPct val="110000"/>
+              </a:lnSpc>
+              <a:spcBef>
+                <a:spcPts val="0"/>
+              </a:spcBef>
+              <a:spcAft>
+                <a:spcPts val="400"/>
+              </a:spcAft>
+            </a:pPr>
+            <a:r>
+              <a:rPr sz="2400" b="1">
+                <a:solidFill>
+                  <a:srgbClr val="15181C"/>
                 </a:solidFill>
                 <a:latin typeface="Noto Sans JP"/>
                 <a:ea typeface="Noto Sans JP"/>
@@ -11294,14 +11084,14 @@
         </p:nvSpPr>
         <p:spPr>
           <a:xfrm>
-            <a:off x="822960" y="1389888"/>
-            <a:ext cx="10543032" cy="15240"/>
+            <a:off x="822960" y="1463040"/>
+            <a:ext cx="10543032" cy="17780"/>
           </a:xfrm>
           <a:prstGeom prst="rect">
             <a:avLst/>
           </a:prstGeom>
           <a:solidFill>
-            <a:srgbClr val="DCDFE4"/>
+            <a:srgbClr val="D6DADF"/>
           </a:solidFill>
           <a:ln>
             <a:noFill/>
@@ -11338,8 +11128,8 @@
         </p:nvSpPr>
         <p:spPr>
           <a:xfrm>
-            <a:off x="822960" y="1783080"/>
-            <a:ext cx="1852574" cy="182880"/>
+            <a:off x="822960" y="1828800"/>
+            <a:ext cx="1852574" cy="201168"/>
           </a:xfrm>
           <a:prstGeom prst="rect">
             <a:avLst/>
@@ -11354,19 +11144,19 @@
           <a:p>
             <a:pPr algn="l">
               <a:lnSpc>
-                <a:spcPct val="108000"/>
-              </a:lnSpc>
-              <a:spcBef>
-                <a:spcPts val="0"/>
-              </a:spcBef>
-              <a:spcAft>
-                <a:spcPts val="400"/>
-              </a:spcAft>
-            </a:pPr>
-            <a:r>
-              <a:rPr sz="900" b="1" spc="100">
-                <a:solidFill>
-                  <a:srgbClr val="A5ABB2"/>
+                <a:spcPct val="110000"/>
+              </a:lnSpc>
+              <a:spcBef>
+                <a:spcPts val="0"/>
+              </a:spcBef>
+              <a:spcAft>
+                <a:spcPts val="400"/>
+              </a:spcAft>
+            </a:pPr>
+            <a:r>
+              <a:rPr sz="1000" b="1" spc="100">
+                <a:solidFill>
+                  <a:srgbClr val="9AA1A9"/>
                 </a:solidFill>
                 <a:latin typeface="Consolas"/>
                 <a:ea typeface="Consolas"/>
@@ -11384,8 +11174,8 @@
         </p:nvSpPr>
         <p:spPr>
           <a:xfrm>
-            <a:off x="822960" y="1984248"/>
-            <a:ext cx="1870862" cy="420624"/>
+            <a:off x="822960" y="2084832"/>
+            <a:ext cx="1889150" cy="457200"/>
           </a:xfrm>
           <a:prstGeom prst="rect">
             <a:avLst/>
@@ -11400,19 +11190,19 @@
           <a:p>
             <a:pPr algn="l">
               <a:lnSpc>
-                <a:spcPct val="104000"/>
-              </a:lnSpc>
-              <a:spcBef>
-                <a:spcPts val="0"/>
-              </a:spcBef>
-              <a:spcAft>
-                <a:spcPts val="400"/>
-              </a:spcAft>
-            </a:pPr>
-            <a:r>
-              <a:rPr sz="1200" b="1">
-                <a:solidFill>
-                  <a:srgbClr val="171A1E"/>
+                <a:spcPct val="105000"/>
+              </a:lnSpc>
+              <a:spcBef>
+                <a:spcPts val="0"/>
+              </a:spcBef>
+              <a:spcAft>
+                <a:spcPts val="400"/>
+              </a:spcAft>
+            </a:pPr>
+            <a:r>
+              <a:rPr sz="1400" b="1">
+                <a:solidFill>
+                  <a:srgbClr val="15181C"/>
                 </a:solidFill>
                 <a:latin typeface="Noto Sans JP"/>
                 <a:ea typeface="Noto Sans JP"/>
@@ -11430,8 +11220,8 @@
         </p:nvSpPr>
         <p:spPr>
           <a:xfrm>
-            <a:off x="822960" y="2423160"/>
-            <a:ext cx="1870862" cy="219456"/>
+            <a:off x="822960" y="2578608"/>
+            <a:ext cx="1889150" cy="237744"/>
           </a:xfrm>
           <a:prstGeom prst="rect">
             <a:avLst/>
@@ -11446,19 +11236,19 @@
           <a:p>
             <a:pPr algn="l">
               <a:lnSpc>
-                <a:spcPct val="108000"/>
-              </a:lnSpc>
-              <a:spcBef>
-                <a:spcPts val="0"/>
-              </a:spcBef>
-              <a:spcAft>
-                <a:spcPts val="400"/>
-              </a:spcAft>
-            </a:pPr>
-            <a:r>
-              <a:rPr sz="950" b="1">
-                <a:solidFill>
-                  <a:srgbClr val="7A828B"/>
+                <a:spcPct val="110000"/>
+              </a:lnSpc>
+              <a:spcBef>
+                <a:spcPts val="0"/>
+              </a:spcBef>
+              <a:spcAft>
+                <a:spcPts val="400"/>
+              </a:spcAft>
+            </a:pPr>
+            <a:r>
+              <a:rPr sz="1050" b="1">
+                <a:solidFill>
+                  <a:srgbClr val="6E767F"/>
                 </a:solidFill>
                 <a:latin typeface="Noto Sans JP"/>
                 <a:ea typeface="Noto Sans JP"/>
@@ -11476,8 +11266,8 @@
         </p:nvSpPr>
         <p:spPr>
           <a:xfrm>
-            <a:off x="822960" y="2807208"/>
-            <a:ext cx="1834286" cy="640080"/>
+            <a:off x="822960" y="2999232"/>
+            <a:ext cx="1834286" cy="713232"/>
           </a:xfrm>
           <a:prstGeom prst="rect">
             <a:avLst/>
@@ -11492,17 +11282,17 @@
           <a:p>
             <a:pPr algn="l">
               <a:lnSpc>
-                <a:spcPct val="108000"/>
-              </a:lnSpc>
-              <a:spcBef>
-                <a:spcPts val="0"/>
-              </a:spcBef>
-              <a:spcAft>
-                <a:spcPts val="400"/>
-              </a:spcAft>
-            </a:pPr>
-            <a:r>
-              <a:rPr sz="1450" b="1">
+                <a:spcPct val="110000"/>
+              </a:lnSpc>
+              <a:spcBef>
+                <a:spcPts val="0"/>
+              </a:spcBef>
+              <a:spcAft>
+                <a:spcPts val="400"/>
+              </a:spcAft>
+            </a:pPr>
+            <a:r>
+              <a:rPr sz="1600" b="1">
                 <a:solidFill>
                   <a:srgbClr val="E60012"/>
                 </a:solidFill>
@@ -11522,8 +11312,8 @@
         </p:nvSpPr>
         <p:spPr>
           <a:xfrm>
-            <a:off x="822960" y="3749039"/>
-            <a:ext cx="1852574" cy="548640"/>
+            <a:off x="822960" y="3977639"/>
+            <a:ext cx="1870862" cy="548640"/>
           </a:xfrm>
           <a:prstGeom prst="rect">
             <a:avLst/>
@@ -11538,19 +11328,19 @@
           <a:p>
             <a:pPr algn="l">
               <a:lnSpc>
-                <a:spcPct val="116000"/>
-              </a:lnSpc>
-              <a:spcBef>
-                <a:spcPts val="0"/>
-              </a:spcBef>
-              <a:spcAft>
-                <a:spcPts val="400"/>
-              </a:spcAft>
-            </a:pPr>
-            <a:r>
-              <a:rPr sz="950" b="1">
-                <a:solidFill>
-                  <a:srgbClr val="3C4148"/>
+                <a:spcPct val="118000"/>
+              </a:lnSpc>
+              <a:spcBef>
+                <a:spcPts val="0"/>
+              </a:spcBef>
+              <a:spcAft>
+                <a:spcPts val="400"/>
+              </a:spcAft>
+            </a:pPr>
+            <a:r>
+              <a:rPr sz="1050" b="1">
+                <a:solidFill>
+                  <a:srgbClr val="373C43"/>
                 </a:solidFill>
                 <a:latin typeface="Noto Sans JP"/>
                 <a:ea typeface="Noto Sans JP"/>
@@ -11568,14 +11358,14 @@
         </p:nvSpPr>
         <p:spPr>
           <a:xfrm>
-            <a:off x="2821838" y="1783080"/>
-            <a:ext cx="12700" cy="2606040"/>
+            <a:off x="2821838" y="1828800"/>
+            <a:ext cx="15240" cy="2743200"/>
           </a:xfrm>
           <a:prstGeom prst="rect">
             <a:avLst/>
           </a:prstGeom>
           <a:solidFill>
-            <a:srgbClr val="DCDFE4"/>
+            <a:srgbClr val="D6DADF"/>
           </a:solidFill>
           <a:ln>
             <a:noFill/>
@@ -11612,8 +11402,8 @@
         </p:nvSpPr>
         <p:spPr>
           <a:xfrm>
-            <a:off x="2931566" y="1783080"/>
-            <a:ext cx="1852574" cy="182880"/>
+            <a:off x="2931566" y="1828800"/>
+            <a:ext cx="1852574" cy="201168"/>
           </a:xfrm>
           <a:prstGeom prst="rect">
             <a:avLst/>
@@ -11628,19 +11418,19 @@
           <a:p>
             <a:pPr algn="l">
               <a:lnSpc>
-                <a:spcPct val="108000"/>
-              </a:lnSpc>
-              <a:spcBef>
-                <a:spcPts val="0"/>
-              </a:spcBef>
-              <a:spcAft>
-                <a:spcPts val="400"/>
-              </a:spcAft>
-            </a:pPr>
-            <a:r>
-              <a:rPr sz="900" b="1" spc="100">
-                <a:solidFill>
-                  <a:srgbClr val="A5ABB2"/>
+                <a:spcPct val="110000"/>
+              </a:lnSpc>
+              <a:spcBef>
+                <a:spcPts val="0"/>
+              </a:spcBef>
+              <a:spcAft>
+                <a:spcPts val="400"/>
+              </a:spcAft>
+            </a:pPr>
+            <a:r>
+              <a:rPr sz="1000" b="1" spc="100">
+                <a:solidFill>
+                  <a:srgbClr val="9AA1A9"/>
                 </a:solidFill>
                 <a:latin typeface="Consolas"/>
                 <a:ea typeface="Consolas"/>
@@ -11658,8 +11448,8 @@
         </p:nvSpPr>
         <p:spPr>
           <a:xfrm>
-            <a:off x="2931566" y="1984248"/>
-            <a:ext cx="1870862" cy="420624"/>
+            <a:off x="2931566" y="2084832"/>
+            <a:ext cx="1889150" cy="457200"/>
           </a:xfrm>
           <a:prstGeom prst="rect">
             <a:avLst/>
@@ -11674,19 +11464,19 @@
           <a:p>
             <a:pPr algn="l">
               <a:lnSpc>
-                <a:spcPct val="104000"/>
-              </a:lnSpc>
-              <a:spcBef>
-                <a:spcPts val="0"/>
-              </a:spcBef>
-              <a:spcAft>
-                <a:spcPts val="400"/>
-              </a:spcAft>
-            </a:pPr>
-            <a:r>
-              <a:rPr sz="1200" b="1">
-                <a:solidFill>
-                  <a:srgbClr val="171A1E"/>
+                <a:spcPct val="105000"/>
+              </a:lnSpc>
+              <a:spcBef>
+                <a:spcPts val="0"/>
+              </a:spcBef>
+              <a:spcAft>
+                <a:spcPts val="400"/>
+              </a:spcAft>
+            </a:pPr>
+            <a:r>
+              <a:rPr sz="1400" b="1">
+                <a:solidFill>
+                  <a:srgbClr val="15181C"/>
                 </a:solidFill>
                 <a:latin typeface="Noto Sans JP"/>
                 <a:ea typeface="Noto Sans JP"/>
@@ -11704,8 +11494,8 @@
         </p:nvSpPr>
         <p:spPr>
           <a:xfrm>
-            <a:off x="2931566" y="2423160"/>
-            <a:ext cx="1870862" cy="219456"/>
+            <a:off x="2931566" y="2578608"/>
+            <a:ext cx="1889150" cy="237744"/>
           </a:xfrm>
           <a:prstGeom prst="rect">
             <a:avLst/>
@@ -11720,19 +11510,19 @@
           <a:p>
             <a:pPr algn="l">
               <a:lnSpc>
-                <a:spcPct val="108000"/>
-              </a:lnSpc>
-              <a:spcBef>
-                <a:spcPts val="0"/>
-              </a:spcBef>
-              <a:spcAft>
-                <a:spcPts val="400"/>
-              </a:spcAft>
-            </a:pPr>
-            <a:r>
-              <a:rPr sz="950" b="1">
-                <a:solidFill>
-                  <a:srgbClr val="7A828B"/>
+                <a:spcPct val="110000"/>
+              </a:lnSpc>
+              <a:spcBef>
+                <a:spcPts val="0"/>
+              </a:spcBef>
+              <a:spcAft>
+                <a:spcPts val="400"/>
+              </a:spcAft>
+            </a:pPr>
+            <a:r>
+              <a:rPr sz="1050" b="1">
+                <a:solidFill>
+                  <a:srgbClr val="6E767F"/>
                 </a:solidFill>
                 <a:latin typeface="Noto Sans JP"/>
                 <a:ea typeface="Noto Sans JP"/>
@@ -11750,8 +11540,8 @@
         </p:nvSpPr>
         <p:spPr>
           <a:xfrm>
-            <a:off x="2931566" y="2807208"/>
-            <a:ext cx="1834286" cy="640080"/>
+            <a:off x="2931566" y="2999232"/>
+            <a:ext cx="1834286" cy="713232"/>
           </a:xfrm>
           <a:prstGeom prst="rect">
             <a:avLst/>
@@ -11766,17 +11556,17 @@
           <a:p>
             <a:pPr algn="l">
               <a:lnSpc>
-                <a:spcPct val="108000"/>
-              </a:lnSpc>
-              <a:spcBef>
-                <a:spcPts val="0"/>
-              </a:spcBef>
-              <a:spcAft>
-                <a:spcPts val="400"/>
-              </a:spcAft>
-            </a:pPr>
-            <a:r>
-              <a:rPr sz="1450" b="1">
+                <a:spcPct val="110000"/>
+              </a:lnSpc>
+              <a:spcBef>
+                <a:spcPts val="0"/>
+              </a:spcBef>
+              <a:spcAft>
+                <a:spcPts val="400"/>
+              </a:spcAft>
+            </a:pPr>
+            <a:r>
+              <a:rPr sz="1600" b="1">
                 <a:solidFill>
                   <a:srgbClr val="E60012"/>
                 </a:solidFill>
@@ -11796,8 +11586,8 @@
         </p:nvSpPr>
         <p:spPr>
           <a:xfrm>
-            <a:off x="2931566" y="3749039"/>
-            <a:ext cx="1852574" cy="548640"/>
+            <a:off x="2931566" y="3977639"/>
+            <a:ext cx="1870862" cy="548640"/>
           </a:xfrm>
           <a:prstGeom prst="rect">
             <a:avLst/>
@@ -11812,19 +11602,19 @@
           <a:p>
             <a:pPr algn="l">
               <a:lnSpc>
-                <a:spcPct val="116000"/>
-              </a:lnSpc>
-              <a:spcBef>
-                <a:spcPts val="0"/>
-              </a:spcBef>
-              <a:spcAft>
-                <a:spcPts val="400"/>
-              </a:spcAft>
-            </a:pPr>
-            <a:r>
-              <a:rPr sz="950" b="1">
-                <a:solidFill>
-                  <a:srgbClr val="3C4148"/>
+                <a:spcPct val="118000"/>
+              </a:lnSpc>
+              <a:spcBef>
+                <a:spcPts val="0"/>
+              </a:spcBef>
+              <a:spcAft>
+                <a:spcPts val="400"/>
+              </a:spcAft>
+            </a:pPr>
+            <a:r>
+              <a:rPr sz="1050" b="1">
+                <a:solidFill>
+                  <a:srgbClr val="373C43"/>
                 </a:solidFill>
                 <a:latin typeface="Noto Sans JP"/>
                 <a:ea typeface="Noto Sans JP"/>
@@ -11842,14 +11632,14 @@
         </p:nvSpPr>
         <p:spPr>
           <a:xfrm>
-            <a:off x="4930444" y="1783080"/>
-            <a:ext cx="12700" cy="2606040"/>
+            <a:off x="4930444" y="1828800"/>
+            <a:ext cx="15240" cy="2743200"/>
           </a:xfrm>
           <a:prstGeom prst="rect">
             <a:avLst/>
           </a:prstGeom>
           <a:solidFill>
-            <a:srgbClr val="DCDFE4"/>
+            <a:srgbClr val="D6DADF"/>
           </a:solidFill>
           <a:ln>
             <a:noFill/>
@@ -11886,8 +11676,8 @@
         </p:nvSpPr>
         <p:spPr>
           <a:xfrm>
-            <a:off x="5040172" y="1783080"/>
-            <a:ext cx="1852574" cy="182880"/>
+            <a:off x="5040172" y="1828800"/>
+            <a:ext cx="1852574" cy="201168"/>
           </a:xfrm>
           <a:prstGeom prst="rect">
             <a:avLst/>
@@ -11902,19 +11692,19 @@
           <a:p>
             <a:pPr algn="l">
               <a:lnSpc>
-                <a:spcPct val="108000"/>
-              </a:lnSpc>
-              <a:spcBef>
-                <a:spcPts val="0"/>
-              </a:spcBef>
-              <a:spcAft>
-                <a:spcPts val="400"/>
-              </a:spcAft>
-            </a:pPr>
-            <a:r>
-              <a:rPr sz="900" b="1" spc="100">
-                <a:solidFill>
-                  <a:srgbClr val="A5ABB2"/>
+                <a:spcPct val="110000"/>
+              </a:lnSpc>
+              <a:spcBef>
+                <a:spcPts val="0"/>
+              </a:spcBef>
+              <a:spcAft>
+                <a:spcPts val="400"/>
+              </a:spcAft>
+            </a:pPr>
+            <a:r>
+              <a:rPr sz="1000" b="1" spc="100">
+                <a:solidFill>
+                  <a:srgbClr val="9AA1A9"/>
                 </a:solidFill>
                 <a:latin typeface="Consolas"/>
                 <a:ea typeface="Consolas"/>
@@ -11932,8 +11722,8 @@
         </p:nvSpPr>
         <p:spPr>
           <a:xfrm>
-            <a:off x="5040172" y="1984248"/>
-            <a:ext cx="1870862" cy="420624"/>
+            <a:off x="5040172" y="2084832"/>
+            <a:ext cx="1889150" cy="457200"/>
           </a:xfrm>
           <a:prstGeom prst="rect">
             <a:avLst/>
@@ -11948,19 +11738,19 @@
           <a:p>
             <a:pPr algn="l">
               <a:lnSpc>
-                <a:spcPct val="104000"/>
-              </a:lnSpc>
-              <a:spcBef>
-                <a:spcPts val="0"/>
-              </a:spcBef>
-              <a:spcAft>
-                <a:spcPts val="400"/>
-              </a:spcAft>
-            </a:pPr>
-            <a:r>
-              <a:rPr sz="1200" b="1">
-                <a:solidFill>
-                  <a:srgbClr val="171A1E"/>
+                <a:spcPct val="105000"/>
+              </a:lnSpc>
+              <a:spcBef>
+                <a:spcPts val="0"/>
+              </a:spcBef>
+              <a:spcAft>
+                <a:spcPts val="400"/>
+              </a:spcAft>
+            </a:pPr>
+            <a:r>
+              <a:rPr sz="1400" b="1">
+                <a:solidFill>
+                  <a:srgbClr val="15181C"/>
                 </a:solidFill>
                 <a:latin typeface="Noto Sans JP"/>
                 <a:ea typeface="Noto Sans JP"/>
@@ -11978,8 +11768,8 @@
         </p:nvSpPr>
         <p:spPr>
           <a:xfrm>
-            <a:off x="5040172" y="2423160"/>
-            <a:ext cx="1870862" cy="219456"/>
+            <a:off x="5040172" y="2578608"/>
+            <a:ext cx="1889150" cy="237744"/>
           </a:xfrm>
           <a:prstGeom prst="rect">
             <a:avLst/>
@@ -11994,19 +11784,19 @@
           <a:p>
             <a:pPr algn="l">
               <a:lnSpc>
-                <a:spcPct val="108000"/>
-              </a:lnSpc>
-              <a:spcBef>
-                <a:spcPts val="0"/>
-              </a:spcBef>
-              <a:spcAft>
-                <a:spcPts val="400"/>
-              </a:spcAft>
-            </a:pPr>
-            <a:r>
-              <a:rPr sz="950" b="1">
-                <a:solidFill>
-                  <a:srgbClr val="7A828B"/>
+                <a:spcPct val="110000"/>
+              </a:lnSpc>
+              <a:spcBef>
+                <a:spcPts val="0"/>
+              </a:spcBef>
+              <a:spcAft>
+                <a:spcPts val="400"/>
+              </a:spcAft>
+            </a:pPr>
+            <a:r>
+              <a:rPr sz="1050" b="1">
+                <a:solidFill>
+                  <a:srgbClr val="6E767F"/>
                 </a:solidFill>
                 <a:latin typeface="Noto Sans JP"/>
                 <a:ea typeface="Noto Sans JP"/>
@@ -12024,8 +11814,8 @@
         </p:nvSpPr>
         <p:spPr>
           <a:xfrm>
-            <a:off x="5040172" y="2807208"/>
-            <a:ext cx="1834286" cy="640080"/>
+            <a:off x="5040172" y="2999232"/>
+            <a:ext cx="1834286" cy="713232"/>
           </a:xfrm>
           <a:prstGeom prst="rect">
             <a:avLst/>
@@ -12040,17 +11830,17 @@
           <a:p>
             <a:pPr algn="l">
               <a:lnSpc>
-                <a:spcPct val="108000"/>
-              </a:lnSpc>
-              <a:spcBef>
-                <a:spcPts val="0"/>
-              </a:spcBef>
-              <a:spcAft>
-                <a:spcPts val="400"/>
-              </a:spcAft>
-            </a:pPr>
-            <a:r>
-              <a:rPr sz="1450" b="1">
+                <a:spcPct val="110000"/>
+              </a:lnSpc>
+              <a:spcBef>
+                <a:spcPts val="0"/>
+              </a:spcBef>
+              <a:spcAft>
+                <a:spcPts val="400"/>
+              </a:spcAft>
+            </a:pPr>
+            <a:r>
+              <a:rPr sz="1600" b="1">
                 <a:solidFill>
                   <a:srgbClr val="E60012"/>
                 </a:solidFill>
@@ -12070,8 +11860,8 @@
         </p:nvSpPr>
         <p:spPr>
           <a:xfrm>
-            <a:off x="5040172" y="3749039"/>
-            <a:ext cx="1852574" cy="548640"/>
+            <a:off x="5040172" y="3977639"/>
+            <a:ext cx="1870862" cy="548640"/>
           </a:xfrm>
           <a:prstGeom prst="rect">
             <a:avLst/>
@@ -12086,19 +11876,19 @@
           <a:p>
             <a:pPr algn="l">
               <a:lnSpc>
-                <a:spcPct val="116000"/>
-              </a:lnSpc>
-              <a:spcBef>
-                <a:spcPts val="0"/>
-              </a:spcBef>
-              <a:spcAft>
-                <a:spcPts val="400"/>
-              </a:spcAft>
-            </a:pPr>
-            <a:r>
-              <a:rPr sz="950" b="1">
-                <a:solidFill>
-                  <a:srgbClr val="3C4148"/>
+                <a:spcPct val="118000"/>
+              </a:lnSpc>
+              <a:spcBef>
+                <a:spcPts val="0"/>
+              </a:spcBef>
+              <a:spcAft>
+                <a:spcPts val="400"/>
+              </a:spcAft>
+            </a:pPr>
+            <a:r>
+              <a:rPr sz="1050" b="1">
+                <a:solidFill>
+                  <a:srgbClr val="373C43"/>
                 </a:solidFill>
                 <a:latin typeface="Noto Sans JP"/>
                 <a:ea typeface="Noto Sans JP"/>
@@ -12116,14 +11906,14 @@
         </p:nvSpPr>
         <p:spPr>
           <a:xfrm>
-            <a:off x="7039051" y="1783080"/>
-            <a:ext cx="12700" cy="2606040"/>
+            <a:off x="7039051" y="1828800"/>
+            <a:ext cx="15240" cy="2743200"/>
           </a:xfrm>
           <a:prstGeom prst="rect">
             <a:avLst/>
           </a:prstGeom>
           <a:solidFill>
-            <a:srgbClr val="DCDFE4"/>
+            <a:srgbClr val="D6DADF"/>
           </a:solidFill>
           <a:ln>
             <a:noFill/>
@@ -12160,8 +11950,8 @@
         </p:nvSpPr>
         <p:spPr>
           <a:xfrm>
-            <a:off x="7148779" y="1783080"/>
-            <a:ext cx="1852574" cy="182880"/>
+            <a:off x="7148779" y="1828800"/>
+            <a:ext cx="1852574" cy="201168"/>
           </a:xfrm>
           <a:prstGeom prst="rect">
             <a:avLst/>
@@ -12176,19 +11966,19 @@
           <a:p>
             <a:pPr algn="l">
               <a:lnSpc>
-                <a:spcPct val="108000"/>
-              </a:lnSpc>
-              <a:spcBef>
-                <a:spcPts val="0"/>
-              </a:spcBef>
-              <a:spcAft>
-                <a:spcPts val="400"/>
-              </a:spcAft>
-            </a:pPr>
-            <a:r>
-              <a:rPr sz="900" b="1" spc="100">
-                <a:solidFill>
-                  <a:srgbClr val="A5ABB2"/>
+                <a:spcPct val="110000"/>
+              </a:lnSpc>
+              <a:spcBef>
+                <a:spcPts val="0"/>
+              </a:spcBef>
+              <a:spcAft>
+                <a:spcPts val="400"/>
+              </a:spcAft>
+            </a:pPr>
+            <a:r>
+              <a:rPr sz="1000" b="1" spc="100">
+                <a:solidFill>
+                  <a:srgbClr val="9AA1A9"/>
                 </a:solidFill>
                 <a:latin typeface="Consolas"/>
                 <a:ea typeface="Consolas"/>
@@ -12206,8 +11996,8 @@
         </p:nvSpPr>
         <p:spPr>
           <a:xfrm>
-            <a:off x="7148779" y="1984248"/>
-            <a:ext cx="1870862" cy="420624"/>
+            <a:off x="7148779" y="2084832"/>
+            <a:ext cx="1889150" cy="457200"/>
           </a:xfrm>
           <a:prstGeom prst="rect">
             <a:avLst/>
@@ -12222,19 +12012,19 @@
           <a:p>
             <a:pPr algn="l">
               <a:lnSpc>
-                <a:spcPct val="104000"/>
-              </a:lnSpc>
-              <a:spcBef>
-                <a:spcPts val="0"/>
-              </a:spcBef>
-              <a:spcAft>
-                <a:spcPts val="400"/>
-              </a:spcAft>
-            </a:pPr>
-            <a:r>
-              <a:rPr sz="1200" b="1">
-                <a:solidFill>
-                  <a:srgbClr val="171A1E"/>
+                <a:spcPct val="105000"/>
+              </a:lnSpc>
+              <a:spcBef>
+                <a:spcPts val="0"/>
+              </a:spcBef>
+              <a:spcAft>
+                <a:spcPts val="400"/>
+              </a:spcAft>
+            </a:pPr>
+            <a:r>
+              <a:rPr sz="1400" b="1">
+                <a:solidFill>
+                  <a:srgbClr val="15181C"/>
                 </a:solidFill>
                 <a:latin typeface="Noto Sans JP"/>
                 <a:ea typeface="Noto Sans JP"/>
@@ -12252,8 +12042,8 @@
         </p:nvSpPr>
         <p:spPr>
           <a:xfrm>
-            <a:off x="7148779" y="2423160"/>
-            <a:ext cx="1870862" cy="219456"/>
+            <a:off x="7148779" y="2578608"/>
+            <a:ext cx="1889150" cy="237744"/>
           </a:xfrm>
           <a:prstGeom prst="rect">
             <a:avLst/>
@@ -12268,19 +12058,19 @@
           <a:p>
             <a:pPr algn="l">
               <a:lnSpc>
-                <a:spcPct val="108000"/>
-              </a:lnSpc>
-              <a:spcBef>
-                <a:spcPts val="0"/>
-              </a:spcBef>
-              <a:spcAft>
-                <a:spcPts val="400"/>
-              </a:spcAft>
-            </a:pPr>
-            <a:r>
-              <a:rPr sz="950" b="1">
-                <a:solidFill>
-                  <a:srgbClr val="7A828B"/>
+                <a:spcPct val="110000"/>
+              </a:lnSpc>
+              <a:spcBef>
+                <a:spcPts val="0"/>
+              </a:spcBef>
+              <a:spcAft>
+                <a:spcPts val="400"/>
+              </a:spcAft>
+            </a:pPr>
+            <a:r>
+              <a:rPr sz="1050" b="1">
+                <a:solidFill>
+                  <a:srgbClr val="6E767F"/>
                 </a:solidFill>
                 <a:latin typeface="Noto Sans JP"/>
                 <a:ea typeface="Noto Sans JP"/>
@@ -12298,8 +12088,8 @@
         </p:nvSpPr>
         <p:spPr>
           <a:xfrm>
-            <a:off x="7148779" y="2807208"/>
-            <a:ext cx="1834286" cy="640080"/>
+            <a:off x="7148779" y="2999232"/>
+            <a:ext cx="1834286" cy="713232"/>
           </a:xfrm>
           <a:prstGeom prst="rect">
             <a:avLst/>
@@ -12314,17 +12104,17 @@
           <a:p>
             <a:pPr algn="l">
               <a:lnSpc>
-                <a:spcPct val="108000"/>
-              </a:lnSpc>
-              <a:spcBef>
-                <a:spcPts val="0"/>
-              </a:spcBef>
-              <a:spcAft>
-                <a:spcPts val="400"/>
-              </a:spcAft>
-            </a:pPr>
-            <a:r>
-              <a:rPr sz="1450" b="1">
+                <a:spcPct val="110000"/>
+              </a:lnSpc>
+              <a:spcBef>
+                <a:spcPts val="0"/>
+              </a:spcBef>
+              <a:spcAft>
+                <a:spcPts val="400"/>
+              </a:spcAft>
+            </a:pPr>
+            <a:r>
+              <a:rPr sz="1600" b="1">
                 <a:solidFill>
                   <a:srgbClr val="E60012"/>
                 </a:solidFill>
@@ -12344,8 +12134,8 @@
         </p:nvSpPr>
         <p:spPr>
           <a:xfrm>
-            <a:off x="7148779" y="3749039"/>
-            <a:ext cx="1852574" cy="548640"/>
+            <a:off x="7148779" y="3977639"/>
+            <a:ext cx="1870862" cy="548640"/>
           </a:xfrm>
           <a:prstGeom prst="rect">
             <a:avLst/>
@@ -12360,19 +12150,19 @@
           <a:p>
             <a:pPr algn="l">
               <a:lnSpc>
-                <a:spcPct val="116000"/>
-              </a:lnSpc>
-              <a:spcBef>
-                <a:spcPts val="0"/>
-              </a:spcBef>
-              <a:spcAft>
-                <a:spcPts val="400"/>
-              </a:spcAft>
-            </a:pPr>
-            <a:r>
-              <a:rPr sz="950" b="1">
-                <a:solidFill>
-                  <a:srgbClr val="3C4148"/>
+                <a:spcPct val="118000"/>
+              </a:lnSpc>
+              <a:spcBef>
+                <a:spcPts val="0"/>
+              </a:spcBef>
+              <a:spcAft>
+                <a:spcPts val="400"/>
+              </a:spcAft>
+            </a:pPr>
+            <a:r>
+              <a:rPr sz="1050" b="1">
+                <a:solidFill>
+                  <a:srgbClr val="373C43"/>
                 </a:solidFill>
                 <a:latin typeface="Noto Sans JP"/>
                 <a:ea typeface="Noto Sans JP"/>
@@ -12390,14 +12180,14 @@
         </p:nvSpPr>
         <p:spPr>
           <a:xfrm>
-            <a:off x="9147657" y="1783080"/>
-            <a:ext cx="12700" cy="2606040"/>
+            <a:off x="9147657" y="1828800"/>
+            <a:ext cx="15240" cy="2743200"/>
           </a:xfrm>
           <a:prstGeom prst="rect">
             <a:avLst/>
           </a:prstGeom>
           <a:solidFill>
-            <a:srgbClr val="DCDFE4"/>
+            <a:srgbClr val="D6DADF"/>
           </a:solidFill>
           <a:ln>
             <a:noFill/>
@@ -12434,8 +12224,8 @@
         </p:nvSpPr>
         <p:spPr>
           <a:xfrm>
-            <a:off x="9257385" y="1783080"/>
-            <a:ext cx="1852574" cy="182880"/>
+            <a:off x="9257385" y="1828800"/>
+            <a:ext cx="1852574" cy="201168"/>
           </a:xfrm>
           <a:prstGeom prst="rect">
             <a:avLst/>
@@ -12450,19 +12240,19 @@
           <a:p>
             <a:pPr algn="l">
               <a:lnSpc>
-                <a:spcPct val="108000"/>
-              </a:lnSpc>
-              <a:spcBef>
-                <a:spcPts val="0"/>
-              </a:spcBef>
-              <a:spcAft>
-                <a:spcPts val="400"/>
-              </a:spcAft>
-            </a:pPr>
-            <a:r>
-              <a:rPr sz="900" b="1" spc="100">
-                <a:solidFill>
-                  <a:srgbClr val="A5ABB2"/>
+                <a:spcPct val="110000"/>
+              </a:lnSpc>
+              <a:spcBef>
+                <a:spcPts val="0"/>
+              </a:spcBef>
+              <a:spcAft>
+                <a:spcPts val="400"/>
+              </a:spcAft>
+            </a:pPr>
+            <a:r>
+              <a:rPr sz="1000" b="1" spc="100">
+                <a:solidFill>
+                  <a:srgbClr val="9AA1A9"/>
                 </a:solidFill>
                 <a:latin typeface="Consolas"/>
                 <a:ea typeface="Consolas"/>
@@ -12480,8 +12270,8 @@
         </p:nvSpPr>
         <p:spPr>
           <a:xfrm>
-            <a:off x="9257385" y="1984248"/>
-            <a:ext cx="1870862" cy="420624"/>
+            <a:off x="9257385" y="2084832"/>
+            <a:ext cx="1889150" cy="457200"/>
           </a:xfrm>
           <a:prstGeom prst="rect">
             <a:avLst/>
@@ -12496,19 +12286,19 @@
           <a:p>
             <a:pPr algn="l">
               <a:lnSpc>
-                <a:spcPct val="104000"/>
-              </a:lnSpc>
-              <a:spcBef>
-                <a:spcPts val="0"/>
-              </a:spcBef>
-              <a:spcAft>
-                <a:spcPts val="400"/>
-              </a:spcAft>
-            </a:pPr>
-            <a:r>
-              <a:rPr sz="1200" b="1">
-                <a:solidFill>
-                  <a:srgbClr val="171A1E"/>
+                <a:spcPct val="105000"/>
+              </a:lnSpc>
+              <a:spcBef>
+                <a:spcPts val="0"/>
+              </a:spcBef>
+              <a:spcAft>
+                <a:spcPts val="400"/>
+              </a:spcAft>
+            </a:pPr>
+            <a:r>
+              <a:rPr sz="1400" b="1">
+                <a:solidFill>
+                  <a:srgbClr val="15181C"/>
                 </a:solidFill>
                 <a:latin typeface="Noto Sans JP"/>
                 <a:ea typeface="Noto Sans JP"/>
@@ -12526,8 +12316,8 @@
         </p:nvSpPr>
         <p:spPr>
           <a:xfrm>
-            <a:off x="9257385" y="2423160"/>
-            <a:ext cx="1870862" cy="219456"/>
+            <a:off x="9257385" y="2578608"/>
+            <a:ext cx="1889150" cy="237744"/>
           </a:xfrm>
           <a:prstGeom prst="rect">
             <a:avLst/>
@@ -12542,19 +12332,19 @@
           <a:p>
             <a:pPr algn="l">
               <a:lnSpc>
-                <a:spcPct val="108000"/>
-              </a:lnSpc>
-              <a:spcBef>
-                <a:spcPts val="0"/>
-              </a:spcBef>
-              <a:spcAft>
-                <a:spcPts val="400"/>
-              </a:spcAft>
-            </a:pPr>
-            <a:r>
-              <a:rPr sz="950" b="1">
-                <a:solidFill>
-                  <a:srgbClr val="7A828B"/>
+                <a:spcPct val="110000"/>
+              </a:lnSpc>
+              <a:spcBef>
+                <a:spcPts val="0"/>
+              </a:spcBef>
+              <a:spcAft>
+                <a:spcPts val="400"/>
+              </a:spcAft>
+            </a:pPr>
+            <a:r>
+              <a:rPr sz="1050" b="1">
+                <a:solidFill>
+                  <a:srgbClr val="6E767F"/>
                 </a:solidFill>
                 <a:latin typeface="Noto Sans JP"/>
                 <a:ea typeface="Noto Sans JP"/>
@@ -12572,8 +12362,8 @@
         </p:nvSpPr>
         <p:spPr>
           <a:xfrm>
-            <a:off x="9257385" y="2807208"/>
-            <a:ext cx="1834286" cy="640080"/>
+            <a:off x="9257385" y="2999232"/>
+            <a:ext cx="1834286" cy="713232"/>
           </a:xfrm>
           <a:prstGeom prst="rect">
             <a:avLst/>
@@ -12588,17 +12378,17 @@
           <a:p>
             <a:pPr algn="l">
               <a:lnSpc>
-                <a:spcPct val="108000"/>
-              </a:lnSpc>
-              <a:spcBef>
-                <a:spcPts val="0"/>
-              </a:spcBef>
-              <a:spcAft>
-                <a:spcPts val="400"/>
-              </a:spcAft>
-            </a:pPr>
-            <a:r>
-              <a:rPr sz="1450" b="1">
+                <a:spcPct val="110000"/>
+              </a:lnSpc>
+              <a:spcBef>
+                <a:spcPts val="0"/>
+              </a:spcBef>
+              <a:spcAft>
+                <a:spcPts val="400"/>
+              </a:spcAft>
+            </a:pPr>
+            <a:r>
+              <a:rPr sz="1600" b="1">
                 <a:solidFill>
                   <a:srgbClr val="E60012"/>
                 </a:solidFill>
@@ -12618,8 +12408,8 @@
         </p:nvSpPr>
         <p:spPr>
           <a:xfrm>
-            <a:off x="9257385" y="3749039"/>
-            <a:ext cx="1852574" cy="548640"/>
+            <a:off x="9257385" y="3977639"/>
+            <a:ext cx="1870862" cy="548640"/>
           </a:xfrm>
           <a:prstGeom prst="rect">
             <a:avLst/>
@@ -12634,19 +12424,19 @@
           <a:p>
             <a:pPr algn="l">
               <a:lnSpc>
-                <a:spcPct val="116000"/>
-              </a:lnSpc>
-              <a:spcBef>
-                <a:spcPts val="0"/>
-              </a:spcBef>
-              <a:spcAft>
-                <a:spcPts val="400"/>
-              </a:spcAft>
-            </a:pPr>
-            <a:r>
-              <a:rPr sz="950" b="1">
-                <a:solidFill>
-                  <a:srgbClr val="3C4148"/>
+                <a:spcPct val="118000"/>
+              </a:lnSpc>
+              <a:spcBef>
+                <a:spcPts val="0"/>
+              </a:spcBef>
+              <a:spcAft>
+                <a:spcPts val="400"/>
+              </a:spcAft>
+            </a:pPr>
+            <a:r>
+              <a:rPr sz="1050" b="1">
+                <a:solidFill>
+                  <a:srgbClr val="373C43"/>
                 </a:solidFill>
                 <a:latin typeface="Noto Sans JP"/>
                 <a:ea typeface="Noto Sans JP"/>
@@ -12664,14 +12454,14 @@
         </p:nvSpPr>
         <p:spPr>
           <a:xfrm>
-            <a:off x="822960" y="4617720"/>
+            <a:off x="822960" y="4754880"/>
             <a:ext cx="10543032" cy="12700"/>
           </a:xfrm>
           <a:prstGeom prst="rect">
             <a:avLst/>
           </a:prstGeom>
           <a:solidFill>
-            <a:srgbClr val="DCDFE4"/>
+            <a:srgbClr val="D6DADF"/>
           </a:solidFill>
           <a:ln>
             <a:noFill/>
@@ -12708,7 +12498,7 @@
         </p:nvSpPr>
         <p:spPr>
           <a:xfrm>
-            <a:off x="804672" y="4828032"/>
+            <a:off x="822960" y="4956048"/>
             <a:ext cx="10607040" cy="457200"/>
           </a:xfrm>
           <a:prstGeom prst="rect">
@@ -12724,19 +12514,19 @@
           <a:p>
             <a:pPr algn="l">
               <a:lnSpc>
-                <a:spcPct val="108000"/>
-              </a:lnSpc>
-              <a:spcBef>
-                <a:spcPts val="0"/>
-              </a:spcBef>
-              <a:spcAft>
-                <a:spcPts val="400"/>
-              </a:spcAft>
-            </a:pPr>
-            <a:r>
-              <a:rPr sz="1100" b="1">
-                <a:solidFill>
-                  <a:srgbClr val="7A828B"/>
+                <a:spcPct val="110000"/>
+              </a:lnSpc>
+              <a:spcBef>
+                <a:spcPts val="0"/>
+              </a:spcBef>
+              <a:spcAft>
+                <a:spcPts val="400"/>
+              </a:spcAft>
+            </a:pPr>
+            <a:r>
+              <a:rPr sz="1200" b="1">
+                <a:solidFill>
+                  <a:srgbClr val="6E767F"/>
                 </a:solidFill>
                 <a:latin typeface="Consolas"/>
                 <a:ea typeface="Consolas"/>
@@ -12744,19 +12534,19 @@
               <a:t>我々の入り方：</a:t>
             </a:r>
             <a:r>
-              <a:rPr sz="1200" b="1">
-                <a:solidFill>
-                  <a:srgbClr val="3C4148"/>
+              <a:rPr sz="1300" b="1">
+                <a:solidFill>
+                  <a:srgbClr val="373C43"/>
                 </a:solidFill>
                 <a:latin typeface="Noto Sans JP"/>
                 <a:ea typeface="Noto Sans JP"/>
               </a:rPr>
-              <a:t>  A 発注者＝工場増設・自社DCを“建てる側”で管理</a:t>
-            </a:r>
-            <a:r>
-              <a:rPr sz="1100" b="0">
-                <a:solidFill>
-                  <a:srgbClr val="A5ABB2"/>
+              <a:t>  A 発注者＝“建てる側”で管理</a:t>
+            </a:r>
+            <a:r>
+              <a:rPr sz="1200" b="0">
+                <a:solidFill>
+                  <a:srgbClr val="9AA1A9"/>
                 </a:solidFill>
                 <a:latin typeface="Noto Sans JP"/>
                 <a:ea typeface="Noto Sans JP"/>
@@ -12764,7 +12554,7 @@
               <a:t>   /   </a:t>
             </a:r>
             <a:r>
-              <a:rPr sz="1200" b="1">
+              <a:rPr sz="1300" b="1">
                 <a:solidFill>
                   <a:srgbClr val="E60012"/>
                 </a:solidFill>
@@ -12784,14 +12574,14 @@
         </p:nvSpPr>
         <p:spPr>
           <a:xfrm>
-            <a:off x="822960" y="5440680"/>
-            <a:ext cx="10543032" cy="15240"/>
+            <a:off x="822960" y="5669280"/>
+            <a:ext cx="82296" cy="457200"/>
           </a:xfrm>
           <a:prstGeom prst="rect">
             <a:avLst/>
           </a:prstGeom>
           <a:solidFill>
-            <a:srgbClr val="DCDFE4"/>
+            <a:srgbClr val="E60012"/>
           </a:solidFill>
           <a:ln>
             <a:noFill/>
@@ -12828,35 +12618,35 @@
         </p:nvSpPr>
         <p:spPr>
           <a:xfrm>
-            <a:off x="804672" y="5623560"/>
-            <a:ext cx="10607040" cy="457200"/>
-          </a:xfrm>
-          <a:prstGeom prst="rect">
-            <a:avLst/>
-          </a:prstGeom>
-          <a:noFill/>
-        </p:spPr>
-        <p:txBody>
-          <a:bodyPr wrap="square" anchor="t" lIns="0" rIns="0" tIns="0" bIns="0">
+            <a:off x="1078992" y="5623560"/>
+            <a:ext cx="10268711" cy="548640"/>
+          </a:xfrm>
+          <a:prstGeom prst="rect">
+            <a:avLst/>
+          </a:prstGeom>
+          <a:noFill/>
+        </p:spPr>
+        <p:txBody>
+          <a:bodyPr wrap="square" anchor="ctr" lIns="0" rIns="0" tIns="0" bIns="0">
             <a:spAutoFit/>
           </a:bodyPr>
           <a:lstStyle/>
           <a:p>
             <a:pPr algn="l">
               <a:lnSpc>
-                <a:spcPct val="108000"/>
-              </a:lnSpc>
-              <a:spcBef>
-                <a:spcPts val="0"/>
-              </a:spcBef>
-              <a:spcAft>
-                <a:spcPts val="400"/>
-              </a:spcAft>
-            </a:pPr>
-            <a:r>
-              <a:rPr sz="1500" b="1">
-                <a:solidFill>
-                  <a:srgbClr val="171A1E"/>
+                <a:spcPct val="116000"/>
+              </a:lnSpc>
+              <a:spcBef>
+                <a:spcPts val="0"/>
+              </a:spcBef>
+              <a:spcAft>
+                <a:spcPts val="400"/>
+              </a:spcAft>
+            </a:pPr>
+            <a:r>
+              <a:rPr sz="1700" b="1">
+                <a:solidFill>
+                  <a:srgbClr val="15181C"/>
                 </a:solidFill>
                 <a:latin typeface="Noto Sans JP"/>
                 <a:ea typeface="Noto Sans JP"/>
@@ -12864,7 +12654,7 @@
               <a:t>川上から川下まで、全段が同時に増収増益。</a:t>
             </a:r>
             <a:r>
-              <a:rPr sz="1500" b="1">
+              <a:rPr sz="1700" b="1">
                 <a:solidFill>
                   <a:srgbClr val="E60012"/>
                 </a:solidFill>
@@ -12946,8 +12736,8 @@
         </p:nvSpPr>
         <p:spPr>
           <a:xfrm>
-            <a:off x="822960" y="1051560"/>
-            <a:ext cx="109728" cy="109728"/>
+            <a:off x="822960" y="1097280"/>
+            <a:ext cx="137160" cy="137160"/>
           </a:xfrm>
           <a:prstGeom prst="rect">
             <a:avLst/>
@@ -12990,8 +12780,8 @@
         </p:nvSpPr>
         <p:spPr>
           <a:xfrm>
-            <a:off x="1014984" y="987552"/>
-            <a:ext cx="9144000" cy="256032"/>
+            <a:off x="1060704" y="1024128"/>
+            <a:ext cx="9601200" cy="274320"/>
           </a:xfrm>
           <a:prstGeom prst="rect">
             <a:avLst/>
@@ -13006,17 +12796,17 @@
           <a:p>
             <a:pPr algn="l">
               <a:lnSpc>
-                <a:spcPct val="108000"/>
-              </a:lnSpc>
-              <a:spcBef>
-                <a:spcPts val="0"/>
-              </a:spcBef>
-              <a:spcAft>
-                <a:spcPts val="400"/>
-              </a:spcAft>
-            </a:pPr>
-            <a:r>
-              <a:rPr sz="1150" b="1" spc="200">
+                <a:spcPct val="110000"/>
+              </a:lnSpc>
+              <a:spcBef>
+                <a:spcPts val="0"/>
+              </a:spcBef>
+              <a:spcAft>
+                <a:spcPts val="400"/>
+              </a:spcAft>
+            </a:pPr>
+            <a:r>
+              <a:rPr sz="1300" b="1" spc="200">
                 <a:solidFill>
                   <a:srgbClr val="E60012"/>
                 </a:solidFill>
@@ -13036,8 +12826,8 @@
         </p:nvSpPr>
         <p:spPr>
           <a:xfrm>
-            <a:off x="795528" y="1554480"/>
-            <a:ext cx="10698480" cy="1005840"/>
+            <a:off x="786384" y="1627632"/>
+            <a:ext cx="10789920" cy="1097280"/>
           </a:xfrm>
           <a:prstGeom prst="rect">
             <a:avLst/>
@@ -13052,19 +12842,19 @@
           <a:p>
             <a:pPr algn="l">
               <a:lnSpc>
-                <a:spcPct val="108000"/>
-              </a:lnSpc>
-              <a:spcBef>
-                <a:spcPts val="0"/>
-              </a:spcBef>
-              <a:spcAft>
-                <a:spcPts val="400"/>
-              </a:spcAft>
-            </a:pPr>
-            <a:r>
-              <a:rPr sz="3800" b="1">
-                <a:solidFill>
-                  <a:srgbClr val="171A1E"/>
+                <a:spcPct val="110000"/>
+              </a:lnSpc>
+              <a:spcBef>
+                <a:spcPts val="0"/>
+              </a:spcBef>
+              <a:spcAft>
+                <a:spcPts val="400"/>
+              </a:spcAft>
+            </a:pPr>
+            <a:r>
+              <a:rPr sz="4400" b="1">
+                <a:solidFill>
+                  <a:srgbClr val="15181C"/>
                 </a:solidFill>
                 <a:latin typeface="Noto Sans JP"/>
                 <a:ea typeface="Noto Sans JP"/>
@@ -13072,7 +12862,7 @@
               <a:t>次の主戦場は、</a:t>
             </a:r>
             <a:r>
-              <a:rPr sz="3800" b="1">
+              <a:rPr sz="4400" b="1">
                 <a:solidFill>
                   <a:srgbClr val="E60012"/>
                 </a:solidFill>
@@ -13082,9 +12872,9 @@
               <a:t>製造業</a:t>
             </a:r>
             <a:r>
-              <a:rPr sz="3800" b="1">
-                <a:solidFill>
-                  <a:srgbClr val="171A1E"/>
+              <a:rPr sz="4400" b="1">
+                <a:solidFill>
+                  <a:srgbClr val="15181C"/>
                 </a:solidFill>
                 <a:latin typeface="Noto Sans JP"/>
                 <a:ea typeface="Noto Sans JP"/>
@@ -13102,8 +12892,8 @@
         </p:nvSpPr>
         <p:spPr>
           <a:xfrm>
-            <a:off x="822960" y="2880360"/>
-            <a:ext cx="2743200" cy="30480"/>
+            <a:off x="822960" y="3063240"/>
+            <a:ext cx="2926080" cy="45720"/>
           </a:xfrm>
           <a:prstGeom prst="rect">
             <a:avLst/>
@@ -13146,8 +12936,8 @@
         </p:nvSpPr>
         <p:spPr>
           <a:xfrm>
-            <a:off x="822960" y="3291840"/>
-            <a:ext cx="502920" cy="548640"/>
+            <a:off x="822960" y="3520440"/>
+            <a:ext cx="548640" cy="594360"/>
           </a:xfrm>
           <a:prstGeom prst="rect">
             <a:avLst/>
@@ -13162,17 +12952,17 @@
           <a:p>
             <a:pPr algn="l">
               <a:lnSpc>
-                <a:spcPct val="108000"/>
-              </a:lnSpc>
-              <a:spcBef>
-                <a:spcPts val="0"/>
-              </a:spcBef>
-              <a:spcAft>
-                <a:spcPts val="400"/>
-              </a:spcAft>
-            </a:pPr>
-            <a:r>
-              <a:rPr sz="1500" b="1">
+                <a:spcPct val="110000"/>
+              </a:lnSpc>
+              <a:spcBef>
+                <a:spcPts val="0"/>
+              </a:spcBef>
+              <a:spcAft>
+                <a:spcPts val="400"/>
+              </a:spcAft>
+            </a:pPr>
+            <a:r>
+              <a:rPr sz="1700" b="1">
                 <a:solidFill>
                   <a:srgbClr val="E60012"/>
                 </a:solidFill>
@@ -13192,8 +12982,8 @@
         </p:nvSpPr>
         <p:spPr>
           <a:xfrm>
-            <a:off x="1463040" y="3346704"/>
-            <a:ext cx="4023360" cy="548640"/>
+            <a:off x="1508760" y="3575304"/>
+            <a:ext cx="4114800" cy="548640"/>
           </a:xfrm>
           <a:prstGeom prst="rect">
             <a:avLst/>
@@ -13208,19 +12998,19 @@
           <a:p>
             <a:pPr algn="l">
               <a:lnSpc>
-                <a:spcPct val="108000"/>
-              </a:lnSpc>
-              <a:spcBef>
-                <a:spcPts val="0"/>
-              </a:spcBef>
-              <a:spcAft>
-                <a:spcPts val="400"/>
-              </a:spcAft>
-            </a:pPr>
-            <a:r>
-              <a:rPr sz="1500" b="1">
-                <a:solidFill>
-                  <a:srgbClr val="171A1E"/>
+                <a:spcPct val="110000"/>
+              </a:lnSpc>
+              <a:spcBef>
+                <a:spcPts val="0"/>
+              </a:spcBef>
+              <a:spcAft>
+                <a:spcPts val="400"/>
+              </a:spcAft>
+            </a:pPr>
+            <a:r>
+              <a:rPr sz="1700" b="1">
+                <a:solidFill>
+                  <a:srgbClr val="15181C"/>
                 </a:solidFill>
                 <a:latin typeface="Noto Sans JP"/>
                 <a:ea typeface="Noto Sans JP"/>
@@ -13238,8 +13028,8 @@
         </p:nvSpPr>
         <p:spPr>
           <a:xfrm>
-            <a:off x="5669280" y="3346704"/>
-            <a:ext cx="5760720" cy="548640"/>
+            <a:off x="5760720" y="3575304"/>
+            <a:ext cx="5669280" cy="566928"/>
           </a:xfrm>
           <a:prstGeom prst="rect">
             <a:avLst/>
@@ -13254,19 +13044,19 @@
           <a:p>
             <a:pPr algn="l">
               <a:lnSpc>
-                <a:spcPct val="114000"/>
-              </a:lnSpc>
-              <a:spcBef>
-                <a:spcPts val="0"/>
-              </a:spcBef>
-              <a:spcAft>
-                <a:spcPts val="400"/>
-              </a:spcAft>
-            </a:pPr>
-            <a:r>
-              <a:rPr sz="1050" b="0">
-                <a:solidFill>
-                  <a:srgbClr val="3C4148"/>
+                <a:spcPct val="116000"/>
+              </a:lnSpc>
+              <a:spcBef>
+                <a:spcPts val="0"/>
+              </a:spcBef>
+              <a:spcAft>
+                <a:spcPts val="400"/>
+              </a:spcAft>
+            </a:pPr>
+            <a:r>
+              <a:rPr sz="1150" b="0">
+                <a:solidFill>
+                  <a:srgbClr val="373C43"/>
                 </a:solidFill>
                 <a:latin typeface="Noto Sans JP"/>
                 <a:ea typeface="Noto Sans JP"/>
@@ -13284,14 +13074,14 @@
         </p:nvSpPr>
         <p:spPr>
           <a:xfrm>
-            <a:off x="822960" y="4023360"/>
+            <a:off x="822960" y="4288536"/>
             <a:ext cx="10543032" cy="12700"/>
           </a:xfrm>
           <a:prstGeom prst="rect">
             <a:avLst/>
           </a:prstGeom>
           <a:solidFill>
-            <a:srgbClr val="DCDFE4"/>
+            <a:srgbClr val="D6DADF"/>
           </a:solidFill>
           <a:ln>
             <a:noFill/>
@@ -13328,8 +13118,8 @@
         </p:nvSpPr>
         <p:spPr>
           <a:xfrm>
-            <a:off x="822960" y="4078224"/>
-            <a:ext cx="502920" cy="548640"/>
+            <a:off x="822960" y="4361688"/>
+            <a:ext cx="548640" cy="594360"/>
           </a:xfrm>
           <a:prstGeom prst="rect">
             <a:avLst/>
@@ -13344,17 +13134,17 @@
           <a:p>
             <a:pPr algn="l">
               <a:lnSpc>
-                <a:spcPct val="108000"/>
-              </a:lnSpc>
-              <a:spcBef>
-                <a:spcPts val="0"/>
-              </a:spcBef>
-              <a:spcAft>
-                <a:spcPts val="400"/>
-              </a:spcAft>
-            </a:pPr>
-            <a:r>
-              <a:rPr sz="1500" b="1">
+                <a:spcPct val="110000"/>
+              </a:lnSpc>
+              <a:spcBef>
+                <a:spcPts val="0"/>
+              </a:spcBef>
+              <a:spcAft>
+                <a:spcPts val="400"/>
+              </a:spcAft>
+            </a:pPr>
+            <a:r>
+              <a:rPr sz="1700" b="1">
                 <a:solidFill>
                   <a:srgbClr val="E60012"/>
                 </a:solidFill>
@@ -13374,8 +13164,8 @@
         </p:nvSpPr>
         <p:spPr>
           <a:xfrm>
-            <a:off x="1463040" y="4133087"/>
-            <a:ext cx="4023360" cy="548640"/>
+            <a:off x="1508760" y="4416552"/>
+            <a:ext cx="4114800" cy="548640"/>
           </a:xfrm>
           <a:prstGeom prst="rect">
             <a:avLst/>
@@ -13390,19 +13180,19 @@
           <a:p>
             <a:pPr algn="l">
               <a:lnSpc>
-                <a:spcPct val="108000"/>
-              </a:lnSpc>
-              <a:spcBef>
-                <a:spcPts val="0"/>
-              </a:spcBef>
-              <a:spcAft>
-                <a:spcPts val="400"/>
-              </a:spcAft>
-            </a:pPr>
-            <a:r>
-              <a:rPr sz="1500" b="1">
-                <a:solidFill>
-                  <a:srgbClr val="171A1E"/>
+                <a:spcPct val="110000"/>
+              </a:lnSpc>
+              <a:spcBef>
+                <a:spcPts val="0"/>
+              </a:spcBef>
+              <a:spcAft>
+                <a:spcPts val="400"/>
+              </a:spcAft>
+            </a:pPr>
+            <a:r>
+              <a:rPr sz="1700" b="1">
+                <a:solidFill>
+                  <a:srgbClr val="15181C"/>
                 </a:solidFill>
                 <a:latin typeface="Noto Sans JP"/>
                 <a:ea typeface="Noto Sans JP"/>
@@ -13420,8 +13210,8 @@
         </p:nvSpPr>
         <p:spPr>
           <a:xfrm>
-            <a:off x="5669280" y="4133087"/>
-            <a:ext cx="5760720" cy="548640"/>
+            <a:off x="5760720" y="4416552"/>
+            <a:ext cx="5669280" cy="566928"/>
           </a:xfrm>
           <a:prstGeom prst="rect">
             <a:avLst/>
@@ -13436,19 +13226,19 @@
           <a:p>
             <a:pPr algn="l">
               <a:lnSpc>
-                <a:spcPct val="114000"/>
-              </a:lnSpc>
-              <a:spcBef>
-                <a:spcPts val="0"/>
-              </a:spcBef>
-              <a:spcAft>
-                <a:spcPts val="400"/>
-              </a:spcAft>
-            </a:pPr>
-            <a:r>
-              <a:rPr sz="1050" b="0">
-                <a:solidFill>
-                  <a:srgbClr val="3C4148"/>
+                <a:spcPct val="116000"/>
+              </a:lnSpc>
+              <a:spcBef>
+                <a:spcPts val="0"/>
+              </a:spcBef>
+              <a:spcAft>
+                <a:spcPts val="400"/>
+              </a:spcAft>
+            </a:pPr>
+            <a:r>
+              <a:rPr sz="1150" b="0">
+                <a:solidFill>
+                  <a:srgbClr val="373C43"/>
                 </a:solidFill>
                 <a:latin typeface="Noto Sans JP"/>
                 <a:ea typeface="Noto Sans JP"/>
@@ -13466,14 +13256,14 @@
         </p:nvSpPr>
         <p:spPr>
           <a:xfrm>
-            <a:off x="822960" y="4809744"/>
+            <a:off x="822960" y="5129784"/>
             <a:ext cx="10543032" cy="12700"/>
           </a:xfrm>
           <a:prstGeom prst="rect">
             <a:avLst/>
           </a:prstGeom>
           <a:solidFill>
-            <a:srgbClr val="DCDFE4"/>
+            <a:srgbClr val="D6DADF"/>
           </a:solidFill>
           <a:ln>
             <a:noFill/>
@@ -13510,8 +13300,8 @@
         </p:nvSpPr>
         <p:spPr>
           <a:xfrm>
-            <a:off x="822960" y="4864608"/>
-            <a:ext cx="502920" cy="548640"/>
+            <a:off x="822960" y="5202936"/>
+            <a:ext cx="548640" cy="594360"/>
           </a:xfrm>
           <a:prstGeom prst="rect">
             <a:avLst/>
@@ -13526,17 +13316,17 @@
           <a:p>
             <a:pPr algn="l">
               <a:lnSpc>
-                <a:spcPct val="108000"/>
-              </a:lnSpc>
-              <a:spcBef>
-                <a:spcPts val="0"/>
-              </a:spcBef>
-              <a:spcAft>
-                <a:spcPts val="400"/>
-              </a:spcAft>
-            </a:pPr>
-            <a:r>
-              <a:rPr sz="1500" b="1">
+                <a:spcPct val="110000"/>
+              </a:lnSpc>
+              <a:spcBef>
+                <a:spcPts val="0"/>
+              </a:spcBef>
+              <a:spcAft>
+                <a:spcPts val="400"/>
+              </a:spcAft>
+            </a:pPr>
+            <a:r>
+              <a:rPr sz="1700" b="1">
                 <a:solidFill>
                   <a:srgbClr val="E60012"/>
                 </a:solidFill>
@@ -13556,8 +13346,8 @@
         </p:nvSpPr>
         <p:spPr>
           <a:xfrm>
-            <a:off x="1463040" y="4919472"/>
-            <a:ext cx="4023360" cy="548640"/>
+            <a:off x="1508760" y="5257800"/>
+            <a:ext cx="4114800" cy="548640"/>
           </a:xfrm>
           <a:prstGeom prst="rect">
             <a:avLst/>
@@ -13572,19 +13362,19 @@
           <a:p>
             <a:pPr algn="l">
               <a:lnSpc>
-                <a:spcPct val="108000"/>
-              </a:lnSpc>
-              <a:spcBef>
-                <a:spcPts val="0"/>
-              </a:spcBef>
-              <a:spcAft>
-                <a:spcPts val="400"/>
-              </a:spcAft>
-            </a:pPr>
-            <a:r>
-              <a:rPr sz="1500" b="1">
-                <a:solidFill>
-                  <a:srgbClr val="171A1E"/>
+                <a:spcPct val="110000"/>
+              </a:lnSpc>
+              <a:spcBef>
+                <a:spcPts val="0"/>
+              </a:spcBef>
+              <a:spcAft>
+                <a:spcPts val="400"/>
+              </a:spcAft>
+            </a:pPr>
+            <a:r>
+              <a:rPr sz="1700" b="1">
+                <a:solidFill>
+                  <a:srgbClr val="15181C"/>
                 </a:solidFill>
                 <a:latin typeface="Noto Sans JP"/>
                 <a:ea typeface="Noto Sans JP"/>
@@ -13602,8 +13392,8 @@
         </p:nvSpPr>
         <p:spPr>
           <a:xfrm>
-            <a:off x="5669280" y="4919472"/>
-            <a:ext cx="5760720" cy="548640"/>
+            <a:off x="5760720" y="5257800"/>
+            <a:ext cx="5669280" cy="566928"/>
           </a:xfrm>
           <a:prstGeom prst="rect">
             <a:avLst/>
@@ -13618,19 +13408,19 @@
           <a:p>
             <a:pPr algn="l">
               <a:lnSpc>
-                <a:spcPct val="114000"/>
-              </a:lnSpc>
-              <a:spcBef>
-                <a:spcPts val="0"/>
-              </a:spcBef>
-              <a:spcAft>
-                <a:spcPts val="400"/>
-              </a:spcAft>
-            </a:pPr>
-            <a:r>
-              <a:rPr sz="1050" b="0">
-                <a:solidFill>
-                  <a:srgbClr val="3C4148"/>
+                <a:spcPct val="116000"/>
+              </a:lnSpc>
+              <a:spcBef>
+                <a:spcPts val="0"/>
+              </a:spcBef>
+              <a:spcAft>
+                <a:spcPts val="400"/>
+              </a:spcAft>
+            </a:pPr>
+            <a:r>
+              <a:rPr sz="1150" b="0">
+                <a:solidFill>
+                  <a:srgbClr val="373C43"/>
                 </a:solidFill>
                 <a:latin typeface="Noto Sans JP"/>
                 <a:ea typeface="Noto Sans JP"/>
@@ -13648,8 +13438,8 @@
         </p:nvSpPr>
         <p:spPr>
           <a:xfrm>
-            <a:off x="822960" y="5943600"/>
-            <a:ext cx="10543032" cy="20320"/>
+            <a:off x="822960" y="6144768"/>
+            <a:ext cx="10543032" cy="45720"/>
           </a:xfrm>
           <a:prstGeom prst="rect">
             <a:avLst/>
@@ -13692,8 +13482,8 @@
         </p:nvSpPr>
         <p:spPr>
           <a:xfrm>
-            <a:off x="804672" y="6108192"/>
-            <a:ext cx="10607040" cy="457200"/>
+            <a:off x="804672" y="6309360"/>
+            <a:ext cx="10698480" cy="457200"/>
           </a:xfrm>
           <a:prstGeom prst="rect">
             <a:avLst/>
@@ -13708,19 +13498,19 @@
           <a:p>
             <a:pPr algn="l">
               <a:lnSpc>
-                <a:spcPct val="108000"/>
-              </a:lnSpc>
-              <a:spcBef>
-                <a:spcPts val="0"/>
-              </a:spcBef>
-              <a:spcAft>
-                <a:spcPts val="400"/>
-              </a:spcAft>
-            </a:pPr>
-            <a:r>
-              <a:rPr sz="1800" b="1">
-                <a:solidFill>
-                  <a:srgbClr val="171A1E"/>
+                <a:spcPct val="110000"/>
+              </a:lnSpc>
+              <a:spcBef>
+                <a:spcPts val="0"/>
+              </a:spcBef>
+              <a:spcAft>
+                <a:spcPts val="400"/>
+              </a:spcAft>
+            </a:pPr>
+            <a:r>
+              <a:rPr sz="2100" b="1">
+                <a:solidFill>
+                  <a:srgbClr val="15181C"/>
                 </a:solidFill>
                 <a:latin typeface="Noto Sans JP"/>
                 <a:ea typeface="Noto Sans JP"/>

--- a/output/andpad_soukai_ai_deck.pptx
+++ b/output/andpad_soukai_ai_deck.pptx
@@ -3816,8 +3816,98 @@
         </p:nvSpPr>
         <p:spPr>
           <a:xfrm>
-            <a:off x="822960" y="1810512"/>
-            <a:ext cx="3057144" cy="237744"/>
+            <a:off x="804672" y="1572768"/>
+            <a:ext cx="10543032" cy="274320"/>
+          </a:xfrm>
+          <a:prstGeom prst="rect">
+            <a:avLst/>
+          </a:prstGeom>
+          <a:noFill/>
+        </p:spPr>
+        <p:txBody>
+          <a:bodyPr wrap="square" anchor="t" lIns="0" rIns="0" tIns="0" bIns="0">
+            <a:spAutoFit/>
+          </a:bodyPr>
+          <a:lstStyle/>
+          <a:p>
+            <a:pPr algn="l">
+              <a:lnSpc>
+                <a:spcPct val="110000"/>
+              </a:lnSpc>
+              <a:spcBef>
+                <a:spcPts val="0"/>
+              </a:spcBef>
+              <a:spcAft>
+                <a:spcPts val="400"/>
+              </a:spcAft>
+            </a:pPr>
+            <a:r>
+              <a:rPr sz="1350" b="1">
+                <a:solidFill>
+                  <a:srgbClr val="6E767F"/>
+                </a:solidFill>
+                <a:latin typeface="Noto Sans JP"/>
+                <a:ea typeface="Noto Sans JP"/>
+              </a:rPr>
+              <a:t>いま世界を動かす3つのメガトレンド。どれも、実現するには物理的な“設備”が要る。</a:t>
+            </a:r>
+          </a:p>
+        </p:txBody>
+      </p:sp>
+      <p:sp>
+        <p:nvSpPr>
+          <p:cNvPr id="9" name="Rectangle 8"/>
+          <p:cNvSpPr/>
+          <p:nvPr/>
+        </p:nvSpPr>
+        <p:spPr>
+          <a:xfrm>
+            <a:off x="822960" y="2048256"/>
+            <a:ext cx="3112008" cy="64008"/>
+          </a:xfrm>
+          <a:prstGeom prst="rect">
+            <a:avLst/>
+          </a:prstGeom>
+          <a:solidFill>
+            <a:srgbClr val="E60012"/>
+          </a:solidFill>
+          <a:ln>
+            <a:noFill/>
+          </a:ln>
+          <a:effectLst/>
+        </p:spPr>
+        <p:style>
+          <a:lnRef idx="1">
+            <a:schemeClr val="accent1"/>
+          </a:lnRef>
+          <a:fillRef idx="3">
+            <a:schemeClr val="accent1"/>
+          </a:fillRef>
+          <a:effectRef idx="2">
+            <a:schemeClr val="accent1"/>
+          </a:effectRef>
+          <a:fontRef idx="minor">
+            <a:schemeClr val="lt1"/>
+          </a:fontRef>
+        </p:style>
+        <p:txBody>
+          <a:bodyPr rtlCol="0" anchor="ctr"/>
+          <a:lstStyle/>
+          <a:p>
+            <a:pPr algn="ctr"/>
+          </a:p>
+        </p:txBody>
+      </p:sp>
+      <p:sp>
+        <p:nvSpPr>
+          <p:cNvPr id="10" name="TextBox 9"/>
+          <p:cNvSpPr txBox="1"/>
+          <p:nvPr/>
+        </p:nvSpPr>
+        <p:spPr>
+          <a:xfrm>
+            <a:off x="822960" y="2249424"/>
+            <a:ext cx="3112008" cy="219456"/>
           </a:xfrm>
           <a:prstGeom prst="rect">
             <a:avLst/>
@@ -3856,14 +3946,14 @@
       </p:sp>
       <p:sp>
         <p:nvSpPr>
-          <p:cNvPr id="9" name="TextBox 8"/>
-          <p:cNvSpPr txBox="1"/>
-          <p:nvPr/>
-        </p:nvSpPr>
-        <p:spPr>
-          <a:xfrm>
-            <a:off x="822960" y="2103120"/>
-            <a:ext cx="3130296" cy="457200"/>
+          <p:cNvPr id="11" name="TextBox 10"/>
+          <p:cNvSpPr txBox="1"/>
+          <p:nvPr/>
+        </p:nvSpPr>
+        <p:spPr>
+          <a:xfrm>
+            <a:off x="822960" y="2231136"/>
+            <a:ext cx="3112008" cy="219456"/>
           </a:xfrm>
           <a:prstGeom prst="rect">
             <a:avLst/>
@@ -3876,7 +3966,7 @@
           </a:bodyPr>
           <a:lstStyle/>
           <a:p>
-            <a:pPr algn="l">
+            <a:pPr algn="r">
               <a:lnSpc>
                 <a:spcPct val="110000"/>
               </a:lnSpc>
@@ -3888,74 +3978,28 @@
               </a:spcAft>
             </a:pPr>
             <a:r>
-              <a:rPr sz="2300" b="1">
-                <a:solidFill>
-                  <a:srgbClr val="E60012"/>
-                </a:solidFill>
-                <a:latin typeface="Noto Sans JP"/>
-                <a:ea typeface="Noto Sans JP"/>
-              </a:rPr>
-              <a:t>AI</a:t>
-            </a:r>
-          </a:p>
-        </p:txBody>
-      </p:sp>
-      <p:sp>
-        <p:nvSpPr>
-          <p:cNvPr id="10" name="TextBox 9"/>
-          <p:cNvSpPr txBox="1"/>
-          <p:nvPr/>
-        </p:nvSpPr>
-        <p:spPr>
-          <a:xfrm>
-            <a:off x="822960" y="2633472"/>
-            <a:ext cx="3148584" cy="237744"/>
-          </a:xfrm>
-          <a:prstGeom prst="rect">
-            <a:avLst/>
-          </a:prstGeom>
-          <a:noFill/>
-        </p:spPr>
-        <p:txBody>
-          <a:bodyPr wrap="square" anchor="t" lIns="0" rIns="0" tIns="0" bIns="0">
-            <a:spAutoFit/>
-          </a:bodyPr>
-          <a:lstStyle/>
-          <a:p>
-            <a:pPr algn="l">
-              <a:lnSpc>
-                <a:spcPct val="110000"/>
-              </a:lnSpc>
-              <a:spcBef>
-                <a:spcPts val="0"/>
-              </a:spcBef>
-              <a:spcAft>
-                <a:spcPts val="400"/>
-              </a:spcAft>
-            </a:pPr>
-            <a:r>
-              <a:rPr sz="1100" b="1">
+              <a:rPr sz="1000" b="1">
                 <a:solidFill>
                   <a:srgbClr val="E60012"/>
                 </a:solidFill>
                 <a:latin typeface="Consolas"/>
                 <a:ea typeface="Consolas"/>
               </a:rPr>
-              <a:t>●  本日フォーカス</a:t>
-            </a:r>
-          </a:p>
-        </p:txBody>
-      </p:sp>
-      <p:sp>
-        <p:nvSpPr>
-          <p:cNvPr id="11" name="TextBox 10"/>
-          <p:cNvSpPr txBox="1"/>
-          <p:nvPr/>
-        </p:nvSpPr>
-        <p:spPr>
-          <a:xfrm>
-            <a:off x="822960" y="3035808"/>
-            <a:ext cx="3057144" cy="402336"/>
+              <a:t>● 本日フォーカス</a:t>
+            </a:r>
+          </a:p>
+        </p:txBody>
+      </p:sp>
+      <p:sp>
+        <p:nvSpPr>
+          <p:cNvPr id="12" name="TextBox 11"/>
+          <p:cNvSpPr txBox="1"/>
+          <p:nvPr/>
+        </p:nvSpPr>
+        <p:spPr>
+          <a:xfrm>
+            <a:off x="822960" y="2505456"/>
+            <a:ext cx="3112008" cy="457200"/>
           </a:xfrm>
           <a:prstGeom prst="rect">
             <a:avLst/>
@@ -3970,17 +4014,63 @@
           <a:p>
             <a:pPr algn="l">
               <a:lnSpc>
-                <a:spcPct val="118000"/>
-              </a:lnSpc>
-              <a:spcBef>
-                <a:spcPts val="0"/>
-              </a:spcBef>
-              <a:spcAft>
-                <a:spcPts val="400"/>
-              </a:spcAft>
-            </a:pPr>
-            <a:r>
-              <a:rPr sz="1450" b="1">
+                <a:spcPct val="110000"/>
+              </a:lnSpc>
+              <a:spcBef>
+                <a:spcPts val="0"/>
+              </a:spcBef>
+              <a:spcAft>
+                <a:spcPts val="400"/>
+              </a:spcAft>
+            </a:pPr>
+            <a:r>
+              <a:rPr sz="2200" b="1">
+                <a:solidFill>
+                  <a:srgbClr val="E60012"/>
+                </a:solidFill>
+                <a:latin typeface="Noto Sans JP"/>
+                <a:ea typeface="Noto Sans JP"/>
+              </a:rPr>
+              <a:t>AI</a:t>
+            </a:r>
+          </a:p>
+        </p:txBody>
+      </p:sp>
+      <p:sp>
+        <p:nvSpPr>
+          <p:cNvPr id="13" name="TextBox 12"/>
+          <p:cNvSpPr txBox="1"/>
+          <p:nvPr/>
+        </p:nvSpPr>
+        <p:spPr>
+          <a:xfrm>
+            <a:off x="822960" y="3017520"/>
+            <a:ext cx="3112008" cy="274320"/>
+          </a:xfrm>
+          <a:prstGeom prst="rect">
+            <a:avLst/>
+          </a:prstGeom>
+          <a:noFill/>
+        </p:spPr>
+        <p:txBody>
+          <a:bodyPr wrap="square" anchor="t" lIns="0" rIns="0" tIns="0" bIns="0">
+            <a:spAutoFit/>
+          </a:bodyPr>
+          <a:lstStyle/>
+          <a:p>
+            <a:pPr algn="l">
+              <a:lnSpc>
+                <a:spcPct val="116000"/>
+              </a:lnSpc>
+              <a:spcBef>
+                <a:spcPts val="0"/>
+              </a:spcBef>
+              <a:spcAft>
+                <a:spcPts val="400"/>
+              </a:spcAft>
+            </a:pPr>
+            <a:r>
+              <a:rPr sz="1300" b="1">
                 <a:solidFill>
                   <a:srgbClr val="6E767F"/>
                 </a:solidFill>
@@ -3994,14 +4084,14 @@
       </p:sp>
       <p:sp>
         <p:nvSpPr>
-          <p:cNvPr id="12" name="TextBox 11"/>
-          <p:cNvSpPr txBox="1"/>
-          <p:nvPr/>
-        </p:nvSpPr>
-        <p:spPr>
-          <a:xfrm>
-            <a:off x="822960" y="3474720"/>
-            <a:ext cx="3057144" cy="502920"/>
+          <p:cNvPr id="14" name="TextBox 13"/>
+          <p:cNvSpPr txBox="1"/>
+          <p:nvPr/>
+        </p:nvSpPr>
+        <p:spPr>
+          <a:xfrm>
+            <a:off x="822960" y="3364992"/>
+            <a:ext cx="3112008" cy="548640"/>
           </a:xfrm>
           <a:prstGeom prst="rect">
             <a:avLst/>
@@ -4016,17 +4106,40 @@
           <a:p>
             <a:pPr algn="l">
               <a:lnSpc>
-                <a:spcPct val="122000"/>
-              </a:lnSpc>
-              <a:spcBef>
-                <a:spcPts val="0"/>
-              </a:spcBef>
-              <a:spcAft>
-                <a:spcPts val="400"/>
-              </a:spcAft>
-            </a:pPr>
-            <a:r>
-              <a:rPr sz="1450" b="1">
+                <a:spcPct val="120000"/>
+              </a:lnSpc>
+              <a:spcBef>
+                <a:spcPts val="0"/>
+              </a:spcBef>
+              <a:spcAft>
+                <a:spcPts val="200"/>
+              </a:spcAft>
+            </a:pPr>
+            <a:r>
+              <a:rPr sz="950" b="1" spc="100">
+                <a:solidFill>
+                  <a:srgbClr val="9AA1A9"/>
+                </a:solidFill>
+                <a:latin typeface="Consolas"/>
+                <a:ea typeface="Consolas"/>
+              </a:rPr>
+              <a:t>要る設備</a:t>
+            </a:r>
+          </a:p>
+          <a:p>
+            <a:pPr algn="l">
+              <a:lnSpc>
+                <a:spcPct val="120000"/>
+              </a:lnSpc>
+              <a:spcBef>
+                <a:spcPts val="0"/>
+              </a:spcBef>
+              <a:spcAft>
+                <a:spcPts val="200"/>
+              </a:spcAft>
+            </a:pPr>
+            <a:r>
+              <a:rPr sz="1350" b="1">
                 <a:solidFill>
                   <a:srgbClr val="E60012"/>
                 </a:solidFill>
@@ -4036,28 +4149,28 @@
               <a:t>→ </a:t>
             </a:r>
             <a:r>
-              <a:rPr sz="1450" b="0">
+              <a:rPr sz="1350" b="1">
                 <a:solidFill>
                   <a:srgbClr val="373C43"/>
                 </a:solidFill>
                 <a:latin typeface="Noto Sans JP"/>
                 <a:ea typeface="Noto Sans JP"/>
               </a:rPr>
-              <a:t>電源・冷却・建屋・チップ工場が大量に要る</a:t>
-            </a:r>
-          </a:p>
-        </p:txBody>
-      </p:sp>
-      <p:sp>
-        <p:nvSpPr>
-          <p:cNvPr id="13" name="Rectangle 12"/>
+              <a:t>電源・冷却・建屋・チップ工場</a:t>
+            </a:r>
+          </a:p>
+        </p:txBody>
+      </p:sp>
+      <p:sp>
+        <p:nvSpPr>
+          <p:cNvPr id="15" name="Rectangle 14"/>
           <p:cNvSpPr/>
           <p:nvPr/>
         </p:nvSpPr>
         <p:spPr>
           <a:xfrm>
-            <a:off x="4117847" y="1856231"/>
-            <a:ext cx="15240" cy="2057400"/>
+            <a:off x="4117847" y="2066544"/>
+            <a:ext cx="12700" cy="1810512"/>
           </a:xfrm>
           <a:prstGeom prst="rect">
             <a:avLst/>
@@ -4094,14 +4207,58 @@
       </p:sp>
       <p:sp>
         <p:nvSpPr>
-          <p:cNvPr id="14" name="TextBox 13"/>
-          <p:cNvSpPr txBox="1"/>
-          <p:nvPr/>
-        </p:nvSpPr>
-        <p:spPr>
-          <a:xfrm>
-            <a:off x="4337304" y="1810512"/>
-            <a:ext cx="3057144" cy="237744"/>
+          <p:cNvPr id="16" name="Rectangle 15"/>
+          <p:cNvSpPr/>
+          <p:nvPr/>
+        </p:nvSpPr>
+        <p:spPr>
+          <a:xfrm>
+            <a:off x="4337304" y="2048256"/>
+            <a:ext cx="3112008" cy="64008"/>
+          </a:xfrm>
+          <a:prstGeom prst="rect">
+            <a:avLst/>
+          </a:prstGeom>
+          <a:solidFill>
+            <a:srgbClr val="535961"/>
+          </a:solidFill>
+          <a:ln>
+            <a:noFill/>
+          </a:ln>
+          <a:effectLst/>
+        </p:spPr>
+        <p:style>
+          <a:lnRef idx="1">
+            <a:schemeClr val="accent1"/>
+          </a:lnRef>
+          <a:fillRef idx="3">
+            <a:schemeClr val="accent1"/>
+          </a:fillRef>
+          <a:effectRef idx="2">
+            <a:schemeClr val="accent1"/>
+          </a:effectRef>
+          <a:fontRef idx="minor">
+            <a:schemeClr val="lt1"/>
+          </a:fontRef>
+        </p:style>
+        <p:txBody>
+          <a:bodyPr rtlCol="0" anchor="ctr"/>
+          <a:lstStyle/>
+          <a:p>
+            <a:pPr algn="ctr"/>
+          </a:p>
+        </p:txBody>
+      </p:sp>
+      <p:sp>
+        <p:nvSpPr>
+          <p:cNvPr id="17" name="TextBox 16"/>
+          <p:cNvSpPr txBox="1"/>
+          <p:nvPr/>
+        </p:nvSpPr>
+        <p:spPr>
+          <a:xfrm>
+            <a:off x="4337304" y="2249424"/>
+            <a:ext cx="3112008" cy="219456"/>
           </a:xfrm>
           <a:prstGeom prst="rect">
             <a:avLst/>
@@ -4140,14 +4297,14 @@
       </p:sp>
       <p:sp>
         <p:nvSpPr>
-          <p:cNvPr id="15" name="TextBox 14"/>
-          <p:cNvSpPr txBox="1"/>
-          <p:nvPr/>
-        </p:nvSpPr>
-        <p:spPr>
-          <a:xfrm>
-            <a:off x="4337304" y="2103120"/>
-            <a:ext cx="3130296" cy="457200"/>
+          <p:cNvPr id="18" name="TextBox 17"/>
+          <p:cNvSpPr txBox="1"/>
+          <p:nvPr/>
+        </p:nvSpPr>
+        <p:spPr>
+          <a:xfrm>
+            <a:off x="4337304" y="2505456"/>
+            <a:ext cx="3112008" cy="457200"/>
           </a:xfrm>
           <a:prstGeom prst="rect">
             <a:avLst/>
@@ -4172,7 +4329,7 @@
               </a:spcAft>
             </a:pPr>
             <a:r>
-              <a:rPr sz="2300" b="1">
+              <a:rPr sz="2200" b="1">
                 <a:solidFill>
                   <a:srgbClr val="15181C"/>
                 </a:solidFill>
@@ -4186,14 +4343,14 @@
       </p:sp>
       <p:sp>
         <p:nvSpPr>
-          <p:cNvPr id="16" name="TextBox 15"/>
-          <p:cNvSpPr txBox="1"/>
-          <p:nvPr/>
-        </p:nvSpPr>
-        <p:spPr>
-          <a:xfrm>
-            <a:off x="4337304" y="3035808"/>
-            <a:ext cx="3057144" cy="402336"/>
+          <p:cNvPr id="19" name="TextBox 18"/>
+          <p:cNvSpPr txBox="1"/>
+          <p:nvPr/>
+        </p:nvSpPr>
+        <p:spPr>
+          <a:xfrm>
+            <a:off x="4337304" y="3017520"/>
+            <a:ext cx="3112008" cy="274320"/>
           </a:xfrm>
           <a:prstGeom prst="rect">
             <a:avLst/>
@@ -4208,17 +4365,17 @@
           <a:p>
             <a:pPr algn="l">
               <a:lnSpc>
-                <a:spcPct val="118000"/>
-              </a:lnSpc>
-              <a:spcBef>
-                <a:spcPts val="0"/>
-              </a:spcBef>
-              <a:spcAft>
-                <a:spcPts val="400"/>
-              </a:spcAft>
-            </a:pPr>
-            <a:r>
-              <a:rPr sz="1450" b="1">
+                <a:spcPct val="116000"/>
+              </a:lnSpc>
+              <a:spcBef>
+                <a:spcPts val="0"/>
+              </a:spcBef>
+              <a:spcAft>
+                <a:spcPts val="400"/>
+              </a:spcAft>
+            </a:pPr>
+            <a:r>
+              <a:rPr sz="1300" b="1">
                 <a:solidFill>
                   <a:srgbClr val="6E767F"/>
                 </a:solidFill>
@@ -4232,14 +4389,14 @@
       </p:sp>
       <p:sp>
         <p:nvSpPr>
-          <p:cNvPr id="17" name="TextBox 16"/>
-          <p:cNvSpPr txBox="1"/>
-          <p:nvPr/>
-        </p:nvSpPr>
-        <p:spPr>
-          <a:xfrm>
-            <a:off x="4337304" y="3474720"/>
-            <a:ext cx="3057144" cy="502920"/>
+          <p:cNvPr id="20" name="TextBox 19"/>
+          <p:cNvSpPr txBox="1"/>
+          <p:nvPr/>
+        </p:nvSpPr>
+        <p:spPr>
+          <a:xfrm>
+            <a:off x="4337304" y="3364992"/>
+            <a:ext cx="3112008" cy="548640"/>
           </a:xfrm>
           <a:prstGeom prst="rect">
             <a:avLst/>
@@ -4254,17 +4411,40 @@
           <a:p>
             <a:pPr algn="l">
               <a:lnSpc>
-                <a:spcPct val="122000"/>
-              </a:lnSpc>
-              <a:spcBef>
-                <a:spcPts val="0"/>
-              </a:spcBef>
-              <a:spcAft>
-                <a:spcPts val="400"/>
-              </a:spcAft>
-            </a:pPr>
-            <a:r>
-              <a:rPr sz="1450" b="1">
+                <a:spcPct val="120000"/>
+              </a:lnSpc>
+              <a:spcBef>
+                <a:spcPts val="0"/>
+              </a:spcBef>
+              <a:spcAft>
+                <a:spcPts val="200"/>
+              </a:spcAft>
+            </a:pPr>
+            <a:r>
+              <a:rPr sz="950" b="1" spc="100">
+                <a:solidFill>
+                  <a:srgbClr val="9AA1A9"/>
+                </a:solidFill>
+                <a:latin typeface="Consolas"/>
+                <a:ea typeface="Consolas"/>
+              </a:rPr>
+              <a:t>要る設備</a:t>
+            </a:r>
+          </a:p>
+          <a:p>
+            <a:pPr algn="l">
+              <a:lnSpc>
+                <a:spcPct val="120000"/>
+              </a:lnSpc>
+              <a:spcBef>
+                <a:spcPts val="0"/>
+              </a:spcBef>
+              <a:spcAft>
+                <a:spcPts val="200"/>
+              </a:spcAft>
+            </a:pPr>
+            <a:r>
+              <a:rPr sz="1350" b="1">
                 <a:solidFill>
                   <a:srgbClr val="E60012"/>
                 </a:solidFill>
@@ -4274,7 +4454,7 @@
               <a:t>→ </a:t>
             </a:r>
             <a:r>
-              <a:rPr sz="1450" b="0">
+              <a:rPr sz="1350" b="1">
                 <a:solidFill>
                   <a:srgbClr val="373C43"/>
                 </a:solidFill>
@@ -4288,14 +4468,14 @@
       </p:sp>
       <p:sp>
         <p:nvSpPr>
-          <p:cNvPr id="18" name="Rectangle 17"/>
+          <p:cNvPr id="21" name="Rectangle 20"/>
           <p:cNvSpPr/>
           <p:nvPr/>
         </p:nvSpPr>
         <p:spPr>
           <a:xfrm>
-            <a:off x="7632191" y="1856231"/>
-            <a:ext cx="15240" cy="2057400"/>
+            <a:off x="7632191" y="2066544"/>
+            <a:ext cx="12700" cy="1810512"/>
           </a:xfrm>
           <a:prstGeom prst="rect">
             <a:avLst/>
@@ -4332,214 +4512,20 @@
       </p:sp>
       <p:sp>
         <p:nvSpPr>
-          <p:cNvPr id="19" name="TextBox 18"/>
-          <p:cNvSpPr txBox="1"/>
-          <p:nvPr/>
-        </p:nvSpPr>
-        <p:spPr>
-          <a:xfrm>
-            <a:off x="7851647" y="1810512"/>
-            <a:ext cx="3057144" cy="237744"/>
-          </a:xfrm>
-          <a:prstGeom prst="rect">
-            <a:avLst/>
-          </a:prstGeom>
-          <a:noFill/>
-        </p:spPr>
-        <p:txBody>
-          <a:bodyPr wrap="square" anchor="t" lIns="0" rIns="0" tIns="0" bIns="0">
-            <a:spAutoFit/>
-          </a:bodyPr>
-          <a:lstStyle/>
-          <a:p>
-            <a:pPr algn="l">
-              <a:lnSpc>
-                <a:spcPct val="110000"/>
-              </a:lnSpc>
-              <a:spcBef>
-                <a:spcPts val="0"/>
-              </a:spcBef>
-              <a:spcAft>
-                <a:spcPts val="400"/>
-              </a:spcAft>
-            </a:pPr>
-            <a:r>
-              <a:rPr sz="1100" b="1" spc="100">
-                <a:solidFill>
-                  <a:srgbClr val="9AA1A9"/>
-                </a:solidFill>
-                <a:latin typeface="Consolas"/>
-                <a:ea typeface="Consolas"/>
-              </a:rPr>
-              <a:t>03</a:t>
-            </a:r>
-          </a:p>
-        </p:txBody>
-      </p:sp>
-      <p:sp>
-        <p:nvSpPr>
-          <p:cNvPr id="20" name="TextBox 19"/>
-          <p:cNvSpPr txBox="1"/>
-          <p:nvPr/>
-        </p:nvSpPr>
-        <p:spPr>
-          <a:xfrm>
-            <a:off x="7851647" y="2103120"/>
-            <a:ext cx="3130296" cy="457200"/>
-          </a:xfrm>
-          <a:prstGeom prst="rect">
-            <a:avLst/>
-          </a:prstGeom>
-          <a:noFill/>
-        </p:spPr>
-        <p:txBody>
-          <a:bodyPr wrap="square" anchor="t" lIns="0" rIns="0" tIns="0" bIns="0">
-            <a:spAutoFit/>
-          </a:bodyPr>
-          <a:lstStyle/>
-          <a:p>
-            <a:pPr algn="l">
-              <a:lnSpc>
-                <a:spcPct val="110000"/>
-              </a:lnSpc>
-              <a:spcBef>
-                <a:spcPts val="0"/>
-              </a:spcBef>
-              <a:spcAft>
-                <a:spcPts val="400"/>
-              </a:spcAft>
-            </a:pPr>
-            <a:r>
-              <a:rPr sz="2300" b="1">
-                <a:solidFill>
-                  <a:srgbClr val="15181C"/>
-                </a:solidFill>
-                <a:latin typeface="Noto Sans JP"/>
-                <a:ea typeface="Noto Sans JP"/>
-              </a:rPr>
-              <a:t>経済安保・国内回帰</a:t>
-            </a:r>
-          </a:p>
-        </p:txBody>
-      </p:sp>
-      <p:sp>
-        <p:nvSpPr>
-          <p:cNvPr id="21" name="TextBox 20"/>
-          <p:cNvSpPr txBox="1"/>
-          <p:nvPr/>
-        </p:nvSpPr>
-        <p:spPr>
-          <a:xfrm>
-            <a:off x="7851647" y="3035808"/>
-            <a:ext cx="3057144" cy="402336"/>
-          </a:xfrm>
-          <a:prstGeom prst="rect">
-            <a:avLst/>
-          </a:prstGeom>
-          <a:noFill/>
-        </p:spPr>
-        <p:txBody>
-          <a:bodyPr wrap="square" anchor="t" lIns="0" rIns="0" tIns="0" bIns="0">
-            <a:spAutoFit/>
-          </a:bodyPr>
-          <a:lstStyle/>
-          <a:p>
-            <a:pPr algn="l">
-              <a:lnSpc>
-                <a:spcPct val="118000"/>
-              </a:lnSpc>
-              <a:spcBef>
-                <a:spcPts val="0"/>
-              </a:spcBef>
-              <a:spcAft>
-                <a:spcPts val="400"/>
-              </a:spcAft>
-            </a:pPr>
-            <a:r>
-              <a:rPr sz="1450" b="1">
-                <a:solidFill>
-                  <a:srgbClr val="6E767F"/>
-                </a:solidFill>
-                <a:latin typeface="Noto Sans JP"/>
-                <a:ea typeface="Noto Sans JP"/>
-              </a:rPr>
-              <a:t>半導体・重要物資の国産化</a:t>
-            </a:r>
-          </a:p>
-        </p:txBody>
-      </p:sp>
-      <p:sp>
-        <p:nvSpPr>
-          <p:cNvPr id="22" name="TextBox 21"/>
-          <p:cNvSpPr txBox="1"/>
-          <p:nvPr/>
-        </p:nvSpPr>
-        <p:spPr>
-          <a:xfrm>
-            <a:off x="7851647" y="3474720"/>
-            <a:ext cx="3057144" cy="502920"/>
-          </a:xfrm>
-          <a:prstGeom prst="rect">
-            <a:avLst/>
-          </a:prstGeom>
-          <a:noFill/>
-        </p:spPr>
-        <p:txBody>
-          <a:bodyPr wrap="square" anchor="t" lIns="0" rIns="0" tIns="0" bIns="0">
-            <a:spAutoFit/>
-          </a:bodyPr>
-          <a:lstStyle/>
-          <a:p>
-            <a:pPr algn="l">
-              <a:lnSpc>
-                <a:spcPct val="122000"/>
-              </a:lnSpc>
-              <a:spcBef>
-                <a:spcPts val="0"/>
-              </a:spcBef>
-              <a:spcAft>
-                <a:spcPts val="400"/>
-              </a:spcAft>
-            </a:pPr>
-            <a:r>
-              <a:rPr sz="1450" b="1">
-                <a:solidFill>
-                  <a:srgbClr val="E60012"/>
-                </a:solidFill>
-                <a:latin typeface="Noto Sans JP"/>
-                <a:ea typeface="Noto Sans JP"/>
-              </a:rPr>
-              <a:t>→ </a:t>
-            </a:r>
-            <a:r>
-              <a:rPr sz="1450" b="0">
-                <a:solidFill>
-                  <a:srgbClr val="373C43"/>
-                </a:solidFill>
-                <a:latin typeface="Noto Sans JP"/>
-                <a:ea typeface="Noto Sans JP"/>
-              </a:rPr>
-              <a:t>国内に工場を新設し、供給網を再構築</a:t>
-            </a:r>
-          </a:p>
-        </p:txBody>
-      </p:sp>
-      <p:sp>
-        <p:nvSpPr>
-          <p:cNvPr id="23" name="Rectangle 22"/>
+          <p:cNvPr id="22" name="Rectangle 21"/>
           <p:cNvSpPr/>
           <p:nvPr/>
         </p:nvSpPr>
         <p:spPr>
           <a:xfrm>
-            <a:off x="822960" y="4206240"/>
-            <a:ext cx="10543032" cy="12700"/>
+            <a:off x="7851647" y="2048256"/>
+            <a:ext cx="3112008" cy="64008"/>
           </a:xfrm>
           <a:prstGeom prst="rect">
             <a:avLst/>
           </a:prstGeom>
           <a:solidFill>
-            <a:srgbClr val="D6DADF"/>
+            <a:srgbClr val="535961"/>
           </a:solidFill>
           <a:ln>
             <a:noFill/>
@@ -4570,14 +4556,60 @@
       </p:sp>
       <p:sp>
         <p:nvSpPr>
+          <p:cNvPr id="23" name="TextBox 22"/>
+          <p:cNvSpPr txBox="1"/>
+          <p:nvPr/>
+        </p:nvSpPr>
+        <p:spPr>
+          <a:xfrm>
+            <a:off x="7851647" y="2249424"/>
+            <a:ext cx="3112008" cy="219456"/>
+          </a:xfrm>
+          <a:prstGeom prst="rect">
+            <a:avLst/>
+          </a:prstGeom>
+          <a:noFill/>
+        </p:spPr>
+        <p:txBody>
+          <a:bodyPr wrap="square" anchor="t" lIns="0" rIns="0" tIns="0" bIns="0">
+            <a:spAutoFit/>
+          </a:bodyPr>
+          <a:lstStyle/>
+          <a:p>
+            <a:pPr algn="l">
+              <a:lnSpc>
+                <a:spcPct val="110000"/>
+              </a:lnSpc>
+              <a:spcBef>
+                <a:spcPts val="0"/>
+              </a:spcBef>
+              <a:spcAft>
+                <a:spcPts val="400"/>
+              </a:spcAft>
+            </a:pPr>
+            <a:r>
+              <a:rPr sz="1100" b="1" spc="100">
+                <a:solidFill>
+                  <a:srgbClr val="9AA1A9"/>
+                </a:solidFill>
+                <a:latin typeface="Consolas"/>
+                <a:ea typeface="Consolas"/>
+              </a:rPr>
+              <a:t>03</a:t>
+            </a:r>
+          </a:p>
+        </p:txBody>
+      </p:sp>
+      <p:sp>
+        <p:nvSpPr>
           <p:cNvPr id="24" name="TextBox 23"/>
           <p:cNvSpPr txBox="1"/>
           <p:nvPr/>
         </p:nvSpPr>
         <p:spPr>
           <a:xfrm>
-            <a:off x="804672" y="4434840"/>
-            <a:ext cx="10698480" cy="457200"/>
+            <a:off x="7851647" y="2505456"/>
+            <a:ext cx="3112008" cy="457200"/>
           </a:xfrm>
           <a:prstGeom prst="rect">
             <a:avLst/>
@@ -4602,48 +4634,153 @@
               </a:spcAft>
             </a:pPr>
             <a:r>
-              <a:rPr sz="1900" b="1">
+              <a:rPr sz="2200" b="1">
                 <a:solidFill>
                   <a:srgbClr val="15181C"/>
                 </a:solidFill>
                 <a:latin typeface="Noto Sans JP"/>
                 <a:ea typeface="Noto Sans JP"/>
               </a:rPr>
-              <a:t>どのメガトレンドも、実現するには</a:t>
-            </a:r>
-            <a:r>
-              <a:rPr sz="1900" b="1">
+              <a:t>経済安保・国内回帰</a:t>
+            </a:r>
+          </a:p>
+        </p:txBody>
+      </p:sp>
+      <p:sp>
+        <p:nvSpPr>
+          <p:cNvPr id="25" name="TextBox 24"/>
+          <p:cNvSpPr txBox="1"/>
+          <p:nvPr/>
+        </p:nvSpPr>
+        <p:spPr>
+          <a:xfrm>
+            <a:off x="7851647" y="3017520"/>
+            <a:ext cx="3112008" cy="274320"/>
+          </a:xfrm>
+          <a:prstGeom prst="rect">
+            <a:avLst/>
+          </a:prstGeom>
+          <a:noFill/>
+        </p:spPr>
+        <p:txBody>
+          <a:bodyPr wrap="square" anchor="t" lIns="0" rIns="0" tIns="0" bIns="0">
+            <a:spAutoFit/>
+          </a:bodyPr>
+          <a:lstStyle/>
+          <a:p>
+            <a:pPr algn="l">
+              <a:lnSpc>
+                <a:spcPct val="116000"/>
+              </a:lnSpc>
+              <a:spcBef>
+                <a:spcPts val="0"/>
+              </a:spcBef>
+              <a:spcAft>
+                <a:spcPts val="400"/>
+              </a:spcAft>
+            </a:pPr>
+            <a:r>
+              <a:rPr sz="1300" b="1">
+                <a:solidFill>
+                  <a:srgbClr val="6E767F"/>
+                </a:solidFill>
+                <a:latin typeface="Noto Sans JP"/>
+                <a:ea typeface="Noto Sans JP"/>
+              </a:rPr>
+              <a:t>半導体・重要物資の国産化</a:t>
+            </a:r>
+          </a:p>
+        </p:txBody>
+      </p:sp>
+      <p:sp>
+        <p:nvSpPr>
+          <p:cNvPr id="26" name="TextBox 25"/>
+          <p:cNvSpPr txBox="1"/>
+          <p:nvPr/>
+        </p:nvSpPr>
+        <p:spPr>
+          <a:xfrm>
+            <a:off x="7851647" y="3364992"/>
+            <a:ext cx="3112008" cy="548640"/>
+          </a:xfrm>
+          <a:prstGeom prst="rect">
+            <a:avLst/>
+          </a:prstGeom>
+          <a:noFill/>
+        </p:spPr>
+        <p:txBody>
+          <a:bodyPr wrap="square" anchor="t" lIns="0" rIns="0" tIns="0" bIns="0">
+            <a:spAutoFit/>
+          </a:bodyPr>
+          <a:lstStyle/>
+          <a:p>
+            <a:pPr algn="l">
+              <a:lnSpc>
+                <a:spcPct val="120000"/>
+              </a:lnSpc>
+              <a:spcBef>
+                <a:spcPts val="0"/>
+              </a:spcBef>
+              <a:spcAft>
+                <a:spcPts val="200"/>
+              </a:spcAft>
+            </a:pPr>
+            <a:r>
+              <a:rPr sz="950" b="1" spc="100">
+                <a:solidFill>
+                  <a:srgbClr val="9AA1A9"/>
+                </a:solidFill>
+                <a:latin typeface="Consolas"/>
+                <a:ea typeface="Consolas"/>
+              </a:rPr>
+              <a:t>要る設備</a:t>
+            </a:r>
+          </a:p>
+          <a:p>
+            <a:pPr algn="l">
+              <a:lnSpc>
+                <a:spcPct val="120000"/>
+              </a:lnSpc>
+              <a:spcBef>
+                <a:spcPts val="0"/>
+              </a:spcBef>
+              <a:spcAft>
+                <a:spcPts val="200"/>
+              </a:spcAft>
+            </a:pPr>
+            <a:r>
+              <a:rPr sz="1350" b="1">
                 <a:solidFill>
                   <a:srgbClr val="E60012"/>
                 </a:solidFill>
                 <a:latin typeface="Noto Sans JP"/>
                 <a:ea typeface="Noto Sans JP"/>
               </a:rPr>
-              <a:t>膨大な“設備”</a:t>
-            </a:r>
-            <a:r>
-              <a:rPr sz="1900" b="1">
-                <a:solidFill>
-                  <a:srgbClr val="15181C"/>
-                </a:solidFill>
-                <a:latin typeface="Noto Sans JP"/>
-                <a:ea typeface="Noto Sans JP"/>
-              </a:rPr>
-              <a:t>がいる。</a:t>
-            </a:r>
-          </a:p>
-        </p:txBody>
-      </p:sp>
-      <p:sp>
-        <p:nvSpPr>
-          <p:cNvPr id="25" name="TextBox 24"/>
-          <p:cNvSpPr txBox="1"/>
-          <p:nvPr/>
-        </p:nvSpPr>
-        <p:spPr>
-          <a:xfrm>
-            <a:off x="804672" y="5029200"/>
-            <a:ext cx="10698480" cy="457200"/>
+              <a:t>→ </a:t>
+            </a:r>
+            <a:r>
+              <a:rPr sz="1350" b="1">
+                <a:solidFill>
+                  <a:srgbClr val="373C43"/>
+                </a:solidFill>
+                <a:latin typeface="Noto Sans JP"/>
+                <a:ea typeface="Noto Sans JP"/>
+              </a:rPr>
+              <a:t>国内に工場を新設・供給網を再構築</a:t>
+            </a:r>
+          </a:p>
+        </p:txBody>
+      </p:sp>
+      <p:sp>
+        <p:nvSpPr>
+          <p:cNvPr id="27" name="TextBox 26"/>
+          <p:cNvSpPr txBox="1"/>
+          <p:nvPr/>
+        </p:nvSpPr>
+        <p:spPr>
+          <a:xfrm>
+            <a:off x="822960" y="3968496"/>
+            <a:ext cx="3112008" cy="274320"/>
           </a:xfrm>
           <a:prstGeom prst="rect">
             <a:avLst/>
@@ -4656,7 +4793,7 @@
           </a:bodyPr>
           <a:lstStyle/>
           <a:p>
-            <a:pPr algn="l">
+            <a:pPr algn="ctr">
               <a:lnSpc>
                 <a:spcPct val="110000"/>
               </a:lnSpc>
@@ -4668,38 +4805,120 @@
               </a:spcAft>
             </a:pPr>
             <a:r>
-              <a:rPr sz="1550" b="0">
-                <a:solidFill>
-                  <a:srgbClr val="373C43"/>
-                </a:solidFill>
-                <a:latin typeface="Noto Sans JP"/>
-                <a:ea typeface="Noto Sans JP"/>
-              </a:rPr>
-              <a:t>設備を作る・建てるのは、建設業だけではない——</a:t>
-            </a:r>
-            <a:r>
-              <a:rPr sz="1550" b="1">
-                <a:solidFill>
-                  <a:srgbClr val="15181C"/>
-                </a:solidFill>
-                <a:latin typeface="Noto Sans JP"/>
-                <a:ea typeface="Noto Sans JP"/>
-              </a:rPr>
-              <a:t>重電・機械・電機など製造業がコア。</a:t>
-            </a:r>
-          </a:p>
-        </p:txBody>
-      </p:sp>
-      <p:sp>
-        <p:nvSpPr>
-          <p:cNvPr id="26" name="Rectangle 25"/>
+              <a:rPr sz="1300" b="1">
+                <a:solidFill>
+                  <a:srgbClr val="E60012"/>
+                </a:solidFill>
+                <a:latin typeface="Noto Sans JP"/>
+                <a:ea typeface="Noto Sans JP"/>
+              </a:rPr>
+              <a:t>▼</a:t>
+            </a:r>
+          </a:p>
+        </p:txBody>
+      </p:sp>
+      <p:sp>
+        <p:nvSpPr>
+          <p:cNvPr id="28" name="TextBox 27"/>
+          <p:cNvSpPr txBox="1"/>
+          <p:nvPr/>
+        </p:nvSpPr>
+        <p:spPr>
+          <a:xfrm>
+            <a:off x="4337304" y="3968496"/>
+            <a:ext cx="3112008" cy="274320"/>
+          </a:xfrm>
+          <a:prstGeom prst="rect">
+            <a:avLst/>
+          </a:prstGeom>
+          <a:noFill/>
+        </p:spPr>
+        <p:txBody>
+          <a:bodyPr wrap="square" anchor="t" lIns="0" rIns="0" tIns="0" bIns="0">
+            <a:spAutoFit/>
+          </a:bodyPr>
+          <a:lstStyle/>
+          <a:p>
+            <a:pPr algn="ctr">
+              <a:lnSpc>
+                <a:spcPct val="110000"/>
+              </a:lnSpc>
+              <a:spcBef>
+                <a:spcPts val="0"/>
+              </a:spcBef>
+              <a:spcAft>
+                <a:spcPts val="400"/>
+              </a:spcAft>
+            </a:pPr>
+            <a:r>
+              <a:rPr sz="1300" b="1">
+                <a:solidFill>
+                  <a:srgbClr val="E60012"/>
+                </a:solidFill>
+                <a:latin typeface="Noto Sans JP"/>
+                <a:ea typeface="Noto Sans JP"/>
+              </a:rPr>
+              <a:t>▼</a:t>
+            </a:r>
+          </a:p>
+        </p:txBody>
+      </p:sp>
+      <p:sp>
+        <p:nvSpPr>
+          <p:cNvPr id="29" name="TextBox 28"/>
+          <p:cNvSpPr txBox="1"/>
+          <p:nvPr/>
+        </p:nvSpPr>
+        <p:spPr>
+          <a:xfrm>
+            <a:off x="7851647" y="3968496"/>
+            <a:ext cx="3112008" cy="274320"/>
+          </a:xfrm>
+          <a:prstGeom prst="rect">
+            <a:avLst/>
+          </a:prstGeom>
+          <a:noFill/>
+        </p:spPr>
+        <p:txBody>
+          <a:bodyPr wrap="square" anchor="t" lIns="0" rIns="0" tIns="0" bIns="0">
+            <a:spAutoFit/>
+          </a:bodyPr>
+          <a:lstStyle/>
+          <a:p>
+            <a:pPr algn="ctr">
+              <a:lnSpc>
+                <a:spcPct val="110000"/>
+              </a:lnSpc>
+              <a:spcBef>
+                <a:spcPts val="0"/>
+              </a:spcBef>
+              <a:spcAft>
+                <a:spcPts val="400"/>
+              </a:spcAft>
+            </a:pPr>
+            <a:r>
+              <a:rPr sz="1300" b="1">
+                <a:solidFill>
+                  <a:srgbClr val="E60012"/>
+                </a:solidFill>
+                <a:latin typeface="Noto Sans JP"/>
+                <a:ea typeface="Noto Sans JP"/>
+              </a:rPr>
+              <a:t>▼</a:t>
+            </a:r>
+          </a:p>
+        </p:txBody>
+      </p:sp>
+      <p:sp>
+        <p:nvSpPr>
+          <p:cNvPr id="30" name="Rectangle 29"/>
           <p:cNvSpPr/>
           <p:nvPr/>
         </p:nvSpPr>
         <p:spPr>
           <a:xfrm>
-            <a:off x="822960" y="5760720"/>
-            <a:ext cx="82296" cy="475488"/>
+            <a:off x="822960" y="4261104"/>
+            <a:ext cx="10543032" cy="1024128"/>
           </a:xfrm>
           <a:prstGeom prst="rect">
             <a:avLst/>
@@ -4736,13 +4955,239 @@
       </p:sp>
       <p:sp>
         <p:nvSpPr>
-          <p:cNvPr id="27" name="TextBox 26"/>
-          <p:cNvSpPr txBox="1"/>
-          <p:nvPr/>
-        </p:nvSpPr>
-        <p:spPr>
-          <a:xfrm>
-            <a:off x="1078992" y="5715000"/>
+          <p:cNvPr id="31" name="Rectangle 30"/>
+          <p:cNvSpPr/>
+          <p:nvPr/>
+        </p:nvSpPr>
+        <p:spPr>
+          <a:xfrm>
+            <a:off x="5663610" y="4425696"/>
+            <a:ext cx="18288" cy="694944"/>
+          </a:xfrm>
+          <a:prstGeom prst="rect">
+            <a:avLst/>
+          </a:prstGeom>
+          <a:solidFill>
+            <a:srgbClr val="FFFFFF"/>
+          </a:solidFill>
+          <a:ln>
+            <a:noFill/>
+          </a:ln>
+          <a:effectLst/>
+        </p:spPr>
+        <p:style>
+          <a:lnRef idx="1">
+            <a:schemeClr val="accent1"/>
+          </a:lnRef>
+          <a:fillRef idx="3">
+            <a:schemeClr val="accent1"/>
+          </a:fillRef>
+          <a:effectRef idx="2">
+            <a:schemeClr val="accent1"/>
+          </a:effectRef>
+          <a:fontRef idx="minor">
+            <a:schemeClr val="lt1"/>
+          </a:fontRef>
+        </p:style>
+        <p:txBody>
+          <a:bodyPr rtlCol="0" anchor="ctr"/>
+          <a:lstStyle/>
+          <a:p>
+            <a:pPr algn="ctr"/>
+          </a:p>
+        </p:txBody>
+      </p:sp>
+      <p:sp>
+        <p:nvSpPr>
+          <p:cNvPr id="32" name="TextBox 31"/>
+          <p:cNvSpPr txBox="1"/>
+          <p:nvPr/>
+        </p:nvSpPr>
+        <p:spPr>
+          <a:xfrm>
+            <a:off x="1207008" y="4261104"/>
+            <a:ext cx="4301154" cy="1024128"/>
+          </a:xfrm>
+          <a:prstGeom prst="rect">
+            <a:avLst/>
+          </a:prstGeom>
+          <a:noFill/>
+        </p:spPr>
+        <p:txBody>
+          <a:bodyPr wrap="square" anchor="ctr" lIns="0" rIns="0" tIns="0" bIns="0">
+            <a:spAutoFit/>
+          </a:bodyPr>
+          <a:lstStyle/>
+          <a:p>
+            <a:pPr algn="l">
+              <a:lnSpc>
+                <a:spcPct val="110000"/>
+              </a:lnSpc>
+              <a:spcBef>
+                <a:spcPts val="0"/>
+              </a:spcBef>
+              <a:spcAft>
+                <a:spcPts val="300"/>
+              </a:spcAft>
+            </a:pPr>
+            <a:r>
+              <a:rPr sz="1050" b="1" spc="100">
+                <a:solidFill>
+                  <a:srgbClr val="FFCFD3"/>
+                </a:solidFill>
+                <a:latin typeface="Consolas"/>
+                <a:ea typeface="Consolas"/>
+              </a:rPr>
+              <a:t>3つに共通する“土台”</a:t>
+            </a:r>
+          </a:p>
+          <a:p>
+            <a:pPr algn="l">
+              <a:lnSpc>
+                <a:spcPct val="110000"/>
+              </a:lnSpc>
+              <a:spcBef>
+                <a:spcPts val="0"/>
+              </a:spcBef>
+              <a:spcAft>
+                <a:spcPts val="300"/>
+              </a:spcAft>
+            </a:pPr>
+            <a:r>
+              <a:rPr sz="2300" b="1">
+                <a:solidFill>
+                  <a:srgbClr val="FFFFFF"/>
+                </a:solidFill>
+                <a:latin typeface="Noto Sans JP"/>
+                <a:ea typeface="Noto Sans JP"/>
+              </a:rPr>
+              <a:t>膨大な“設備”がいる。</a:t>
+            </a:r>
+          </a:p>
+        </p:txBody>
+      </p:sp>
+      <p:sp>
+        <p:nvSpPr>
+          <p:cNvPr id="33" name="TextBox 32"/>
+          <p:cNvSpPr txBox="1"/>
+          <p:nvPr/>
+        </p:nvSpPr>
+        <p:spPr>
+          <a:xfrm>
+            <a:off x="6129954" y="4261104"/>
+            <a:ext cx="4870277" cy="1024128"/>
+          </a:xfrm>
+          <a:prstGeom prst="rect">
+            <a:avLst/>
+          </a:prstGeom>
+          <a:noFill/>
+        </p:spPr>
+        <p:txBody>
+          <a:bodyPr wrap="square" anchor="ctr" lIns="0" rIns="0" tIns="0" bIns="0">
+            <a:spAutoFit/>
+          </a:bodyPr>
+          <a:lstStyle/>
+          <a:p>
+            <a:pPr algn="l">
+              <a:lnSpc>
+                <a:spcPct val="114000"/>
+              </a:lnSpc>
+              <a:spcBef>
+                <a:spcPts val="0"/>
+              </a:spcBef>
+              <a:spcAft>
+                <a:spcPts val="300"/>
+              </a:spcAft>
+            </a:pPr>
+            <a:r>
+              <a:rPr sz="1050" b="1" spc="100">
+                <a:solidFill>
+                  <a:srgbClr val="FFCFD3"/>
+                </a:solidFill>
+                <a:latin typeface="Consolas"/>
+                <a:ea typeface="Consolas"/>
+              </a:rPr>
+              <a:t>作る・建てる主役は</a:t>
+            </a:r>
+          </a:p>
+          <a:p>
+            <a:pPr algn="l">
+              <a:lnSpc>
+                <a:spcPct val="114000"/>
+              </a:lnSpc>
+              <a:spcBef>
+                <a:spcPts val="0"/>
+              </a:spcBef>
+              <a:spcAft>
+                <a:spcPts val="300"/>
+              </a:spcAft>
+            </a:pPr>
+            <a:r>
+              <a:rPr sz="1800" b="1">
+                <a:solidFill>
+                  <a:srgbClr val="FFFFFF"/>
+                </a:solidFill>
+                <a:latin typeface="Noto Sans JP"/>
+                <a:ea typeface="Noto Sans JP"/>
+              </a:rPr>
+              <a:t>重電・機械・電機など、“製造業”がコア。</a:t>
+            </a:r>
+          </a:p>
+        </p:txBody>
+      </p:sp>
+      <p:sp>
+        <p:nvSpPr>
+          <p:cNvPr id="34" name="Rectangle 33"/>
+          <p:cNvSpPr/>
+          <p:nvPr/>
+        </p:nvSpPr>
+        <p:spPr>
+          <a:xfrm>
+            <a:off x="822960" y="5696712"/>
+            <a:ext cx="82296" cy="475488"/>
+          </a:xfrm>
+          <a:prstGeom prst="rect">
+            <a:avLst/>
+          </a:prstGeom>
+          <a:solidFill>
+            <a:srgbClr val="E60012"/>
+          </a:solidFill>
+          <a:ln>
+            <a:noFill/>
+          </a:ln>
+          <a:effectLst/>
+        </p:spPr>
+        <p:style>
+          <a:lnRef idx="1">
+            <a:schemeClr val="accent1"/>
+          </a:lnRef>
+          <a:fillRef idx="3">
+            <a:schemeClr val="accent1"/>
+          </a:fillRef>
+          <a:effectRef idx="2">
+            <a:schemeClr val="accent1"/>
+          </a:effectRef>
+          <a:fontRef idx="minor">
+            <a:schemeClr val="lt1"/>
+          </a:fontRef>
+        </p:style>
+        <p:txBody>
+          <a:bodyPr rtlCol="0" anchor="ctr"/>
+          <a:lstStyle/>
+          <a:p>
+            <a:pPr algn="ctr"/>
+          </a:p>
+        </p:txBody>
+      </p:sp>
+      <p:sp>
+        <p:nvSpPr>
+          <p:cNvPr id="35" name="TextBox 34"/>
+          <p:cNvSpPr txBox="1"/>
+          <p:nvPr/>
+        </p:nvSpPr>
+        <p:spPr>
+          <a:xfrm>
+            <a:off x="1078992" y="5650992"/>
             <a:ext cx="10268711" cy="566928"/>
           </a:xfrm>
           <a:prstGeom prst="rect">
@@ -7371,8 +7816,8 @@
         </p:nvSpPr>
         <p:spPr>
           <a:xfrm>
-            <a:off x="822960" y="1737360"/>
-            <a:ext cx="5486400" cy="310896"/>
+            <a:off x="822960" y="1664208"/>
+            <a:ext cx="7772400" cy="310896"/>
           </a:xfrm>
           <a:prstGeom prst="rect">
             <a:avLst/>
@@ -7414,21 +7859,113 @@
                 <a:latin typeface="Noto Sans JP"/>
                 <a:ea typeface="Noto Sans JP"/>
               </a:rPr>
-              <a:t>　この一手が、川下までまるごと波及する</a:t>
-            </a:r>
-          </a:p>
-        </p:txBody>
-      </p:sp>
-      <p:sp>
-        <p:nvSpPr>
-          <p:cNvPr id="9" name="Rectangle 8"/>
+              <a:t>　この一手が、川上から川下までまるごと波及する</a:t>
+            </a:r>
+          </a:p>
+        </p:txBody>
+      </p:sp>
+      <p:sp>
+        <p:nvSpPr>
+          <p:cNvPr id="9" name="TextBox 8"/>
+          <p:cNvSpPr txBox="1"/>
+          <p:nvPr/>
+        </p:nvSpPr>
+        <p:spPr>
+          <a:xfrm>
+            <a:off x="822960" y="2103120"/>
+            <a:ext cx="3657600" cy="201168"/>
+          </a:xfrm>
+          <a:prstGeom prst="rect">
+            <a:avLst/>
+          </a:prstGeom>
+          <a:noFill/>
+        </p:spPr>
+        <p:txBody>
+          <a:bodyPr wrap="square" anchor="t" lIns="0" rIns="0" tIns="0" bIns="0">
+            <a:spAutoFit/>
+          </a:bodyPr>
+          <a:lstStyle/>
+          <a:p>
+            <a:pPr algn="l">
+              <a:lnSpc>
+                <a:spcPct val="110000"/>
+              </a:lnSpc>
+              <a:spcBef>
+                <a:spcPts val="0"/>
+              </a:spcBef>
+              <a:spcAft>
+                <a:spcPts val="400"/>
+              </a:spcAft>
+            </a:pPr>
+            <a:r>
+              <a:rPr sz="950" b="1" spc="100">
+                <a:solidFill>
+                  <a:srgbClr val="9AA1A9"/>
+                </a:solidFill>
+                <a:latin typeface="Consolas"/>
+                <a:ea typeface="Consolas"/>
+              </a:rPr>
+              <a:t>川上（源流）</a:t>
+            </a:r>
+          </a:p>
+        </p:txBody>
+      </p:sp>
+      <p:sp>
+        <p:nvSpPr>
+          <p:cNvPr id="10" name="TextBox 9"/>
+          <p:cNvSpPr txBox="1"/>
+          <p:nvPr/>
+        </p:nvSpPr>
+        <p:spPr>
+          <a:xfrm>
+            <a:off x="7708392" y="2103120"/>
+            <a:ext cx="3657600" cy="201168"/>
+          </a:xfrm>
+          <a:prstGeom prst="rect">
+            <a:avLst/>
+          </a:prstGeom>
+          <a:noFill/>
+        </p:spPr>
+        <p:txBody>
+          <a:bodyPr wrap="square" anchor="t" lIns="0" rIns="0" tIns="0" bIns="0">
+            <a:spAutoFit/>
+          </a:bodyPr>
+          <a:lstStyle/>
+          <a:p>
+            <a:pPr algn="r">
+              <a:lnSpc>
+                <a:spcPct val="110000"/>
+              </a:lnSpc>
+              <a:spcBef>
+                <a:spcPts val="0"/>
+              </a:spcBef>
+              <a:spcAft>
+                <a:spcPts val="400"/>
+              </a:spcAft>
+            </a:pPr>
+            <a:r>
+              <a:rPr sz="950" b="1" spc="100">
+                <a:solidFill>
+                  <a:srgbClr val="9AA1A9"/>
+                </a:solidFill>
+                <a:latin typeface="Consolas"/>
+                <a:ea typeface="Consolas"/>
+              </a:rPr>
+              <a:t>川下（据付・保守の現場）</a:t>
+            </a:r>
+          </a:p>
+        </p:txBody>
+      </p:sp>
+      <p:sp>
+        <p:nvSpPr>
+          <p:cNvPr id="11" name="Rectangle 10"/>
           <p:cNvSpPr/>
           <p:nvPr/>
         </p:nvSpPr>
         <p:spPr>
           <a:xfrm>
-            <a:off x="822960" y="2194560"/>
-            <a:ext cx="10543032" cy="41148"/>
+            <a:off x="822960" y="2340864"/>
+            <a:ext cx="10232136" cy="45720"/>
           </a:xfrm>
           <a:prstGeom prst="rect">
             <a:avLst/>
@@ -7465,14 +8002,104 @@
       </p:sp>
       <p:sp>
         <p:nvSpPr>
-          <p:cNvPr id="10" name="TextBox 9"/>
-          <p:cNvSpPr txBox="1"/>
-          <p:nvPr/>
-        </p:nvSpPr>
-        <p:spPr>
-          <a:xfrm>
-            <a:off x="822960" y="2514600"/>
-            <a:ext cx="1834286" cy="201168"/>
+          <p:cNvPr id="12" name="TextBox 11"/>
+          <p:cNvSpPr txBox="1"/>
+          <p:nvPr/>
+        </p:nvSpPr>
+        <p:spPr>
+          <a:xfrm>
+            <a:off x="11036808" y="2240280"/>
+            <a:ext cx="365760" cy="237744"/>
+          </a:xfrm>
+          <a:prstGeom prst="rect">
+            <a:avLst/>
+          </a:prstGeom>
+          <a:noFill/>
+        </p:spPr>
+        <p:txBody>
+          <a:bodyPr wrap="square" anchor="t" lIns="0" rIns="0" tIns="0" bIns="0">
+            <a:spAutoFit/>
+          </a:bodyPr>
+          <a:lstStyle/>
+          <a:p>
+            <a:pPr algn="l">
+              <a:lnSpc>
+                <a:spcPct val="110000"/>
+              </a:lnSpc>
+              <a:spcBef>
+                <a:spcPts val="0"/>
+              </a:spcBef>
+              <a:spcAft>
+                <a:spcPts val="400"/>
+              </a:spcAft>
+            </a:pPr>
+            <a:r>
+              <a:rPr sz="1400" b="1">
+                <a:solidFill>
+                  <a:srgbClr val="E60012"/>
+                </a:solidFill>
+                <a:latin typeface="Noto Sans JP"/>
+                <a:ea typeface="Noto Sans JP"/>
+              </a:rPr>
+              <a:t>▶</a:t>
+            </a:r>
+          </a:p>
+        </p:txBody>
+      </p:sp>
+      <p:sp>
+        <p:nvSpPr>
+          <p:cNvPr id="13" name="Rectangle 12"/>
+          <p:cNvSpPr/>
+          <p:nvPr/>
+        </p:nvSpPr>
+        <p:spPr>
+          <a:xfrm>
+            <a:off x="822960" y="2670048"/>
+            <a:ext cx="1852574" cy="54864"/>
+          </a:xfrm>
+          <a:prstGeom prst="rect">
+            <a:avLst/>
+          </a:prstGeom>
+          <a:solidFill>
+            <a:srgbClr val="E60012"/>
+          </a:solidFill>
+          <a:ln>
+            <a:noFill/>
+          </a:ln>
+          <a:effectLst/>
+        </p:spPr>
+        <p:style>
+          <a:lnRef idx="1">
+            <a:schemeClr val="accent1"/>
+          </a:lnRef>
+          <a:fillRef idx="3">
+            <a:schemeClr val="accent1"/>
+          </a:fillRef>
+          <a:effectRef idx="2">
+            <a:schemeClr val="accent1"/>
+          </a:effectRef>
+          <a:fontRef idx="minor">
+            <a:schemeClr val="lt1"/>
+          </a:fontRef>
+        </p:style>
+        <p:txBody>
+          <a:bodyPr rtlCol="0" anchor="ctr"/>
+          <a:lstStyle/>
+          <a:p>
+            <a:pPr algn="ctr"/>
+          </a:p>
+        </p:txBody>
+      </p:sp>
+      <p:sp>
+        <p:nvSpPr>
+          <p:cNvPr id="14" name="TextBox 13"/>
+          <p:cNvSpPr txBox="1"/>
+          <p:nvPr/>
+        </p:nvSpPr>
+        <p:spPr>
+          <a:xfrm>
+            <a:off x="822960" y="2816352"/>
+            <a:ext cx="1852574" cy="201168"/>
           </a:xfrm>
           <a:prstGeom prst="rect">
             <a:avLst/>
@@ -7511,14 +8138,14 @@
       </p:sp>
       <p:sp>
         <p:nvSpPr>
-          <p:cNvPr id="11" name="TextBox 10"/>
-          <p:cNvSpPr txBox="1"/>
-          <p:nvPr/>
-        </p:nvSpPr>
-        <p:spPr>
-          <a:xfrm>
-            <a:off x="822960" y="2770632"/>
-            <a:ext cx="1870862" cy="457200"/>
+          <p:cNvPr id="15" name="TextBox 14"/>
+          <p:cNvSpPr txBox="1"/>
+          <p:nvPr/>
+        </p:nvSpPr>
+        <p:spPr>
+          <a:xfrm>
+            <a:off x="822960" y="3054096"/>
+            <a:ext cx="1852574" cy="365760"/>
           </a:xfrm>
           <a:prstGeom prst="rect">
             <a:avLst/>
@@ -7533,7 +8160,7 @@
           <a:p>
             <a:pPr algn="l">
               <a:lnSpc>
-                <a:spcPct val="106000"/>
+                <a:spcPct val="105000"/>
               </a:lnSpc>
               <a:spcBef>
                 <a:spcPts val="0"/>
@@ -7557,14 +8184,14 @@
       </p:sp>
       <p:sp>
         <p:nvSpPr>
-          <p:cNvPr id="12" name="TextBox 11"/>
-          <p:cNvSpPr txBox="1"/>
-          <p:nvPr/>
-        </p:nvSpPr>
-        <p:spPr>
-          <a:xfrm>
-            <a:off x="822960" y="3337560"/>
-            <a:ext cx="1870862" cy="310896"/>
+          <p:cNvPr id="16" name="TextBox 15"/>
+          <p:cNvSpPr txBox="1"/>
+          <p:nvPr/>
+        </p:nvSpPr>
+        <p:spPr>
+          <a:xfrm>
+            <a:off x="822960" y="3456432"/>
+            <a:ext cx="1852574" cy="219456"/>
           </a:xfrm>
           <a:prstGeom prst="rect">
             <a:avLst/>
@@ -7589,7 +8216,63 @@
               </a:spcAft>
             </a:pPr>
             <a:r>
-              <a:rPr sz="1200" b="1">
+              <a:rPr sz="1050" b="1">
+                <a:solidFill>
+                  <a:srgbClr val="6E767F"/>
+                </a:solidFill>
+                <a:latin typeface="Noto Sans JP"/>
+                <a:ea typeface="Noto Sans JP"/>
+              </a:rPr>
+              <a:t>電気をつくる</a:t>
+            </a:r>
+          </a:p>
+        </p:txBody>
+      </p:sp>
+      <p:sp>
+        <p:nvSpPr>
+          <p:cNvPr id="17" name="TextBox 16"/>
+          <p:cNvSpPr txBox="1"/>
+          <p:nvPr/>
+        </p:nvSpPr>
+        <p:spPr>
+          <a:xfrm>
+            <a:off x="822960" y="3822191"/>
+            <a:ext cx="1852574" cy="310896"/>
+          </a:xfrm>
+          <a:prstGeom prst="rect">
+            <a:avLst/>
+          </a:prstGeom>
+          <a:noFill/>
+        </p:spPr>
+        <p:txBody>
+          <a:bodyPr wrap="square" anchor="t" lIns="0" rIns="0" tIns="0" bIns="0">
+            <a:spAutoFit/>
+          </a:bodyPr>
+          <a:lstStyle/>
+          <a:p>
+            <a:pPr algn="l">
+              <a:lnSpc>
+                <a:spcPct val="110000"/>
+              </a:lnSpc>
+              <a:spcBef>
+                <a:spcPts val="0"/>
+              </a:spcBef>
+              <a:spcAft>
+                <a:spcPts val="400"/>
+              </a:spcAft>
+            </a:pPr>
+            <a:r>
+              <a:rPr sz="1100" b="1">
+                <a:solidFill>
+                  <a:srgbClr val="E60012"/>
+                </a:solidFill>
+                <a:latin typeface="Noto Sans JP"/>
+                <a:ea typeface="Noto Sans JP"/>
+              </a:rPr>
+              <a:t>・</a:t>
+            </a:r>
+            <a:r>
+              <a:rPr sz="1250" b="1">
                 <a:solidFill>
                   <a:srgbClr val="373C43"/>
                 </a:solidFill>
@@ -7603,14 +8286,14 @@
       </p:sp>
       <p:sp>
         <p:nvSpPr>
-          <p:cNvPr id="13" name="TextBox 12"/>
-          <p:cNvSpPr txBox="1"/>
-          <p:nvPr/>
-        </p:nvSpPr>
-        <p:spPr>
-          <a:xfrm>
-            <a:off x="822960" y="3721608"/>
-            <a:ext cx="1870862" cy="310896"/>
+          <p:cNvPr id="18" name="TextBox 17"/>
+          <p:cNvSpPr txBox="1"/>
+          <p:nvPr/>
+        </p:nvSpPr>
+        <p:spPr>
+          <a:xfrm>
+            <a:off x="822960" y="4187952"/>
+            <a:ext cx="1852574" cy="310896"/>
           </a:xfrm>
           <a:prstGeom prst="rect">
             <a:avLst/>
@@ -7635,7 +8318,17 @@
               </a:spcAft>
             </a:pPr>
             <a:r>
-              <a:rPr sz="1200" b="1">
+              <a:rPr sz="1100" b="1">
+                <a:solidFill>
+                  <a:srgbClr val="E60012"/>
+                </a:solidFill>
+                <a:latin typeface="Noto Sans JP"/>
+                <a:ea typeface="Noto Sans JP"/>
+              </a:rPr>
+              <a:t>・</a:t>
+            </a:r>
+            <a:r>
+              <a:rPr sz="1250" b="1">
                 <a:solidFill>
                   <a:srgbClr val="373C43"/>
                 </a:solidFill>
@@ -7649,14 +8342,14 @@
       </p:sp>
       <p:sp>
         <p:nvSpPr>
-          <p:cNvPr id="14" name="TextBox 13"/>
-          <p:cNvSpPr txBox="1"/>
-          <p:nvPr/>
-        </p:nvSpPr>
-        <p:spPr>
-          <a:xfrm>
-            <a:off x="822960" y="4105656"/>
-            <a:ext cx="1870862" cy="310896"/>
+          <p:cNvPr id="19" name="TextBox 18"/>
+          <p:cNvSpPr txBox="1"/>
+          <p:nvPr/>
+        </p:nvSpPr>
+        <p:spPr>
+          <a:xfrm>
+            <a:off x="822960" y="4553712"/>
+            <a:ext cx="1852574" cy="310896"/>
           </a:xfrm>
           <a:prstGeom prst="rect">
             <a:avLst/>
@@ -7681,7 +8374,17 @@
               </a:spcAft>
             </a:pPr>
             <a:r>
-              <a:rPr sz="1200" b="1">
+              <a:rPr sz="1100" b="1">
+                <a:solidFill>
+                  <a:srgbClr val="E60012"/>
+                </a:solidFill>
+                <a:latin typeface="Noto Sans JP"/>
+                <a:ea typeface="Noto Sans JP"/>
+              </a:rPr>
+              <a:t>・</a:t>
+            </a:r>
+            <a:r>
+              <a:rPr sz="1250" b="1">
                 <a:solidFill>
                   <a:srgbClr val="373C43"/>
                 </a:solidFill>
@@ -7695,14 +8398,14 @@
       </p:sp>
       <p:sp>
         <p:nvSpPr>
-          <p:cNvPr id="15" name="TextBox 14"/>
-          <p:cNvSpPr txBox="1"/>
-          <p:nvPr/>
-        </p:nvSpPr>
-        <p:spPr>
-          <a:xfrm>
-            <a:off x="822960" y="4489704"/>
-            <a:ext cx="1870862" cy="310896"/>
+          <p:cNvPr id="20" name="TextBox 19"/>
+          <p:cNvSpPr txBox="1"/>
+          <p:nvPr/>
+        </p:nvSpPr>
+        <p:spPr>
+          <a:xfrm>
+            <a:off x="822960" y="4919472"/>
+            <a:ext cx="1852574" cy="310896"/>
           </a:xfrm>
           <a:prstGeom prst="rect">
             <a:avLst/>
@@ -7727,7 +8430,17 @@
               </a:spcAft>
             </a:pPr>
             <a:r>
-              <a:rPr sz="1200" b="1">
+              <a:rPr sz="1100" b="1">
+                <a:solidFill>
+                  <a:srgbClr val="E60012"/>
+                </a:solidFill>
+                <a:latin typeface="Noto Sans JP"/>
+                <a:ea typeface="Noto Sans JP"/>
+              </a:rPr>
+              <a:t>・</a:t>
+            </a:r>
+            <a:r>
+              <a:rPr sz="1250" b="1">
                 <a:solidFill>
                   <a:srgbClr val="373C43"/>
                 </a:solidFill>
@@ -7741,14 +8454,14 @@
       </p:sp>
       <p:sp>
         <p:nvSpPr>
-          <p:cNvPr id="16" name="Rectangle 15"/>
+          <p:cNvPr id="21" name="Rectangle 20"/>
           <p:cNvSpPr/>
           <p:nvPr/>
         </p:nvSpPr>
         <p:spPr>
           <a:xfrm>
-            <a:off x="2821838" y="2514600"/>
-            <a:ext cx="15240" cy="2331720"/>
+            <a:off x="2821838" y="2670048"/>
+            <a:ext cx="12700" cy="2377440"/>
           </a:xfrm>
           <a:prstGeom prst="rect">
             <a:avLst/>
@@ -7785,14 +8498,58 @@
       </p:sp>
       <p:sp>
         <p:nvSpPr>
-          <p:cNvPr id="17" name="TextBox 16"/>
-          <p:cNvSpPr txBox="1"/>
-          <p:nvPr/>
-        </p:nvSpPr>
-        <p:spPr>
-          <a:xfrm>
-            <a:off x="2931566" y="2514600"/>
-            <a:ext cx="1834286" cy="201168"/>
+          <p:cNvPr id="22" name="Rectangle 21"/>
+          <p:cNvSpPr/>
+          <p:nvPr/>
+        </p:nvSpPr>
+        <p:spPr>
+          <a:xfrm>
+            <a:off x="2931566" y="2670048"/>
+            <a:ext cx="1852574" cy="54864"/>
+          </a:xfrm>
+          <a:prstGeom prst="rect">
+            <a:avLst/>
+          </a:prstGeom>
+          <a:solidFill>
+            <a:srgbClr val="E60012"/>
+          </a:solidFill>
+          <a:ln>
+            <a:noFill/>
+          </a:ln>
+          <a:effectLst/>
+        </p:spPr>
+        <p:style>
+          <a:lnRef idx="1">
+            <a:schemeClr val="accent1"/>
+          </a:lnRef>
+          <a:fillRef idx="3">
+            <a:schemeClr val="accent1"/>
+          </a:fillRef>
+          <a:effectRef idx="2">
+            <a:schemeClr val="accent1"/>
+          </a:effectRef>
+          <a:fontRef idx="minor">
+            <a:schemeClr val="lt1"/>
+          </a:fontRef>
+        </p:style>
+        <p:txBody>
+          <a:bodyPr rtlCol="0" anchor="ctr"/>
+          <a:lstStyle/>
+          <a:p>
+            <a:pPr algn="ctr"/>
+          </a:p>
+        </p:txBody>
+      </p:sp>
+      <p:sp>
+        <p:nvSpPr>
+          <p:cNvPr id="23" name="TextBox 22"/>
+          <p:cNvSpPr txBox="1"/>
+          <p:nvPr/>
+        </p:nvSpPr>
+        <p:spPr>
+          <a:xfrm>
+            <a:off x="2931566" y="2816352"/>
+            <a:ext cx="1852574" cy="201168"/>
           </a:xfrm>
           <a:prstGeom prst="rect">
             <a:avLst/>
@@ -7831,14 +8588,14 @@
       </p:sp>
       <p:sp>
         <p:nvSpPr>
-          <p:cNvPr id="18" name="TextBox 17"/>
-          <p:cNvSpPr txBox="1"/>
-          <p:nvPr/>
-        </p:nvSpPr>
-        <p:spPr>
-          <a:xfrm>
-            <a:off x="2931566" y="2770632"/>
-            <a:ext cx="1870862" cy="457200"/>
+          <p:cNvPr id="24" name="TextBox 23"/>
+          <p:cNvSpPr txBox="1"/>
+          <p:nvPr/>
+        </p:nvSpPr>
+        <p:spPr>
+          <a:xfrm>
+            <a:off x="2931566" y="3054096"/>
+            <a:ext cx="1852574" cy="365760"/>
           </a:xfrm>
           <a:prstGeom prst="rect">
             <a:avLst/>
@@ -7853,7 +8610,7 @@
           <a:p>
             <a:pPr algn="l">
               <a:lnSpc>
-                <a:spcPct val="106000"/>
+                <a:spcPct val="105000"/>
               </a:lnSpc>
               <a:spcBef>
                 <a:spcPts val="0"/>
@@ -7877,14 +8634,14 @@
       </p:sp>
       <p:sp>
         <p:nvSpPr>
-          <p:cNvPr id="19" name="TextBox 18"/>
-          <p:cNvSpPr txBox="1"/>
-          <p:nvPr/>
-        </p:nvSpPr>
-        <p:spPr>
-          <a:xfrm>
-            <a:off x="2931566" y="3337560"/>
-            <a:ext cx="1870862" cy="310896"/>
+          <p:cNvPr id="25" name="TextBox 24"/>
+          <p:cNvSpPr txBox="1"/>
+          <p:nvPr/>
+        </p:nvSpPr>
+        <p:spPr>
+          <a:xfrm>
+            <a:off x="2931566" y="3456432"/>
+            <a:ext cx="1852574" cy="219456"/>
           </a:xfrm>
           <a:prstGeom prst="rect">
             <a:avLst/>
@@ -7909,7 +8666,63 @@
               </a:spcAft>
             </a:pPr>
             <a:r>
-              <a:rPr sz="1200" b="1">
+              <a:rPr sz="1050" b="1">
+                <a:solidFill>
+                  <a:srgbClr val="6E767F"/>
+                </a:solidFill>
+                <a:latin typeface="Noto Sans JP"/>
+                <a:ea typeface="Noto Sans JP"/>
+              </a:rPr>
+              <a:t>送る・変える</a:t>
+            </a:r>
+          </a:p>
+        </p:txBody>
+      </p:sp>
+      <p:sp>
+        <p:nvSpPr>
+          <p:cNvPr id="26" name="TextBox 25"/>
+          <p:cNvSpPr txBox="1"/>
+          <p:nvPr/>
+        </p:nvSpPr>
+        <p:spPr>
+          <a:xfrm>
+            <a:off x="2931566" y="3822191"/>
+            <a:ext cx="1852574" cy="310896"/>
+          </a:xfrm>
+          <a:prstGeom prst="rect">
+            <a:avLst/>
+          </a:prstGeom>
+          <a:noFill/>
+        </p:spPr>
+        <p:txBody>
+          <a:bodyPr wrap="square" anchor="t" lIns="0" rIns="0" tIns="0" bIns="0">
+            <a:spAutoFit/>
+          </a:bodyPr>
+          <a:lstStyle/>
+          <a:p>
+            <a:pPr algn="l">
+              <a:lnSpc>
+                <a:spcPct val="110000"/>
+              </a:lnSpc>
+              <a:spcBef>
+                <a:spcPts val="0"/>
+              </a:spcBef>
+              <a:spcAft>
+                <a:spcPts val="400"/>
+              </a:spcAft>
+            </a:pPr>
+            <a:r>
+              <a:rPr sz="1100" b="1">
+                <a:solidFill>
+                  <a:srgbClr val="E60012"/>
+                </a:solidFill>
+                <a:latin typeface="Noto Sans JP"/>
+                <a:ea typeface="Noto Sans JP"/>
+              </a:rPr>
+              <a:t>・</a:t>
+            </a:r>
+            <a:r>
+              <a:rPr sz="1250" b="1">
                 <a:solidFill>
                   <a:srgbClr val="373C43"/>
                 </a:solidFill>
@@ -7923,14 +8736,14 @@
       </p:sp>
       <p:sp>
         <p:nvSpPr>
-          <p:cNvPr id="20" name="TextBox 19"/>
-          <p:cNvSpPr txBox="1"/>
-          <p:nvPr/>
-        </p:nvSpPr>
-        <p:spPr>
-          <a:xfrm>
-            <a:off x="2931566" y="3721608"/>
-            <a:ext cx="1870862" cy="310896"/>
+          <p:cNvPr id="27" name="TextBox 26"/>
+          <p:cNvSpPr txBox="1"/>
+          <p:nvPr/>
+        </p:nvSpPr>
+        <p:spPr>
+          <a:xfrm>
+            <a:off x="2931566" y="4187952"/>
+            <a:ext cx="1852574" cy="310896"/>
           </a:xfrm>
           <a:prstGeom prst="rect">
             <a:avLst/>
@@ -7955,7 +8768,17 @@
               </a:spcAft>
             </a:pPr>
             <a:r>
-              <a:rPr sz="1200" b="1">
+              <a:rPr sz="1100" b="1">
+                <a:solidFill>
+                  <a:srgbClr val="E60012"/>
+                </a:solidFill>
+                <a:latin typeface="Noto Sans JP"/>
+                <a:ea typeface="Noto Sans JP"/>
+              </a:rPr>
+              <a:t>・</a:t>
+            </a:r>
+            <a:r>
+              <a:rPr sz="1250" b="1">
                 <a:solidFill>
                   <a:srgbClr val="373C43"/>
                 </a:solidFill>
@@ -7969,14 +8792,14 @@
       </p:sp>
       <p:sp>
         <p:nvSpPr>
-          <p:cNvPr id="21" name="TextBox 20"/>
-          <p:cNvSpPr txBox="1"/>
-          <p:nvPr/>
-        </p:nvSpPr>
-        <p:spPr>
-          <a:xfrm>
-            <a:off x="2931566" y="4105656"/>
-            <a:ext cx="1870862" cy="310896"/>
+          <p:cNvPr id="28" name="TextBox 27"/>
+          <p:cNvSpPr txBox="1"/>
+          <p:nvPr/>
+        </p:nvSpPr>
+        <p:spPr>
+          <a:xfrm>
+            <a:off x="2931566" y="4553712"/>
+            <a:ext cx="1852574" cy="310896"/>
           </a:xfrm>
           <a:prstGeom prst="rect">
             <a:avLst/>
@@ -8001,7 +8824,17 @@
               </a:spcAft>
             </a:pPr>
             <a:r>
-              <a:rPr sz="1200" b="1">
+              <a:rPr sz="1100" b="1">
+                <a:solidFill>
+                  <a:srgbClr val="E60012"/>
+                </a:solidFill>
+                <a:latin typeface="Noto Sans JP"/>
+                <a:ea typeface="Noto Sans JP"/>
+              </a:rPr>
+              <a:t>・</a:t>
+            </a:r>
+            <a:r>
+              <a:rPr sz="1250" b="1">
                 <a:solidFill>
                   <a:srgbClr val="373C43"/>
                 </a:solidFill>
@@ -8015,14 +8848,14 @@
       </p:sp>
       <p:sp>
         <p:nvSpPr>
-          <p:cNvPr id="22" name="TextBox 21"/>
-          <p:cNvSpPr txBox="1"/>
-          <p:nvPr/>
-        </p:nvSpPr>
-        <p:spPr>
-          <a:xfrm>
-            <a:off x="2931566" y="4489704"/>
-            <a:ext cx="1870862" cy="310896"/>
+          <p:cNvPr id="29" name="TextBox 28"/>
+          <p:cNvSpPr txBox="1"/>
+          <p:nvPr/>
+        </p:nvSpPr>
+        <p:spPr>
+          <a:xfrm>
+            <a:off x="2931566" y="4919472"/>
+            <a:ext cx="1852574" cy="310896"/>
           </a:xfrm>
           <a:prstGeom prst="rect">
             <a:avLst/>
@@ -8047,7 +8880,17 @@
               </a:spcAft>
             </a:pPr>
             <a:r>
-              <a:rPr sz="1200" b="1">
+              <a:rPr sz="1100" b="1">
+                <a:solidFill>
+                  <a:srgbClr val="E60012"/>
+                </a:solidFill>
+                <a:latin typeface="Noto Sans JP"/>
+                <a:ea typeface="Noto Sans JP"/>
+              </a:rPr>
+              <a:t>・</a:t>
+            </a:r>
+            <a:r>
+              <a:rPr sz="1250" b="1">
                 <a:solidFill>
                   <a:srgbClr val="373C43"/>
                 </a:solidFill>
@@ -8061,14 +8904,14 @@
       </p:sp>
       <p:sp>
         <p:nvSpPr>
-          <p:cNvPr id="23" name="Rectangle 22"/>
+          <p:cNvPr id="30" name="Rectangle 29"/>
           <p:cNvSpPr/>
           <p:nvPr/>
         </p:nvSpPr>
         <p:spPr>
           <a:xfrm>
-            <a:off x="4930444" y="2514600"/>
-            <a:ext cx="15240" cy="2331720"/>
+            <a:off x="4930444" y="2670048"/>
+            <a:ext cx="12700" cy="2377440"/>
           </a:xfrm>
           <a:prstGeom prst="rect">
             <a:avLst/>
@@ -8105,14 +8948,58 @@
       </p:sp>
       <p:sp>
         <p:nvSpPr>
-          <p:cNvPr id="24" name="TextBox 23"/>
-          <p:cNvSpPr txBox="1"/>
-          <p:nvPr/>
-        </p:nvSpPr>
-        <p:spPr>
-          <a:xfrm>
-            <a:off x="5040172" y="2514600"/>
-            <a:ext cx="1834286" cy="201168"/>
+          <p:cNvPr id="31" name="Rectangle 30"/>
+          <p:cNvSpPr/>
+          <p:nvPr/>
+        </p:nvSpPr>
+        <p:spPr>
+          <a:xfrm>
+            <a:off x="5040172" y="2670048"/>
+            <a:ext cx="1852574" cy="54864"/>
+          </a:xfrm>
+          <a:prstGeom prst="rect">
+            <a:avLst/>
+          </a:prstGeom>
+          <a:solidFill>
+            <a:srgbClr val="E60012"/>
+          </a:solidFill>
+          <a:ln>
+            <a:noFill/>
+          </a:ln>
+          <a:effectLst/>
+        </p:spPr>
+        <p:style>
+          <a:lnRef idx="1">
+            <a:schemeClr val="accent1"/>
+          </a:lnRef>
+          <a:fillRef idx="3">
+            <a:schemeClr val="accent1"/>
+          </a:fillRef>
+          <a:effectRef idx="2">
+            <a:schemeClr val="accent1"/>
+          </a:effectRef>
+          <a:fontRef idx="minor">
+            <a:schemeClr val="lt1"/>
+          </a:fontRef>
+        </p:style>
+        <p:txBody>
+          <a:bodyPr rtlCol="0" anchor="ctr"/>
+          <a:lstStyle/>
+          <a:p>
+            <a:pPr algn="ctr"/>
+          </a:p>
+        </p:txBody>
+      </p:sp>
+      <p:sp>
+        <p:nvSpPr>
+          <p:cNvPr id="32" name="TextBox 31"/>
+          <p:cNvSpPr txBox="1"/>
+          <p:nvPr/>
+        </p:nvSpPr>
+        <p:spPr>
+          <a:xfrm>
+            <a:off x="5040172" y="2816352"/>
+            <a:ext cx="1852574" cy="201168"/>
           </a:xfrm>
           <a:prstGeom prst="rect">
             <a:avLst/>
@@ -8151,14 +9038,14 @@
       </p:sp>
       <p:sp>
         <p:nvSpPr>
-          <p:cNvPr id="25" name="TextBox 24"/>
-          <p:cNvSpPr txBox="1"/>
-          <p:nvPr/>
-        </p:nvSpPr>
-        <p:spPr>
-          <a:xfrm>
-            <a:off x="5040172" y="2770632"/>
-            <a:ext cx="1870862" cy="457200"/>
+          <p:cNvPr id="33" name="TextBox 32"/>
+          <p:cNvSpPr txBox="1"/>
+          <p:nvPr/>
+        </p:nvSpPr>
+        <p:spPr>
+          <a:xfrm>
+            <a:off x="5040172" y="3054096"/>
+            <a:ext cx="1852574" cy="365760"/>
           </a:xfrm>
           <a:prstGeom prst="rect">
             <a:avLst/>
@@ -8173,7 +9060,7 @@
           <a:p>
             <a:pPr algn="l">
               <a:lnSpc>
-                <a:spcPct val="106000"/>
+                <a:spcPct val="105000"/>
               </a:lnSpc>
               <a:spcBef>
                 <a:spcPts val="0"/>
@@ -8197,14 +9084,14 @@
       </p:sp>
       <p:sp>
         <p:nvSpPr>
-          <p:cNvPr id="26" name="TextBox 25"/>
-          <p:cNvSpPr txBox="1"/>
-          <p:nvPr/>
-        </p:nvSpPr>
-        <p:spPr>
-          <a:xfrm>
-            <a:off x="5040172" y="3337560"/>
-            <a:ext cx="1870862" cy="310896"/>
+          <p:cNvPr id="34" name="TextBox 33"/>
+          <p:cNvSpPr txBox="1"/>
+          <p:nvPr/>
+        </p:nvSpPr>
+        <p:spPr>
+          <a:xfrm>
+            <a:off x="5040172" y="3456432"/>
+            <a:ext cx="1852574" cy="219456"/>
           </a:xfrm>
           <a:prstGeom prst="rect">
             <a:avLst/>
@@ -8229,7 +9116,63 @@
               </a:spcAft>
             </a:pPr>
             <a:r>
-              <a:rPr sz="1200" b="1">
+              <a:rPr sz="1050" b="1">
+                <a:solidFill>
+                  <a:srgbClr val="6E767F"/>
+                </a:solidFill>
+                <a:latin typeface="Noto Sans JP"/>
+                <a:ea typeface="Noto Sans JP"/>
+              </a:rPr>
+              <a:t>箱を建てる</a:t>
+            </a:r>
+          </a:p>
+        </p:txBody>
+      </p:sp>
+      <p:sp>
+        <p:nvSpPr>
+          <p:cNvPr id="35" name="TextBox 34"/>
+          <p:cNvSpPr txBox="1"/>
+          <p:nvPr/>
+        </p:nvSpPr>
+        <p:spPr>
+          <a:xfrm>
+            <a:off x="5040172" y="3822191"/>
+            <a:ext cx="1852574" cy="310896"/>
+          </a:xfrm>
+          <a:prstGeom prst="rect">
+            <a:avLst/>
+          </a:prstGeom>
+          <a:noFill/>
+        </p:spPr>
+        <p:txBody>
+          <a:bodyPr wrap="square" anchor="t" lIns="0" rIns="0" tIns="0" bIns="0">
+            <a:spAutoFit/>
+          </a:bodyPr>
+          <a:lstStyle/>
+          <a:p>
+            <a:pPr algn="l">
+              <a:lnSpc>
+                <a:spcPct val="110000"/>
+              </a:lnSpc>
+              <a:spcBef>
+                <a:spcPts val="0"/>
+              </a:spcBef>
+              <a:spcAft>
+                <a:spcPts val="400"/>
+              </a:spcAft>
+            </a:pPr>
+            <a:r>
+              <a:rPr sz="1100" b="1">
+                <a:solidFill>
+                  <a:srgbClr val="E60012"/>
+                </a:solidFill>
+                <a:latin typeface="Noto Sans JP"/>
+                <a:ea typeface="Noto Sans JP"/>
+              </a:rPr>
+              <a:t>・</a:t>
+            </a:r>
+            <a:r>
+              <a:rPr sz="1250" b="1">
                 <a:solidFill>
                   <a:srgbClr val="373C43"/>
                 </a:solidFill>
@@ -8243,14 +9186,14 @@
       </p:sp>
       <p:sp>
         <p:nvSpPr>
-          <p:cNvPr id="27" name="TextBox 26"/>
-          <p:cNvSpPr txBox="1"/>
-          <p:nvPr/>
-        </p:nvSpPr>
-        <p:spPr>
-          <a:xfrm>
-            <a:off x="5040172" y="3721608"/>
-            <a:ext cx="1870862" cy="310896"/>
+          <p:cNvPr id="36" name="TextBox 35"/>
+          <p:cNvSpPr txBox="1"/>
+          <p:nvPr/>
+        </p:nvSpPr>
+        <p:spPr>
+          <a:xfrm>
+            <a:off x="5040172" y="4187952"/>
+            <a:ext cx="1852574" cy="310896"/>
           </a:xfrm>
           <a:prstGeom prst="rect">
             <a:avLst/>
@@ -8275,7 +9218,17 @@
               </a:spcAft>
             </a:pPr>
             <a:r>
-              <a:rPr sz="1200" b="1">
+              <a:rPr sz="1100" b="1">
+                <a:solidFill>
+                  <a:srgbClr val="E60012"/>
+                </a:solidFill>
+                <a:latin typeface="Noto Sans JP"/>
+                <a:ea typeface="Noto Sans JP"/>
+              </a:rPr>
+              <a:t>・</a:t>
+            </a:r>
+            <a:r>
+              <a:rPr sz="1250" b="1">
                 <a:solidFill>
                   <a:srgbClr val="373C43"/>
                 </a:solidFill>
@@ -8289,14 +9242,14 @@
       </p:sp>
       <p:sp>
         <p:nvSpPr>
-          <p:cNvPr id="28" name="TextBox 27"/>
-          <p:cNvSpPr txBox="1"/>
-          <p:nvPr/>
-        </p:nvSpPr>
-        <p:spPr>
-          <a:xfrm>
-            <a:off x="5040172" y="4105656"/>
-            <a:ext cx="1870862" cy="310896"/>
+          <p:cNvPr id="37" name="TextBox 36"/>
+          <p:cNvSpPr txBox="1"/>
+          <p:nvPr/>
+        </p:nvSpPr>
+        <p:spPr>
+          <a:xfrm>
+            <a:off x="5040172" y="4553712"/>
+            <a:ext cx="1852574" cy="310896"/>
           </a:xfrm>
           <a:prstGeom prst="rect">
             <a:avLst/>
@@ -8321,7 +9274,17 @@
               </a:spcAft>
             </a:pPr>
             <a:r>
-              <a:rPr sz="1200" b="1">
+              <a:rPr sz="1100" b="1">
+                <a:solidFill>
+                  <a:srgbClr val="E60012"/>
+                </a:solidFill>
+                <a:latin typeface="Noto Sans JP"/>
+                <a:ea typeface="Noto Sans JP"/>
+              </a:rPr>
+              <a:t>・</a:t>
+            </a:r>
+            <a:r>
+              <a:rPr sz="1250" b="1">
                 <a:solidFill>
                   <a:srgbClr val="373C43"/>
                 </a:solidFill>
@@ -8335,14 +9298,14 @@
       </p:sp>
       <p:sp>
         <p:nvSpPr>
-          <p:cNvPr id="29" name="TextBox 28"/>
-          <p:cNvSpPr txBox="1"/>
-          <p:nvPr/>
-        </p:nvSpPr>
-        <p:spPr>
-          <a:xfrm>
-            <a:off x="5040172" y="4489704"/>
-            <a:ext cx="1870862" cy="310896"/>
+          <p:cNvPr id="38" name="TextBox 37"/>
+          <p:cNvSpPr txBox="1"/>
+          <p:nvPr/>
+        </p:nvSpPr>
+        <p:spPr>
+          <a:xfrm>
+            <a:off x="5040172" y="4919472"/>
+            <a:ext cx="1852574" cy="310896"/>
           </a:xfrm>
           <a:prstGeom prst="rect">
             <a:avLst/>
@@ -8367,7 +9330,17 @@
               </a:spcAft>
             </a:pPr>
             <a:r>
-              <a:rPr sz="1200" b="1">
+              <a:rPr sz="1100" b="1">
+                <a:solidFill>
+                  <a:srgbClr val="E60012"/>
+                </a:solidFill>
+                <a:latin typeface="Noto Sans JP"/>
+                <a:ea typeface="Noto Sans JP"/>
+              </a:rPr>
+              <a:t>・</a:t>
+            </a:r>
+            <a:r>
+              <a:rPr sz="1250" b="1">
                 <a:solidFill>
                   <a:srgbClr val="373C43"/>
                 </a:solidFill>
@@ -8381,14 +9354,14 @@
       </p:sp>
       <p:sp>
         <p:nvSpPr>
-          <p:cNvPr id="30" name="Rectangle 29"/>
+          <p:cNvPr id="39" name="Rectangle 38"/>
           <p:cNvSpPr/>
           <p:nvPr/>
         </p:nvSpPr>
         <p:spPr>
           <a:xfrm>
-            <a:off x="7039051" y="2514600"/>
-            <a:ext cx="15240" cy="2331720"/>
+            <a:off x="7039051" y="2670048"/>
+            <a:ext cx="12700" cy="2377440"/>
           </a:xfrm>
           <a:prstGeom prst="rect">
             <a:avLst/>
@@ -8425,14 +9398,58 @@
       </p:sp>
       <p:sp>
         <p:nvSpPr>
-          <p:cNvPr id="31" name="TextBox 30"/>
-          <p:cNvSpPr txBox="1"/>
-          <p:nvPr/>
-        </p:nvSpPr>
-        <p:spPr>
-          <a:xfrm>
-            <a:off x="7148779" y="2514600"/>
-            <a:ext cx="1834286" cy="201168"/>
+          <p:cNvPr id="40" name="Rectangle 39"/>
+          <p:cNvSpPr/>
+          <p:nvPr/>
+        </p:nvSpPr>
+        <p:spPr>
+          <a:xfrm>
+            <a:off x="7148779" y="2670048"/>
+            <a:ext cx="1852574" cy="54864"/>
+          </a:xfrm>
+          <a:prstGeom prst="rect">
+            <a:avLst/>
+          </a:prstGeom>
+          <a:solidFill>
+            <a:srgbClr val="E60012"/>
+          </a:solidFill>
+          <a:ln>
+            <a:noFill/>
+          </a:ln>
+          <a:effectLst/>
+        </p:spPr>
+        <p:style>
+          <a:lnRef idx="1">
+            <a:schemeClr val="accent1"/>
+          </a:lnRef>
+          <a:fillRef idx="3">
+            <a:schemeClr val="accent1"/>
+          </a:fillRef>
+          <a:effectRef idx="2">
+            <a:schemeClr val="accent1"/>
+          </a:effectRef>
+          <a:fontRef idx="minor">
+            <a:schemeClr val="lt1"/>
+          </a:fontRef>
+        </p:style>
+        <p:txBody>
+          <a:bodyPr rtlCol="0" anchor="ctr"/>
+          <a:lstStyle/>
+          <a:p>
+            <a:pPr algn="ctr"/>
+          </a:p>
+        </p:txBody>
+      </p:sp>
+      <p:sp>
+        <p:nvSpPr>
+          <p:cNvPr id="41" name="TextBox 40"/>
+          <p:cNvSpPr txBox="1"/>
+          <p:nvPr/>
+        </p:nvSpPr>
+        <p:spPr>
+          <a:xfrm>
+            <a:off x="7148779" y="2816352"/>
+            <a:ext cx="1852574" cy="201168"/>
           </a:xfrm>
           <a:prstGeom prst="rect">
             <a:avLst/>
@@ -8471,14 +9488,14 @@
       </p:sp>
       <p:sp>
         <p:nvSpPr>
-          <p:cNvPr id="32" name="TextBox 31"/>
-          <p:cNvSpPr txBox="1"/>
-          <p:nvPr/>
-        </p:nvSpPr>
-        <p:spPr>
-          <a:xfrm>
-            <a:off x="7148779" y="2770632"/>
-            <a:ext cx="1870862" cy="457200"/>
+          <p:cNvPr id="42" name="TextBox 41"/>
+          <p:cNvSpPr txBox="1"/>
+          <p:nvPr/>
+        </p:nvSpPr>
+        <p:spPr>
+          <a:xfrm>
+            <a:off x="7148779" y="3054096"/>
+            <a:ext cx="1852574" cy="365760"/>
           </a:xfrm>
           <a:prstGeom prst="rect">
             <a:avLst/>
@@ -8493,7 +9510,7 @@
           <a:p>
             <a:pPr algn="l">
               <a:lnSpc>
-                <a:spcPct val="106000"/>
+                <a:spcPct val="105000"/>
               </a:lnSpc>
               <a:spcBef>
                 <a:spcPts val="0"/>
@@ -8517,14 +9534,14 @@
       </p:sp>
       <p:sp>
         <p:nvSpPr>
-          <p:cNvPr id="33" name="TextBox 32"/>
-          <p:cNvSpPr txBox="1"/>
-          <p:nvPr/>
-        </p:nvSpPr>
-        <p:spPr>
-          <a:xfrm>
-            <a:off x="7148779" y="3337560"/>
-            <a:ext cx="1870862" cy="310896"/>
+          <p:cNvPr id="43" name="TextBox 42"/>
+          <p:cNvSpPr txBox="1"/>
+          <p:nvPr/>
+        </p:nvSpPr>
+        <p:spPr>
+          <a:xfrm>
+            <a:off x="7148779" y="3456432"/>
+            <a:ext cx="1852574" cy="219456"/>
           </a:xfrm>
           <a:prstGeom prst="rect">
             <a:avLst/>
@@ -8549,7 +9566,63 @@
               </a:spcAft>
             </a:pPr>
             <a:r>
-              <a:rPr sz="1200" b="1">
+              <a:rPr sz="1050" b="1">
+                <a:solidFill>
+                  <a:srgbClr val="6E767F"/>
+                </a:solidFill>
+                <a:latin typeface="Noto Sans JP"/>
+                <a:ea typeface="Noto Sans JP"/>
+              </a:rPr>
+              <a:t>冷やす・止めない</a:t>
+            </a:r>
+          </a:p>
+        </p:txBody>
+      </p:sp>
+      <p:sp>
+        <p:nvSpPr>
+          <p:cNvPr id="44" name="TextBox 43"/>
+          <p:cNvSpPr txBox="1"/>
+          <p:nvPr/>
+        </p:nvSpPr>
+        <p:spPr>
+          <a:xfrm>
+            <a:off x="7148779" y="3822191"/>
+            <a:ext cx="1852574" cy="310896"/>
+          </a:xfrm>
+          <a:prstGeom prst="rect">
+            <a:avLst/>
+          </a:prstGeom>
+          <a:noFill/>
+        </p:spPr>
+        <p:txBody>
+          <a:bodyPr wrap="square" anchor="t" lIns="0" rIns="0" tIns="0" bIns="0">
+            <a:spAutoFit/>
+          </a:bodyPr>
+          <a:lstStyle/>
+          <a:p>
+            <a:pPr algn="l">
+              <a:lnSpc>
+                <a:spcPct val="110000"/>
+              </a:lnSpc>
+              <a:spcBef>
+                <a:spcPts val="0"/>
+              </a:spcBef>
+              <a:spcAft>
+                <a:spcPts val="400"/>
+              </a:spcAft>
+            </a:pPr>
+            <a:r>
+              <a:rPr sz="1100" b="1">
+                <a:solidFill>
+                  <a:srgbClr val="E60012"/>
+                </a:solidFill>
+                <a:latin typeface="Noto Sans JP"/>
+                <a:ea typeface="Noto Sans JP"/>
+              </a:rPr>
+              <a:t>・</a:t>
+            </a:r>
+            <a:r>
+              <a:rPr sz="1250" b="1">
                 <a:solidFill>
                   <a:srgbClr val="373C43"/>
                 </a:solidFill>
@@ -8563,14 +9636,14 @@
       </p:sp>
       <p:sp>
         <p:nvSpPr>
-          <p:cNvPr id="34" name="TextBox 33"/>
-          <p:cNvSpPr txBox="1"/>
-          <p:nvPr/>
-        </p:nvSpPr>
-        <p:spPr>
-          <a:xfrm>
-            <a:off x="7148779" y="3721608"/>
-            <a:ext cx="1870862" cy="310896"/>
+          <p:cNvPr id="45" name="TextBox 44"/>
+          <p:cNvSpPr txBox="1"/>
+          <p:nvPr/>
+        </p:nvSpPr>
+        <p:spPr>
+          <a:xfrm>
+            <a:off x="7148779" y="4187952"/>
+            <a:ext cx="1852574" cy="310896"/>
           </a:xfrm>
           <a:prstGeom prst="rect">
             <a:avLst/>
@@ -8595,7 +9668,17 @@
               </a:spcAft>
             </a:pPr>
             <a:r>
-              <a:rPr sz="1200" b="1">
+              <a:rPr sz="1100" b="1">
+                <a:solidFill>
+                  <a:srgbClr val="E60012"/>
+                </a:solidFill>
+                <a:latin typeface="Noto Sans JP"/>
+                <a:ea typeface="Noto Sans JP"/>
+              </a:rPr>
+              <a:t>・</a:t>
+            </a:r>
+            <a:r>
+              <a:rPr sz="1250" b="1">
                 <a:solidFill>
                   <a:srgbClr val="373C43"/>
                 </a:solidFill>
@@ -8609,14 +9692,14 @@
       </p:sp>
       <p:sp>
         <p:nvSpPr>
-          <p:cNvPr id="35" name="TextBox 34"/>
-          <p:cNvSpPr txBox="1"/>
-          <p:nvPr/>
-        </p:nvSpPr>
-        <p:spPr>
-          <a:xfrm>
-            <a:off x="7148779" y="4105656"/>
-            <a:ext cx="1870862" cy="310896"/>
+          <p:cNvPr id="46" name="TextBox 45"/>
+          <p:cNvSpPr txBox="1"/>
+          <p:nvPr/>
+        </p:nvSpPr>
+        <p:spPr>
+          <a:xfrm>
+            <a:off x="7148779" y="4553712"/>
+            <a:ext cx="1852574" cy="310896"/>
           </a:xfrm>
           <a:prstGeom prst="rect">
             <a:avLst/>
@@ -8641,7 +9724,17 @@
               </a:spcAft>
             </a:pPr>
             <a:r>
-              <a:rPr sz="1200" b="1">
+              <a:rPr sz="1100" b="1">
+                <a:solidFill>
+                  <a:srgbClr val="E60012"/>
+                </a:solidFill>
+                <a:latin typeface="Noto Sans JP"/>
+                <a:ea typeface="Noto Sans JP"/>
+              </a:rPr>
+              <a:t>・</a:t>
+            </a:r>
+            <a:r>
+              <a:rPr sz="1250" b="1">
                 <a:solidFill>
                   <a:srgbClr val="373C43"/>
                 </a:solidFill>
@@ -8655,14 +9748,14 @@
       </p:sp>
       <p:sp>
         <p:nvSpPr>
-          <p:cNvPr id="36" name="Rectangle 35"/>
+          <p:cNvPr id="47" name="Rectangle 46"/>
           <p:cNvSpPr/>
           <p:nvPr/>
         </p:nvSpPr>
         <p:spPr>
           <a:xfrm>
-            <a:off x="9147657" y="2514600"/>
-            <a:ext cx="15240" cy="2331720"/>
+            <a:off x="9147657" y="2670048"/>
+            <a:ext cx="12700" cy="2377440"/>
           </a:xfrm>
           <a:prstGeom prst="rect">
             <a:avLst/>
@@ -8699,290 +9792,14 @@
       </p:sp>
       <p:sp>
         <p:nvSpPr>
-          <p:cNvPr id="37" name="TextBox 36"/>
-          <p:cNvSpPr txBox="1"/>
-          <p:nvPr/>
-        </p:nvSpPr>
-        <p:spPr>
-          <a:xfrm>
-            <a:off x="9257385" y="2514600"/>
-            <a:ext cx="1834286" cy="201168"/>
-          </a:xfrm>
-          <a:prstGeom prst="rect">
-            <a:avLst/>
-          </a:prstGeom>
-          <a:noFill/>
-        </p:spPr>
-        <p:txBody>
-          <a:bodyPr wrap="square" anchor="t" lIns="0" rIns="0" tIns="0" bIns="0">
-            <a:spAutoFit/>
-          </a:bodyPr>
-          <a:lstStyle/>
-          <a:p>
-            <a:pPr algn="l">
-              <a:lnSpc>
-                <a:spcPct val="110000"/>
-              </a:lnSpc>
-              <a:spcBef>
-                <a:spcPts val="0"/>
-              </a:spcBef>
-              <a:spcAft>
-                <a:spcPts val="400"/>
-              </a:spcAft>
-            </a:pPr>
-            <a:r>
-              <a:rPr sz="1000" b="1" spc="100">
-                <a:solidFill>
-                  <a:srgbClr val="9AA1A9"/>
-                </a:solidFill>
-                <a:latin typeface="Consolas"/>
-                <a:ea typeface="Consolas"/>
-              </a:rPr>
-              <a:t>05</a:t>
-            </a:r>
-          </a:p>
-        </p:txBody>
-      </p:sp>
-      <p:sp>
-        <p:nvSpPr>
-          <p:cNvPr id="38" name="TextBox 37"/>
-          <p:cNvSpPr txBox="1"/>
-          <p:nvPr/>
-        </p:nvSpPr>
-        <p:spPr>
-          <a:xfrm>
-            <a:off x="9257385" y="2770632"/>
-            <a:ext cx="1870862" cy="457200"/>
-          </a:xfrm>
-          <a:prstGeom prst="rect">
-            <a:avLst/>
-          </a:prstGeom>
-          <a:noFill/>
-        </p:spPr>
-        <p:txBody>
-          <a:bodyPr wrap="square" anchor="t" lIns="0" rIns="0" tIns="0" bIns="0">
-            <a:spAutoFit/>
-          </a:bodyPr>
-          <a:lstStyle/>
-          <a:p>
-            <a:pPr algn="l">
-              <a:lnSpc>
-                <a:spcPct val="106000"/>
-              </a:lnSpc>
-              <a:spcBef>
-                <a:spcPts val="0"/>
-              </a:spcBef>
-              <a:spcAft>
-                <a:spcPts val="400"/>
-              </a:spcAft>
-            </a:pPr>
-            <a:r>
-              <a:rPr sz="1400" b="1">
-                <a:solidFill>
-                  <a:srgbClr val="15181C"/>
-                </a:solidFill>
-                <a:latin typeface="Noto Sans JP"/>
-                <a:ea typeface="Noto Sans JP"/>
-              </a:rPr>
-              <a:t>半導体</a:t>
-            </a:r>
-          </a:p>
-        </p:txBody>
-      </p:sp>
-      <p:sp>
-        <p:nvSpPr>
-          <p:cNvPr id="39" name="TextBox 38"/>
-          <p:cNvSpPr txBox="1"/>
-          <p:nvPr/>
-        </p:nvSpPr>
-        <p:spPr>
-          <a:xfrm>
-            <a:off x="9257385" y="3337560"/>
-            <a:ext cx="1870862" cy="310896"/>
-          </a:xfrm>
-          <a:prstGeom prst="rect">
-            <a:avLst/>
-          </a:prstGeom>
-          <a:noFill/>
-        </p:spPr>
-        <p:txBody>
-          <a:bodyPr wrap="square" anchor="t" lIns="0" rIns="0" tIns="0" bIns="0">
-            <a:spAutoFit/>
-          </a:bodyPr>
-          <a:lstStyle/>
-          <a:p>
-            <a:pPr algn="l">
-              <a:lnSpc>
-                <a:spcPct val="110000"/>
-              </a:lnSpc>
-              <a:spcBef>
-                <a:spcPts val="0"/>
-              </a:spcBef>
-              <a:spcAft>
-                <a:spcPts val="400"/>
-              </a:spcAft>
-            </a:pPr>
-            <a:r>
-              <a:rPr sz="1200" b="1">
-                <a:solidFill>
-                  <a:srgbClr val="373C43"/>
-                </a:solidFill>
-                <a:latin typeface="Noto Sans JP"/>
-                <a:ea typeface="Noto Sans JP"/>
-              </a:rPr>
-              <a:t>東京エレクトロン</a:t>
-            </a:r>
-          </a:p>
-        </p:txBody>
-      </p:sp>
-      <p:sp>
-        <p:nvSpPr>
-          <p:cNvPr id="40" name="TextBox 39"/>
-          <p:cNvSpPr txBox="1"/>
-          <p:nvPr/>
-        </p:nvSpPr>
-        <p:spPr>
-          <a:xfrm>
-            <a:off x="9257385" y="3721608"/>
-            <a:ext cx="1870862" cy="310896"/>
-          </a:xfrm>
-          <a:prstGeom prst="rect">
-            <a:avLst/>
-          </a:prstGeom>
-          <a:noFill/>
-        </p:spPr>
-        <p:txBody>
-          <a:bodyPr wrap="square" anchor="t" lIns="0" rIns="0" tIns="0" bIns="0">
-            <a:spAutoFit/>
-          </a:bodyPr>
-          <a:lstStyle/>
-          <a:p>
-            <a:pPr algn="l">
-              <a:lnSpc>
-                <a:spcPct val="110000"/>
-              </a:lnSpc>
-              <a:spcBef>
-                <a:spcPts val="0"/>
-              </a:spcBef>
-              <a:spcAft>
-                <a:spcPts val="400"/>
-              </a:spcAft>
-            </a:pPr>
-            <a:r>
-              <a:rPr sz="1200" b="1">
-                <a:solidFill>
-                  <a:srgbClr val="373C43"/>
-                </a:solidFill>
-                <a:latin typeface="Noto Sans JP"/>
-                <a:ea typeface="Noto Sans JP"/>
-              </a:rPr>
-              <a:t>ディスコ</a:t>
-            </a:r>
-          </a:p>
-        </p:txBody>
-      </p:sp>
-      <p:sp>
-        <p:nvSpPr>
-          <p:cNvPr id="41" name="TextBox 40"/>
-          <p:cNvSpPr txBox="1"/>
-          <p:nvPr/>
-        </p:nvSpPr>
-        <p:spPr>
-          <a:xfrm>
-            <a:off x="9257385" y="4105656"/>
-            <a:ext cx="1870862" cy="310896"/>
-          </a:xfrm>
-          <a:prstGeom prst="rect">
-            <a:avLst/>
-          </a:prstGeom>
-          <a:noFill/>
-        </p:spPr>
-        <p:txBody>
-          <a:bodyPr wrap="square" anchor="t" lIns="0" rIns="0" tIns="0" bIns="0">
-            <a:spAutoFit/>
-          </a:bodyPr>
-          <a:lstStyle/>
-          <a:p>
-            <a:pPr algn="l">
-              <a:lnSpc>
-                <a:spcPct val="110000"/>
-              </a:lnSpc>
-              <a:spcBef>
-                <a:spcPts val="0"/>
-              </a:spcBef>
-              <a:spcAft>
-                <a:spcPts val="400"/>
-              </a:spcAft>
-            </a:pPr>
-            <a:r>
-              <a:rPr sz="1200" b="1">
-                <a:solidFill>
-                  <a:srgbClr val="373C43"/>
-                </a:solidFill>
-                <a:latin typeface="Noto Sans JP"/>
-                <a:ea typeface="Noto Sans JP"/>
-              </a:rPr>
-              <a:t>キオクシア</a:t>
-            </a:r>
-          </a:p>
-        </p:txBody>
-      </p:sp>
-      <p:sp>
-        <p:nvSpPr>
-          <p:cNvPr id="42" name="TextBox 41"/>
-          <p:cNvSpPr txBox="1"/>
-          <p:nvPr/>
-        </p:nvSpPr>
-        <p:spPr>
-          <a:xfrm>
-            <a:off x="9257385" y="4489704"/>
-            <a:ext cx="1870862" cy="310896"/>
-          </a:xfrm>
-          <a:prstGeom prst="rect">
-            <a:avLst/>
-          </a:prstGeom>
-          <a:noFill/>
-        </p:spPr>
-        <p:txBody>
-          <a:bodyPr wrap="square" anchor="t" lIns="0" rIns="0" tIns="0" bIns="0">
-            <a:spAutoFit/>
-          </a:bodyPr>
-          <a:lstStyle/>
-          <a:p>
-            <a:pPr algn="l">
-              <a:lnSpc>
-                <a:spcPct val="110000"/>
-              </a:lnSpc>
-              <a:spcBef>
-                <a:spcPts val="0"/>
-              </a:spcBef>
-              <a:spcAft>
-                <a:spcPts val="400"/>
-              </a:spcAft>
-            </a:pPr>
-            <a:r>
-              <a:rPr sz="1200" b="1">
-                <a:solidFill>
-                  <a:srgbClr val="373C43"/>
-                </a:solidFill>
-                <a:latin typeface="Noto Sans JP"/>
-                <a:ea typeface="Noto Sans JP"/>
-              </a:rPr>
-              <a:t>信越化学</a:t>
-            </a:r>
-          </a:p>
-        </p:txBody>
-      </p:sp>
-      <p:sp>
-        <p:nvSpPr>
-          <p:cNvPr id="43" name="Rectangle 42"/>
+          <p:cNvPr id="48" name="Rectangle 47"/>
           <p:cNvSpPr/>
           <p:nvPr/>
         </p:nvSpPr>
         <p:spPr>
           <a:xfrm>
-            <a:off x="822960" y="5257800"/>
-            <a:ext cx="82296" cy="438912"/>
+            <a:off x="9257385" y="2670048"/>
+            <a:ext cx="1852574" cy="54864"/>
           </a:xfrm>
           <a:prstGeom prst="rect">
             <a:avLst/>
@@ -9019,14 +9836,420 @@
       </p:sp>
       <p:sp>
         <p:nvSpPr>
-          <p:cNvPr id="44" name="TextBox 43"/>
-          <p:cNvSpPr txBox="1"/>
-          <p:nvPr/>
-        </p:nvSpPr>
-        <p:spPr>
-          <a:xfrm>
-            <a:off x="1078992" y="5212080"/>
-            <a:ext cx="10268711" cy="530352"/>
+          <p:cNvPr id="49" name="TextBox 48"/>
+          <p:cNvSpPr txBox="1"/>
+          <p:nvPr/>
+        </p:nvSpPr>
+        <p:spPr>
+          <a:xfrm>
+            <a:off x="9257385" y="2816352"/>
+            <a:ext cx="1852574" cy="201168"/>
+          </a:xfrm>
+          <a:prstGeom prst="rect">
+            <a:avLst/>
+          </a:prstGeom>
+          <a:noFill/>
+        </p:spPr>
+        <p:txBody>
+          <a:bodyPr wrap="square" anchor="t" lIns="0" rIns="0" tIns="0" bIns="0">
+            <a:spAutoFit/>
+          </a:bodyPr>
+          <a:lstStyle/>
+          <a:p>
+            <a:pPr algn="l">
+              <a:lnSpc>
+                <a:spcPct val="110000"/>
+              </a:lnSpc>
+              <a:spcBef>
+                <a:spcPts val="0"/>
+              </a:spcBef>
+              <a:spcAft>
+                <a:spcPts val="400"/>
+              </a:spcAft>
+            </a:pPr>
+            <a:r>
+              <a:rPr sz="1000" b="1" spc="100">
+                <a:solidFill>
+                  <a:srgbClr val="9AA1A9"/>
+                </a:solidFill>
+                <a:latin typeface="Consolas"/>
+                <a:ea typeface="Consolas"/>
+              </a:rPr>
+              <a:t>05</a:t>
+            </a:r>
+          </a:p>
+        </p:txBody>
+      </p:sp>
+      <p:sp>
+        <p:nvSpPr>
+          <p:cNvPr id="50" name="TextBox 49"/>
+          <p:cNvSpPr txBox="1"/>
+          <p:nvPr/>
+        </p:nvSpPr>
+        <p:spPr>
+          <a:xfrm>
+            <a:off x="9257385" y="3054096"/>
+            <a:ext cx="1852574" cy="365760"/>
+          </a:xfrm>
+          <a:prstGeom prst="rect">
+            <a:avLst/>
+          </a:prstGeom>
+          <a:noFill/>
+        </p:spPr>
+        <p:txBody>
+          <a:bodyPr wrap="square" anchor="t" lIns="0" rIns="0" tIns="0" bIns="0">
+            <a:spAutoFit/>
+          </a:bodyPr>
+          <a:lstStyle/>
+          <a:p>
+            <a:pPr algn="l">
+              <a:lnSpc>
+                <a:spcPct val="105000"/>
+              </a:lnSpc>
+              <a:spcBef>
+                <a:spcPts val="0"/>
+              </a:spcBef>
+              <a:spcAft>
+                <a:spcPts val="400"/>
+              </a:spcAft>
+            </a:pPr>
+            <a:r>
+              <a:rPr sz="1400" b="1">
+                <a:solidFill>
+                  <a:srgbClr val="15181C"/>
+                </a:solidFill>
+                <a:latin typeface="Noto Sans JP"/>
+                <a:ea typeface="Noto Sans JP"/>
+              </a:rPr>
+              <a:t>半導体</a:t>
+            </a:r>
+          </a:p>
+        </p:txBody>
+      </p:sp>
+      <p:sp>
+        <p:nvSpPr>
+          <p:cNvPr id="51" name="TextBox 50"/>
+          <p:cNvSpPr txBox="1"/>
+          <p:nvPr/>
+        </p:nvSpPr>
+        <p:spPr>
+          <a:xfrm>
+            <a:off x="9257385" y="3456432"/>
+            <a:ext cx="1852574" cy="219456"/>
+          </a:xfrm>
+          <a:prstGeom prst="rect">
+            <a:avLst/>
+          </a:prstGeom>
+          <a:noFill/>
+        </p:spPr>
+        <p:txBody>
+          <a:bodyPr wrap="square" anchor="t" lIns="0" rIns="0" tIns="0" bIns="0">
+            <a:spAutoFit/>
+          </a:bodyPr>
+          <a:lstStyle/>
+          <a:p>
+            <a:pPr algn="l">
+              <a:lnSpc>
+                <a:spcPct val="110000"/>
+              </a:lnSpc>
+              <a:spcBef>
+                <a:spcPts val="0"/>
+              </a:spcBef>
+              <a:spcAft>
+                <a:spcPts val="400"/>
+              </a:spcAft>
+            </a:pPr>
+            <a:r>
+              <a:rPr sz="1050" b="1">
+                <a:solidFill>
+                  <a:srgbClr val="6E767F"/>
+                </a:solidFill>
+                <a:latin typeface="Noto Sans JP"/>
+                <a:ea typeface="Noto Sans JP"/>
+              </a:rPr>
+              <a:t>計算する頭脳</a:t>
+            </a:r>
+          </a:p>
+        </p:txBody>
+      </p:sp>
+      <p:sp>
+        <p:nvSpPr>
+          <p:cNvPr id="52" name="TextBox 51"/>
+          <p:cNvSpPr txBox="1"/>
+          <p:nvPr/>
+        </p:nvSpPr>
+        <p:spPr>
+          <a:xfrm>
+            <a:off x="9257385" y="3822191"/>
+            <a:ext cx="1852574" cy="310896"/>
+          </a:xfrm>
+          <a:prstGeom prst="rect">
+            <a:avLst/>
+          </a:prstGeom>
+          <a:noFill/>
+        </p:spPr>
+        <p:txBody>
+          <a:bodyPr wrap="square" anchor="t" lIns="0" rIns="0" tIns="0" bIns="0">
+            <a:spAutoFit/>
+          </a:bodyPr>
+          <a:lstStyle/>
+          <a:p>
+            <a:pPr algn="l">
+              <a:lnSpc>
+                <a:spcPct val="110000"/>
+              </a:lnSpc>
+              <a:spcBef>
+                <a:spcPts val="0"/>
+              </a:spcBef>
+              <a:spcAft>
+                <a:spcPts val="400"/>
+              </a:spcAft>
+            </a:pPr>
+            <a:r>
+              <a:rPr sz="1100" b="1">
+                <a:solidFill>
+                  <a:srgbClr val="E60012"/>
+                </a:solidFill>
+                <a:latin typeface="Noto Sans JP"/>
+                <a:ea typeface="Noto Sans JP"/>
+              </a:rPr>
+              <a:t>・</a:t>
+            </a:r>
+            <a:r>
+              <a:rPr sz="1250" b="1">
+                <a:solidFill>
+                  <a:srgbClr val="373C43"/>
+                </a:solidFill>
+                <a:latin typeface="Noto Sans JP"/>
+                <a:ea typeface="Noto Sans JP"/>
+              </a:rPr>
+              <a:t>東京エレクトロン</a:t>
+            </a:r>
+          </a:p>
+        </p:txBody>
+      </p:sp>
+      <p:sp>
+        <p:nvSpPr>
+          <p:cNvPr id="53" name="TextBox 52"/>
+          <p:cNvSpPr txBox="1"/>
+          <p:nvPr/>
+        </p:nvSpPr>
+        <p:spPr>
+          <a:xfrm>
+            <a:off x="9257385" y="4187952"/>
+            <a:ext cx="1852574" cy="310896"/>
+          </a:xfrm>
+          <a:prstGeom prst="rect">
+            <a:avLst/>
+          </a:prstGeom>
+          <a:noFill/>
+        </p:spPr>
+        <p:txBody>
+          <a:bodyPr wrap="square" anchor="t" lIns="0" rIns="0" tIns="0" bIns="0">
+            <a:spAutoFit/>
+          </a:bodyPr>
+          <a:lstStyle/>
+          <a:p>
+            <a:pPr algn="l">
+              <a:lnSpc>
+                <a:spcPct val="110000"/>
+              </a:lnSpc>
+              <a:spcBef>
+                <a:spcPts val="0"/>
+              </a:spcBef>
+              <a:spcAft>
+                <a:spcPts val="400"/>
+              </a:spcAft>
+            </a:pPr>
+            <a:r>
+              <a:rPr sz="1100" b="1">
+                <a:solidFill>
+                  <a:srgbClr val="E60012"/>
+                </a:solidFill>
+                <a:latin typeface="Noto Sans JP"/>
+                <a:ea typeface="Noto Sans JP"/>
+              </a:rPr>
+              <a:t>・</a:t>
+            </a:r>
+            <a:r>
+              <a:rPr sz="1250" b="1">
+                <a:solidFill>
+                  <a:srgbClr val="373C43"/>
+                </a:solidFill>
+                <a:latin typeface="Noto Sans JP"/>
+                <a:ea typeface="Noto Sans JP"/>
+              </a:rPr>
+              <a:t>ディスコ</a:t>
+            </a:r>
+          </a:p>
+        </p:txBody>
+      </p:sp>
+      <p:sp>
+        <p:nvSpPr>
+          <p:cNvPr id="54" name="TextBox 53"/>
+          <p:cNvSpPr txBox="1"/>
+          <p:nvPr/>
+        </p:nvSpPr>
+        <p:spPr>
+          <a:xfrm>
+            <a:off x="9257385" y="4553712"/>
+            <a:ext cx="1852574" cy="310896"/>
+          </a:xfrm>
+          <a:prstGeom prst="rect">
+            <a:avLst/>
+          </a:prstGeom>
+          <a:noFill/>
+        </p:spPr>
+        <p:txBody>
+          <a:bodyPr wrap="square" anchor="t" lIns="0" rIns="0" tIns="0" bIns="0">
+            <a:spAutoFit/>
+          </a:bodyPr>
+          <a:lstStyle/>
+          <a:p>
+            <a:pPr algn="l">
+              <a:lnSpc>
+                <a:spcPct val="110000"/>
+              </a:lnSpc>
+              <a:spcBef>
+                <a:spcPts val="0"/>
+              </a:spcBef>
+              <a:spcAft>
+                <a:spcPts val="400"/>
+              </a:spcAft>
+            </a:pPr>
+            <a:r>
+              <a:rPr sz="1100" b="1">
+                <a:solidFill>
+                  <a:srgbClr val="E60012"/>
+                </a:solidFill>
+                <a:latin typeface="Noto Sans JP"/>
+                <a:ea typeface="Noto Sans JP"/>
+              </a:rPr>
+              <a:t>・</a:t>
+            </a:r>
+            <a:r>
+              <a:rPr sz="1250" b="1">
+                <a:solidFill>
+                  <a:srgbClr val="373C43"/>
+                </a:solidFill>
+                <a:latin typeface="Noto Sans JP"/>
+                <a:ea typeface="Noto Sans JP"/>
+              </a:rPr>
+              <a:t>キオクシア</a:t>
+            </a:r>
+          </a:p>
+        </p:txBody>
+      </p:sp>
+      <p:sp>
+        <p:nvSpPr>
+          <p:cNvPr id="55" name="TextBox 54"/>
+          <p:cNvSpPr txBox="1"/>
+          <p:nvPr/>
+        </p:nvSpPr>
+        <p:spPr>
+          <a:xfrm>
+            <a:off x="9257385" y="4919472"/>
+            <a:ext cx="1852574" cy="310896"/>
+          </a:xfrm>
+          <a:prstGeom prst="rect">
+            <a:avLst/>
+          </a:prstGeom>
+          <a:noFill/>
+        </p:spPr>
+        <p:txBody>
+          <a:bodyPr wrap="square" anchor="t" lIns="0" rIns="0" tIns="0" bIns="0">
+            <a:spAutoFit/>
+          </a:bodyPr>
+          <a:lstStyle/>
+          <a:p>
+            <a:pPr algn="l">
+              <a:lnSpc>
+                <a:spcPct val="110000"/>
+              </a:lnSpc>
+              <a:spcBef>
+                <a:spcPts val="0"/>
+              </a:spcBef>
+              <a:spcAft>
+                <a:spcPts val="400"/>
+              </a:spcAft>
+            </a:pPr>
+            <a:r>
+              <a:rPr sz="1100" b="1">
+                <a:solidFill>
+                  <a:srgbClr val="E60012"/>
+                </a:solidFill>
+                <a:latin typeface="Noto Sans JP"/>
+                <a:ea typeface="Noto Sans JP"/>
+              </a:rPr>
+              <a:t>・</a:t>
+            </a:r>
+            <a:r>
+              <a:rPr sz="1250" b="1">
+                <a:solidFill>
+                  <a:srgbClr val="373C43"/>
+                </a:solidFill>
+                <a:latin typeface="Noto Sans JP"/>
+                <a:ea typeface="Noto Sans JP"/>
+              </a:rPr>
+              <a:t>信越化学</a:t>
+            </a:r>
+          </a:p>
+        </p:txBody>
+      </p:sp>
+      <p:sp>
+        <p:nvSpPr>
+          <p:cNvPr id="56" name="Rectangle 55"/>
+          <p:cNvSpPr/>
+          <p:nvPr/>
+        </p:nvSpPr>
+        <p:spPr>
+          <a:xfrm>
+            <a:off x="822960" y="5294376"/>
+            <a:ext cx="82296" cy="420624"/>
+          </a:xfrm>
+          <a:prstGeom prst="rect">
+            <a:avLst/>
+          </a:prstGeom>
+          <a:solidFill>
+            <a:srgbClr val="E60012"/>
+          </a:solidFill>
+          <a:ln>
+            <a:noFill/>
+          </a:ln>
+          <a:effectLst/>
+        </p:spPr>
+        <p:style>
+          <a:lnRef idx="1">
+            <a:schemeClr val="accent1"/>
+          </a:lnRef>
+          <a:fillRef idx="3">
+            <a:schemeClr val="accent1"/>
+          </a:fillRef>
+          <a:effectRef idx="2">
+            <a:schemeClr val="accent1"/>
+          </a:effectRef>
+          <a:fontRef idx="minor">
+            <a:schemeClr val="lt1"/>
+          </a:fontRef>
+        </p:style>
+        <p:txBody>
+          <a:bodyPr rtlCol="0" anchor="ctr"/>
+          <a:lstStyle/>
+          <a:p>
+            <a:pPr algn="ctr"/>
+          </a:p>
+        </p:txBody>
+      </p:sp>
+      <p:sp>
+        <p:nvSpPr>
+          <p:cNvPr id="57" name="TextBox 56"/>
+          <p:cNvSpPr txBox="1"/>
+          <p:nvPr/>
+        </p:nvSpPr>
+        <p:spPr>
+          <a:xfrm>
+            <a:off x="1078992" y="5248656"/>
+            <a:ext cx="10268711" cy="512064"/>
           </a:xfrm>
           <a:prstGeom prst="rect">
             <a:avLst/>
@@ -9075,13 +10298,13 @@
       </p:sp>
       <p:sp>
         <p:nvSpPr>
-          <p:cNvPr id="45" name="TextBox 44"/>
-          <p:cNvSpPr txBox="1"/>
-          <p:nvPr/>
-        </p:nvSpPr>
-        <p:spPr>
-          <a:xfrm>
-            <a:off x="1078992" y="5833872"/>
+          <p:cNvPr id="58" name="TextBox 57"/>
+          <p:cNvSpPr txBox="1"/>
+          <p:nvPr/>
+        </p:nvSpPr>
+        <p:spPr>
+          <a:xfrm>
+            <a:off x="1078992" y="5852160"/>
             <a:ext cx="10332720" cy="310896"/>
           </a:xfrm>
           <a:prstGeom prst="rect">
@@ -9114,20 +10337,20 @@
                 <a:latin typeface="Noto Sans JP"/>
                 <a:ea typeface="Noto Sans JP"/>
               </a:rPr>
-              <a:t>狙える現場は、この一社一社にある。</a:t>
-            </a:r>
-          </a:p>
-        </p:txBody>
-      </p:sp>
-      <p:sp>
-        <p:nvSpPr>
-          <p:cNvPr id="46" name="TextBox 45"/>
-          <p:cNvSpPr txBox="1"/>
-          <p:nvPr/>
-        </p:nvSpPr>
-        <p:spPr>
-          <a:xfrm>
-            <a:off x="822960" y="6327648"/>
+              <a:t>発電から半導体まで全段が同時に増収増益——狙える現場は、この一社一社にある。</a:t>
+            </a:r>
+          </a:p>
+        </p:txBody>
+      </p:sp>
+      <p:sp>
+        <p:nvSpPr>
+          <p:cNvPr id="59" name="TextBox 58"/>
+          <p:cNvSpPr txBox="1"/>
+          <p:nvPr/>
+        </p:nvSpPr>
+        <p:spPr>
+          <a:xfrm>
+            <a:off x="822960" y="6345936"/>
             <a:ext cx="10607040" cy="256032"/>
           </a:xfrm>
           <a:prstGeom prst="rect">
